--- a/Seminar.pptx
+++ b/Seminar.pptx
@@ -5,15 +5,18 @@
     <p:sldMasterId id="2147483684" r:id="rId1"/>
   </p:sldMasterIdLst>
   <p:notesMasterIdLst>
-    <p:notesMasterId r:id="rId8"/>
+    <p:notesMasterId r:id="rId11"/>
   </p:notesMasterIdLst>
   <p:sldIdLst>
     <p:sldId id="276" r:id="rId2"/>
     <p:sldId id="267" r:id="rId3"/>
-    <p:sldId id="328" r:id="rId4"/>
-    <p:sldId id="327" r:id="rId5"/>
-    <p:sldId id="289" r:id="rId6"/>
-    <p:sldId id="290" r:id="rId7"/>
+    <p:sldId id="329" r:id="rId4"/>
+    <p:sldId id="330" r:id="rId5"/>
+    <p:sldId id="331" r:id="rId6"/>
+    <p:sldId id="328" r:id="rId7"/>
+    <p:sldId id="327" r:id="rId8"/>
+    <p:sldId id="289" r:id="rId9"/>
+    <p:sldId id="290" r:id="rId10"/>
   </p:sldIdLst>
   <p:sldSz cx="12192000" cy="6858000"/>
   <p:notesSz cx="6858000" cy="9144000"/>
@@ -6089,7 +6092,7 @@
                 </a:pPr>
                 <a:r>
                   <a:rPr lang="en-GB" sz="2400" noProof="0" dirty="0"/>
-                  <a:t> The GRB</a:t>
+                  <a:t> The Gamma Ray Bursts (GRBs)</a:t>
                 </a:r>
               </a:p>
               <a:p>
@@ -6104,31 +6107,70 @@
                 </a:r>
                 <a14:m>
                   <m:oMath xmlns:m="http://schemas.openxmlformats.org/officeDocument/2006/math">
-                    <m:sSub>
-                      <m:sSubPr>
+                    <m:func>
+                      <m:funcPr>
                         <m:ctrlPr>
-                          <a:rPr lang="en-GB" sz="2400" i="1" noProof="0" dirty="0" smtClean="0">
+                          <a:rPr lang="it-IT" sz="2400" b="0" i="1" noProof="0" dirty="0" smtClean="0">
                             <a:latin typeface="Cambria Math" panose="02040503050406030204" pitchFamily="18" charset="0"/>
                           </a:rPr>
                         </m:ctrlPr>
-                      </m:sSubPr>
-                      <m:e>
+                      </m:funcPr>
+                      <m:fName>
                         <m:r>
-                          <a:rPr lang="en-GB" sz="2400" i="1" noProof="0" dirty="0" smtClean="0">
+                          <m:rPr>
+                            <m:sty m:val="p"/>
+                          </m:rPr>
+                          <a:rPr lang="it-IT" sz="2400" b="0" i="0" noProof="0" dirty="0" smtClean="0">
                             <a:latin typeface="Cambria Math" panose="02040503050406030204" pitchFamily="18" charset="0"/>
                           </a:rPr>
-                          <m:t>𝑇</m:t>
+                          <m:t>log</m:t>
                         </m:r>
+                      </m:fName>
+                      <m:e>
+                        <m:d>
+                          <m:dPr>
+                            <m:ctrlPr>
+                              <a:rPr lang="it-IT" sz="2400" b="0" i="1" noProof="0" dirty="0" smtClean="0">
+                                <a:latin typeface="Cambria Math" panose="02040503050406030204" pitchFamily="18" charset="0"/>
+                              </a:rPr>
+                            </m:ctrlPr>
+                          </m:dPr>
+                          <m:e>
+                            <m:sSub>
+                              <m:sSubPr>
+                                <m:ctrlPr>
+                                  <a:rPr lang="en-GB" sz="2400" b="0" i="1" noProof="0" dirty="0" smtClean="0">
+                                    <a:latin typeface="Cambria Math" panose="02040503050406030204" pitchFamily="18" charset="0"/>
+                                  </a:rPr>
+                                </m:ctrlPr>
+                              </m:sSubPr>
+                              <m:e>
+                                <m:r>
+                                  <a:rPr lang="en-GB" sz="2400" i="1" noProof="0" dirty="0" smtClean="0">
+                                    <a:latin typeface="Cambria Math" panose="02040503050406030204" pitchFamily="18" charset="0"/>
+                                  </a:rPr>
+                                  <m:t>𝑇</m:t>
+                                </m:r>
+                              </m:e>
+                              <m:sub>
+                                <m:r>
+                                  <a:rPr lang="en-GB" sz="2400" i="1" noProof="0" dirty="0" smtClean="0">
+                                    <a:latin typeface="Cambria Math" panose="02040503050406030204" pitchFamily="18" charset="0"/>
+                                  </a:rPr>
+                                  <m:t>9</m:t>
+                                </m:r>
+                                <m:r>
+                                  <a:rPr lang="it-IT" sz="2400" b="0" i="1" noProof="0" dirty="0" smtClean="0">
+                                    <a:latin typeface="Cambria Math" panose="02040503050406030204" pitchFamily="18" charset="0"/>
+                                  </a:rPr>
+                                  <m:t>0</m:t>
+                                </m:r>
+                              </m:sub>
+                            </m:sSub>
+                          </m:e>
+                        </m:d>
                       </m:e>
-                      <m:sub>
-                        <m:r>
-                          <a:rPr lang="en-GB" sz="2400" i="1" noProof="0" dirty="0" smtClean="0">
-                            <a:latin typeface="Cambria Math" panose="02040503050406030204" pitchFamily="18" charset="0"/>
-                          </a:rPr>
-                          <m:t>90</m:t>
-                        </m:r>
-                      </m:sub>
-                    </m:sSub>
+                    </m:func>
                   </m:oMath>
                 </a14:m>
                 <a:r>
@@ -6143,7 +6185,7 @@
                   <a:buChar char="Ø"/>
                 </a:pPr>
                 <a:r>
-                  <a:rPr lang="en-GB" sz="2400" dirty="0"/>
+                  <a:rPr lang="en-GB" sz="2400" noProof="0" dirty="0"/>
                   <a:t> The parameters</a:t>
                 </a:r>
               </a:p>
@@ -6154,7 +6196,7 @@
                   <a:buChar char="Ø"/>
                 </a:pPr>
                 <a:r>
-                  <a:rPr lang="en-GB" sz="2400" dirty="0"/>
+                  <a:rPr lang="en-GB" sz="2400" noProof="0" dirty="0"/>
                   <a:t> Classifying a GRB </a:t>
                 </a:r>
               </a:p>
@@ -6176,7 +6218,7 @@
                   <a:buChar char="Ø"/>
                 </a:pPr>
                 <a:r>
-                  <a:rPr lang="en-GB" sz="2400" dirty="0"/>
+                  <a:rPr lang="en-GB" sz="2400" noProof="0" dirty="0"/>
                   <a:t> The intermediate class</a:t>
                 </a:r>
               </a:p>
@@ -6195,7 +6237,7 @@
                     <m:func>
                       <m:funcPr>
                         <m:ctrlPr>
-                          <a:rPr lang="en-GB" sz="2400" i="1" noProof="0" dirty="0" smtClean="0">
+                          <a:rPr lang="en-GB" sz="2400" i="1" noProof="0" smtClean="0">
                             <a:latin typeface="Cambria Math" panose="02040503050406030204" pitchFamily="18" charset="0"/>
                           </a:rPr>
                         </m:ctrlPr>
@@ -6205,7 +6247,7 @@
                           <m:rPr>
                             <m:sty m:val="p"/>
                           </m:rPr>
-                          <a:rPr lang="en-GB" sz="2400" i="0" noProof="0" dirty="0" smtClean="0">
+                          <a:rPr lang="en-GB" sz="2400" i="0" noProof="0" smtClean="0">
                             <a:latin typeface="Cambria Math" panose="02040503050406030204" pitchFamily="18" charset="0"/>
                           </a:rPr>
                           <m:t>log</m:t>
@@ -6215,7 +6257,7 @@
                         <m:d>
                           <m:dPr>
                             <m:ctrlPr>
-                              <a:rPr lang="en-GB" sz="2400" i="1" noProof="0" dirty="0" smtClean="0">
+                              <a:rPr lang="en-GB" sz="2400" i="1" noProof="0" smtClean="0">
                                 <a:latin typeface="Cambria Math" panose="02040503050406030204" pitchFamily="18" charset="0"/>
                               </a:rPr>
                             </m:ctrlPr>
@@ -6224,14 +6266,14 @@
                             <m:sSub>
                               <m:sSubPr>
                                 <m:ctrlPr>
-                                  <a:rPr lang="en-GB" sz="2400" i="1" noProof="0" dirty="0" smtClean="0">
+                                  <a:rPr lang="en-GB" sz="2400" i="1" noProof="0" smtClean="0">
                                     <a:latin typeface="Cambria Math" panose="02040503050406030204" pitchFamily="18" charset="0"/>
                                   </a:rPr>
                                 </m:ctrlPr>
                               </m:sSubPr>
                               <m:e>
                                 <m:r>
-                                  <a:rPr lang="en-GB" sz="2400" i="1" noProof="0" dirty="0" smtClean="0">
+                                  <a:rPr lang="en-GB" sz="2400" i="1" noProof="0" smtClean="0">
                                     <a:latin typeface="Cambria Math" panose="02040503050406030204" pitchFamily="18" charset="0"/>
                                   </a:rPr>
                                   <m:t>𝑇</m:t>
@@ -6239,7 +6281,7 @@
                               </m:e>
                               <m:sub>
                                 <m:r>
-                                  <a:rPr lang="en-GB" sz="2400" i="1" noProof="0" dirty="0" smtClean="0">
+                                  <a:rPr lang="en-GB" sz="2400" i="1" noProof="0" smtClean="0">
                                     <a:latin typeface="Cambria Math" panose="02040503050406030204" pitchFamily="18" charset="0"/>
                                   </a:rPr>
                                   <m:t>90</m:t>
@@ -6251,7 +6293,7 @@
                       </m:e>
                     </m:func>
                     <m:r>
-                      <a:rPr lang="en-GB" sz="2400" i="1" noProof="0" dirty="0" smtClean="0">
+                      <a:rPr lang="en-GB" sz="2400" i="1" noProof="0" smtClean="0">
                         <a:latin typeface="Cambria Math" panose="02040503050406030204" pitchFamily="18" charset="0"/>
                       </a:rPr>
                       <m:t>−</m:t>
@@ -6259,7 +6301,7 @@
                     <m:func>
                       <m:funcPr>
                         <m:ctrlPr>
-                          <a:rPr lang="en-GB" sz="2400" i="1" noProof="0" dirty="0" smtClean="0">
+                          <a:rPr lang="en-GB" sz="2400" i="1" noProof="0" smtClean="0">
                             <a:latin typeface="Cambria Math" panose="02040503050406030204" pitchFamily="18" charset="0"/>
                           </a:rPr>
                         </m:ctrlPr>
@@ -6269,7 +6311,7 @@
                           <m:rPr>
                             <m:sty m:val="p"/>
                           </m:rPr>
-                          <a:rPr lang="en-GB" sz="2400" i="0" noProof="0" dirty="0" smtClean="0">
+                          <a:rPr lang="en-GB" sz="2400" i="0" noProof="0" smtClean="0">
                             <a:latin typeface="Cambria Math" panose="02040503050406030204" pitchFamily="18" charset="0"/>
                           </a:rPr>
                           <m:t>log</m:t>
@@ -6279,14 +6321,14 @@
                         <m:d>
                           <m:dPr>
                             <m:ctrlPr>
-                              <a:rPr lang="en-GB" sz="2400" i="1" noProof="0" dirty="0" smtClean="0">
+                              <a:rPr lang="en-GB" sz="2400" i="1" noProof="0" smtClean="0">
                                 <a:latin typeface="Cambria Math" panose="02040503050406030204" pitchFamily="18" charset="0"/>
                               </a:rPr>
                             </m:ctrlPr>
                           </m:dPr>
                           <m:e>
                             <m:r>
-                              <a:rPr lang="en-GB" sz="2400" i="1" noProof="0" dirty="0" smtClean="0">
+                              <a:rPr lang="en-GB" sz="2400" i="1" noProof="0" smtClean="0">
                                 <a:latin typeface="Cambria Math" panose="02040503050406030204" pitchFamily="18" charset="0"/>
                               </a:rPr>
                               <m:t>𝐻𝑅</m:t>
@@ -6380,6 +6422,1684 @@
           <p:cNvPr id="2" name="Titolo 1">
             <a:extLst>
               <a:ext uri="{FF2B5EF4-FFF2-40B4-BE49-F238E27FC236}">
+                <a16:creationId xmlns:a16="http://schemas.microsoft.com/office/drawing/2014/main" id="{9AD7BEB3-6D2B-0567-B22E-4109DDB135B7}"/>
+              </a:ext>
+            </a:extLst>
+          </p:cNvPr>
+          <p:cNvSpPr>
+            <a:spLocks noGrp="1"/>
+          </p:cNvSpPr>
+          <p:nvPr>
+            <p:ph type="title"/>
+          </p:nvPr>
+        </p:nvSpPr>
+        <p:spPr/>
+        <p:txBody>
+          <a:bodyPr/>
+          <a:lstStyle/>
+          <a:p>
+            <a:r>
+              <a:rPr lang="en-GB" noProof="0" dirty="0"/>
+              <a:t>The Gamma Ray Bursts (GRBs)</a:t>
+            </a:r>
+          </a:p>
+        </p:txBody>
+      </p:sp>
+      <p:sp>
+        <p:nvSpPr>
+          <p:cNvPr id="4" name="CasellaDiTesto 3">
+            <a:extLst>
+              <a:ext uri="{FF2B5EF4-FFF2-40B4-BE49-F238E27FC236}">
+                <a16:creationId xmlns:a16="http://schemas.microsoft.com/office/drawing/2014/main" id="{E9487CD5-9F21-E979-7C7C-1BEBF46BF2B3}"/>
+              </a:ext>
+            </a:extLst>
+          </p:cNvPr>
+          <p:cNvSpPr txBox="1"/>
+          <p:nvPr/>
+        </p:nvSpPr>
+        <p:spPr>
+          <a:xfrm>
+            <a:off x="1428108" y="1524000"/>
+            <a:ext cx="6010382" cy="646331"/>
+          </a:xfrm>
+          <a:prstGeom prst="rect">
+            <a:avLst/>
+          </a:prstGeom>
+          <a:noFill/>
+        </p:spPr>
+        <p:txBody>
+          <a:bodyPr wrap="square" rtlCol="0">
+            <a:spAutoFit/>
+          </a:bodyPr>
+          <a:lstStyle/>
+          <a:p>
+            <a:r>
+              <a:rPr lang="en-GB" noProof="0" dirty="0"/>
+              <a:t>They are transient events of energetic photons, with a first peak and then an afterglow  </a:t>
+            </a:r>
+          </a:p>
+        </p:txBody>
+      </p:sp>
+      <p:sp>
+        <p:nvSpPr>
+          <p:cNvPr id="5" name="CasellaDiTesto 4">
+            <a:extLst>
+              <a:ext uri="{FF2B5EF4-FFF2-40B4-BE49-F238E27FC236}">
+                <a16:creationId xmlns:a16="http://schemas.microsoft.com/office/drawing/2014/main" id="{BB2D5997-D077-E740-00D6-9083B5BB979E}"/>
+              </a:ext>
+            </a:extLst>
+          </p:cNvPr>
+          <p:cNvSpPr txBox="1"/>
+          <p:nvPr/>
+        </p:nvSpPr>
+        <p:spPr>
+          <a:xfrm>
+            <a:off x="1613043" y="2917861"/>
+            <a:ext cx="4356242" cy="369332"/>
+          </a:xfrm>
+          <a:prstGeom prst="rect">
+            <a:avLst/>
+          </a:prstGeom>
+          <a:noFill/>
+        </p:spPr>
+        <p:txBody>
+          <a:bodyPr wrap="square" rtlCol="0">
+            <a:spAutoFit/>
+          </a:bodyPr>
+          <a:lstStyle/>
+          <a:p>
+            <a:r>
+              <a:rPr lang="it-IT" dirty="0"/>
+              <a:t>The T_90</a:t>
+            </a:r>
+          </a:p>
+        </p:txBody>
+      </p:sp>
+      <p:sp>
+        <p:nvSpPr>
+          <p:cNvPr id="6" name="CasellaDiTesto 5">
+            <a:extLst>
+              <a:ext uri="{FF2B5EF4-FFF2-40B4-BE49-F238E27FC236}">
+                <a16:creationId xmlns:a16="http://schemas.microsoft.com/office/drawing/2014/main" id="{2DEF3CAB-2DE1-370D-337D-97E3B76FAD6B}"/>
+              </a:ext>
+            </a:extLst>
+          </p:cNvPr>
+          <p:cNvSpPr txBox="1"/>
+          <p:nvPr/>
+        </p:nvSpPr>
+        <p:spPr>
+          <a:xfrm>
+            <a:off x="1530849" y="4099389"/>
+            <a:ext cx="4356242" cy="369332"/>
+          </a:xfrm>
+          <a:prstGeom prst="rect">
+            <a:avLst/>
+          </a:prstGeom>
+          <a:noFill/>
+        </p:spPr>
+        <p:txBody>
+          <a:bodyPr wrap="square" rtlCol="0">
+            <a:spAutoFit/>
+          </a:bodyPr>
+          <a:lstStyle/>
+          <a:p>
+            <a:r>
+              <a:rPr lang="it-IT" dirty="0"/>
+              <a:t>The HR</a:t>
+            </a:r>
+          </a:p>
+        </p:txBody>
+      </p:sp>
+    </p:spTree>
+    <p:extLst>
+      <p:ext uri="{BB962C8B-B14F-4D97-AF65-F5344CB8AC3E}">
+        <p14:creationId xmlns:p14="http://schemas.microsoft.com/office/powerpoint/2010/main" val="829168672"/>
+      </p:ext>
+    </p:extLst>
+  </p:cSld>
+  <p:clrMapOvr>
+    <a:masterClrMapping/>
+  </p:clrMapOvr>
+</p:sld>
+</file>
+
+<file path=ppt/slides/slide4.xml><?xml version="1.0" encoding="utf-8"?>
+<p:sld xmlns:a="http://schemas.openxmlformats.org/drawingml/2006/main" xmlns:r="http://schemas.openxmlformats.org/officeDocument/2006/relationships" xmlns:p="http://schemas.openxmlformats.org/presentationml/2006/main">
+  <p:cSld>
+    <p:spTree>
+      <p:nvGrpSpPr>
+        <p:cNvPr id="1" name=""/>
+        <p:cNvGrpSpPr/>
+        <p:nvPr/>
+      </p:nvGrpSpPr>
+      <p:grpSpPr>
+        <a:xfrm>
+          <a:off x="0" y="0"/>
+          <a:ext cx="0" cy="0"/>
+          <a:chOff x="0" y="0"/>
+          <a:chExt cx="0" cy="0"/>
+        </a:xfrm>
+      </p:grpSpPr>
+      <mc:AlternateContent xmlns:mc="http://schemas.openxmlformats.org/markup-compatibility/2006">
+        <mc:Choice xmlns:a14="http://schemas.microsoft.com/office/drawing/2010/main" Requires="a14">
+          <p:sp>
+            <p:nvSpPr>
+              <p:cNvPr id="2" name="Titolo 1">
+                <a:extLst>
+                  <a:ext uri="{FF2B5EF4-FFF2-40B4-BE49-F238E27FC236}">
+                    <a16:creationId xmlns:a16="http://schemas.microsoft.com/office/drawing/2014/main" id="{9C89BA0E-7680-4FE7-9BEB-DDCCF940FCCE}"/>
+                  </a:ext>
+                </a:extLst>
+              </p:cNvPr>
+              <p:cNvSpPr>
+                <a:spLocks noGrp="1"/>
+              </p:cNvSpPr>
+              <p:nvPr>
+                <p:ph type="title"/>
+              </p:nvPr>
+            </p:nvSpPr>
+            <p:spPr/>
+            <p:txBody>
+              <a:bodyPr/>
+              <a:lstStyle/>
+              <a:p>
+                <a:r>
+                  <a:rPr lang="en-GB" dirty="0"/>
+                  <a:t>Classification on </a:t>
+                </a:r>
+                <a14:m>
+                  <m:oMath xmlns:m="http://schemas.openxmlformats.org/officeDocument/2006/math">
+                    <m:func>
+                      <m:funcPr>
+                        <m:ctrlPr>
+                          <a:rPr lang="it-IT" i="1" dirty="0">
+                            <a:latin typeface="Cambria Math" panose="02040503050406030204" pitchFamily="18" charset="0"/>
+                          </a:rPr>
+                        </m:ctrlPr>
+                      </m:funcPr>
+                      <m:fName>
+                        <m:r>
+                          <m:rPr>
+                            <m:sty m:val="p"/>
+                          </m:rPr>
+                          <a:rPr lang="it-IT" dirty="0">
+                            <a:latin typeface="Cambria Math" panose="02040503050406030204" pitchFamily="18" charset="0"/>
+                          </a:rPr>
+                          <m:t>log</m:t>
+                        </m:r>
+                      </m:fName>
+                      <m:e>
+                        <m:d>
+                          <m:dPr>
+                            <m:ctrlPr>
+                              <a:rPr lang="it-IT" i="1" dirty="0">
+                                <a:latin typeface="Cambria Math" panose="02040503050406030204" pitchFamily="18" charset="0"/>
+                              </a:rPr>
+                            </m:ctrlPr>
+                          </m:dPr>
+                          <m:e>
+                            <m:sSub>
+                              <m:sSubPr>
+                                <m:ctrlPr>
+                                  <a:rPr lang="en-GB" i="1" dirty="0">
+                                    <a:latin typeface="Cambria Math" panose="02040503050406030204" pitchFamily="18" charset="0"/>
+                                  </a:rPr>
+                                </m:ctrlPr>
+                              </m:sSubPr>
+                              <m:e>
+                                <m:r>
+                                  <a:rPr lang="en-GB" i="1" dirty="0">
+                                    <a:latin typeface="Cambria Math" panose="02040503050406030204" pitchFamily="18" charset="0"/>
+                                  </a:rPr>
+                                  <m:t>𝑇</m:t>
+                                </m:r>
+                              </m:e>
+                              <m:sub>
+                                <m:r>
+                                  <a:rPr lang="en-GB" i="1" dirty="0">
+                                    <a:latin typeface="Cambria Math" panose="02040503050406030204" pitchFamily="18" charset="0"/>
+                                  </a:rPr>
+                                  <m:t>9</m:t>
+                                </m:r>
+                                <m:r>
+                                  <a:rPr lang="it-IT" i="1" dirty="0">
+                                    <a:latin typeface="Cambria Math" panose="02040503050406030204" pitchFamily="18" charset="0"/>
+                                  </a:rPr>
+                                  <m:t>0</m:t>
+                                </m:r>
+                              </m:sub>
+                            </m:sSub>
+                          </m:e>
+                        </m:d>
+                      </m:e>
+                    </m:func>
+                  </m:oMath>
+                </a14:m>
+                <a:r>
+                  <a:rPr lang="it-IT" dirty="0"/>
+                  <a:t>: data</a:t>
+                </a:r>
+              </a:p>
+            </p:txBody>
+          </p:sp>
+        </mc:Choice>
+        <mc:Fallback>
+          <p:sp>
+            <p:nvSpPr>
+              <p:cNvPr id="2" name="Titolo 1">
+                <a:extLst>
+                  <a:ext uri="{FF2B5EF4-FFF2-40B4-BE49-F238E27FC236}">
+                    <a16:creationId xmlns:a16="http://schemas.microsoft.com/office/drawing/2014/main" id="{9C89BA0E-7680-4FE7-9BEB-DDCCF940FCCE}"/>
+                  </a:ext>
+                </a:extLst>
+              </p:cNvPr>
+              <p:cNvSpPr>
+                <a:spLocks noGrp="1" noRot="1" noChangeAspect="1" noMove="1" noResize="1" noEditPoints="1" noAdjustHandles="1" noChangeArrowheads="1" noChangeShapeType="1" noTextEdit="1"/>
+              </p:cNvSpPr>
+              <p:nvPr>
+                <p:ph type="title"/>
+              </p:nvPr>
+            </p:nvSpPr>
+            <p:spPr>
+              <a:blipFill>
+                <a:blip r:embed="rId2"/>
+                <a:stretch>
+                  <a:fillRect l="-2533" t="-15842"/>
+                </a:stretch>
+              </a:blipFill>
+            </p:spPr>
+            <p:txBody>
+              <a:bodyPr/>
+              <a:lstStyle/>
+              <a:p>
+                <a:r>
+                  <a:rPr lang="it-IT">
+                    <a:noFill/>
+                  </a:rPr>
+                  <a:t> </a:t>
+                </a:r>
+              </a:p>
+            </p:txBody>
+          </p:sp>
+        </mc:Fallback>
+      </mc:AlternateContent>
+      <mc:AlternateContent xmlns:mc="http://schemas.openxmlformats.org/markup-compatibility/2006">
+        <mc:Choice xmlns:a14="http://schemas.microsoft.com/office/drawing/2010/main" Requires="a14">
+          <p:sp>
+            <p:nvSpPr>
+              <p:cNvPr id="4" name="CasellaDiTesto 3">
+                <a:extLst>
+                  <a:ext uri="{FF2B5EF4-FFF2-40B4-BE49-F238E27FC236}">
+                    <a16:creationId xmlns:a16="http://schemas.microsoft.com/office/drawing/2014/main" id="{701492C6-3F60-DF36-DDD4-AC4C7F5E5308}"/>
+                  </a:ext>
+                </a:extLst>
+              </p:cNvPr>
+              <p:cNvSpPr txBox="1"/>
+              <p:nvPr/>
+            </p:nvSpPr>
+            <p:spPr>
+              <a:xfrm>
+                <a:off x="1191802" y="1524000"/>
+                <a:ext cx="3102796" cy="1477328"/>
+              </a:xfrm>
+              <a:prstGeom prst="rect">
+                <a:avLst/>
+              </a:prstGeom>
+              <a:noFill/>
+            </p:spPr>
+            <p:txBody>
+              <a:bodyPr wrap="square" rtlCol="0">
+                <a:spAutoFit/>
+              </a:bodyPr>
+              <a:lstStyle/>
+              <a:p>
+                <a:r>
+                  <a:rPr lang="it-IT" dirty="0"/>
+                  <a:t>Dataset: 1932 burst </a:t>
+                </a:r>
+                <a:r>
+                  <a:rPr lang="it-IT" dirty="0" err="1"/>
+                  <a:t>seen</a:t>
+                </a:r>
+                <a:r>
+                  <a:rPr lang="it-IT" dirty="0"/>
+                  <a:t> by BATSE with the </a:t>
+                </a:r>
+                <a:r>
+                  <a:rPr lang="it-IT" dirty="0" err="1"/>
+                  <a:t>recorded</a:t>
+                </a:r>
+                <a:r>
+                  <a:rPr lang="it-IT" dirty="0"/>
+                  <a:t> </a:t>
+                </a:r>
+                <a14:m>
+                  <m:oMath xmlns:m="http://schemas.openxmlformats.org/officeDocument/2006/math">
+                    <m:func>
+                      <m:funcPr>
+                        <m:ctrlPr>
+                          <a:rPr lang="it-IT" i="1" dirty="0" smtClean="0">
+                            <a:latin typeface="Cambria Math" panose="02040503050406030204" pitchFamily="18" charset="0"/>
+                          </a:rPr>
+                        </m:ctrlPr>
+                      </m:funcPr>
+                      <m:fName>
+                        <m:r>
+                          <m:rPr>
+                            <m:sty m:val="p"/>
+                          </m:rPr>
+                          <a:rPr lang="it-IT" i="0" dirty="0" smtClean="0">
+                            <a:latin typeface="Cambria Math" panose="02040503050406030204" pitchFamily="18" charset="0"/>
+                          </a:rPr>
+                          <m:t>log</m:t>
+                        </m:r>
+                      </m:fName>
+                      <m:e>
+                        <m:d>
+                          <m:dPr>
+                            <m:ctrlPr>
+                              <a:rPr lang="it-IT" i="1" dirty="0" smtClean="0">
+                                <a:latin typeface="Cambria Math" panose="02040503050406030204" pitchFamily="18" charset="0"/>
+                              </a:rPr>
+                            </m:ctrlPr>
+                          </m:dPr>
+                          <m:e>
+                            <m:sSub>
+                              <m:sSubPr>
+                                <m:ctrlPr>
+                                  <a:rPr lang="it-IT" i="1" dirty="0" smtClean="0">
+                                    <a:latin typeface="Cambria Math" panose="02040503050406030204" pitchFamily="18" charset="0"/>
+                                  </a:rPr>
+                                </m:ctrlPr>
+                              </m:sSubPr>
+                              <m:e>
+                                <m:r>
+                                  <a:rPr lang="it-IT" i="1" dirty="0" smtClean="0">
+                                    <a:latin typeface="Cambria Math" panose="02040503050406030204" pitchFamily="18" charset="0"/>
+                                  </a:rPr>
+                                  <m:t>𝑇</m:t>
+                                </m:r>
+                              </m:e>
+                              <m:sub>
+                                <m:r>
+                                  <a:rPr lang="it-IT" i="1" dirty="0" smtClean="0">
+                                    <a:latin typeface="Cambria Math" panose="02040503050406030204" pitchFamily="18" charset="0"/>
+                                  </a:rPr>
+                                  <m:t>90</m:t>
+                                </m:r>
+                              </m:sub>
+                            </m:sSub>
+                          </m:e>
+                        </m:d>
+                      </m:e>
+                    </m:func>
+                  </m:oMath>
+                </a14:m>
+                <a:r>
+                  <a:rPr lang="it-IT" dirty="0"/>
+                  <a:t>, </a:t>
+                </a:r>
+                <a:r>
+                  <a:rPr lang="it-IT" dirty="0" err="1"/>
+                  <a:t>associated</a:t>
+                </a:r>
+                <a:r>
+                  <a:rPr lang="it-IT" dirty="0"/>
+                  <a:t> </a:t>
+                </a:r>
+                <a:r>
+                  <a:rPr lang="it-IT" dirty="0" err="1"/>
+                  <a:t>error</a:t>
+                </a:r>
+                <a:r>
+                  <a:rPr lang="it-IT" dirty="0"/>
+                  <a:t> and </a:t>
+                </a:r>
+                <a14:m>
+                  <m:oMath xmlns:m="http://schemas.openxmlformats.org/officeDocument/2006/math">
+                    <m:func>
+                      <m:funcPr>
+                        <m:ctrlPr>
+                          <a:rPr lang="it-IT" i="1" dirty="0" smtClean="0">
+                            <a:latin typeface="Cambria Math" panose="02040503050406030204" pitchFamily="18" charset="0"/>
+                          </a:rPr>
+                        </m:ctrlPr>
+                      </m:funcPr>
+                      <m:fName>
+                        <m:r>
+                          <m:rPr>
+                            <m:sty m:val="p"/>
+                          </m:rPr>
+                          <a:rPr lang="it-IT" i="0" dirty="0" smtClean="0">
+                            <a:latin typeface="Cambria Math" panose="02040503050406030204" pitchFamily="18" charset="0"/>
+                          </a:rPr>
+                          <m:t>log</m:t>
+                        </m:r>
+                      </m:fName>
+                      <m:e>
+                        <m:d>
+                          <m:dPr>
+                            <m:ctrlPr>
+                              <a:rPr lang="it-IT" i="1" dirty="0" smtClean="0">
+                                <a:latin typeface="Cambria Math" panose="02040503050406030204" pitchFamily="18" charset="0"/>
+                              </a:rPr>
+                            </m:ctrlPr>
+                          </m:dPr>
+                          <m:e>
+                            <m:r>
+                              <a:rPr lang="it-IT" i="1" dirty="0" smtClean="0">
+                                <a:latin typeface="Cambria Math" panose="02040503050406030204" pitchFamily="18" charset="0"/>
+                              </a:rPr>
+                              <m:t>𝐻𝑅</m:t>
+                            </m:r>
+                          </m:e>
+                        </m:d>
+                      </m:e>
+                    </m:func>
+                  </m:oMath>
+                </a14:m>
+                <a:r>
+                  <a:rPr lang="it-IT" dirty="0"/>
+                  <a:t>. </a:t>
+                </a:r>
+              </a:p>
+            </p:txBody>
+          </p:sp>
+        </mc:Choice>
+        <mc:Fallback>
+          <p:sp>
+            <p:nvSpPr>
+              <p:cNvPr id="4" name="CasellaDiTesto 3">
+                <a:extLst>
+                  <a:ext uri="{FF2B5EF4-FFF2-40B4-BE49-F238E27FC236}">
+                    <a16:creationId xmlns:a16="http://schemas.microsoft.com/office/drawing/2014/main" id="{701492C6-3F60-DF36-DDD4-AC4C7F5E5308}"/>
+                  </a:ext>
+                </a:extLst>
+              </p:cNvPr>
+              <p:cNvSpPr txBox="1">
+                <a:spLocks noRot="1" noChangeAspect="1" noMove="1" noResize="1" noEditPoints="1" noAdjustHandles="1" noChangeArrowheads="1" noChangeShapeType="1" noTextEdit="1"/>
+              </p:cNvSpPr>
+              <p:nvPr/>
+            </p:nvSpPr>
+            <p:spPr>
+              <a:xfrm>
+                <a:off x="1191802" y="1524000"/>
+                <a:ext cx="3102796" cy="1477328"/>
+              </a:xfrm>
+              <a:prstGeom prst="rect">
+                <a:avLst/>
+              </a:prstGeom>
+              <a:blipFill>
+                <a:blip r:embed="rId3"/>
+                <a:stretch>
+                  <a:fillRect l="-1772" t="-2066" b="-5785"/>
+                </a:stretch>
+              </a:blipFill>
+            </p:spPr>
+            <p:txBody>
+              <a:bodyPr/>
+              <a:lstStyle/>
+              <a:p>
+                <a:r>
+                  <a:rPr lang="it-IT">
+                    <a:noFill/>
+                  </a:rPr>
+                  <a:t> </a:t>
+                </a:r>
+              </a:p>
+            </p:txBody>
+          </p:sp>
+        </mc:Fallback>
+      </mc:AlternateContent>
+      <mc:AlternateContent xmlns:mc="http://schemas.openxmlformats.org/markup-compatibility/2006">
+        <mc:Choice xmlns:a14="http://schemas.microsoft.com/office/drawing/2010/main" Requires="a14">
+          <p:sp>
+            <p:nvSpPr>
+              <p:cNvPr id="5" name="CasellaDiTesto 4">
+                <a:extLst>
+                  <a:ext uri="{FF2B5EF4-FFF2-40B4-BE49-F238E27FC236}">
+                    <a16:creationId xmlns:a16="http://schemas.microsoft.com/office/drawing/2014/main" id="{C264A17A-540E-8BCE-C181-51A3B66A61CB}"/>
+                  </a:ext>
+                </a:extLst>
+              </p:cNvPr>
+              <p:cNvSpPr txBox="1"/>
+              <p:nvPr/>
+            </p:nvSpPr>
+            <p:spPr>
+              <a:xfrm>
+                <a:off x="1356189" y="3429000"/>
+                <a:ext cx="2938409" cy="646331"/>
+              </a:xfrm>
+              <a:prstGeom prst="rect">
+                <a:avLst/>
+              </a:prstGeom>
+              <a:noFill/>
+            </p:spPr>
+            <p:txBody>
+              <a:bodyPr wrap="square" rtlCol="0">
+                <a:spAutoFit/>
+              </a:bodyPr>
+              <a:lstStyle/>
+              <a:p>
+                <a:r>
+                  <a:rPr lang="it-IT" dirty="0" err="1"/>
+                  <a:t>Smallest</a:t>
+                </a:r>
+                <a:r>
+                  <a:rPr lang="it-IT" dirty="0"/>
+                  <a:t> </a:t>
+                </a:r>
+                <a:r>
+                  <a:rPr lang="it-IT" dirty="0" err="1"/>
+                  <a:t>value</a:t>
+                </a:r>
+                <a:r>
+                  <a:rPr lang="it-IT" dirty="0"/>
+                  <a:t>: </a:t>
+                </a:r>
+                <a14:m>
+                  <m:oMath xmlns:m="http://schemas.openxmlformats.org/officeDocument/2006/math">
+                    <m:r>
+                      <a:rPr lang="it-IT" i="1" dirty="0" smtClean="0">
+                        <a:latin typeface="Cambria Math" panose="02040503050406030204" pitchFamily="18" charset="0"/>
+                      </a:rPr>
+                      <m:t>∼−3.7</m:t>
+                    </m:r>
+                  </m:oMath>
+                </a14:m>
+                <a:endParaRPr lang="it-IT" dirty="0"/>
+              </a:p>
+              <a:p>
+                <a:r>
+                  <a:rPr lang="it-IT" dirty="0" err="1"/>
+                  <a:t>Biggest</a:t>
+                </a:r>
+                <a:r>
+                  <a:rPr lang="it-IT" dirty="0"/>
+                  <a:t> </a:t>
+                </a:r>
+                <a:r>
+                  <a:rPr lang="it-IT" dirty="0" err="1"/>
+                  <a:t>value</a:t>
+                </a:r>
+                <a:r>
+                  <a:rPr lang="it-IT" dirty="0"/>
+                  <a:t>: </a:t>
+                </a:r>
+                <a14:m>
+                  <m:oMath xmlns:m="http://schemas.openxmlformats.org/officeDocument/2006/math">
+                    <m:r>
+                      <a:rPr lang="it-IT" i="1" dirty="0" smtClean="0">
+                        <a:latin typeface="Cambria Math" panose="02040503050406030204" pitchFamily="18" charset="0"/>
+                      </a:rPr>
+                      <m:t>∼6.5</m:t>
+                    </m:r>
+                  </m:oMath>
+                </a14:m>
+                <a:r>
+                  <a:rPr lang="it-IT" dirty="0"/>
+                  <a:t> </a:t>
+                </a:r>
+              </a:p>
+            </p:txBody>
+          </p:sp>
+        </mc:Choice>
+        <mc:Fallback>
+          <p:sp>
+            <p:nvSpPr>
+              <p:cNvPr id="5" name="CasellaDiTesto 4">
+                <a:extLst>
+                  <a:ext uri="{FF2B5EF4-FFF2-40B4-BE49-F238E27FC236}">
+                    <a16:creationId xmlns:a16="http://schemas.microsoft.com/office/drawing/2014/main" id="{C264A17A-540E-8BCE-C181-51A3B66A61CB}"/>
+                  </a:ext>
+                </a:extLst>
+              </p:cNvPr>
+              <p:cNvSpPr txBox="1">
+                <a:spLocks noRot="1" noChangeAspect="1" noMove="1" noResize="1" noEditPoints="1" noAdjustHandles="1" noChangeArrowheads="1" noChangeShapeType="1" noTextEdit="1"/>
+              </p:cNvSpPr>
+              <p:nvPr/>
+            </p:nvSpPr>
+            <p:spPr>
+              <a:xfrm>
+                <a:off x="1356189" y="3429000"/>
+                <a:ext cx="2938409" cy="646331"/>
+              </a:xfrm>
+              <a:prstGeom prst="rect">
+                <a:avLst/>
+              </a:prstGeom>
+              <a:blipFill>
+                <a:blip r:embed="rId4"/>
+                <a:stretch>
+                  <a:fillRect l="-1660" t="-5660" b="-13208"/>
+                </a:stretch>
+              </a:blipFill>
+            </p:spPr>
+            <p:txBody>
+              <a:bodyPr/>
+              <a:lstStyle/>
+              <a:p>
+                <a:r>
+                  <a:rPr lang="it-IT">
+                    <a:noFill/>
+                  </a:rPr>
+                  <a:t> </a:t>
+                </a:r>
+              </a:p>
+            </p:txBody>
+          </p:sp>
+        </mc:Fallback>
+      </mc:AlternateContent>
+      <mc:AlternateContent xmlns:mc="http://schemas.openxmlformats.org/markup-compatibility/2006">
+        <mc:Choice xmlns:a14="http://schemas.microsoft.com/office/drawing/2010/main" Requires="a14">
+          <p:sp>
+            <p:nvSpPr>
+              <p:cNvPr id="6" name="CasellaDiTesto 5">
+                <a:extLst>
+                  <a:ext uri="{FF2B5EF4-FFF2-40B4-BE49-F238E27FC236}">
+                    <a16:creationId xmlns:a16="http://schemas.microsoft.com/office/drawing/2014/main" id="{3910B501-7F17-4A45-1D5F-65D744EF586B}"/>
+                  </a:ext>
+                </a:extLst>
+              </p:cNvPr>
+              <p:cNvSpPr txBox="1"/>
+              <p:nvPr/>
+            </p:nvSpPr>
+            <p:spPr>
+              <a:xfrm>
+                <a:off x="1356189" y="4387065"/>
+                <a:ext cx="3359649" cy="369332"/>
+              </a:xfrm>
+              <a:prstGeom prst="rect">
+                <a:avLst/>
+              </a:prstGeom>
+              <a:noFill/>
+            </p:spPr>
+            <p:txBody>
+              <a:bodyPr wrap="square" rtlCol="0">
+                <a:spAutoFit/>
+              </a:bodyPr>
+              <a:lstStyle/>
+              <a:p>
+                <a14:m>
+                  <m:oMath xmlns:m="http://schemas.openxmlformats.org/officeDocument/2006/math">
+                    <m:r>
+                      <a:rPr lang="it-IT" i="1" dirty="0" smtClean="0">
+                        <a:latin typeface="Cambria Math" panose="02040503050406030204" pitchFamily="18" charset="0"/>
+                      </a:rPr>
+                      <m:t>50</m:t>
+                    </m:r>
+                  </m:oMath>
+                </a14:m>
+                <a:r>
+                  <a:rPr lang="it-IT" dirty="0"/>
+                  <a:t> </a:t>
+                </a:r>
+                <a:r>
+                  <a:rPr lang="it-IT" dirty="0" err="1"/>
+                  <a:t>bins</a:t>
+                </a:r>
+                <a:r>
+                  <a:rPr lang="it-IT" dirty="0"/>
+                  <a:t> from </a:t>
+                </a:r>
+                <a14:m>
+                  <m:oMath xmlns:m="http://schemas.openxmlformats.org/officeDocument/2006/math">
+                    <m:r>
+                      <a:rPr lang="it-IT" i="1" dirty="0" smtClean="0">
+                        <a:latin typeface="Cambria Math" panose="02040503050406030204" pitchFamily="18" charset="0"/>
+                      </a:rPr>
+                      <m:t>−4</m:t>
+                    </m:r>
+                    <m:r>
+                      <a:rPr lang="it-IT" b="0" i="1" dirty="0" smtClean="0">
+                        <a:latin typeface="Cambria Math" panose="02040503050406030204" pitchFamily="18" charset="0"/>
+                      </a:rPr>
+                      <m:t> </m:t>
+                    </m:r>
+                  </m:oMath>
+                </a14:m>
+                <a:r>
+                  <a:rPr lang="it-IT" dirty="0"/>
+                  <a:t>to </a:t>
+                </a:r>
+                <a14:m>
+                  <m:oMath xmlns:m="http://schemas.openxmlformats.org/officeDocument/2006/math">
+                    <m:r>
+                      <a:rPr lang="it-IT" i="1" dirty="0" smtClean="0">
+                        <a:latin typeface="Cambria Math" panose="02040503050406030204" pitchFamily="18" charset="0"/>
+                      </a:rPr>
+                      <m:t>7</m:t>
+                    </m:r>
+                  </m:oMath>
+                </a14:m>
+                <a:endParaRPr lang="it-IT" dirty="0"/>
+              </a:p>
+            </p:txBody>
+          </p:sp>
+        </mc:Choice>
+        <mc:Fallback>
+          <p:sp>
+            <p:nvSpPr>
+              <p:cNvPr id="6" name="CasellaDiTesto 5">
+                <a:extLst>
+                  <a:ext uri="{FF2B5EF4-FFF2-40B4-BE49-F238E27FC236}">
+                    <a16:creationId xmlns:a16="http://schemas.microsoft.com/office/drawing/2014/main" id="{3910B501-7F17-4A45-1D5F-65D744EF586B}"/>
+                  </a:ext>
+                </a:extLst>
+              </p:cNvPr>
+              <p:cNvSpPr txBox="1">
+                <a:spLocks noRot="1" noChangeAspect="1" noMove="1" noResize="1" noEditPoints="1" noAdjustHandles="1" noChangeArrowheads="1" noChangeShapeType="1" noTextEdit="1"/>
+              </p:cNvSpPr>
+              <p:nvPr/>
+            </p:nvSpPr>
+            <p:spPr>
+              <a:xfrm>
+                <a:off x="1356189" y="4387065"/>
+                <a:ext cx="3359649" cy="369332"/>
+              </a:xfrm>
+              <a:prstGeom prst="rect">
+                <a:avLst/>
+              </a:prstGeom>
+              <a:blipFill>
+                <a:blip r:embed="rId5"/>
+                <a:stretch>
+                  <a:fillRect t="-10000" b="-26667"/>
+                </a:stretch>
+              </a:blipFill>
+            </p:spPr>
+            <p:txBody>
+              <a:bodyPr/>
+              <a:lstStyle/>
+              <a:p>
+                <a:r>
+                  <a:rPr lang="it-IT">
+                    <a:noFill/>
+                  </a:rPr>
+                  <a:t> </a:t>
+                </a:r>
+              </a:p>
+            </p:txBody>
+          </p:sp>
+        </mc:Fallback>
+      </mc:AlternateContent>
+      <p:pic>
+        <p:nvPicPr>
+          <p:cNvPr id="10" name="Immagine 9">
+            <a:extLst>
+              <a:ext uri="{FF2B5EF4-FFF2-40B4-BE49-F238E27FC236}">
+                <a16:creationId xmlns:a16="http://schemas.microsoft.com/office/drawing/2014/main" id="{B05AFF13-2765-92A9-8188-D186DDDB7C13}"/>
+              </a:ext>
+            </a:extLst>
+          </p:cNvPr>
+          <p:cNvPicPr>
+            <a:picLocks noChangeAspect="1"/>
+          </p:cNvPicPr>
+          <p:nvPr/>
+        </p:nvPicPr>
+        <p:blipFill>
+          <a:blip r:embed="rId6">
+            <a:extLst>
+              <a:ext uri="{28A0092B-C50C-407E-A947-70E740481C1C}">
+                <a14:useLocalDpi xmlns:a14="http://schemas.microsoft.com/office/drawing/2010/main" val="0"/>
+              </a:ext>
+            </a:extLst>
+          </a:blip>
+          <a:stretch>
+            <a:fillRect/>
+          </a:stretch>
+        </p:blipFill>
+        <p:spPr>
+          <a:xfrm>
+            <a:off x="4983639" y="2262664"/>
+            <a:ext cx="5852172" cy="4389129"/>
+          </a:xfrm>
+          <a:prstGeom prst="rect">
+            <a:avLst/>
+          </a:prstGeom>
+        </p:spPr>
+      </p:pic>
+    </p:spTree>
+    <p:extLst>
+      <p:ext uri="{BB962C8B-B14F-4D97-AF65-F5344CB8AC3E}">
+        <p14:creationId xmlns:p14="http://schemas.microsoft.com/office/powerpoint/2010/main" val="3162314568"/>
+      </p:ext>
+    </p:extLst>
+  </p:cSld>
+  <p:clrMapOvr>
+    <a:masterClrMapping/>
+  </p:clrMapOvr>
+</p:sld>
+</file>
+
+<file path=ppt/slides/slide5.xml><?xml version="1.0" encoding="utf-8"?>
+<p:sld xmlns:a="http://schemas.openxmlformats.org/drawingml/2006/main" xmlns:r="http://schemas.openxmlformats.org/officeDocument/2006/relationships" xmlns:p="http://schemas.openxmlformats.org/presentationml/2006/main">
+  <p:cSld>
+    <p:spTree>
+      <p:nvGrpSpPr>
+        <p:cNvPr id="1" name=""/>
+        <p:cNvGrpSpPr/>
+        <p:nvPr/>
+      </p:nvGrpSpPr>
+      <p:grpSpPr>
+        <a:xfrm>
+          <a:off x="0" y="0"/>
+          <a:ext cx="0" cy="0"/>
+          <a:chOff x="0" y="0"/>
+          <a:chExt cx="0" cy="0"/>
+        </a:xfrm>
+      </p:grpSpPr>
+      <mc:AlternateContent xmlns:mc="http://schemas.openxmlformats.org/markup-compatibility/2006">
+        <mc:Choice xmlns:a14="http://schemas.microsoft.com/office/drawing/2010/main" Requires="a14">
+          <p:sp>
+            <p:nvSpPr>
+              <p:cNvPr id="4" name="Titolo 1">
+                <a:extLst>
+                  <a:ext uri="{FF2B5EF4-FFF2-40B4-BE49-F238E27FC236}">
+                    <a16:creationId xmlns:a16="http://schemas.microsoft.com/office/drawing/2014/main" id="{9F9FF888-399B-E4A9-9147-32AD6AD3E6D0}"/>
+                  </a:ext>
+                </a:extLst>
+              </p:cNvPr>
+              <p:cNvSpPr>
+                <a:spLocks noGrp="1"/>
+              </p:cNvSpPr>
+              <p:nvPr>
+                <p:ph type="title"/>
+              </p:nvPr>
+            </p:nvSpPr>
+            <p:spPr>
+              <a:xfrm>
+                <a:off x="642938" y="288925"/>
+                <a:ext cx="9625012" cy="1235075"/>
+              </a:xfrm>
+            </p:spPr>
+            <p:txBody>
+              <a:bodyPr/>
+              <a:lstStyle/>
+              <a:p>
+                <a:r>
+                  <a:rPr lang="en-GB" dirty="0"/>
+                  <a:t>Classification on </a:t>
+                </a:r>
+                <a14:m>
+                  <m:oMath xmlns:m="http://schemas.openxmlformats.org/officeDocument/2006/math">
+                    <m:func>
+                      <m:funcPr>
+                        <m:ctrlPr>
+                          <a:rPr lang="it-IT" i="1" dirty="0">
+                            <a:latin typeface="Cambria Math" panose="02040503050406030204" pitchFamily="18" charset="0"/>
+                          </a:rPr>
+                        </m:ctrlPr>
+                      </m:funcPr>
+                      <m:fName>
+                        <m:r>
+                          <m:rPr>
+                            <m:sty m:val="p"/>
+                          </m:rPr>
+                          <a:rPr lang="it-IT" dirty="0">
+                            <a:latin typeface="Cambria Math" panose="02040503050406030204" pitchFamily="18" charset="0"/>
+                          </a:rPr>
+                          <m:t>log</m:t>
+                        </m:r>
+                      </m:fName>
+                      <m:e>
+                        <m:d>
+                          <m:dPr>
+                            <m:ctrlPr>
+                              <a:rPr lang="it-IT" i="1" dirty="0">
+                                <a:latin typeface="Cambria Math" panose="02040503050406030204" pitchFamily="18" charset="0"/>
+                              </a:rPr>
+                            </m:ctrlPr>
+                          </m:dPr>
+                          <m:e>
+                            <m:sSub>
+                              <m:sSubPr>
+                                <m:ctrlPr>
+                                  <a:rPr lang="en-GB" i="1" dirty="0">
+                                    <a:latin typeface="Cambria Math" panose="02040503050406030204" pitchFamily="18" charset="0"/>
+                                  </a:rPr>
+                                </m:ctrlPr>
+                              </m:sSubPr>
+                              <m:e>
+                                <m:r>
+                                  <a:rPr lang="en-GB" i="1" dirty="0">
+                                    <a:latin typeface="Cambria Math" panose="02040503050406030204" pitchFamily="18" charset="0"/>
+                                  </a:rPr>
+                                  <m:t>𝑇</m:t>
+                                </m:r>
+                              </m:e>
+                              <m:sub>
+                                <m:r>
+                                  <a:rPr lang="en-GB" i="1" dirty="0">
+                                    <a:latin typeface="Cambria Math" panose="02040503050406030204" pitchFamily="18" charset="0"/>
+                                  </a:rPr>
+                                  <m:t>9</m:t>
+                                </m:r>
+                                <m:r>
+                                  <a:rPr lang="it-IT" i="1" dirty="0">
+                                    <a:latin typeface="Cambria Math" panose="02040503050406030204" pitchFamily="18" charset="0"/>
+                                  </a:rPr>
+                                  <m:t>0</m:t>
+                                </m:r>
+                              </m:sub>
+                            </m:sSub>
+                          </m:e>
+                        </m:d>
+                      </m:e>
+                    </m:func>
+                  </m:oMath>
+                </a14:m>
+                <a:r>
+                  <a:rPr lang="it-IT" dirty="0"/>
+                  <a:t>: model</a:t>
+                </a:r>
+              </a:p>
+            </p:txBody>
+          </p:sp>
+        </mc:Choice>
+        <mc:Fallback>
+          <p:sp>
+            <p:nvSpPr>
+              <p:cNvPr id="4" name="Titolo 1">
+                <a:extLst>
+                  <a:ext uri="{FF2B5EF4-FFF2-40B4-BE49-F238E27FC236}">
+                    <a16:creationId xmlns:a16="http://schemas.microsoft.com/office/drawing/2014/main" id="{9F9FF888-399B-E4A9-9147-32AD6AD3E6D0}"/>
+                  </a:ext>
+                </a:extLst>
+              </p:cNvPr>
+              <p:cNvSpPr>
+                <a:spLocks noGrp="1" noRot="1" noChangeAspect="1" noMove="1" noResize="1" noEditPoints="1" noAdjustHandles="1" noChangeArrowheads="1" noChangeShapeType="1" noTextEdit="1"/>
+              </p:cNvSpPr>
+              <p:nvPr>
+                <p:ph type="title"/>
+              </p:nvPr>
+            </p:nvSpPr>
+            <p:spPr>
+              <a:xfrm>
+                <a:off x="642938" y="288925"/>
+                <a:ext cx="9625012" cy="1235075"/>
+              </a:xfrm>
+              <a:blipFill>
+                <a:blip r:embed="rId2"/>
+                <a:stretch>
+                  <a:fillRect l="-2533" t="-15271"/>
+                </a:stretch>
+              </a:blipFill>
+            </p:spPr>
+            <p:txBody>
+              <a:bodyPr/>
+              <a:lstStyle/>
+              <a:p>
+                <a:r>
+                  <a:rPr lang="it-IT">
+                    <a:noFill/>
+                  </a:rPr>
+                  <a:t> </a:t>
+                </a:r>
+              </a:p>
+            </p:txBody>
+          </p:sp>
+        </mc:Fallback>
+      </mc:AlternateContent>
+      <mc:AlternateContent xmlns:mc="http://schemas.openxmlformats.org/markup-compatibility/2006">
+        <mc:Choice xmlns:a14="http://schemas.microsoft.com/office/drawing/2010/main" Requires="a14">
+          <p:sp>
+            <p:nvSpPr>
+              <p:cNvPr id="5" name="CasellaDiTesto 4">
+                <a:extLst>
+                  <a:ext uri="{FF2B5EF4-FFF2-40B4-BE49-F238E27FC236}">
+                    <a16:creationId xmlns:a16="http://schemas.microsoft.com/office/drawing/2014/main" id="{CD6AA39C-E2F8-5ED9-1A96-4FD70A92E291}"/>
+                  </a:ext>
+                </a:extLst>
+              </p:cNvPr>
+              <p:cNvSpPr txBox="1"/>
+              <p:nvPr/>
+            </p:nvSpPr>
+            <p:spPr>
+              <a:xfrm>
+                <a:off x="1458930" y="2712377"/>
+                <a:ext cx="8733034" cy="461665"/>
+              </a:xfrm>
+              <a:prstGeom prst="rect">
+                <a:avLst/>
+              </a:prstGeom>
+              <a:noFill/>
+            </p:spPr>
+            <p:txBody>
+              <a:bodyPr wrap="square" rtlCol="0">
+                <a:spAutoFit/>
+              </a:bodyPr>
+              <a:lstStyle/>
+              <a:p>
+                <a14:m>
+                  <m:oMathPara xmlns:m="http://schemas.openxmlformats.org/officeDocument/2006/math">
+                    <m:oMathParaPr>
+                      <m:jc m:val="centerGroup"/>
+                    </m:oMathParaPr>
+                    <m:oMath xmlns:m="http://schemas.openxmlformats.org/officeDocument/2006/math">
+                      <m:r>
+                        <a:rPr lang="it-IT" sz="2400" i="1" dirty="0" smtClean="0">
+                          <a:latin typeface="Cambria Math" panose="02040503050406030204" pitchFamily="18" charset="0"/>
+                        </a:rPr>
+                        <m:t>𝑝</m:t>
+                      </m:r>
+                      <m:d>
+                        <m:dPr>
+                          <m:ctrlPr>
+                            <a:rPr lang="it-IT" sz="2400" i="1" dirty="0" smtClean="0">
+                              <a:latin typeface="Cambria Math" panose="02040503050406030204" pitchFamily="18" charset="0"/>
+                            </a:rPr>
+                          </m:ctrlPr>
+                        </m:dPr>
+                        <m:e>
+                          <m:func>
+                            <m:funcPr>
+                              <m:ctrlPr>
+                                <a:rPr lang="it-IT" sz="2400" i="1" dirty="0" smtClean="0">
+                                  <a:latin typeface="Cambria Math" panose="02040503050406030204" pitchFamily="18" charset="0"/>
+                                </a:rPr>
+                              </m:ctrlPr>
+                            </m:funcPr>
+                            <m:fName>
+                              <m:r>
+                                <m:rPr>
+                                  <m:sty m:val="p"/>
+                                </m:rPr>
+                                <a:rPr lang="it-IT" sz="2400" i="0" dirty="0" smtClean="0">
+                                  <a:latin typeface="Cambria Math" panose="02040503050406030204" pitchFamily="18" charset="0"/>
+                                </a:rPr>
+                                <m:t>log</m:t>
+                              </m:r>
+                            </m:fName>
+                            <m:e>
+                              <m:d>
+                                <m:dPr>
+                                  <m:ctrlPr>
+                                    <a:rPr lang="it-IT" sz="2400" i="1" dirty="0" smtClean="0">
+                                      <a:latin typeface="Cambria Math" panose="02040503050406030204" pitchFamily="18" charset="0"/>
+                                    </a:rPr>
+                                  </m:ctrlPr>
+                                </m:dPr>
+                                <m:e>
+                                  <m:sSub>
+                                    <m:sSubPr>
+                                      <m:ctrlPr>
+                                        <a:rPr lang="it-IT" sz="2400" i="1" dirty="0" smtClean="0">
+                                          <a:latin typeface="Cambria Math" panose="02040503050406030204" pitchFamily="18" charset="0"/>
+                                        </a:rPr>
+                                      </m:ctrlPr>
+                                    </m:sSubPr>
+                                    <m:e>
+                                      <m:r>
+                                        <a:rPr lang="it-IT" sz="2400" i="1" dirty="0" smtClean="0">
+                                          <a:latin typeface="Cambria Math" panose="02040503050406030204" pitchFamily="18" charset="0"/>
+                                        </a:rPr>
+                                        <m:t>𝑇</m:t>
+                                      </m:r>
+                                    </m:e>
+                                    <m:sub>
+                                      <m:r>
+                                        <a:rPr lang="it-IT" sz="2400" i="1" dirty="0" smtClean="0">
+                                          <a:latin typeface="Cambria Math" panose="02040503050406030204" pitchFamily="18" charset="0"/>
+                                        </a:rPr>
+                                        <m:t>90</m:t>
+                                      </m:r>
+                                    </m:sub>
+                                  </m:sSub>
+                                </m:e>
+                              </m:d>
+                            </m:e>
+                          </m:func>
+                        </m:e>
+                      </m:d>
+                      <m:r>
+                        <a:rPr lang="it-IT" sz="2400" i="1" dirty="0" smtClean="0">
+                          <a:latin typeface="Cambria Math" panose="02040503050406030204" pitchFamily="18" charset="0"/>
+                        </a:rPr>
+                        <m:t>=</m:t>
+                      </m:r>
+                      <m:r>
+                        <a:rPr lang="it-IT" sz="2400" i="1" dirty="0" smtClean="0">
+                          <a:latin typeface="Cambria Math" panose="02040503050406030204" pitchFamily="18" charset="0"/>
+                        </a:rPr>
+                        <m:t>𝑤</m:t>
+                      </m:r>
+                      <m:r>
+                        <a:rPr lang="it-IT" sz="2400" b="0" i="1" dirty="0" smtClean="0">
+                          <a:latin typeface="Cambria Math" panose="02040503050406030204" pitchFamily="18" charset="0"/>
+                        </a:rPr>
+                        <m:t> </m:t>
+                      </m:r>
+                      <m:r>
+                        <a:rPr lang="it-IT" sz="2400" i="1" dirty="0" smtClean="0">
+                          <a:latin typeface="Cambria Math" panose="02040503050406030204" pitchFamily="18" charset="0"/>
+                        </a:rPr>
+                        <m:t>𝑁</m:t>
+                      </m:r>
+                      <m:d>
+                        <m:dPr>
+                          <m:ctrlPr>
+                            <a:rPr lang="it-IT" sz="2400" i="1" dirty="0" smtClean="0">
+                              <a:latin typeface="Cambria Math" panose="02040503050406030204" pitchFamily="18" charset="0"/>
+                            </a:rPr>
+                          </m:ctrlPr>
+                        </m:dPr>
+                        <m:e>
+                          <m:func>
+                            <m:funcPr>
+                              <m:ctrlPr>
+                                <a:rPr lang="it-IT" sz="2400" i="1" dirty="0" smtClean="0">
+                                  <a:latin typeface="Cambria Math" panose="02040503050406030204" pitchFamily="18" charset="0"/>
+                                </a:rPr>
+                              </m:ctrlPr>
+                            </m:funcPr>
+                            <m:fName>
+                              <m:r>
+                                <m:rPr>
+                                  <m:sty m:val="p"/>
+                                </m:rPr>
+                                <a:rPr lang="it-IT" sz="2400" i="0" dirty="0" smtClean="0">
+                                  <a:latin typeface="Cambria Math" panose="02040503050406030204" pitchFamily="18" charset="0"/>
+                                </a:rPr>
+                                <m:t>log</m:t>
+                              </m:r>
+                            </m:fName>
+                            <m:e>
+                              <m:d>
+                                <m:dPr>
+                                  <m:ctrlPr>
+                                    <a:rPr lang="it-IT" sz="2400" i="1" dirty="0" smtClean="0">
+                                      <a:latin typeface="Cambria Math" panose="02040503050406030204" pitchFamily="18" charset="0"/>
+                                    </a:rPr>
+                                  </m:ctrlPr>
+                                </m:dPr>
+                                <m:e>
+                                  <m:sSub>
+                                    <m:sSubPr>
+                                      <m:ctrlPr>
+                                        <a:rPr lang="it-IT" sz="2400" i="1" dirty="0" smtClean="0">
+                                          <a:latin typeface="Cambria Math" panose="02040503050406030204" pitchFamily="18" charset="0"/>
+                                        </a:rPr>
+                                      </m:ctrlPr>
+                                    </m:sSubPr>
+                                    <m:e>
+                                      <m:r>
+                                        <a:rPr lang="it-IT" sz="2400" i="1" dirty="0" smtClean="0">
+                                          <a:latin typeface="Cambria Math" panose="02040503050406030204" pitchFamily="18" charset="0"/>
+                                        </a:rPr>
+                                        <m:t>𝑇</m:t>
+                                      </m:r>
+                                    </m:e>
+                                    <m:sub>
+                                      <m:r>
+                                        <a:rPr lang="it-IT" sz="2400" i="1" dirty="0" smtClean="0">
+                                          <a:latin typeface="Cambria Math" panose="02040503050406030204" pitchFamily="18" charset="0"/>
+                                        </a:rPr>
+                                        <m:t>90</m:t>
+                                      </m:r>
+                                    </m:sub>
+                                  </m:sSub>
+                                </m:e>
+                              </m:d>
+                            </m:e>
+                          </m:func>
+                        </m:e>
+                        <m:e>
+                          <m:sSub>
+                            <m:sSubPr>
+                              <m:ctrlPr>
+                                <a:rPr lang="it-IT" sz="2400" i="1" dirty="0" smtClean="0">
+                                  <a:latin typeface="Cambria Math" panose="02040503050406030204" pitchFamily="18" charset="0"/>
+                                </a:rPr>
+                              </m:ctrlPr>
+                            </m:sSubPr>
+                            <m:e>
+                              <m:r>
+                                <a:rPr lang="it-IT" sz="2400" i="1" dirty="0" smtClean="0">
+                                  <a:latin typeface="Cambria Math" panose="02040503050406030204" pitchFamily="18" charset="0"/>
+                                </a:rPr>
+                                <m:t>𝜇</m:t>
+                              </m:r>
+                            </m:e>
+                            <m:sub>
+                              <m:r>
+                                <a:rPr lang="it-IT" sz="2400" i="1" dirty="0" smtClean="0">
+                                  <a:latin typeface="Cambria Math" panose="02040503050406030204" pitchFamily="18" charset="0"/>
+                                </a:rPr>
+                                <m:t>1</m:t>
+                              </m:r>
+                            </m:sub>
+                          </m:sSub>
+                          <m:sSub>
+                            <m:sSubPr>
+                              <m:ctrlPr>
+                                <a:rPr lang="it-IT" sz="2400" i="1" dirty="0" smtClean="0">
+                                  <a:latin typeface="Cambria Math" panose="02040503050406030204" pitchFamily="18" charset="0"/>
+                                </a:rPr>
+                              </m:ctrlPr>
+                            </m:sSubPr>
+                            <m:e>
+                              <m:r>
+                                <a:rPr lang="it-IT" sz="2400" i="1" dirty="0" smtClean="0">
+                                  <a:latin typeface="Cambria Math" panose="02040503050406030204" pitchFamily="18" charset="0"/>
+                                </a:rPr>
+                                <m:t>𝜎</m:t>
+                              </m:r>
+                            </m:e>
+                            <m:sub>
+                              <m:r>
+                                <a:rPr lang="it-IT" sz="2400" i="1" dirty="0" smtClean="0">
+                                  <a:latin typeface="Cambria Math" panose="02040503050406030204" pitchFamily="18" charset="0"/>
+                                </a:rPr>
+                                <m:t>1</m:t>
+                              </m:r>
+                            </m:sub>
+                          </m:sSub>
+                        </m:e>
+                      </m:d>
+                      <m:r>
+                        <a:rPr lang="it-IT" sz="2400" i="1" dirty="0" smtClean="0">
+                          <a:latin typeface="Cambria Math" panose="02040503050406030204" pitchFamily="18" charset="0"/>
+                        </a:rPr>
+                        <m:t>+</m:t>
+                      </m:r>
+                      <m:d>
+                        <m:dPr>
+                          <m:ctrlPr>
+                            <a:rPr lang="it-IT" sz="2400" i="1" dirty="0" smtClean="0">
+                              <a:latin typeface="Cambria Math" panose="02040503050406030204" pitchFamily="18" charset="0"/>
+                            </a:rPr>
+                          </m:ctrlPr>
+                        </m:dPr>
+                        <m:e>
+                          <m:r>
+                            <a:rPr lang="it-IT" sz="2400" i="1" dirty="0" smtClean="0">
+                              <a:latin typeface="Cambria Math" panose="02040503050406030204" pitchFamily="18" charset="0"/>
+                            </a:rPr>
+                            <m:t>1−</m:t>
+                          </m:r>
+                          <m:r>
+                            <a:rPr lang="it-IT" sz="2400" i="1" dirty="0" smtClean="0">
+                              <a:latin typeface="Cambria Math" panose="02040503050406030204" pitchFamily="18" charset="0"/>
+                            </a:rPr>
+                            <m:t>𝑤</m:t>
+                          </m:r>
+                        </m:e>
+                      </m:d>
+                      <m:r>
+                        <a:rPr lang="it-IT" sz="2400" b="0" i="1" dirty="0" smtClean="0">
+                          <a:latin typeface="Cambria Math" panose="02040503050406030204" pitchFamily="18" charset="0"/>
+                        </a:rPr>
+                        <m:t> </m:t>
+                      </m:r>
+                      <m:r>
+                        <a:rPr lang="it-IT" sz="2400" i="1" dirty="0" smtClean="0">
+                          <a:latin typeface="Cambria Math" panose="02040503050406030204" pitchFamily="18" charset="0"/>
+                        </a:rPr>
+                        <m:t>𝑁</m:t>
+                      </m:r>
+                      <m:d>
+                        <m:dPr>
+                          <m:ctrlPr>
+                            <a:rPr lang="it-IT" sz="2400" i="1" dirty="0" smtClean="0">
+                              <a:latin typeface="Cambria Math" panose="02040503050406030204" pitchFamily="18" charset="0"/>
+                            </a:rPr>
+                          </m:ctrlPr>
+                        </m:dPr>
+                        <m:e>
+                          <m:func>
+                            <m:funcPr>
+                              <m:ctrlPr>
+                                <a:rPr lang="it-IT" sz="2400" i="1" dirty="0" smtClean="0">
+                                  <a:latin typeface="Cambria Math" panose="02040503050406030204" pitchFamily="18" charset="0"/>
+                                </a:rPr>
+                              </m:ctrlPr>
+                            </m:funcPr>
+                            <m:fName>
+                              <m:r>
+                                <m:rPr>
+                                  <m:sty m:val="p"/>
+                                </m:rPr>
+                                <a:rPr lang="it-IT" sz="2400" i="0" dirty="0" smtClean="0">
+                                  <a:latin typeface="Cambria Math" panose="02040503050406030204" pitchFamily="18" charset="0"/>
+                                </a:rPr>
+                                <m:t>log</m:t>
+                              </m:r>
+                            </m:fName>
+                            <m:e>
+                              <m:d>
+                                <m:dPr>
+                                  <m:ctrlPr>
+                                    <a:rPr lang="it-IT" sz="2400" i="1" dirty="0" smtClean="0">
+                                      <a:latin typeface="Cambria Math" panose="02040503050406030204" pitchFamily="18" charset="0"/>
+                                    </a:rPr>
+                                  </m:ctrlPr>
+                                </m:dPr>
+                                <m:e>
+                                  <m:sSub>
+                                    <m:sSubPr>
+                                      <m:ctrlPr>
+                                        <a:rPr lang="it-IT" sz="2400" i="1" dirty="0" smtClean="0">
+                                          <a:latin typeface="Cambria Math" panose="02040503050406030204" pitchFamily="18" charset="0"/>
+                                        </a:rPr>
+                                      </m:ctrlPr>
+                                    </m:sSubPr>
+                                    <m:e>
+                                      <m:r>
+                                        <a:rPr lang="it-IT" sz="2400" i="1" dirty="0" smtClean="0">
+                                          <a:latin typeface="Cambria Math" panose="02040503050406030204" pitchFamily="18" charset="0"/>
+                                        </a:rPr>
+                                        <m:t>𝑇</m:t>
+                                      </m:r>
+                                    </m:e>
+                                    <m:sub>
+                                      <m:r>
+                                        <a:rPr lang="it-IT" sz="2400" i="1" dirty="0" smtClean="0">
+                                          <a:latin typeface="Cambria Math" panose="02040503050406030204" pitchFamily="18" charset="0"/>
+                                        </a:rPr>
+                                        <m:t>90</m:t>
+                                      </m:r>
+                                    </m:sub>
+                                  </m:sSub>
+                                </m:e>
+                              </m:d>
+                            </m:e>
+                          </m:func>
+                        </m:e>
+                        <m:e>
+                          <m:sSub>
+                            <m:sSubPr>
+                              <m:ctrlPr>
+                                <a:rPr lang="it-IT" sz="2400" i="1" dirty="0" smtClean="0">
+                                  <a:latin typeface="Cambria Math" panose="02040503050406030204" pitchFamily="18" charset="0"/>
+                                </a:rPr>
+                              </m:ctrlPr>
+                            </m:sSubPr>
+                            <m:e>
+                              <m:r>
+                                <a:rPr lang="it-IT" sz="2400" i="1" dirty="0" smtClean="0">
+                                  <a:latin typeface="Cambria Math" panose="02040503050406030204" pitchFamily="18" charset="0"/>
+                                </a:rPr>
+                                <m:t>𝜇</m:t>
+                              </m:r>
+                            </m:e>
+                            <m:sub>
+                              <m:r>
+                                <a:rPr lang="it-IT" sz="2400" i="1" dirty="0" smtClean="0">
+                                  <a:latin typeface="Cambria Math" panose="02040503050406030204" pitchFamily="18" charset="0"/>
+                                </a:rPr>
+                                <m:t>2</m:t>
+                              </m:r>
+                            </m:sub>
+                          </m:sSub>
+                          <m:sSub>
+                            <m:sSubPr>
+                              <m:ctrlPr>
+                                <a:rPr lang="it-IT" sz="2400" i="1" dirty="0" smtClean="0">
+                                  <a:latin typeface="Cambria Math" panose="02040503050406030204" pitchFamily="18" charset="0"/>
+                                </a:rPr>
+                              </m:ctrlPr>
+                            </m:sSubPr>
+                            <m:e>
+                              <m:r>
+                                <a:rPr lang="it-IT" sz="2400" i="1" dirty="0" smtClean="0">
+                                  <a:latin typeface="Cambria Math" panose="02040503050406030204" pitchFamily="18" charset="0"/>
+                                </a:rPr>
+                                <m:t>𝜎</m:t>
+                              </m:r>
+                            </m:e>
+                            <m:sub>
+                              <m:r>
+                                <a:rPr lang="it-IT" sz="2400" i="1" dirty="0" smtClean="0">
+                                  <a:latin typeface="Cambria Math" panose="02040503050406030204" pitchFamily="18" charset="0"/>
+                                </a:rPr>
+                                <m:t>2</m:t>
+                              </m:r>
+                            </m:sub>
+                          </m:sSub>
+                        </m:e>
+                      </m:d>
+                    </m:oMath>
+                  </m:oMathPara>
+                </a14:m>
+                <a:endParaRPr lang="it-IT" sz="2400" dirty="0"/>
+              </a:p>
+            </p:txBody>
+          </p:sp>
+        </mc:Choice>
+        <mc:Fallback>
+          <p:sp>
+            <p:nvSpPr>
+              <p:cNvPr id="5" name="CasellaDiTesto 4">
+                <a:extLst>
+                  <a:ext uri="{FF2B5EF4-FFF2-40B4-BE49-F238E27FC236}">
+                    <a16:creationId xmlns:a16="http://schemas.microsoft.com/office/drawing/2014/main" id="{CD6AA39C-E2F8-5ED9-1A96-4FD70A92E291}"/>
+                  </a:ext>
+                </a:extLst>
+              </p:cNvPr>
+              <p:cNvSpPr txBox="1">
+                <a:spLocks noRot="1" noChangeAspect="1" noMove="1" noResize="1" noEditPoints="1" noAdjustHandles="1" noChangeArrowheads="1" noChangeShapeType="1" noTextEdit="1"/>
+              </p:cNvSpPr>
+              <p:nvPr/>
+            </p:nvSpPr>
+            <p:spPr>
+              <a:xfrm>
+                <a:off x="1458930" y="2712377"/>
+                <a:ext cx="8733034" cy="461665"/>
+              </a:xfrm>
+              <a:prstGeom prst="rect">
+                <a:avLst/>
+              </a:prstGeom>
+              <a:blipFill>
+                <a:blip r:embed="rId3"/>
+                <a:stretch>
+                  <a:fillRect b="-19737"/>
+                </a:stretch>
+              </a:blipFill>
+            </p:spPr>
+            <p:txBody>
+              <a:bodyPr/>
+              <a:lstStyle/>
+              <a:p>
+                <a:r>
+                  <a:rPr lang="it-IT">
+                    <a:noFill/>
+                  </a:rPr>
+                  <a:t> </a:t>
+                </a:r>
+              </a:p>
+            </p:txBody>
+          </p:sp>
+        </mc:Fallback>
+      </mc:AlternateContent>
+      <p:sp>
+        <p:nvSpPr>
+          <p:cNvPr id="6" name="CasellaDiTesto 5">
+            <a:extLst>
+              <a:ext uri="{FF2B5EF4-FFF2-40B4-BE49-F238E27FC236}">
+                <a16:creationId xmlns:a16="http://schemas.microsoft.com/office/drawing/2014/main" id="{E3327CF4-E749-119D-06C7-DB09F6EAFDB6}"/>
+              </a:ext>
+            </a:extLst>
+          </p:cNvPr>
+          <p:cNvSpPr txBox="1"/>
+          <p:nvPr/>
+        </p:nvSpPr>
+        <p:spPr>
+          <a:xfrm>
+            <a:off x="642938" y="1524000"/>
+            <a:ext cx="4798031" cy="923330"/>
+          </a:xfrm>
+          <a:prstGeom prst="rect">
+            <a:avLst/>
+          </a:prstGeom>
+          <a:noFill/>
+        </p:spPr>
+        <p:txBody>
+          <a:bodyPr wrap="square" rtlCol="0">
+            <a:spAutoFit/>
+          </a:bodyPr>
+          <a:lstStyle/>
+          <a:p>
+            <a:r>
+              <a:rPr lang="it-IT" dirty="0"/>
+              <a:t>The model for the </a:t>
+            </a:r>
+            <a:r>
+              <a:rPr lang="it-IT" dirty="0" err="1"/>
+              <a:t>classification</a:t>
+            </a:r>
+            <a:r>
+              <a:rPr lang="it-IT" dirty="0"/>
+              <a:t> </a:t>
+            </a:r>
+            <a:r>
+              <a:rPr lang="it-IT" dirty="0" err="1"/>
+              <a:t>is</a:t>
+            </a:r>
+            <a:r>
+              <a:rPr lang="it-IT" dirty="0"/>
+              <a:t> the </a:t>
+            </a:r>
+            <a:r>
+              <a:rPr lang="it-IT" dirty="0" err="1"/>
+              <a:t>weighted</a:t>
+            </a:r>
+            <a:r>
+              <a:rPr lang="it-IT" dirty="0"/>
+              <a:t> sum of </a:t>
+            </a:r>
+            <a:r>
+              <a:rPr lang="it-IT" dirty="0" err="1"/>
+              <a:t>two</a:t>
+            </a:r>
+            <a:r>
+              <a:rPr lang="it-IT" dirty="0"/>
+              <a:t> log </a:t>
+            </a:r>
+            <a:r>
+              <a:rPr lang="it-IT" dirty="0" err="1"/>
+              <a:t>normal</a:t>
+            </a:r>
+            <a:r>
+              <a:rPr lang="it-IT" dirty="0"/>
+              <a:t> </a:t>
+            </a:r>
+            <a:r>
+              <a:rPr lang="it-IT" dirty="0" err="1"/>
+              <a:t>distribution</a:t>
+            </a:r>
+            <a:r>
+              <a:rPr lang="it-IT" dirty="0"/>
+              <a:t>  </a:t>
+            </a:r>
+          </a:p>
+        </p:txBody>
+      </p:sp>
+      <p:sp>
+        <p:nvSpPr>
+          <p:cNvPr id="7" name="CasellaDiTesto 6">
+            <a:extLst>
+              <a:ext uri="{FF2B5EF4-FFF2-40B4-BE49-F238E27FC236}">
+                <a16:creationId xmlns:a16="http://schemas.microsoft.com/office/drawing/2014/main" id="{CDD0485A-7078-3B2B-9348-8405DC659998}"/>
+              </a:ext>
+            </a:extLst>
+          </p:cNvPr>
+          <p:cNvSpPr txBox="1"/>
+          <p:nvPr/>
+        </p:nvSpPr>
+        <p:spPr>
+          <a:xfrm>
+            <a:off x="893852" y="3842535"/>
+            <a:ext cx="4547117" cy="646331"/>
+          </a:xfrm>
+          <a:prstGeom prst="rect">
+            <a:avLst/>
+          </a:prstGeom>
+          <a:noFill/>
+        </p:spPr>
+        <p:txBody>
+          <a:bodyPr wrap="square" rtlCol="0">
+            <a:spAutoFit/>
+          </a:bodyPr>
+          <a:lstStyle/>
+          <a:p>
+            <a:r>
+              <a:rPr lang="it-IT" dirty="0"/>
+              <a:t>So we have 5 </a:t>
+            </a:r>
+            <a:r>
+              <a:rPr lang="it-IT" dirty="0" err="1"/>
+              <a:t>parameters</a:t>
+            </a:r>
+            <a:r>
+              <a:rPr lang="it-IT" dirty="0"/>
+              <a:t> to estimate, we </a:t>
+            </a:r>
+            <a:r>
+              <a:rPr lang="it-IT" dirty="0" err="1"/>
+              <a:t>will</a:t>
+            </a:r>
+            <a:r>
+              <a:rPr lang="it-IT" dirty="0"/>
+              <a:t> </a:t>
+            </a:r>
+            <a:r>
+              <a:rPr lang="it-IT" dirty="0" err="1"/>
+              <a:t>often</a:t>
+            </a:r>
+            <a:r>
+              <a:rPr lang="it-IT" dirty="0"/>
+              <a:t> call </a:t>
+            </a:r>
+            <a:r>
+              <a:rPr lang="it-IT" dirty="0" err="1"/>
+              <a:t>them</a:t>
+            </a:r>
+            <a:r>
+              <a:rPr lang="it-IT" dirty="0"/>
+              <a:t> </a:t>
+            </a:r>
+            <a:r>
+              <a:rPr lang="it-IT"/>
+              <a:t>\theta </a:t>
+            </a:r>
+            <a:endParaRPr lang="it-IT" dirty="0"/>
+          </a:p>
+        </p:txBody>
+      </p:sp>
+    </p:spTree>
+    <p:extLst>
+      <p:ext uri="{BB962C8B-B14F-4D97-AF65-F5344CB8AC3E}">
+        <p14:creationId xmlns:p14="http://schemas.microsoft.com/office/powerpoint/2010/main" val="3256806828"/>
+      </p:ext>
+    </p:extLst>
+  </p:cSld>
+  <p:clrMapOvr>
+    <a:masterClrMapping/>
+  </p:clrMapOvr>
+</p:sld>
+</file>
+
+<file path=ppt/slides/slide6.xml><?xml version="1.0" encoding="utf-8"?>
+<p:sld xmlns:a="http://schemas.openxmlformats.org/drawingml/2006/main" xmlns:r="http://schemas.openxmlformats.org/officeDocument/2006/relationships" xmlns:p="http://schemas.openxmlformats.org/presentationml/2006/main">
+  <p:cSld>
+    <p:spTree>
+      <p:nvGrpSpPr>
+        <p:cNvPr id="1" name=""/>
+        <p:cNvGrpSpPr/>
+        <p:nvPr/>
+      </p:nvGrpSpPr>
+      <p:grpSpPr>
+        <a:xfrm>
+          <a:off x="0" y="0"/>
+          <a:ext cx="0" cy="0"/>
+          <a:chOff x="0" y="0"/>
+          <a:chExt cx="0" cy="0"/>
+        </a:xfrm>
+      </p:grpSpPr>
+      <p:sp>
+        <p:nvSpPr>
+          <p:cNvPr id="2" name="Titolo 1">
+            <a:extLst>
+              <a:ext uri="{FF2B5EF4-FFF2-40B4-BE49-F238E27FC236}">
                 <a16:creationId xmlns:a16="http://schemas.microsoft.com/office/drawing/2014/main" id="{32DF931F-0CE4-A645-A0BF-7F3424E181B3}"/>
               </a:ext>
             </a:extLst>
@@ -6417,7 +8137,7 @@
               <p:nvPr>
                 <p:extLst>
                   <p:ext uri="{D42A27DB-BD31-4B8C-83A1-F6EECF244321}">
-                    <p14:modId xmlns:p14="http://schemas.microsoft.com/office/powerpoint/2010/main" val="2181910576"/>
+                    <p14:modId xmlns:p14="http://schemas.microsoft.com/office/powerpoint/2010/main" val="3326499666"/>
                   </p:ext>
                 </p:extLst>
               </p:nvPr>
@@ -7054,7 +8774,7 @@
               <p:nvPr>
                 <p:extLst>
                   <p:ext uri="{D42A27DB-BD31-4B8C-83A1-F6EECF244321}">
-                    <p14:modId xmlns:p14="http://schemas.microsoft.com/office/powerpoint/2010/main" val="2181910576"/>
+                    <p14:modId xmlns:p14="http://schemas.microsoft.com/office/powerpoint/2010/main" val="3326499666"/>
                   </p:ext>
                 </p:extLst>
               </p:nvPr>
@@ -7366,7 +9086,7 @@
 </p:sld>
 </file>
 
-<file path=ppt/slides/slide4.xml><?xml version="1.0" encoding="utf-8"?>
+<file path=ppt/slides/slide7.xml><?xml version="1.0" encoding="utf-8"?>
 <p:sld xmlns:a="http://schemas.openxmlformats.org/drawingml/2006/main" xmlns:r="http://schemas.openxmlformats.org/officeDocument/2006/relationships" xmlns:p="http://schemas.openxmlformats.org/presentationml/2006/main">
   <p:cSld>
     <p:spTree>
@@ -7743,7 +9463,7 @@
 </p:sld>
 </file>
 
-<file path=ppt/slides/slide5.xml><?xml version="1.0" encoding="utf-8"?>
+<file path=ppt/slides/slide8.xml><?xml version="1.0" encoding="utf-8"?>
 <p:sld xmlns:a="http://schemas.openxmlformats.org/drawingml/2006/main" xmlns:r="http://schemas.openxmlformats.org/officeDocument/2006/relationships" xmlns:p="http://schemas.openxmlformats.org/presentationml/2006/main">
   <p:cSld>
     <p:spTree>
@@ -7948,7 +9668,7 @@
 </p:sld>
 </file>
 
-<file path=ppt/slides/slide6.xml><?xml version="1.0" encoding="utf-8"?>
+<file path=ppt/slides/slide9.xml><?xml version="1.0" encoding="utf-8"?>
 <p:sld xmlns:a="http://schemas.openxmlformats.org/drawingml/2006/main" xmlns:r="http://schemas.openxmlformats.org/officeDocument/2006/relationships" xmlns:p="http://schemas.openxmlformats.org/presentationml/2006/main">
   <p:cSld>
     <p:spTree>

--- a/Seminar.pptx
+++ b/Seminar.pptx
@@ -5,7 +5,7 @@
     <p:sldMasterId id="2147483684" r:id="rId1"/>
   </p:sldMasterIdLst>
   <p:notesMasterIdLst>
-    <p:notesMasterId r:id="rId11"/>
+    <p:notesMasterId r:id="rId14"/>
   </p:notesMasterIdLst>
   <p:sldIdLst>
     <p:sldId id="276" r:id="rId2"/>
@@ -13,10 +13,13 @@
     <p:sldId id="329" r:id="rId4"/>
     <p:sldId id="330" r:id="rId5"/>
     <p:sldId id="331" r:id="rId6"/>
-    <p:sldId id="328" r:id="rId7"/>
-    <p:sldId id="327" r:id="rId8"/>
-    <p:sldId id="289" r:id="rId9"/>
-    <p:sldId id="290" r:id="rId10"/>
+    <p:sldId id="332" r:id="rId7"/>
+    <p:sldId id="333" r:id="rId8"/>
+    <p:sldId id="334" r:id="rId9"/>
+    <p:sldId id="328" r:id="rId10"/>
+    <p:sldId id="327" r:id="rId11"/>
+    <p:sldId id="289" r:id="rId12"/>
+    <p:sldId id="290" r:id="rId13"/>
   </p:sldIdLst>
   <p:sldSz cx="12192000" cy="6858000"/>
   <p:notesSz cx="6858000" cy="9144000"/>
@@ -6015,6 +6018,659 @@
 </p:sld>
 </file>
 
+<file path=ppt/slides/slide10.xml><?xml version="1.0" encoding="utf-8"?>
+<p:sld xmlns:a="http://schemas.openxmlformats.org/drawingml/2006/main" xmlns:r="http://schemas.openxmlformats.org/officeDocument/2006/relationships" xmlns:p="http://schemas.openxmlformats.org/presentationml/2006/main">
+  <p:cSld>
+    <p:spTree>
+      <p:nvGrpSpPr>
+        <p:cNvPr id="1" name="">
+          <a:extLst>
+            <a:ext uri="{FF2B5EF4-FFF2-40B4-BE49-F238E27FC236}">
+              <a16:creationId xmlns:a16="http://schemas.microsoft.com/office/drawing/2014/main" id="{94B4B57A-6293-2976-B48B-555FE2F44DE3}"/>
+            </a:ext>
+          </a:extLst>
+        </p:cNvPr>
+        <p:cNvGrpSpPr/>
+        <p:nvPr/>
+      </p:nvGrpSpPr>
+      <p:grpSpPr>
+        <a:xfrm>
+          <a:off x="0" y="0"/>
+          <a:ext cx="0" cy="0"/>
+          <a:chOff x="0" y="0"/>
+          <a:chExt cx="0" cy="0"/>
+        </a:xfrm>
+      </p:grpSpPr>
+      <p:sp>
+        <p:nvSpPr>
+          <p:cNvPr id="2" name="Titolo 1">
+            <a:extLst>
+              <a:ext uri="{FF2B5EF4-FFF2-40B4-BE49-F238E27FC236}">
+                <a16:creationId xmlns:a16="http://schemas.microsoft.com/office/drawing/2014/main" id="{43B18B03-F308-DD92-1281-8B17984DC3E6}"/>
+              </a:ext>
+            </a:extLst>
+          </p:cNvPr>
+          <p:cNvSpPr>
+            <a:spLocks noGrp="1"/>
+          </p:cNvSpPr>
+          <p:nvPr>
+            <p:ph type="title"/>
+          </p:nvPr>
+        </p:nvSpPr>
+        <p:spPr/>
+        <p:txBody>
+          <a:bodyPr/>
+          <a:lstStyle/>
+          <a:p>
+            <a:r>
+              <a:rPr lang="en-GB" noProof="0" dirty="0" err="1"/>
+              <a:t>Conclusioni</a:t>
+            </a:r>
+            <a:endParaRPr lang="en-GB" noProof="0" dirty="0"/>
+          </a:p>
+        </p:txBody>
+      </p:sp>
+      <p:sp>
+        <p:nvSpPr>
+          <p:cNvPr id="4" name="Segnaposto contenuto 4">
+            <a:extLst>
+              <a:ext uri="{FF2B5EF4-FFF2-40B4-BE49-F238E27FC236}">
+                <a16:creationId xmlns:a16="http://schemas.microsoft.com/office/drawing/2014/main" id="{F9B62D35-990E-4023-5A62-EB1014B42B8B}"/>
+              </a:ext>
+            </a:extLst>
+          </p:cNvPr>
+          <p:cNvSpPr>
+            <a:spLocks noGrp="1"/>
+          </p:cNvSpPr>
+          <p:nvPr>
+            <p:ph idx="1"/>
+          </p:nvPr>
+        </p:nvSpPr>
+        <p:spPr>
+          <a:xfrm>
+            <a:off x="642746" y="1714500"/>
+            <a:ext cx="9625203" cy="4502149"/>
+          </a:xfrm>
+        </p:spPr>
+        <p:txBody>
+          <a:bodyPr>
+            <a:normAutofit/>
+          </a:bodyPr>
+          <a:lstStyle/>
+          <a:p>
+            <a:pPr>
+              <a:buSzPct val="90000"/>
+              <a:buFont typeface="Wingdings" panose="05000000000000000000" pitchFamily="2" charset="2"/>
+              <a:buChar char="Ø"/>
+            </a:pPr>
+            <a:r>
+              <a:rPr lang="en-GB" sz="2400" noProof="0" dirty="0"/>
+              <a:t> Le </a:t>
+            </a:r>
+            <a:r>
+              <a:rPr lang="en-GB" sz="2400" noProof="0" dirty="0" err="1"/>
+              <a:t>onde</a:t>
+            </a:r>
+            <a:r>
+              <a:rPr lang="en-GB" sz="2400" noProof="0" dirty="0"/>
+              <a:t> di Alfvén con </a:t>
+            </a:r>
+            <a:r>
+              <a:rPr lang="en-GB" sz="2400" noProof="0" dirty="0" err="1"/>
+              <a:t>conduttività</a:t>
+            </a:r>
+            <a:r>
+              <a:rPr lang="en-GB" sz="2400" noProof="0" dirty="0"/>
+              <a:t> </a:t>
+            </a:r>
+            <a:r>
+              <a:rPr lang="en-GB" sz="2400" noProof="0" dirty="0" err="1"/>
+              <a:t>finita</a:t>
+            </a:r>
+            <a:r>
+              <a:rPr lang="en-GB" sz="2400" noProof="0" dirty="0"/>
+              <a:t> </a:t>
+            </a:r>
+            <a:r>
+              <a:rPr lang="en-GB" sz="2400" noProof="0" dirty="0" err="1"/>
+              <a:t>vengono</a:t>
+            </a:r>
+            <a:r>
+              <a:rPr lang="en-GB" sz="2400" noProof="0" dirty="0"/>
+              <a:t> </a:t>
+            </a:r>
+            <a:r>
+              <a:rPr lang="en-GB" sz="2400" noProof="0" dirty="0" err="1"/>
+              <a:t>smorzate</a:t>
+            </a:r>
+            <a:endParaRPr lang="en-GB" sz="2400" noProof="0" dirty="0"/>
+          </a:p>
+          <a:p>
+            <a:pPr>
+              <a:buSzPct val="90000"/>
+              <a:buFont typeface="Wingdings" panose="05000000000000000000" pitchFamily="2" charset="2"/>
+              <a:buChar char="Ø"/>
+            </a:pPr>
+            <a:r>
+              <a:rPr lang="en-GB" sz="2400" noProof="0" dirty="0"/>
+              <a:t> Il Sole ha </a:t>
+            </a:r>
+            <a:r>
+              <a:rPr lang="en-GB" sz="2400" noProof="0" dirty="0" err="1"/>
+              <a:t>diversi</a:t>
+            </a:r>
+            <a:r>
+              <a:rPr lang="en-GB" sz="2400" noProof="0" dirty="0"/>
+              <a:t> </a:t>
+            </a:r>
+            <a:r>
+              <a:rPr lang="en-GB" sz="2400" noProof="0" dirty="0" err="1"/>
+              <a:t>modi</a:t>
+            </a:r>
+            <a:r>
+              <a:rPr lang="en-GB" sz="2400" noProof="0" dirty="0"/>
+              <a:t> di </a:t>
+            </a:r>
+            <a:r>
+              <a:rPr lang="en-GB" sz="2400" noProof="0" dirty="0" err="1"/>
+              <a:t>generare</a:t>
+            </a:r>
+            <a:r>
+              <a:rPr lang="en-GB" sz="2400" noProof="0" dirty="0"/>
+              <a:t> </a:t>
+            </a:r>
+            <a:r>
+              <a:rPr lang="en-GB" sz="2400" noProof="0" dirty="0" err="1"/>
+              <a:t>onde</a:t>
+            </a:r>
+            <a:r>
+              <a:rPr lang="en-GB" sz="2400" noProof="0" dirty="0"/>
+              <a:t> magneto-</a:t>
+            </a:r>
+            <a:r>
+              <a:rPr lang="en-GB" sz="2400" noProof="0" dirty="0" err="1"/>
+              <a:t>idrodinamiche</a:t>
+            </a:r>
+            <a:endParaRPr lang="en-GB" sz="2400" noProof="0" dirty="0"/>
+          </a:p>
+          <a:p>
+            <a:pPr>
+              <a:buSzPct val="90000"/>
+              <a:buFont typeface="Wingdings" panose="05000000000000000000" pitchFamily="2" charset="2"/>
+              <a:buChar char="Ø"/>
+            </a:pPr>
+            <a:r>
+              <a:rPr lang="en-GB" sz="2400" noProof="0" dirty="0"/>
+              <a:t> Le </a:t>
+            </a:r>
+            <a:r>
+              <a:rPr lang="en-GB" sz="2400" noProof="0" dirty="0" err="1"/>
+              <a:t>perturbazioni</a:t>
+            </a:r>
+            <a:r>
+              <a:rPr lang="en-GB" sz="2400" noProof="0" dirty="0"/>
+              <a:t> </a:t>
+            </a:r>
+            <a:r>
+              <a:rPr lang="en-GB" sz="2400" noProof="0" dirty="0" err="1"/>
+              <a:t>della</a:t>
+            </a:r>
+            <a:r>
+              <a:rPr lang="en-GB" sz="2400" noProof="0" dirty="0"/>
+              <a:t> </a:t>
+            </a:r>
+            <a:r>
+              <a:rPr lang="en-GB" sz="2400" noProof="0" dirty="0" err="1"/>
+              <a:t>fotosfera</a:t>
+            </a:r>
+            <a:r>
+              <a:rPr lang="en-GB" sz="2400" noProof="0" dirty="0"/>
+              <a:t> </a:t>
+            </a:r>
+            <a:r>
+              <a:rPr lang="en-GB" sz="2400" noProof="0" dirty="0" err="1"/>
+              <a:t>viste</a:t>
+            </a:r>
+            <a:r>
+              <a:rPr lang="en-GB" sz="2400" noProof="0" dirty="0"/>
+              <a:t> come </a:t>
+            </a:r>
+            <a:r>
+              <a:rPr lang="en-GB" sz="2400" noProof="0" dirty="0" err="1"/>
+              <a:t>granulazione</a:t>
+            </a:r>
+            <a:r>
+              <a:rPr lang="en-GB" sz="2400" noProof="0" dirty="0"/>
+              <a:t> </a:t>
+            </a:r>
+            <a:r>
+              <a:rPr lang="en-GB" sz="2400" noProof="0" dirty="0" err="1"/>
+              <a:t>danno</a:t>
+            </a:r>
+            <a:r>
+              <a:rPr lang="en-GB" sz="2400" noProof="0" dirty="0"/>
+              <a:t> </a:t>
+            </a:r>
+            <a:r>
+              <a:rPr lang="en-GB" sz="2400" noProof="0" dirty="0" err="1"/>
+              <a:t>onde</a:t>
+            </a:r>
+            <a:r>
+              <a:rPr lang="en-GB" sz="2400" noProof="0" dirty="0"/>
+              <a:t> magneto-</a:t>
+            </a:r>
+            <a:r>
+              <a:rPr lang="en-GB" sz="2400" noProof="0" dirty="0" err="1"/>
+              <a:t>idrodinamiche</a:t>
+            </a:r>
+            <a:endParaRPr lang="en-GB" sz="2400" noProof="0" dirty="0"/>
+          </a:p>
+          <a:p>
+            <a:pPr>
+              <a:buSzPct val="90000"/>
+              <a:buFont typeface="Wingdings" panose="05000000000000000000" pitchFamily="2" charset="2"/>
+              <a:buChar char="Ø"/>
+            </a:pPr>
+            <a:r>
+              <a:rPr lang="en-GB" sz="2400" noProof="0" dirty="0"/>
+              <a:t> </a:t>
+            </a:r>
+            <a:r>
+              <a:rPr lang="en-GB" sz="2400" noProof="0" dirty="0" err="1"/>
+              <a:t>Vengono</a:t>
+            </a:r>
+            <a:r>
+              <a:rPr lang="en-GB" sz="2400" noProof="0" dirty="0"/>
+              <a:t> </a:t>
+            </a:r>
+            <a:r>
+              <a:rPr lang="en-GB" sz="2400" noProof="0" dirty="0" err="1"/>
+              <a:t>più</a:t>
+            </a:r>
+            <a:r>
+              <a:rPr lang="en-GB" sz="2400" noProof="0" dirty="0"/>
+              <a:t> </a:t>
+            </a:r>
+            <a:r>
+              <a:rPr lang="en-GB" sz="2400" noProof="0" dirty="0" err="1"/>
+              <a:t>facilmente</a:t>
+            </a:r>
+            <a:r>
+              <a:rPr lang="en-GB" sz="2400" noProof="0" dirty="0"/>
+              <a:t> </a:t>
+            </a:r>
+            <a:r>
+              <a:rPr lang="en-GB" sz="2400" noProof="0" dirty="0" err="1"/>
+              <a:t>assorbite</a:t>
+            </a:r>
+            <a:r>
+              <a:rPr lang="en-GB" sz="2400" noProof="0" dirty="0"/>
+              <a:t> </a:t>
+            </a:r>
+            <a:r>
+              <a:rPr lang="en-GB" sz="2400" noProof="0" dirty="0" err="1"/>
+              <a:t>nella</a:t>
+            </a:r>
+            <a:r>
+              <a:rPr lang="en-GB" sz="2400" noProof="0" dirty="0"/>
+              <a:t> corona </a:t>
+            </a:r>
+            <a:r>
+              <a:rPr lang="en-GB" sz="2400" noProof="0" dirty="0" err="1"/>
+              <a:t>solare</a:t>
+            </a:r>
+            <a:endParaRPr lang="en-GB" sz="2400" noProof="0" dirty="0"/>
+          </a:p>
+          <a:p>
+            <a:pPr>
+              <a:buSzPct val="90000"/>
+              <a:buFont typeface="Wingdings" panose="05000000000000000000" pitchFamily="2" charset="2"/>
+              <a:buChar char="Ø"/>
+            </a:pPr>
+            <a:r>
+              <a:rPr lang="en-GB" sz="2400" noProof="0" dirty="0"/>
+              <a:t> </a:t>
+            </a:r>
+            <a:r>
+              <a:rPr lang="en-GB" sz="2400" noProof="0" dirty="0" err="1"/>
+              <a:t>Possibile</a:t>
+            </a:r>
+            <a:r>
+              <a:rPr lang="en-GB" sz="2400" noProof="0" dirty="0"/>
+              <a:t> </a:t>
+            </a:r>
+            <a:r>
+              <a:rPr lang="en-GB" sz="2400" noProof="0" dirty="0" err="1"/>
+              <a:t>spiegazione</a:t>
+            </a:r>
+            <a:r>
+              <a:rPr lang="en-GB" sz="2400" noProof="0" dirty="0"/>
+              <a:t> </a:t>
+            </a:r>
+            <a:r>
+              <a:rPr lang="en-GB" sz="2400" noProof="0" dirty="0" err="1"/>
+              <a:t>della</a:t>
+            </a:r>
+            <a:r>
+              <a:rPr lang="en-GB" sz="2400" noProof="0" dirty="0"/>
+              <a:t> </a:t>
+            </a:r>
+            <a:r>
+              <a:rPr lang="en-GB" sz="2400" noProof="0" dirty="0" err="1"/>
+              <a:t>maggiore</a:t>
+            </a:r>
+            <a:r>
+              <a:rPr lang="en-GB" sz="2400" noProof="0" dirty="0"/>
+              <a:t> </a:t>
+            </a:r>
+            <a:r>
+              <a:rPr lang="en-GB" sz="2400" noProof="0" dirty="0" err="1"/>
+              <a:t>temperatura</a:t>
+            </a:r>
+            <a:r>
+              <a:rPr lang="en-GB" sz="2400" noProof="0" dirty="0"/>
+              <a:t> </a:t>
+            </a:r>
+            <a:r>
+              <a:rPr lang="en-GB" sz="2400" noProof="0" dirty="0" err="1"/>
+              <a:t>della</a:t>
+            </a:r>
+            <a:r>
+              <a:rPr lang="en-GB" sz="2400" noProof="0" dirty="0"/>
+              <a:t> corona</a:t>
+            </a:r>
+          </a:p>
+        </p:txBody>
+      </p:sp>
+    </p:spTree>
+    <p:extLst>
+      <p:ext uri="{BB962C8B-B14F-4D97-AF65-F5344CB8AC3E}">
+        <p14:creationId xmlns:p14="http://schemas.microsoft.com/office/powerpoint/2010/main" val="976120280"/>
+      </p:ext>
+    </p:extLst>
+  </p:cSld>
+  <p:clrMapOvr>
+    <a:masterClrMapping/>
+  </p:clrMapOvr>
+</p:sld>
+</file>
+
+<file path=ppt/slides/slide11.xml><?xml version="1.0" encoding="utf-8"?>
+<p:sld xmlns:a="http://schemas.openxmlformats.org/drawingml/2006/main" xmlns:r="http://schemas.openxmlformats.org/officeDocument/2006/relationships" xmlns:p="http://schemas.openxmlformats.org/presentationml/2006/main">
+  <p:cSld>
+    <p:spTree>
+      <p:nvGrpSpPr>
+        <p:cNvPr id="1" name=""/>
+        <p:cNvGrpSpPr/>
+        <p:nvPr/>
+      </p:nvGrpSpPr>
+      <p:grpSpPr>
+        <a:xfrm>
+          <a:off x="0" y="0"/>
+          <a:ext cx="0" cy="0"/>
+          <a:chOff x="0" y="0"/>
+          <a:chExt cx="0" cy="0"/>
+        </a:xfrm>
+      </p:grpSpPr>
+      <p:sp>
+        <p:nvSpPr>
+          <p:cNvPr id="2" name="Titolo 1">
+            <a:extLst>
+              <a:ext uri="{FF2B5EF4-FFF2-40B4-BE49-F238E27FC236}">
+                <a16:creationId xmlns:a16="http://schemas.microsoft.com/office/drawing/2014/main" id="{EFD0BC4E-0507-38A8-8010-BD9A0EBB1660}"/>
+              </a:ext>
+            </a:extLst>
+          </p:cNvPr>
+          <p:cNvSpPr>
+            <a:spLocks noGrp="1"/>
+          </p:cNvSpPr>
+          <p:nvPr>
+            <p:ph type="title"/>
+          </p:nvPr>
+        </p:nvSpPr>
+        <p:spPr/>
+        <p:txBody>
+          <a:bodyPr/>
+          <a:lstStyle/>
+          <a:p>
+            <a:r>
+              <a:rPr lang="en-GB" noProof="0" dirty="0" err="1"/>
+              <a:t>Bibliografia</a:t>
+            </a:r>
+            <a:endParaRPr lang="en-GB" noProof="0" dirty="0"/>
+          </a:p>
+        </p:txBody>
+      </p:sp>
+      <p:sp>
+        <p:nvSpPr>
+          <p:cNvPr id="3" name="Segnaposto contenuto 2">
+            <a:extLst>
+              <a:ext uri="{FF2B5EF4-FFF2-40B4-BE49-F238E27FC236}">
+                <a16:creationId xmlns:a16="http://schemas.microsoft.com/office/drawing/2014/main" id="{7BAC323B-B885-CD5A-7BAD-38DB1BA09399}"/>
+              </a:ext>
+            </a:extLst>
+          </p:cNvPr>
+          <p:cNvSpPr>
+            <a:spLocks noGrp="1"/>
+          </p:cNvSpPr>
+          <p:nvPr>
+            <p:ph idx="1"/>
+          </p:nvPr>
+        </p:nvSpPr>
+        <p:spPr>
+          <a:xfrm>
+            <a:off x="642746" y="1417833"/>
+            <a:ext cx="9826620" cy="5301465"/>
+          </a:xfrm>
+        </p:spPr>
+        <p:txBody>
+          <a:bodyPr>
+            <a:normAutofit/>
+          </a:bodyPr>
+          <a:lstStyle/>
+          <a:p>
+            <a:pPr marL="0" indent="0">
+              <a:buNone/>
+            </a:pPr>
+            <a:r>
+              <a:rPr lang="en-GB" sz="2000" noProof="0" dirty="0" err="1">
+                <a:solidFill>
+                  <a:schemeClr val="tx1">
+                    <a:lumMod val="95000"/>
+                  </a:schemeClr>
+                </a:solidFill>
+              </a:rPr>
+              <a:t>Questo</a:t>
+            </a:r>
+            <a:r>
+              <a:rPr lang="en-GB" sz="2000" noProof="0" dirty="0">
+                <a:solidFill>
+                  <a:schemeClr val="tx1">
+                    <a:lumMod val="95000"/>
+                  </a:schemeClr>
+                </a:solidFill>
+              </a:rPr>
+              <a:t> </a:t>
+            </a:r>
+            <a:r>
+              <a:rPr lang="en-GB" sz="2000" noProof="0" dirty="0" err="1">
+                <a:solidFill>
+                  <a:schemeClr val="tx1">
+                    <a:lumMod val="95000"/>
+                  </a:schemeClr>
+                </a:solidFill>
+              </a:rPr>
+              <a:t>articolo</a:t>
+            </a:r>
+            <a:r>
+              <a:rPr lang="en-GB" sz="2000" noProof="0" dirty="0">
+                <a:solidFill>
+                  <a:schemeClr val="tx1">
+                    <a:lumMod val="95000"/>
+                  </a:schemeClr>
+                </a:solidFill>
+              </a:rPr>
+              <a:t>: </a:t>
+            </a:r>
+            <a:r>
+              <a:rPr lang="en-GB" sz="2000" noProof="0" dirty="0"/>
+              <a:t>H. Alfvén, Magneto hydrodynamic waves, and the heating of the solar corona, Monthly Notices of the Royal Astronomical Society </a:t>
+            </a:r>
+            <a:r>
+              <a:rPr lang="en-GB" sz="2000" b="1" noProof="0" dirty="0"/>
+              <a:t>107</a:t>
+            </a:r>
+            <a:r>
+              <a:rPr lang="en-GB" sz="2000" noProof="0" dirty="0"/>
+              <a:t>, 211 (1947).</a:t>
+            </a:r>
+          </a:p>
+          <a:p>
+            <a:pPr marL="0" indent="0">
+              <a:buNone/>
+            </a:pPr>
+            <a:endParaRPr lang="en-GB" sz="2000" noProof="0" dirty="0"/>
+          </a:p>
+          <a:p>
+            <a:pPr marL="0" indent="0">
+              <a:buNone/>
+            </a:pPr>
+            <a:r>
+              <a:rPr lang="en-GB" sz="2000" noProof="0" dirty="0"/>
+              <a:t>[1]: H. Alfven, On the existence of electromagnetic-hydro· dynamic waves., Ark. Mat. </a:t>
+            </a:r>
+            <a:r>
+              <a:rPr lang="en-GB" sz="2000" noProof="0" dirty="0" err="1"/>
+              <a:t>Astr</a:t>
+            </a:r>
+            <a:r>
+              <a:rPr lang="en-GB" sz="2000" noProof="0" dirty="0"/>
+              <a:t>. Fys.t </a:t>
+            </a:r>
+            <a:r>
+              <a:rPr lang="en-GB" sz="2000" b="1" noProof="0" dirty="0"/>
+              <a:t>29B</a:t>
+            </a:r>
+            <a:r>
+              <a:rPr lang="en-GB" sz="2000" noProof="0" dirty="0"/>
+              <a:t>, (1942). </a:t>
+            </a:r>
+          </a:p>
+          <a:p>
+            <a:pPr marL="0" indent="0">
+              <a:buNone/>
+            </a:pPr>
+            <a:endParaRPr lang="en-GB" sz="2000" noProof="0" dirty="0"/>
+          </a:p>
+          <a:p>
+            <a:pPr marL="0" indent="0">
+              <a:buNone/>
+            </a:pPr>
+            <a:r>
+              <a:rPr lang="en-GB" sz="2000" noProof="0" dirty="0"/>
+              <a:t>[2]: T. G. Cowling, The electrical conductivity of an ionized gas in a magnetic field, with applications to the solar atmosphere and the ionosphere, Proc. A </a:t>
+            </a:r>
+            <a:r>
+              <a:rPr lang="en-GB" sz="2000" b="1" noProof="0" dirty="0"/>
+              <a:t>183</a:t>
+            </a:r>
+            <a:r>
+              <a:rPr lang="en-GB" sz="2000" noProof="0" dirty="0"/>
+              <a:t>, 453 (1945).</a:t>
+            </a:r>
+          </a:p>
+          <a:p>
+            <a:pPr marL="0" indent="0">
+              <a:buNone/>
+            </a:pPr>
+            <a:endParaRPr lang="en-GB" sz="2000" noProof="0" dirty="0"/>
+          </a:p>
+        </p:txBody>
+      </p:sp>
+    </p:spTree>
+    <p:extLst>
+      <p:ext uri="{BB962C8B-B14F-4D97-AF65-F5344CB8AC3E}">
+        <p14:creationId xmlns:p14="http://schemas.microsoft.com/office/powerpoint/2010/main" val="2326524602"/>
+      </p:ext>
+    </p:extLst>
+  </p:cSld>
+  <p:clrMapOvr>
+    <a:masterClrMapping/>
+  </p:clrMapOvr>
+</p:sld>
+</file>
+
+<file path=ppt/slides/slide12.xml><?xml version="1.0" encoding="utf-8"?>
+<p:sld xmlns:a="http://schemas.openxmlformats.org/drawingml/2006/main" xmlns:r="http://schemas.openxmlformats.org/officeDocument/2006/relationships" xmlns:p="http://schemas.openxmlformats.org/presentationml/2006/main">
+  <p:cSld>
+    <p:spTree>
+      <p:nvGrpSpPr>
+        <p:cNvPr id="1" name=""/>
+        <p:cNvGrpSpPr/>
+        <p:nvPr/>
+      </p:nvGrpSpPr>
+      <p:grpSpPr>
+        <a:xfrm>
+          <a:off x="0" y="0"/>
+          <a:ext cx="0" cy="0"/>
+          <a:chOff x="0" y="0"/>
+          <a:chExt cx="0" cy="0"/>
+        </a:xfrm>
+      </p:grpSpPr>
+      <p:sp>
+        <p:nvSpPr>
+          <p:cNvPr id="2" name="Titolo 1">
+            <a:extLst>
+              <a:ext uri="{FF2B5EF4-FFF2-40B4-BE49-F238E27FC236}">
+                <a16:creationId xmlns:a16="http://schemas.microsoft.com/office/drawing/2014/main" id="{439A5647-C4A9-AA24-0F75-5527236F72AB}"/>
+              </a:ext>
+            </a:extLst>
+          </p:cNvPr>
+          <p:cNvSpPr>
+            <a:spLocks noGrp="1"/>
+          </p:cNvSpPr>
+          <p:nvPr>
+            <p:ph type="ctrTitle"/>
+          </p:nvPr>
+        </p:nvSpPr>
+        <p:spPr>
+          <a:xfrm>
+            <a:off x="2060722" y="2164611"/>
+            <a:ext cx="8070556" cy="2528778"/>
+          </a:xfrm>
+        </p:spPr>
+        <p:txBody>
+          <a:bodyPr anchor="ctr">
+            <a:normAutofit/>
+          </a:bodyPr>
+          <a:lstStyle/>
+          <a:p>
+            <a:pPr algn="ctr"/>
+            <a:r>
+              <a:rPr lang="en-GB" sz="6000" noProof="0" dirty="0"/>
+              <a:t>Grazie per </a:t>
+            </a:r>
+            <a:r>
+              <a:rPr lang="en-GB" sz="6000" noProof="0" dirty="0" err="1"/>
+              <a:t>l’attenzione</a:t>
+            </a:r>
+            <a:endParaRPr lang="en-GB" sz="6000" noProof="0" dirty="0"/>
+          </a:p>
+        </p:txBody>
+      </p:sp>
+    </p:spTree>
+    <p:extLst>
+      <p:ext uri="{BB962C8B-B14F-4D97-AF65-F5344CB8AC3E}">
+        <p14:creationId xmlns:p14="http://schemas.microsoft.com/office/powerpoint/2010/main" val="1653933529"/>
+      </p:ext>
+    </p:extLst>
+  </p:cSld>
+  <p:clrMapOvr>
+    <a:masterClrMapping/>
+  </p:clrMapOvr>
+</p:sld>
+</file>
+
 <file path=ppt/slides/slide2.xml><?xml version="1.0" encoding="utf-8"?>
 <p:sld xmlns:a="http://schemas.openxmlformats.org/drawingml/2006/main" xmlns:r="http://schemas.openxmlformats.org/officeDocument/2006/relationships" xmlns:p="http://schemas.openxmlformats.org/presentationml/2006/main">
   <p:cSld>
@@ -6110,7 +6766,7 @@
                     <m:func>
                       <m:funcPr>
                         <m:ctrlPr>
-                          <a:rPr lang="it-IT" sz="2400" b="0" i="1" noProof="0" dirty="0" smtClean="0">
+                          <a:rPr lang="en-GB" sz="2400" b="0" i="1" noProof="0" smtClean="0">
                             <a:latin typeface="Cambria Math" panose="02040503050406030204" pitchFamily="18" charset="0"/>
                           </a:rPr>
                         </m:ctrlPr>
@@ -6120,7 +6776,7 @@
                           <m:rPr>
                             <m:sty m:val="p"/>
                           </m:rPr>
-                          <a:rPr lang="it-IT" sz="2400" b="0" i="0" noProof="0" dirty="0" smtClean="0">
+                          <a:rPr lang="en-GB" sz="2400" b="0" i="0" noProof="0" smtClean="0">
                             <a:latin typeface="Cambria Math" panose="02040503050406030204" pitchFamily="18" charset="0"/>
                           </a:rPr>
                           <m:t>log</m:t>
@@ -6130,7 +6786,7 @@
                         <m:d>
                           <m:dPr>
                             <m:ctrlPr>
-                              <a:rPr lang="it-IT" sz="2400" b="0" i="1" noProof="0" dirty="0" smtClean="0">
+                              <a:rPr lang="en-GB" sz="2400" b="0" i="1" noProof="0" smtClean="0">
                                 <a:latin typeface="Cambria Math" panose="02040503050406030204" pitchFamily="18" charset="0"/>
                               </a:rPr>
                             </m:ctrlPr>
@@ -6139,14 +6795,14 @@
                             <m:sSub>
                               <m:sSubPr>
                                 <m:ctrlPr>
-                                  <a:rPr lang="en-GB" sz="2400" b="0" i="1" noProof="0" dirty="0" smtClean="0">
+                                  <a:rPr lang="en-GB" sz="2400" b="0" i="1" noProof="0" smtClean="0">
                                     <a:latin typeface="Cambria Math" panose="02040503050406030204" pitchFamily="18" charset="0"/>
                                   </a:rPr>
                                 </m:ctrlPr>
                               </m:sSubPr>
                               <m:e>
                                 <m:r>
-                                  <a:rPr lang="en-GB" sz="2400" i="1" noProof="0" dirty="0" smtClean="0">
+                                  <a:rPr lang="en-GB" sz="2400" i="1" noProof="0" smtClean="0">
                                     <a:latin typeface="Cambria Math" panose="02040503050406030204" pitchFamily="18" charset="0"/>
                                   </a:rPr>
                                   <m:t>𝑇</m:t>
@@ -6154,13 +6810,13 @@
                               </m:e>
                               <m:sub>
                                 <m:r>
-                                  <a:rPr lang="en-GB" sz="2400" i="1" noProof="0" dirty="0" smtClean="0">
+                                  <a:rPr lang="en-GB" sz="2400" i="1" noProof="0" smtClean="0">
                                     <a:latin typeface="Cambria Math" panose="02040503050406030204" pitchFamily="18" charset="0"/>
                                   </a:rPr>
                                   <m:t>9</m:t>
                                 </m:r>
                                 <m:r>
-                                  <a:rPr lang="it-IT" sz="2400" b="0" i="1" noProof="0" dirty="0" smtClean="0">
+                                  <a:rPr lang="en-GB" sz="2400" b="0" i="1" noProof="0" smtClean="0">
                                     <a:latin typeface="Cambria Math" panose="02040503050406030204" pitchFamily="18" charset="0"/>
                                   </a:rPr>
                                   <m:t>0</m:t>
@@ -6509,7 +7165,7 @@
           <a:lstStyle/>
           <a:p>
             <a:r>
-              <a:rPr lang="it-IT" dirty="0"/>
+              <a:rPr lang="en-GB" noProof="0" dirty="0"/>
               <a:t>The T_90</a:t>
             </a:r>
           </a:p>
@@ -6544,7 +7200,7 @@
           <a:lstStyle/>
           <a:p>
             <a:r>
-              <a:rPr lang="it-IT" dirty="0"/>
+              <a:rPr lang="en-GB" noProof="0" dirty="0"/>
               <a:t>The HR</a:t>
             </a:r>
           </a:p>
@@ -6604,7 +7260,7 @@
               <a:lstStyle/>
               <a:p>
                 <a:r>
-                  <a:rPr lang="en-GB" dirty="0"/>
+                  <a:rPr lang="en-GB" noProof="0" dirty="0"/>
                   <a:t>Classification on </a:t>
                 </a:r>
                 <a14:m>
@@ -6612,7 +7268,7 @@
                     <m:func>
                       <m:funcPr>
                         <m:ctrlPr>
-                          <a:rPr lang="it-IT" i="1" dirty="0">
+                          <a:rPr lang="en-GB" i="1" noProof="0" smtClean="0">
                             <a:latin typeface="Cambria Math" panose="02040503050406030204" pitchFamily="18" charset="0"/>
                           </a:rPr>
                         </m:ctrlPr>
@@ -6622,7 +7278,7 @@
                           <m:rPr>
                             <m:sty m:val="p"/>
                           </m:rPr>
-                          <a:rPr lang="it-IT" dirty="0">
+                          <a:rPr lang="en-GB" noProof="0" smtClean="0">
                             <a:latin typeface="Cambria Math" panose="02040503050406030204" pitchFamily="18" charset="0"/>
                           </a:rPr>
                           <m:t>log</m:t>
@@ -6632,7 +7288,7 @@
                         <m:d>
                           <m:dPr>
                             <m:ctrlPr>
-                              <a:rPr lang="it-IT" i="1" dirty="0">
+                              <a:rPr lang="en-GB" i="1" noProof="0" smtClean="0">
                                 <a:latin typeface="Cambria Math" panose="02040503050406030204" pitchFamily="18" charset="0"/>
                               </a:rPr>
                             </m:ctrlPr>
@@ -6641,14 +7297,14 @@
                             <m:sSub>
                               <m:sSubPr>
                                 <m:ctrlPr>
-                                  <a:rPr lang="en-GB" i="1" dirty="0">
+                                  <a:rPr lang="en-GB" i="1" noProof="0">
                                     <a:latin typeface="Cambria Math" panose="02040503050406030204" pitchFamily="18" charset="0"/>
                                   </a:rPr>
                                 </m:ctrlPr>
                               </m:sSubPr>
                               <m:e>
                                 <m:r>
-                                  <a:rPr lang="en-GB" i="1" dirty="0">
+                                  <a:rPr lang="en-GB" i="1" noProof="0">
                                     <a:latin typeface="Cambria Math" panose="02040503050406030204" pitchFamily="18" charset="0"/>
                                   </a:rPr>
                                   <m:t>𝑇</m:t>
@@ -6656,13 +7312,13 @@
                               </m:e>
                               <m:sub>
                                 <m:r>
-                                  <a:rPr lang="en-GB" i="1" dirty="0">
+                                  <a:rPr lang="en-GB" i="1" noProof="0">
                                     <a:latin typeface="Cambria Math" panose="02040503050406030204" pitchFamily="18" charset="0"/>
                                   </a:rPr>
                                   <m:t>9</m:t>
                                 </m:r>
                                 <m:r>
-                                  <a:rPr lang="it-IT" i="1" dirty="0">
+                                  <a:rPr lang="en-GB" i="1" noProof="0" smtClean="0">
                                     <a:latin typeface="Cambria Math" panose="02040503050406030204" pitchFamily="18" charset="0"/>
                                   </a:rPr>
                                   <m:t>0</m:t>
@@ -6676,7 +7332,7 @@
                   </m:oMath>
                 </a14:m>
                 <a:r>
-                  <a:rPr lang="it-IT" dirty="0"/>
+                  <a:rPr lang="en-GB" noProof="0" dirty="0"/>
                   <a:t>: data</a:t>
                 </a:r>
               </a:p>
@@ -6754,31 +7410,15 @@
               <a:lstStyle/>
               <a:p>
                 <a:r>
-                  <a:rPr lang="it-IT" dirty="0"/>
-                  <a:t>Dataset: 1932 burst </a:t>
-                </a:r>
-                <a:r>
-                  <a:rPr lang="it-IT" dirty="0" err="1"/>
-                  <a:t>seen</a:t>
-                </a:r>
-                <a:r>
-                  <a:rPr lang="it-IT" dirty="0"/>
-                  <a:t> by BATSE with the </a:t>
-                </a:r>
-                <a:r>
-                  <a:rPr lang="it-IT" dirty="0" err="1"/>
-                  <a:t>recorded</a:t>
-                </a:r>
-                <a:r>
-                  <a:rPr lang="it-IT" dirty="0"/>
-                  <a:t> </a:t>
+                  <a:rPr lang="en-GB" noProof="0" dirty="0"/>
+                  <a:t>Dataset: 1932 burst seen by BATSE with the recorded </a:t>
                 </a:r>
                 <a14:m>
                   <m:oMath xmlns:m="http://schemas.openxmlformats.org/officeDocument/2006/math">
                     <m:func>
                       <m:funcPr>
                         <m:ctrlPr>
-                          <a:rPr lang="it-IT" i="1" dirty="0" smtClean="0">
+                          <a:rPr lang="en-GB" i="1" noProof="0" smtClean="0">
                             <a:latin typeface="Cambria Math" panose="02040503050406030204" pitchFamily="18" charset="0"/>
                           </a:rPr>
                         </m:ctrlPr>
@@ -6788,7 +7428,7 @@
                           <m:rPr>
                             <m:sty m:val="p"/>
                           </m:rPr>
-                          <a:rPr lang="it-IT" i="0" dirty="0" smtClean="0">
+                          <a:rPr lang="en-GB" i="0" noProof="0" smtClean="0">
                             <a:latin typeface="Cambria Math" panose="02040503050406030204" pitchFamily="18" charset="0"/>
                           </a:rPr>
                           <m:t>log</m:t>
@@ -6798,7 +7438,7 @@
                         <m:d>
                           <m:dPr>
                             <m:ctrlPr>
-                              <a:rPr lang="it-IT" i="1" dirty="0" smtClean="0">
+                              <a:rPr lang="en-GB" i="1" noProof="0" smtClean="0">
                                 <a:latin typeface="Cambria Math" panose="02040503050406030204" pitchFamily="18" charset="0"/>
                               </a:rPr>
                             </m:ctrlPr>
@@ -6807,14 +7447,14 @@
                             <m:sSub>
                               <m:sSubPr>
                                 <m:ctrlPr>
-                                  <a:rPr lang="it-IT" i="1" dirty="0" smtClean="0">
+                                  <a:rPr lang="en-GB" i="1" noProof="0" smtClean="0">
                                     <a:latin typeface="Cambria Math" panose="02040503050406030204" pitchFamily="18" charset="0"/>
                                   </a:rPr>
                                 </m:ctrlPr>
                               </m:sSubPr>
                               <m:e>
                                 <m:r>
-                                  <a:rPr lang="it-IT" i="1" dirty="0" smtClean="0">
+                                  <a:rPr lang="en-GB" i="1" noProof="0" smtClean="0">
                                     <a:latin typeface="Cambria Math" panose="02040503050406030204" pitchFamily="18" charset="0"/>
                                   </a:rPr>
                                   <m:t>𝑇</m:t>
@@ -6822,7 +7462,7 @@
                               </m:e>
                               <m:sub>
                                 <m:r>
-                                  <a:rPr lang="it-IT" i="1" dirty="0" smtClean="0">
+                                  <a:rPr lang="en-GB" i="1" noProof="0" smtClean="0">
                                     <a:latin typeface="Cambria Math" panose="02040503050406030204" pitchFamily="18" charset="0"/>
                                   </a:rPr>
                                   <m:t>90</m:t>
@@ -6836,31 +7476,15 @@
                   </m:oMath>
                 </a14:m>
                 <a:r>
-                  <a:rPr lang="it-IT" dirty="0"/>
-                  <a:t>, </a:t>
-                </a:r>
-                <a:r>
-                  <a:rPr lang="it-IT" dirty="0" err="1"/>
-                  <a:t>associated</a:t>
-                </a:r>
-                <a:r>
-                  <a:rPr lang="it-IT" dirty="0"/>
-                  <a:t> </a:t>
-                </a:r>
-                <a:r>
-                  <a:rPr lang="it-IT" dirty="0" err="1"/>
-                  <a:t>error</a:t>
-                </a:r>
-                <a:r>
-                  <a:rPr lang="it-IT" dirty="0"/>
-                  <a:t> and </a:t>
+                  <a:rPr lang="en-GB" noProof="0" dirty="0"/>
+                  <a:t>, associated error and </a:t>
                 </a:r>
                 <a14:m>
                   <m:oMath xmlns:m="http://schemas.openxmlformats.org/officeDocument/2006/math">
                     <m:func>
                       <m:funcPr>
                         <m:ctrlPr>
-                          <a:rPr lang="it-IT" i="1" dirty="0" smtClean="0">
+                          <a:rPr lang="en-GB" i="1" noProof="0" smtClean="0">
                             <a:latin typeface="Cambria Math" panose="02040503050406030204" pitchFamily="18" charset="0"/>
                           </a:rPr>
                         </m:ctrlPr>
@@ -6870,7 +7494,7 @@
                           <m:rPr>
                             <m:sty m:val="p"/>
                           </m:rPr>
-                          <a:rPr lang="it-IT" i="0" dirty="0" smtClean="0">
+                          <a:rPr lang="en-GB" i="0" noProof="0" smtClean="0">
                             <a:latin typeface="Cambria Math" panose="02040503050406030204" pitchFamily="18" charset="0"/>
                           </a:rPr>
                           <m:t>log</m:t>
@@ -6880,14 +7504,14 @@
                         <m:d>
                           <m:dPr>
                             <m:ctrlPr>
-                              <a:rPr lang="it-IT" i="1" dirty="0" smtClean="0">
+                              <a:rPr lang="en-GB" i="1" noProof="0" smtClean="0">
                                 <a:latin typeface="Cambria Math" panose="02040503050406030204" pitchFamily="18" charset="0"/>
                               </a:rPr>
                             </m:ctrlPr>
                           </m:dPr>
                           <m:e>
                             <m:r>
-                              <a:rPr lang="it-IT" i="1" dirty="0" smtClean="0">
+                              <a:rPr lang="en-GB" i="1" noProof="0" smtClean="0">
                                 <a:latin typeface="Cambria Math" panose="02040503050406030204" pitchFamily="18" charset="0"/>
                               </a:rPr>
                               <m:t>𝐻𝑅</m:t>
@@ -6899,7 +7523,7 @@
                   </m:oMath>
                 </a14:m>
                 <a:r>
-                  <a:rPr lang="it-IT" dirty="0"/>
+                  <a:rPr lang="en-GB" noProof="0" dirty="0"/>
                   <a:t>. </a:t>
                 </a:r>
               </a:p>
@@ -6982,54 +7606,30 @@
               <a:lstStyle/>
               <a:p>
                 <a:r>
-                  <a:rPr lang="it-IT" dirty="0" err="1"/>
-                  <a:t>Smallest</a:t>
-                </a:r>
-                <a:r>
-                  <a:rPr lang="it-IT" dirty="0"/>
-                  <a:t> </a:t>
-                </a:r>
-                <a:r>
-                  <a:rPr lang="it-IT" dirty="0" err="1"/>
-                  <a:t>value</a:t>
-                </a:r>
-                <a:r>
-                  <a:rPr lang="it-IT" dirty="0"/>
-                  <a:t>: </a:t>
+                  <a:rPr lang="en-GB" noProof="0" dirty="0"/>
+                  <a:t>Smallest value: </a:t>
                 </a:r>
                 <a14:m>
                   <m:oMath xmlns:m="http://schemas.openxmlformats.org/officeDocument/2006/math">
                     <m:r>
-                      <a:rPr lang="it-IT" i="1" dirty="0" smtClean="0">
+                      <a:rPr lang="en-GB" i="1" noProof="0" smtClean="0">
                         <a:latin typeface="Cambria Math" panose="02040503050406030204" pitchFamily="18" charset="0"/>
                       </a:rPr>
                       <m:t>∼−3.7</m:t>
                     </m:r>
                   </m:oMath>
                 </a14:m>
-                <a:endParaRPr lang="it-IT" dirty="0"/>
+                <a:endParaRPr lang="en-GB" noProof="0" dirty="0"/>
               </a:p>
               <a:p>
                 <a:r>
-                  <a:rPr lang="it-IT" dirty="0" err="1"/>
-                  <a:t>Biggest</a:t>
-                </a:r>
-                <a:r>
-                  <a:rPr lang="it-IT" dirty="0"/>
-                  <a:t> </a:t>
-                </a:r>
-                <a:r>
-                  <a:rPr lang="it-IT" dirty="0" err="1"/>
-                  <a:t>value</a:t>
-                </a:r>
-                <a:r>
-                  <a:rPr lang="it-IT" dirty="0"/>
-                  <a:t>: </a:t>
+                  <a:rPr lang="en-GB" noProof="0" dirty="0"/>
+                  <a:t>Biggest value: </a:t>
                 </a:r>
                 <a14:m>
                   <m:oMath xmlns:m="http://schemas.openxmlformats.org/officeDocument/2006/math">
                     <m:r>
-                      <a:rPr lang="it-IT" i="1" dirty="0" smtClean="0">
+                      <a:rPr lang="en-GB" i="1" noProof="0" smtClean="0">
                         <a:latin typeface="Cambria Math" panose="02040503050406030204" pitchFamily="18" charset="0"/>
                       </a:rPr>
                       <m:t>∼6.5</m:t>
@@ -7037,7 +7637,7 @@
                   </m:oMath>
                 </a14:m>
                 <a:r>
-                  <a:rPr lang="it-IT" dirty="0"/>
+                  <a:rPr lang="en-GB" noProof="0" dirty="0"/>
                   <a:t> </a:t>
                 </a:r>
               </a:p>
@@ -7122,7 +7722,7 @@
                 <a14:m>
                   <m:oMath xmlns:m="http://schemas.openxmlformats.org/officeDocument/2006/math">
                     <m:r>
-                      <a:rPr lang="it-IT" i="1" dirty="0" smtClean="0">
+                      <a:rPr lang="en-GB" i="1" noProof="0" smtClean="0">
                         <a:latin typeface="Cambria Math" panose="02040503050406030204" pitchFamily="18" charset="0"/>
                       </a:rPr>
                       <m:t>50</m:t>
@@ -7130,27 +7730,19 @@
                   </m:oMath>
                 </a14:m>
                 <a:r>
-                  <a:rPr lang="it-IT" dirty="0"/>
-                  <a:t> </a:t>
-                </a:r>
-                <a:r>
-                  <a:rPr lang="it-IT" dirty="0" err="1"/>
-                  <a:t>bins</a:t>
-                </a:r>
-                <a:r>
-                  <a:rPr lang="it-IT" dirty="0"/>
-                  <a:t> from </a:t>
+                  <a:rPr lang="en-GB" noProof="0" dirty="0"/>
+                  <a:t> bins from </a:t>
                 </a:r>
                 <a14:m>
                   <m:oMath xmlns:m="http://schemas.openxmlformats.org/officeDocument/2006/math">
                     <m:r>
-                      <a:rPr lang="it-IT" i="1" dirty="0" smtClean="0">
+                      <a:rPr lang="en-GB" i="1" noProof="0" smtClean="0">
                         <a:latin typeface="Cambria Math" panose="02040503050406030204" pitchFamily="18" charset="0"/>
                       </a:rPr>
                       <m:t>−4</m:t>
                     </m:r>
                     <m:r>
-                      <a:rPr lang="it-IT" b="0" i="1" dirty="0" smtClean="0">
+                      <a:rPr lang="en-GB" b="0" i="1" noProof="0" smtClean="0">
                         <a:latin typeface="Cambria Math" panose="02040503050406030204" pitchFamily="18" charset="0"/>
                       </a:rPr>
                       <m:t> </m:t>
@@ -7158,20 +7750,20 @@
                   </m:oMath>
                 </a14:m>
                 <a:r>
-                  <a:rPr lang="it-IT" dirty="0"/>
+                  <a:rPr lang="en-GB" noProof="0" dirty="0"/>
                   <a:t>to </a:t>
                 </a:r>
                 <a14:m>
                   <m:oMath xmlns:m="http://schemas.openxmlformats.org/officeDocument/2006/math">
                     <m:r>
-                      <a:rPr lang="it-IT" i="1" dirty="0" smtClean="0">
+                      <a:rPr lang="en-GB" i="1" noProof="0" smtClean="0">
                         <a:latin typeface="Cambria Math" panose="02040503050406030204" pitchFamily="18" charset="0"/>
                       </a:rPr>
                       <m:t>7</m:t>
                     </m:r>
                   </m:oMath>
                 </a14:m>
-                <a:endParaRPr lang="it-IT" dirty="0"/>
+                <a:endParaRPr lang="en-GB" noProof="0" dirty="0"/>
               </a:p>
             </p:txBody>
           </p:sp>
@@ -7316,7 +7908,7 @@
               <a:lstStyle/>
               <a:p>
                 <a:r>
-                  <a:rPr lang="en-GB" dirty="0"/>
+                  <a:rPr lang="en-GB" noProof="0" dirty="0"/>
                   <a:t>Classification on </a:t>
                 </a:r>
                 <a14:m>
@@ -7324,7 +7916,7 @@
                     <m:func>
                       <m:funcPr>
                         <m:ctrlPr>
-                          <a:rPr lang="it-IT" i="1" dirty="0">
+                          <a:rPr lang="en-GB" i="1" noProof="0" smtClean="0">
                             <a:latin typeface="Cambria Math" panose="02040503050406030204" pitchFamily="18" charset="0"/>
                           </a:rPr>
                         </m:ctrlPr>
@@ -7334,7 +7926,7 @@
                           <m:rPr>
                             <m:sty m:val="p"/>
                           </m:rPr>
-                          <a:rPr lang="it-IT" dirty="0">
+                          <a:rPr lang="en-GB" noProof="0" smtClean="0">
                             <a:latin typeface="Cambria Math" panose="02040503050406030204" pitchFamily="18" charset="0"/>
                           </a:rPr>
                           <m:t>log</m:t>
@@ -7344,7 +7936,7 @@
                         <m:d>
                           <m:dPr>
                             <m:ctrlPr>
-                              <a:rPr lang="it-IT" i="1" dirty="0">
+                              <a:rPr lang="en-GB" i="1" noProof="0" smtClean="0">
                                 <a:latin typeface="Cambria Math" panose="02040503050406030204" pitchFamily="18" charset="0"/>
                               </a:rPr>
                             </m:ctrlPr>
@@ -7353,14 +7945,14 @@
                             <m:sSub>
                               <m:sSubPr>
                                 <m:ctrlPr>
-                                  <a:rPr lang="en-GB" i="1" dirty="0">
+                                  <a:rPr lang="en-GB" i="1" noProof="0">
                                     <a:latin typeface="Cambria Math" panose="02040503050406030204" pitchFamily="18" charset="0"/>
                                   </a:rPr>
                                 </m:ctrlPr>
                               </m:sSubPr>
                               <m:e>
                                 <m:r>
-                                  <a:rPr lang="en-GB" i="1" dirty="0">
+                                  <a:rPr lang="en-GB" i="1" noProof="0">
                                     <a:latin typeface="Cambria Math" panose="02040503050406030204" pitchFamily="18" charset="0"/>
                                   </a:rPr>
                                   <m:t>𝑇</m:t>
@@ -7368,13 +7960,13 @@
                               </m:e>
                               <m:sub>
                                 <m:r>
-                                  <a:rPr lang="en-GB" i="1" dirty="0">
+                                  <a:rPr lang="en-GB" i="1" noProof="0">
                                     <a:latin typeface="Cambria Math" panose="02040503050406030204" pitchFamily="18" charset="0"/>
                                   </a:rPr>
                                   <m:t>9</m:t>
                                 </m:r>
                                 <m:r>
-                                  <a:rPr lang="it-IT" i="1" dirty="0">
+                                  <a:rPr lang="en-GB" i="1" noProof="0" smtClean="0">
                                     <a:latin typeface="Cambria Math" panose="02040503050406030204" pitchFamily="18" charset="0"/>
                                   </a:rPr>
                                   <m:t>0</m:t>
@@ -7388,7 +7980,7 @@
                   </m:oMath>
                 </a14:m>
                 <a:r>
-                  <a:rPr lang="it-IT" dirty="0"/>
+                  <a:rPr lang="en-GB" noProof="0" dirty="0"/>
                   <a:t>: model</a:t>
                 </a:r>
               </a:p>
@@ -7469,6 +8061,7 @@
               </a:bodyPr>
               <a:lstStyle/>
               <a:p>
+                <a:pPr/>
                 <a14:m>
                   <m:oMathPara xmlns:m="http://schemas.openxmlformats.org/officeDocument/2006/math">
                     <m:oMathParaPr>
@@ -7476,7 +8069,7 @@
                     </m:oMathParaPr>
                     <m:oMath xmlns:m="http://schemas.openxmlformats.org/officeDocument/2006/math">
                       <m:r>
-                        <a:rPr lang="it-IT" sz="2400" i="1" dirty="0" smtClean="0">
+                        <a:rPr lang="en-GB" sz="2400" i="1" noProof="0" smtClean="0">
                           <a:latin typeface="Cambria Math" panose="02040503050406030204" pitchFamily="18" charset="0"/>
                         </a:rPr>
                         <m:t>𝑝</m:t>
@@ -7484,7 +8077,7 @@
                       <m:d>
                         <m:dPr>
                           <m:ctrlPr>
-                            <a:rPr lang="it-IT" sz="2400" i="1" dirty="0" smtClean="0">
+                            <a:rPr lang="en-GB" sz="2400" i="1" noProof="0" smtClean="0">
                               <a:latin typeface="Cambria Math" panose="02040503050406030204" pitchFamily="18" charset="0"/>
                             </a:rPr>
                           </m:ctrlPr>
@@ -7493,7 +8086,7 @@
                           <m:func>
                             <m:funcPr>
                               <m:ctrlPr>
-                                <a:rPr lang="it-IT" sz="2400" i="1" dirty="0" smtClean="0">
+                                <a:rPr lang="en-GB" sz="2400" i="1" noProof="0" smtClean="0">
                                   <a:latin typeface="Cambria Math" panose="02040503050406030204" pitchFamily="18" charset="0"/>
                                 </a:rPr>
                               </m:ctrlPr>
@@ -7503,7 +8096,7 @@
                                 <m:rPr>
                                   <m:sty m:val="p"/>
                                 </m:rPr>
-                                <a:rPr lang="it-IT" sz="2400" i="0" dirty="0" smtClean="0">
+                                <a:rPr lang="en-GB" sz="2400" i="0" noProof="0" smtClean="0">
                                   <a:latin typeface="Cambria Math" panose="02040503050406030204" pitchFamily="18" charset="0"/>
                                 </a:rPr>
                                 <m:t>log</m:t>
@@ -7513,7 +8106,7 @@
                               <m:d>
                                 <m:dPr>
                                   <m:ctrlPr>
-                                    <a:rPr lang="it-IT" sz="2400" i="1" dirty="0" smtClean="0">
+                                    <a:rPr lang="en-GB" sz="2400" i="1" noProof="0" smtClean="0">
                                       <a:latin typeface="Cambria Math" panose="02040503050406030204" pitchFamily="18" charset="0"/>
                                     </a:rPr>
                                   </m:ctrlPr>
@@ -7522,14 +8115,14 @@
                                   <m:sSub>
                                     <m:sSubPr>
                                       <m:ctrlPr>
-                                        <a:rPr lang="it-IT" sz="2400" i="1" dirty="0" smtClean="0">
+                                        <a:rPr lang="en-GB" sz="2400" i="1" noProof="0" smtClean="0">
                                           <a:latin typeface="Cambria Math" panose="02040503050406030204" pitchFamily="18" charset="0"/>
                                         </a:rPr>
                                       </m:ctrlPr>
                                     </m:sSubPr>
                                     <m:e>
                                       <m:r>
-                                        <a:rPr lang="it-IT" sz="2400" i="1" dirty="0" smtClean="0">
+                                        <a:rPr lang="en-GB" sz="2400" i="1" noProof="0" smtClean="0">
                                           <a:latin typeface="Cambria Math" panose="02040503050406030204" pitchFamily="18" charset="0"/>
                                         </a:rPr>
                                         <m:t>𝑇</m:t>
@@ -7537,7 +8130,7 @@
                                     </m:e>
                                     <m:sub>
                                       <m:r>
-                                        <a:rPr lang="it-IT" sz="2400" i="1" dirty="0" smtClean="0">
+                                        <a:rPr lang="en-GB" sz="2400" i="1" noProof="0" smtClean="0">
                                           <a:latin typeface="Cambria Math" panose="02040503050406030204" pitchFamily="18" charset="0"/>
                                         </a:rPr>
                                         <m:t>90</m:t>
@@ -7551,25 +8144,25 @@
                         </m:e>
                       </m:d>
                       <m:r>
-                        <a:rPr lang="it-IT" sz="2400" i="1" dirty="0" smtClean="0">
+                        <a:rPr lang="en-GB" sz="2400" i="1" noProof="0" smtClean="0">
                           <a:latin typeface="Cambria Math" panose="02040503050406030204" pitchFamily="18" charset="0"/>
                         </a:rPr>
                         <m:t>=</m:t>
                       </m:r>
                       <m:r>
-                        <a:rPr lang="it-IT" sz="2400" i="1" dirty="0" smtClean="0">
+                        <a:rPr lang="en-GB" sz="2400" i="1" noProof="0" smtClean="0">
                           <a:latin typeface="Cambria Math" panose="02040503050406030204" pitchFamily="18" charset="0"/>
                         </a:rPr>
                         <m:t>𝑤</m:t>
                       </m:r>
                       <m:r>
-                        <a:rPr lang="it-IT" sz="2400" b="0" i="1" dirty="0" smtClean="0">
+                        <a:rPr lang="en-GB" sz="2400" b="0" i="1" noProof="0" smtClean="0">
                           <a:latin typeface="Cambria Math" panose="02040503050406030204" pitchFamily="18" charset="0"/>
                         </a:rPr>
                         <m:t> </m:t>
                       </m:r>
                       <m:r>
-                        <a:rPr lang="it-IT" sz="2400" i="1" dirty="0" smtClean="0">
+                        <a:rPr lang="en-GB" sz="2400" i="1" noProof="0" smtClean="0">
                           <a:latin typeface="Cambria Math" panose="02040503050406030204" pitchFamily="18" charset="0"/>
                         </a:rPr>
                         <m:t>𝑁</m:t>
@@ -7577,7 +8170,7 @@
                       <m:d>
                         <m:dPr>
                           <m:ctrlPr>
-                            <a:rPr lang="it-IT" sz="2400" i="1" dirty="0" smtClean="0">
+                            <a:rPr lang="en-GB" sz="2400" i="1" noProof="0" smtClean="0">
                               <a:latin typeface="Cambria Math" panose="02040503050406030204" pitchFamily="18" charset="0"/>
                             </a:rPr>
                           </m:ctrlPr>
@@ -7586,7 +8179,7 @@
                           <m:func>
                             <m:funcPr>
                               <m:ctrlPr>
-                                <a:rPr lang="it-IT" sz="2400" i="1" dirty="0" smtClean="0">
+                                <a:rPr lang="en-GB" sz="2400" i="1" noProof="0" smtClean="0">
                                   <a:latin typeface="Cambria Math" panose="02040503050406030204" pitchFamily="18" charset="0"/>
                                 </a:rPr>
                               </m:ctrlPr>
@@ -7596,7 +8189,7 @@
                                 <m:rPr>
                                   <m:sty m:val="p"/>
                                 </m:rPr>
-                                <a:rPr lang="it-IT" sz="2400" i="0" dirty="0" smtClean="0">
+                                <a:rPr lang="en-GB" sz="2400" i="0" noProof="0" smtClean="0">
                                   <a:latin typeface="Cambria Math" panose="02040503050406030204" pitchFamily="18" charset="0"/>
                                 </a:rPr>
                                 <m:t>log</m:t>
@@ -7606,7 +8199,7 @@
                               <m:d>
                                 <m:dPr>
                                   <m:ctrlPr>
-                                    <a:rPr lang="it-IT" sz="2400" i="1" dirty="0" smtClean="0">
+                                    <a:rPr lang="en-GB" sz="2400" i="1" noProof="0" smtClean="0">
                                       <a:latin typeface="Cambria Math" panose="02040503050406030204" pitchFamily="18" charset="0"/>
                                     </a:rPr>
                                   </m:ctrlPr>
@@ -7615,14 +8208,14 @@
                                   <m:sSub>
                                     <m:sSubPr>
                                       <m:ctrlPr>
-                                        <a:rPr lang="it-IT" sz="2400" i="1" dirty="0" smtClean="0">
+                                        <a:rPr lang="en-GB" sz="2400" i="1" noProof="0" smtClean="0">
                                           <a:latin typeface="Cambria Math" panose="02040503050406030204" pitchFamily="18" charset="0"/>
                                         </a:rPr>
                                       </m:ctrlPr>
                                     </m:sSubPr>
                                     <m:e>
                                       <m:r>
-                                        <a:rPr lang="it-IT" sz="2400" i="1" dirty="0" smtClean="0">
+                                        <a:rPr lang="en-GB" sz="2400" i="1" noProof="0" smtClean="0">
                                           <a:latin typeface="Cambria Math" panose="02040503050406030204" pitchFamily="18" charset="0"/>
                                         </a:rPr>
                                         <m:t>𝑇</m:t>
@@ -7630,7 +8223,7 @@
                                     </m:e>
                                     <m:sub>
                                       <m:r>
-                                        <a:rPr lang="it-IT" sz="2400" i="1" dirty="0" smtClean="0">
+                                        <a:rPr lang="en-GB" sz="2400" i="1" noProof="0" smtClean="0">
                                           <a:latin typeface="Cambria Math" panose="02040503050406030204" pitchFamily="18" charset="0"/>
                                         </a:rPr>
                                         <m:t>90</m:t>
@@ -7646,14 +8239,14 @@
                           <m:sSub>
                             <m:sSubPr>
                               <m:ctrlPr>
-                                <a:rPr lang="it-IT" sz="2400" i="1" dirty="0" smtClean="0">
+                                <a:rPr lang="en-GB" sz="2400" i="1" noProof="0" smtClean="0">
                                   <a:latin typeface="Cambria Math" panose="02040503050406030204" pitchFamily="18" charset="0"/>
                                 </a:rPr>
                               </m:ctrlPr>
                             </m:sSubPr>
                             <m:e>
                               <m:r>
-                                <a:rPr lang="it-IT" sz="2400" i="1" dirty="0" smtClean="0">
+                                <a:rPr lang="en-GB" sz="2400" i="1" noProof="0" smtClean="0">
                                   <a:latin typeface="Cambria Math" panose="02040503050406030204" pitchFamily="18" charset="0"/>
                                 </a:rPr>
                                 <m:t>𝜇</m:t>
@@ -7661,7 +8254,7 @@
                             </m:e>
                             <m:sub>
                               <m:r>
-                                <a:rPr lang="it-IT" sz="2400" i="1" dirty="0" smtClean="0">
+                                <a:rPr lang="en-GB" sz="2400" i="1" noProof="0" smtClean="0">
                                   <a:latin typeface="Cambria Math" panose="02040503050406030204" pitchFamily="18" charset="0"/>
                                 </a:rPr>
                                 <m:t>1</m:t>
@@ -7671,14 +8264,14 @@
                           <m:sSub>
                             <m:sSubPr>
                               <m:ctrlPr>
-                                <a:rPr lang="it-IT" sz="2400" i="1" dirty="0" smtClean="0">
+                                <a:rPr lang="en-GB" sz="2400" i="1" noProof="0" smtClean="0">
                                   <a:latin typeface="Cambria Math" panose="02040503050406030204" pitchFamily="18" charset="0"/>
                                 </a:rPr>
                               </m:ctrlPr>
                             </m:sSubPr>
                             <m:e>
                               <m:r>
-                                <a:rPr lang="it-IT" sz="2400" i="1" dirty="0" smtClean="0">
+                                <a:rPr lang="en-GB" sz="2400" i="1" noProof="0" smtClean="0">
                                   <a:latin typeface="Cambria Math" panose="02040503050406030204" pitchFamily="18" charset="0"/>
                                 </a:rPr>
                                 <m:t>𝜎</m:t>
@@ -7686,7 +8279,7 @@
                             </m:e>
                             <m:sub>
                               <m:r>
-                                <a:rPr lang="it-IT" sz="2400" i="1" dirty="0" smtClean="0">
+                                <a:rPr lang="en-GB" sz="2400" i="1" noProof="0" smtClean="0">
                                   <a:latin typeface="Cambria Math" panose="02040503050406030204" pitchFamily="18" charset="0"/>
                                 </a:rPr>
                                 <m:t>1</m:t>
@@ -7696,7 +8289,7 @@
                         </m:e>
                       </m:d>
                       <m:r>
-                        <a:rPr lang="it-IT" sz="2400" i="1" dirty="0" smtClean="0">
+                        <a:rPr lang="en-GB" sz="2400" i="1" noProof="0" smtClean="0">
                           <a:latin typeface="Cambria Math" panose="02040503050406030204" pitchFamily="18" charset="0"/>
                         </a:rPr>
                         <m:t>+</m:t>
@@ -7704,20 +8297,20 @@
                       <m:d>
                         <m:dPr>
                           <m:ctrlPr>
-                            <a:rPr lang="it-IT" sz="2400" i="1" dirty="0" smtClean="0">
+                            <a:rPr lang="en-GB" sz="2400" i="1" noProof="0" smtClean="0">
                               <a:latin typeface="Cambria Math" panose="02040503050406030204" pitchFamily="18" charset="0"/>
                             </a:rPr>
                           </m:ctrlPr>
                         </m:dPr>
                         <m:e>
                           <m:r>
-                            <a:rPr lang="it-IT" sz="2400" i="1" dirty="0" smtClean="0">
+                            <a:rPr lang="en-GB" sz="2400" i="1" noProof="0" smtClean="0">
                               <a:latin typeface="Cambria Math" panose="02040503050406030204" pitchFamily="18" charset="0"/>
                             </a:rPr>
                             <m:t>1−</m:t>
                           </m:r>
                           <m:r>
-                            <a:rPr lang="it-IT" sz="2400" i="1" dirty="0" smtClean="0">
+                            <a:rPr lang="en-GB" sz="2400" i="1" noProof="0" smtClean="0">
                               <a:latin typeface="Cambria Math" panose="02040503050406030204" pitchFamily="18" charset="0"/>
                             </a:rPr>
                             <m:t>𝑤</m:t>
@@ -7725,13 +8318,13 @@
                         </m:e>
                       </m:d>
                       <m:r>
-                        <a:rPr lang="it-IT" sz="2400" b="0" i="1" dirty="0" smtClean="0">
+                        <a:rPr lang="en-GB" sz="2400" b="0" i="1" noProof="0" smtClean="0">
                           <a:latin typeface="Cambria Math" panose="02040503050406030204" pitchFamily="18" charset="0"/>
                         </a:rPr>
                         <m:t> </m:t>
                       </m:r>
                       <m:r>
-                        <a:rPr lang="it-IT" sz="2400" i="1" dirty="0" smtClean="0">
+                        <a:rPr lang="en-GB" sz="2400" i="1" noProof="0" smtClean="0">
                           <a:latin typeface="Cambria Math" panose="02040503050406030204" pitchFamily="18" charset="0"/>
                         </a:rPr>
                         <m:t>𝑁</m:t>
@@ -7739,7 +8332,7 @@
                       <m:d>
                         <m:dPr>
                           <m:ctrlPr>
-                            <a:rPr lang="it-IT" sz="2400" i="1" dirty="0" smtClean="0">
+                            <a:rPr lang="en-GB" sz="2400" i="1" noProof="0" smtClean="0">
                               <a:latin typeface="Cambria Math" panose="02040503050406030204" pitchFamily="18" charset="0"/>
                             </a:rPr>
                           </m:ctrlPr>
@@ -7748,7 +8341,7 @@
                           <m:func>
                             <m:funcPr>
                               <m:ctrlPr>
-                                <a:rPr lang="it-IT" sz="2400" i="1" dirty="0" smtClean="0">
+                                <a:rPr lang="en-GB" sz="2400" i="1" noProof="0" smtClean="0">
                                   <a:latin typeface="Cambria Math" panose="02040503050406030204" pitchFamily="18" charset="0"/>
                                 </a:rPr>
                               </m:ctrlPr>
@@ -7758,7 +8351,7 @@
                                 <m:rPr>
                                   <m:sty m:val="p"/>
                                 </m:rPr>
-                                <a:rPr lang="it-IT" sz="2400" i="0" dirty="0" smtClean="0">
+                                <a:rPr lang="en-GB" sz="2400" i="0" noProof="0" smtClean="0">
                                   <a:latin typeface="Cambria Math" panose="02040503050406030204" pitchFamily="18" charset="0"/>
                                 </a:rPr>
                                 <m:t>log</m:t>
@@ -7768,7 +8361,7 @@
                               <m:d>
                                 <m:dPr>
                                   <m:ctrlPr>
-                                    <a:rPr lang="it-IT" sz="2400" i="1" dirty="0" smtClean="0">
+                                    <a:rPr lang="en-GB" sz="2400" i="1" noProof="0" smtClean="0">
                                       <a:latin typeface="Cambria Math" panose="02040503050406030204" pitchFamily="18" charset="0"/>
                                     </a:rPr>
                                   </m:ctrlPr>
@@ -7777,14 +8370,14 @@
                                   <m:sSub>
                                     <m:sSubPr>
                                       <m:ctrlPr>
-                                        <a:rPr lang="it-IT" sz="2400" i="1" dirty="0" smtClean="0">
+                                        <a:rPr lang="en-GB" sz="2400" i="1" noProof="0" smtClean="0">
                                           <a:latin typeface="Cambria Math" panose="02040503050406030204" pitchFamily="18" charset="0"/>
                                         </a:rPr>
                                       </m:ctrlPr>
                                     </m:sSubPr>
                                     <m:e>
                                       <m:r>
-                                        <a:rPr lang="it-IT" sz="2400" i="1" dirty="0" smtClean="0">
+                                        <a:rPr lang="en-GB" sz="2400" i="1" noProof="0" smtClean="0">
                                           <a:latin typeface="Cambria Math" panose="02040503050406030204" pitchFamily="18" charset="0"/>
                                         </a:rPr>
                                         <m:t>𝑇</m:t>
@@ -7792,7 +8385,7 @@
                                     </m:e>
                                     <m:sub>
                                       <m:r>
-                                        <a:rPr lang="it-IT" sz="2400" i="1" dirty="0" smtClean="0">
+                                        <a:rPr lang="en-GB" sz="2400" i="1" noProof="0" smtClean="0">
                                           <a:latin typeface="Cambria Math" panose="02040503050406030204" pitchFamily="18" charset="0"/>
                                         </a:rPr>
                                         <m:t>90</m:t>
@@ -7808,14 +8401,14 @@
                           <m:sSub>
                             <m:sSubPr>
                               <m:ctrlPr>
-                                <a:rPr lang="it-IT" sz="2400" i="1" dirty="0" smtClean="0">
+                                <a:rPr lang="en-GB" sz="2400" i="1" noProof="0" smtClean="0">
                                   <a:latin typeface="Cambria Math" panose="02040503050406030204" pitchFamily="18" charset="0"/>
                                 </a:rPr>
                               </m:ctrlPr>
                             </m:sSubPr>
                             <m:e>
                               <m:r>
-                                <a:rPr lang="it-IT" sz="2400" i="1" dirty="0" smtClean="0">
+                                <a:rPr lang="en-GB" sz="2400" i="1" noProof="0" smtClean="0">
                                   <a:latin typeface="Cambria Math" panose="02040503050406030204" pitchFamily="18" charset="0"/>
                                 </a:rPr>
                                 <m:t>𝜇</m:t>
@@ -7823,7 +8416,7 @@
                             </m:e>
                             <m:sub>
                               <m:r>
-                                <a:rPr lang="it-IT" sz="2400" i="1" dirty="0" smtClean="0">
+                                <a:rPr lang="en-GB" sz="2400" i="1" noProof="0" smtClean="0">
                                   <a:latin typeface="Cambria Math" panose="02040503050406030204" pitchFamily="18" charset="0"/>
                                 </a:rPr>
                                 <m:t>2</m:t>
@@ -7833,14 +8426,14 @@
                           <m:sSub>
                             <m:sSubPr>
                               <m:ctrlPr>
-                                <a:rPr lang="it-IT" sz="2400" i="1" dirty="0" smtClean="0">
+                                <a:rPr lang="en-GB" sz="2400" i="1" noProof="0" smtClean="0">
                                   <a:latin typeface="Cambria Math" panose="02040503050406030204" pitchFamily="18" charset="0"/>
                                 </a:rPr>
                               </m:ctrlPr>
                             </m:sSubPr>
                             <m:e>
                               <m:r>
-                                <a:rPr lang="it-IT" sz="2400" i="1" dirty="0" smtClean="0">
+                                <a:rPr lang="en-GB" sz="2400" i="1" noProof="0" smtClean="0">
                                   <a:latin typeface="Cambria Math" panose="02040503050406030204" pitchFamily="18" charset="0"/>
                                 </a:rPr>
                                 <m:t>𝜎</m:t>
@@ -7848,7 +8441,7 @@
                             </m:e>
                             <m:sub>
                               <m:r>
-                                <a:rPr lang="it-IT" sz="2400" i="1" dirty="0" smtClean="0">
+                                <a:rPr lang="en-GB" sz="2400" i="1" noProof="0" smtClean="0">
                                   <a:latin typeface="Cambria Math" panose="02040503050406030204" pitchFamily="18" charset="0"/>
                                 </a:rPr>
                                 <m:t>2</m:t>
@@ -7860,7 +8453,7 @@
                     </m:oMath>
                   </m:oMathPara>
                 </a14:m>
-                <a:endParaRPr lang="it-IT" sz="2400" dirty="0"/>
+                <a:endParaRPr lang="en-GB" sz="2400" noProof="0" dirty="0"/>
               </a:p>
             </p:txBody>
           </p:sp>
@@ -7939,132 +8532,291 @@
           <a:lstStyle/>
           <a:p>
             <a:r>
-              <a:rPr lang="it-IT" dirty="0"/>
-              <a:t>The model for the </a:t>
-            </a:r>
-            <a:r>
-              <a:rPr lang="it-IT" dirty="0" err="1"/>
-              <a:t>classification</a:t>
-            </a:r>
-            <a:r>
-              <a:rPr lang="it-IT" dirty="0"/>
-              <a:t> </a:t>
-            </a:r>
-            <a:r>
-              <a:rPr lang="it-IT" dirty="0" err="1"/>
-              <a:t>is</a:t>
-            </a:r>
-            <a:r>
-              <a:rPr lang="it-IT" dirty="0"/>
-              <a:t> the </a:t>
-            </a:r>
-            <a:r>
-              <a:rPr lang="it-IT" dirty="0" err="1"/>
-              <a:t>weighted</a:t>
-            </a:r>
-            <a:r>
-              <a:rPr lang="it-IT" dirty="0"/>
-              <a:t> sum of </a:t>
-            </a:r>
-            <a:r>
-              <a:rPr lang="it-IT" dirty="0" err="1"/>
-              <a:t>two</a:t>
-            </a:r>
-            <a:r>
-              <a:rPr lang="it-IT" dirty="0"/>
-              <a:t> log </a:t>
-            </a:r>
-            <a:r>
-              <a:rPr lang="it-IT" dirty="0" err="1"/>
-              <a:t>normal</a:t>
-            </a:r>
-            <a:r>
-              <a:rPr lang="it-IT" dirty="0"/>
-              <a:t> </a:t>
-            </a:r>
-            <a:r>
-              <a:rPr lang="it-IT" dirty="0" err="1"/>
-              <a:t>distribution</a:t>
-            </a:r>
-            <a:r>
-              <a:rPr lang="it-IT" dirty="0"/>
-              <a:t>  </a:t>
+              <a:rPr lang="en-GB" noProof="0" dirty="0"/>
+              <a:t>The model for the classification is the weighted sum of two log normal distribution  </a:t>
             </a:r>
           </a:p>
         </p:txBody>
       </p:sp>
-      <p:sp>
-        <p:nvSpPr>
-          <p:cNvPr id="7" name="CasellaDiTesto 6">
-            <a:extLst>
-              <a:ext uri="{FF2B5EF4-FFF2-40B4-BE49-F238E27FC236}">
-                <a16:creationId xmlns:a16="http://schemas.microsoft.com/office/drawing/2014/main" id="{CDD0485A-7078-3B2B-9348-8405DC659998}"/>
-              </a:ext>
-            </a:extLst>
-          </p:cNvPr>
-          <p:cNvSpPr txBox="1"/>
-          <p:nvPr/>
-        </p:nvSpPr>
-        <p:spPr>
-          <a:xfrm>
-            <a:off x="893852" y="3842535"/>
-            <a:ext cx="4547117" cy="646331"/>
-          </a:xfrm>
-          <a:prstGeom prst="rect">
-            <a:avLst/>
-          </a:prstGeom>
-          <a:noFill/>
-        </p:spPr>
-        <p:txBody>
-          <a:bodyPr wrap="square" rtlCol="0">
-            <a:spAutoFit/>
-          </a:bodyPr>
-          <a:lstStyle/>
-          <a:p>
-            <a:r>
-              <a:rPr lang="it-IT" dirty="0"/>
-              <a:t>So we have 5 </a:t>
-            </a:r>
-            <a:r>
-              <a:rPr lang="it-IT" dirty="0" err="1"/>
-              <a:t>parameters</a:t>
-            </a:r>
-            <a:r>
-              <a:rPr lang="it-IT" dirty="0"/>
-              <a:t> to estimate, we </a:t>
-            </a:r>
-            <a:r>
-              <a:rPr lang="it-IT" dirty="0" err="1"/>
-              <a:t>will</a:t>
-            </a:r>
-            <a:r>
-              <a:rPr lang="it-IT" dirty="0"/>
-              <a:t> </a:t>
-            </a:r>
-            <a:r>
-              <a:rPr lang="it-IT" dirty="0" err="1"/>
-              <a:t>often</a:t>
-            </a:r>
-            <a:r>
-              <a:rPr lang="it-IT" dirty="0"/>
-              <a:t> call </a:t>
-            </a:r>
-            <a:r>
-              <a:rPr lang="it-IT" dirty="0" err="1"/>
-              <a:t>them</a:t>
-            </a:r>
-            <a:r>
-              <a:rPr lang="it-IT" dirty="0"/>
-              <a:t> </a:t>
-            </a:r>
-            <a:r>
-              <a:rPr lang="it-IT"/>
-              <a:t>\theta </a:t>
-            </a:r>
-            <a:endParaRPr lang="it-IT" dirty="0"/>
-          </a:p>
-        </p:txBody>
-      </p:sp>
+      <mc:AlternateContent xmlns:mc="http://schemas.openxmlformats.org/markup-compatibility/2006">
+        <mc:Choice xmlns:a14="http://schemas.microsoft.com/office/drawing/2010/main" Requires="a14">
+          <p:sp>
+            <p:nvSpPr>
+              <p:cNvPr id="7" name="CasellaDiTesto 6">
+                <a:extLst>
+                  <a:ext uri="{FF2B5EF4-FFF2-40B4-BE49-F238E27FC236}">
+                    <a16:creationId xmlns:a16="http://schemas.microsoft.com/office/drawing/2014/main" id="{CDD0485A-7078-3B2B-9348-8405DC659998}"/>
+                  </a:ext>
+                </a:extLst>
+              </p:cNvPr>
+              <p:cNvSpPr txBox="1"/>
+              <p:nvPr/>
+            </p:nvSpPr>
+            <p:spPr>
+              <a:xfrm>
+                <a:off x="893852" y="3842535"/>
+                <a:ext cx="4547117" cy="646331"/>
+              </a:xfrm>
+              <a:prstGeom prst="rect">
+                <a:avLst/>
+              </a:prstGeom>
+              <a:noFill/>
+            </p:spPr>
+            <p:txBody>
+              <a:bodyPr wrap="square" rtlCol="0">
+                <a:spAutoFit/>
+              </a:bodyPr>
+              <a:lstStyle/>
+              <a:p>
+                <a:r>
+                  <a:rPr lang="en-GB" noProof="0" dirty="0"/>
+                  <a:t>So we have 5 parameters to estimate, we will often call them </a:t>
+                </a:r>
+                <a14:m>
+                  <m:oMath xmlns:m="http://schemas.openxmlformats.org/officeDocument/2006/math">
+                    <m:r>
+                      <a:rPr lang="en-GB" i="1" noProof="0" smtClean="0">
+                        <a:latin typeface="Cambria Math" panose="02040503050406030204" pitchFamily="18" charset="0"/>
+                      </a:rPr>
+                      <m:t>𝜃</m:t>
+                    </m:r>
+                    <m:r>
+                      <a:rPr lang="en-GB" i="1" noProof="0" smtClean="0">
+                        <a:latin typeface="Cambria Math" panose="02040503050406030204" pitchFamily="18" charset="0"/>
+                      </a:rPr>
+                      <m:t>≡</m:t>
+                    </m:r>
+                    <m:d>
+                      <m:dPr>
+                        <m:begChr m:val="["/>
+                        <m:endChr m:val="]"/>
+                        <m:ctrlPr>
+                          <a:rPr lang="en-GB" i="1" noProof="0" smtClean="0">
+                            <a:latin typeface="Cambria Math" panose="02040503050406030204" pitchFamily="18" charset="0"/>
+                          </a:rPr>
+                        </m:ctrlPr>
+                      </m:dPr>
+                      <m:e>
+                        <m:r>
+                          <a:rPr lang="en-GB" i="1" noProof="0" smtClean="0">
+                            <a:latin typeface="Cambria Math" panose="02040503050406030204" pitchFamily="18" charset="0"/>
+                          </a:rPr>
+                          <m:t>𝑤</m:t>
+                        </m:r>
+                        <m:r>
+                          <a:rPr lang="en-GB" i="1" noProof="0" smtClean="0">
+                            <a:latin typeface="Cambria Math" panose="02040503050406030204" pitchFamily="18" charset="0"/>
+                          </a:rPr>
+                          <m:t>,</m:t>
+                        </m:r>
+                        <m:r>
+                          <m:rPr>
+                            <m:lit/>
+                          </m:rPr>
+                          <a:rPr lang="en-GB" i="1" noProof="0" smtClean="0">
+                            <a:latin typeface="Cambria Math" panose="02040503050406030204" pitchFamily="18" charset="0"/>
+                          </a:rPr>
+                          <m:t> </m:t>
+                        </m:r>
+                        <m:sSub>
+                          <m:sSubPr>
+                            <m:ctrlPr>
+                              <a:rPr lang="en-GB" i="1" noProof="0" smtClean="0">
+                                <a:latin typeface="Cambria Math" panose="02040503050406030204" pitchFamily="18" charset="0"/>
+                              </a:rPr>
+                            </m:ctrlPr>
+                          </m:sSubPr>
+                          <m:e>
+                            <m:r>
+                              <a:rPr lang="en-GB" i="1" noProof="0" smtClean="0">
+                                <a:latin typeface="Cambria Math" panose="02040503050406030204" pitchFamily="18" charset="0"/>
+                              </a:rPr>
+                              <m:t>𝜇</m:t>
+                            </m:r>
+                          </m:e>
+                          <m:sub>
+                            <m:r>
+                              <a:rPr lang="en-GB" i="1" noProof="0" smtClean="0">
+                                <a:latin typeface="Cambria Math" panose="02040503050406030204" pitchFamily="18" charset="0"/>
+                              </a:rPr>
+                              <m:t>1</m:t>
+                            </m:r>
+                          </m:sub>
+                        </m:sSub>
+                        <m:r>
+                          <a:rPr lang="en-GB" i="1" noProof="0" smtClean="0">
+                            <a:latin typeface="Cambria Math" panose="02040503050406030204" pitchFamily="18" charset="0"/>
+                          </a:rPr>
+                          <m:t>,</m:t>
+                        </m:r>
+                        <m:r>
+                          <m:rPr>
+                            <m:lit/>
+                          </m:rPr>
+                          <a:rPr lang="en-GB" i="1" noProof="0" smtClean="0">
+                            <a:latin typeface="Cambria Math" panose="02040503050406030204" pitchFamily="18" charset="0"/>
+                          </a:rPr>
+                          <m:t> </m:t>
+                        </m:r>
+                        <m:sSub>
+                          <m:sSubPr>
+                            <m:ctrlPr>
+                              <a:rPr lang="en-GB" i="1" noProof="0" smtClean="0">
+                                <a:latin typeface="Cambria Math" panose="02040503050406030204" pitchFamily="18" charset="0"/>
+                              </a:rPr>
+                            </m:ctrlPr>
+                          </m:sSubPr>
+                          <m:e>
+                            <m:r>
+                              <a:rPr lang="en-GB" i="1" noProof="0" smtClean="0">
+                                <a:latin typeface="Cambria Math" panose="02040503050406030204" pitchFamily="18" charset="0"/>
+                              </a:rPr>
+                              <m:t>𝜎</m:t>
+                            </m:r>
+                          </m:e>
+                          <m:sub>
+                            <m:r>
+                              <a:rPr lang="en-GB" i="1" noProof="0" smtClean="0">
+                                <a:latin typeface="Cambria Math" panose="02040503050406030204" pitchFamily="18" charset="0"/>
+                              </a:rPr>
+                              <m:t>1</m:t>
+                            </m:r>
+                          </m:sub>
+                        </m:sSub>
+                        <m:r>
+                          <a:rPr lang="en-GB" i="1" noProof="0" smtClean="0">
+                            <a:latin typeface="Cambria Math" panose="02040503050406030204" pitchFamily="18" charset="0"/>
+                          </a:rPr>
+                          <m:t>,</m:t>
+                        </m:r>
+                        <m:r>
+                          <m:rPr>
+                            <m:lit/>
+                          </m:rPr>
+                          <a:rPr lang="en-GB" i="1" noProof="0" smtClean="0">
+                            <a:latin typeface="Cambria Math" panose="02040503050406030204" pitchFamily="18" charset="0"/>
+                          </a:rPr>
+                          <m:t> </m:t>
+                        </m:r>
+                        <m:sSub>
+                          <m:sSubPr>
+                            <m:ctrlPr>
+                              <a:rPr lang="en-GB" i="1" noProof="0" smtClean="0">
+                                <a:latin typeface="Cambria Math" panose="02040503050406030204" pitchFamily="18" charset="0"/>
+                              </a:rPr>
+                            </m:ctrlPr>
+                          </m:sSubPr>
+                          <m:e>
+                            <m:r>
+                              <a:rPr lang="en-GB" i="1" noProof="0" smtClean="0">
+                                <a:latin typeface="Cambria Math" panose="02040503050406030204" pitchFamily="18" charset="0"/>
+                              </a:rPr>
+                              <m:t>𝜇</m:t>
+                            </m:r>
+                          </m:e>
+                          <m:sub>
+                            <m:r>
+                              <a:rPr lang="en-GB" i="1" noProof="0" smtClean="0">
+                                <a:latin typeface="Cambria Math" panose="02040503050406030204" pitchFamily="18" charset="0"/>
+                              </a:rPr>
+                              <m:t>2</m:t>
+                            </m:r>
+                          </m:sub>
+                        </m:sSub>
+                        <m:r>
+                          <a:rPr lang="en-GB" i="1" noProof="0" smtClean="0">
+                            <a:latin typeface="Cambria Math" panose="02040503050406030204" pitchFamily="18" charset="0"/>
+                          </a:rPr>
+                          <m:t>,</m:t>
+                        </m:r>
+                        <m:r>
+                          <m:rPr>
+                            <m:lit/>
+                          </m:rPr>
+                          <a:rPr lang="en-GB" i="1" noProof="0" smtClean="0">
+                            <a:latin typeface="Cambria Math" panose="02040503050406030204" pitchFamily="18" charset="0"/>
+                          </a:rPr>
+                          <m:t> </m:t>
+                        </m:r>
+                        <m:sSub>
+                          <m:sSubPr>
+                            <m:ctrlPr>
+                              <a:rPr lang="en-GB" i="1" noProof="0" smtClean="0">
+                                <a:latin typeface="Cambria Math" panose="02040503050406030204" pitchFamily="18" charset="0"/>
+                              </a:rPr>
+                            </m:ctrlPr>
+                          </m:sSubPr>
+                          <m:e>
+                            <m:r>
+                              <a:rPr lang="en-GB" i="1" noProof="0" smtClean="0">
+                                <a:latin typeface="Cambria Math" panose="02040503050406030204" pitchFamily="18" charset="0"/>
+                              </a:rPr>
+                              <m:t>𝜎</m:t>
+                            </m:r>
+                          </m:e>
+                          <m:sub>
+                            <m:r>
+                              <a:rPr lang="en-GB" i="1" noProof="0" smtClean="0">
+                                <a:latin typeface="Cambria Math" panose="02040503050406030204" pitchFamily="18" charset="0"/>
+                              </a:rPr>
+                              <m:t>2</m:t>
+                            </m:r>
+                          </m:sub>
+                        </m:sSub>
+                      </m:e>
+                    </m:d>
+                  </m:oMath>
+                </a14:m>
+                <a:endParaRPr lang="en-GB" noProof="0" dirty="0"/>
+              </a:p>
+            </p:txBody>
+          </p:sp>
+        </mc:Choice>
+        <mc:Fallback>
+          <p:sp>
+            <p:nvSpPr>
+              <p:cNvPr id="7" name="CasellaDiTesto 6">
+                <a:extLst>
+                  <a:ext uri="{FF2B5EF4-FFF2-40B4-BE49-F238E27FC236}">
+                    <a16:creationId xmlns:a16="http://schemas.microsoft.com/office/drawing/2014/main" id="{CDD0485A-7078-3B2B-9348-8405DC659998}"/>
+                  </a:ext>
+                </a:extLst>
+              </p:cNvPr>
+              <p:cNvSpPr txBox="1">
+                <a:spLocks noRot="1" noChangeAspect="1" noMove="1" noResize="1" noEditPoints="1" noAdjustHandles="1" noChangeArrowheads="1" noChangeShapeType="1" noTextEdit="1"/>
+              </p:cNvSpPr>
+              <p:nvPr/>
+            </p:nvSpPr>
+            <p:spPr>
+              <a:xfrm>
+                <a:off x="893852" y="3842535"/>
+                <a:ext cx="4547117" cy="646331"/>
+              </a:xfrm>
+              <a:prstGeom prst="rect">
+                <a:avLst/>
+              </a:prstGeom>
+              <a:blipFill>
+                <a:blip r:embed="rId4"/>
+                <a:stretch>
+                  <a:fillRect l="-1206" t="-4717" r="-1340" b="-14151"/>
+                </a:stretch>
+              </a:blipFill>
+            </p:spPr>
+            <p:txBody>
+              <a:bodyPr/>
+              <a:lstStyle/>
+              <a:p>
+                <a:r>
+                  <a:rPr lang="it-IT">
+                    <a:noFill/>
+                  </a:rPr>
+                  <a:t> </a:t>
+                </a:r>
+              </a:p>
+            </p:txBody>
+          </p:sp>
+        </mc:Fallback>
+      </mc:AlternateContent>
     </p:spTree>
     <p:extLst>
       <p:ext uri="{BB962C8B-B14F-4D97-AF65-F5344CB8AC3E}">
@@ -8079,6 +8831,1974 @@
 </file>
 
 <file path=ppt/slides/slide6.xml><?xml version="1.0" encoding="utf-8"?>
+<p:sld xmlns:a="http://schemas.openxmlformats.org/drawingml/2006/main" xmlns:r="http://schemas.openxmlformats.org/officeDocument/2006/relationships" xmlns:p="http://schemas.openxmlformats.org/presentationml/2006/main">
+  <p:cSld>
+    <p:spTree>
+      <p:nvGrpSpPr>
+        <p:cNvPr id="1" name="">
+          <a:extLst>
+            <a:ext uri="{FF2B5EF4-FFF2-40B4-BE49-F238E27FC236}">
+              <a16:creationId xmlns:a16="http://schemas.microsoft.com/office/drawing/2014/main" id="{9AE57BF9-546A-71AE-8100-CC8345FE88E7}"/>
+            </a:ext>
+          </a:extLst>
+        </p:cNvPr>
+        <p:cNvGrpSpPr/>
+        <p:nvPr/>
+      </p:nvGrpSpPr>
+      <p:grpSpPr>
+        <a:xfrm>
+          <a:off x="0" y="0"/>
+          <a:ext cx="0" cy="0"/>
+          <a:chOff x="0" y="0"/>
+          <a:chExt cx="0" cy="0"/>
+        </a:xfrm>
+      </p:grpSpPr>
+      <mc:AlternateContent xmlns:mc="http://schemas.openxmlformats.org/markup-compatibility/2006">
+        <mc:Choice xmlns:a14="http://schemas.microsoft.com/office/drawing/2010/main" Requires="a14">
+          <p:sp>
+            <p:nvSpPr>
+              <p:cNvPr id="4" name="Titolo 1">
+                <a:extLst>
+                  <a:ext uri="{FF2B5EF4-FFF2-40B4-BE49-F238E27FC236}">
+                    <a16:creationId xmlns:a16="http://schemas.microsoft.com/office/drawing/2014/main" id="{94DDD25E-CB13-0D4B-8B7F-FCF923ABCCF5}"/>
+                  </a:ext>
+                </a:extLst>
+              </p:cNvPr>
+              <p:cNvSpPr>
+                <a:spLocks noGrp="1"/>
+              </p:cNvSpPr>
+              <p:nvPr>
+                <p:ph type="title"/>
+              </p:nvPr>
+            </p:nvSpPr>
+            <p:spPr>
+              <a:xfrm>
+                <a:off x="642938" y="288925"/>
+                <a:ext cx="10227120" cy="1235075"/>
+              </a:xfrm>
+            </p:spPr>
+            <p:txBody>
+              <a:bodyPr>
+                <a:normAutofit fontScale="90000"/>
+              </a:bodyPr>
+              <a:lstStyle/>
+              <a:p>
+                <a:r>
+                  <a:rPr lang="en-GB" noProof="0" dirty="0"/>
+                  <a:t>Classification on </a:t>
+                </a:r>
+                <a14:m>
+                  <m:oMath xmlns:m="http://schemas.openxmlformats.org/officeDocument/2006/math">
+                    <m:func>
+                      <m:funcPr>
+                        <m:ctrlPr>
+                          <a:rPr lang="en-GB" i="1" noProof="0" smtClean="0">
+                            <a:latin typeface="Cambria Math" panose="02040503050406030204" pitchFamily="18" charset="0"/>
+                          </a:rPr>
+                        </m:ctrlPr>
+                      </m:funcPr>
+                      <m:fName>
+                        <m:r>
+                          <m:rPr>
+                            <m:sty m:val="p"/>
+                          </m:rPr>
+                          <a:rPr lang="en-GB" noProof="0" smtClean="0">
+                            <a:latin typeface="Cambria Math" panose="02040503050406030204" pitchFamily="18" charset="0"/>
+                          </a:rPr>
+                          <m:t>log</m:t>
+                        </m:r>
+                      </m:fName>
+                      <m:e>
+                        <m:d>
+                          <m:dPr>
+                            <m:ctrlPr>
+                              <a:rPr lang="en-GB" i="1" noProof="0" smtClean="0">
+                                <a:latin typeface="Cambria Math" panose="02040503050406030204" pitchFamily="18" charset="0"/>
+                              </a:rPr>
+                            </m:ctrlPr>
+                          </m:dPr>
+                          <m:e>
+                            <m:sSub>
+                              <m:sSubPr>
+                                <m:ctrlPr>
+                                  <a:rPr lang="en-GB" i="1" noProof="0">
+                                    <a:latin typeface="Cambria Math" panose="02040503050406030204" pitchFamily="18" charset="0"/>
+                                  </a:rPr>
+                                </m:ctrlPr>
+                              </m:sSubPr>
+                              <m:e>
+                                <m:r>
+                                  <a:rPr lang="en-GB" i="1" noProof="0">
+                                    <a:latin typeface="Cambria Math" panose="02040503050406030204" pitchFamily="18" charset="0"/>
+                                  </a:rPr>
+                                  <m:t>𝑇</m:t>
+                                </m:r>
+                              </m:e>
+                              <m:sub>
+                                <m:r>
+                                  <a:rPr lang="en-GB" i="1" noProof="0">
+                                    <a:latin typeface="Cambria Math" panose="02040503050406030204" pitchFamily="18" charset="0"/>
+                                  </a:rPr>
+                                  <m:t>9</m:t>
+                                </m:r>
+                                <m:r>
+                                  <a:rPr lang="en-GB" i="1" noProof="0" smtClean="0">
+                                    <a:latin typeface="Cambria Math" panose="02040503050406030204" pitchFamily="18" charset="0"/>
+                                  </a:rPr>
+                                  <m:t>0</m:t>
+                                </m:r>
+                              </m:sub>
+                            </m:sSub>
+                          </m:e>
+                        </m:d>
+                      </m:e>
+                    </m:func>
+                  </m:oMath>
+                </a14:m>
+                <a:r>
+                  <a:rPr lang="en-GB" noProof="0" dirty="0"/>
+                  <a:t>: Bayes theorem</a:t>
+                </a:r>
+              </a:p>
+            </p:txBody>
+          </p:sp>
+        </mc:Choice>
+        <mc:Fallback>
+          <p:sp>
+            <p:nvSpPr>
+              <p:cNvPr id="4" name="Titolo 1">
+                <a:extLst>
+                  <a:ext uri="{FF2B5EF4-FFF2-40B4-BE49-F238E27FC236}">
+                    <a16:creationId xmlns:a16="http://schemas.microsoft.com/office/drawing/2014/main" id="{94DDD25E-CB13-0D4B-8B7F-FCF923ABCCF5}"/>
+                  </a:ext>
+                </a:extLst>
+              </p:cNvPr>
+              <p:cNvSpPr>
+                <a:spLocks noGrp="1" noRot="1" noChangeAspect="1" noMove="1" noResize="1" noEditPoints="1" noAdjustHandles="1" noChangeArrowheads="1" noChangeShapeType="1" noTextEdit="1"/>
+              </p:cNvSpPr>
+              <p:nvPr>
+                <p:ph type="title"/>
+              </p:nvPr>
+            </p:nvSpPr>
+            <p:spPr>
+              <a:xfrm>
+                <a:off x="642938" y="288925"/>
+                <a:ext cx="10227120" cy="1235075"/>
+              </a:xfrm>
+              <a:blipFill>
+                <a:blip r:embed="rId2"/>
+                <a:stretch>
+                  <a:fillRect l="-2086" t="-13793"/>
+                </a:stretch>
+              </a:blipFill>
+            </p:spPr>
+            <p:txBody>
+              <a:bodyPr/>
+              <a:lstStyle/>
+              <a:p>
+                <a:r>
+                  <a:rPr lang="it-IT">
+                    <a:noFill/>
+                  </a:rPr>
+                  <a:t> </a:t>
+                </a:r>
+              </a:p>
+            </p:txBody>
+          </p:sp>
+        </mc:Fallback>
+      </mc:AlternateContent>
+      <mc:AlternateContent xmlns:mc="http://schemas.openxmlformats.org/markup-compatibility/2006">
+        <mc:Choice xmlns:a14="http://schemas.microsoft.com/office/drawing/2010/main" Requires="a14">
+          <p:sp>
+            <p:nvSpPr>
+              <p:cNvPr id="2" name="CasellaDiTesto 1">
+                <a:extLst>
+                  <a:ext uri="{FF2B5EF4-FFF2-40B4-BE49-F238E27FC236}">
+                    <a16:creationId xmlns:a16="http://schemas.microsoft.com/office/drawing/2014/main" id="{52A3BC6C-6ADD-66CC-2D52-87B80EEC55AA}"/>
+                  </a:ext>
+                </a:extLst>
+              </p:cNvPr>
+              <p:cNvSpPr txBox="1"/>
+              <p:nvPr/>
+            </p:nvSpPr>
+            <p:spPr>
+              <a:xfrm>
+                <a:off x="750013" y="1524000"/>
+                <a:ext cx="5702158" cy="1754326"/>
+              </a:xfrm>
+              <a:prstGeom prst="rect">
+                <a:avLst/>
+              </a:prstGeom>
+              <a:noFill/>
+            </p:spPr>
+            <p:txBody>
+              <a:bodyPr wrap="square" rtlCol="0">
+                <a:spAutoFit/>
+              </a:bodyPr>
+              <a:lstStyle/>
+              <a:p>
+                <a:r>
+                  <a:rPr lang="en-GB" noProof="0" dirty="0"/>
+                  <a:t>To estimate the parameters we will use Bayes theorem, define the propositions:</a:t>
+                </a:r>
+              </a:p>
+              <a:p>
+                <a:pPr marL="285750" indent="-285750">
+                  <a:buFont typeface="Arial" panose="020B0604020202020204" pitchFamily="34" charset="0"/>
+                  <a:buChar char="•"/>
+                </a:pPr>
+                <a14:m>
+                  <m:oMath xmlns:m="http://schemas.openxmlformats.org/officeDocument/2006/math">
+                    <m:r>
+                      <a:rPr lang="en-GB" i="1" noProof="0" smtClean="0">
+                        <a:latin typeface="Cambria Math" panose="02040503050406030204" pitchFamily="18" charset="0"/>
+                      </a:rPr>
+                      <m:t>𝜃</m:t>
+                    </m:r>
+                    <m:r>
+                      <a:rPr lang="en-GB" b="0" i="1" noProof="0" smtClean="0">
+                        <a:latin typeface="Cambria Math" panose="02040503050406030204" pitchFamily="18" charset="0"/>
+                      </a:rPr>
+                      <m:t> </m:t>
+                    </m:r>
+                  </m:oMath>
+                </a14:m>
+                <a:r>
+                  <a:rPr lang="en-GB" noProof="0" dirty="0"/>
+                  <a:t>= «The set of parameters is </a:t>
+                </a:r>
+                <a14:m>
+                  <m:oMath xmlns:m="http://schemas.openxmlformats.org/officeDocument/2006/math">
+                    <m:r>
+                      <a:rPr lang="en-GB" i="1" noProof="0" smtClean="0">
+                        <a:latin typeface="Cambria Math" panose="02040503050406030204" pitchFamily="18" charset="0"/>
+                      </a:rPr>
+                      <m:t>𝜃</m:t>
+                    </m:r>
+                  </m:oMath>
+                </a14:m>
+                <a:r>
+                  <a:rPr lang="en-GB" noProof="0" dirty="0"/>
+                  <a:t>»</a:t>
+                </a:r>
+              </a:p>
+              <a:p>
+                <a:pPr marL="285750" indent="-285750">
+                  <a:buFont typeface="Arial" panose="020B0604020202020204" pitchFamily="34" charset="0"/>
+                  <a:buChar char="•"/>
+                </a:pPr>
+                <a14:m>
+                  <m:oMath xmlns:m="http://schemas.openxmlformats.org/officeDocument/2006/math">
+                    <m:r>
+                      <a:rPr lang="en-GB" i="1" noProof="0" smtClean="0">
+                        <a:latin typeface="Cambria Math" panose="02040503050406030204" pitchFamily="18" charset="0"/>
+                      </a:rPr>
+                      <m:t>𝐷</m:t>
+                    </m:r>
+                    <m:r>
+                      <a:rPr lang="en-GB" b="0" i="1" noProof="0" smtClean="0">
+                        <a:latin typeface="Cambria Math" panose="02040503050406030204" pitchFamily="18" charset="0"/>
+                      </a:rPr>
+                      <m:t> </m:t>
+                    </m:r>
+                  </m:oMath>
+                </a14:m>
+                <a:r>
+                  <a:rPr lang="en-GB" noProof="0" dirty="0"/>
+                  <a:t>= «The dataset we are analysing»</a:t>
+                </a:r>
+              </a:p>
+              <a:p>
+                <a:pPr marL="285750" indent="-285750">
+                  <a:buFont typeface="Arial" panose="020B0604020202020204" pitchFamily="34" charset="0"/>
+                  <a:buChar char="•"/>
+                </a:pPr>
+                <a14:m>
+                  <m:oMath xmlns:m="http://schemas.openxmlformats.org/officeDocument/2006/math">
+                    <m:r>
+                      <a:rPr lang="en-GB" i="1" noProof="0" smtClean="0">
+                        <a:latin typeface="Cambria Math" panose="02040503050406030204" pitchFamily="18" charset="0"/>
+                      </a:rPr>
+                      <m:t>𝐻</m:t>
+                    </m:r>
+                  </m:oMath>
+                </a14:m>
+                <a:r>
+                  <a:rPr lang="en-GB" noProof="0" dirty="0"/>
+                  <a:t> = «Model of the two weighted sum log normal»</a:t>
+                </a:r>
+              </a:p>
+              <a:p>
+                <a:pPr marL="285750" indent="-285750">
+                  <a:buFont typeface="Arial" panose="020B0604020202020204" pitchFamily="34" charset="0"/>
+                  <a:buChar char="•"/>
+                </a:pPr>
+                <a14:m>
+                  <m:oMath xmlns:m="http://schemas.openxmlformats.org/officeDocument/2006/math">
+                    <m:r>
+                      <a:rPr lang="en-GB" i="1" noProof="0" smtClean="0">
+                        <a:latin typeface="Cambria Math" panose="02040503050406030204" pitchFamily="18" charset="0"/>
+                      </a:rPr>
+                      <m:t>𝐼</m:t>
+                    </m:r>
+                  </m:oMath>
+                </a14:m>
+                <a:r>
+                  <a:rPr lang="en-GB" noProof="0" dirty="0"/>
+                  <a:t> = «All the background information on GRBs»</a:t>
+                </a:r>
+              </a:p>
+            </p:txBody>
+          </p:sp>
+        </mc:Choice>
+        <mc:Fallback>
+          <p:sp>
+            <p:nvSpPr>
+              <p:cNvPr id="2" name="CasellaDiTesto 1">
+                <a:extLst>
+                  <a:ext uri="{FF2B5EF4-FFF2-40B4-BE49-F238E27FC236}">
+                    <a16:creationId xmlns:a16="http://schemas.microsoft.com/office/drawing/2014/main" id="{52A3BC6C-6ADD-66CC-2D52-87B80EEC55AA}"/>
+                  </a:ext>
+                </a:extLst>
+              </p:cNvPr>
+              <p:cNvSpPr txBox="1">
+                <a:spLocks noRot="1" noChangeAspect="1" noMove="1" noResize="1" noEditPoints="1" noAdjustHandles="1" noChangeArrowheads="1" noChangeShapeType="1" noTextEdit="1"/>
+              </p:cNvSpPr>
+              <p:nvPr/>
+            </p:nvSpPr>
+            <p:spPr>
+              <a:xfrm>
+                <a:off x="750013" y="1524000"/>
+                <a:ext cx="5702158" cy="1754326"/>
+              </a:xfrm>
+              <a:prstGeom prst="rect">
+                <a:avLst/>
+              </a:prstGeom>
+              <a:blipFill>
+                <a:blip r:embed="rId3"/>
+                <a:stretch>
+                  <a:fillRect l="-856" t="-1736" b="-4514"/>
+                </a:stretch>
+              </a:blipFill>
+            </p:spPr>
+            <p:txBody>
+              <a:bodyPr/>
+              <a:lstStyle/>
+              <a:p>
+                <a:r>
+                  <a:rPr lang="it-IT">
+                    <a:noFill/>
+                  </a:rPr>
+                  <a:t> </a:t>
+                </a:r>
+              </a:p>
+            </p:txBody>
+          </p:sp>
+        </mc:Fallback>
+      </mc:AlternateContent>
+      <mc:AlternateContent xmlns:mc="http://schemas.openxmlformats.org/markup-compatibility/2006">
+        <mc:Choice xmlns:a14="http://schemas.microsoft.com/office/drawing/2010/main" Requires="a14">
+          <p:sp>
+            <p:nvSpPr>
+              <p:cNvPr id="3" name="CasellaDiTesto 2">
+                <a:extLst>
+                  <a:ext uri="{FF2B5EF4-FFF2-40B4-BE49-F238E27FC236}">
+                    <a16:creationId xmlns:a16="http://schemas.microsoft.com/office/drawing/2014/main" id="{1712026B-937A-C87F-79A1-73D5369C0880}"/>
+                  </a:ext>
+                </a:extLst>
+              </p:cNvPr>
+              <p:cNvSpPr txBox="1"/>
+              <p:nvPr/>
+            </p:nvSpPr>
+            <p:spPr>
+              <a:xfrm>
+                <a:off x="3626778" y="4018047"/>
+                <a:ext cx="4448710" cy="861326"/>
+              </a:xfrm>
+              <a:prstGeom prst="rect">
+                <a:avLst/>
+              </a:prstGeom>
+              <a:noFill/>
+            </p:spPr>
+            <p:txBody>
+              <a:bodyPr wrap="square" rtlCol="0">
+                <a:spAutoFit/>
+              </a:bodyPr>
+              <a:lstStyle/>
+              <a:p>
+                <a14:m>
+                  <m:oMathPara xmlns:m="http://schemas.openxmlformats.org/officeDocument/2006/math">
+                    <m:oMathParaPr>
+                      <m:jc m:val="centerGroup"/>
+                    </m:oMathParaPr>
+                    <m:oMath xmlns:m="http://schemas.openxmlformats.org/officeDocument/2006/math">
+                      <m:r>
+                        <a:rPr lang="en-GB" sz="2400" i="1" noProof="0" smtClean="0">
+                          <a:latin typeface="Cambria Math" panose="02040503050406030204" pitchFamily="18" charset="0"/>
+                        </a:rPr>
+                        <m:t>𝑃</m:t>
+                      </m:r>
+                      <m:d>
+                        <m:dPr>
+                          <m:ctrlPr>
+                            <a:rPr lang="en-GB" sz="2400" i="1" noProof="0" smtClean="0">
+                              <a:latin typeface="Cambria Math" panose="02040503050406030204" pitchFamily="18" charset="0"/>
+                            </a:rPr>
+                          </m:ctrlPr>
+                        </m:dPr>
+                        <m:e>
+                          <m:r>
+                            <a:rPr lang="en-GB" sz="2400" i="1" noProof="0" smtClean="0">
+                              <a:latin typeface="Cambria Math" panose="02040503050406030204" pitchFamily="18" charset="0"/>
+                            </a:rPr>
+                            <m:t>𝜃</m:t>
+                          </m:r>
+                        </m:e>
+                        <m:e>
+                          <m:r>
+                            <a:rPr lang="en-GB" sz="2400" i="1" noProof="0" smtClean="0">
+                              <a:latin typeface="Cambria Math" panose="02040503050406030204" pitchFamily="18" charset="0"/>
+                            </a:rPr>
+                            <m:t>𝐻𝐷𝐼</m:t>
+                          </m:r>
+                        </m:e>
+                      </m:d>
+                      <m:r>
+                        <a:rPr lang="en-GB" sz="2400" i="1" noProof="0" smtClean="0">
+                          <a:latin typeface="Cambria Math" panose="02040503050406030204" pitchFamily="18" charset="0"/>
+                        </a:rPr>
+                        <m:t>=</m:t>
+                      </m:r>
+                      <m:r>
+                        <a:rPr lang="en-GB" sz="2400" i="1" noProof="0" smtClean="0">
+                          <a:latin typeface="Cambria Math" panose="02040503050406030204" pitchFamily="18" charset="0"/>
+                        </a:rPr>
+                        <m:t>𝑃</m:t>
+                      </m:r>
+                      <m:d>
+                        <m:dPr>
+                          <m:ctrlPr>
+                            <a:rPr lang="en-GB" sz="2400" i="1" noProof="0" smtClean="0">
+                              <a:latin typeface="Cambria Math" panose="02040503050406030204" pitchFamily="18" charset="0"/>
+                            </a:rPr>
+                          </m:ctrlPr>
+                        </m:dPr>
+                        <m:e>
+                          <m:r>
+                            <a:rPr lang="en-GB" sz="2400" i="1" noProof="0" smtClean="0">
+                              <a:latin typeface="Cambria Math" panose="02040503050406030204" pitchFamily="18" charset="0"/>
+                            </a:rPr>
+                            <m:t>𝜃</m:t>
+                          </m:r>
+                        </m:e>
+                        <m:e>
+                          <m:r>
+                            <a:rPr lang="en-GB" sz="2400" i="1" noProof="0" smtClean="0">
+                              <a:latin typeface="Cambria Math" panose="02040503050406030204" pitchFamily="18" charset="0"/>
+                            </a:rPr>
+                            <m:t>𝐻𝐼</m:t>
+                          </m:r>
+                        </m:e>
+                      </m:d>
+                      <m:f>
+                        <m:fPr>
+                          <m:ctrlPr>
+                            <a:rPr lang="en-GB" sz="2400" i="1" noProof="0" smtClean="0">
+                              <a:latin typeface="Cambria Math" panose="02040503050406030204" pitchFamily="18" charset="0"/>
+                            </a:rPr>
+                          </m:ctrlPr>
+                        </m:fPr>
+                        <m:num>
+                          <m:r>
+                            <a:rPr lang="en-GB" sz="2400" i="1" noProof="0" smtClean="0">
+                              <a:latin typeface="Cambria Math" panose="02040503050406030204" pitchFamily="18" charset="0"/>
+                            </a:rPr>
+                            <m:t>𝑃</m:t>
+                          </m:r>
+                          <m:d>
+                            <m:dPr>
+                              <m:ctrlPr>
+                                <a:rPr lang="en-GB" sz="2400" i="1" noProof="0" smtClean="0">
+                                  <a:latin typeface="Cambria Math" panose="02040503050406030204" pitchFamily="18" charset="0"/>
+                                </a:rPr>
+                              </m:ctrlPr>
+                            </m:dPr>
+                            <m:e>
+                              <m:r>
+                                <a:rPr lang="en-GB" sz="2400" i="1" noProof="0" smtClean="0">
+                                  <a:latin typeface="Cambria Math" panose="02040503050406030204" pitchFamily="18" charset="0"/>
+                                </a:rPr>
+                                <m:t>𝐷</m:t>
+                              </m:r>
+                            </m:e>
+                            <m:e>
+                              <m:r>
+                                <a:rPr lang="en-GB" sz="2400" i="1" noProof="0" smtClean="0">
+                                  <a:latin typeface="Cambria Math" panose="02040503050406030204" pitchFamily="18" charset="0"/>
+                                </a:rPr>
+                                <m:t>𝜃</m:t>
+                              </m:r>
+                              <m:r>
+                                <a:rPr lang="en-GB" sz="2400" i="1" noProof="0" smtClean="0">
+                                  <a:latin typeface="Cambria Math" panose="02040503050406030204" pitchFamily="18" charset="0"/>
+                                </a:rPr>
+                                <m:t>𝐻𝐼</m:t>
+                              </m:r>
+                            </m:e>
+                          </m:d>
+                        </m:num>
+                        <m:den>
+                          <m:r>
+                            <a:rPr lang="en-GB" sz="2400" i="1" noProof="0" smtClean="0">
+                              <a:latin typeface="Cambria Math" panose="02040503050406030204" pitchFamily="18" charset="0"/>
+                            </a:rPr>
+                            <m:t>𝑃</m:t>
+                          </m:r>
+                          <m:d>
+                            <m:dPr>
+                              <m:ctrlPr>
+                                <a:rPr lang="en-GB" sz="2400" i="1" noProof="0" smtClean="0">
+                                  <a:latin typeface="Cambria Math" panose="02040503050406030204" pitchFamily="18" charset="0"/>
+                                </a:rPr>
+                              </m:ctrlPr>
+                            </m:dPr>
+                            <m:e>
+                              <m:r>
+                                <a:rPr lang="en-GB" sz="2400" i="1" noProof="0" smtClean="0">
+                                  <a:latin typeface="Cambria Math" panose="02040503050406030204" pitchFamily="18" charset="0"/>
+                                </a:rPr>
+                                <m:t>𝐷</m:t>
+                              </m:r>
+                            </m:e>
+                            <m:e>
+                              <m:r>
+                                <a:rPr lang="en-GB" sz="2400" i="1" noProof="0" smtClean="0">
+                                  <a:latin typeface="Cambria Math" panose="02040503050406030204" pitchFamily="18" charset="0"/>
+                                </a:rPr>
+                                <m:t>𝐻𝐼</m:t>
+                              </m:r>
+                            </m:e>
+                          </m:d>
+                        </m:den>
+                      </m:f>
+                    </m:oMath>
+                  </m:oMathPara>
+                </a14:m>
+                <a:endParaRPr lang="en-GB" sz="2400" noProof="0" dirty="0"/>
+              </a:p>
+            </p:txBody>
+          </p:sp>
+        </mc:Choice>
+        <mc:Fallback>
+          <p:sp>
+            <p:nvSpPr>
+              <p:cNvPr id="3" name="CasellaDiTesto 2">
+                <a:extLst>
+                  <a:ext uri="{FF2B5EF4-FFF2-40B4-BE49-F238E27FC236}">
+                    <a16:creationId xmlns:a16="http://schemas.microsoft.com/office/drawing/2014/main" id="{1712026B-937A-C87F-79A1-73D5369C0880}"/>
+                  </a:ext>
+                </a:extLst>
+              </p:cNvPr>
+              <p:cNvSpPr txBox="1">
+                <a:spLocks noRot="1" noChangeAspect="1" noMove="1" noResize="1" noEditPoints="1" noAdjustHandles="1" noChangeArrowheads="1" noChangeShapeType="1" noTextEdit="1"/>
+              </p:cNvSpPr>
+              <p:nvPr/>
+            </p:nvSpPr>
+            <p:spPr>
+              <a:xfrm>
+                <a:off x="3626778" y="4018047"/>
+                <a:ext cx="4448710" cy="861326"/>
+              </a:xfrm>
+              <a:prstGeom prst="rect">
+                <a:avLst/>
+              </a:prstGeom>
+              <a:blipFill>
+                <a:blip r:embed="rId4"/>
+                <a:stretch>
+                  <a:fillRect/>
+                </a:stretch>
+              </a:blipFill>
+            </p:spPr>
+            <p:txBody>
+              <a:bodyPr/>
+              <a:lstStyle/>
+              <a:p>
+                <a:r>
+                  <a:rPr lang="it-IT">
+                    <a:noFill/>
+                  </a:rPr>
+                  <a:t> </a:t>
+                </a:r>
+              </a:p>
+            </p:txBody>
+          </p:sp>
+        </mc:Fallback>
+      </mc:AlternateContent>
+    </p:spTree>
+    <p:extLst>
+      <p:ext uri="{BB962C8B-B14F-4D97-AF65-F5344CB8AC3E}">
+        <p14:creationId xmlns:p14="http://schemas.microsoft.com/office/powerpoint/2010/main" val="3433658766"/>
+      </p:ext>
+    </p:extLst>
+  </p:cSld>
+  <p:clrMapOvr>
+    <a:masterClrMapping/>
+  </p:clrMapOvr>
+</p:sld>
+</file>
+
+<file path=ppt/slides/slide7.xml><?xml version="1.0" encoding="utf-8"?>
+<p:sld xmlns:a="http://schemas.openxmlformats.org/drawingml/2006/main" xmlns:r="http://schemas.openxmlformats.org/officeDocument/2006/relationships" xmlns:p="http://schemas.openxmlformats.org/presentationml/2006/main">
+  <p:cSld>
+    <p:spTree>
+      <p:nvGrpSpPr>
+        <p:cNvPr id="1" name="">
+          <a:extLst>
+            <a:ext uri="{FF2B5EF4-FFF2-40B4-BE49-F238E27FC236}">
+              <a16:creationId xmlns:a16="http://schemas.microsoft.com/office/drawing/2014/main" id="{F6FB29AB-7CE1-08E7-E55D-F92BD3E48046}"/>
+            </a:ext>
+          </a:extLst>
+        </p:cNvPr>
+        <p:cNvGrpSpPr/>
+        <p:nvPr/>
+      </p:nvGrpSpPr>
+      <p:grpSpPr>
+        <a:xfrm>
+          <a:off x="0" y="0"/>
+          <a:ext cx="0" cy="0"/>
+          <a:chOff x="0" y="0"/>
+          <a:chExt cx="0" cy="0"/>
+        </a:xfrm>
+      </p:grpSpPr>
+      <mc:AlternateContent xmlns:mc="http://schemas.openxmlformats.org/markup-compatibility/2006">
+        <mc:Choice xmlns:a14="http://schemas.microsoft.com/office/drawing/2010/main" Requires="a14">
+          <p:sp>
+            <p:nvSpPr>
+              <p:cNvPr id="4" name="Titolo 1">
+                <a:extLst>
+                  <a:ext uri="{FF2B5EF4-FFF2-40B4-BE49-F238E27FC236}">
+                    <a16:creationId xmlns:a16="http://schemas.microsoft.com/office/drawing/2014/main" id="{E06BF1C8-8E92-453E-8C18-B37484166450}"/>
+                  </a:ext>
+                </a:extLst>
+              </p:cNvPr>
+              <p:cNvSpPr>
+                <a:spLocks noGrp="1"/>
+              </p:cNvSpPr>
+              <p:nvPr>
+                <p:ph type="title"/>
+              </p:nvPr>
+            </p:nvSpPr>
+            <p:spPr>
+              <a:xfrm>
+                <a:off x="642938" y="288925"/>
+                <a:ext cx="10227120" cy="1235075"/>
+              </a:xfrm>
+            </p:spPr>
+            <p:txBody>
+              <a:bodyPr>
+                <a:normAutofit/>
+              </a:bodyPr>
+              <a:lstStyle/>
+              <a:p>
+                <a:r>
+                  <a:rPr lang="en-GB" noProof="0" dirty="0"/>
+                  <a:t>Classification on </a:t>
+                </a:r>
+                <a14:m>
+                  <m:oMath xmlns:m="http://schemas.openxmlformats.org/officeDocument/2006/math">
+                    <m:func>
+                      <m:funcPr>
+                        <m:ctrlPr>
+                          <a:rPr lang="en-GB" i="1" noProof="0" smtClean="0">
+                            <a:latin typeface="Cambria Math" panose="02040503050406030204" pitchFamily="18" charset="0"/>
+                          </a:rPr>
+                        </m:ctrlPr>
+                      </m:funcPr>
+                      <m:fName>
+                        <m:r>
+                          <m:rPr>
+                            <m:sty m:val="p"/>
+                          </m:rPr>
+                          <a:rPr lang="en-GB" noProof="0" smtClean="0">
+                            <a:latin typeface="Cambria Math" panose="02040503050406030204" pitchFamily="18" charset="0"/>
+                          </a:rPr>
+                          <m:t>log</m:t>
+                        </m:r>
+                      </m:fName>
+                      <m:e>
+                        <m:d>
+                          <m:dPr>
+                            <m:ctrlPr>
+                              <a:rPr lang="en-GB" i="1" noProof="0" smtClean="0">
+                                <a:latin typeface="Cambria Math" panose="02040503050406030204" pitchFamily="18" charset="0"/>
+                              </a:rPr>
+                            </m:ctrlPr>
+                          </m:dPr>
+                          <m:e>
+                            <m:sSub>
+                              <m:sSubPr>
+                                <m:ctrlPr>
+                                  <a:rPr lang="en-GB" i="1" noProof="0">
+                                    <a:latin typeface="Cambria Math" panose="02040503050406030204" pitchFamily="18" charset="0"/>
+                                  </a:rPr>
+                                </m:ctrlPr>
+                              </m:sSubPr>
+                              <m:e>
+                                <m:r>
+                                  <a:rPr lang="en-GB" i="1" noProof="0">
+                                    <a:latin typeface="Cambria Math" panose="02040503050406030204" pitchFamily="18" charset="0"/>
+                                  </a:rPr>
+                                  <m:t>𝑇</m:t>
+                                </m:r>
+                              </m:e>
+                              <m:sub>
+                                <m:r>
+                                  <a:rPr lang="en-GB" i="1" noProof="0">
+                                    <a:latin typeface="Cambria Math" panose="02040503050406030204" pitchFamily="18" charset="0"/>
+                                  </a:rPr>
+                                  <m:t>9</m:t>
+                                </m:r>
+                                <m:r>
+                                  <a:rPr lang="en-GB" i="1" noProof="0" smtClean="0">
+                                    <a:latin typeface="Cambria Math" panose="02040503050406030204" pitchFamily="18" charset="0"/>
+                                  </a:rPr>
+                                  <m:t>0</m:t>
+                                </m:r>
+                              </m:sub>
+                            </m:sSub>
+                          </m:e>
+                        </m:d>
+                      </m:e>
+                    </m:func>
+                  </m:oMath>
+                </a14:m>
+                <a:r>
+                  <a:rPr lang="en-GB" noProof="0" dirty="0"/>
+                  <a:t>: Prior</a:t>
+                </a:r>
+              </a:p>
+            </p:txBody>
+          </p:sp>
+        </mc:Choice>
+        <mc:Fallback>
+          <p:sp>
+            <p:nvSpPr>
+              <p:cNvPr id="4" name="Titolo 1">
+                <a:extLst>
+                  <a:ext uri="{FF2B5EF4-FFF2-40B4-BE49-F238E27FC236}">
+                    <a16:creationId xmlns:a16="http://schemas.microsoft.com/office/drawing/2014/main" id="{E06BF1C8-8E92-453E-8C18-B37484166450}"/>
+                  </a:ext>
+                </a:extLst>
+              </p:cNvPr>
+              <p:cNvSpPr>
+                <a:spLocks noGrp="1" noRot="1" noChangeAspect="1" noMove="1" noResize="1" noEditPoints="1" noAdjustHandles="1" noChangeArrowheads="1" noChangeShapeType="1" noTextEdit="1"/>
+              </p:cNvSpPr>
+              <p:nvPr>
+                <p:ph type="title"/>
+              </p:nvPr>
+            </p:nvSpPr>
+            <p:spPr>
+              <a:xfrm>
+                <a:off x="642938" y="288925"/>
+                <a:ext cx="10227120" cy="1235075"/>
+              </a:xfrm>
+              <a:blipFill>
+                <a:blip r:embed="rId2"/>
+                <a:stretch>
+                  <a:fillRect l="-2384" t="-15271"/>
+                </a:stretch>
+              </a:blipFill>
+            </p:spPr>
+            <p:txBody>
+              <a:bodyPr/>
+              <a:lstStyle/>
+              <a:p>
+                <a:r>
+                  <a:rPr lang="it-IT">
+                    <a:noFill/>
+                  </a:rPr>
+                  <a:t> </a:t>
+                </a:r>
+              </a:p>
+            </p:txBody>
+          </p:sp>
+        </mc:Fallback>
+      </mc:AlternateContent>
+      <mc:AlternateContent xmlns:mc="http://schemas.openxmlformats.org/markup-compatibility/2006">
+        <mc:Choice xmlns:a14="http://schemas.microsoft.com/office/drawing/2010/main" Requires="a14">
+          <p:sp>
+            <p:nvSpPr>
+              <p:cNvPr id="3" name="CasellaDiTesto 2">
+                <a:extLst>
+                  <a:ext uri="{FF2B5EF4-FFF2-40B4-BE49-F238E27FC236}">
+                    <a16:creationId xmlns:a16="http://schemas.microsoft.com/office/drawing/2014/main" id="{A072D742-30C5-2213-D55E-64DA8FDA8793}"/>
+                  </a:ext>
+                </a:extLst>
+              </p:cNvPr>
+              <p:cNvSpPr txBox="1"/>
+              <p:nvPr/>
+            </p:nvSpPr>
+            <p:spPr>
+              <a:xfrm>
+                <a:off x="642938" y="1524000"/>
+                <a:ext cx="1304818" cy="461665"/>
+              </a:xfrm>
+              <a:prstGeom prst="rect">
+                <a:avLst/>
+              </a:prstGeom>
+              <a:noFill/>
+            </p:spPr>
+            <p:txBody>
+              <a:bodyPr wrap="square" rtlCol="0">
+                <a:spAutoFit/>
+              </a:bodyPr>
+              <a:lstStyle/>
+              <a:p>
+                <a:pPr/>
+                <a14:m>
+                  <m:oMathPara xmlns:m="http://schemas.openxmlformats.org/officeDocument/2006/math">
+                    <m:oMathParaPr>
+                      <m:jc m:val="centerGroup"/>
+                    </m:oMathParaPr>
+                    <m:oMath xmlns:m="http://schemas.openxmlformats.org/officeDocument/2006/math">
+                      <m:r>
+                        <a:rPr lang="en-GB" sz="2400" i="1" noProof="0" smtClean="0">
+                          <a:latin typeface="Cambria Math" panose="02040503050406030204" pitchFamily="18" charset="0"/>
+                        </a:rPr>
+                        <m:t>𝑃</m:t>
+                      </m:r>
+                      <m:d>
+                        <m:dPr>
+                          <m:ctrlPr>
+                            <a:rPr lang="en-GB" sz="2400" i="1" noProof="0" smtClean="0">
+                              <a:latin typeface="Cambria Math" panose="02040503050406030204" pitchFamily="18" charset="0"/>
+                            </a:rPr>
+                          </m:ctrlPr>
+                        </m:dPr>
+                        <m:e>
+                          <m:r>
+                            <a:rPr lang="en-GB" sz="2400" i="1" noProof="0" smtClean="0">
+                              <a:latin typeface="Cambria Math" panose="02040503050406030204" pitchFamily="18" charset="0"/>
+                            </a:rPr>
+                            <m:t>𝜃</m:t>
+                          </m:r>
+                        </m:e>
+                        <m:e>
+                          <m:r>
+                            <a:rPr lang="en-GB" sz="2400" i="1" noProof="0" smtClean="0">
+                              <a:latin typeface="Cambria Math" panose="02040503050406030204" pitchFamily="18" charset="0"/>
+                            </a:rPr>
+                            <m:t>𝐻𝐼</m:t>
+                          </m:r>
+                        </m:e>
+                      </m:d>
+                    </m:oMath>
+                  </m:oMathPara>
+                </a14:m>
+                <a:endParaRPr lang="en-GB" sz="2400" noProof="0" dirty="0"/>
+              </a:p>
+            </p:txBody>
+          </p:sp>
+        </mc:Choice>
+        <mc:Fallback>
+          <p:sp>
+            <p:nvSpPr>
+              <p:cNvPr id="3" name="CasellaDiTesto 2">
+                <a:extLst>
+                  <a:ext uri="{FF2B5EF4-FFF2-40B4-BE49-F238E27FC236}">
+                    <a16:creationId xmlns:a16="http://schemas.microsoft.com/office/drawing/2014/main" id="{A072D742-30C5-2213-D55E-64DA8FDA8793}"/>
+                  </a:ext>
+                </a:extLst>
+              </p:cNvPr>
+              <p:cNvSpPr txBox="1">
+                <a:spLocks noRot="1" noChangeAspect="1" noMove="1" noResize="1" noEditPoints="1" noAdjustHandles="1" noChangeArrowheads="1" noChangeShapeType="1" noTextEdit="1"/>
+              </p:cNvSpPr>
+              <p:nvPr/>
+            </p:nvSpPr>
+            <p:spPr>
+              <a:xfrm>
+                <a:off x="642938" y="1524000"/>
+                <a:ext cx="1304818" cy="461665"/>
+              </a:xfrm>
+              <a:prstGeom prst="rect">
+                <a:avLst/>
+              </a:prstGeom>
+              <a:blipFill>
+                <a:blip r:embed="rId3"/>
+                <a:stretch>
+                  <a:fillRect/>
+                </a:stretch>
+              </a:blipFill>
+            </p:spPr>
+            <p:txBody>
+              <a:bodyPr/>
+              <a:lstStyle/>
+              <a:p>
+                <a:r>
+                  <a:rPr lang="it-IT">
+                    <a:noFill/>
+                  </a:rPr>
+                  <a:t> </a:t>
+                </a:r>
+              </a:p>
+            </p:txBody>
+          </p:sp>
+        </mc:Fallback>
+      </mc:AlternateContent>
+      <p:sp>
+        <p:nvSpPr>
+          <p:cNvPr id="5" name="CasellaDiTesto 4">
+            <a:extLst>
+              <a:ext uri="{FF2B5EF4-FFF2-40B4-BE49-F238E27FC236}">
+                <a16:creationId xmlns:a16="http://schemas.microsoft.com/office/drawing/2014/main" id="{7E45B8B9-07ED-775F-C5AB-73994551BCBF}"/>
+              </a:ext>
+            </a:extLst>
+          </p:cNvPr>
+          <p:cNvSpPr txBox="1"/>
+          <p:nvPr/>
+        </p:nvSpPr>
+        <p:spPr>
+          <a:xfrm>
+            <a:off x="2784297" y="1524000"/>
+            <a:ext cx="4941869" cy="646331"/>
+          </a:xfrm>
+          <a:prstGeom prst="rect">
+            <a:avLst/>
+          </a:prstGeom>
+          <a:noFill/>
+        </p:spPr>
+        <p:txBody>
+          <a:bodyPr wrap="square" rtlCol="0">
+            <a:spAutoFit/>
+          </a:bodyPr>
+          <a:lstStyle/>
+          <a:p>
+            <a:r>
+              <a:rPr lang="en-GB" noProof="0" dirty="0"/>
+              <a:t>Probability for a set of parameters given the model and background</a:t>
+            </a:r>
+          </a:p>
+        </p:txBody>
+      </p:sp>
+      <p:sp>
+        <p:nvSpPr>
+          <p:cNvPr id="6" name="CasellaDiTesto 5">
+            <a:extLst>
+              <a:ext uri="{FF2B5EF4-FFF2-40B4-BE49-F238E27FC236}">
+                <a16:creationId xmlns:a16="http://schemas.microsoft.com/office/drawing/2014/main" id="{B63450C9-5F3C-E9BB-2AC0-67613B3BBB03}"/>
+              </a:ext>
+            </a:extLst>
+          </p:cNvPr>
+          <p:cNvSpPr txBox="1"/>
+          <p:nvPr/>
+        </p:nvSpPr>
+        <p:spPr>
+          <a:xfrm>
+            <a:off x="642938" y="2759075"/>
+            <a:ext cx="4941869" cy="646331"/>
+          </a:xfrm>
+          <a:prstGeom prst="rect">
+            <a:avLst/>
+          </a:prstGeom>
+          <a:noFill/>
+        </p:spPr>
+        <p:txBody>
+          <a:bodyPr wrap="square" rtlCol="0">
+            <a:spAutoFit/>
+          </a:bodyPr>
+          <a:lstStyle/>
+          <a:p>
+            <a:r>
+              <a:rPr lang="en-GB" noProof="0" dirty="0"/>
+              <a:t>For the weight and the means we chose a uniform prior inside the bounds</a:t>
+            </a:r>
+          </a:p>
+        </p:txBody>
+      </p:sp>
+      <mc:AlternateContent xmlns:mc="http://schemas.openxmlformats.org/markup-compatibility/2006">
+        <mc:Choice xmlns:a14="http://schemas.microsoft.com/office/drawing/2010/main" Requires="a14">
+          <p:sp>
+            <p:nvSpPr>
+              <p:cNvPr id="7" name="CasellaDiTesto 6">
+                <a:extLst>
+                  <a:ext uri="{FF2B5EF4-FFF2-40B4-BE49-F238E27FC236}">
+                    <a16:creationId xmlns:a16="http://schemas.microsoft.com/office/drawing/2014/main" id="{C0048442-99DA-EC1F-D06C-ECAB8CE784B3}"/>
+                  </a:ext>
+                </a:extLst>
+              </p:cNvPr>
+              <p:cNvSpPr txBox="1"/>
+              <p:nvPr/>
+            </p:nvSpPr>
+            <p:spPr>
+              <a:xfrm>
+                <a:off x="6096000" y="2744128"/>
+                <a:ext cx="2215793" cy="369332"/>
+              </a:xfrm>
+              <a:prstGeom prst="rect">
+                <a:avLst/>
+              </a:prstGeom>
+              <a:noFill/>
+            </p:spPr>
+            <p:txBody>
+              <a:bodyPr wrap="square" rtlCol="0">
+                <a:spAutoFit/>
+              </a:bodyPr>
+              <a:lstStyle/>
+              <a:p>
+                <a14:m>
+                  <m:oMathPara xmlns:m="http://schemas.openxmlformats.org/officeDocument/2006/math">
+                    <m:oMathParaPr>
+                      <m:jc m:val="centerGroup"/>
+                    </m:oMathParaPr>
+                    <m:oMath xmlns:m="http://schemas.openxmlformats.org/officeDocument/2006/math">
+                      <m:r>
+                        <a:rPr lang="en-GB" i="1" noProof="0" smtClean="0">
+                          <a:latin typeface="Cambria Math" panose="02040503050406030204" pitchFamily="18" charset="0"/>
+                        </a:rPr>
+                        <m:t>0&lt;</m:t>
+                      </m:r>
+                      <m:r>
+                        <a:rPr lang="en-GB" i="1" noProof="0" smtClean="0">
+                          <a:latin typeface="Cambria Math" panose="02040503050406030204" pitchFamily="18" charset="0"/>
+                        </a:rPr>
+                        <m:t>𝑤</m:t>
+                      </m:r>
+                      <m:r>
+                        <a:rPr lang="en-GB" i="1" noProof="0" smtClean="0">
+                          <a:latin typeface="Cambria Math" panose="02040503050406030204" pitchFamily="18" charset="0"/>
+                        </a:rPr>
+                        <m:t>&lt;1</m:t>
+                      </m:r>
+                    </m:oMath>
+                  </m:oMathPara>
+                </a14:m>
+                <a:endParaRPr lang="en-GB" noProof="0" dirty="0"/>
+              </a:p>
+            </p:txBody>
+          </p:sp>
+        </mc:Choice>
+        <mc:Fallback>
+          <p:sp>
+            <p:nvSpPr>
+              <p:cNvPr id="7" name="CasellaDiTesto 6">
+                <a:extLst>
+                  <a:ext uri="{FF2B5EF4-FFF2-40B4-BE49-F238E27FC236}">
+                    <a16:creationId xmlns:a16="http://schemas.microsoft.com/office/drawing/2014/main" id="{C0048442-99DA-EC1F-D06C-ECAB8CE784B3}"/>
+                  </a:ext>
+                </a:extLst>
+              </p:cNvPr>
+              <p:cNvSpPr txBox="1">
+                <a:spLocks noRot="1" noChangeAspect="1" noMove="1" noResize="1" noEditPoints="1" noAdjustHandles="1" noChangeArrowheads="1" noChangeShapeType="1" noTextEdit="1"/>
+              </p:cNvSpPr>
+              <p:nvPr/>
+            </p:nvSpPr>
+            <p:spPr>
+              <a:xfrm>
+                <a:off x="6096000" y="2744128"/>
+                <a:ext cx="2215793" cy="369332"/>
+              </a:xfrm>
+              <a:prstGeom prst="rect">
+                <a:avLst/>
+              </a:prstGeom>
+              <a:blipFill>
+                <a:blip r:embed="rId4"/>
+                <a:stretch>
+                  <a:fillRect/>
+                </a:stretch>
+              </a:blipFill>
+            </p:spPr>
+            <p:txBody>
+              <a:bodyPr/>
+              <a:lstStyle/>
+              <a:p>
+                <a:r>
+                  <a:rPr lang="it-IT">
+                    <a:noFill/>
+                  </a:rPr>
+                  <a:t> </a:t>
+                </a:r>
+              </a:p>
+            </p:txBody>
+          </p:sp>
+        </mc:Fallback>
+      </mc:AlternateContent>
+      <mc:AlternateContent xmlns:mc="http://schemas.openxmlformats.org/markup-compatibility/2006">
+        <mc:Choice xmlns:a14="http://schemas.microsoft.com/office/drawing/2010/main" Requires="a14">
+          <p:sp>
+            <p:nvSpPr>
+              <p:cNvPr id="8" name="CasellaDiTesto 7">
+                <a:extLst>
+                  <a:ext uri="{FF2B5EF4-FFF2-40B4-BE49-F238E27FC236}">
+                    <a16:creationId xmlns:a16="http://schemas.microsoft.com/office/drawing/2014/main" id="{99C8E10D-8A77-2E44-73D9-416128478ACD}"/>
+                  </a:ext>
+                </a:extLst>
+              </p:cNvPr>
+              <p:cNvSpPr txBox="1"/>
+              <p:nvPr/>
+            </p:nvSpPr>
+            <p:spPr>
+              <a:xfrm>
+                <a:off x="6226139" y="3308279"/>
+                <a:ext cx="2352782" cy="369332"/>
+              </a:xfrm>
+              <a:prstGeom prst="rect">
+                <a:avLst/>
+              </a:prstGeom>
+              <a:noFill/>
+            </p:spPr>
+            <p:txBody>
+              <a:bodyPr wrap="square" rtlCol="0">
+                <a:spAutoFit/>
+              </a:bodyPr>
+              <a:lstStyle/>
+              <a:p>
+                <a14:m>
+                  <m:oMathPara xmlns:m="http://schemas.openxmlformats.org/officeDocument/2006/math">
+                    <m:oMathParaPr>
+                      <m:jc m:val="centerGroup"/>
+                    </m:oMathParaPr>
+                    <m:oMath xmlns:m="http://schemas.openxmlformats.org/officeDocument/2006/math">
+                      <m:r>
+                        <a:rPr lang="en-GB" i="1" noProof="0" smtClean="0">
+                          <a:latin typeface="Cambria Math" panose="02040503050406030204" pitchFamily="18" charset="0"/>
+                        </a:rPr>
+                        <m:t>−4&lt;</m:t>
+                      </m:r>
+                      <m:sSub>
+                        <m:sSubPr>
+                          <m:ctrlPr>
+                            <a:rPr lang="en-GB" i="1" noProof="0" smtClean="0">
+                              <a:latin typeface="Cambria Math" panose="02040503050406030204" pitchFamily="18" charset="0"/>
+                            </a:rPr>
+                          </m:ctrlPr>
+                        </m:sSubPr>
+                        <m:e>
+                          <m:r>
+                            <a:rPr lang="en-GB" i="1" noProof="0" smtClean="0">
+                              <a:latin typeface="Cambria Math" panose="02040503050406030204" pitchFamily="18" charset="0"/>
+                            </a:rPr>
+                            <m:t>𝜇</m:t>
+                          </m:r>
+                        </m:e>
+                        <m:sub>
+                          <m:r>
+                            <a:rPr lang="en-GB" i="1" noProof="0" smtClean="0">
+                              <a:latin typeface="Cambria Math" panose="02040503050406030204" pitchFamily="18" charset="0"/>
+                            </a:rPr>
+                            <m:t>𝑖</m:t>
+                          </m:r>
+                        </m:sub>
+                      </m:sSub>
+                      <m:r>
+                        <a:rPr lang="en-GB" i="1" noProof="0" smtClean="0">
+                          <a:latin typeface="Cambria Math" panose="02040503050406030204" pitchFamily="18" charset="0"/>
+                        </a:rPr>
+                        <m:t>&lt;7</m:t>
+                      </m:r>
+                    </m:oMath>
+                  </m:oMathPara>
+                </a14:m>
+                <a:endParaRPr lang="en-GB" noProof="0" dirty="0"/>
+              </a:p>
+            </p:txBody>
+          </p:sp>
+        </mc:Choice>
+        <mc:Fallback>
+          <p:sp>
+            <p:nvSpPr>
+              <p:cNvPr id="8" name="CasellaDiTesto 7">
+                <a:extLst>
+                  <a:ext uri="{FF2B5EF4-FFF2-40B4-BE49-F238E27FC236}">
+                    <a16:creationId xmlns:a16="http://schemas.microsoft.com/office/drawing/2014/main" id="{99C8E10D-8A77-2E44-73D9-416128478ACD}"/>
+                  </a:ext>
+                </a:extLst>
+              </p:cNvPr>
+              <p:cNvSpPr txBox="1">
+                <a:spLocks noRot="1" noChangeAspect="1" noMove="1" noResize="1" noEditPoints="1" noAdjustHandles="1" noChangeArrowheads="1" noChangeShapeType="1" noTextEdit="1"/>
+              </p:cNvSpPr>
+              <p:nvPr/>
+            </p:nvSpPr>
+            <p:spPr>
+              <a:xfrm>
+                <a:off x="6226139" y="3308279"/>
+                <a:ext cx="2352782" cy="369332"/>
+              </a:xfrm>
+              <a:prstGeom prst="rect">
+                <a:avLst/>
+              </a:prstGeom>
+              <a:blipFill>
+                <a:blip r:embed="rId5"/>
+                <a:stretch>
+                  <a:fillRect b="-8333"/>
+                </a:stretch>
+              </a:blipFill>
+            </p:spPr>
+            <p:txBody>
+              <a:bodyPr/>
+              <a:lstStyle/>
+              <a:p>
+                <a:r>
+                  <a:rPr lang="it-IT">
+                    <a:noFill/>
+                  </a:rPr>
+                  <a:t> </a:t>
+                </a:r>
+              </a:p>
+            </p:txBody>
+          </p:sp>
+        </mc:Fallback>
+      </mc:AlternateContent>
+      <p:sp>
+        <p:nvSpPr>
+          <p:cNvPr id="9" name="CasellaDiTesto 8">
+            <a:extLst>
+              <a:ext uri="{FF2B5EF4-FFF2-40B4-BE49-F238E27FC236}">
+                <a16:creationId xmlns:a16="http://schemas.microsoft.com/office/drawing/2014/main" id="{FF26DB3E-C522-A550-524D-B19AE2297387}"/>
+              </a:ext>
+            </a:extLst>
+          </p:cNvPr>
+          <p:cNvSpPr txBox="1"/>
+          <p:nvPr/>
+        </p:nvSpPr>
+        <p:spPr>
+          <a:xfrm>
+            <a:off x="642938" y="4209638"/>
+            <a:ext cx="4720172" cy="923330"/>
+          </a:xfrm>
+          <a:prstGeom prst="rect">
+            <a:avLst/>
+          </a:prstGeom>
+          <a:noFill/>
+        </p:spPr>
+        <p:txBody>
+          <a:bodyPr wrap="square" rtlCol="0">
+            <a:spAutoFit/>
+          </a:bodyPr>
+          <a:lstStyle/>
+          <a:p>
+            <a:r>
+              <a:rPr lang="en-GB" noProof="0" dirty="0"/>
+              <a:t>For the </a:t>
+            </a:r>
+            <a:r>
+              <a:rPr lang="en-GB" noProof="0" dirty="0" err="1"/>
+              <a:t>sigmas</a:t>
+            </a:r>
+            <a:r>
+              <a:rPr lang="en-GB" noProof="0" dirty="0"/>
+              <a:t> we chose a Jeffrey’s prior because this are scale parameters of the problems</a:t>
+            </a:r>
+          </a:p>
+        </p:txBody>
+      </p:sp>
+      <mc:AlternateContent xmlns:mc="http://schemas.openxmlformats.org/markup-compatibility/2006">
+        <mc:Choice xmlns:a14="http://schemas.microsoft.com/office/drawing/2010/main" Requires="a14">
+          <p:sp>
+            <p:nvSpPr>
+              <p:cNvPr id="10" name="CasellaDiTesto 9">
+                <a:extLst>
+                  <a:ext uri="{FF2B5EF4-FFF2-40B4-BE49-F238E27FC236}">
+                    <a16:creationId xmlns:a16="http://schemas.microsoft.com/office/drawing/2014/main" id="{719BBD76-7C39-B94C-B897-D3759F0948D4}"/>
+                  </a:ext>
+                </a:extLst>
+              </p:cNvPr>
+              <p:cNvSpPr txBox="1"/>
+              <p:nvPr/>
+            </p:nvSpPr>
+            <p:spPr>
+              <a:xfrm>
+                <a:off x="8804953" y="3113460"/>
+                <a:ext cx="1500027" cy="369332"/>
+              </a:xfrm>
+              <a:prstGeom prst="rect">
+                <a:avLst/>
+              </a:prstGeom>
+              <a:noFill/>
+            </p:spPr>
+            <p:txBody>
+              <a:bodyPr wrap="square" rtlCol="0">
+                <a:spAutoFit/>
+              </a:bodyPr>
+              <a:lstStyle/>
+              <a:p>
+                <a14:m>
+                  <m:oMathPara xmlns:m="http://schemas.openxmlformats.org/officeDocument/2006/math">
+                    <m:oMathParaPr>
+                      <m:jc m:val="centerGroup"/>
+                    </m:oMathParaPr>
+                    <m:oMath xmlns:m="http://schemas.openxmlformats.org/officeDocument/2006/math">
+                      <m:r>
+                        <a:rPr lang="en-GB" i="1" noProof="0" smtClean="0">
+                          <a:latin typeface="Cambria Math" panose="02040503050406030204" pitchFamily="18" charset="0"/>
+                        </a:rPr>
+                        <m:t>𝑃𝑟𝑖𝑜𝑟</m:t>
+                      </m:r>
+                      <m:r>
+                        <a:rPr lang="en-GB" i="1" noProof="0" smtClean="0">
+                          <a:latin typeface="Cambria Math" panose="02040503050406030204" pitchFamily="18" charset="0"/>
+                        </a:rPr>
+                        <m:t> ∝1</m:t>
+                      </m:r>
+                    </m:oMath>
+                  </m:oMathPara>
+                </a14:m>
+                <a:endParaRPr lang="en-GB" noProof="0" dirty="0"/>
+              </a:p>
+            </p:txBody>
+          </p:sp>
+        </mc:Choice>
+        <mc:Fallback>
+          <p:sp>
+            <p:nvSpPr>
+              <p:cNvPr id="10" name="CasellaDiTesto 9">
+                <a:extLst>
+                  <a:ext uri="{FF2B5EF4-FFF2-40B4-BE49-F238E27FC236}">
+                    <a16:creationId xmlns:a16="http://schemas.microsoft.com/office/drawing/2014/main" id="{719BBD76-7C39-B94C-B897-D3759F0948D4}"/>
+                  </a:ext>
+                </a:extLst>
+              </p:cNvPr>
+              <p:cNvSpPr txBox="1">
+                <a:spLocks noRot="1" noChangeAspect="1" noMove="1" noResize="1" noEditPoints="1" noAdjustHandles="1" noChangeArrowheads="1" noChangeShapeType="1" noTextEdit="1"/>
+              </p:cNvSpPr>
+              <p:nvPr/>
+            </p:nvSpPr>
+            <p:spPr>
+              <a:xfrm>
+                <a:off x="8804953" y="3113460"/>
+                <a:ext cx="1500027" cy="369332"/>
+              </a:xfrm>
+              <a:prstGeom prst="rect">
+                <a:avLst/>
+              </a:prstGeom>
+              <a:blipFill>
+                <a:blip r:embed="rId6"/>
+                <a:stretch>
+                  <a:fillRect/>
+                </a:stretch>
+              </a:blipFill>
+            </p:spPr>
+            <p:txBody>
+              <a:bodyPr/>
+              <a:lstStyle/>
+              <a:p>
+                <a:r>
+                  <a:rPr lang="it-IT">
+                    <a:noFill/>
+                  </a:rPr>
+                  <a:t> </a:t>
+                </a:r>
+              </a:p>
+            </p:txBody>
+          </p:sp>
+        </mc:Fallback>
+      </mc:AlternateContent>
+      <mc:AlternateContent xmlns:mc="http://schemas.openxmlformats.org/markup-compatibility/2006">
+        <mc:Choice xmlns:a14="http://schemas.microsoft.com/office/drawing/2010/main" Requires="a14">
+          <p:sp>
+            <p:nvSpPr>
+              <p:cNvPr id="11" name="CasellaDiTesto 10">
+                <a:extLst>
+                  <a:ext uri="{FF2B5EF4-FFF2-40B4-BE49-F238E27FC236}">
+                    <a16:creationId xmlns:a16="http://schemas.microsoft.com/office/drawing/2014/main" id="{9A3277FE-BD50-3165-9A55-CEEDB19E43B0}"/>
+                  </a:ext>
+                </a:extLst>
+              </p:cNvPr>
+              <p:cNvSpPr txBox="1"/>
+              <p:nvPr/>
+            </p:nvSpPr>
+            <p:spPr>
+              <a:xfrm>
+                <a:off x="6096000" y="4486637"/>
+                <a:ext cx="2352782" cy="369332"/>
+              </a:xfrm>
+              <a:prstGeom prst="rect">
+                <a:avLst/>
+              </a:prstGeom>
+              <a:noFill/>
+            </p:spPr>
+            <p:txBody>
+              <a:bodyPr wrap="square" rtlCol="0">
+                <a:spAutoFit/>
+              </a:bodyPr>
+              <a:lstStyle/>
+              <a:p>
+                <a14:m>
+                  <m:oMathPara xmlns:m="http://schemas.openxmlformats.org/officeDocument/2006/math">
+                    <m:oMathParaPr>
+                      <m:jc m:val="centerGroup"/>
+                    </m:oMathParaPr>
+                    <m:oMath xmlns:m="http://schemas.openxmlformats.org/officeDocument/2006/math">
+                      <m:r>
+                        <a:rPr lang="en-GB" i="1" noProof="0" smtClean="0">
+                          <a:latin typeface="Cambria Math" panose="02040503050406030204" pitchFamily="18" charset="0"/>
+                        </a:rPr>
+                        <m:t>0.01&lt;</m:t>
+                      </m:r>
+                      <m:sSub>
+                        <m:sSubPr>
+                          <m:ctrlPr>
+                            <a:rPr lang="en-GB" i="1" noProof="0" smtClean="0">
+                              <a:latin typeface="Cambria Math" panose="02040503050406030204" pitchFamily="18" charset="0"/>
+                            </a:rPr>
+                          </m:ctrlPr>
+                        </m:sSubPr>
+                        <m:e>
+                          <m:r>
+                            <a:rPr lang="en-GB" i="1" noProof="0" smtClean="0">
+                              <a:latin typeface="Cambria Math" panose="02040503050406030204" pitchFamily="18" charset="0"/>
+                            </a:rPr>
+                            <m:t>𝜎</m:t>
+                          </m:r>
+                        </m:e>
+                        <m:sub>
+                          <m:r>
+                            <a:rPr lang="en-GB" i="1" noProof="0" smtClean="0">
+                              <a:latin typeface="Cambria Math" panose="02040503050406030204" pitchFamily="18" charset="0"/>
+                            </a:rPr>
+                            <m:t>𝑖</m:t>
+                          </m:r>
+                        </m:sub>
+                      </m:sSub>
+                      <m:r>
+                        <a:rPr lang="en-GB" i="1" noProof="0" smtClean="0">
+                          <a:latin typeface="Cambria Math" panose="02040503050406030204" pitchFamily="18" charset="0"/>
+                        </a:rPr>
+                        <m:t>&lt;3</m:t>
+                      </m:r>
+                    </m:oMath>
+                  </m:oMathPara>
+                </a14:m>
+                <a:endParaRPr lang="en-GB" noProof="0" dirty="0"/>
+              </a:p>
+            </p:txBody>
+          </p:sp>
+        </mc:Choice>
+        <mc:Fallback>
+          <p:sp>
+            <p:nvSpPr>
+              <p:cNvPr id="11" name="CasellaDiTesto 10">
+                <a:extLst>
+                  <a:ext uri="{FF2B5EF4-FFF2-40B4-BE49-F238E27FC236}">
+                    <a16:creationId xmlns:a16="http://schemas.microsoft.com/office/drawing/2014/main" id="{9A3277FE-BD50-3165-9A55-CEEDB19E43B0}"/>
+                  </a:ext>
+                </a:extLst>
+              </p:cNvPr>
+              <p:cNvSpPr txBox="1">
+                <a:spLocks noRot="1" noChangeAspect="1" noMove="1" noResize="1" noEditPoints="1" noAdjustHandles="1" noChangeArrowheads="1" noChangeShapeType="1" noTextEdit="1"/>
+              </p:cNvSpPr>
+              <p:nvPr/>
+            </p:nvSpPr>
+            <p:spPr>
+              <a:xfrm>
+                <a:off x="6096000" y="4486637"/>
+                <a:ext cx="2352782" cy="369332"/>
+              </a:xfrm>
+              <a:prstGeom prst="rect">
+                <a:avLst/>
+              </a:prstGeom>
+              <a:blipFill>
+                <a:blip r:embed="rId7"/>
+                <a:stretch>
+                  <a:fillRect b="-1639"/>
+                </a:stretch>
+              </a:blipFill>
+            </p:spPr>
+            <p:txBody>
+              <a:bodyPr/>
+              <a:lstStyle/>
+              <a:p>
+                <a:r>
+                  <a:rPr lang="it-IT">
+                    <a:noFill/>
+                  </a:rPr>
+                  <a:t> </a:t>
+                </a:r>
+              </a:p>
+            </p:txBody>
+          </p:sp>
+        </mc:Fallback>
+      </mc:AlternateContent>
+      <mc:AlternateContent xmlns:mc="http://schemas.openxmlformats.org/markup-compatibility/2006">
+        <mc:Choice xmlns:a14="http://schemas.microsoft.com/office/drawing/2010/main" Requires="a14">
+          <p:sp>
+            <p:nvSpPr>
+              <p:cNvPr id="12" name="CasellaDiTesto 11">
+                <a:extLst>
+                  <a:ext uri="{FF2B5EF4-FFF2-40B4-BE49-F238E27FC236}">
+                    <a16:creationId xmlns:a16="http://schemas.microsoft.com/office/drawing/2014/main" id="{50DDD853-95ED-6D35-823B-07122B85528C}"/>
+                  </a:ext>
+                </a:extLst>
+              </p:cNvPr>
+              <p:cNvSpPr txBox="1"/>
+              <p:nvPr/>
+            </p:nvSpPr>
+            <p:spPr>
+              <a:xfrm>
+                <a:off x="8578921" y="4486637"/>
+                <a:ext cx="2034283" cy="369332"/>
+              </a:xfrm>
+              <a:prstGeom prst="rect">
+                <a:avLst/>
+              </a:prstGeom>
+              <a:noFill/>
+            </p:spPr>
+            <p:txBody>
+              <a:bodyPr wrap="square" rtlCol="0">
+                <a:spAutoFit/>
+              </a:bodyPr>
+              <a:lstStyle/>
+              <a:p>
+                <a14:m>
+                  <m:oMathPara xmlns:m="http://schemas.openxmlformats.org/officeDocument/2006/math">
+                    <m:oMathParaPr>
+                      <m:jc m:val="centerGroup"/>
+                    </m:oMathParaPr>
+                    <m:oMath xmlns:m="http://schemas.openxmlformats.org/officeDocument/2006/math">
+                      <m:r>
+                        <a:rPr lang="en-GB" i="1" noProof="0" smtClean="0">
+                          <a:latin typeface="Cambria Math" panose="02040503050406030204" pitchFamily="18" charset="0"/>
+                        </a:rPr>
+                        <m:t>𝑃𝑟𝑖𝑜𝑟</m:t>
+                      </m:r>
+                      <m:r>
+                        <a:rPr lang="en-GB" i="1" noProof="0" smtClean="0">
+                          <a:latin typeface="Cambria Math" panose="02040503050406030204" pitchFamily="18" charset="0"/>
+                        </a:rPr>
+                        <m:t> ∝1</m:t>
+                      </m:r>
+                      <m:r>
+                        <m:rPr>
+                          <m:lit/>
+                        </m:rPr>
+                        <a:rPr lang="en-GB" i="1" noProof="0" smtClean="0">
+                          <a:latin typeface="Cambria Math" panose="02040503050406030204" pitchFamily="18" charset="0"/>
+                        </a:rPr>
+                        <m:t>/</m:t>
+                      </m:r>
+                      <m:r>
+                        <a:rPr lang="en-GB" i="1" noProof="0" smtClean="0">
+                          <a:latin typeface="Cambria Math" panose="02040503050406030204" pitchFamily="18" charset="0"/>
+                        </a:rPr>
+                        <m:t>𝜎</m:t>
+                      </m:r>
+                    </m:oMath>
+                  </m:oMathPara>
+                </a14:m>
+                <a:endParaRPr lang="en-GB" noProof="0" dirty="0"/>
+              </a:p>
+            </p:txBody>
+          </p:sp>
+        </mc:Choice>
+        <mc:Fallback>
+          <p:sp>
+            <p:nvSpPr>
+              <p:cNvPr id="12" name="CasellaDiTesto 11">
+                <a:extLst>
+                  <a:ext uri="{FF2B5EF4-FFF2-40B4-BE49-F238E27FC236}">
+                    <a16:creationId xmlns:a16="http://schemas.microsoft.com/office/drawing/2014/main" id="{50DDD853-95ED-6D35-823B-07122B85528C}"/>
+                  </a:ext>
+                </a:extLst>
+              </p:cNvPr>
+              <p:cNvSpPr txBox="1">
+                <a:spLocks noRot="1" noChangeAspect="1" noMove="1" noResize="1" noEditPoints="1" noAdjustHandles="1" noChangeArrowheads="1" noChangeShapeType="1" noTextEdit="1"/>
+              </p:cNvSpPr>
+              <p:nvPr/>
+            </p:nvSpPr>
+            <p:spPr>
+              <a:xfrm>
+                <a:off x="8578921" y="4486637"/>
+                <a:ext cx="2034283" cy="369332"/>
+              </a:xfrm>
+              <a:prstGeom prst="rect">
+                <a:avLst/>
+              </a:prstGeom>
+              <a:blipFill>
+                <a:blip r:embed="rId8"/>
+                <a:stretch>
+                  <a:fillRect b="-14754"/>
+                </a:stretch>
+              </a:blipFill>
+            </p:spPr>
+            <p:txBody>
+              <a:bodyPr/>
+              <a:lstStyle/>
+              <a:p>
+                <a:r>
+                  <a:rPr lang="it-IT">
+                    <a:noFill/>
+                  </a:rPr>
+                  <a:t> </a:t>
+                </a:r>
+              </a:p>
+            </p:txBody>
+          </p:sp>
+        </mc:Fallback>
+      </mc:AlternateContent>
+    </p:spTree>
+    <p:extLst>
+      <p:ext uri="{BB962C8B-B14F-4D97-AF65-F5344CB8AC3E}">
+        <p14:creationId xmlns:p14="http://schemas.microsoft.com/office/powerpoint/2010/main" val="755392202"/>
+      </p:ext>
+    </p:extLst>
+  </p:cSld>
+  <p:clrMapOvr>
+    <a:masterClrMapping/>
+  </p:clrMapOvr>
+</p:sld>
+</file>
+
+<file path=ppt/slides/slide8.xml><?xml version="1.0" encoding="utf-8"?>
+<p:sld xmlns:a="http://schemas.openxmlformats.org/drawingml/2006/main" xmlns:r="http://schemas.openxmlformats.org/officeDocument/2006/relationships" xmlns:p="http://schemas.openxmlformats.org/presentationml/2006/main">
+  <p:cSld>
+    <p:spTree>
+      <p:nvGrpSpPr>
+        <p:cNvPr id="1" name="">
+          <a:extLst>
+            <a:ext uri="{FF2B5EF4-FFF2-40B4-BE49-F238E27FC236}">
+              <a16:creationId xmlns:a16="http://schemas.microsoft.com/office/drawing/2014/main" id="{A781F580-3886-AB6E-BAEC-D07D4713E806}"/>
+            </a:ext>
+          </a:extLst>
+        </p:cNvPr>
+        <p:cNvGrpSpPr/>
+        <p:nvPr/>
+      </p:nvGrpSpPr>
+      <p:grpSpPr>
+        <a:xfrm>
+          <a:off x="0" y="0"/>
+          <a:ext cx="0" cy="0"/>
+          <a:chOff x="0" y="0"/>
+          <a:chExt cx="0" cy="0"/>
+        </a:xfrm>
+      </p:grpSpPr>
+      <mc:AlternateContent xmlns:mc="http://schemas.openxmlformats.org/markup-compatibility/2006">
+        <mc:Choice xmlns:a14="http://schemas.microsoft.com/office/drawing/2010/main" Requires="a14">
+          <p:sp>
+            <p:nvSpPr>
+              <p:cNvPr id="4" name="Titolo 1">
+                <a:extLst>
+                  <a:ext uri="{FF2B5EF4-FFF2-40B4-BE49-F238E27FC236}">
+                    <a16:creationId xmlns:a16="http://schemas.microsoft.com/office/drawing/2014/main" id="{0FCFB7A3-6E80-7635-671B-21181F87041A}"/>
+                  </a:ext>
+                </a:extLst>
+              </p:cNvPr>
+              <p:cNvSpPr>
+                <a:spLocks noGrp="1"/>
+              </p:cNvSpPr>
+              <p:nvPr>
+                <p:ph type="title"/>
+              </p:nvPr>
+            </p:nvSpPr>
+            <p:spPr>
+              <a:xfrm>
+                <a:off x="642938" y="288925"/>
+                <a:ext cx="10227120" cy="1235075"/>
+              </a:xfrm>
+            </p:spPr>
+            <p:txBody>
+              <a:bodyPr>
+                <a:normAutofit/>
+              </a:bodyPr>
+              <a:lstStyle/>
+              <a:p>
+                <a:r>
+                  <a:rPr lang="en-GB" noProof="0" dirty="0"/>
+                  <a:t>Classification on </a:t>
+                </a:r>
+                <a14:m>
+                  <m:oMath xmlns:m="http://schemas.openxmlformats.org/officeDocument/2006/math">
+                    <m:func>
+                      <m:funcPr>
+                        <m:ctrlPr>
+                          <a:rPr lang="en-GB" i="1" noProof="0" smtClean="0">
+                            <a:latin typeface="Cambria Math" panose="02040503050406030204" pitchFamily="18" charset="0"/>
+                          </a:rPr>
+                        </m:ctrlPr>
+                      </m:funcPr>
+                      <m:fName>
+                        <m:r>
+                          <m:rPr>
+                            <m:sty m:val="p"/>
+                          </m:rPr>
+                          <a:rPr lang="en-GB" noProof="0" smtClean="0">
+                            <a:latin typeface="Cambria Math" panose="02040503050406030204" pitchFamily="18" charset="0"/>
+                          </a:rPr>
+                          <m:t>log</m:t>
+                        </m:r>
+                      </m:fName>
+                      <m:e>
+                        <m:d>
+                          <m:dPr>
+                            <m:ctrlPr>
+                              <a:rPr lang="en-GB" i="1" noProof="0" smtClean="0">
+                                <a:latin typeface="Cambria Math" panose="02040503050406030204" pitchFamily="18" charset="0"/>
+                              </a:rPr>
+                            </m:ctrlPr>
+                          </m:dPr>
+                          <m:e>
+                            <m:sSub>
+                              <m:sSubPr>
+                                <m:ctrlPr>
+                                  <a:rPr lang="en-GB" i="1" noProof="0">
+                                    <a:latin typeface="Cambria Math" panose="02040503050406030204" pitchFamily="18" charset="0"/>
+                                  </a:rPr>
+                                </m:ctrlPr>
+                              </m:sSubPr>
+                              <m:e>
+                                <m:r>
+                                  <a:rPr lang="en-GB" i="1" noProof="0">
+                                    <a:latin typeface="Cambria Math" panose="02040503050406030204" pitchFamily="18" charset="0"/>
+                                  </a:rPr>
+                                  <m:t>𝑇</m:t>
+                                </m:r>
+                              </m:e>
+                              <m:sub>
+                                <m:r>
+                                  <a:rPr lang="en-GB" i="1" noProof="0">
+                                    <a:latin typeface="Cambria Math" panose="02040503050406030204" pitchFamily="18" charset="0"/>
+                                  </a:rPr>
+                                  <m:t>9</m:t>
+                                </m:r>
+                                <m:r>
+                                  <a:rPr lang="en-GB" i="1" noProof="0" smtClean="0">
+                                    <a:latin typeface="Cambria Math" panose="02040503050406030204" pitchFamily="18" charset="0"/>
+                                  </a:rPr>
+                                  <m:t>0</m:t>
+                                </m:r>
+                              </m:sub>
+                            </m:sSub>
+                          </m:e>
+                        </m:d>
+                      </m:e>
+                    </m:func>
+                  </m:oMath>
+                </a14:m>
+                <a:r>
+                  <a:rPr lang="en-GB" noProof="0" dirty="0"/>
+                  <a:t>: Likelihood</a:t>
+                </a:r>
+              </a:p>
+            </p:txBody>
+          </p:sp>
+        </mc:Choice>
+        <mc:Fallback>
+          <p:sp>
+            <p:nvSpPr>
+              <p:cNvPr id="4" name="Titolo 1">
+                <a:extLst>
+                  <a:ext uri="{FF2B5EF4-FFF2-40B4-BE49-F238E27FC236}">
+                    <a16:creationId xmlns:a16="http://schemas.microsoft.com/office/drawing/2014/main" id="{0FCFB7A3-6E80-7635-671B-21181F87041A}"/>
+                  </a:ext>
+                </a:extLst>
+              </p:cNvPr>
+              <p:cNvSpPr>
+                <a:spLocks noGrp="1" noRot="1" noChangeAspect="1" noMove="1" noResize="1" noEditPoints="1" noAdjustHandles="1" noChangeArrowheads="1" noChangeShapeType="1" noTextEdit="1"/>
+              </p:cNvSpPr>
+              <p:nvPr>
+                <p:ph type="title"/>
+              </p:nvPr>
+            </p:nvSpPr>
+            <p:spPr>
+              <a:xfrm>
+                <a:off x="642938" y="288925"/>
+                <a:ext cx="10227120" cy="1235075"/>
+              </a:xfrm>
+              <a:blipFill>
+                <a:blip r:embed="rId2"/>
+                <a:stretch>
+                  <a:fillRect l="-2384" t="-15271"/>
+                </a:stretch>
+              </a:blipFill>
+            </p:spPr>
+            <p:txBody>
+              <a:bodyPr/>
+              <a:lstStyle/>
+              <a:p>
+                <a:r>
+                  <a:rPr lang="it-IT">
+                    <a:noFill/>
+                  </a:rPr>
+                  <a:t> </a:t>
+                </a:r>
+              </a:p>
+            </p:txBody>
+          </p:sp>
+        </mc:Fallback>
+      </mc:AlternateContent>
+      <p:sp>
+        <p:nvSpPr>
+          <p:cNvPr id="5" name="CasellaDiTesto 4">
+            <a:extLst>
+              <a:ext uri="{FF2B5EF4-FFF2-40B4-BE49-F238E27FC236}">
+                <a16:creationId xmlns:a16="http://schemas.microsoft.com/office/drawing/2014/main" id="{FF86F61D-64E6-8BBD-0240-DCBF6A8565AF}"/>
+              </a:ext>
+            </a:extLst>
+          </p:cNvPr>
+          <p:cNvSpPr txBox="1"/>
+          <p:nvPr/>
+        </p:nvSpPr>
+        <p:spPr>
+          <a:xfrm>
+            <a:off x="2784297" y="1524000"/>
+            <a:ext cx="4941869" cy="646331"/>
+          </a:xfrm>
+          <a:prstGeom prst="rect">
+            <a:avLst/>
+          </a:prstGeom>
+          <a:noFill/>
+        </p:spPr>
+        <p:txBody>
+          <a:bodyPr wrap="square" rtlCol="0">
+            <a:spAutoFit/>
+          </a:bodyPr>
+          <a:lstStyle/>
+          <a:p>
+            <a:r>
+              <a:rPr lang="en-GB" noProof="0" dirty="0"/>
+              <a:t>Probability of seeing the dataset given a set of parameters, the model and background</a:t>
+            </a:r>
+          </a:p>
+        </p:txBody>
+      </p:sp>
+      <mc:AlternateContent xmlns:mc="http://schemas.openxmlformats.org/markup-compatibility/2006">
+        <mc:Choice xmlns:a14="http://schemas.microsoft.com/office/drawing/2010/main" Requires="a14">
+          <p:sp>
+            <p:nvSpPr>
+              <p:cNvPr id="2" name="CasellaDiTesto 1">
+                <a:extLst>
+                  <a:ext uri="{FF2B5EF4-FFF2-40B4-BE49-F238E27FC236}">
+                    <a16:creationId xmlns:a16="http://schemas.microsoft.com/office/drawing/2014/main" id="{AE70E84C-0D8D-A3C2-4B6A-E37C772E6DB7}"/>
+                  </a:ext>
+                </a:extLst>
+              </p:cNvPr>
+              <p:cNvSpPr txBox="1"/>
+              <p:nvPr/>
+            </p:nvSpPr>
+            <p:spPr>
+              <a:xfrm>
+                <a:off x="388251" y="1616332"/>
+                <a:ext cx="2272757" cy="461665"/>
+              </a:xfrm>
+              <a:prstGeom prst="rect">
+                <a:avLst/>
+              </a:prstGeom>
+              <a:noFill/>
+            </p:spPr>
+            <p:txBody>
+              <a:bodyPr wrap="square" rtlCol="0">
+                <a:spAutoFit/>
+              </a:bodyPr>
+              <a:lstStyle/>
+              <a:p>
+                <a14:m>
+                  <m:oMathPara xmlns:m="http://schemas.openxmlformats.org/officeDocument/2006/math">
+                    <m:oMathParaPr>
+                      <m:jc m:val="centerGroup"/>
+                    </m:oMathParaPr>
+                    <m:oMath xmlns:m="http://schemas.openxmlformats.org/officeDocument/2006/math">
+                      <m:r>
+                        <a:rPr lang="en-GB" sz="2400" i="1" noProof="0" smtClean="0">
+                          <a:latin typeface="Cambria Math" panose="02040503050406030204" pitchFamily="18" charset="0"/>
+                        </a:rPr>
+                        <m:t>𝑃</m:t>
+                      </m:r>
+                      <m:d>
+                        <m:dPr>
+                          <m:ctrlPr>
+                            <a:rPr lang="en-GB" sz="2400" i="1" noProof="0" smtClean="0">
+                              <a:latin typeface="Cambria Math" panose="02040503050406030204" pitchFamily="18" charset="0"/>
+                            </a:rPr>
+                          </m:ctrlPr>
+                        </m:dPr>
+                        <m:e>
+                          <m:r>
+                            <a:rPr lang="en-GB" sz="2400" i="1" noProof="0" smtClean="0">
+                              <a:latin typeface="Cambria Math" panose="02040503050406030204" pitchFamily="18" charset="0"/>
+                            </a:rPr>
+                            <m:t>𝐷</m:t>
+                          </m:r>
+                        </m:e>
+                        <m:e>
+                          <m:r>
+                            <a:rPr lang="en-GB" sz="2400" i="1" noProof="0" smtClean="0">
+                              <a:latin typeface="Cambria Math" panose="02040503050406030204" pitchFamily="18" charset="0"/>
+                            </a:rPr>
+                            <m:t>𝜃</m:t>
+                          </m:r>
+                          <m:r>
+                            <a:rPr lang="en-GB" sz="2400" i="1" noProof="0" smtClean="0">
+                              <a:latin typeface="Cambria Math" panose="02040503050406030204" pitchFamily="18" charset="0"/>
+                            </a:rPr>
+                            <m:t>𝐻𝐼</m:t>
+                          </m:r>
+                        </m:e>
+                      </m:d>
+                    </m:oMath>
+                  </m:oMathPara>
+                </a14:m>
+                <a:endParaRPr lang="en-GB" sz="2400" noProof="0" dirty="0"/>
+              </a:p>
+            </p:txBody>
+          </p:sp>
+        </mc:Choice>
+        <mc:Fallback>
+          <p:sp>
+            <p:nvSpPr>
+              <p:cNvPr id="2" name="CasellaDiTesto 1">
+                <a:extLst>
+                  <a:ext uri="{FF2B5EF4-FFF2-40B4-BE49-F238E27FC236}">
+                    <a16:creationId xmlns:a16="http://schemas.microsoft.com/office/drawing/2014/main" id="{AE70E84C-0D8D-A3C2-4B6A-E37C772E6DB7}"/>
+                  </a:ext>
+                </a:extLst>
+              </p:cNvPr>
+              <p:cNvSpPr txBox="1">
+                <a:spLocks noRot="1" noChangeAspect="1" noMove="1" noResize="1" noEditPoints="1" noAdjustHandles="1" noChangeArrowheads="1" noChangeShapeType="1" noTextEdit="1"/>
+              </p:cNvSpPr>
+              <p:nvPr/>
+            </p:nvSpPr>
+            <p:spPr>
+              <a:xfrm>
+                <a:off x="388251" y="1616332"/>
+                <a:ext cx="2272757" cy="461665"/>
+              </a:xfrm>
+              <a:prstGeom prst="rect">
+                <a:avLst/>
+              </a:prstGeom>
+              <a:blipFill>
+                <a:blip r:embed="rId3"/>
+                <a:stretch>
+                  <a:fillRect/>
+                </a:stretch>
+              </a:blipFill>
+            </p:spPr>
+            <p:txBody>
+              <a:bodyPr/>
+              <a:lstStyle/>
+              <a:p>
+                <a:r>
+                  <a:rPr lang="it-IT">
+                    <a:noFill/>
+                  </a:rPr>
+                  <a:t> </a:t>
+                </a:r>
+              </a:p>
+            </p:txBody>
+          </p:sp>
+        </mc:Fallback>
+      </mc:AlternateContent>
+    </p:spTree>
+    <p:extLst>
+      <p:ext uri="{BB962C8B-B14F-4D97-AF65-F5344CB8AC3E}">
+        <p14:creationId xmlns:p14="http://schemas.microsoft.com/office/powerpoint/2010/main" val="2974396494"/>
+      </p:ext>
+    </p:extLst>
+  </p:cSld>
+  <p:clrMapOvr>
+    <a:masterClrMapping/>
+  </p:clrMapOvr>
+</p:sld>
+</file>
+
+<file path=ppt/slides/slide9.xml><?xml version="1.0" encoding="utf-8"?>
 <p:sld xmlns:a="http://schemas.openxmlformats.org/drawingml/2006/main" xmlns:r="http://schemas.openxmlformats.org/officeDocument/2006/relationships" xmlns:p="http://schemas.openxmlformats.org/presentationml/2006/main">
   <p:cSld>
     <p:spTree>
@@ -8137,7 +10857,7 @@
               <p:nvPr>
                 <p:extLst>
                   <p:ext uri="{D42A27DB-BD31-4B8C-83A1-F6EECF244321}">
-                    <p14:modId xmlns:p14="http://schemas.microsoft.com/office/powerpoint/2010/main" val="3326499666"/>
+                    <p14:modId xmlns:p14="http://schemas.microsoft.com/office/powerpoint/2010/main" val="3830169874"/>
                   </p:ext>
                 </p:extLst>
               </p:nvPr>
@@ -8774,7 +11494,7 @@
               <p:nvPr>
                 <p:extLst>
                   <p:ext uri="{D42A27DB-BD31-4B8C-83A1-F6EECF244321}">
-                    <p14:modId xmlns:p14="http://schemas.microsoft.com/office/powerpoint/2010/main" val="3326499666"/>
+                    <p14:modId xmlns:p14="http://schemas.microsoft.com/office/powerpoint/2010/main" val="3830169874"/>
                   </p:ext>
                 </p:extLst>
               </p:nvPr>
@@ -9077,659 +11797,6 @@
     <p:extLst>
       <p:ext uri="{BB962C8B-B14F-4D97-AF65-F5344CB8AC3E}">
         <p14:creationId xmlns:p14="http://schemas.microsoft.com/office/powerpoint/2010/main" val="2246216297"/>
-      </p:ext>
-    </p:extLst>
-  </p:cSld>
-  <p:clrMapOvr>
-    <a:masterClrMapping/>
-  </p:clrMapOvr>
-</p:sld>
-</file>
-
-<file path=ppt/slides/slide7.xml><?xml version="1.0" encoding="utf-8"?>
-<p:sld xmlns:a="http://schemas.openxmlformats.org/drawingml/2006/main" xmlns:r="http://schemas.openxmlformats.org/officeDocument/2006/relationships" xmlns:p="http://schemas.openxmlformats.org/presentationml/2006/main">
-  <p:cSld>
-    <p:spTree>
-      <p:nvGrpSpPr>
-        <p:cNvPr id="1" name="">
-          <a:extLst>
-            <a:ext uri="{FF2B5EF4-FFF2-40B4-BE49-F238E27FC236}">
-              <a16:creationId xmlns:a16="http://schemas.microsoft.com/office/drawing/2014/main" id="{94B4B57A-6293-2976-B48B-555FE2F44DE3}"/>
-            </a:ext>
-          </a:extLst>
-        </p:cNvPr>
-        <p:cNvGrpSpPr/>
-        <p:nvPr/>
-      </p:nvGrpSpPr>
-      <p:grpSpPr>
-        <a:xfrm>
-          <a:off x="0" y="0"/>
-          <a:ext cx="0" cy="0"/>
-          <a:chOff x="0" y="0"/>
-          <a:chExt cx="0" cy="0"/>
-        </a:xfrm>
-      </p:grpSpPr>
-      <p:sp>
-        <p:nvSpPr>
-          <p:cNvPr id="2" name="Titolo 1">
-            <a:extLst>
-              <a:ext uri="{FF2B5EF4-FFF2-40B4-BE49-F238E27FC236}">
-                <a16:creationId xmlns:a16="http://schemas.microsoft.com/office/drawing/2014/main" id="{43B18B03-F308-DD92-1281-8B17984DC3E6}"/>
-              </a:ext>
-            </a:extLst>
-          </p:cNvPr>
-          <p:cNvSpPr>
-            <a:spLocks noGrp="1"/>
-          </p:cNvSpPr>
-          <p:nvPr>
-            <p:ph type="title"/>
-          </p:nvPr>
-        </p:nvSpPr>
-        <p:spPr/>
-        <p:txBody>
-          <a:bodyPr/>
-          <a:lstStyle/>
-          <a:p>
-            <a:r>
-              <a:rPr lang="en-GB" noProof="0" dirty="0" err="1"/>
-              <a:t>Conclusioni</a:t>
-            </a:r>
-            <a:endParaRPr lang="en-GB" noProof="0" dirty="0"/>
-          </a:p>
-        </p:txBody>
-      </p:sp>
-      <p:sp>
-        <p:nvSpPr>
-          <p:cNvPr id="4" name="Segnaposto contenuto 4">
-            <a:extLst>
-              <a:ext uri="{FF2B5EF4-FFF2-40B4-BE49-F238E27FC236}">
-                <a16:creationId xmlns:a16="http://schemas.microsoft.com/office/drawing/2014/main" id="{F9B62D35-990E-4023-5A62-EB1014B42B8B}"/>
-              </a:ext>
-            </a:extLst>
-          </p:cNvPr>
-          <p:cNvSpPr>
-            <a:spLocks noGrp="1"/>
-          </p:cNvSpPr>
-          <p:nvPr>
-            <p:ph idx="1"/>
-          </p:nvPr>
-        </p:nvSpPr>
-        <p:spPr>
-          <a:xfrm>
-            <a:off x="642746" y="1714500"/>
-            <a:ext cx="9625203" cy="4502149"/>
-          </a:xfrm>
-        </p:spPr>
-        <p:txBody>
-          <a:bodyPr>
-            <a:normAutofit/>
-          </a:bodyPr>
-          <a:lstStyle/>
-          <a:p>
-            <a:pPr>
-              <a:buSzPct val="90000"/>
-              <a:buFont typeface="Wingdings" panose="05000000000000000000" pitchFamily="2" charset="2"/>
-              <a:buChar char="Ø"/>
-            </a:pPr>
-            <a:r>
-              <a:rPr lang="en-GB" sz="2400" noProof="0" dirty="0"/>
-              <a:t> Le </a:t>
-            </a:r>
-            <a:r>
-              <a:rPr lang="en-GB" sz="2400" noProof="0" dirty="0" err="1"/>
-              <a:t>onde</a:t>
-            </a:r>
-            <a:r>
-              <a:rPr lang="en-GB" sz="2400" noProof="0" dirty="0"/>
-              <a:t> di Alfvén con </a:t>
-            </a:r>
-            <a:r>
-              <a:rPr lang="en-GB" sz="2400" noProof="0" dirty="0" err="1"/>
-              <a:t>conduttività</a:t>
-            </a:r>
-            <a:r>
-              <a:rPr lang="en-GB" sz="2400" noProof="0" dirty="0"/>
-              <a:t> </a:t>
-            </a:r>
-            <a:r>
-              <a:rPr lang="en-GB" sz="2400" noProof="0" dirty="0" err="1"/>
-              <a:t>finita</a:t>
-            </a:r>
-            <a:r>
-              <a:rPr lang="en-GB" sz="2400" noProof="0" dirty="0"/>
-              <a:t> </a:t>
-            </a:r>
-            <a:r>
-              <a:rPr lang="en-GB" sz="2400" noProof="0" dirty="0" err="1"/>
-              <a:t>vengono</a:t>
-            </a:r>
-            <a:r>
-              <a:rPr lang="en-GB" sz="2400" noProof="0" dirty="0"/>
-              <a:t> </a:t>
-            </a:r>
-            <a:r>
-              <a:rPr lang="en-GB" sz="2400" noProof="0" dirty="0" err="1"/>
-              <a:t>smorzate</a:t>
-            </a:r>
-            <a:endParaRPr lang="en-GB" sz="2400" noProof="0" dirty="0"/>
-          </a:p>
-          <a:p>
-            <a:pPr>
-              <a:buSzPct val="90000"/>
-              <a:buFont typeface="Wingdings" panose="05000000000000000000" pitchFamily="2" charset="2"/>
-              <a:buChar char="Ø"/>
-            </a:pPr>
-            <a:r>
-              <a:rPr lang="en-GB" sz="2400" noProof="0" dirty="0"/>
-              <a:t> Il Sole ha </a:t>
-            </a:r>
-            <a:r>
-              <a:rPr lang="en-GB" sz="2400" noProof="0" dirty="0" err="1"/>
-              <a:t>diversi</a:t>
-            </a:r>
-            <a:r>
-              <a:rPr lang="en-GB" sz="2400" noProof="0" dirty="0"/>
-              <a:t> </a:t>
-            </a:r>
-            <a:r>
-              <a:rPr lang="en-GB" sz="2400" noProof="0" dirty="0" err="1"/>
-              <a:t>modi</a:t>
-            </a:r>
-            <a:r>
-              <a:rPr lang="en-GB" sz="2400" noProof="0" dirty="0"/>
-              <a:t> di </a:t>
-            </a:r>
-            <a:r>
-              <a:rPr lang="en-GB" sz="2400" noProof="0" dirty="0" err="1"/>
-              <a:t>generare</a:t>
-            </a:r>
-            <a:r>
-              <a:rPr lang="en-GB" sz="2400" noProof="0" dirty="0"/>
-              <a:t> </a:t>
-            </a:r>
-            <a:r>
-              <a:rPr lang="en-GB" sz="2400" noProof="0" dirty="0" err="1"/>
-              <a:t>onde</a:t>
-            </a:r>
-            <a:r>
-              <a:rPr lang="en-GB" sz="2400" noProof="0" dirty="0"/>
-              <a:t> magneto-</a:t>
-            </a:r>
-            <a:r>
-              <a:rPr lang="en-GB" sz="2400" noProof="0" dirty="0" err="1"/>
-              <a:t>idrodinamiche</a:t>
-            </a:r>
-            <a:endParaRPr lang="en-GB" sz="2400" noProof="0" dirty="0"/>
-          </a:p>
-          <a:p>
-            <a:pPr>
-              <a:buSzPct val="90000"/>
-              <a:buFont typeface="Wingdings" panose="05000000000000000000" pitchFamily="2" charset="2"/>
-              <a:buChar char="Ø"/>
-            </a:pPr>
-            <a:r>
-              <a:rPr lang="en-GB" sz="2400" noProof="0" dirty="0"/>
-              <a:t> Le </a:t>
-            </a:r>
-            <a:r>
-              <a:rPr lang="en-GB" sz="2400" noProof="0" dirty="0" err="1"/>
-              <a:t>perturbazioni</a:t>
-            </a:r>
-            <a:r>
-              <a:rPr lang="en-GB" sz="2400" noProof="0" dirty="0"/>
-              <a:t> </a:t>
-            </a:r>
-            <a:r>
-              <a:rPr lang="en-GB" sz="2400" noProof="0" dirty="0" err="1"/>
-              <a:t>della</a:t>
-            </a:r>
-            <a:r>
-              <a:rPr lang="en-GB" sz="2400" noProof="0" dirty="0"/>
-              <a:t> </a:t>
-            </a:r>
-            <a:r>
-              <a:rPr lang="en-GB" sz="2400" noProof="0" dirty="0" err="1"/>
-              <a:t>fotosfera</a:t>
-            </a:r>
-            <a:r>
-              <a:rPr lang="en-GB" sz="2400" noProof="0" dirty="0"/>
-              <a:t> </a:t>
-            </a:r>
-            <a:r>
-              <a:rPr lang="en-GB" sz="2400" noProof="0" dirty="0" err="1"/>
-              <a:t>viste</a:t>
-            </a:r>
-            <a:r>
-              <a:rPr lang="en-GB" sz="2400" noProof="0" dirty="0"/>
-              <a:t> come </a:t>
-            </a:r>
-            <a:r>
-              <a:rPr lang="en-GB" sz="2400" noProof="0" dirty="0" err="1"/>
-              <a:t>granulazione</a:t>
-            </a:r>
-            <a:r>
-              <a:rPr lang="en-GB" sz="2400" noProof="0" dirty="0"/>
-              <a:t> </a:t>
-            </a:r>
-            <a:r>
-              <a:rPr lang="en-GB" sz="2400" noProof="0" dirty="0" err="1"/>
-              <a:t>danno</a:t>
-            </a:r>
-            <a:r>
-              <a:rPr lang="en-GB" sz="2400" noProof="0" dirty="0"/>
-              <a:t> </a:t>
-            </a:r>
-            <a:r>
-              <a:rPr lang="en-GB" sz="2400" noProof="0" dirty="0" err="1"/>
-              <a:t>onde</a:t>
-            </a:r>
-            <a:r>
-              <a:rPr lang="en-GB" sz="2400" noProof="0" dirty="0"/>
-              <a:t> magneto-</a:t>
-            </a:r>
-            <a:r>
-              <a:rPr lang="en-GB" sz="2400" noProof="0" dirty="0" err="1"/>
-              <a:t>idrodinamiche</a:t>
-            </a:r>
-            <a:endParaRPr lang="en-GB" sz="2400" noProof="0" dirty="0"/>
-          </a:p>
-          <a:p>
-            <a:pPr>
-              <a:buSzPct val="90000"/>
-              <a:buFont typeface="Wingdings" panose="05000000000000000000" pitchFamily="2" charset="2"/>
-              <a:buChar char="Ø"/>
-            </a:pPr>
-            <a:r>
-              <a:rPr lang="en-GB" sz="2400" noProof="0" dirty="0"/>
-              <a:t> </a:t>
-            </a:r>
-            <a:r>
-              <a:rPr lang="en-GB" sz="2400" noProof="0" dirty="0" err="1"/>
-              <a:t>Vengono</a:t>
-            </a:r>
-            <a:r>
-              <a:rPr lang="en-GB" sz="2400" noProof="0" dirty="0"/>
-              <a:t> </a:t>
-            </a:r>
-            <a:r>
-              <a:rPr lang="en-GB" sz="2400" noProof="0" dirty="0" err="1"/>
-              <a:t>più</a:t>
-            </a:r>
-            <a:r>
-              <a:rPr lang="en-GB" sz="2400" noProof="0" dirty="0"/>
-              <a:t> </a:t>
-            </a:r>
-            <a:r>
-              <a:rPr lang="en-GB" sz="2400" noProof="0" dirty="0" err="1"/>
-              <a:t>facilmente</a:t>
-            </a:r>
-            <a:r>
-              <a:rPr lang="en-GB" sz="2400" noProof="0" dirty="0"/>
-              <a:t> </a:t>
-            </a:r>
-            <a:r>
-              <a:rPr lang="en-GB" sz="2400" noProof="0" dirty="0" err="1"/>
-              <a:t>assorbite</a:t>
-            </a:r>
-            <a:r>
-              <a:rPr lang="en-GB" sz="2400" noProof="0" dirty="0"/>
-              <a:t> </a:t>
-            </a:r>
-            <a:r>
-              <a:rPr lang="en-GB" sz="2400" noProof="0" dirty="0" err="1"/>
-              <a:t>nella</a:t>
-            </a:r>
-            <a:r>
-              <a:rPr lang="en-GB" sz="2400" noProof="0" dirty="0"/>
-              <a:t> corona </a:t>
-            </a:r>
-            <a:r>
-              <a:rPr lang="en-GB" sz="2400" noProof="0" dirty="0" err="1"/>
-              <a:t>solare</a:t>
-            </a:r>
-            <a:endParaRPr lang="en-GB" sz="2400" noProof="0" dirty="0"/>
-          </a:p>
-          <a:p>
-            <a:pPr>
-              <a:buSzPct val="90000"/>
-              <a:buFont typeface="Wingdings" panose="05000000000000000000" pitchFamily="2" charset="2"/>
-              <a:buChar char="Ø"/>
-            </a:pPr>
-            <a:r>
-              <a:rPr lang="en-GB" sz="2400" noProof="0" dirty="0"/>
-              <a:t> </a:t>
-            </a:r>
-            <a:r>
-              <a:rPr lang="en-GB" sz="2400" noProof="0" dirty="0" err="1"/>
-              <a:t>Possibile</a:t>
-            </a:r>
-            <a:r>
-              <a:rPr lang="en-GB" sz="2400" noProof="0" dirty="0"/>
-              <a:t> </a:t>
-            </a:r>
-            <a:r>
-              <a:rPr lang="en-GB" sz="2400" noProof="0" dirty="0" err="1"/>
-              <a:t>spiegazione</a:t>
-            </a:r>
-            <a:r>
-              <a:rPr lang="en-GB" sz="2400" noProof="0" dirty="0"/>
-              <a:t> </a:t>
-            </a:r>
-            <a:r>
-              <a:rPr lang="en-GB" sz="2400" noProof="0" dirty="0" err="1"/>
-              <a:t>della</a:t>
-            </a:r>
-            <a:r>
-              <a:rPr lang="en-GB" sz="2400" noProof="0" dirty="0"/>
-              <a:t> </a:t>
-            </a:r>
-            <a:r>
-              <a:rPr lang="en-GB" sz="2400" noProof="0" dirty="0" err="1"/>
-              <a:t>maggiore</a:t>
-            </a:r>
-            <a:r>
-              <a:rPr lang="en-GB" sz="2400" noProof="0" dirty="0"/>
-              <a:t> </a:t>
-            </a:r>
-            <a:r>
-              <a:rPr lang="en-GB" sz="2400" noProof="0" dirty="0" err="1"/>
-              <a:t>temperatura</a:t>
-            </a:r>
-            <a:r>
-              <a:rPr lang="en-GB" sz="2400" noProof="0" dirty="0"/>
-              <a:t> </a:t>
-            </a:r>
-            <a:r>
-              <a:rPr lang="en-GB" sz="2400" noProof="0" dirty="0" err="1"/>
-              <a:t>della</a:t>
-            </a:r>
-            <a:r>
-              <a:rPr lang="en-GB" sz="2400" noProof="0" dirty="0"/>
-              <a:t> corona</a:t>
-            </a:r>
-          </a:p>
-        </p:txBody>
-      </p:sp>
-    </p:spTree>
-    <p:extLst>
-      <p:ext uri="{BB962C8B-B14F-4D97-AF65-F5344CB8AC3E}">
-        <p14:creationId xmlns:p14="http://schemas.microsoft.com/office/powerpoint/2010/main" val="976120280"/>
-      </p:ext>
-    </p:extLst>
-  </p:cSld>
-  <p:clrMapOvr>
-    <a:masterClrMapping/>
-  </p:clrMapOvr>
-</p:sld>
-</file>
-
-<file path=ppt/slides/slide8.xml><?xml version="1.0" encoding="utf-8"?>
-<p:sld xmlns:a="http://schemas.openxmlformats.org/drawingml/2006/main" xmlns:r="http://schemas.openxmlformats.org/officeDocument/2006/relationships" xmlns:p="http://schemas.openxmlformats.org/presentationml/2006/main">
-  <p:cSld>
-    <p:spTree>
-      <p:nvGrpSpPr>
-        <p:cNvPr id="1" name=""/>
-        <p:cNvGrpSpPr/>
-        <p:nvPr/>
-      </p:nvGrpSpPr>
-      <p:grpSpPr>
-        <a:xfrm>
-          <a:off x="0" y="0"/>
-          <a:ext cx="0" cy="0"/>
-          <a:chOff x="0" y="0"/>
-          <a:chExt cx="0" cy="0"/>
-        </a:xfrm>
-      </p:grpSpPr>
-      <p:sp>
-        <p:nvSpPr>
-          <p:cNvPr id="2" name="Titolo 1">
-            <a:extLst>
-              <a:ext uri="{FF2B5EF4-FFF2-40B4-BE49-F238E27FC236}">
-                <a16:creationId xmlns:a16="http://schemas.microsoft.com/office/drawing/2014/main" id="{EFD0BC4E-0507-38A8-8010-BD9A0EBB1660}"/>
-              </a:ext>
-            </a:extLst>
-          </p:cNvPr>
-          <p:cNvSpPr>
-            <a:spLocks noGrp="1"/>
-          </p:cNvSpPr>
-          <p:nvPr>
-            <p:ph type="title"/>
-          </p:nvPr>
-        </p:nvSpPr>
-        <p:spPr/>
-        <p:txBody>
-          <a:bodyPr/>
-          <a:lstStyle/>
-          <a:p>
-            <a:r>
-              <a:rPr lang="en-GB" noProof="0" dirty="0" err="1"/>
-              <a:t>Bibliografia</a:t>
-            </a:r>
-            <a:endParaRPr lang="en-GB" noProof="0" dirty="0"/>
-          </a:p>
-        </p:txBody>
-      </p:sp>
-      <p:sp>
-        <p:nvSpPr>
-          <p:cNvPr id="3" name="Segnaposto contenuto 2">
-            <a:extLst>
-              <a:ext uri="{FF2B5EF4-FFF2-40B4-BE49-F238E27FC236}">
-                <a16:creationId xmlns:a16="http://schemas.microsoft.com/office/drawing/2014/main" id="{7BAC323B-B885-CD5A-7BAD-38DB1BA09399}"/>
-              </a:ext>
-            </a:extLst>
-          </p:cNvPr>
-          <p:cNvSpPr>
-            <a:spLocks noGrp="1"/>
-          </p:cNvSpPr>
-          <p:nvPr>
-            <p:ph idx="1"/>
-          </p:nvPr>
-        </p:nvSpPr>
-        <p:spPr>
-          <a:xfrm>
-            <a:off x="642746" y="1417833"/>
-            <a:ext cx="9826620" cy="5301465"/>
-          </a:xfrm>
-        </p:spPr>
-        <p:txBody>
-          <a:bodyPr>
-            <a:normAutofit/>
-          </a:bodyPr>
-          <a:lstStyle/>
-          <a:p>
-            <a:pPr marL="0" indent="0">
-              <a:buNone/>
-            </a:pPr>
-            <a:r>
-              <a:rPr lang="en-GB" sz="2000" noProof="0" dirty="0" err="1">
-                <a:solidFill>
-                  <a:schemeClr val="tx1">
-                    <a:lumMod val="95000"/>
-                  </a:schemeClr>
-                </a:solidFill>
-              </a:rPr>
-              <a:t>Questo</a:t>
-            </a:r>
-            <a:r>
-              <a:rPr lang="en-GB" sz="2000" noProof="0" dirty="0">
-                <a:solidFill>
-                  <a:schemeClr val="tx1">
-                    <a:lumMod val="95000"/>
-                  </a:schemeClr>
-                </a:solidFill>
-              </a:rPr>
-              <a:t> </a:t>
-            </a:r>
-            <a:r>
-              <a:rPr lang="en-GB" sz="2000" noProof="0" dirty="0" err="1">
-                <a:solidFill>
-                  <a:schemeClr val="tx1">
-                    <a:lumMod val="95000"/>
-                  </a:schemeClr>
-                </a:solidFill>
-              </a:rPr>
-              <a:t>articolo</a:t>
-            </a:r>
-            <a:r>
-              <a:rPr lang="en-GB" sz="2000" noProof="0" dirty="0">
-                <a:solidFill>
-                  <a:schemeClr val="tx1">
-                    <a:lumMod val="95000"/>
-                  </a:schemeClr>
-                </a:solidFill>
-              </a:rPr>
-              <a:t>: </a:t>
-            </a:r>
-            <a:r>
-              <a:rPr lang="en-GB" sz="2000" noProof="0" dirty="0"/>
-              <a:t>H. Alfvén, Magneto hydrodynamic waves, and the heating of the solar corona, Monthly Notices of the Royal Astronomical Society </a:t>
-            </a:r>
-            <a:r>
-              <a:rPr lang="en-GB" sz="2000" b="1" noProof="0" dirty="0"/>
-              <a:t>107</a:t>
-            </a:r>
-            <a:r>
-              <a:rPr lang="en-GB" sz="2000" noProof="0" dirty="0"/>
-              <a:t>, 211 (1947).</a:t>
-            </a:r>
-          </a:p>
-          <a:p>
-            <a:pPr marL="0" indent="0">
-              <a:buNone/>
-            </a:pPr>
-            <a:endParaRPr lang="en-GB" sz="2000" noProof="0" dirty="0"/>
-          </a:p>
-          <a:p>
-            <a:pPr marL="0" indent="0">
-              <a:buNone/>
-            </a:pPr>
-            <a:r>
-              <a:rPr lang="en-GB" sz="2000" noProof="0" dirty="0"/>
-              <a:t>[1]: H. Alfven, On the existence of electromagnetic-hydro· dynamic waves., Ark. Mat. </a:t>
-            </a:r>
-            <a:r>
-              <a:rPr lang="en-GB" sz="2000" noProof="0" dirty="0" err="1"/>
-              <a:t>Astr</a:t>
-            </a:r>
-            <a:r>
-              <a:rPr lang="en-GB" sz="2000" noProof="0" dirty="0"/>
-              <a:t>. Fys.t </a:t>
-            </a:r>
-            <a:r>
-              <a:rPr lang="en-GB" sz="2000" b="1" noProof="0" dirty="0"/>
-              <a:t>29B</a:t>
-            </a:r>
-            <a:r>
-              <a:rPr lang="en-GB" sz="2000" noProof="0" dirty="0"/>
-              <a:t>, (1942). </a:t>
-            </a:r>
-          </a:p>
-          <a:p>
-            <a:pPr marL="0" indent="0">
-              <a:buNone/>
-            </a:pPr>
-            <a:endParaRPr lang="en-GB" sz="2000" noProof="0" dirty="0"/>
-          </a:p>
-          <a:p>
-            <a:pPr marL="0" indent="0">
-              <a:buNone/>
-            </a:pPr>
-            <a:r>
-              <a:rPr lang="en-GB" sz="2000" noProof="0" dirty="0"/>
-              <a:t>[2]: T. G. Cowling, The electrical conductivity of an ionized gas in a magnetic field, with applications to the solar atmosphere and the ionosphere, Proc. A </a:t>
-            </a:r>
-            <a:r>
-              <a:rPr lang="en-GB" sz="2000" b="1" noProof="0" dirty="0"/>
-              <a:t>183</a:t>
-            </a:r>
-            <a:r>
-              <a:rPr lang="en-GB" sz="2000" noProof="0" dirty="0"/>
-              <a:t>, 453 (1945).</a:t>
-            </a:r>
-          </a:p>
-          <a:p>
-            <a:pPr marL="0" indent="0">
-              <a:buNone/>
-            </a:pPr>
-            <a:endParaRPr lang="en-GB" sz="2000" noProof="0" dirty="0"/>
-          </a:p>
-        </p:txBody>
-      </p:sp>
-    </p:spTree>
-    <p:extLst>
-      <p:ext uri="{BB962C8B-B14F-4D97-AF65-F5344CB8AC3E}">
-        <p14:creationId xmlns:p14="http://schemas.microsoft.com/office/powerpoint/2010/main" val="2326524602"/>
-      </p:ext>
-    </p:extLst>
-  </p:cSld>
-  <p:clrMapOvr>
-    <a:masterClrMapping/>
-  </p:clrMapOvr>
-</p:sld>
-</file>
-
-<file path=ppt/slides/slide9.xml><?xml version="1.0" encoding="utf-8"?>
-<p:sld xmlns:a="http://schemas.openxmlformats.org/drawingml/2006/main" xmlns:r="http://schemas.openxmlformats.org/officeDocument/2006/relationships" xmlns:p="http://schemas.openxmlformats.org/presentationml/2006/main">
-  <p:cSld>
-    <p:spTree>
-      <p:nvGrpSpPr>
-        <p:cNvPr id="1" name=""/>
-        <p:cNvGrpSpPr/>
-        <p:nvPr/>
-      </p:nvGrpSpPr>
-      <p:grpSpPr>
-        <a:xfrm>
-          <a:off x="0" y="0"/>
-          <a:ext cx="0" cy="0"/>
-          <a:chOff x="0" y="0"/>
-          <a:chExt cx="0" cy="0"/>
-        </a:xfrm>
-      </p:grpSpPr>
-      <p:sp>
-        <p:nvSpPr>
-          <p:cNvPr id="2" name="Titolo 1">
-            <a:extLst>
-              <a:ext uri="{FF2B5EF4-FFF2-40B4-BE49-F238E27FC236}">
-                <a16:creationId xmlns:a16="http://schemas.microsoft.com/office/drawing/2014/main" id="{439A5647-C4A9-AA24-0F75-5527236F72AB}"/>
-              </a:ext>
-            </a:extLst>
-          </p:cNvPr>
-          <p:cNvSpPr>
-            <a:spLocks noGrp="1"/>
-          </p:cNvSpPr>
-          <p:nvPr>
-            <p:ph type="ctrTitle"/>
-          </p:nvPr>
-        </p:nvSpPr>
-        <p:spPr>
-          <a:xfrm>
-            <a:off x="2060722" y="2164611"/>
-            <a:ext cx="8070556" cy="2528778"/>
-          </a:xfrm>
-        </p:spPr>
-        <p:txBody>
-          <a:bodyPr anchor="ctr">
-            <a:normAutofit/>
-          </a:bodyPr>
-          <a:lstStyle/>
-          <a:p>
-            <a:pPr algn="ctr"/>
-            <a:r>
-              <a:rPr lang="en-GB" sz="6000" noProof="0" dirty="0"/>
-              <a:t>Grazie per </a:t>
-            </a:r>
-            <a:r>
-              <a:rPr lang="en-GB" sz="6000" noProof="0" dirty="0" err="1"/>
-              <a:t>l’attenzione</a:t>
-            </a:r>
-            <a:endParaRPr lang="en-GB" sz="6000" noProof="0" dirty="0"/>
-          </a:p>
-        </p:txBody>
-      </p:sp>
-    </p:spTree>
-    <p:extLst>
-      <p:ext uri="{BB962C8B-B14F-4D97-AF65-F5344CB8AC3E}">
-        <p14:creationId xmlns:p14="http://schemas.microsoft.com/office/powerpoint/2010/main" val="1653933529"/>
       </p:ext>
     </p:extLst>
   </p:cSld>

--- a/Seminar.pptx
+++ b/Seminar.pptx
@@ -5,7 +5,7 @@
     <p:sldMasterId id="2147483684" r:id="rId1"/>
   </p:sldMasterIdLst>
   <p:notesMasterIdLst>
-    <p:notesMasterId r:id="rId18"/>
+    <p:notesMasterId r:id="rId20"/>
   </p:notesMasterIdLst>
   <p:sldIdLst>
     <p:sldId id="276" r:id="rId2"/>
@@ -21,9 +21,11 @@
     <p:sldId id="337" r:id="rId12"/>
     <p:sldId id="338" r:id="rId13"/>
     <p:sldId id="328" r:id="rId14"/>
-    <p:sldId id="327" r:id="rId15"/>
-    <p:sldId id="289" r:id="rId16"/>
-    <p:sldId id="290" r:id="rId17"/>
+    <p:sldId id="339" r:id="rId15"/>
+    <p:sldId id="340" r:id="rId16"/>
+    <p:sldId id="327" r:id="rId17"/>
+    <p:sldId id="289" r:id="rId18"/>
+    <p:sldId id="290" r:id="rId19"/>
   </p:sldIdLst>
   <p:sldSz cx="12192000" cy="6858000"/>
   <p:notesSz cx="6858000" cy="9144000"/>
@@ -7150,6 +7152,50 @@
           </a:p>
         </p:txBody>
       </p:sp>
+      <p:sp>
+        <p:nvSpPr>
+          <p:cNvPr id="2" name="CasellaDiTesto 1">
+            <a:extLst>
+              <a:ext uri="{FF2B5EF4-FFF2-40B4-BE49-F238E27FC236}">
+                <a16:creationId xmlns:a16="http://schemas.microsoft.com/office/drawing/2014/main" id="{7AF8C996-0060-96F7-826D-A5B59B5CCB6B}"/>
+              </a:ext>
+            </a:extLst>
+          </p:cNvPr>
+          <p:cNvSpPr txBox="1"/>
+          <p:nvPr/>
+        </p:nvSpPr>
+        <p:spPr>
+          <a:xfrm>
+            <a:off x="6688476" y="2178121"/>
+            <a:ext cx="2630185" cy="369332"/>
+          </a:xfrm>
+          <a:prstGeom prst="rect">
+            <a:avLst/>
+          </a:prstGeom>
+          <a:noFill/>
+        </p:spPr>
+        <p:txBody>
+          <a:bodyPr wrap="square" rtlCol="0">
+            <a:spAutoFit/>
+          </a:bodyPr>
+          <a:lstStyle/>
+          <a:p>
+            <a:r>
+              <a:rPr lang="it-IT" dirty="0" err="1"/>
+              <a:t>Hist</a:t>
+            </a:r>
+            <a:r>
+              <a:rPr lang="it-IT" dirty="0"/>
+              <a:t> par </a:t>
+            </a:r>
+            <a:r>
+              <a:rPr lang="it-IT" dirty="0" err="1"/>
+              <a:t>img</a:t>
+            </a:r>
+            <a:endParaRPr lang="it-IT" dirty="0"/>
+          </a:p>
+        </p:txBody>
+      </p:sp>
     </p:spTree>
     <p:extLst>
       <p:ext uri="{BB962C8B-B14F-4D97-AF65-F5344CB8AC3E}">
@@ -8179,6 +8225,644 @@
         <p:cNvPr id="1" name="">
           <a:extLst>
             <a:ext uri="{FF2B5EF4-FFF2-40B4-BE49-F238E27FC236}">
+              <a16:creationId xmlns:a16="http://schemas.microsoft.com/office/drawing/2014/main" id="{C0A026A7-7C5E-E914-F984-A40B37CCE10B}"/>
+            </a:ext>
+          </a:extLst>
+        </p:cNvPr>
+        <p:cNvGrpSpPr/>
+        <p:nvPr/>
+      </p:nvGrpSpPr>
+      <p:grpSpPr>
+        <a:xfrm>
+          <a:off x="0" y="0"/>
+          <a:ext cx="0" cy="0"/>
+          <a:chOff x="0" y="0"/>
+          <a:chExt cx="0" cy="0"/>
+        </a:xfrm>
+      </p:grpSpPr>
+      <mc:AlternateContent xmlns:mc="http://schemas.openxmlformats.org/markup-compatibility/2006" xmlns:a14="http://schemas.microsoft.com/office/drawing/2010/main">
+        <mc:Choice Requires="a14">
+          <p:sp>
+            <p:nvSpPr>
+              <p:cNvPr id="4" name="Titolo 1">
+                <a:extLst>
+                  <a:ext uri="{FF2B5EF4-FFF2-40B4-BE49-F238E27FC236}">
+                    <a16:creationId xmlns:a16="http://schemas.microsoft.com/office/drawing/2014/main" id="{D67CD9F1-19DB-7679-A1E8-A3FE1AAFC7BD}"/>
+                  </a:ext>
+                </a:extLst>
+              </p:cNvPr>
+              <p:cNvSpPr>
+                <a:spLocks noGrp="1"/>
+              </p:cNvSpPr>
+              <p:nvPr>
+                <p:ph type="title"/>
+              </p:nvPr>
+            </p:nvSpPr>
+            <p:spPr>
+              <a:xfrm>
+                <a:off x="642938" y="288925"/>
+                <a:ext cx="10227120" cy="1235075"/>
+              </a:xfrm>
+            </p:spPr>
+            <p:txBody>
+              <a:bodyPr>
+                <a:normAutofit/>
+              </a:bodyPr>
+              <a:lstStyle/>
+              <a:p>
+                <a:r>
+                  <a:rPr lang="en-GB" noProof="0" dirty="0"/>
+                  <a:t>Classification on </a:t>
+                </a:r>
+                <a14:m>
+                  <m:oMath xmlns:m="http://schemas.openxmlformats.org/officeDocument/2006/math">
+                    <m:func>
+                      <m:funcPr>
+                        <m:ctrlPr>
+                          <a:rPr lang="en-GB" i="1" noProof="0" smtClean="0">
+                            <a:latin typeface="Cambria Math" panose="02040503050406030204" pitchFamily="18" charset="0"/>
+                          </a:rPr>
+                        </m:ctrlPr>
+                      </m:funcPr>
+                      <m:fName>
+                        <m:r>
+                          <m:rPr>
+                            <m:sty m:val="p"/>
+                          </m:rPr>
+                          <a:rPr lang="en-GB" noProof="0" smtClean="0">
+                            <a:latin typeface="Cambria Math" panose="02040503050406030204" pitchFamily="18" charset="0"/>
+                          </a:rPr>
+                          <m:t>log</m:t>
+                        </m:r>
+                      </m:fName>
+                      <m:e>
+                        <m:d>
+                          <m:dPr>
+                            <m:ctrlPr>
+                              <a:rPr lang="en-GB" i="1" noProof="0" smtClean="0">
+                                <a:latin typeface="Cambria Math" panose="02040503050406030204" pitchFamily="18" charset="0"/>
+                              </a:rPr>
+                            </m:ctrlPr>
+                          </m:dPr>
+                          <m:e>
+                            <m:sSub>
+                              <m:sSubPr>
+                                <m:ctrlPr>
+                                  <a:rPr lang="en-GB" i="1" noProof="0">
+                                    <a:latin typeface="Cambria Math" panose="02040503050406030204" pitchFamily="18" charset="0"/>
+                                  </a:rPr>
+                                </m:ctrlPr>
+                              </m:sSubPr>
+                              <m:e>
+                                <m:r>
+                                  <a:rPr lang="en-GB" i="1" noProof="0">
+                                    <a:latin typeface="Cambria Math" panose="02040503050406030204" pitchFamily="18" charset="0"/>
+                                  </a:rPr>
+                                  <m:t>𝑇</m:t>
+                                </m:r>
+                              </m:e>
+                              <m:sub>
+                                <m:r>
+                                  <a:rPr lang="en-GB" i="1" noProof="0">
+                                    <a:latin typeface="Cambria Math" panose="02040503050406030204" pitchFamily="18" charset="0"/>
+                                  </a:rPr>
+                                  <m:t>9</m:t>
+                                </m:r>
+                                <m:r>
+                                  <a:rPr lang="en-GB" i="1" noProof="0" smtClean="0">
+                                    <a:latin typeface="Cambria Math" panose="02040503050406030204" pitchFamily="18" charset="0"/>
+                                  </a:rPr>
+                                  <m:t>0</m:t>
+                                </m:r>
+                              </m:sub>
+                            </m:sSub>
+                          </m:e>
+                        </m:d>
+                      </m:e>
+                    </m:func>
+                  </m:oMath>
+                </a14:m>
+                <a:r>
+                  <a:rPr lang="en-GB" noProof="0" dirty="0"/>
+                  <a:t>: final model </a:t>
+                </a:r>
+              </a:p>
+            </p:txBody>
+          </p:sp>
+        </mc:Choice>
+        <mc:Fallback xmlns="">
+          <p:sp>
+            <p:nvSpPr>
+              <p:cNvPr id="4" name="Titolo 1">
+                <a:extLst>
+                  <a:ext uri="{FF2B5EF4-FFF2-40B4-BE49-F238E27FC236}">
+                    <a16:creationId xmlns:a16="http://schemas.microsoft.com/office/drawing/2014/main" id="{D67CD9F1-19DB-7679-A1E8-A3FE1AAFC7BD}"/>
+                  </a:ext>
+                </a:extLst>
+              </p:cNvPr>
+              <p:cNvSpPr>
+                <a:spLocks noGrp="1" noRot="1" noChangeAspect="1" noMove="1" noResize="1" noEditPoints="1" noAdjustHandles="1" noChangeArrowheads="1" noChangeShapeType="1" noTextEdit="1"/>
+              </p:cNvSpPr>
+              <p:nvPr>
+                <p:ph type="title"/>
+              </p:nvPr>
+            </p:nvSpPr>
+            <p:spPr>
+              <a:xfrm>
+                <a:off x="642938" y="288925"/>
+                <a:ext cx="10227120" cy="1235075"/>
+              </a:xfrm>
+              <a:blipFill>
+                <a:blip r:embed="rId2"/>
+                <a:stretch>
+                  <a:fillRect l="-2384" t="-15271"/>
+                </a:stretch>
+              </a:blipFill>
+            </p:spPr>
+            <p:txBody>
+              <a:bodyPr/>
+              <a:lstStyle/>
+              <a:p>
+                <a:r>
+                  <a:rPr lang="it-IT">
+                    <a:noFill/>
+                  </a:rPr>
+                  <a:t> </a:t>
+                </a:r>
+              </a:p>
+            </p:txBody>
+          </p:sp>
+        </mc:Fallback>
+      </mc:AlternateContent>
+      <p:sp>
+        <p:nvSpPr>
+          <p:cNvPr id="12" name="CasellaDiTesto 11">
+            <a:extLst>
+              <a:ext uri="{FF2B5EF4-FFF2-40B4-BE49-F238E27FC236}">
+                <a16:creationId xmlns:a16="http://schemas.microsoft.com/office/drawing/2014/main" id="{C02E9209-318D-37B3-6915-51823614E145}"/>
+              </a:ext>
+            </a:extLst>
+          </p:cNvPr>
+          <p:cNvSpPr txBox="1"/>
+          <p:nvPr/>
+        </p:nvSpPr>
+        <p:spPr>
+          <a:xfrm>
+            <a:off x="642938" y="1517151"/>
+            <a:ext cx="3387047" cy="3139321"/>
+          </a:xfrm>
+          <a:prstGeom prst="rect">
+            <a:avLst/>
+          </a:prstGeom>
+          <a:noFill/>
+        </p:spPr>
+        <p:txBody>
+          <a:bodyPr wrap="square" rtlCol="0">
+            <a:spAutoFit/>
+          </a:bodyPr>
+          <a:lstStyle/>
+          <a:p>
+            <a:r>
+              <a:rPr lang="it-IT" dirty="0" err="1"/>
+              <a:t>Finally</a:t>
+            </a:r>
+            <a:r>
+              <a:rPr lang="it-IT" dirty="0"/>
+              <a:t> we look </a:t>
+            </a:r>
+            <a:r>
+              <a:rPr lang="it-IT" dirty="0" err="1"/>
+              <a:t>at</a:t>
+            </a:r>
+            <a:r>
+              <a:rPr lang="it-IT" dirty="0"/>
+              <a:t> the </a:t>
+            </a:r>
+            <a:r>
+              <a:rPr lang="it-IT" dirty="0" err="1"/>
+              <a:t>final</a:t>
+            </a:r>
+            <a:r>
+              <a:rPr lang="it-IT" dirty="0"/>
+              <a:t> model, </a:t>
+            </a:r>
+            <a:r>
+              <a:rPr lang="it-IT" dirty="0" err="1"/>
+              <a:t>computed</a:t>
+            </a:r>
+            <a:r>
+              <a:rPr lang="it-IT" dirty="0"/>
+              <a:t> </a:t>
+            </a:r>
+            <a:r>
+              <a:rPr lang="it-IT" dirty="0" err="1"/>
+              <a:t>as</a:t>
+            </a:r>
+            <a:r>
+              <a:rPr lang="it-IT" dirty="0"/>
+              <a:t> the </a:t>
+            </a:r>
+            <a:r>
+              <a:rPr lang="it-IT" dirty="0" err="1"/>
+              <a:t>median</a:t>
+            </a:r>
+            <a:r>
+              <a:rPr lang="it-IT" dirty="0"/>
+              <a:t> of the models </a:t>
+            </a:r>
+            <a:r>
+              <a:rPr lang="it-IT" dirty="0" err="1"/>
+              <a:t>computed</a:t>
+            </a:r>
+            <a:r>
+              <a:rPr lang="it-IT" dirty="0"/>
+              <a:t> on </a:t>
+            </a:r>
+            <a:r>
+              <a:rPr lang="it-IT" dirty="0" err="1"/>
+              <a:t>each</a:t>
+            </a:r>
+            <a:r>
+              <a:rPr lang="it-IT" dirty="0"/>
+              <a:t> sample (and not the model on the </a:t>
+            </a:r>
+            <a:r>
+              <a:rPr lang="it-IT" dirty="0" err="1"/>
+              <a:t>median</a:t>
+            </a:r>
+            <a:r>
+              <a:rPr lang="it-IT" dirty="0"/>
+              <a:t> </a:t>
+            </a:r>
+            <a:r>
+              <a:rPr lang="it-IT" dirty="0" err="1"/>
+              <a:t>values</a:t>
+            </a:r>
+            <a:r>
+              <a:rPr lang="it-IT" dirty="0"/>
+              <a:t>) and we </a:t>
+            </a:r>
+            <a:r>
+              <a:rPr lang="it-IT" dirty="0" err="1"/>
+              <a:t>also</a:t>
+            </a:r>
+            <a:r>
+              <a:rPr lang="it-IT" dirty="0"/>
+              <a:t> plot the </a:t>
+            </a:r>
+            <a:r>
+              <a:rPr lang="it-IT" dirty="0" err="1"/>
+              <a:t>interval</a:t>
+            </a:r>
+            <a:r>
+              <a:rPr lang="it-IT" dirty="0"/>
+              <a:t> </a:t>
+            </a:r>
+            <a:r>
+              <a:rPr lang="it-IT" dirty="0" err="1"/>
+              <a:t>corrisponding</a:t>
+            </a:r>
+            <a:r>
+              <a:rPr lang="it-IT" dirty="0"/>
+              <a:t> to 68% </a:t>
+            </a:r>
+            <a:r>
+              <a:rPr lang="it-IT" dirty="0" err="1"/>
+              <a:t>level</a:t>
+            </a:r>
+            <a:r>
+              <a:rPr lang="it-IT" dirty="0"/>
+              <a:t> of confidence. We </a:t>
+            </a:r>
+            <a:r>
+              <a:rPr lang="it-IT" dirty="0" err="1"/>
+              <a:t>also</a:t>
+            </a:r>
+            <a:r>
+              <a:rPr lang="it-IT" dirty="0"/>
+              <a:t> show the </a:t>
+            </a:r>
+            <a:r>
+              <a:rPr lang="it-IT" dirty="0" err="1"/>
+              <a:t>two</a:t>
+            </a:r>
+            <a:r>
+              <a:rPr lang="it-IT" dirty="0"/>
+              <a:t> </a:t>
+            </a:r>
+            <a:r>
+              <a:rPr lang="it-IT" dirty="0" err="1"/>
+              <a:t>separete</a:t>
+            </a:r>
+            <a:r>
+              <a:rPr lang="it-IT" dirty="0"/>
+              <a:t> </a:t>
+            </a:r>
+            <a:r>
+              <a:rPr lang="it-IT" dirty="0" err="1"/>
+              <a:t>components</a:t>
+            </a:r>
+            <a:r>
+              <a:rPr lang="it-IT" dirty="0"/>
+              <a:t> of the model</a:t>
+            </a:r>
+          </a:p>
+        </p:txBody>
+      </p:sp>
+      <p:sp>
+        <p:nvSpPr>
+          <p:cNvPr id="2" name="CasellaDiTesto 1">
+            <a:extLst>
+              <a:ext uri="{FF2B5EF4-FFF2-40B4-BE49-F238E27FC236}">
+                <a16:creationId xmlns:a16="http://schemas.microsoft.com/office/drawing/2014/main" id="{A813098C-0858-D030-C73E-CCE714DEEA2F}"/>
+              </a:ext>
+            </a:extLst>
+          </p:cNvPr>
+          <p:cNvSpPr txBox="1"/>
+          <p:nvPr/>
+        </p:nvSpPr>
+        <p:spPr>
+          <a:xfrm>
+            <a:off x="6688476" y="2178121"/>
+            <a:ext cx="2630185" cy="369332"/>
+          </a:xfrm>
+          <a:prstGeom prst="rect">
+            <a:avLst/>
+          </a:prstGeom>
+          <a:noFill/>
+        </p:spPr>
+        <p:txBody>
+          <a:bodyPr wrap="square" rtlCol="0">
+            <a:spAutoFit/>
+          </a:bodyPr>
+          <a:lstStyle/>
+          <a:p>
+            <a:r>
+              <a:rPr lang="it-IT" dirty="0" err="1"/>
+              <a:t>Final</a:t>
+            </a:r>
+            <a:r>
+              <a:rPr lang="it-IT" dirty="0"/>
+              <a:t> model </a:t>
+            </a:r>
+            <a:r>
+              <a:rPr lang="it-IT" dirty="0" err="1"/>
+              <a:t>img</a:t>
+            </a:r>
+            <a:endParaRPr lang="it-IT" dirty="0"/>
+          </a:p>
+        </p:txBody>
+      </p:sp>
+    </p:spTree>
+    <p:extLst>
+      <p:ext uri="{BB962C8B-B14F-4D97-AF65-F5344CB8AC3E}">
+        <p14:creationId xmlns:p14="http://schemas.microsoft.com/office/powerpoint/2010/main" val="1196759426"/>
+      </p:ext>
+    </p:extLst>
+  </p:cSld>
+  <p:clrMapOvr>
+    <a:masterClrMapping/>
+  </p:clrMapOvr>
+</p:sld>
+</file>
+
+<file path=ppt/slides/slide15.xml><?xml version="1.0" encoding="utf-8"?>
+<p:sld xmlns:a="http://schemas.openxmlformats.org/drawingml/2006/main" xmlns:r="http://schemas.openxmlformats.org/officeDocument/2006/relationships" xmlns:p="http://schemas.openxmlformats.org/presentationml/2006/main">
+  <p:cSld>
+    <p:spTree>
+      <p:nvGrpSpPr>
+        <p:cNvPr id="1" name="">
+          <a:extLst>
+            <a:ext uri="{FF2B5EF4-FFF2-40B4-BE49-F238E27FC236}">
+              <a16:creationId xmlns:a16="http://schemas.microsoft.com/office/drawing/2014/main" id="{C58B4848-BCDE-BE79-9846-0785787D7874}"/>
+            </a:ext>
+          </a:extLst>
+        </p:cNvPr>
+        <p:cNvGrpSpPr/>
+        <p:nvPr/>
+      </p:nvGrpSpPr>
+      <p:grpSpPr>
+        <a:xfrm>
+          <a:off x="0" y="0"/>
+          <a:ext cx="0" cy="0"/>
+          <a:chOff x="0" y="0"/>
+          <a:chExt cx="0" cy="0"/>
+        </a:xfrm>
+      </p:grpSpPr>
+      <mc:AlternateContent xmlns:mc="http://schemas.openxmlformats.org/markup-compatibility/2006">
+        <mc:Choice xmlns:a14="http://schemas.microsoft.com/office/drawing/2010/main" Requires="a14">
+          <p:sp>
+            <p:nvSpPr>
+              <p:cNvPr id="4" name="Titolo 1">
+                <a:extLst>
+                  <a:ext uri="{FF2B5EF4-FFF2-40B4-BE49-F238E27FC236}">
+                    <a16:creationId xmlns:a16="http://schemas.microsoft.com/office/drawing/2014/main" id="{635BCE01-13DF-C903-4E4A-E887A64201E3}"/>
+                  </a:ext>
+                </a:extLst>
+              </p:cNvPr>
+              <p:cNvSpPr>
+                <a:spLocks noGrp="1"/>
+              </p:cNvSpPr>
+              <p:nvPr>
+                <p:ph type="title"/>
+              </p:nvPr>
+            </p:nvSpPr>
+            <p:spPr>
+              <a:xfrm>
+                <a:off x="642938" y="288925"/>
+                <a:ext cx="10227120" cy="1235075"/>
+              </a:xfrm>
+            </p:spPr>
+            <p:txBody>
+              <a:bodyPr>
+                <a:normAutofit/>
+              </a:bodyPr>
+              <a:lstStyle/>
+              <a:p>
+                <a:r>
+                  <a:rPr lang="en-GB" noProof="0" dirty="0"/>
+                  <a:t>Classification on </a:t>
+                </a:r>
+                <a14:m>
+                  <m:oMath xmlns:m="http://schemas.openxmlformats.org/officeDocument/2006/math">
+                    <m:func>
+                      <m:funcPr>
+                        <m:ctrlPr>
+                          <a:rPr lang="en-GB" i="1" noProof="0" smtClean="0">
+                            <a:latin typeface="Cambria Math" panose="02040503050406030204" pitchFamily="18" charset="0"/>
+                          </a:rPr>
+                        </m:ctrlPr>
+                      </m:funcPr>
+                      <m:fName>
+                        <m:r>
+                          <m:rPr>
+                            <m:sty m:val="p"/>
+                          </m:rPr>
+                          <a:rPr lang="en-GB" noProof="0" smtClean="0">
+                            <a:latin typeface="Cambria Math" panose="02040503050406030204" pitchFamily="18" charset="0"/>
+                          </a:rPr>
+                          <m:t>log</m:t>
+                        </m:r>
+                      </m:fName>
+                      <m:e>
+                        <m:d>
+                          <m:dPr>
+                            <m:ctrlPr>
+                              <a:rPr lang="en-GB" i="1" noProof="0" smtClean="0">
+                                <a:latin typeface="Cambria Math" panose="02040503050406030204" pitchFamily="18" charset="0"/>
+                              </a:rPr>
+                            </m:ctrlPr>
+                          </m:dPr>
+                          <m:e>
+                            <m:sSub>
+                              <m:sSubPr>
+                                <m:ctrlPr>
+                                  <a:rPr lang="en-GB" i="1" noProof="0">
+                                    <a:latin typeface="Cambria Math" panose="02040503050406030204" pitchFamily="18" charset="0"/>
+                                  </a:rPr>
+                                </m:ctrlPr>
+                              </m:sSubPr>
+                              <m:e>
+                                <m:r>
+                                  <a:rPr lang="en-GB" i="1" noProof="0">
+                                    <a:latin typeface="Cambria Math" panose="02040503050406030204" pitchFamily="18" charset="0"/>
+                                  </a:rPr>
+                                  <m:t>𝑇</m:t>
+                                </m:r>
+                              </m:e>
+                              <m:sub>
+                                <m:r>
+                                  <a:rPr lang="en-GB" i="1" noProof="0">
+                                    <a:latin typeface="Cambria Math" panose="02040503050406030204" pitchFamily="18" charset="0"/>
+                                  </a:rPr>
+                                  <m:t>9</m:t>
+                                </m:r>
+                                <m:r>
+                                  <a:rPr lang="en-GB" i="1" noProof="0" smtClean="0">
+                                    <a:latin typeface="Cambria Math" panose="02040503050406030204" pitchFamily="18" charset="0"/>
+                                  </a:rPr>
+                                  <m:t>0</m:t>
+                                </m:r>
+                              </m:sub>
+                            </m:sSub>
+                          </m:e>
+                        </m:d>
+                      </m:e>
+                    </m:func>
+                  </m:oMath>
+                </a14:m>
+                <a:r>
+                  <a:rPr lang="en-GB" noProof="0" dirty="0"/>
+                  <a:t> with errors </a:t>
+                </a:r>
+              </a:p>
+            </p:txBody>
+          </p:sp>
+        </mc:Choice>
+        <mc:Fallback>
+          <p:sp>
+            <p:nvSpPr>
+              <p:cNvPr id="4" name="Titolo 1">
+                <a:extLst>
+                  <a:ext uri="{FF2B5EF4-FFF2-40B4-BE49-F238E27FC236}">
+                    <a16:creationId xmlns:a16="http://schemas.microsoft.com/office/drawing/2014/main" id="{635BCE01-13DF-C903-4E4A-E887A64201E3}"/>
+                  </a:ext>
+                </a:extLst>
+              </p:cNvPr>
+              <p:cNvSpPr>
+                <a:spLocks noGrp="1" noRot="1" noChangeAspect="1" noMove="1" noResize="1" noEditPoints="1" noAdjustHandles="1" noChangeArrowheads="1" noChangeShapeType="1" noTextEdit="1"/>
+              </p:cNvSpPr>
+              <p:nvPr>
+                <p:ph type="title"/>
+              </p:nvPr>
+            </p:nvSpPr>
+            <p:spPr>
+              <a:xfrm>
+                <a:off x="642938" y="288925"/>
+                <a:ext cx="10227120" cy="1235075"/>
+              </a:xfrm>
+              <a:blipFill>
+                <a:blip r:embed="rId2"/>
+                <a:stretch>
+                  <a:fillRect l="-2384" t="-15271"/>
+                </a:stretch>
+              </a:blipFill>
+            </p:spPr>
+            <p:txBody>
+              <a:bodyPr/>
+              <a:lstStyle/>
+              <a:p>
+                <a:r>
+                  <a:rPr lang="it-IT">
+                    <a:noFill/>
+                  </a:rPr>
+                  <a:t> </a:t>
+                </a:r>
+              </a:p>
+            </p:txBody>
+          </p:sp>
+        </mc:Fallback>
+      </mc:AlternateContent>
+      <p:sp>
+        <p:nvSpPr>
+          <p:cNvPr id="12" name="CasellaDiTesto 11">
+            <a:extLst>
+              <a:ext uri="{FF2B5EF4-FFF2-40B4-BE49-F238E27FC236}">
+                <a16:creationId xmlns:a16="http://schemas.microsoft.com/office/drawing/2014/main" id="{7F1FAD3D-7226-39C2-4F69-F003E58656CF}"/>
+              </a:ext>
+            </a:extLst>
+          </p:cNvPr>
+          <p:cNvSpPr txBox="1"/>
+          <p:nvPr/>
+        </p:nvSpPr>
+        <p:spPr>
+          <a:xfrm>
+            <a:off x="642938" y="1517151"/>
+            <a:ext cx="3387047" cy="369332"/>
+          </a:xfrm>
+          <a:prstGeom prst="rect">
+            <a:avLst/>
+          </a:prstGeom>
+          <a:noFill/>
+        </p:spPr>
+        <p:txBody>
+          <a:bodyPr wrap="square" rtlCol="0">
+            <a:spAutoFit/>
+          </a:bodyPr>
+          <a:lstStyle/>
+          <a:p>
+            <a:r>
+              <a:rPr lang="it-IT" dirty="0" err="1"/>
+              <a:t>Consider</a:t>
+            </a:r>
+            <a:r>
+              <a:rPr lang="it-IT" dirty="0"/>
+              <a:t> </a:t>
+            </a:r>
+          </a:p>
+        </p:txBody>
+      </p:sp>
+    </p:spTree>
+    <p:extLst>
+      <p:ext uri="{BB962C8B-B14F-4D97-AF65-F5344CB8AC3E}">
+        <p14:creationId xmlns:p14="http://schemas.microsoft.com/office/powerpoint/2010/main" val="2651039601"/>
+      </p:ext>
+    </p:extLst>
+  </p:cSld>
+  <p:clrMapOvr>
+    <a:masterClrMapping/>
+  </p:clrMapOvr>
+</p:sld>
+</file>
+
+<file path=ppt/slides/slide16.xml><?xml version="1.0" encoding="utf-8"?>
+<p:sld xmlns:a="http://schemas.openxmlformats.org/drawingml/2006/main" xmlns:r="http://schemas.openxmlformats.org/officeDocument/2006/relationships" xmlns:p="http://schemas.openxmlformats.org/presentationml/2006/main">
+  <p:cSld>
+    <p:spTree>
+      <p:nvGrpSpPr>
+        <p:cNvPr id="1" name="">
+          <a:extLst>
+            <a:ext uri="{FF2B5EF4-FFF2-40B4-BE49-F238E27FC236}">
               <a16:creationId xmlns:a16="http://schemas.microsoft.com/office/drawing/2014/main" id="{94B4B57A-6293-2976-B48B-555FE2F44DE3}"/>
             </a:ext>
           </a:extLst>
@@ -8216,10 +8900,9 @@
           <a:lstStyle/>
           <a:p>
             <a:r>
-              <a:rPr lang="en-GB" noProof="0" dirty="0" err="1"/>
-              <a:t>Conclusioni</a:t>
-            </a:r>
-            <a:endParaRPr lang="en-GB" noProof="0" dirty="0"/>
+              <a:rPr lang="en-GB" noProof="0" dirty="0"/>
+              <a:t>Conclusions</a:t>
+            </a:r>
           </a:p>
         </p:txBody>
       </p:sp>
@@ -8258,279 +8941,7 @@
             </a:pPr>
             <a:r>
               <a:rPr lang="en-GB" sz="2400" noProof="0" dirty="0"/>
-              <a:t> Le </a:t>
-            </a:r>
-            <a:r>
-              <a:rPr lang="en-GB" sz="2400" noProof="0" dirty="0" err="1"/>
-              <a:t>onde</a:t>
-            </a:r>
-            <a:r>
-              <a:rPr lang="en-GB" sz="2400" noProof="0" dirty="0"/>
-              <a:t> di Alfvén con </a:t>
-            </a:r>
-            <a:r>
-              <a:rPr lang="en-GB" sz="2400" noProof="0" dirty="0" err="1"/>
-              <a:t>conduttività</a:t>
-            </a:r>
-            <a:r>
-              <a:rPr lang="en-GB" sz="2400" noProof="0" dirty="0"/>
               <a:t> </a:t>
-            </a:r>
-            <a:r>
-              <a:rPr lang="en-GB" sz="2400" noProof="0" dirty="0" err="1"/>
-              <a:t>finita</a:t>
-            </a:r>
-            <a:r>
-              <a:rPr lang="en-GB" sz="2400" noProof="0" dirty="0"/>
-              <a:t> </a:t>
-            </a:r>
-            <a:r>
-              <a:rPr lang="en-GB" sz="2400" noProof="0" dirty="0" err="1"/>
-              <a:t>vengono</a:t>
-            </a:r>
-            <a:r>
-              <a:rPr lang="en-GB" sz="2400" noProof="0" dirty="0"/>
-              <a:t> </a:t>
-            </a:r>
-            <a:r>
-              <a:rPr lang="en-GB" sz="2400" noProof="0" dirty="0" err="1"/>
-              <a:t>smorzate</a:t>
-            </a:r>
-            <a:endParaRPr lang="en-GB" sz="2400" noProof="0" dirty="0"/>
-          </a:p>
-          <a:p>
-            <a:pPr>
-              <a:buSzPct val="90000"/>
-              <a:buFont typeface="Wingdings" panose="05000000000000000000" pitchFamily="2" charset="2"/>
-              <a:buChar char="Ø"/>
-            </a:pPr>
-            <a:r>
-              <a:rPr lang="en-GB" sz="2400" noProof="0" dirty="0"/>
-              <a:t> Il Sole ha </a:t>
-            </a:r>
-            <a:r>
-              <a:rPr lang="en-GB" sz="2400" noProof="0" dirty="0" err="1"/>
-              <a:t>diversi</a:t>
-            </a:r>
-            <a:r>
-              <a:rPr lang="en-GB" sz="2400" noProof="0" dirty="0"/>
-              <a:t> </a:t>
-            </a:r>
-            <a:r>
-              <a:rPr lang="en-GB" sz="2400" noProof="0" dirty="0" err="1"/>
-              <a:t>modi</a:t>
-            </a:r>
-            <a:r>
-              <a:rPr lang="en-GB" sz="2400" noProof="0" dirty="0"/>
-              <a:t> di </a:t>
-            </a:r>
-            <a:r>
-              <a:rPr lang="en-GB" sz="2400" noProof="0" dirty="0" err="1"/>
-              <a:t>generare</a:t>
-            </a:r>
-            <a:r>
-              <a:rPr lang="en-GB" sz="2400" noProof="0" dirty="0"/>
-              <a:t> </a:t>
-            </a:r>
-            <a:r>
-              <a:rPr lang="en-GB" sz="2400" noProof="0" dirty="0" err="1"/>
-              <a:t>onde</a:t>
-            </a:r>
-            <a:r>
-              <a:rPr lang="en-GB" sz="2400" noProof="0" dirty="0"/>
-              <a:t> magneto-</a:t>
-            </a:r>
-            <a:r>
-              <a:rPr lang="en-GB" sz="2400" noProof="0" dirty="0" err="1"/>
-              <a:t>idrodinamiche</a:t>
-            </a:r>
-            <a:endParaRPr lang="en-GB" sz="2400" noProof="0" dirty="0"/>
-          </a:p>
-          <a:p>
-            <a:pPr>
-              <a:buSzPct val="90000"/>
-              <a:buFont typeface="Wingdings" panose="05000000000000000000" pitchFamily="2" charset="2"/>
-              <a:buChar char="Ø"/>
-            </a:pPr>
-            <a:r>
-              <a:rPr lang="en-GB" sz="2400" noProof="0" dirty="0"/>
-              <a:t> Le </a:t>
-            </a:r>
-            <a:r>
-              <a:rPr lang="en-GB" sz="2400" noProof="0" dirty="0" err="1"/>
-              <a:t>perturbazioni</a:t>
-            </a:r>
-            <a:r>
-              <a:rPr lang="en-GB" sz="2400" noProof="0" dirty="0"/>
-              <a:t> </a:t>
-            </a:r>
-            <a:r>
-              <a:rPr lang="en-GB" sz="2400" noProof="0" dirty="0" err="1"/>
-              <a:t>della</a:t>
-            </a:r>
-            <a:r>
-              <a:rPr lang="en-GB" sz="2400" noProof="0" dirty="0"/>
-              <a:t> </a:t>
-            </a:r>
-            <a:r>
-              <a:rPr lang="en-GB" sz="2400" noProof="0" dirty="0" err="1"/>
-              <a:t>fotosfera</a:t>
-            </a:r>
-            <a:r>
-              <a:rPr lang="en-GB" sz="2400" noProof="0" dirty="0"/>
-              <a:t> </a:t>
-            </a:r>
-            <a:r>
-              <a:rPr lang="en-GB" sz="2400" noProof="0" dirty="0" err="1"/>
-              <a:t>viste</a:t>
-            </a:r>
-            <a:r>
-              <a:rPr lang="en-GB" sz="2400" noProof="0" dirty="0"/>
-              <a:t> come </a:t>
-            </a:r>
-            <a:r>
-              <a:rPr lang="en-GB" sz="2400" noProof="0" dirty="0" err="1"/>
-              <a:t>granulazione</a:t>
-            </a:r>
-            <a:r>
-              <a:rPr lang="en-GB" sz="2400" noProof="0" dirty="0"/>
-              <a:t> </a:t>
-            </a:r>
-            <a:r>
-              <a:rPr lang="en-GB" sz="2400" noProof="0" dirty="0" err="1"/>
-              <a:t>danno</a:t>
-            </a:r>
-            <a:r>
-              <a:rPr lang="en-GB" sz="2400" noProof="0" dirty="0"/>
-              <a:t> </a:t>
-            </a:r>
-            <a:r>
-              <a:rPr lang="en-GB" sz="2400" noProof="0" dirty="0" err="1"/>
-              <a:t>onde</a:t>
-            </a:r>
-            <a:r>
-              <a:rPr lang="en-GB" sz="2400" noProof="0" dirty="0"/>
-              <a:t> magneto-</a:t>
-            </a:r>
-            <a:r>
-              <a:rPr lang="en-GB" sz="2400" noProof="0" dirty="0" err="1"/>
-              <a:t>idrodinamiche</a:t>
-            </a:r>
-            <a:endParaRPr lang="en-GB" sz="2400" noProof="0" dirty="0"/>
-          </a:p>
-          <a:p>
-            <a:pPr>
-              <a:buSzPct val="90000"/>
-              <a:buFont typeface="Wingdings" panose="05000000000000000000" pitchFamily="2" charset="2"/>
-              <a:buChar char="Ø"/>
-            </a:pPr>
-            <a:r>
-              <a:rPr lang="en-GB" sz="2400" noProof="0" dirty="0"/>
-              <a:t> </a:t>
-            </a:r>
-            <a:r>
-              <a:rPr lang="en-GB" sz="2400" noProof="0" dirty="0" err="1"/>
-              <a:t>Vengono</a:t>
-            </a:r>
-            <a:r>
-              <a:rPr lang="en-GB" sz="2400" noProof="0" dirty="0"/>
-              <a:t> </a:t>
-            </a:r>
-            <a:r>
-              <a:rPr lang="en-GB" sz="2400" noProof="0" dirty="0" err="1"/>
-              <a:t>più</a:t>
-            </a:r>
-            <a:r>
-              <a:rPr lang="en-GB" sz="2400" noProof="0" dirty="0"/>
-              <a:t> </a:t>
-            </a:r>
-            <a:r>
-              <a:rPr lang="en-GB" sz="2400" noProof="0" dirty="0" err="1"/>
-              <a:t>facilmente</a:t>
-            </a:r>
-            <a:r>
-              <a:rPr lang="en-GB" sz="2400" noProof="0" dirty="0"/>
-              <a:t> </a:t>
-            </a:r>
-            <a:r>
-              <a:rPr lang="en-GB" sz="2400" noProof="0" dirty="0" err="1"/>
-              <a:t>assorbite</a:t>
-            </a:r>
-            <a:r>
-              <a:rPr lang="en-GB" sz="2400" noProof="0" dirty="0"/>
-              <a:t> </a:t>
-            </a:r>
-            <a:r>
-              <a:rPr lang="en-GB" sz="2400" noProof="0" dirty="0" err="1"/>
-              <a:t>nella</a:t>
-            </a:r>
-            <a:r>
-              <a:rPr lang="en-GB" sz="2400" noProof="0" dirty="0"/>
-              <a:t> corona </a:t>
-            </a:r>
-            <a:r>
-              <a:rPr lang="en-GB" sz="2400" noProof="0" dirty="0" err="1"/>
-              <a:t>solare</a:t>
-            </a:r>
-            <a:endParaRPr lang="en-GB" sz="2400" noProof="0" dirty="0"/>
-          </a:p>
-          <a:p>
-            <a:pPr>
-              <a:buSzPct val="90000"/>
-              <a:buFont typeface="Wingdings" panose="05000000000000000000" pitchFamily="2" charset="2"/>
-              <a:buChar char="Ø"/>
-            </a:pPr>
-            <a:r>
-              <a:rPr lang="en-GB" sz="2400" noProof="0" dirty="0"/>
-              <a:t> </a:t>
-            </a:r>
-            <a:r>
-              <a:rPr lang="en-GB" sz="2400" noProof="0" dirty="0" err="1"/>
-              <a:t>Possibile</a:t>
-            </a:r>
-            <a:r>
-              <a:rPr lang="en-GB" sz="2400" noProof="0" dirty="0"/>
-              <a:t> </a:t>
-            </a:r>
-            <a:r>
-              <a:rPr lang="en-GB" sz="2400" noProof="0" dirty="0" err="1"/>
-              <a:t>spiegazione</a:t>
-            </a:r>
-            <a:r>
-              <a:rPr lang="en-GB" sz="2400" noProof="0" dirty="0"/>
-              <a:t> </a:t>
-            </a:r>
-            <a:r>
-              <a:rPr lang="en-GB" sz="2400" noProof="0" dirty="0" err="1"/>
-              <a:t>della</a:t>
-            </a:r>
-            <a:r>
-              <a:rPr lang="en-GB" sz="2400" noProof="0" dirty="0"/>
-              <a:t> </a:t>
-            </a:r>
-            <a:r>
-              <a:rPr lang="en-GB" sz="2400" noProof="0" dirty="0" err="1"/>
-              <a:t>maggiore</a:t>
-            </a:r>
-            <a:r>
-              <a:rPr lang="en-GB" sz="2400" noProof="0" dirty="0"/>
-              <a:t> </a:t>
-            </a:r>
-            <a:r>
-              <a:rPr lang="en-GB" sz="2400" noProof="0" dirty="0" err="1"/>
-              <a:t>temperatura</a:t>
-            </a:r>
-            <a:r>
-              <a:rPr lang="en-GB" sz="2400" noProof="0" dirty="0"/>
-              <a:t> </a:t>
-            </a:r>
-            <a:r>
-              <a:rPr lang="en-GB" sz="2400" noProof="0" dirty="0" err="1"/>
-              <a:t>della</a:t>
-            </a:r>
-            <a:r>
-              <a:rPr lang="en-GB" sz="2400" noProof="0" dirty="0"/>
-              <a:t> corona</a:t>
             </a:r>
           </a:p>
         </p:txBody>
@@ -8548,7 +8959,7 @@
 </p:sld>
 </file>
 
-<file path=ppt/slides/slide15.xml><?xml version="1.0" encoding="utf-8"?>
+<file path=ppt/slides/slide17.xml><?xml version="1.0" encoding="utf-8"?>
 <p:sld xmlns:a="http://schemas.openxmlformats.org/drawingml/2006/main" xmlns:r="http://schemas.openxmlformats.org/officeDocument/2006/relationships" xmlns:p="http://schemas.openxmlformats.org/presentationml/2006/main">
   <p:cSld>
     <p:spTree>
@@ -8753,7 +9164,7 @@
 </p:sld>
 </file>
 
-<file path=ppt/slides/slide16.xml><?xml version="1.0" encoding="utf-8"?>
+<file path=ppt/slides/slide18.xml><?xml version="1.0" encoding="utf-8"?>
 <p:sld xmlns:a="http://schemas.openxmlformats.org/drawingml/2006/main" xmlns:r="http://schemas.openxmlformats.org/officeDocument/2006/relationships" xmlns:p="http://schemas.openxmlformats.org/presentationml/2006/main">
   <p:cSld>
     <p:spTree>
@@ -14083,7 +14494,7 @@
         </p:nvSpPr>
         <p:spPr>
           <a:xfrm>
-            <a:off x="791110" y="2280863"/>
+            <a:off x="7071590" y="1330571"/>
             <a:ext cx="2969232" cy="369332"/>
           </a:xfrm>
           <a:prstGeom prst="rect">
@@ -14118,7 +14529,7 @@
         </p:nvSpPr>
         <p:spPr>
           <a:xfrm>
-            <a:off x="4475199" y="2280863"/>
+            <a:off x="6789051" y="1848677"/>
             <a:ext cx="3534310" cy="369332"/>
           </a:xfrm>
           <a:prstGeom prst="rect">
@@ -14147,94 +14558,146 @@
           </a:p>
         </p:txBody>
       </p:sp>
-      <mc:AlternateContent xmlns:mc="http://schemas.openxmlformats.org/markup-compatibility/2006" xmlns:a14="http://schemas.microsoft.com/office/drawing/2010/main">
-        <mc:Choice Requires="a14">
-          <p:sp>
-            <p:nvSpPr>
-              <p:cNvPr id="14" name="CasellaDiTesto 13">
-                <a:extLst>
-                  <a:ext uri="{FF2B5EF4-FFF2-40B4-BE49-F238E27FC236}">
-                    <a16:creationId xmlns:a16="http://schemas.microsoft.com/office/drawing/2014/main" id="{BC4AC2BC-522C-CF7C-A8BC-2F88B1C1C828}"/>
-                  </a:ext>
-                </a:extLst>
-              </p:cNvPr>
-              <p:cNvSpPr txBox="1"/>
-              <p:nvPr/>
-            </p:nvSpPr>
-            <p:spPr>
-              <a:xfrm>
-                <a:off x="2024009" y="3688422"/>
-                <a:ext cx="4654193" cy="923330"/>
-              </a:xfrm>
-              <a:prstGeom prst="rect">
-                <a:avLst/>
-              </a:prstGeom>
-              <a:noFill/>
-            </p:spPr>
-            <p:txBody>
-              <a:bodyPr wrap="square" rtlCol="0">
-                <a:spAutoFit/>
-              </a:bodyPr>
-              <a:lstStyle/>
-              <a:p>
-                <a:pPr marL="285750" indent="-285750">
-                  <a:buFont typeface="Arial" panose="020B0604020202020204" pitchFamily="34" charset="0"/>
-                  <a:buChar char="•"/>
-                </a:pPr>
-                <a:r>
-                  <a:rPr lang="it-IT" dirty="0"/>
-                  <a:t>Sample a </a:t>
-                </a:r>
-                <a14:m>
-                  <m:oMath xmlns:m="http://schemas.openxmlformats.org/officeDocument/2006/math">
-                    <m:sSub>
-                      <m:sSubPr>
-                        <m:ctrlPr>
-                          <a:rPr lang="it-IT" i="1" dirty="0" smtClean="0">
-                            <a:latin typeface="Cambria Math" panose="02040503050406030204" pitchFamily="18" charset="0"/>
-                          </a:rPr>
-                        </m:ctrlPr>
-                      </m:sSubPr>
-                      <m:e>
-                        <m:r>
-                          <a:rPr lang="it-IT" i="1" dirty="0" smtClean="0">
-                            <a:latin typeface="Cambria Math" panose="02040503050406030204" pitchFamily="18" charset="0"/>
-                          </a:rPr>
-                          <m:t>𝜃</m:t>
-                        </m:r>
-                      </m:e>
-                      <m:sub>
-                        <m:r>
-                          <a:rPr lang="it-IT" i="1" dirty="0" err="1">
-                            <a:latin typeface="Cambria Math" panose="02040503050406030204" pitchFamily="18" charset="0"/>
-                          </a:rPr>
-                          <m:t>𝑡</m:t>
-                        </m:r>
-                      </m:sub>
-                    </m:sSub>
-                  </m:oMath>
-                </a14:m>
-                <a:r>
-                  <a:rPr lang="it-IT" dirty="0"/>
-                  <a:t> from </a:t>
-                </a:r>
-                <a14:m>
-                  <m:oMath xmlns:m="http://schemas.openxmlformats.org/officeDocument/2006/math">
-                    <m:r>
-                      <a:rPr lang="it-IT" i="1" dirty="0" smtClean="0">
-                        <a:latin typeface="Cambria Math" panose="02040503050406030204" pitchFamily="18" charset="0"/>
-                      </a:rPr>
-                      <m:t>𝑞</m:t>
-                    </m:r>
-                    <m:d>
-                      <m:dPr>
-                        <m:ctrlPr>
-                          <a:rPr lang="it-IT" i="1" dirty="0" smtClean="0">
-                            <a:latin typeface="Cambria Math" panose="02040503050406030204" pitchFamily="18" charset="0"/>
-                          </a:rPr>
-                        </m:ctrlPr>
-                      </m:dPr>
-                      <m:e>
+      <p:grpSp>
+        <p:nvGrpSpPr>
+          <p:cNvPr id="7" name="Gruppo 6">
+            <a:extLst>
+              <a:ext uri="{FF2B5EF4-FFF2-40B4-BE49-F238E27FC236}">
+                <a16:creationId xmlns:a16="http://schemas.microsoft.com/office/drawing/2014/main" id="{946C42DD-B232-038E-21BD-8D5EEE795BA1}"/>
+              </a:ext>
+            </a:extLst>
+          </p:cNvPr>
+          <p:cNvGrpSpPr/>
+          <p:nvPr/>
+        </p:nvGrpSpPr>
+        <p:grpSpPr>
+          <a:xfrm>
+            <a:off x="561427" y="2800792"/>
+            <a:ext cx="4972692" cy="3339101"/>
+            <a:chOff x="561427" y="2800792"/>
+            <a:chExt cx="4972692" cy="3339101"/>
+          </a:xfrm>
+        </p:grpSpPr>
+        <p:sp>
+          <p:nvSpPr>
+            <p:cNvPr id="6" name="Rettangolo con angoli arrotondati 5">
+              <a:extLst>
+                <a:ext uri="{FF2B5EF4-FFF2-40B4-BE49-F238E27FC236}">
+                  <a16:creationId xmlns:a16="http://schemas.microsoft.com/office/drawing/2014/main" id="{E1A0B8FE-DF38-0332-111E-C639C0E0DEB7}"/>
+                </a:ext>
+              </a:extLst>
+            </p:cNvPr>
+            <p:cNvSpPr/>
+            <p:nvPr/>
+          </p:nvSpPr>
+          <p:spPr>
+            <a:xfrm>
+              <a:off x="561427" y="2800792"/>
+              <a:ext cx="4972692" cy="3339101"/>
+            </a:xfrm>
+            <a:prstGeom prst="roundRect">
+              <a:avLst/>
+            </a:prstGeom>
+            <a:solidFill>
+              <a:schemeClr val="accent2">
+                <a:lumMod val="60000"/>
+                <a:lumOff val="40000"/>
+              </a:schemeClr>
+            </a:solidFill>
+            <a:ln w="19050">
+              <a:solidFill>
+                <a:schemeClr val="tx2"/>
+              </a:solidFill>
+            </a:ln>
+          </p:spPr>
+          <p:style>
+            <a:lnRef idx="2">
+              <a:schemeClr val="accent1">
+                <a:shade val="15000"/>
+              </a:schemeClr>
+            </a:lnRef>
+            <a:fillRef idx="1">
+              <a:schemeClr val="accent1"/>
+            </a:fillRef>
+            <a:effectRef idx="0">
+              <a:schemeClr val="accent1"/>
+            </a:effectRef>
+            <a:fontRef idx="minor">
+              <a:schemeClr val="lt1"/>
+            </a:fontRef>
+          </p:style>
+          <p:txBody>
+            <a:bodyPr rtlCol="0" anchor="ctr"/>
+            <a:lstStyle/>
+            <a:p>
+              <a:pPr algn="ctr"/>
+              <a:endParaRPr lang="it-IT"/>
+            </a:p>
+          </p:txBody>
+        </p:sp>
+        <p:grpSp>
+          <p:nvGrpSpPr>
+            <p:cNvPr id="5" name="Gruppo 4">
+              <a:extLst>
+                <a:ext uri="{FF2B5EF4-FFF2-40B4-BE49-F238E27FC236}">
+                  <a16:creationId xmlns:a16="http://schemas.microsoft.com/office/drawing/2014/main" id="{C9398639-BF95-06D2-C975-337D3707176F}"/>
+                </a:ext>
+              </a:extLst>
+            </p:cNvPr>
+            <p:cNvGrpSpPr/>
+            <p:nvPr/>
+          </p:nvGrpSpPr>
+          <p:grpSpPr>
+            <a:xfrm>
+              <a:off x="656865" y="2882993"/>
+              <a:ext cx="4781817" cy="3174698"/>
+              <a:chOff x="642938" y="2402526"/>
+              <a:chExt cx="4781817" cy="3174698"/>
+            </a:xfrm>
+          </p:grpSpPr>
+          <mc:AlternateContent xmlns:mc="http://schemas.openxmlformats.org/markup-compatibility/2006" xmlns:a14="http://schemas.microsoft.com/office/drawing/2010/main">
+            <mc:Choice Requires="a14">
+              <p:sp>
+                <p:nvSpPr>
+                  <p:cNvPr id="14" name="CasellaDiTesto 13">
+                    <a:extLst>
+                      <a:ext uri="{FF2B5EF4-FFF2-40B4-BE49-F238E27FC236}">
+                        <a16:creationId xmlns:a16="http://schemas.microsoft.com/office/drawing/2014/main" id="{BC4AC2BC-522C-CF7C-A8BC-2F88B1C1C828}"/>
+                      </a:ext>
+                    </a:extLst>
+                  </p:cNvPr>
+                  <p:cNvSpPr txBox="1"/>
+                  <p:nvPr/>
+                </p:nvSpPr>
+                <p:spPr>
+                  <a:xfrm>
+                    <a:off x="1282103" y="2968316"/>
+                    <a:ext cx="3503487" cy="923330"/>
+                  </a:xfrm>
+                  <a:prstGeom prst="rect">
+                    <a:avLst/>
+                  </a:prstGeom>
+                  <a:noFill/>
+                  <a:ln>
+                    <a:noFill/>
+                  </a:ln>
+                </p:spPr>
+                <p:txBody>
+                  <a:bodyPr wrap="square" rtlCol="0">
+                    <a:spAutoFit/>
+                  </a:bodyPr>
+                  <a:lstStyle/>
+                  <a:p>
+                    <a:pPr marL="285750" indent="-285750">
+                      <a:buFont typeface="Arial" panose="020B0604020202020204" pitchFamily="34" charset="0"/>
+                      <a:buChar char="•"/>
+                    </a:pPr>
+                    <a:r>
+                      <a:rPr lang="it-IT" dirty="0"/>
+                      <a:t>Sample a </a:t>
+                    </a:r>
+                    <a14:m>
+                      <m:oMath xmlns:m="http://schemas.openxmlformats.org/officeDocument/2006/math">
                         <m:sSub>
                           <m:sSubPr>
                             <m:ctrlPr>
@@ -14253,83 +14716,1072 @@
                           </m:e>
                           <m:sub>
                             <m:r>
+                              <a:rPr lang="it-IT" i="1" dirty="0" err="1">
+                                <a:latin typeface="Cambria Math" panose="02040503050406030204" pitchFamily="18" charset="0"/>
+                              </a:rPr>
+                              <m:t>𝑡</m:t>
+                            </m:r>
+                          </m:sub>
+                        </m:sSub>
+                      </m:oMath>
+                    </a14:m>
+                    <a:r>
+                      <a:rPr lang="it-IT" dirty="0"/>
+                      <a:t> from </a:t>
+                    </a:r>
+                    <a14:m>
+                      <m:oMath xmlns:m="http://schemas.openxmlformats.org/officeDocument/2006/math">
+                        <m:r>
+                          <a:rPr lang="it-IT" i="1" dirty="0" smtClean="0">
+                            <a:latin typeface="Cambria Math" panose="02040503050406030204" pitchFamily="18" charset="0"/>
+                          </a:rPr>
+                          <m:t>𝑞</m:t>
+                        </m:r>
+                        <m:d>
+                          <m:dPr>
+                            <m:ctrlPr>
                               <a:rPr lang="it-IT" i="1" dirty="0" smtClean="0">
                                 <a:latin typeface="Cambria Math" panose="02040503050406030204" pitchFamily="18" charset="0"/>
                               </a:rPr>
-                              <m:t>0</m:t>
+                            </m:ctrlPr>
+                          </m:dPr>
+                          <m:e>
+                            <m:sSub>
+                              <m:sSubPr>
+                                <m:ctrlPr>
+                                  <a:rPr lang="it-IT" i="1" dirty="0" smtClean="0">
+                                    <a:latin typeface="Cambria Math" panose="02040503050406030204" pitchFamily="18" charset="0"/>
+                                  </a:rPr>
+                                </m:ctrlPr>
+                              </m:sSubPr>
+                              <m:e>
+                                <m:r>
+                                  <a:rPr lang="it-IT" i="1" dirty="0" smtClean="0">
+                                    <a:latin typeface="Cambria Math" panose="02040503050406030204" pitchFamily="18" charset="0"/>
+                                  </a:rPr>
+                                  <m:t>𝜃</m:t>
+                                </m:r>
+                              </m:e>
+                              <m:sub>
+                                <m:r>
+                                  <a:rPr lang="it-IT" i="1" dirty="0" smtClean="0">
+                                    <a:latin typeface="Cambria Math" panose="02040503050406030204" pitchFamily="18" charset="0"/>
+                                  </a:rPr>
+                                  <m:t>0</m:t>
+                                </m:r>
+                              </m:sub>
+                            </m:sSub>
+                          </m:e>
+                        </m:d>
+                      </m:oMath>
+                    </a14:m>
+                    <a:endParaRPr lang="it-IT" dirty="0"/>
+                  </a:p>
+                  <a:p>
+                    <a:pPr marL="285750" indent="-285750">
+                      <a:buFont typeface="Arial" panose="020B0604020202020204" pitchFamily="34" charset="0"/>
+                      <a:buChar char="•"/>
+                    </a:pPr>
+                    <a:r>
+                      <a:rPr lang="it-IT" dirty="0"/>
+                      <a:t>Compute the </a:t>
+                    </a:r>
+                    <a:r>
+                      <a:rPr lang="it-IT" dirty="0" err="1"/>
+                      <a:t>posterior</a:t>
+                    </a:r>
+                    <a:r>
+                      <a:rPr lang="it-IT" dirty="0"/>
+                      <a:t> on </a:t>
+                    </a:r>
+                    <a14:m>
+                      <m:oMath xmlns:m="http://schemas.openxmlformats.org/officeDocument/2006/math">
+                        <m:sSub>
+                          <m:sSubPr>
+                            <m:ctrlPr>
+                              <a:rPr lang="it-IT" i="1" dirty="0" smtClean="0">
+                                <a:latin typeface="Cambria Math" panose="02040503050406030204" pitchFamily="18" charset="0"/>
+                              </a:rPr>
+                            </m:ctrlPr>
+                          </m:sSubPr>
+                          <m:e>
+                            <m:r>
+                              <a:rPr lang="it-IT" i="1" dirty="0" smtClean="0">
+                                <a:latin typeface="Cambria Math" panose="02040503050406030204" pitchFamily="18" charset="0"/>
+                              </a:rPr>
+                              <m:t>𝜃</m:t>
+                            </m:r>
+                          </m:e>
+                          <m:sub>
+                            <m:r>
+                              <a:rPr lang="it-IT" i="1" dirty="0" err="1">
+                                <a:latin typeface="Cambria Math" panose="02040503050406030204" pitchFamily="18" charset="0"/>
+                              </a:rPr>
+                              <m:t>𝑡</m:t>
                             </m:r>
                           </m:sub>
                         </m:sSub>
-                      </m:e>
-                    </m:d>
-                  </m:oMath>
-                </a14:m>
-                <a:endParaRPr lang="it-IT" dirty="0"/>
-              </a:p>
-              <a:p>
-                <a:pPr marL="285750" indent="-285750">
-                  <a:buFont typeface="Arial" panose="020B0604020202020204" pitchFamily="34" charset="0"/>
-                  <a:buChar char="•"/>
-                </a:pPr>
-                <a:r>
-                  <a:rPr lang="it-IT" dirty="0"/>
-                  <a:t>Compute the </a:t>
-                </a:r>
-                <a:r>
-                  <a:rPr lang="it-IT" dirty="0" err="1"/>
-                  <a:t>posterior</a:t>
-                </a:r>
-                <a:r>
-                  <a:rPr lang="it-IT" dirty="0"/>
-                  <a:t> on </a:t>
-                </a:r>
-                <a14:m>
-                  <m:oMath xmlns:m="http://schemas.openxmlformats.org/officeDocument/2006/math">
-                    <m:sSub>
-                      <m:sSubPr>
-                        <m:ctrlPr>
-                          <a:rPr lang="it-IT" i="1" dirty="0" smtClean="0">
-                            <a:latin typeface="Cambria Math" panose="02040503050406030204" pitchFamily="18" charset="0"/>
-                          </a:rPr>
-                        </m:ctrlPr>
-                      </m:sSubPr>
-                      <m:e>
+                      </m:oMath>
+                    </a14:m>
+                    <a:endParaRPr lang="it-IT" dirty="0"/>
+                  </a:p>
+                  <a:p>
+                    <a:pPr marL="285750" indent="-285750">
+                      <a:buFont typeface="Arial" panose="020B0604020202020204" pitchFamily="34" charset="0"/>
+                      <a:buChar char="•"/>
+                    </a:pPr>
+                    <a:r>
+                      <a:rPr lang="it-IT" dirty="0"/>
+                      <a:t>Check </a:t>
+                    </a:r>
+                    <a:r>
+                      <a:rPr lang="it-IT" dirty="0" err="1"/>
+                      <a:t>acceptance</a:t>
+                    </a:r>
+                    <a:r>
+                      <a:rPr lang="it-IT" dirty="0"/>
+                      <a:t> rule</a:t>
+                    </a:r>
+                  </a:p>
+                </p:txBody>
+              </p:sp>
+            </mc:Choice>
+            <mc:Fallback xmlns="">
+              <p:sp>
+                <p:nvSpPr>
+                  <p:cNvPr id="14" name="CasellaDiTesto 13">
+                    <a:extLst>
+                      <a:ext uri="{FF2B5EF4-FFF2-40B4-BE49-F238E27FC236}">
+                        <a16:creationId xmlns:a16="http://schemas.microsoft.com/office/drawing/2014/main" id="{BC4AC2BC-522C-CF7C-A8BC-2F88B1C1C828}"/>
+                      </a:ext>
+                    </a:extLst>
+                  </p:cNvPr>
+                  <p:cNvSpPr txBox="1">
+                    <a:spLocks noRot="1" noChangeAspect="1" noMove="1" noResize="1" noEditPoints="1" noAdjustHandles="1" noChangeArrowheads="1" noChangeShapeType="1" noTextEdit="1"/>
+                  </p:cNvSpPr>
+                  <p:nvPr/>
+                </p:nvSpPr>
+                <p:spPr>
+                  <a:xfrm>
+                    <a:off x="1282103" y="2968316"/>
+                    <a:ext cx="3503487" cy="923330"/>
+                  </a:xfrm>
+                  <a:prstGeom prst="rect">
+                    <a:avLst/>
+                  </a:prstGeom>
+                  <a:blipFill>
+                    <a:blip r:embed="rId2"/>
+                    <a:stretch>
+                      <a:fillRect l="-1220" t="-3974" b="-9934"/>
+                    </a:stretch>
+                  </a:blipFill>
+                  <a:ln>
+                    <a:noFill/>
+                  </a:ln>
+                </p:spPr>
+                <p:txBody>
+                  <a:bodyPr/>
+                  <a:lstStyle/>
+                  <a:p>
+                    <a:r>
+                      <a:rPr lang="it-IT">
+                        <a:noFill/>
+                      </a:rPr>
+                      <a:t> </a:t>
+                    </a:r>
+                  </a:p>
+                </p:txBody>
+              </p:sp>
+            </mc:Fallback>
+          </mc:AlternateContent>
+          <p:grpSp>
+            <p:nvGrpSpPr>
+              <p:cNvPr id="3" name="Gruppo 2">
+                <a:extLst>
+                  <a:ext uri="{FF2B5EF4-FFF2-40B4-BE49-F238E27FC236}">
+                    <a16:creationId xmlns:a16="http://schemas.microsoft.com/office/drawing/2014/main" id="{68E45162-7B70-551D-EEDD-0C813345039A}"/>
+                  </a:ext>
+                </a:extLst>
+              </p:cNvPr>
+              <p:cNvGrpSpPr/>
+              <p:nvPr/>
+            </p:nvGrpSpPr>
+            <p:grpSpPr>
+              <a:xfrm>
+                <a:off x="864688" y="4088104"/>
+                <a:ext cx="4338316" cy="646331"/>
+                <a:chOff x="740543" y="4035967"/>
+                <a:chExt cx="4338316" cy="646331"/>
+              </a:xfrm>
+            </p:grpSpPr>
+            <mc:AlternateContent xmlns:mc="http://schemas.openxmlformats.org/markup-compatibility/2006" xmlns:a14="http://schemas.microsoft.com/office/drawing/2010/main">
+              <mc:Choice Requires="a14">
+                <p:sp>
+                  <p:nvSpPr>
+                    <p:cNvPr id="15" name="CasellaDiTesto 14">
+                      <a:extLst>
+                        <a:ext uri="{FF2B5EF4-FFF2-40B4-BE49-F238E27FC236}">
+                          <a16:creationId xmlns:a16="http://schemas.microsoft.com/office/drawing/2014/main" id="{A8346508-EC61-0A86-CF73-51AB617DF50E}"/>
+                        </a:ext>
+                      </a:extLst>
+                    </p:cNvPr>
+                    <p:cNvSpPr txBox="1"/>
+                    <p:nvPr/>
+                  </p:nvSpPr>
+                  <p:spPr>
+                    <a:xfrm>
+                      <a:off x="740543" y="4035967"/>
+                      <a:ext cx="1684962" cy="646331"/>
+                    </a:xfrm>
+                    <a:prstGeom prst="rect">
+                      <a:avLst/>
+                    </a:prstGeom>
+                    <a:noFill/>
+                    <a:ln>
+                      <a:noFill/>
+                    </a:ln>
+                  </p:spPr>
+                  <p:txBody>
+                    <a:bodyPr wrap="square" rtlCol="0">
+                      <a:spAutoFit/>
+                    </a:bodyPr>
+                    <a:lstStyle/>
+                    <a:p>
+                      <a:r>
+                        <a:rPr lang="it-IT" dirty="0" err="1"/>
+                        <a:t>If</a:t>
+                      </a:r>
+                      <a:r>
+                        <a:rPr lang="it-IT" dirty="0"/>
+                        <a:t> </a:t>
+                      </a:r>
+                      <a:r>
+                        <a:rPr lang="it-IT" dirty="0" err="1"/>
+                        <a:t>true</a:t>
+                      </a:r>
+                      <a:r>
+                        <a:rPr lang="it-IT" dirty="0"/>
+                        <a:t> </a:t>
+                      </a:r>
+                      <a:r>
+                        <a:rPr lang="it-IT" dirty="0" err="1"/>
+                        <a:t>move</a:t>
+                      </a:r>
+                      <a:r>
+                        <a:rPr lang="it-IT" dirty="0"/>
+                        <a:t> to </a:t>
+                      </a:r>
+                      <a14:m>
+                        <m:oMath xmlns:m="http://schemas.openxmlformats.org/officeDocument/2006/math">
+                          <m:sSub>
+                            <m:sSubPr>
+                              <m:ctrlPr>
+                                <a:rPr lang="it-IT" i="1" dirty="0" smtClean="0">
+                                  <a:latin typeface="Cambria Math" panose="02040503050406030204" pitchFamily="18" charset="0"/>
+                                </a:rPr>
+                              </m:ctrlPr>
+                            </m:sSubPr>
+                            <m:e>
+                              <m:r>
+                                <a:rPr lang="it-IT" i="1" dirty="0" smtClean="0">
+                                  <a:latin typeface="Cambria Math" panose="02040503050406030204" pitchFamily="18" charset="0"/>
+                                </a:rPr>
+                                <m:t>𝜃</m:t>
+                              </m:r>
+                            </m:e>
+                            <m:sub>
+                              <m:r>
+                                <a:rPr lang="it-IT" i="1" dirty="0" smtClean="0">
+                                  <a:latin typeface="Cambria Math" panose="02040503050406030204" pitchFamily="18" charset="0"/>
+                                </a:rPr>
+                                <m:t>0</m:t>
+                              </m:r>
+                            </m:sub>
+                          </m:sSub>
+                          <m:r>
+                            <a:rPr lang="it-IT" i="1" dirty="0" smtClean="0">
+                              <a:latin typeface="Cambria Math" panose="02040503050406030204" pitchFamily="18" charset="0"/>
+                            </a:rPr>
+                            <m:t>=</m:t>
+                          </m:r>
+                          <m:sSub>
+                            <m:sSubPr>
+                              <m:ctrlPr>
+                                <a:rPr lang="it-IT" i="1" dirty="0" err="1" smtClean="0">
+                                  <a:latin typeface="Cambria Math" panose="02040503050406030204" pitchFamily="18" charset="0"/>
+                                </a:rPr>
+                              </m:ctrlPr>
+                            </m:sSubPr>
+                            <m:e>
+                              <m:r>
+                                <a:rPr lang="it-IT" i="1" dirty="0" smtClean="0">
+                                  <a:latin typeface="Cambria Math" panose="02040503050406030204" pitchFamily="18" charset="0"/>
+                                </a:rPr>
+                                <m:t>𝜃</m:t>
+                              </m:r>
+                            </m:e>
+                            <m:sub>
+                              <m:r>
+                                <a:rPr lang="it-IT" i="1" dirty="0" err="1" smtClean="0">
+                                  <a:latin typeface="Cambria Math" panose="02040503050406030204" pitchFamily="18" charset="0"/>
+                                </a:rPr>
+                                <m:t>𝑡</m:t>
+                              </m:r>
+                            </m:sub>
+                          </m:sSub>
+                        </m:oMath>
+                      </a14:m>
+                      <a:endParaRPr lang="it-IT" dirty="0"/>
+                    </a:p>
+                  </p:txBody>
+                </p:sp>
+              </mc:Choice>
+              <mc:Fallback xmlns="">
+                <p:sp>
+                  <p:nvSpPr>
+                    <p:cNvPr id="15" name="CasellaDiTesto 14">
+                      <a:extLst>
+                        <a:ext uri="{FF2B5EF4-FFF2-40B4-BE49-F238E27FC236}">
+                          <a16:creationId xmlns:a16="http://schemas.microsoft.com/office/drawing/2014/main" id="{A8346508-EC61-0A86-CF73-51AB617DF50E}"/>
+                        </a:ext>
+                      </a:extLst>
+                    </p:cNvPr>
+                    <p:cNvSpPr txBox="1">
+                      <a:spLocks noRot="1" noChangeAspect="1" noMove="1" noResize="1" noEditPoints="1" noAdjustHandles="1" noChangeArrowheads="1" noChangeShapeType="1" noTextEdit="1"/>
+                    </p:cNvSpPr>
+                    <p:nvPr/>
+                  </p:nvSpPr>
+                  <p:spPr>
+                    <a:xfrm>
+                      <a:off x="740543" y="4035967"/>
+                      <a:ext cx="1684962" cy="646331"/>
+                    </a:xfrm>
+                    <a:prstGeom prst="rect">
+                      <a:avLst/>
+                    </a:prstGeom>
+                    <a:blipFill>
+                      <a:blip r:embed="rId3"/>
+                      <a:stretch>
+                        <a:fillRect l="-2888" t="-4717" b="-14151"/>
+                      </a:stretch>
+                    </a:blipFill>
+                    <a:ln>
+                      <a:noFill/>
+                    </a:ln>
+                  </p:spPr>
+                  <p:txBody>
+                    <a:bodyPr/>
+                    <a:lstStyle/>
+                    <a:p>
+                      <a:r>
+                        <a:rPr lang="it-IT">
+                          <a:noFill/>
+                        </a:rPr>
+                        <a:t> </a:t>
+                      </a:r>
+                    </a:p>
+                  </p:txBody>
+                </p:sp>
+              </mc:Fallback>
+            </mc:AlternateContent>
+            <mc:AlternateContent xmlns:mc="http://schemas.openxmlformats.org/markup-compatibility/2006" xmlns:a14="http://schemas.microsoft.com/office/drawing/2010/main">
+              <mc:Choice Requires="a14">
+                <p:sp>
+                  <p:nvSpPr>
+                    <p:cNvPr id="16" name="CasellaDiTesto 15">
+                      <a:extLst>
+                        <a:ext uri="{FF2B5EF4-FFF2-40B4-BE49-F238E27FC236}">
+                          <a16:creationId xmlns:a16="http://schemas.microsoft.com/office/drawing/2014/main" id="{1A45A8E9-92A5-F272-C0D9-0FF6E89C39A8}"/>
+                        </a:ext>
+                      </a:extLst>
+                    </p:cNvPr>
+                    <p:cNvSpPr txBox="1"/>
+                    <p:nvPr/>
+                  </p:nvSpPr>
+                  <p:spPr>
+                    <a:xfrm>
+                      <a:off x="3008616" y="4174466"/>
+                      <a:ext cx="2070243" cy="369332"/>
+                    </a:xfrm>
+                    <a:prstGeom prst="rect">
+                      <a:avLst/>
+                    </a:prstGeom>
+                    <a:noFill/>
+                    <a:ln>
+                      <a:noFill/>
+                    </a:ln>
+                  </p:spPr>
+                  <p:txBody>
+                    <a:bodyPr wrap="square" rtlCol="0">
+                      <a:spAutoFit/>
+                    </a:bodyPr>
+                    <a:lstStyle/>
+                    <a:p>
+                      <a:r>
+                        <a:rPr lang="it-IT" dirty="0" err="1"/>
+                        <a:t>If</a:t>
+                      </a:r>
+                      <a:r>
+                        <a:rPr lang="it-IT" dirty="0"/>
+                        <a:t> false stay </a:t>
+                      </a:r>
+                      <a:r>
+                        <a:rPr lang="it-IT" dirty="0" err="1"/>
+                        <a:t>at</a:t>
+                      </a:r>
+                      <a:r>
+                        <a:rPr lang="it-IT" dirty="0"/>
+                        <a:t> </a:t>
+                      </a:r>
+                      <a14:m>
+                        <m:oMath xmlns:m="http://schemas.openxmlformats.org/officeDocument/2006/math">
+                          <m:sSub>
+                            <m:sSubPr>
+                              <m:ctrlPr>
+                                <a:rPr lang="it-IT" i="1" dirty="0" smtClean="0">
+                                  <a:latin typeface="Cambria Math" panose="02040503050406030204" pitchFamily="18" charset="0"/>
+                                </a:rPr>
+                              </m:ctrlPr>
+                            </m:sSubPr>
+                            <m:e>
+                              <m:r>
+                                <a:rPr lang="it-IT" i="1" dirty="0" smtClean="0">
+                                  <a:latin typeface="Cambria Math" panose="02040503050406030204" pitchFamily="18" charset="0"/>
+                                </a:rPr>
+                                <m:t>𝜃</m:t>
+                              </m:r>
+                            </m:e>
+                            <m:sub>
+                              <m:r>
+                                <a:rPr lang="it-IT" i="1" dirty="0" smtClean="0">
+                                  <a:latin typeface="Cambria Math" panose="02040503050406030204" pitchFamily="18" charset="0"/>
+                                </a:rPr>
+                                <m:t>0</m:t>
+                              </m:r>
+                            </m:sub>
+                          </m:sSub>
+                        </m:oMath>
+                      </a14:m>
+                      <a:endParaRPr lang="it-IT" dirty="0"/>
+                    </a:p>
+                  </p:txBody>
+                </p:sp>
+              </mc:Choice>
+              <mc:Fallback xmlns="">
+                <p:sp>
+                  <p:nvSpPr>
+                    <p:cNvPr id="16" name="CasellaDiTesto 15">
+                      <a:extLst>
+                        <a:ext uri="{FF2B5EF4-FFF2-40B4-BE49-F238E27FC236}">
+                          <a16:creationId xmlns:a16="http://schemas.microsoft.com/office/drawing/2014/main" id="{1A45A8E9-92A5-F272-C0D9-0FF6E89C39A8}"/>
+                        </a:ext>
+                      </a:extLst>
+                    </p:cNvPr>
+                    <p:cNvSpPr txBox="1">
+                      <a:spLocks noRot="1" noChangeAspect="1" noMove="1" noResize="1" noEditPoints="1" noAdjustHandles="1" noChangeArrowheads="1" noChangeShapeType="1" noTextEdit="1"/>
+                    </p:cNvSpPr>
+                    <p:nvPr/>
+                  </p:nvSpPr>
+                  <p:spPr>
+                    <a:xfrm>
+                      <a:off x="3008616" y="4174466"/>
+                      <a:ext cx="2070243" cy="369332"/>
+                    </a:xfrm>
+                    <a:prstGeom prst="rect">
+                      <a:avLst/>
+                    </a:prstGeom>
+                    <a:blipFill>
+                      <a:blip r:embed="rId4"/>
+                      <a:stretch>
+                        <a:fillRect l="-2353" t="-8197" b="-24590"/>
+                      </a:stretch>
+                    </a:blipFill>
+                    <a:ln>
+                      <a:noFill/>
+                    </a:ln>
+                  </p:spPr>
+                  <p:txBody>
+                    <a:bodyPr/>
+                    <a:lstStyle/>
+                    <a:p>
+                      <a:r>
+                        <a:rPr lang="it-IT">
+                          <a:noFill/>
+                        </a:rPr>
+                        <a:t> </a:t>
+                      </a:r>
+                    </a:p>
+                  </p:txBody>
+                </p:sp>
+              </mc:Fallback>
+            </mc:AlternateContent>
+          </p:grpSp>
+          <mc:AlternateContent xmlns:mc="http://schemas.openxmlformats.org/markup-compatibility/2006" xmlns:a14="http://schemas.microsoft.com/office/drawing/2010/main">
+            <mc:Choice Requires="a14">
+              <p:sp>
+                <p:nvSpPr>
+                  <p:cNvPr id="17" name="CasellaDiTesto 16">
+                    <a:extLst>
+                      <a:ext uri="{FF2B5EF4-FFF2-40B4-BE49-F238E27FC236}">
+                        <a16:creationId xmlns:a16="http://schemas.microsoft.com/office/drawing/2014/main" id="{7F281147-055D-0C36-6BC8-FBB7FEF09A80}"/>
+                      </a:ext>
+                    </a:extLst>
+                  </p:cNvPr>
+                  <p:cNvSpPr txBox="1"/>
+                  <p:nvPr/>
+                </p:nvSpPr>
+                <p:spPr>
+                  <a:xfrm>
+                    <a:off x="642938" y="4930893"/>
+                    <a:ext cx="4781817" cy="646331"/>
+                  </a:xfrm>
+                  <a:prstGeom prst="rect">
+                    <a:avLst/>
+                  </a:prstGeom>
+                  <a:noFill/>
+                  <a:ln>
+                    <a:noFill/>
+                  </a:ln>
+                </p:spPr>
+                <p:txBody>
+                  <a:bodyPr wrap="square" rtlCol="0">
+                    <a:spAutoFit/>
+                  </a:bodyPr>
+                  <a:lstStyle/>
+                  <a:p>
+                    <a:r>
+                      <a:rPr lang="it-IT" dirty="0"/>
+                      <a:t>In </a:t>
+                    </a:r>
+                    <a:r>
+                      <a:rPr lang="it-IT" dirty="0" err="1"/>
+                      <a:t>this</a:t>
+                    </a:r>
+                    <a:r>
+                      <a:rPr lang="it-IT" dirty="0"/>
+                      <a:t> way we </a:t>
+                    </a:r>
+                    <a:r>
+                      <a:rPr lang="it-IT" dirty="0" err="1"/>
+                      <a:t>will</a:t>
+                    </a:r>
+                    <a:r>
+                      <a:rPr lang="it-IT" dirty="0"/>
+                      <a:t> have the </a:t>
+                    </a:r>
+                    <a14:m>
+                      <m:oMath xmlns:m="http://schemas.openxmlformats.org/officeDocument/2006/math">
                         <m:r>
                           <a:rPr lang="it-IT" i="1" dirty="0" smtClean="0">
                             <a:latin typeface="Cambria Math" panose="02040503050406030204" pitchFamily="18" charset="0"/>
                           </a:rPr>
                           <m:t>𝜃</m:t>
                         </m:r>
-                      </m:e>
-                      <m:sub>
-                        <m:r>
-                          <a:rPr lang="it-IT" i="1" dirty="0" err="1">
+                      </m:oMath>
+                    </a14:m>
+                    <a:r>
+                      <a:rPr lang="it-IT" dirty="0"/>
+                      <a:t> with </a:t>
+                    </a:r>
+                    <a:r>
+                      <a:rPr lang="it-IT" dirty="0" err="1"/>
+                      <a:t>higher</a:t>
+                    </a:r>
+                    <a:r>
+                      <a:rPr lang="it-IT" dirty="0"/>
+                      <a:t> </a:t>
+                    </a:r>
+                    <a:r>
+                      <a:rPr lang="it-IT" dirty="0" err="1"/>
+                      <a:t>posterior</a:t>
+                    </a:r>
+                    <a:r>
+                      <a:rPr lang="it-IT" dirty="0"/>
+                      <a:t> more times so more </a:t>
+                    </a:r>
+                    <a:r>
+                      <a:rPr lang="it-IT" dirty="0" err="1"/>
+                      <a:t>probable</a:t>
+                    </a:r>
+                    <a:r>
+                      <a:rPr lang="it-IT" dirty="0"/>
+                      <a:t>! </a:t>
+                    </a:r>
+                  </a:p>
+                </p:txBody>
+              </p:sp>
+            </mc:Choice>
+            <mc:Fallback xmlns="">
+              <p:sp>
+                <p:nvSpPr>
+                  <p:cNvPr id="17" name="CasellaDiTesto 16">
+                    <a:extLst>
+                      <a:ext uri="{FF2B5EF4-FFF2-40B4-BE49-F238E27FC236}">
+                        <a16:creationId xmlns:a16="http://schemas.microsoft.com/office/drawing/2014/main" id="{7F281147-055D-0C36-6BC8-FBB7FEF09A80}"/>
+                      </a:ext>
+                    </a:extLst>
+                  </p:cNvPr>
+                  <p:cNvSpPr txBox="1">
+                    <a:spLocks noRot="1" noChangeAspect="1" noMove="1" noResize="1" noEditPoints="1" noAdjustHandles="1" noChangeArrowheads="1" noChangeShapeType="1" noTextEdit="1"/>
+                  </p:cNvSpPr>
+                  <p:nvPr/>
+                </p:nvSpPr>
+                <p:spPr>
+                  <a:xfrm>
+                    <a:off x="642938" y="4930893"/>
+                    <a:ext cx="4781817" cy="646331"/>
+                  </a:xfrm>
+                  <a:prstGeom prst="rect">
+                    <a:avLst/>
+                  </a:prstGeom>
+                  <a:blipFill>
+                    <a:blip r:embed="rId5"/>
+                    <a:stretch>
+                      <a:fillRect l="-1148" t="-5660" b="-14151"/>
+                    </a:stretch>
+                  </a:blipFill>
+                  <a:ln>
+                    <a:noFill/>
+                  </a:ln>
+                </p:spPr>
+                <p:txBody>
+                  <a:bodyPr/>
+                  <a:lstStyle/>
+                  <a:p>
+                    <a:r>
+                      <a:rPr lang="it-IT">
+                        <a:noFill/>
+                      </a:rPr>
+                      <a:t> </a:t>
+                    </a:r>
+                  </a:p>
+                </p:txBody>
+              </p:sp>
+            </mc:Fallback>
+          </mc:AlternateContent>
+          <p:sp>
+            <p:nvSpPr>
+              <p:cNvPr id="2" name="CasellaDiTesto 1">
+                <a:extLst>
+                  <a:ext uri="{FF2B5EF4-FFF2-40B4-BE49-F238E27FC236}">
+                    <a16:creationId xmlns:a16="http://schemas.microsoft.com/office/drawing/2014/main" id="{75813D49-40A6-C2C2-4605-7CEE31A305CD}"/>
+                  </a:ext>
+                </a:extLst>
+              </p:cNvPr>
+              <p:cNvSpPr txBox="1"/>
+              <p:nvPr/>
+            </p:nvSpPr>
+            <p:spPr>
+              <a:xfrm>
+                <a:off x="2386575" y="2402526"/>
+                <a:ext cx="1294543" cy="369332"/>
+              </a:xfrm>
+              <a:prstGeom prst="rect">
+                <a:avLst/>
+              </a:prstGeom>
+              <a:noFill/>
+              <a:ln>
+                <a:noFill/>
+              </a:ln>
+            </p:spPr>
+            <p:txBody>
+              <a:bodyPr wrap="square" rtlCol="0">
+                <a:spAutoFit/>
+              </a:bodyPr>
+              <a:lstStyle/>
+              <a:p>
+                <a:r>
+                  <a:rPr lang="it-IT" dirty="0"/>
+                  <a:t>Base idea</a:t>
+                </a:r>
+              </a:p>
+            </p:txBody>
+          </p:sp>
+        </p:grpSp>
+      </p:grpSp>
+      <p:sp>
+        <p:nvSpPr>
+          <p:cNvPr id="8" name="CasellaDiTesto 7">
+            <a:extLst>
+              <a:ext uri="{FF2B5EF4-FFF2-40B4-BE49-F238E27FC236}">
+                <a16:creationId xmlns:a16="http://schemas.microsoft.com/office/drawing/2014/main" id="{61CCC5EB-30E8-0FFC-3F1C-39CAC283583D}"/>
+              </a:ext>
+            </a:extLst>
+          </p:cNvPr>
+          <p:cNvSpPr txBox="1"/>
+          <p:nvPr/>
+        </p:nvSpPr>
+        <p:spPr>
+          <a:xfrm>
+            <a:off x="6421348" y="2882993"/>
+            <a:ext cx="3287731" cy="646331"/>
+          </a:xfrm>
+          <a:prstGeom prst="rect">
+            <a:avLst/>
+          </a:prstGeom>
+          <a:noFill/>
+        </p:spPr>
+        <p:txBody>
+          <a:bodyPr wrap="square" rtlCol="0">
+            <a:spAutoFit/>
+          </a:bodyPr>
+          <a:lstStyle/>
+          <a:p>
+            <a:r>
+              <a:rPr lang="it-IT" dirty="0" err="1"/>
+              <a:t>Proposal</a:t>
+            </a:r>
+            <a:r>
+              <a:rPr lang="it-IT" dirty="0"/>
+              <a:t>: multivariate </a:t>
+            </a:r>
+            <a:r>
+              <a:rPr lang="it-IT" dirty="0" err="1"/>
+              <a:t>normal</a:t>
+            </a:r>
+            <a:r>
+              <a:rPr lang="it-IT" dirty="0"/>
+              <a:t>, blind or not</a:t>
+            </a:r>
+          </a:p>
+        </p:txBody>
+      </p:sp>
+      <p:sp>
+        <p:nvSpPr>
+          <p:cNvPr id="9" name="CasellaDiTesto 8">
+            <a:extLst>
+              <a:ext uri="{FF2B5EF4-FFF2-40B4-BE49-F238E27FC236}">
+                <a16:creationId xmlns:a16="http://schemas.microsoft.com/office/drawing/2014/main" id="{12A952C8-5E1B-56F5-C6C0-6C3EA1C18B0E}"/>
+              </a:ext>
+            </a:extLst>
+          </p:cNvPr>
+          <p:cNvSpPr txBox="1"/>
+          <p:nvPr/>
+        </p:nvSpPr>
+        <p:spPr>
+          <a:xfrm>
+            <a:off x="6789051" y="4372113"/>
+            <a:ext cx="2211111" cy="369332"/>
+          </a:xfrm>
+          <a:prstGeom prst="rect">
+            <a:avLst/>
+          </a:prstGeom>
+          <a:noFill/>
+        </p:spPr>
+        <p:txBody>
+          <a:bodyPr wrap="square" rtlCol="0">
+            <a:spAutoFit/>
+          </a:bodyPr>
+          <a:lstStyle/>
+          <a:p>
+            <a:r>
+              <a:rPr lang="it-IT" dirty="0" err="1"/>
+              <a:t>Acceptance</a:t>
+            </a:r>
+            <a:r>
+              <a:rPr lang="it-IT" dirty="0"/>
+              <a:t> rule</a:t>
+            </a:r>
+          </a:p>
+        </p:txBody>
+      </p:sp>
+      <mc:AlternateContent xmlns:mc="http://schemas.openxmlformats.org/markup-compatibility/2006" xmlns:a14="http://schemas.microsoft.com/office/drawing/2010/main">
+        <mc:Choice Requires="a14">
+          <p:sp>
+            <p:nvSpPr>
+              <p:cNvPr id="10" name="CasellaDiTesto 9">
+                <a:extLst>
+                  <a:ext uri="{FF2B5EF4-FFF2-40B4-BE49-F238E27FC236}">
+                    <a16:creationId xmlns:a16="http://schemas.microsoft.com/office/drawing/2014/main" id="{9374EB6B-02FF-46C4-5965-0A5BE147449F}"/>
+                  </a:ext>
+                </a:extLst>
+              </p:cNvPr>
+              <p:cNvSpPr txBox="1"/>
+              <p:nvPr/>
+            </p:nvSpPr>
+            <p:spPr>
+              <a:xfrm>
+                <a:off x="6789051" y="4916711"/>
+                <a:ext cx="1834968" cy="596382"/>
+              </a:xfrm>
+              <a:prstGeom prst="rect">
+                <a:avLst/>
+              </a:prstGeom>
+              <a:noFill/>
+            </p:spPr>
+            <p:txBody>
+              <a:bodyPr wrap="square" rtlCol="0">
+                <a:spAutoFit/>
+              </a:bodyPr>
+              <a:lstStyle/>
+              <a:p>
+                <a14:m>
+                  <m:oMath xmlns:m="http://schemas.openxmlformats.org/officeDocument/2006/math">
+                    <m:f>
+                      <m:fPr>
+                        <m:ctrlPr>
+                          <a:rPr lang="it-IT" i="1" dirty="0" smtClean="0">
                             <a:latin typeface="Cambria Math" panose="02040503050406030204" pitchFamily="18" charset="0"/>
                           </a:rPr>
-                          <m:t>𝑡</m:t>
+                        </m:ctrlPr>
+                      </m:fPr>
+                      <m:num>
+                        <m:r>
+                          <a:rPr lang="it-IT" i="1" dirty="0" smtClean="0">
+                            <a:latin typeface="Cambria Math" panose="02040503050406030204" pitchFamily="18" charset="0"/>
+                          </a:rPr>
+                          <m:t>𝑝</m:t>
                         </m:r>
-                      </m:sub>
-                    </m:sSub>
+                        <m:d>
+                          <m:dPr>
+                            <m:ctrlPr>
+                              <a:rPr lang="it-IT" i="1" dirty="0" smtClean="0">
+                                <a:latin typeface="Cambria Math" panose="02040503050406030204" pitchFamily="18" charset="0"/>
+                              </a:rPr>
+                            </m:ctrlPr>
+                          </m:dPr>
+                          <m:e>
+                            <m:sSub>
+                              <m:sSubPr>
+                                <m:ctrlPr>
+                                  <a:rPr lang="it-IT" i="1" dirty="0" err="1" smtClean="0">
+                                    <a:latin typeface="Cambria Math" panose="02040503050406030204" pitchFamily="18" charset="0"/>
+                                  </a:rPr>
+                                </m:ctrlPr>
+                              </m:sSubPr>
+                              <m:e>
+                                <m:r>
+                                  <a:rPr lang="it-IT" i="1" dirty="0" smtClean="0">
+                                    <a:latin typeface="Cambria Math" panose="02040503050406030204" pitchFamily="18" charset="0"/>
+                                  </a:rPr>
+                                  <m:t>𝜃</m:t>
+                                </m:r>
+                              </m:e>
+                              <m:sub>
+                                <m:r>
+                                  <a:rPr lang="it-IT" i="1" dirty="0" err="1" smtClean="0">
+                                    <a:latin typeface="Cambria Math" panose="02040503050406030204" pitchFamily="18" charset="0"/>
+                                  </a:rPr>
+                                  <m:t>𝑡</m:t>
+                                </m:r>
+                              </m:sub>
+                            </m:sSub>
+                          </m:e>
+                        </m:d>
+                      </m:num>
+                      <m:den>
+                        <m:r>
+                          <a:rPr lang="it-IT" i="1" dirty="0" smtClean="0">
+                            <a:latin typeface="Cambria Math" panose="02040503050406030204" pitchFamily="18" charset="0"/>
+                          </a:rPr>
+                          <m:t>𝑝</m:t>
+                        </m:r>
+                        <m:d>
+                          <m:dPr>
+                            <m:ctrlPr>
+                              <a:rPr lang="it-IT" i="1" dirty="0" smtClean="0">
+                                <a:latin typeface="Cambria Math" panose="02040503050406030204" pitchFamily="18" charset="0"/>
+                              </a:rPr>
+                            </m:ctrlPr>
+                          </m:dPr>
+                          <m:e>
+                            <m:sSub>
+                              <m:sSubPr>
+                                <m:ctrlPr>
+                                  <a:rPr lang="it-IT" i="1" dirty="0" smtClean="0">
+                                    <a:latin typeface="Cambria Math" panose="02040503050406030204" pitchFamily="18" charset="0"/>
+                                  </a:rPr>
+                                </m:ctrlPr>
+                              </m:sSubPr>
+                              <m:e>
+                                <m:r>
+                                  <a:rPr lang="it-IT" i="1" dirty="0" smtClean="0">
+                                    <a:latin typeface="Cambria Math" panose="02040503050406030204" pitchFamily="18" charset="0"/>
+                                  </a:rPr>
+                                  <m:t>𝜃</m:t>
+                                </m:r>
+                              </m:e>
+                              <m:sub>
+                                <m:r>
+                                  <a:rPr lang="it-IT" i="1" dirty="0" smtClean="0">
+                                    <a:latin typeface="Cambria Math" panose="02040503050406030204" pitchFamily="18" charset="0"/>
+                                  </a:rPr>
+                                  <m:t>0</m:t>
+                                </m:r>
+                              </m:sub>
+                            </m:sSub>
+                          </m:e>
+                        </m:d>
+                      </m:den>
+                    </m:f>
+                    <m:f>
+                      <m:fPr>
+                        <m:ctrlPr>
+                          <a:rPr lang="it-IT" i="1" dirty="0" smtClean="0">
+                            <a:latin typeface="Cambria Math" panose="02040503050406030204" pitchFamily="18" charset="0"/>
+                          </a:rPr>
+                        </m:ctrlPr>
+                      </m:fPr>
+                      <m:num>
+                        <m:r>
+                          <a:rPr lang="it-IT" i="1" dirty="0" smtClean="0">
+                            <a:latin typeface="Cambria Math" panose="02040503050406030204" pitchFamily="18" charset="0"/>
+                          </a:rPr>
+                          <m:t>𝑞</m:t>
+                        </m:r>
+                        <m:d>
+                          <m:dPr>
+                            <m:ctrlPr>
+                              <a:rPr lang="it-IT" i="1" dirty="0" smtClean="0">
+                                <a:latin typeface="Cambria Math" panose="02040503050406030204" pitchFamily="18" charset="0"/>
+                              </a:rPr>
+                            </m:ctrlPr>
+                          </m:dPr>
+                          <m:e>
+                            <m:sSub>
+                              <m:sSubPr>
+                                <m:ctrlPr>
+                                  <a:rPr lang="it-IT" i="1" dirty="0" err="1" smtClean="0">
+                                    <a:latin typeface="Cambria Math" panose="02040503050406030204" pitchFamily="18" charset="0"/>
+                                  </a:rPr>
+                                </m:ctrlPr>
+                              </m:sSubPr>
+                              <m:e>
+                                <m:r>
+                                  <a:rPr lang="it-IT" i="1" dirty="0" smtClean="0">
+                                    <a:latin typeface="Cambria Math" panose="02040503050406030204" pitchFamily="18" charset="0"/>
+                                  </a:rPr>
+                                  <m:t>𝜃</m:t>
+                                </m:r>
+                              </m:e>
+                              <m:sub>
+                                <m:r>
+                                  <a:rPr lang="it-IT" i="1" dirty="0" err="1" smtClean="0">
+                                    <a:latin typeface="Cambria Math" panose="02040503050406030204" pitchFamily="18" charset="0"/>
+                                  </a:rPr>
+                                  <m:t>𝑡</m:t>
+                                </m:r>
+                              </m:sub>
+                            </m:sSub>
+                          </m:e>
+                          <m:e>
+                            <m:sSub>
+                              <m:sSubPr>
+                                <m:ctrlPr>
+                                  <a:rPr lang="it-IT" i="1" dirty="0" smtClean="0">
+                                    <a:latin typeface="Cambria Math" panose="02040503050406030204" pitchFamily="18" charset="0"/>
+                                  </a:rPr>
+                                </m:ctrlPr>
+                              </m:sSubPr>
+                              <m:e>
+                                <m:r>
+                                  <a:rPr lang="it-IT" i="1" dirty="0" smtClean="0">
+                                    <a:latin typeface="Cambria Math" panose="02040503050406030204" pitchFamily="18" charset="0"/>
+                                  </a:rPr>
+                                  <m:t>𝜃</m:t>
+                                </m:r>
+                              </m:e>
+                              <m:sub>
+                                <m:r>
+                                  <a:rPr lang="it-IT" i="1" dirty="0" smtClean="0">
+                                    <a:latin typeface="Cambria Math" panose="02040503050406030204" pitchFamily="18" charset="0"/>
+                                  </a:rPr>
+                                  <m:t>0</m:t>
+                                </m:r>
+                              </m:sub>
+                            </m:sSub>
+                          </m:e>
+                        </m:d>
+                      </m:num>
+                      <m:den>
+                        <m:r>
+                          <a:rPr lang="it-IT" i="1" dirty="0" smtClean="0">
+                            <a:latin typeface="Cambria Math" panose="02040503050406030204" pitchFamily="18" charset="0"/>
+                          </a:rPr>
+                          <m:t>𝑞</m:t>
+                        </m:r>
+                        <m:d>
+                          <m:dPr>
+                            <m:ctrlPr>
+                              <a:rPr lang="it-IT" i="1" dirty="0" smtClean="0">
+                                <a:latin typeface="Cambria Math" panose="02040503050406030204" pitchFamily="18" charset="0"/>
+                              </a:rPr>
+                            </m:ctrlPr>
+                          </m:dPr>
+                          <m:e>
+                            <m:sSub>
+                              <m:sSubPr>
+                                <m:ctrlPr>
+                                  <a:rPr lang="it-IT" i="1" dirty="0" smtClean="0">
+                                    <a:latin typeface="Cambria Math" panose="02040503050406030204" pitchFamily="18" charset="0"/>
+                                  </a:rPr>
+                                </m:ctrlPr>
+                              </m:sSubPr>
+                              <m:e>
+                                <m:r>
+                                  <a:rPr lang="it-IT" i="1" dirty="0" smtClean="0">
+                                    <a:latin typeface="Cambria Math" panose="02040503050406030204" pitchFamily="18" charset="0"/>
+                                  </a:rPr>
+                                  <m:t>𝜃</m:t>
+                                </m:r>
+                              </m:e>
+                              <m:sub>
+                                <m:r>
+                                  <a:rPr lang="it-IT" i="1" dirty="0" smtClean="0">
+                                    <a:latin typeface="Cambria Math" panose="02040503050406030204" pitchFamily="18" charset="0"/>
+                                  </a:rPr>
+                                  <m:t>0</m:t>
+                                </m:r>
+                              </m:sub>
+                            </m:sSub>
+                          </m:e>
+                          <m:e>
+                            <m:sSub>
+                              <m:sSubPr>
+                                <m:ctrlPr>
+                                  <a:rPr lang="it-IT" i="1" dirty="0" err="1" smtClean="0">
+                                    <a:latin typeface="Cambria Math" panose="02040503050406030204" pitchFamily="18" charset="0"/>
+                                  </a:rPr>
+                                </m:ctrlPr>
+                              </m:sSubPr>
+                              <m:e>
+                                <m:r>
+                                  <a:rPr lang="it-IT" i="1" dirty="0" smtClean="0">
+                                    <a:latin typeface="Cambria Math" panose="02040503050406030204" pitchFamily="18" charset="0"/>
+                                  </a:rPr>
+                                  <m:t>𝜃</m:t>
+                                </m:r>
+                              </m:e>
+                              <m:sub>
+                                <m:r>
+                                  <a:rPr lang="it-IT" i="1" dirty="0" err="1" smtClean="0">
+                                    <a:latin typeface="Cambria Math" panose="02040503050406030204" pitchFamily="18" charset="0"/>
+                                  </a:rPr>
+                                  <m:t>𝑡</m:t>
+                                </m:r>
+                              </m:sub>
+                            </m:sSub>
+                          </m:e>
+                        </m:d>
+                      </m:den>
+                    </m:f>
+                    <m:r>
+                      <a:rPr lang="it-IT" i="1" dirty="0" smtClean="0">
+                        <a:latin typeface="Cambria Math" panose="02040503050406030204" pitchFamily="18" charset="0"/>
+                      </a:rPr>
+                      <m:t>≥</m:t>
+                    </m:r>
+                    <m:r>
+                      <a:rPr lang="it-IT" i="1" dirty="0" smtClean="0">
+                        <a:latin typeface="Cambria Math" panose="02040503050406030204" pitchFamily="18" charset="0"/>
+                      </a:rPr>
+                      <m:t>𝑎</m:t>
+                    </m:r>
                   </m:oMath>
                 </a14:m>
-                <a:endParaRPr lang="it-IT" dirty="0"/>
-              </a:p>
-              <a:p>
-                <a:pPr marL="285750" indent="-285750">
-                  <a:buFont typeface="Arial" panose="020B0604020202020204" pitchFamily="34" charset="0"/>
-                  <a:buChar char="•"/>
-                </a:pPr>
                 <a:r>
                   <a:rPr lang="it-IT" dirty="0"/>
-                  <a:t>Check </a:t>
-                </a:r>
-                <a:r>
-                  <a:rPr lang="it-IT" dirty="0" err="1"/>
-                  <a:t>acceptance</a:t>
-                </a:r>
-                <a:r>
-                  <a:rPr lang="it-IT" dirty="0"/>
-                  <a:t> rule</a:t>
+                  <a:t> </a:t>
                 </a:r>
               </a:p>
             </p:txBody>
@@ -14338,10 +15790,10 @@
         <mc:Fallback xmlns="">
           <p:sp>
             <p:nvSpPr>
-              <p:cNvPr id="14" name="CasellaDiTesto 13">
+              <p:cNvPr id="10" name="CasellaDiTesto 9">
                 <a:extLst>
                   <a:ext uri="{FF2B5EF4-FFF2-40B4-BE49-F238E27FC236}">
-                    <a16:creationId xmlns:a16="http://schemas.microsoft.com/office/drawing/2014/main" id="{BC4AC2BC-522C-CF7C-A8BC-2F88B1C1C828}"/>
+                    <a16:creationId xmlns:a16="http://schemas.microsoft.com/office/drawing/2014/main" id="{9374EB6B-02FF-46C4-5965-0A5BE147449F}"/>
                   </a:ext>
                 </a:extLst>
               </p:cNvPr>
@@ -14352,16 +15804,16 @@
             </p:nvSpPr>
             <p:spPr>
               <a:xfrm>
-                <a:off x="2024009" y="3688422"/>
-                <a:ext cx="4654193" cy="923330"/>
+                <a:off x="6789051" y="4916711"/>
+                <a:ext cx="1834968" cy="596382"/>
               </a:xfrm>
               <a:prstGeom prst="rect">
                 <a:avLst/>
               </a:prstGeom>
               <a:blipFill>
-                <a:blip r:embed="rId2"/>
+                <a:blip r:embed="rId6"/>
                 <a:stretch>
-                  <a:fillRect l="-785" t="-3289" b="-9211"/>
+                  <a:fillRect/>
                 </a:stretch>
               </a:blipFill>
             </p:spPr>
@@ -14380,432 +15832,164 @@
           </p:sp>
         </mc:Fallback>
       </mc:AlternateContent>
-      <mc:AlternateContent xmlns:mc="http://schemas.openxmlformats.org/markup-compatibility/2006" xmlns:a14="http://schemas.microsoft.com/office/drawing/2010/main">
-        <mc:Choice Requires="a14">
-          <p:sp>
-            <p:nvSpPr>
-              <p:cNvPr id="15" name="CasellaDiTesto 14">
-                <a:extLst>
-                  <a:ext uri="{FF2B5EF4-FFF2-40B4-BE49-F238E27FC236}">
-                    <a16:creationId xmlns:a16="http://schemas.microsoft.com/office/drawing/2014/main" id="{A8346508-EC61-0A86-CF73-51AB617DF50E}"/>
-                  </a:ext>
-                </a:extLst>
-              </p:cNvPr>
-              <p:cNvSpPr txBox="1"/>
-              <p:nvPr/>
-            </p:nvSpPr>
-            <p:spPr>
-              <a:xfrm>
-                <a:off x="1757684" y="4860348"/>
-                <a:ext cx="1684962" cy="646331"/>
-              </a:xfrm>
-              <a:prstGeom prst="rect">
-                <a:avLst/>
-              </a:prstGeom>
-              <a:noFill/>
-            </p:spPr>
-            <p:txBody>
-              <a:bodyPr wrap="square" rtlCol="0">
-                <a:spAutoFit/>
-              </a:bodyPr>
-              <a:lstStyle/>
-              <a:p>
-                <a:r>
-                  <a:rPr lang="it-IT" dirty="0" err="1"/>
-                  <a:t>If</a:t>
-                </a:r>
-                <a:r>
-                  <a:rPr lang="it-IT" dirty="0"/>
-                  <a:t> </a:t>
-                </a:r>
-                <a:r>
-                  <a:rPr lang="it-IT" dirty="0" err="1"/>
-                  <a:t>true</a:t>
-                </a:r>
-                <a:r>
-                  <a:rPr lang="it-IT" dirty="0"/>
-                  <a:t> </a:t>
-                </a:r>
-                <a:r>
-                  <a:rPr lang="it-IT" dirty="0" err="1"/>
-                  <a:t>move</a:t>
-                </a:r>
-                <a:r>
-                  <a:rPr lang="it-IT" dirty="0"/>
-                  <a:t> to </a:t>
-                </a:r>
-                <a14:m>
-                  <m:oMath xmlns:m="http://schemas.openxmlformats.org/officeDocument/2006/math">
-                    <m:sSub>
-                      <m:sSubPr>
-                        <m:ctrlPr>
-                          <a:rPr lang="it-IT" i="1" dirty="0" smtClean="0">
-                            <a:latin typeface="Cambria Math" panose="02040503050406030204" pitchFamily="18" charset="0"/>
-                          </a:rPr>
-                        </m:ctrlPr>
-                      </m:sSubPr>
-                      <m:e>
-                        <m:r>
-                          <a:rPr lang="it-IT" i="1" dirty="0" smtClean="0">
-                            <a:latin typeface="Cambria Math" panose="02040503050406030204" pitchFamily="18" charset="0"/>
-                          </a:rPr>
-                          <m:t>𝜃</m:t>
-                        </m:r>
-                      </m:e>
-                      <m:sub>
-                        <m:r>
-                          <a:rPr lang="it-IT" i="1" dirty="0" smtClean="0">
-                            <a:latin typeface="Cambria Math" panose="02040503050406030204" pitchFamily="18" charset="0"/>
-                          </a:rPr>
-                          <m:t>0</m:t>
-                        </m:r>
-                      </m:sub>
-                    </m:sSub>
-                    <m:r>
-                      <a:rPr lang="it-IT" i="1" dirty="0" smtClean="0">
-                        <a:latin typeface="Cambria Math" panose="02040503050406030204" pitchFamily="18" charset="0"/>
-                      </a:rPr>
-                      <m:t>=</m:t>
-                    </m:r>
-                    <m:sSub>
-                      <m:sSubPr>
-                        <m:ctrlPr>
-                          <a:rPr lang="it-IT" i="1" dirty="0" err="1" smtClean="0">
-                            <a:latin typeface="Cambria Math" panose="02040503050406030204" pitchFamily="18" charset="0"/>
-                          </a:rPr>
-                        </m:ctrlPr>
-                      </m:sSubPr>
-                      <m:e>
-                        <m:r>
-                          <a:rPr lang="it-IT" i="1" dirty="0" smtClean="0">
-                            <a:latin typeface="Cambria Math" panose="02040503050406030204" pitchFamily="18" charset="0"/>
-                          </a:rPr>
-                          <m:t>𝜃</m:t>
-                        </m:r>
-                      </m:e>
-                      <m:sub>
-                        <m:r>
-                          <a:rPr lang="it-IT" i="1" dirty="0" err="1" smtClean="0">
-                            <a:latin typeface="Cambria Math" panose="02040503050406030204" pitchFamily="18" charset="0"/>
-                          </a:rPr>
-                          <m:t>𝑡</m:t>
-                        </m:r>
-                      </m:sub>
-                    </m:sSub>
-                  </m:oMath>
-                </a14:m>
-                <a:endParaRPr lang="it-IT" dirty="0"/>
-              </a:p>
-            </p:txBody>
-          </p:sp>
-        </mc:Choice>
-        <mc:Fallback xmlns="">
-          <p:sp>
-            <p:nvSpPr>
-              <p:cNvPr id="15" name="CasellaDiTesto 14">
-                <a:extLst>
-                  <a:ext uri="{FF2B5EF4-FFF2-40B4-BE49-F238E27FC236}">
-                    <a16:creationId xmlns:a16="http://schemas.microsoft.com/office/drawing/2014/main" id="{A8346508-EC61-0A86-CF73-51AB617DF50E}"/>
-                  </a:ext>
-                </a:extLst>
-              </p:cNvPr>
-              <p:cNvSpPr txBox="1">
-                <a:spLocks noRot="1" noChangeAspect="1" noMove="1" noResize="1" noEditPoints="1" noAdjustHandles="1" noChangeArrowheads="1" noChangeShapeType="1" noTextEdit="1"/>
-              </p:cNvSpPr>
-              <p:nvPr/>
-            </p:nvSpPr>
-            <p:spPr>
-              <a:xfrm>
-                <a:off x="1757684" y="4860348"/>
-                <a:ext cx="1684962" cy="646331"/>
-              </a:xfrm>
-              <a:prstGeom prst="rect">
-                <a:avLst/>
-              </a:prstGeom>
-              <a:blipFill>
-                <a:blip r:embed="rId3"/>
-                <a:stretch>
-                  <a:fillRect l="-2888" t="-4717" b="-14151"/>
-                </a:stretch>
-              </a:blipFill>
-            </p:spPr>
-            <p:txBody>
-              <a:bodyPr/>
-              <a:lstStyle/>
-              <a:p>
-                <a:r>
-                  <a:rPr lang="it-IT">
-                    <a:noFill/>
-                  </a:rPr>
-                  <a:t> </a:t>
-                </a:r>
-              </a:p>
-            </p:txBody>
-          </p:sp>
-        </mc:Fallback>
-      </mc:AlternateContent>
-      <mc:AlternateContent xmlns:mc="http://schemas.openxmlformats.org/markup-compatibility/2006" xmlns:a14="http://schemas.microsoft.com/office/drawing/2010/main">
-        <mc:Choice Requires="a14">
-          <p:sp>
-            <p:nvSpPr>
-              <p:cNvPr id="16" name="CasellaDiTesto 15">
-                <a:extLst>
-                  <a:ext uri="{FF2B5EF4-FFF2-40B4-BE49-F238E27FC236}">
-                    <a16:creationId xmlns:a16="http://schemas.microsoft.com/office/drawing/2014/main" id="{1A45A8E9-92A5-F272-C0D9-0FF6E89C39A8}"/>
-                  </a:ext>
-                </a:extLst>
-              </p:cNvPr>
-              <p:cNvSpPr txBox="1"/>
-              <p:nvPr/>
-            </p:nvSpPr>
-            <p:spPr>
-              <a:xfrm>
-                <a:off x="4025757" y="4998847"/>
-                <a:ext cx="2070243" cy="369332"/>
-              </a:xfrm>
-              <a:prstGeom prst="rect">
-                <a:avLst/>
-              </a:prstGeom>
-              <a:noFill/>
-            </p:spPr>
-            <p:txBody>
-              <a:bodyPr wrap="square" rtlCol="0">
-                <a:spAutoFit/>
-              </a:bodyPr>
-              <a:lstStyle/>
-              <a:p>
-                <a:r>
-                  <a:rPr lang="it-IT" dirty="0" err="1"/>
-                  <a:t>If</a:t>
-                </a:r>
-                <a:r>
-                  <a:rPr lang="it-IT" dirty="0"/>
-                  <a:t> false stay </a:t>
-                </a:r>
-                <a:r>
-                  <a:rPr lang="it-IT" dirty="0" err="1"/>
-                  <a:t>at</a:t>
-                </a:r>
-                <a:r>
-                  <a:rPr lang="it-IT" dirty="0"/>
-                  <a:t> </a:t>
-                </a:r>
-                <a14:m>
-                  <m:oMath xmlns:m="http://schemas.openxmlformats.org/officeDocument/2006/math">
-                    <m:sSub>
-                      <m:sSubPr>
-                        <m:ctrlPr>
-                          <a:rPr lang="it-IT" i="1" dirty="0" smtClean="0">
-                            <a:latin typeface="Cambria Math" panose="02040503050406030204" pitchFamily="18" charset="0"/>
-                          </a:rPr>
-                        </m:ctrlPr>
-                      </m:sSubPr>
-                      <m:e>
-                        <m:r>
-                          <a:rPr lang="it-IT" i="1" dirty="0" smtClean="0">
-                            <a:latin typeface="Cambria Math" panose="02040503050406030204" pitchFamily="18" charset="0"/>
-                          </a:rPr>
-                          <m:t>𝜃</m:t>
-                        </m:r>
-                      </m:e>
-                      <m:sub>
-                        <m:r>
-                          <a:rPr lang="it-IT" i="1" dirty="0" smtClean="0">
-                            <a:latin typeface="Cambria Math" panose="02040503050406030204" pitchFamily="18" charset="0"/>
-                          </a:rPr>
-                          <m:t>0</m:t>
-                        </m:r>
-                      </m:sub>
-                    </m:sSub>
-                  </m:oMath>
-                </a14:m>
-                <a:endParaRPr lang="it-IT" dirty="0"/>
-              </a:p>
-            </p:txBody>
-          </p:sp>
-        </mc:Choice>
-        <mc:Fallback xmlns="">
-          <p:sp>
-            <p:nvSpPr>
-              <p:cNvPr id="16" name="CasellaDiTesto 15">
-                <a:extLst>
-                  <a:ext uri="{FF2B5EF4-FFF2-40B4-BE49-F238E27FC236}">
-                    <a16:creationId xmlns:a16="http://schemas.microsoft.com/office/drawing/2014/main" id="{1A45A8E9-92A5-F272-C0D9-0FF6E89C39A8}"/>
-                  </a:ext>
-                </a:extLst>
-              </p:cNvPr>
-              <p:cNvSpPr txBox="1">
-                <a:spLocks noRot="1" noChangeAspect="1" noMove="1" noResize="1" noEditPoints="1" noAdjustHandles="1" noChangeArrowheads="1" noChangeShapeType="1" noTextEdit="1"/>
-              </p:cNvSpPr>
-              <p:nvPr/>
-            </p:nvSpPr>
-            <p:spPr>
-              <a:xfrm>
-                <a:off x="4025757" y="4998847"/>
-                <a:ext cx="2070243" cy="369332"/>
-              </a:xfrm>
-              <a:prstGeom prst="rect">
-                <a:avLst/>
-              </a:prstGeom>
-              <a:blipFill>
-                <a:blip r:embed="rId4"/>
-                <a:stretch>
-                  <a:fillRect l="-2353" t="-8197" b="-24590"/>
-                </a:stretch>
-              </a:blipFill>
-            </p:spPr>
-            <p:txBody>
-              <a:bodyPr/>
-              <a:lstStyle/>
-              <a:p>
-                <a:r>
-                  <a:rPr lang="it-IT">
-                    <a:noFill/>
-                  </a:rPr>
-                  <a:t> </a:t>
-                </a:r>
-              </a:p>
-            </p:txBody>
-          </p:sp>
-        </mc:Fallback>
-      </mc:AlternateContent>
-      <mc:AlternateContent xmlns:mc="http://schemas.openxmlformats.org/markup-compatibility/2006" xmlns:a14="http://schemas.microsoft.com/office/drawing/2010/main">
-        <mc:Choice Requires="a14">
-          <p:sp>
-            <p:nvSpPr>
-              <p:cNvPr id="17" name="CasellaDiTesto 16">
-                <a:extLst>
-                  <a:ext uri="{FF2B5EF4-FFF2-40B4-BE49-F238E27FC236}">
-                    <a16:creationId xmlns:a16="http://schemas.microsoft.com/office/drawing/2014/main" id="{7F281147-055D-0C36-6BC8-FBB7FEF09A80}"/>
-                  </a:ext>
-                </a:extLst>
-              </p:cNvPr>
-              <p:cNvSpPr txBox="1"/>
-              <p:nvPr/>
-            </p:nvSpPr>
-            <p:spPr>
-              <a:xfrm>
-                <a:off x="6883685" y="4448710"/>
-                <a:ext cx="3113070" cy="1200329"/>
-              </a:xfrm>
-              <a:prstGeom prst="rect">
-                <a:avLst/>
-              </a:prstGeom>
-              <a:noFill/>
-            </p:spPr>
-            <p:txBody>
-              <a:bodyPr wrap="square" rtlCol="0">
-                <a:spAutoFit/>
-              </a:bodyPr>
-              <a:lstStyle/>
-              <a:p>
-                <a:r>
-                  <a:rPr lang="it-IT" dirty="0"/>
-                  <a:t>In </a:t>
-                </a:r>
-                <a:r>
-                  <a:rPr lang="it-IT" dirty="0" err="1"/>
-                  <a:t>this</a:t>
-                </a:r>
-                <a:r>
-                  <a:rPr lang="it-IT" dirty="0"/>
-                  <a:t> way we </a:t>
-                </a:r>
-                <a:r>
-                  <a:rPr lang="it-IT" dirty="0" err="1"/>
-                  <a:t>will</a:t>
-                </a:r>
-                <a:r>
-                  <a:rPr lang="it-IT" dirty="0"/>
-                  <a:t> have the </a:t>
-                </a:r>
-                <a14:m>
-                  <m:oMath xmlns:m="http://schemas.openxmlformats.org/officeDocument/2006/math">
-                    <m:r>
-                      <a:rPr lang="it-IT" i="1" dirty="0" smtClean="0">
-                        <a:latin typeface="Cambria Math" panose="02040503050406030204" pitchFamily="18" charset="0"/>
-                      </a:rPr>
-                      <m:t>𝜃</m:t>
-                    </m:r>
-                  </m:oMath>
-                </a14:m>
-                <a:r>
-                  <a:rPr lang="it-IT" dirty="0"/>
-                  <a:t> with </a:t>
-                </a:r>
-                <a:r>
-                  <a:rPr lang="it-IT" dirty="0" err="1"/>
-                  <a:t>higher</a:t>
-                </a:r>
-                <a:r>
-                  <a:rPr lang="it-IT" dirty="0"/>
-                  <a:t> </a:t>
-                </a:r>
-                <a:r>
-                  <a:rPr lang="it-IT" dirty="0" err="1"/>
-                  <a:t>posterior</a:t>
-                </a:r>
-                <a:r>
-                  <a:rPr lang="it-IT" dirty="0"/>
-                  <a:t> more times so more </a:t>
-                </a:r>
-                <a:r>
-                  <a:rPr lang="it-IT" dirty="0" err="1"/>
-                  <a:t>probable</a:t>
-                </a:r>
-                <a:r>
-                  <a:rPr lang="it-IT" dirty="0"/>
-                  <a:t>! </a:t>
-                </a:r>
-              </a:p>
-            </p:txBody>
-          </p:sp>
-        </mc:Choice>
-        <mc:Fallback xmlns="">
-          <p:sp>
-            <p:nvSpPr>
-              <p:cNvPr id="17" name="CasellaDiTesto 16">
-                <a:extLst>
-                  <a:ext uri="{FF2B5EF4-FFF2-40B4-BE49-F238E27FC236}">
-                    <a16:creationId xmlns:a16="http://schemas.microsoft.com/office/drawing/2014/main" id="{7F281147-055D-0C36-6BC8-FBB7FEF09A80}"/>
-                  </a:ext>
-                </a:extLst>
-              </p:cNvPr>
-              <p:cNvSpPr txBox="1">
-                <a:spLocks noRot="1" noChangeAspect="1" noMove="1" noResize="1" noEditPoints="1" noAdjustHandles="1" noChangeArrowheads="1" noChangeShapeType="1" noTextEdit="1"/>
-              </p:cNvSpPr>
-              <p:nvPr/>
-            </p:nvSpPr>
-            <p:spPr>
-              <a:xfrm>
-                <a:off x="6883685" y="4448710"/>
-                <a:ext cx="3113070" cy="1200329"/>
-              </a:xfrm>
-              <a:prstGeom prst="rect">
-                <a:avLst/>
-              </a:prstGeom>
-              <a:blipFill>
-                <a:blip r:embed="rId5"/>
-                <a:stretch>
-                  <a:fillRect l="-1566" t="-3046" b="-7107"/>
-                </a:stretch>
-              </a:blipFill>
-            </p:spPr>
-            <p:txBody>
-              <a:bodyPr/>
-              <a:lstStyle/>
-              <a:p>
-                <a:r>
-                  <a:rPr lang="it-IT">
-                    <a:noFill/>
-                  </a:rPr>
-                  <a:t> </a:t>
-                </a:r>
-              </a:p>
-            </p:txBody>
-          </p:sp>
-        </mc:Fallback>
-      </mc:AlternateContent>
+      <p:sp>
+        <p:nvSpPr>
+          <p:cNvPr id="18" name="CasellaDiTesto 17">
+            <a:extLst>
+              <a:ext uri="{FF2B5EF4-FFF2-40B4-BE49-F238E27FC236}">
+                <a16:creationId xmlns:a16="http://schemas.microsoft.com/office/drawing/2014/main" id="{2205BEA0-5222-B972-F404-5C0B82B16295}"/>
+              </a:ext>
+            </a:extLst>
+          </p:cNvPr>
+          <p:cNvSpPr txBox="1"/>
+          <p:nvPr/>
+        </p:nvSpPr>
+        <p:spPr>
+          <a:xfrm>
+            <a:off x="8624019" y="5493562"/>
+            <a:ext cx="1834968" cy="646331"/>
+          </a:xfrm>
+          <a:prstGeom prst="rect">
+            <a:avLst/>
+          </a:prstGeom>
+          <a:noFill/>
+        </p:spPr>
+        <p:txBody>
+          <a:bodyPr wrap="square" rtlCol="0">
+            <a:spAutoFit/>
+          </a:bodyPr>
+          <a:lstStyle/>
+          <a:p>
+            <a:r>
+              <a:rPr lang="it-IT" dirty="0"/>
+              <a:t>Random </a:t>
+            </a:r>
+            <a:r>
+              <a:rPr lang="it-IT" dirty="0" err="1"/>
+              <a:t>extract</a:t>
+            </a:r>
+            <a:r>
+              <a:rPr lang="it-IT" dirty="0"/>
+              <a:t> in [0,1]</a:t>
+            </a:r>
+          </a:p>
+        </p:txBody>
+      </p:sp>
+      <p:sp>
+        <p:nvSpPr>
+          <p:cNvPr id="19" name="CasellaDiTesto 18">
+            <a:extLst>
+              <a:ext uri="{FF2B5EF4-FFF2-40B4-BE49-F238E27FC236}">
+                <a16:creationId xmlns:a16="http://schemas.microsoft.com/office/drawing/2014/main" id="{F678EB67-B3A0-CC30-336A-E035658E77C5}"/>
+              </a:ext>
+            </a:extLst>
+          </p:cNvPr>
+          <p:cNvSpPr txBox="1"/>
+          <p:nvPr/>
+        </p:nvSpPr>
+        <p:spPr>
+          <a:xfrm>
+            <a:off x="5711602" y="5315244"/>
+            <a:ext cx="1307788" cy="646331"/>
+          </a:xfrm>
+          <a:prstGeom prst="rect">
+            <a:avLst/>
+          </a:prstGeom>
+          <a:noFill/>
+        </p:spPr>
+        <p:txBody>
+          <a:bodyPr wrap="square" rtlCol="0">
+            <a:spAutoFit/>
+          </a:bodyPr>
+          <a:lstStyle/>
+          <a:p>
+            <a:r>
+              <a:rPr lang="it-IT" dirty="0" err="1"/>
+              <a:t>Posterior</a:t>
+            </a:r>
+            <a:r>
+              <a:rPr lang="it-IT" dirty="0"/>
+              <a:t> </a:t>
+            </a:r>
+            <a:r>
+              <a:rPr lang="it-IT" dirty="0" err="1"/>
+              <a:t>values</a:t>
+            </a:r>
+            <a:endParaRPr lang="it-IT" dirty="0"/>
+          </a:p>
+        </p:txBody>
+      </p:sp>
+      <p:sp>
+        <p:nvSpPr>
+          <p:cNvPr id="20" name="CasellaDiTesto 19">
+            <a:extLst>
+              <a:ext uri="{FF2B5EF4-FFF2-40B4-BE49-F238E27FC236}">
+                <a16:creationId xmlns:a16="http://schemas.microsoft.com/office/drawing/2014/main" id="{7A5DA5CB-C065-8229-9097-51D9A9BAEAF2}"/>
+              </a:ext>
+            </a:extLst>
+          </p:cNvPr>
+          <p:cNvSpPr txBox="1"/>
+          <p:nvPr/>
+        </p:nvSpPr>
+        <p:spPr>
+          <a:xfrm>
+            <a:off x="5845995" y="6086892"/>
+            <a:ext cx="3154167" cy="646331"/>
+          </a:xfrm>
+          <a:prstGeom prst="rect">
+            <a:avLst/>
+          </a:prstGeom>
+          <a:noFill/>
+        </p:spPr>
+        <p:txBody>
+          <a:bodyPr wrap="square" rtlCol="0">
+            <a:spAutoFit/>
+          </a:bodyPr>
+          <a:lstStyle/>
+          <a:p>
+            <a:r>
+              <a:rPr lang="it-IT" dirty="0" err="1"/>
+              <a:t>Proposal</a:t>
+            </a:r>
+            <a:r>
+              <a:rPr lang="it-IT" dirty="0"/>
+              <a:t> </a:t>
+            </a:r>
+            <a:r>
+              <a:rPr lang="it-IT" dirty="0" err="1"/>
+              <a:t>values</a:t>
+            </a:r>
+            <a:r>
+              <a:rPr lang="it-IT" dirty="0"/>
+              <a:t>, </a:t>
+            </a:r>
+            <a:r>
+              <a:rPr lang="it-IT" dirty="0" err="1"/>
+              <a:t>ours</a:t>
+            </a:r>
+            <a:r>
+              <a:rPr lang="it-IT" dirty="0"/>
+              <a:t> </a:t>
+            </a:r>
+            <a:r>
+              <a:rPr lang="it-IT" dirty="0" err="1"/>
+              <a:t>is</a:t>
+            </a:r>
+            <a:r>
+              <a:rPr lang="it-IT" dirty="0"/>
+              <a:t> </a:t>
+            </a:r>
+            <a:r>
+              <a:rPr lang="it-IT" dirty="0" err="1"/>
+              <a:t>symmetric</a:t>
+            </a:r>
+            <a:r>
+              <a:rPr lang="it-IT" dirty="0"/>
+              <a:t> so it’s 1</a:t>
+            </a:r>
+          </a:p>
+        </p:txBody>
+      </p:sp>
     </p:spTree>
     <p:extLst>
       <p:ext uri="{BB962C8B-B14F-4D97-AF65-F5344CB8AC3E}">

--- a/Seminar.pptx
+++ b/Seminar.pptx
@@ -2132,7 +2132,7 @@
           <a:p>
             <a:fld id="{FAF9D2FB-70D2-43E7-9793-86D8D2F82197}" type="datetimeFigureOut">
               <a:rPr lang="it-IT" smtClean="0"/>
-              <a:t>27/03/2026</a:t>
+              <a:t>31/03/2026</a:t>
             </a:fld>
             <a:endParaRPr lang="it-IT"/>
           </a:p>
@@ -2567,7 +2567,7 @@
           <a:p>
             <a:fld id="{12B2C755-0381-446C-8FF6-9D93CC4F5EBA}" type="datetimeFigureOut">
               <a:rPr lang="it-IT" smtClean="0"/>
-              <a:t>27/03/2026</a:t>
+              <a:t>31/03/2026</a:t>
             </a:fld>
             <a:endParaRPr lang="it-IT"/>
           </a:p>
@@ -2838,7 +2838,7 @@
           <a:p>
             <a:fld id="{12B2C755-0381-446C-8FF6-9D93CC4F5EBA}" type="datetimeFigureOut">
               <a:rPr lang="it-IT" smtClean="0"/>
-              <a:t>27/03/2026</a:t>
+              <a:t>31/03/2026</a:t>
             </a:fld>
             <a:endParaRPr lang="it-IT"/>
           </a:p>
@@ -3018,7 +3018,7 @@
           <a:p>
             <a:fld id="{12B2C755-0381-446C-8FF6-9D93CC4F5EBA}" type="datetimeFigureOut">
               <a:rPr lang="it-IT" smtClean="0"/>
-              <a:t>27/03/2026</a:t>
+              <a:t>31/03/2026</a:t>
             </a:fld>
             <a:endParaRPr lang="it-IT"/>
           </a:p>
@@ -3203,7 +3203,7 @@
           <a:p>
             <a:fld id="{12B2C755-0381-446C-8FF6-9D93CC4F5EBA}" type="datetimeFigureOut">
               <a:rPr lang="it-IT" smtClean="0"/>
-              <a:t>27/03/2026</a:t>
+              <a:t>31/03/2026</a:t>
             </a:fld>
             <a:endParaRPr lang="it-IT"/>
           </a:p>
@@ -3462,7 +3462,7 @@
           <a:p>
             <a:fld id="{12B2C755-0381-446C-8FF6-9D93CC4F5EBA}" type="datetimeFigureOut">
               <a:rPr lang="it-IT" smtClean="0"/>
-              <a:t>27/03/2026</a:t>
+              <a:t>31/03/2026</a:t>
             </a:fld>
             <a:endParaRPr lang="it-IT"/>
           </a:p>
@@ -3795,7 +3795,7 @@
           <a:p>
             <a:fld id="{12B2C755-0381-446C-8FF6-9D93CC4F5EBA}" type="datetimeFigureOut">
               <a:rPr lang="it-IT" smtClean="0"/>
-              <a:t>27/03/2026</a:t>
+              <a:t>31/03/2026</a:t>
             </a:fld>
             <a:endParaRPr lang="it-IT"/>
           </a:p>
@@ -4246,7 +4246,7 @@
           <a:p>
             <a:fld id="{12B2C755-0381-446C-8FF6-9D93CC4F5EBA}" type="datetimeFigureOut">
               <a:rPr lang="it-IT" smtClean="0"/>
-              <a:t>27/03/2026</a:t>
+              <a:t>31/03/2026</a:t>
             </a:fld>
             <a:endParaRPr lang="it-IT"/>
           </a:p>
@@ -4364,7 +4364,7 @@
           <a:p>
             <a:fld id="{12B2C755-0381-446C-8FF6-9D93CC4F5EBA}" type="datetimeFigureOut">
               <a:rPr lang="it-IT" smtClean="0"/>
-              <a:t>27/03/2026</a:t>
+              <a:t>31/03/2026</a:t>
             </a:fld>
             <a:endParaRPr lang="it-IT"/>
           </a:p>
@@ -4459,7 +4459,7 @@
           <a:p>
             <a:fld id="{12B2C755-0381-446C-8FF6-9D93CC4F5EBA}" type="datetimeFigureOut">
               <a:rPr lang="it-IT" smtClean="0"/>
-              <a:t>27/03/2026</a:t>
+              <a:t>31/03/2026</a:t>
             </a:fld>
             <a:endParaRPr lang="it-IT"/>
           </a:p>
@@ -4746,7 +4746,7 @@
           <a:p>
             <a:fld id="{12B2C755-0381-446C-8FF6-9D93CC4F5EBA}" type="datetimeFigureOut">
               <a:rPr lang="it-IT" smtClean="0"/>
-              <a:t>27/03/2026</a:t>
+              <a:t>31/03/2026</a:t>
             </a:fld>
             <a:endParaRPr lang="it-IT"/>
           </a:p>
@@ -5075,7 +5075,7 @@
           <a:p>
             <a:fld id="{12B2C755-0381-446C-8FF6-9D93CC4F5EBA}" type="datetimeFigureOut">
               <a:rPr lang="it-IT" smtClean="0"/>
-              <a:t>27/03/2026</a:t>
+              <a:t>31/03/2026</a:t>
             </a:fld>
             <a:endParaRPr lang="it-IT"/>
           </a:p>
@@ -5336,7 +5336,7 @@
           <a:p>
             <a:fld id="{12B2C755-0381-446C-8FF6-9D93CC4F5EBA}" type="datetimeFigureOut">
               <a:rPr lang="it-IT" smtClean="0"/>
-              <a:t>27/03/2026</a:t>
+              <a:t>31/03/2026</a:t>
             </a:fld>
             <a:endParaRPr lang="it-IT" dirty="0"/>
           </a:p>
@@ -8649,8 +8649,8 @@
           <a:chExt cx="0" cy="0"/>
         </a:xfrm>
       </p:grpSpPr>
-      <mc:AlternateContent xmlns:mc="http://schemas.openxmlformats.org/markup-compatibility/2006">
-        <mc:Choice xmlns:a14="http://schemas.microsoft.com/office/drawing/2010/main" Requires="a14">
+      <mc:AlternateContent xmlns:mc="http://schemas.openxmlformats.org/markup-compatibility/2006" xmlns:a14="http://schemas.microsoft.com/office/drawing/2010/main">
+        <mc:Choice Requires="a14">
           <p:sp>
             <p:nvSpPr>
               <p:cNvPr id="4" name="Titolo 1">
@@ -8759,7 +8759,7 @@
             </p:txBody>
           </p:sp>
         </mc:Choice>
-        <mc:Fallback>
+        <mc:Fallback xmlns="">
           <p:sp>
             <p:nvSpPr>
               <p:cNvPr id="4" name="Titolo 1">
@@ -10413,6 +10413,54 @@
           </a:prstGeom>
         </p:spPr>
       </p:pic>
+      <p:sp>
+        <p:nvSpPr>
+          <p:cNvPr id="3" name="CasellaDiTesto 2">
+            <a:extLst>
+              <a:ext uri="{FF2B5EF4-FFF2-40B4-BE49-F238E27FC236}">
+                <a16:creationId xmlns:a16="http://schemas.microsoft.com/office/drawing/2014/main" id="{6DBAA5E6-9546-A078-A564-895CA5AD8E69}"/>
+              </a:ext>
+            </a:extLst>
+          </p:cNvPr>
+          <p:cNvSpPr txBox="1"/>
+          <p:nvPr/>
+        </p:nvSpPr>
+        <p:spPr>
+          <a:xfrm>
+            <a:off x="1027416" y="5578867"/>
+            <a:ext cx="2938409" cy="923330"/>
+          </a:xfrm>
+          <a:prstGeom prst="rect">
+            <a:avLst/>
+          </a:prstGeom>
+          <a:noFill/>
+        </p:spPr>
+        <p:txBody>
+          <a:bodyPr wrap="square" rtlCol="0">
+            <a:spAutoFit/>
+          </a:bodyPr>
+          <a:lstStyle/>
+          <a:p>
+            <a:r>
+              <a:rPr lang="en-US" dirty="0"/>
+              <a:t>Mean error is: 1.74e-01</a:t>
+            </a:r>
+          </a:p>
+          <a:p>
+            <a:r>
+              <a:rPr lang="en-US" dirty="0"/>
+              <a:t>Median error is: 9.19e-02</a:t>
+            </a:r>
+          </a:p>
+          <a:p>
+            <a:r>
+              <a:rPr lang="en-US" dirty="0"/>
+              <a:t>A bin is large 2.24e-01</a:t>
+            </a:r>
+            <a:endParaRPr lang="it-IT" dirty="0"/>
+          </a:p>
+        </p:txBody>
+      </p:sp>
     </p:spTree>
     <p:extLst>
       <p:ext uri="{BB962C8B-B14F-4D97-AF65-F5344CB8AC3E}">

--- a/Seminar.pptx
+++ b/Seminar.pptx
@@ -5,7 +5,7 @@
     <p:sldMasterId id="2147483684" r:id="rId1"/>
   </p:sldMasterIdLst>
   <p:notesMasterIdLst>
-    <p:notesMasterId r:id="rId20"/>
+    <p:notesMasterId r:id="rId22"/>
   </p:notesMasterIdLst>
   <p:sldIdLst>
     <p:sldId id="276" r:id="rId2"/>
@@ -17,15 +17,17 @@
     <p:sldId id="333" r:id="rId8"/>
     <p:sldId id="334" r:id="rId9"/>
     <p:sldId id="335" r:id="rId10"/>
-    <p:sldId id="336" r:id="rId11"/>
-    <p:sldId id="337" r:id="rId12"/>
-    <p:sldId id="338" r:id="rId13"/>
-    <p:sldId id="328" r:id="rId14"/>
-    <p:sldId id="339" r:id="rId15"/>
-    <p:sldId id="340" r:id="rId16"/>
-    <p:sldId id="327" r:id="rId17"/>
-    <p:sldId id="289" r:id="rId18"/>
-    <p:sldId id="290" r:id="rId19"/>
+    <p:sldId id="341" r:id="rId11"/>
+    <p:sldId id="342" r:id="rId12"/>
+    <p:sldId id="336" r:id="rId13"/>
+    <p:sldId id="337" r:id="rId14"/>
+    <p:sldId id="338" r:id="rId15"/>
+    <p:sldId id="328" r:id="rId16"/>
+    <p:sldId id="339" r:id="rId17"/>
+    <p:sldId id="340" r:id="rId18"/>
+    <p:sldId id="327" r:id="rId19"/>
+    <p:sldId id="289" r:id="rId20"/>
+    <p:sldId id="290" r:id="rId21"/>
   </p:sldIdLst>
   <p:sldSz cx="12192000" cy="6858000"/>
   <p:notesSz cx="6858000" cy="9144000"/>
@@ -2132,7 +2134,7 @@
           <a:p>
             <a:fld id="{FAF9D2FB-70D2-43E7-9793-86D8D2F82197}" type="datetimeFigureOut">
               <a:rPr lang="it-IT" smtClean="0"/>
-              <a:t>31/03/2026</a:t>
+              <a:t>03/04/2026</a:t>
             </a:fld>
             <a:endParaRPr lang="it-IT"/>
           </a:p>
@@ -2567,7 +2569,7 @@
           <a:p>
             <a:fld id="{12B2C755-0381-446C-8FF6-9D93CC4F5EBA}" type="datetimeFigureOut">
               <a:rPr lang="it-IT" smtClean="0"/>
-              <a:t>31/03/2026</a:t>
+              <a:t>03/04/2026</a:t>
             </a:fld>
             <a:endParaRPr lang="it-IT"/>
           </a:p>
@@ -2838,7 +2840,7 @@
           <a:p>
             <a:fld id="{12B2C755-0381-446C-8FF6-9D93CC4F5EBA}" type="datetimeFigureOut">
               <a:rPr lang="it-IT" smtClean="0"/>
-              <a:t>31/03/2026</a:t>
+              <a:t>03/04/2026</a:t>
             </a:fld>
             <a:endParaRPr lang="it-IT"/>
           </a:p>
@@ -3018,7 +3020,7 @@
           <a:p>
             <a:fld id="{12B2C755-0381-446C-8FF6-9D93CC4F5EBA}" type="datetimeFigureOut">
               <a:rPr lang="it-IT" smtClean="0"/>
-              <a:t>31/03/2026</a:t>
+              <a:t>03/04/2026</a:t>
             </a:fld>
             <a:endParaRPr lang="it-IT"/>
           </a:p>
@@ -3203,7 +3205,7 @@
           <a:p>
             <a:fld id="{12B2C755-0381-446C-8FF6-9D93CC4F5EBA}" type="datetimeFigureOut">
               <a:rPr lang="it-IT" smtClean="0"/>
-              <a:t>31/03/2026</a:t>
+              <a:t>03/04/2026</a:t>
             </a:fld>
             <a:endParaRPr lang="it-IT"/>
           </a:p>
@@ -3462,7 +3464,7 @@
           <a:p>
             <a:fld id="{12B2C755-0381-446C-8FF6-9D93CC4F5EBA}" type="datetimeFigureOut">
               <a:rPr lang="it-IT" smtClean="0"/>
-              <a:t>31/03/2026</a:t>
+              <a:t>03/04/2026</a:t>
             </a:fld>
             <a:endParaRPr lang="it-IT"/>
           </a:p>
@@ -3795,7 +3797,7 @@
           <a:p>
             <a:fld id="{12B2C755-0381-446C-8FF6-9D93CC4F5EBA}" type="datetimeFigureOut">
               <a:rPr lang="it-IT" smtClean="0"/>
-              <a:t>31/03/2026</a:t>
+              <a:t>03/04/2026</a:t>
             </a:fld>
             <a:endParaRPr lang="it-IT"/>
           </a:p>
@@ -4246,7 +4248,7 @@
           <a:p>
             <a:fld id="{12B2C755-0381-446C-8FF6-9D93CC4F5EBA}" type="datetimeFigureOut">
               <a:rPr lang="it-IT" smtClean="0"/>
-              <a:t>31/03/2026</a:t>
+              <a:t>03/04/2026</a:t>
             </a:fld>
             <a:endParaRPr lang="it-IT"/>
           </a:p>
@@ -4364,7 +4366,7 @@
           <a:p>
             <a:fld id="{12B2C755-0381-446C-8FF6-9D93CC4F5EBA}" type="datetimeFigureOut">
               <a:rPr lang="it-IT" smtClean="0"/>
-              <a:t>31/03/2026</a:t>
+              <a:t>03/04/2026</a:t>
             </a:fld>
             <a:endParaRPr lang="it-IT"/>
           </a:p>
@@ -4459,7 +4461,7 @@
           <a:p>
             <a:fld id="{12B2C755-0381-446C-8FF6-9D93CC4F5EBA}" type="datetimeFigureOut">
               <a:rPr lang="it-IT" smtClean="0"/>
-              <a:t>31/03/2026</a:t>
+              <a:t>03/04/2026</a:t>
             </a:fld>
             <a:endParaRPr lang="it-IT"/>
           </a:p>
@@ -4746,7 +4748,7 @@
           <a:p>
             <a:fld id="{12B2C755-0381-446C-8FF6-9D93CC4F5EBA}" type="datetimeFigureOut">
               <a:rPr lang="it-IT" smtClean="0"/>
-              <a:t>31/03/2026</a:t>
+              <a:t>03/04/2026</a:t>
             </a:fld>
             <a:endParaRPr lang="it-IT"/>
           </a:p>
@@ -5075,7 +5077,7 @@
           <a:p>
             <a:fld id="{12B2C755-0381-446C-8FF6-9D93CC4F5EBA}" type="datetimeFigureOut">
               <a:rPr lang="it-IT" smtClean="0"/>
-              <a:t>31/03/2026</a:t>
+              <a:t>03/04/2026</a:t>
             </a:fld>
             <a:endParaRPr lang="it-IT"/>
           </a:p>
@@ -5336,7 +5338,7 @@
           <a:p>
             <a:fld id="{12B2C755-0381-446C-8FF6-9D93CC4F5EBA}" type="datetimeFigureOut">
               <a:rPr lang="it-IT" smtClean="0"/>
-              <a:t>31/03/2026</a:t>
+              <a:t>03/04/2026</a:t>
             </a:fld>
             <a:endParaRPr lang="it-IT" dirty="0"/>
           </a:p>
@@ -6032,6 +6034,2949 @@
         <p:cNvPr id="1" name="">
           <a:extLst>
             <a:ext uri="{FF2B5EF4-FFF2-40B4-BE49-F238E27FC236}">
+              <a16:creationId xmlns:a16="http://schemas.microsoft.com/office/drawing/2014/main" id="{A6A709EA-131B-B57F-63BA-21D02EBA0546}"/>
+            </a:ext>
+          </a:extLst>
+        </p:cNvPr>
+        <p:cNvGrpSpPr/>
+        <p:nvPr/>
+      </p:nvGrpSpPr>
+      <p:grpSpPr>
+        <a:xfrm>
+          <a:off x="0" y="0"/>
+          <a:ext cx="0" cy="0"/>
+          <a:chOff x="0" y="0"/>
+          <a:chExt cx="0" cy="0"/>
+        </a:xfrm>
+      </p:grpSpPr>
+      <p:sp>
+        <p:nvSpPr>
+          <p:cNvPr id="4" name="Titolo 1">
+            <a:extLst>
+              <a:ext uri="{FF2B5EF4-FFF2-40B4-BE49-F238E27FC236}">
+                <a16:creationId xmlns:a16="http://schemas.microsoft.com/office/drawing/2014/main" id="{5C51A6BC-0F35-D7AF-E6EF-EA386233D02C}"/>
+              </a:ext>
+            </a:extLst>
+          </p:cNvPr>
+          <p:cNvSpPr>
+            <a:spLocks noGrp="1"/>
+          </p:cNvSpPr>
+          <p:nvPr>
+            <p:ph type="title"/>
+          </p:nvPr>
+        </p:nvSpPr>
+        <p:spPr>
+          <a:xfrm>
+            <a:off x="642938" y="288925"/>
+            <a:ext cx="10227120" cy="1235075"/>
+          </a:xfrm>
+        </p:spPr>
+        <p:txBody>
+          <a:bodyPr>
+            <a:normAutofit fontScale="90000"/>
+          </a:bodyPr>
+          <a:lstStyle/>
+          <a:p>
+            <a:r>
+              <a:rPr lang="en-GB" noProof="0" dirty="0"/>
+              <a:t>Sample the posterior: Metropolis-Hasting</a:t>
+            </a:r>
+          </a:p>
+        </p:txBody>
+      </p:sp>
+      <p:sp>
+        <p:nvSpPr>
+          <p:cNvPr id="11" name="CasellaDiTesto 10">
+            <a:extLst>
+              <a:ext uri="{FF2B5EF4-FFF2-40B4-BE49-F238E27FC236}">
+                <a16:creationId xmlns:a16="http://schemas.microsoft.com/office/drawing/2014/main" id="{12F8EF74-9E21-659A-4047-F3A690F59133}"/>
+              </a:ext>
+            </a:extLst>
+          </p:cNvPr>
+          <p:cNvSpPr txBox="1"/>
+          <p:nvPr/>
+        </p:nvSpPr>
+        <p:spPr>
+          <a:xfrm>
+            <a:off x="642938" y="1387012"/>
+            <a:ext cx="5599416" cy="646331"/>
+          </a:xfrm>
+          <a:prstGeom prst="rect">
+            <a:avLst/>
+          </a:prstGeom>
+          <a:noFill/>
+        </p:spPr>
+        <p:txBody>
+          <a:bodyPr wrap="square" rtlCol="0">
+            <a:spAutoFit/>
+          </a:bodyPr>
+          <a:lstStyle/>
+          <a:p>
+            <a:r>
+              <a:rPr lang="en-GB" noProof="0" dirty="0"/>
+              <a:t>Given a set of parameters we can now compute the posterior. How we find the set that maximise it?</a:t>
+            </a:r>
+          </a:p>
+        </p:txBody>
+      </p:sp>
+      <p:sp>
+        <p:nvSpPr>
+          <p:cNvPr id="12" name="CasellaDiTesto 11">
+            <a:extLst>
+              <a:ext uri="{FF2B5EF4-FFF2-40B4-BE49-F238E27FC236}">
+                <a16:creationId xmlns:a16="http://schemas.microsoft.com/office/drawing/2014/main" id="{DDF0CCD5-08FC-342A-6627-CB18EA533525}"/>
+              </a:ext>
+            </a:extLst>
+          </p:cNvPr>
+          <p:cNvSpPr txBox="1"/>
+          <p:nvPr/>
+        </p:nvSpPr>
+        <p:spPr>
+          <a:xfrm>
+            <a:off x="7071590" y="1330571"/>
+            <a:ext cx="2969232" cy="369332"/>
+          </a:xfrm>
+          <a:prstGeom prst="rect">
+            <a:avLst/>
+          </a:prstGeom>
+          <a:noFill/>
+        </p:spPr>
+        <p:txBody>
+          <a:bodyPr wrap="square" rtlCol="0">
+            <a:spAutoFit/>
+          </a:bodyPr>
+          <a:lstStyle/>
+          <a:p>
+            <a:r>
+              <a:rPr lang="en-GB" noProof="0" dirty="0"/>
+              <a:t>5D grid search: not smart</a:t>
+            </a:r>
+          </a:p>
+        </p:txBody>
+      </p:sp>
+      <p:sp>
+        <p:nvSpPr>
+          <p:cNvPr id="13" name="CasellaDiTesto 12">
+            <a:extLst>
+              <a:ext uri="{FF2B5EF4-FFF2-40B4-BE49-F238E27FC236}">
+                <a16:creationId xmlns:a16="http://schemas.microsoft.com/office/drawing/2014/main" id="{E5A1F16B-7E7A-923A-0D4F-C54C511CE3C7}"/>
+              </a:ext>
+            </a:extLst>
+          </p:cNvPr>
+          <p:cNvSpPr txBox="1"/>
+          <p:nvPr/>
+        </p:nvSpPr>
+        <p:spPr>
+          <a:xfrm>
+            <a:off x="6789051" y="1848677"/>
+            <a:ext cx="3534310" cy="369332"/>
+          </a:xfrm>
+          <a:prstGeom prst="rect">
+            <a:avLst/>
+          </a:prstGeom>
+          <a:noFill/>
+        </p:spPr>
+        <p:txBody>
+          <a:bodyPr wrap="square" rtlCol="0">
+            <a:spAutoFit/>
+          </a:bodyPr>
+          <a:lstStyle/>
+          <a:p>
+            <a:r>
+              <a:rPr lang="en-GB" noProof="0" dirty="0"/>
+              <a:t>Metropolis-Hasting algorithm!</a:t>
+            </a:r>
+          </a:p>
+        </p:txBody>
+      </p:sp>
+      <p:grpSp>
+        <p:nvGrpSpPr>
+          <p:cNvPr id="7" name="Gruppo 6">
+            <a:extLst>
+              <a:ext uri="{FF2B5EF4-FFF2-40B4-BE49-F238E27FC236}">
+                <a16:creationId xmlns:a16="http://schemas.microsoft.com/office/drawing/2014/main" id="{FD0F2383-342B-3434-6AB1-9F4306A5DD13}"/>
+              </a:ext>
+            </a:extLst>
+          </p:cNvPr>
+          <p:cNvGrpSpPr/>
+          <p:nvPr/>
+        </p:nvGrpSpPr>
+        <p:grpSpPr>
+          <a:xfrm>
+            <a:off x="5897366" y="2970441"/>
+            <a:ext cx="4972692" cy="3339101"/>
+            <a:chOff x="561427" y="2800792"/>
+            <a:chExt cx="4972692" cy="3339101"/>
+          </a:xfrm>
+        </p:grpSpPr>
+        <p:sp>
+          <p:nvSpPr>
+            <p:cNvPr id="6" name="Rettangolo con angoli arrotondati 5">
+              <a:extLst>
+                <a:ext uri="{FF2B5EF4-FFF2-40B4-BE49-F238E27FC236}">
+                  <a16:creationId xmlns:a16="http://schemas.microsoft.com/office/drawing/2014/main" id="{A30BD189-EF9D-D3A9-3AD2-EBABF5C689F7}"/>
+                </a:ext>
+              </a:extLst>
+            </p:cNvPr>
+            <p:cNvSpPr/>
+            <p:nvPr/>
+          </p:nvSpPr>
+          <p:spPr>
+            <a:xfrm>
+              <a:off x="561427" y="2800792"/>
+              <a:ext cx="4972692" cy="3339101"/>
+            </a:xfrm>
+            <a:prstGeom prst="roundRect">
+              <a:avLst/>
+            </a:prstGeom>
+            <a:solidFill>
+              <a:schemeClr val="accent2">
+                <a:lumMod val="60000"/>
+                <a:lumOff val="40000"/>
+              </a:schemeClr>
+            </a:solidFill>
+            <a:ln w="19050">
+              <a:solidFill>
+                <a:schemeClr val="tx2"/>
+              </a:solidFill>
+            </a:ln>
+          </p:spPr>
+          <p:style>
+            <a:lnRef idx="2">
+              <a:schemeClr val="accent1">
+                <a:shade val="15000"/>
+              </a:schemeClr>
+            </a:lnRef>
+            <a:fillRef idx="1">
+              <a:schemeClr val="accent1"/>
+            </a:fillRef>
+            <a:effectRef idx="0">
+              <a:schemeClr val="accent1"/>
+            </a:effectRef>
+            <a:fontRef idx="minor">
+              <a:schemeClr val="lt1"/>
+            </a:fontRef>
+          </p:style>
+          <p:txBody>
+            <a:bodyPr rtlCol="0" anchor="ctr"/>
+            <a:lstStyle/>
+            <a:p>
+              <a:pPr algn="ctr"/>
+              <a:endParaRPr lang="en-GB" noProof="0" dirty="0"/>
+            </a:p>
+          </p:txBody>
+        </p:sp>
+        <p:grpSp>
+          <p:nvGrpSpPr>
+            <p:cNvPr id="5" name="Gruppo 4">
+              <a:extLst>
+                <a:ext uri="{FF2B5EF4-FFF2-40B4-BE49-F238E27FC236}">
+                  <a16:creationId xmlns:a16="http://schemas.microsoft.com/office/drawing/2014/main" id="{09C5B222-6106-F366-B2D6-52FAC939C0ED}"/>
+                </a:ext>
+              </a:extLst>
+            </p:cNvPr>
+            <p:cNvGrpSpPr/>
+            <p:nvPr/>
+          </p:nvGrpSpPr>
+          <p:grpSpPr>
+            <a:xfrm>
+              <a:off x="1296030" y="2882993"/>
+              <a:ext cx="3503487" cy="1489120"/>
+              <a:chOff x="1282103" y="2402526"/>
+              <a:chExt cx="3503487" cy="1489120"/>
+            </a:xfrm>
+          </p:grpSpPr>
+          <mc:AlternateContent xmlns:mc="http://schemas.openxmlformats.org/markup-compatibility/2006">
+            <mc:Choice xmlns:a14="http://schemas.microsoft.com/office/drawing/2010/main" Requires="a14">
+              <p:sp>
+                <p:nvSpPr>
+                  <p:cNvPr id="14" name="CasellaDiTesto 13">
+                    <a:extLst>
+                      <a:ext uri="{FF2B5EF4-FFF2-40B4-BE49-F238E27FC236}">
+                        <a16:creationId xmlns:a16="http://schemas.microsoft.com/office/drawing/2014/main" id="{2169B44C-E4FE-97A2-5EED-B53CB2214923}"/>
+                      </a:ext>
+                    </a:extLst>
+                  </p:cNvPr>
+                  <p:cNvSpPr txBox="1"/>
+                  <p:nvPr/>
+                </p:nvSpPr>
+                <p:spPr>
+                  <a:xfrm>
+                    <a:off x="1282103" y="2968316"/>
+                    <a:ext cx="3503487" cy="923330"/>
+                  </a:xfrm>
+                  <a:prstGeom prst="rect">
+                    <a:avLst/>
+                  </a:prstGeom>
+                  <a:noFill/>
+                  <a:ln>
+                    <a:noFill/>
+                  </a:ln>
+                </p:spPr>
+                <p:txBody>
+                  <a:bodyPr wrap="square" rtlCol="0">
+                    <a:spAutoFit/>
+                  </a:bodyPr>
+                  <a:lstStyle/>
+                  <a:p>
+                    <a:pPr marL="285750" indent="-285750">
+                      <a:buFont typeface="Arial" panose="020B0604020202020204" pitchFamily="34" charset="0"/>
+                      <a:buChar char="•"/>
+                    </a:pPr>
+                    <a:r>
+                      <a:rPr lang="en-GB" noProof="0" dirty="0"/>
+                      <a:t>Sample a </a:t>
+                    </a:r>
+                    <a14:m>
+                      <m:oMath xmlns:m="http://schemas.openxmlformats.org/officeDocument/2006/math">
+                        <m:sSub>
+                          <m:sSubPr>
+                            <m:ctrlPr>
+                              <a:rPr lang="en-GB" i="1" noProof="0" smtClean="0">
+                                <a:latin typeface="Cambria Math" panose="02040503050406030204" pitchFamily="18" charset="0"/>
+                              </a:rPr>
+                            </m:ctrlPr>
+                          </m:sSubPr>
+                          <m:e>
+                            <m:r>
+                              <a:rPr lang="en-GB" i="1" noProof="0" smtClean="0">
+                                <a:latin typeface="Cambria Math" panose="02040503050406030204" pitchFamily="18" charset="0"/>
+                              </a:rPr>
+                              <m:t>𝜃</m:t>
+                            </m:r>
+                          </m:e>
+                          <m:sub>
+                            <m:r>
+                              <a:rPr lang="en-GB" i="1" noProof="0" smtClean="0">
+                                <a:latin typeface="Cambria Math" panose="02040503050406030204" pitchFamily="18" charset="0"/>
+                              </a:rPr>
+                              <m:t>𝑡</m:t>
+                            </m:r>
+                          </m:sub>
+                        </m:sSub>
+                      </m:oMath>
+                    </a14:m>
+                    <a:r>
+                      <a:rPr lang="en-GB" noProof="0" dirty="0"/>
+                      <a:t> from </a:t>
+                    </a:r>
+                    <a14:m>
+                      <m:oMath xmlns:m="http://schemas.openxmlformats.org/officeDocument/2006/math">
+                        <m:r>
+                          <a:rPr lang="en-GB" i="1" noProof="0" smtClean="0">
+                            <a:latin typeface="Cambria Math" panose="02040503050406030204" pitchFamily="18" charset="0"/>
+                          </a:rPr>
+                          <m:t>𝑞</m:t>
+                        </m:r>
+                        <m:d>
+                          <m:dPr>
+                            <m:ctrlPr>
+                              <a:rPr lang="en-GB" i="1" noProof="0" smtClean="0">
+                                <a:latin typeface="Cambria Math" panose="02040503050406030204" pitchFamily="18" charset="0"/>
+                              </a:rPr>
+                            </m:ctrlPr>
+                          </m:dPr>
+                          <m:e>
+                            <m:sSub>
+                              <m:sSubPr>
+                                <m:ctrlPr>
+                                  <a:rPr lang="en-GB" i="1" noProof="0" smtClean="0">
+                                    <a:latin typeface="Cambria Math" panose="02040503050406030204" pitchFamily="18" charset="0"/>
+                                  </a:rPr>
+                                </m:ctrlPr>
+                              </m:sSubPr>
+                              <m:e>
+                                <m:r>
+                                  <a:rPr lang="en-GB" i="1" noProof="0" smtClean="0">
+                                    <a:latin typeface="Cambria Math" panose="02040503050406030204" pitchFamily="18" charset="0"/>
+                                  </a:rPr>
+                                  <m:t>𝜃</m:t>
+                                </m:r>
+                              </m:e>
+                              <m:sub>
+                                <m:r>
+                                  <a:rPr lang="en-GB" i="1" noProof="0" smtClean="0">
+                                    <a:latin typeface="Cambria Math" panose="02040503050406030204" pitchFamily="18" charset="0"/>
+                                  </a:rPr>
+                                  <m:t>0</m:t>
+                                </m:r>
+                              </m:sub>
+                            </m:sSub>
+                          </m:e>
+                        </m:d>
+                      </m:oMath>
+                    </a14:m>
+                    <a:endParaRPr lang="en-GB" noProof="0" dirty="0"/>
+                  </a:p>
+                  <a:p>
+                    <a:pPr marL="285750" indent="-285750">
+                      <a:buFont typeface="Arial" panose="020B0604020202020204" pitchFamily="34" charset="0"/>
+                      <a:buChar char="•"/>
+                    </a:pPr>
+                    <a:r>
+                      <a:rPr lang="en-GB" noProof="0" dirty="0"/>
+                      <a:t>Compute the posterior on </a:t>
+                    </a:r>
+                    <a14:m>
+                      <m:oMath xmlns:m="http://schemas.openxmlformats.org/officeDocument/2006/math">
+                        <m:sSub>
+                          <m:sSubPr>
+                            <m:ctrlPr>
+                              <a:rPr lang="en-GB" i="1" noProof="0" smtClean="0">
+                                <a:latin typeface="Cambria Math" panose="02040503050406030204" pitchFamily="18" charset="0"/>
+                              </a:rPr>
+                            </m:ctrlPr>
+                          </m:sSubPr>
+                          <m:e>
+                            <m:r>
+                              <a:rPr lang="en-GB" i="1" noProof="0" smtClean="0">
+                                <a:latin typeface="Cambria Math" panose="02040503050406030204" pitchFamily="18" charset="0"/>
+                              </a:rPr>
+                              <m:t>𝜃</m:t>
+                            </m:r>
+                          </m:e>
+                          <m:sub>
+                            <m:r>
+                              <a:rPr lang="en-GB" i="1" noProof="0" smtClean="0">
+                                <a:latin typeface="Cambria Math" panose="02040503050406030204" pitchFamily="18" charset="0"/>
+                              </a:rPr>
+                              <m:t>𝑡</m:t>
+                            </m:r>
+                          </m:sub>
+                        </m:sSub>
+                      </m:oMath>
+                    </a14:m>
+                    <a:endParaRPr lang="en-GB" noProof="0" dirty="0"/>
+                  </a:p>
+                  <a:p>
+                    <a:pPr marL="285750" indent="-285750">
+                      <a:buFont typeface="Arial" panose="020B0604020202020204" pitchFamily="34" charset="0"/>
+                      <a:buChar char="•"/>
+                    </a:pPr>
+                    <a:r>
+                      <a:rPr lang="en-GB" noProof="0" dirty="0"/>
+                      <a:t>Check acceptance rule</a:t>
+                    </a:r>
+                  </a:p>
+                </p:txBody>
+              </p:sp>
+            </mc:Choice>
+            <mc:Fallback>
+              <p:sp>
+                <p:nvSpPr>
+                  <p:cNvPr id="14" name="CasellaDiTesto 13">
+                    <a:extLst>
+                      <a:ext uri="{FF2B5EF4-FFF2-40B4-BE49-F238E27FC236}">
+                        <a16:creationId xmlns:a16="http://schemas.microsoft.com/office/drawing/2014/main" id="{2169B44C-E4FE-97A2-5EED-B53CB2214923}"/>
+                      </a:ext>
+                    </a:extLst>
+                  </p:cNvPr>
+                  <p:cNvSpPr txBox="1">
+                    <a:spLocks noRot="1" noChangeAspect="1" noMove="1" noResize="1" noEditPoints="1" noAdjustHandles="1" noChangeArrowheads="1" noChangeShapeType="1" noTextEdit="1"/>
+                  </p:cNvSpPr>
+                  <p:nvPr/>
+                </p:nvSpPr>
+                <p:spPr>
+                  <a:xfrm>
+                    <a:off x="1282103" y="2968316"/>
+                    <a:ext cx="3503487" cy="923330"/>
+                  </a:xfrm>
+                  <a:prstGeom prst="rect">
+                    <a:avLst/>
+                  </a:prstGeom>
+                  <a:blipFill>
+                    <a:blip r:embed="rId2"/>
+                    <a:stretch>
+                      <a:fillRect l="-1217" t="-3974" b="-9934"/>
+                    </a:stretch>
+                  </a:blipFill>
+                  <a:ln>
+                    <a:noFill/>
+                  </a:ln>
+                </p:spPr>
+                <p:txBody>
+                  <a:bodyPr/>
+                  <a:lstStyle/>
+                  <a:p>
+                    <a:r>
+                      <a:rPr lang="it-IT">
+                        <a:noFill/>
+                      </a:rPr>
+                      <a:t> </a:t>
+                    </a:r>
+                  </a:p>
+                </p:txBody>
+              </p:sp>
+            </mc:Fallback>
+          </mc:AlternateContent>
+          <p:sp>
+            <p:nvSpPr>
+              <p:cNvPr id="2" name="CasellaDiTesto 1">
+                <a:extLst>
+                  <a:ext uri="{FF2B5EF4-FFF2-40B4-BE49-F238E27FC236}">
+                    <a16:creationId xmlns:a16="http://schemas.microsoft.com/office/drawing/2014/main" id="{8977DA7B-6721-F73B-DDA2-A476F3FC1B93}"/>
+                  </a:ext>
+                </a:extLst>
+              </p:cNvPr>
+              <p:cNvSpPr txBox="1"/>
+              <p:nvPr/>
+            </p:nvSpPr>
+            <p:spPr>
+              <a:xfrm>
+                <a:off x="2386575" y="2402526"/>
+                <a:ext cx="1294543" cy="369332"/>
+              </a:xfrm>
+              <a:prstGeom prst="rect">
+                <a:avLst/>
+              </a:prstGeom>
+              <a:noFill/>
+              <a:ln>
+                <a:noFill/>
+              </a:ln>
+            </p:spPr>
+            <p:txBody>
+              <a:bodyPr wrap="square" rtlCol="0">
+                <a:spAutoFit/>
+              </a:bodyPr>
+              <a:lstStyle/>
+              <a:p>
+                <a:r>
+                  <a:rPr lang="en-GB" noProof="0" dirty="0"/>
+                  <a:t>Base idea</a:t>
+                </a:r>
+              </a:p>
+            </p:txBody>
+          </p:sp>
+        </p:grpSp>
+      </p:grpSp>
+      <p:sp>
+        <p:nvSpPr>
+          <p:cNvPr id="21" name="CasellaDiTesto 20">
+            <a:extLst>
+              <a:ext uri="{FF2B5EF4-FFF2-40B4-BE49-F238E27FC236}">
+                <a16:creationId xmlns:a16="http://schemas.microsoft.com/office/drawing/2014/main" id="{E89AFCA9-31CE-F7CC-A988-B4D4C9AB9C6D}"/>
+              </a:ext>
+            </a:extLst>
+          </p:cNvPr>
+          <p:cNvSpPr txBox="1"/>
+          <p:nvPr/>
+        </p:nvSpPr>
+        <p:spPr>
+          <a:xfrm>
+            <a:off x="642938" y="2703991"/>
+            <a:ext cx="4972692" cy="369332"/>
+          </a:xfrm>
+          <a:prstGeom prst="rect">
+            <a:avLst/>
+          </a:prstGeom>
+          <a:noFill/>
+        </p:spPr>
+        <p:txBody>
+          <a:bodyPr wrap="square" rtlCol="0">
+            <a:spAutoFit/>
+          </a:bodyPr>
+          <a:lstStyle/>
+          <a:p>
+            <a:pPr algn="ctr"/>
+            <a:r>
+              <a:rPr lang="en-GB" noProof="0" dirty="0"/>
+              <a:t>Acceptance rule:</a:t>
+            </a:r>
+          </a:p>
+        </p:txBody>
+      </p:sp>
+      <mc:AlternateContent xmlns:mc="http://schemas.openxmlformats.org/markup-compatibility/2006">
+        <mc:Choice xmlns:a14="http://schemas.microsoft.com/office/drawing/2010/main" Requires="a14">
+          <p:sp>
+            <p:nvSpPr>
+              <p:cNvPr id="25" name="CasellaDiTesto 24">
+                <a:extLst>
+                  <a:ext uri="{FF2B5EF4-FFF2-40B4-BE49-F238E27FC236}">
+                    <a16:creationId xmlns:a16="http://schemas.microsoft.com/office/drawing/2014/main" id="{54EDC2D4-A02D-7376-B725-F025E7E5DF0E}"/>
+                  </a:ext>
+                </a:extLst>
+              </p:cNvPr>
+              <p:cNvSpPr txBox="1"/>
+              <p:nvPr/>
+            </p:nvSpPr>
+            <p:spPr>
+              <a:xfrm>
+                <a:off x="1583023" y="3350322"/>
+                <a:ext cx="3092522" cy="871842"/>
+              </a:xfrm>
+              <a:prstGeom prst="rect">
+                <a:avLst/>
+              </a:prstGeom>
+              <a:noFill/>
+            </p:spPr>
+            <p:txBody>
+              <a:bodyPr wrap="square" rtlCol="0">
+                <a:spAutoFit/>
+              </a:bodyPr>
+              <a:lstStyle/>
+              <a:p>
+                <a14:m>
+                  <m:oMathPara xmlns:m="http://schemas.openxmlformats.org/officeDocument/2006/math">
+                    <m:oMathParaPr>
+                      <m:jc m:val="centerGroup"/>
+                    </m:oMathParaPr>
+                    <m:oMath xmlns:m="http://schemas.openxmlformats.org/officeDocument/2006/math">
+                      <m:f>
+                        <m:fPr>
+                          <m:ctrlPr>
+                            <a:rPr lang="it-IT" sz="2400" i="1" dirty="0" smtClean="0">
+                              <a:latin typeface="Cambria Math" panose="02040503050406030204" pitchFamily="18" charset="0"/>
+                            </a:rPr>
+                          </m:ctrlPr>
+                        </m:fPr>
+                        <m:num>
+                          <m:r>
+                            <a:rPr lang="it-IT" sz="2400" i="1" dirty="0" smtClean="0">
+                              <a:latin typeface="Cambria Math" panose="02040503050406030204" pitchFamily="18" charset="0"/>
+                            </a:rPr>
+                            <m:t>𝑝</m:t>
+                          </m:r>
+                          <m:d>
+                            <m:dPr>
+                              <m:ctrlPr>
+                                <a:rPr lang="it-IT" sz="2400" i="1" dirty="0" smtClean="0">
+                                  <a:latin typeface="Cambria Math" panose="02040503050406030204" pitchFamily="18" charset="0"/>
+                                </a:rPr>
+                              </m:ctrlPr>
+                            </m:dPr>
+                            <m:e>
+                              <m:sSub>
+                                <m:sSubPr>
+                                  <m:ctrlPr>
+                                    <a:rPr lang="it-IT" sz="2400" i="1" dirty="0" err="1" smtClean="0">
+                                      <a:latin typeface="Cambria Math" panose="02040503050406030204" pitchFamily="18" charset="0"/>
+                                    </a:rPr>
+                                  </m:ctrlPr>
+                                </m:sSubPr>
+                                <m:e>
+                                  <m:r>
+                                    <a:rPr lang="it-IT" sz="2400" i="1" dirty="0" smtClean="0">
+                                      <a:latin typeface="Cambria Math" panose="02040503050406030204" pitchFamily="18" charset="0"/>
+                                    </a:rPr>
+                                    <m:t>𝜃</m:t>
+                                  </m:r>
+                                </m:e>
+                                <m:sub>
+                                  <m:r>
+                                    <a:rPr lang="it-IT" sz="2400" i="1" dirty="0" err="1" smtClean="0">
+                                      <a:latin typeface="Cambria Math" panose="02040503050406030204" pitchFamily="18" charset="0"/>
+                                    </a:rPr>
+                                    <m:t>𝑡</m:t>
+                                  </m:r>
+                                </m:sub>
+                              </m:sSub>
+                            </m:e>
+                          </m:d>
+                        </m:num>
+                        <m:den>
+                          <m:r>
+                            <a:rPr lang="it-IT" sz="2400" i="1" dirty="0" smtClean="0">
+                              <a:latin typeface="Cambria Math" panose="02040503050406030204" pitchFamily="18" charset="0"/>
+                            </a:rPr>
+                            <m:t>𝑝</m:t>
+                          </m:r>
+                          <m:d>
+                            <m:dPr>
+                              <m:ctrlPr>
+                                <a:rPr lang="it-IT" sz="2400" i="1" dirty="0" smtClean="0">
+                                  <a:latin typeface="Cambria Math" panose="02040503050406030204" pitchFamily="18" charset="0"/>
+                                </a:rPr>
+                              </m:ctrlPr>
+                            </m:dPr>
+                            <m:e>
+                              <m:sSub>
+                                <m:sSubPr>
+                                  <m:ctrlPr>
+                                    <a:rPr lang="it-IT" sz="2400" i="1" dirty="0" smtClean="0">
+                                      <a:latin typeface="Cambria Math" panose="02040503050406030204" pitchFamily="18" charset="0"/>
+                                    </a:rPr>
+                                  </m:ctrlPr>
+                                </m:sSubPr>
+                                <m:e>
+                                  <m:r>
+                                    <a:rPr lang="it-IT" sz="2400" i="1" dirty="0" smtClean="0">
+                                      <a:latin typeface="Cambria Math" panose="02040503050406030204" pitchFamily="18" charset="0"/>
+                                    </a:rPr>
+                                    <m:t>𝜃</m:t>
+                                  </m:r>
+                                </m:e>
+                                <m:sub>
+                                  <m:r>
+                                    <a:rPr lang="it-IT" sz="2400" i="1" dirty="0" smtClean="0">
+                                      <a:latin typeface="Cambria Math" panose="02040503050406030204" pitchFamily="18" charset="0"/>
+                                    </a:rPr>
+                                    <m:t>0</m:t>
+                                  </m:r>
+                                </m:sub>
+                              </m:sSub>
+                            </m:e>
+                          </m:d>
+                        </m:den>
+                      </m:f>
+                      <m:r>
+                        <a:rPr lang="it-IT" sz="2400" i="1" dirty="0" smtClean="0">
+                          <a:latin typeface="Cambria Math" panose="02040503050406030204" pitchFamily="18" charset="0"/>
+                        </a:rPr>
+                        <m:t>⋅</m:t>
+                      </m:r>
+                      <m:f>
+                        <m:fPr>
+                          <m:ctrlPr>
+                            <a:rPr lang="it-IT" sz="2400" i="1" dirty="0" smtClean="0">
+                              <a:latin typeface="Cambria Math" panose="02040503050406030204" pitchFamily="18" charset="0"/>
+                            </a:rPr>
+                          </m:ctrlPr>
+                        </m:fPr>
+                        <m:num>
+                          <m:r>
+                            <a:rPr lang="it-IT" sz="2400" i="1" dirty="0" smtClean="0">
+                              <a:latin typeface="Cambria Math" panose="02040503050406030204" pitchFamily="18" charset="0"/>
+                            </a:rPr>
+                            <m:t>𝑞</m:t>
+                          </m:r>
+                          <m:d>
+                            <m:dPr>
+                              <m:ctrlPr>
+                                <a:rPr lang="it-IT" sz="2400" i="1" dirty="0" smtClean="0">
+                                  <a:latin typeface="Cambria Math" panose="02040503050406030204" pitchFamily="18" charset="0"/>
+                                </a:rPr>
+                              </m:ctrlPr>
+                            </m:dPr>
+                            <m:e>
+                              <m:sSub>
+                                <m:sSubPr>
+                                  <m:ctrlPr>
+                                    <a:rPr lang="it-IT" sz="2400" i="1" dirty="0" err="1" smtClean="0">
+                                      <a:latin typeface="Cambria Math" panose="02040503050406030204" pitchFamily="18" charset="0"/>
+                                    </a:rPr>
+                                  </m:ctrlPr>
+                                </m:sSubPr>
+                                <m:e>
+                                  <m:r>
+                                    <a:rPr lang="it-IT" sz="2400" i="1" dirty="0" smtClean="0">
+                                      <a:latin typeface="Cambria Math" panose="02040503050406030204" pitchFamily="18" charset="0"/>
+                                    </a:rPr>
+                                    <m:t>𝜃</m:t>
+                                  </m:r>
+                                </m:e>
+                                <m:sub>
+                                  <m:r>
+                                    <a:rPr lang="it-IT" sz="2400" i="1" dirty="0" err="1" smtClean="0">
+                                      <a:latin typeface="Cambria Math" panose="02040503050406030204" pitchFamily="18" charset="0"/>
+                                    </a:rPr>
+                                    <m:t>𝑡</m:t>
+                                  </m:r>
+                                </m:sub>
+                              </m:sSub>
+                            </m:e>
+                            <m:e>
+                              <m:sSub>
+                                <m:sSubPr>
+                                  <m:ctrlPr>
+                                    <a:rPr lang="it-IT" sz="2400" i="1" dirty="0" smtClean="0">
+                                      <a:latin typeface="Cambria Math" panose="02040503050406030204" pitchFamily="18" charset="0"/>
+                                    </a:rPr>
+                                  </m:ctrlPr>
+                                </m:sSubPr>
+                                <m:e>
+                                  <m:r>
+                                    <a:rPr lang="it-IT" sz="2400" i="1" dirty="0" smtClean="0">
+                                      <a:latin typeface="Cambria Math" panose="02040503050406030204" pitchFamily="18" charset="0"/>
+                                    </a:rPr>
+                                    <m:t>𝜃</m:t>
+                                  </m:r>
+                                </m:e>
+                                <m:sub>
+                                  <m:r>
+                                    <a:rPr lang="it-IT" sz="2400" i="1" dirty="0" smtClean="0">
+                                      <a:latin typeface="Cambria Math" panose="02040503050406030204" pitchFamily="18" charset="0"/>
+                                    </a:rPr>
+                                    <m:t>0</m:t>
+                                  </m:r>
+                                </m:sub>
+                              </m:sSub>
+                            </m:e>
+                          </m:d>
+                        </m:num>
+                        <m:den>
+                          <m:r>
+                            <a:rPr lang="it-IT" sz="2400" i="1" dirty="0" smtClean="0">
+                              <a:latin typeface="Cambria Math" panose="02040503050406030204" pitchFamily="18" charset="0"/>
+                            </a:rPr>
+                            <m:t>𝑞</m:t>
+                          </m:r>
+                          <m:d>
+                            <m:dPr>
+                              <m:ctrlPr>
+                                <a:rPr lang="it-IT" sz="2400" i="1" dirty="0" smtClean="0">
+                                  <a:latin typeface="Cambria Math" panose="02040503050406030204" pitchFamily="18" charset="0"/>
+                                </a:rPr>
+                              </m:ctrlPr>
+                            </m:dPr>
+                            <m:e>
+                              <m:sSub>
+                                <m:sSubPr>
+                                  <m:ctrlPr>
+                                    <a:rPr lang="it-IT" sz="2400" i="1" dirty="0" smtClean="0">
+                                      <a:latin typeface="Cambria Math" panose="02040503050406030204" pitchFamily="18" charset="0"/>
+                                    </a:rPr>
+                                  </m:ctrlPr>
+                                </m:sSubPr>
+                                <m:e>
+                                  <m:r>
+                                    <a:rPr lang="it-IT" sz="2400" i="1" dirty="0" smtClean="0">
+                                      <a:latin typeface="Cambria Math" panose="02040503050406030204" pitchFamily="18" charset="0"/>
+                                    </a:rPr>
+                                    <m:t>𝜃</m:t>
+                                  </m:r>
+                                </m:e>
+                                <m:sub>
+                                  <m:r>
+                                    <a:rPr lang="it-IT" sz="2400" i="1" dirty="0" smtClean="0">
+                                      <a:latin typeface="Cambria Math" panose="02040503050406030204" pitchFamily="18" charset="0"/>
+                                    </a:rPr>
+                                    <m:t>0</m:t>
+                                  </m:r>
+                                </m:sub>
+                              </m:sSub>
+                            </m:e>
+                            <m:e>
+                              <m:sSub>
+                                <m:sSubPr>
+                                  <m:ctrlPr>
+                                    <a:rPr lang="it-IT" sz="2400" i="1" dirty="0" err="1" smtClean="0">
+                                      <a:latin typeface="Cambria Math" panose="02040503050406030204" pitchFamily="18" charset="0"/>
+                                    </a:rPr>
+                                  </m:ctrlPr>
+                                </m:sSubPr>
+                                <m:e>
+                                  <m:r>
+                                    <a:rPr lang="it-IT" sz="2400" i="1" dirty="0" smtClean="0">
+                                      <a:latin typeface="Cambria Math" panose="02040503050406030204" pitchFamily="18" charset="0"/>
+                                    </a:rPr>
+                                    <m:t>𝜃</m:t>
+                                  </m:r>
+                                </m:e>
+                                <m:sub>
+                                  <m:r>
+                                    <a:rPr lang="it-IT" sz="2400" i="1" dirty="0" err="1" smtClean="0">
+                                      <a:latin typeface="Cambria Math" panose="02040503050406030204" pitchFamily="18" charset="0"/>
+                                    </a:rPr>
+                                    <m:t>𝑡</m:t>
+                                  </m:r>
+                                </m:sub>
+                              </m:sSub>
+                            </m:e>
+                          </m:d>
+                        </m:den>
+                      </m:f>
+                      <m:r>
+                        <a:rPr lang="it-IT" sz="2400" i="1" dirty="0" smtClean="0">
+                          <a:latin typeface="Cambria Math" panose="02040503050406030204" pitchFamily="18" charset="0"/>
+                        </a:rPr>
+                        <m:t>≥</m:t>
+                      </m:r>
+                      <m:r>
+                        <a:rPr lang="it-IT" sz="2400" i="1" dirty="0" smtClean="0">
+                          <a:latin typeface="Cambria Math" panose="02040503050406030204" pitchFamily="18" charset="0"/>
+                        </a:rPr>
+                        <m:t>𝑎</m:t>
+                      </m:r>
+                    </m:oMath>
+                  </m:oMathPara>
+                </a14:m>
+                <a:endParaRPr lang="it-IT" dirty="0"/>
+              </a:p>
+            </p:txBody>
+          </p:sp>
+        </mc:Choice>
+        <mc:Fallback>
+          <p:sp>
+            <p:nvSpPr>
+              <p:cNvPr id="25" name="CasellaDiTesto 24">
+                <a:extLst>
+                  <a:ext uri="{FF2B5EF4-FFF2-40B4-BE49-F238E27FC236}">
+                    <a16:creationId xmlns:a16="http://schemas.microsoft.com/office/drawing/2014/main" id="{54EDC2D4-A02D-7376-B725-F025E7E5DF0E}"/>
+                  </a:ext>
+                </a:extLst>
+              </p:cNvPr>
+              <p:cNvSpPr txBox="1">
+                <a:spLocks noRot="1" noChangeAspect="1" noMove="1" noResize="1" noEditPoints="1" noAdjustHandles="1" noChangeArrowheads="1" noChangeShapeType="1" noTextEdit="1"/>
+              </p:cNvSpPr>
+              <p:nvPr/>
+            </p:nvSpPr>
+            <p:spPr>
+              <a:xfrm>
+                <a:off x="1583023" y="3350322"/>
+                <a:ext cx="3092522" cy="871842"/>
+              </a:xfrm>
+              <a:prstGeom prst="rect">
+                <a:avLst/>
+              </a:prstGeom>
+              <a:blipFill>
+                <a:blip r:embed="rId3"/>
+                <a:stretch>
+                  <a:fillRect/>
+                </a:stretch>
+              </a:blipFill>
+            </p:spPr>
+            <p:txBody>
+              <a:bodyPr/>
+              <a:lstStyle/>
+              <a:p>
+                <a:r>
+                  <a:rPr lang="it-IT">
+                    <a:noFill/>
+                  </a:rPr>
+                  <a:t> </a:t>
+                </a:r>
+              </a:p>
+            </p:txBody>
+          </p:sp>
+        </mc:Fallback>
+      </mc:AlternateContent>
+      <p:sp>
+        <p:nvSpPr>
+          <p:cNvPr id="26" name="CasellaDiTesto 25">
+            <a:extLst>
+              <a:ext uri="{FF2B5EF4-FFF2-40B4-BE49-F238E27FC236}">
+                <a16:creationId xmlns:a16="http://schemas.microsoft.com/office/drawing/2014/main" id="{7438D668-3937-97AC-8A3F-858F6B864F35}"/>
+              </a:ext>
+            </a:extLst>
+          </p:cNvPr>
+          <p:cNvSpPr txBox="1"/>
+          <p:nvPr/>
+        </p:nvSpPr>
+        <p:spPr>
+          <a:xfrm>
+            <a:off x="619887" y="4668938"/>
+            <a:ext cx="1984116" cy="369332"/>
+          </a:xfrm>
+          <a:prstGeom prst="rect">
+            <a:avLst/>
+          </a:prstGeom>
+          <a:noFill/>
+        </p:spPr>
+        <p:txBody>
+          <a:bodyPr wrap="square" rtlCol="0">
+            <a:spAutoFit/>
+          </a:bodyPr>
+          <a:lstStyle/>
+          <a:p>
+            <a:r>
+              <a:rPr lang="it-IT" dirty="0" err="1"/>
+              <a:t>Posterior</a:t>
+            </a:r>
+            <a:r>
+              <a:rPr lang="it-IT" dirty="0"/>
+              <a:t> </a:t>
+            </a:r>
+            <a:r>
+              <a:rPr lang="it-IT" dirty="0" err="1"/>
+              <a:t>values</a:t>
+            </a:r>
+            <a:endParaRPr lang="it-IT" dirty="0"/>
+          </a:p>
+        </p:txBody>
+      </p:sp>
+      <mc:AlternateContent xmlns:mc="http://schemas.openxmlformats.org/markup-compatibility/2006">
+        <mc:Choice xmlns:a14="http://schemas.microsoft.com/office/drawing/2010/main" Requires="a14">
+          <p:sp>
+            <p:nvSpPr>
+              <p:cNvPr id="27" name="CasellaDiTesto 26">
+                <a:extLst>
+                  <a:ext uri="{FF2B5EF4-FFF2-40B4-BE49-F238E27FC236}">
+                    <a16:creationId xmlns:a16="http://schemas.microsoft.com/office/drawing/2014/main" id="{DD88C369-CEB0-18E8-04F2-3B1F119C9D7E}"/>
+                  </a:ext>
+                </a:extLst>
+              </p:cNvPr>
+              <p:cNvSpPr txBox="1"/>
+              <p:nvPr/>
+            </p:nvSpPr>
+            <p:spPr>
+              <a:xfrm>
+                <a:off x="3754655" y="4528068"/>
+                <a:ext cx="1984117" cy="646331"/>
+              </a:xfrm>
+              <a:prstGeom prst="rect">
+                <a:avLst/>
+              </a:prstGeom>
+              <a:noFill/>
+            </p:spPr>
+            <p:txBody>
+              <a:bodyPr wrap="square" rtlCol="0">
+                <a:spAutoFit/>
+              </a:bodyPr>
+              <a:lstStyle/>
+              <a:p>
+                <a:r>
+                  <a:rPr lang="it-IT" dirty="0"/>
+                  <a:t>Random number from </a:t>
+                </a:r>
+                <a14:m>
+                  <m:oMath xmlns:m="http://schemas.openxmlformats.org/officeDocument/2006/math">
+                    <m:d>
+                      <m:dPr>
+                        <m:begChr m:val="["/>
+                        <m:endChr m:val="]"/>
+                        <m:ctrlPr>
+                          <a:rPr lang="it-IT" i="1" dirty="0" smtClean="0">
+                            <a:latin typeface="Cambria Math" panose="02040503050406030204" pitchFamily="18" charset="0"/>
+                          </a:rPr>
+                        </m:ctrlPr>
+                      </m:dPr>
+                      <m:e>
+                        <m:r>
+                          <a:rPr lang="it-IT" i="1" dirty="0" smtClean="0">
+                            <a:latin typeface="Cambria Math" panose="02040503050406030204" pitchFamily="18" charset="0"/>
+                          </a:rPr>
+                          <m:t>0,1</m:t>
+                        </m:r>
+                      </m:e>
+                    </m:d>
+                  </m:oMath>
+                </a14:m>
+                <a:endParaRPr lang="it-IT" dirty="0"/>
+              </a:p>
+            </p:txBody>
+          </p:sp>
+        </mc:Choice>
+        <mc:Fallback>
+          <p:sp>
+            <p:nvSpPr>
+              <p:cNvPr id="27" name="CasellaDiTesto 26">
+                <a:extLst>
+                  <a:ext uri="{FF2B5EF4-FFF2-40B4-BE49-F238E27FC236}">
+                    <a16:creationId xmlns:a16="http://schemas.microsoft.com/office/drawing/2014/main" id="{DD88C369-CEB0-18E8-04F2-3B1F119C9D7E}"/>
+                  </a:ext>
+                </a:extLst>
+              </p:cNvPr>
+              <p:cNvSpPr txBox="1">
+                <a:spLocks noRot="1" noChangeAspect="1" noMove="1" noResize="1" noEditPoints="1" noAdjustHandles="1" noChangeArrowheads="1" noChangeShapeType="1" noTextEdit="1"/>
+              </p:cNvSpPr>
+              <p:nvPr/>
+            </p:nvSpPr>
+            <p:spPr>
+              <a:xfrm>
+                <a:off x="3754655" y="4528068"/>
+                <a:ext cx="1984117" cy="646331"/>
+              </a:xfrm>
+              <a:prstGeom prst="rect">
+                <a:avLst/>
+              </a:prstGeom>
+              <a:blipFill>
+                <a:blip r:embed="rId4"/>
+                <a:stretch>
+                  <a:fillRect l="-2769" t="-5660" r="-4308" b="-14151"/>
+                </a:stretch>
+              </a:blipFill>
+            </p:spPr>
+            <p:txBody>
+              <a:bodyPr/>
+              <a:lstStyle/>
+              <a:p>
+                <a:r>
+                  <a:rPr lang="it-IT">
+                    <a:noFill/>
+                  </a:rPr>
+                  <a:t> </a:t>
+                </a:r>
+              </a:p>
+            </p:txBody>
+          </p:sp>
+        </mc:Fallback>
+      </mc:AlternateContent>
+      <p:cxnSp>
+        <p:nvCxnSpPr>
+          <p:cNvPr id="29" name="Connettore 2 28">
+            <a:extLst>
+              <a:ext uri="{FF2B5EF4-FFF2-40B4-BE49-F238E27FC236}">
+                <a16:creationId xmlns:a16="http://schemas.microsoft.com/office/drawing/2014/main" id="{D4F58DB6-8FC9-D716-F41B-F128ADB0279D}"/>
+              </a:ext>
+            </a:extLst>
+          </p:cNvPr>
+          <p:cNvCxnSpPr>
+            <a:stCxn id="26" idx="0"/>
+          </p:cNvCxnSpPr>
+          <p:nvPr/>
+        </p:nvCxnSpPr>
+        <p:spPr>
+          <a:xfrm flipV="1">
+            <a:off x="1611945" y="4294596"/>
+            <a:ext cx="196307" cy="374342"/>
+          </a:xfrm>
+          <a:prstGeom prst="straightConnector1">
+            <a:avLst/>
+          </a:prstGeom>
+          <a:ln w="19050">
+            <a:tailEnd type="triangle"/>
+          </a:ln>
+        </p:spPr>
+        <p:style>
+          <a:lnRef idx="1">
+            <a:schemeClr val="accent1"/>
+          </a:lnRef>
+          <a:fillRef idx="0">
+            <a:schemeClr val="accent1"/>
+          </a:fillRef>
+          <a:effectRef idx="0">
+            <a:schemeClr val="accent1"/>
+          </a:effectRef>
+          <a:fontRef idx="minor">
+            <a:schemeClr val="tx1"/>
+          </a:fontRef>
+        </p:style>
+      </p:cxnSp>
+      <p:cxnSp>
+        <p:nvCxnSpPr>
+          <p:cNvPr id="31" name="Connettore 2 30">
+            <a:extLst>
+              <a:ext uri="{FF2B5EF4-FFF2-40B4-BE49-F238E27FC236}">
+                <a16:creationId xmlns:a16="http://schemas.microsoft.com/office/drawing/2014/main" id="{C0B910D8-A905-C7AE-C7CB-6871DFB1367F}"/>
+              </a:ext>
+            </a:extLst>
+          </p:cNvPr>
+          <p:cNvCxnSpPr>
+            <a:stCxn id="27" idx="0"/>
+          </p:cNvCxnSpPr>
+          <p:nvPr/>
+        </p:nvCxnSpPr>
+        <p:spPr>
+          <a:xfrm flipH="1" flipV="1">
+            <a:off x="4469258" y="4058290"/>
+            <a:ext cx="277456" cy="469778"/>
+          </a:xfrm>
+          <a:prstGeom prst="straightConnector1">
+            <a:avLst/>
+          </a:prstGeom>
+          <a:ln w="19050">
+            <a:tailEnd type="triangle"/>
+          </a:ln>
+        </p:spPr>
+        <p:style>
+          <a:lnRef idx="1">
+            <a:schemeClr val="accent1"/>
+          </a:lnRef>
+          <a:fillRef idx="0">
+            <a:schemeClr val="accent1"/>
+          </a:fillRef>
+          <a:effectRef idx="0">
+            <a:schemeClr val="accent1"/>
+          </a:effectRef>
+          <a:fontRef idx="minor">
+            <a:schemeClr val="tx1"/>
+          </a:fontRef>
+        </p:style>
+      </p:cxnSp>
+      <p:sp>
+        <p:nvSpPr>
+          <p:cNvPr id="32" name="CasellaDiTesto 31">
+            <a:extLst>
+              <a:ext uri="{FF2B5EF4-FFF2-40B4-BE49-F238E27FC236}">
+                <a16:creationId xmlns:a16="http://schemas.microsoft.com/office/drawing/2014/main" id="{EDAD2D24-A979-004D-65DB-FB172917C021}"/>
+              </a:ext>
+            </a:extLst>
+          </p:cNvPr>
+          <p:cNvSpPr txBox="1"/>
+          <p:nvPr/>
+        </p:nvSpPr>
+        <p:spPr>
+          <a:xfrm>
+            <a:off x="1469203" y="5676909"/>
+            <a:ext cx="3277510" cy="646331"/>
+          </a:xfrm>
+          <a:prstGeom prst="rect">
+            <a:avLst/>
+          </a:prstGeom>
+          <a:noFill/>
+        </p:spPr>
+        <p:txBody>
+          <a:bodyPr wrap="square" rtlCol="0">
+            <a:spAutoFit/>
+          </a:bodyPr>
+          <a:lstStyle/>
+          <a:p>
+            <a:r>
+              <a:rPr lang="it-IT" dirty="0" err="1"/>
+              <a:t>Proposal</a:t>
+            </a:r>
+            <a:r>
+              <a:rPr lang="it-IT" dirty="0"/>
+              <a:t> </a:t>
+            </a:r>
+            <a:r>
+              <a:rPr lang="it-IT" dirty="0" err="1"/>
+              <a:t>probability</a:t>
+            </a:r>
+            <a:r>
+              <a:rPr lang="it-IT" dirty="0"/>
+              <a:t> ratio</a:t>
+            </a:r>
+          </a:p>
+          <a:p>
+            <a:r>
+              <a:rPr lang="it-IT" dirty="0" err="1"/>
+              <a:t>ours</a:t>
+            </a:r>
+            <a:r>
+              <a:rPr lang="it-IT" dirty="0"/>
+              <a:t> </a:t>
+            </a:r>
+            <a:r>
+              <a:rPr lang="it-IT" dirty="0" err="1"/>
+              <a:t>is</a:t>
+            </a:r>
+            <a:r>
+              <a:rPr lang="it-IT" dirty="0"/>
+              <a:t> </a:t>
+            </a:r>
+            <a:r>
+              <a:rPr lang="it-IT" dirty="0" err="1"/>
+              <a:t>symmetric</a:t>
+            </a:r>
+            <a:r>
+              <a:rPr lang="it-IT" dirty="0"/>
+              <a:t> so it’s one</a:t>
+            </a:r>
+          </a:p>
+        </p:txBody>
+      </p:sp>
+      <p:cxnSp>
+        <p:nvCxnSpPr>
+          <p:cNvPr id="34" name="Connettore 2 33">
+            <a:extLst>
+              <a:ext uri="{FF2B5EF4-FFF2-40B4-BE49-F238E27FC236}">
+                <a16:creationId xmlns:a16="http://schemas.microsoft.com/office/drawing/2014/main" id="{D2BD93A3-7B59-EDA3-D3F3-0ED4357D2D23}"/>
+              </a:ext>
+            </a:extLst>
+          </p:cNvPr>
+          <p:cNvCxnSpPr>
+            <a:stCxn id="32" idx="0"/>
+          </p:cNvCxnSpPr>
+          <p:nvPr/>
+        </p:nvCxnSpPr>
+        <p:spPr>
+          <a:xfrm flipV="1">
+            <a:off x="3107958" y="4397338"/>
+            <a:ext cx="0" cy="1279571"/>
+          </a:xfrm>
+          <a:prstGeom prst="straightConnector1">
+            <a:avLst/>
+          </a:prstGeom>
+          <a:ln w="19050">
+            <a:tailEnd type="triangle"/>
+          </a:ln>
+        </p:spPr>
+        <p:style>
+          <a:lnRef idx="1">
+            <a:schemeClr val="accent1"/>
+          </a:lnRef>
+          <a:fillRef idx="0">
+            <a:schemeClr val="accent1"/>
+          </a:fillRef>
+          <a:effectRef idx="0">
+            <a:schemeClr val="accent1"/>
+          </a:effectRef>
+          <a:fontRef idx="minor">
+            <a:schemeClr val="tx1"/>
+          </a:fontRef>
+        </p:style>
+      </p:cxnSp>
+    </p:spTree>
+    <p:extLst>
+      <p:ext uri="{BB962C8B-B14F-4D97-AF65-F5344CB8AC3E}">
+        <p14:creationId xmlns:p14="http://schemas.microsoft.com/office/powerpoint/2010/main" val="1516767084"/>
+      </p:ext>
+    </p:extLst>
+  </p:cSld>
+  <p:clrMapOvr>
+    <a:masterClrMapping/>
+  </p:clrMapOvr>
+</p:sld>
+</file>
+
+<file path=ppt/slides/slide11.xml><?xml version="1.0" encoding="utf-8"?>
+<p:sld xmlns:a="http://schemas.openxmlformats.org/drawingml/2006/main" xmlns:r="http://schemas.openxmlformats.org/officeDocument/2006/relationships" xmlns:p="http://schemas.openxmlformats.org/presentationml/2006/main">
+  <p:cSld>
+    <p:spTree>
+      <p:nvGrpSpPr>
+        <p:cNvPr id="1" name="">
+          <a:extLst>
+            <a:ext uri="{FF2B5EF4-FFF2-40B4-BE49-F238E27FC236}">
+              <a16:creationId xmlns:a16="http://schemas.microsoft.com/office/drawing/2014/main" id="{AC4E0A42-1BDA-95DB-3596-2A4CC0886CBB}"/>
+            </a:ext>
+          </a:extLst>
+        </p:cNvPr>
+        <p:cNvGrpSpPr/>
+        <p:nvPr/>
+      </p:nvGrpSpPr>
+      <p:grpSpPr>
+        <a:xfrm>
+          <a:off x="0" y="0"/>
+          <a:ext cx="0" cy="0"/>
+          <a:chOff x="0" y="0"/>
+          <a:chExt cx="0" cy="0"/>
+        </a:xfrm>
+      </p:grpSpPr>
+      <p:sp>
+        <p:nvSpPr>
+          <p:cNvPr id="4" name="Titolo 1">
+            <a:extLst>
+              <a:ext uri="{FF2B5EF4-FFF2-40B4-BE49-F238E27FC236}">
+                <a16:creationId xmlns:a16="http://schemas.microsoft.com/office/drawing/2014/main" id="{9436042A-62BD-7C86-68A2-E7064A1FF756}"/>
+              </a:ext>
+            </a:extLst>
+          </p:cNvPr>
+          <p:cNvSpPr>
+            <a:spLocks noGrp="1"/>
+          </p:cNvSpPr>
+          <p:nvPr>
+            <p:ph type="title"/>
+          </p:nvPr>
+        </p:nvSpPr>
+        <p:spPr>
+          <a:xfrm>
+            <a:off x="642938" y="288925"/>
+            <a:ext cx="10227120" cy="1235075"/>
+          </a:xfrm>
+        </p:spPr>
+        <p:txBody>
+          <a:bodyPr>
+            <a:normAutofit fontScale="90000"/>
+          </a:bodyPr>
+          <a:lstStyle/>
+          <a:p>
+            <a:r>
+              <a:rPr lang="en-GB" noProof="0" dirty="0"/>
+              <a:t>Sample the posterior: Metropolis-Hasting</a:t>
+            </a:r>
+          </a:p>
+        </p:txBody>
+      </p:sp>
+      <p:sp>
+        <p:nvSpPr>
+          <p:cNvPr id="11" name="CasellaDiTesto 10">
+            <a:extLst>
+              <a:ext uri="{FF2B5EF4-FFF2-40B4-BE49-F238E27FC236}">
+                <a16:creationId xmlns:a16="http://schemas.microsoft.com/office/drawing/2014/main" id="{F640BC26-7DBB-C601-3BA3-CEB240343E69}"/>
+              </a:ext>
+            </a:extLst>
+          </p:cNvPr>
+          <p:cNvSpPr txBox="1"/>
+          <p:nvPr/>
+        </p:nvSpPr>
+        <p:spPr>
+          <a:xfrm>
+            <a:off x="642938" y="1387012"/>
+            <a:ext cx="5599416" cy="646331"/>
+          </a:xfrm>
+          <a:prstGeom prst="rect">
+            <a:avLst/>
+          </a:prstGeom>
+          <a:noFill/>
+        </p:spPr>
+        <p:txBody>
+          <a:bodyPr wrap="square" rtlCol="0">
+            <a:spAutoFit/>
+          </a:bodyPr>
+          <a:lstStyle/>
+          <a:p>
+            <a:r>
+              <a:rPr lang="en-GB" noProof="0" dirty="0"/>
+              <a:t>Given a set of parameters we can now compute the posterior. How we find the set that maximise it?</a:t>
+            </a:r>
+          </a:p>
+        </p:txBody>
+      </p:sp>
+      <p:sp>
+        <p:nvSpPr>
+          <p:cNvPr id="12" name="CasellaDiTesto 11">
+            <a:extLst>
+              <a:ext uri="{FF2B5EF4-FFF2-40B4-BE49-F238E27FC236}">
+                <a16:creationId xmlns:a16="http://schemas.microsoft.com/office/drawing/2014/main" id="{B8E43609-2821-778B-227E-987F93624D72}"/>
+              </a:ext>
+            </a:extLst>
+          </p:cNvPr>
+          <p:cNvSpPr txBox="1"/>
+          <p:nvPr/>
+        </p:nvSpPr>
+        <p:spPr>
+          <a:xfrm>
+            <a:off x="7071590" y="1330571"/>
+            <a:ext cx="2969232" cy="369332"/>
+          </a:xfrm>
+          <a:prstGeom prst="rect">
+            <a:avLst/>
+          </a:prstGeom>
+          <a:noFill/>
+        </p:spPr>
+        <p:txBody>
+          <a:bodyPr wrap="square" rtlCol="0">
+            <a:spAutoFit/>
+          </a:bodyPr>
+          <a:lstStyle/>
+          <a:p>
+            <a:r>
+              <a:rPr lang="en-GB" noProof="0" dirty="0"/>
+              <a:t>5D grid search: not smart</a:t>
+            </a:r>
+          </a:p>
+        </p:txBody>
+      </p:sp>
+      <p:sp>
+        <p:nvSpPr>
+          <p:cNvPr id="13" name="CasellaDiTesto 12">
+            <a:extLst>
+              <a:ext uri="{FF2B5EF4-FFF2-40B4-BE49-F238E27FC236}">
+                <a16:creationId xmlns:a16="http://schemas.microsoft.com/office/drawing/2014/main" id="{30FD41EB-A849-B0F7-466B-082DF6540164}"/>
+              </a:ext>
+            </a:extLst>
+          </p:cNvPr>
+          <p:cNvSpPr txBox="1"/>
+          <p:nvPr/>
+        </p:nvSpPr>
+        <p:spPr>
+          <a:xfrm>
+            <a:off x="6789051" y="1848677"/>
+            <a:ext cx="3534310" cy="369332"/>
+          </a:xfrm>
+          <a:prstGeom prst="rect">
+            <a:avLst/>
+          </a:prstGeom>
+          <a:noFill/>
+        </p:spPr>
+        <p:txBody>
+          <a:bodyPr wrap="square" rtlCol="0">
+            <a:spAutoFit/>
+          </a:bodyPr>
+          <a:lstStyle/>
+          <a:p>
+            <a:r>
+              <a:rPr lang="en-GB" noProof="0" dirty="0"/>
+              <a:t>Metropolis-Hasting algorithm!</a:t>
+            </a:r>
+          </a:p>
+        </p:txBody>
+      </p:sp>
+      <p:grpSp>
+        <p:nvGrpSpPr>
+          <p:cNvPr id="7" name="Gruppo 6">
+            <a:extLst>
+              <a:ext uri="{FF2B5EF4-FFF2-40B4-BE49-F238E27FC236}">
+                <a16:creationId xmlns:a16="http://schemas.microsoft.com/office/drawing/2014/main" id="{51756F0E-56D9-584F-4E5C-5372C05C8722}"/>
+              </a:ext>
+            </a:extLst>
+          </p:cNvPr>
+          <p:cNvGrpSpPr/>
+          <p:nvPr/>
+        </p:nvGrpSpPr>
+        <p:grpSpPr>
+          <a:xfrm>
+            <a:off x="5897366" y="2970441"/>
+            <a:ext cx="4972692" cy="3339101"/>
+            <a:chOff x="561427" y="2800792"/>
+            <a:chExt cx="4972692" cy="3339101"/>
+          </a:xfrm>
+        </p:grpSpPr>
+        <p:sp>
+          <p:nvSpPr>
+            <p:cNvPr id="6" name="Rettangolo con angoli arrotondati 5">
+              <a:extLst>
+                <a:ext uri="{FF2B5EF4-FFF2-40B4-BE49-F238E27FC236}">
+                  <a16:creationId xmlns:a16="http://schemas.microsoft.com/office/drawing/2014/main" id="{124C4BD0-D3AB-38FE-1791-84EC7637463D}"/>
+                </a:ext>
+              </a:extLst>
+            </p:cNvPr>
+            <p:cNvSpPr/>
+            <p:nvPr/>
+          </p:nvSpPr>
+          <p:spPr>
+            <a:xfrm>
+              <a:off x="561427" y="2800792"/>
+              <a:ext cx="4972692" cy="3339101"/>
+            </a:xfrm>
+            <a:prstGeom prst="roundRect">
+              <a:avLst/>
+            </a:prstGeom>
+            <a:solidFill>
+              <a:schemeClr val="accent2">
+                <a:lumMod val="60000"/>
+                <a:lumOff val="40000"/>
+              </a:schemeClr>
+            </a:solidFill>
+            <a:ln w="19050">
+              <a:solidFill>
+                <a:schemeClr val="tx2"/>
+              </a:solidFill>
+            </a:ln>
+          </p:spPr>
+          <p:style>
+            <a:lnRef idx="2">
+              <a:schemeClr val="accent1">
+                <a:shade val="15000"/>
+              </a:schemeClr>
+            </a:lnRef>
+            <a:fillRef idx="1">
+              <a:schemeClr val="accent1"/>
+            </a:fillRef>
+            <a:effectRef idx="0">
+              <a:schemeClr val="accent1"/>
+            </a:effectRef>
+            <a:fontRef idx="minor">
+              <a:schemeClr val="lt1"/>
+            </a:fontRef>
+          </p:style>
+          <p:txBody>
+            <a:bodyPr rtlCol="0" anchor="ctr"/>
+            <a:lstStyle/>
+            <a:p>
+              <a:pPr algn="ctr"/>
+              <a:endParaRPr lang="en-GB" noProof="0" dirty="0"/>
+            </a:p>
+          </p:txBody>
+        </p:sp>
+        <p:grpSp>
+          <p:nvGrpSpPr>
+            <p:cNvPr id="5" name="Gruppo 4">
+              <a:extLst>
+                <a:ext uri="{FF2B5EF4-FFF2-40B4-BE49-F238E27FC236}">
+                  <a16:creationId xmlns:a16="http://schemas.microsoft.com/office/drawing/2014/main" id="{85BBCC2F-CFEB-343B-04AE-EF1B10490C10}"/>
+                </a:ext>
+              </a:extLst>
+            </p:cNvPr>
+            <p:cNvGrpSpPr/>
+            <p:nvPr/>
+          </p:nvGrpSpPr>
+          <p:grpSpPr>
+            <a:xfrm>
+              <a:off x="656865" y="2882993"/>
+              <a:ext cx="4781817" cy="3174698"/>
+              <a:chOff x="642938" y="2402526"/>
+              <a:chExt cx="4781817" cy="3174698"/>
+            </a:xfrm>
+          </p:grpSpPr>
+          <mc:AlternateContent xmlns:mc="http://schemas.openxmlformats.org/markup-compatibility/2006">
+            <mc:Choice xmlns:a14="http://schemas.microsoft.com/office/drawing/2010/main" Requires="a14">
+              <p:sp>
+                <p:nvSpPr>
+                  <p:cNvPr id="14" name="CasellaDiTesto 13">
+                    <a:extLst>
+                      <a:ext uri="{FF2B5EF4-FFF2-40B4-BE49-F238E27FC236}">
+                        <a16:creationId xmlns:a16="http://schemas.microsoft.com/office/drawing/2014/main" id="{332E1F84-7556-0134-57AA-96CD0AC96D2C}"/>
+                      </a:ext>
+                    </a:extLst>
+                  </p:cNvPr>
+                  <p:cNvSpPr txBox="1"/>
+                  <p:nvPr/>
+                </p:nvSpPr>
+                <p:spPr>
+                  <a:xfrm>
+                    <a:off x="1282103" y="2968316"/>
+                    <a:ext cx="3503487" cy="923330"/>
+                  </a:xfrm>
+                  <a:prstGeom prst="rect">
+                    <a:avLst/>
+                  </a:prstGeom>
+                  <a:noFill/>
+                  <a:ln>
+                    <a:noFill/>
+                  </a:ln>
+                </p:spPr>
+                <p:txBody>
+                  <a:bodyPr wrap="square" rtlCol="0">
+                    <a:spAutoFit/>
+                  </a:bodyPr>
+                  <a:lstStyle/>
+                  <a:p>
+                    <a:pPr marL="285750" indent="-285750">
+                      <a:buFont typeface="Arial" panose="020B0604020202020204" pitchFamily="34" charset="0"/>
+                      <a:buChar char="•"/>
+                    </a:pPr>
+                    <a:r>
+                      <a:rPr lang="en-GB" noProof="0" dirty="0"/>
+                      <a:t>Sample a </a:t>
+                    </a:r>
+                    <a14:m>
+                      <m:oMath xmlns:m="http://schemas.openxmlformats.org/officeDocument/2006/math">
+                        <m:sSub>
+                          <m:sSubPr>
+                            <m:ctrlPr>
+                              <a:rPr lang="en-GB" i="1" noProof="0" smtClean="0">
+                                <a:latin typeface="Cambria Math" panose="02040503050406030204" pitchFamily="18" charset="0"/>
+                              </a:rPr>
+                            </m:ctrlPr>
+                          </m:sSubPr>
+                          <m:e>
+                            <m:r>
+                              <a:rPr lang="en-GB" i="1" noProof="0" smtClean="0">
+                                <a:latin typeface="Cambria Math" panose="02040503050406030204" pitchFamily="18" charset="0"/>
+                              </a:rPr>
+                              <m:t>𝜃</m:t>
+                            </m:r>
+                          </m:e>
+                          <m:sub>
+                            <m:r>
+                              <a:rPr lang="en-GB" i="1" noProof="0" smtClean="0">
+                                <a:latin typeface="Cambria Math" panose="02040503050406030204" pitchFamily="18" charset="0"/>
+                              </a:rPr>
+                              <m:t>𝑡</m:t>
+                            </m:r>
+                          </m:sub>
+                        </m:sSub>
+                      </m:oMath>
+                    </a14:m>
+                    <a:r>
+                      <a:rPr lang="en-GB" noProof="0" dirty="0"/>
+                      <a:t> from </a:t>
+                    </a:r>
+                    <a14:m>
+                      <m:oMath xmlns:m="http://schemas.openxmlformats.org/officeDocument/2006/math">
+                        <m:r>
+                          <a:rPr lang="en-GB" i="1" noProof="0" smtClean="0">
+                            <a:latin typeface="Cambria Math" panose="02040503050406030204" pitchFamily="18" charset="0"/>
+                          </a:rPr>
+                          <m:t>𝑞</m:t>
+                        </m:r>
+                        <m:d>
+                          <m:dPr>
+                            <m:ctrlPr>
+                              <a:rPr lang="en-GB" i="1" noProof="0" smtClean="0">
+                                <a:latin typeface="Cambria Math" panose="02040503050406030204" pitchFamily="18" charset="0"/>
+                              </a:rPr>
+                            </m:ctrlPr>
+                          </m:dPr>
+                          <m:e>
+                            <m:sSub>
+                              <m:sSubPr>
+                                <m:ctrlPr>
+                                  <a:rPr lang="en-GB" i="1" noProof="0" smtClean="0">
+                                    <a:latin typeface="Cambria Math" panose="02040503050406030204" pitchFamily="18" charset="0"/>
+                                  </a:rPr>
+                                </m:ctrlPr>
+                              </m:sSubPr>
+                              <m:e>
+                                <m:r>
+                                  <a:rPr lang="en-GB" i="1" noProof="0" smtClean="0">
+                                    <a:latin typeface="Cambria Math" panose="02040503050406030204" pitchFamily="18" charset="0"/>
+                                  </a:rPr>
+                                  <m:t>𝜃</m:t>
+                                </m:r>
+                              </m:e>
+                              <m:sub>
+                                <m:r>
+                                  <a:rPr lang="en-GB" i="1" noProof="0" smtClean="0">
+                                    <a:latin typeface="Cambria Math" panose="02040503050406030204" pitchFamily="18" charset="0"/>
+                                  </a:rPr>
+                                  <m:t>0</m:t>
+                                </m:r>
+                              </m:sub>
+                            </m:sSub>
+                          </m:e>
+                        </m:d>
+                      </m:oMath>
+                    </a14:m>
+                    <a:endParaRPr lang="en-GB" noProof="0" dirty="0"/>
+                  </a:p>
+                  <a:p>
+                    <a:pPr marL="285750" indent="-285750">
+                      <a:buFont typeface="Arial" panose="020B0604020202020204" pitchFamily="34" charset="0"/>
+                      <a:buChar char="•"/>
+                    </a:pPr>
+                    <a:r>
+                      <a:rPr lang="en-GB" noProof="0" dirty="0"/>
+                      <a:t>Compute the posterior on </a:t>
+                    </a:r>
+                    <a14:m>
+                      <m:oMath xmlns:m="http://schemas.openxmlformats.org/officeDocument/2006/math">
+                        <m:sSub>
+                          <m:sSubPr>
+                            <m:ctrlPr>
+                              <a:rPr lang="en-GB" i="1" noProof="0" smtClean="0">
+                                <a:latin typeface="Cambria Math" panose="02040503050406030204" pitchFamily="18" charset="0"/>
+                              </a:rPr>
+                            </m:ctrlPr>
+                          </m:sSubPr>
+                          <m:e>
+                            <m:r>
+                              <a:rPr lang="en-GB" i="1" noProof="0" smtClean="0">
+                                <a:latin typeface="Cambria Math" panose="02040503050406030204" pitchFamily="18" charset="0"/>
+                              </a:rPr>
+                              <m:t>𝜃</m:t>
+                            </m:r>
+                          </m:e>
+                          <m:sub>
+                            <m:r>
+                              <a:rPr lang="en-GB" i="1" noProof="0" smtClean="0">
+                                <a:latin typeface="Cambria Math" panose="02040503050406030204" pitchFamily="18" charset="0"/>
+                              </a:rPr>
+                              <m:t>𝑡</m:t>
+                            </m:r>
+                          </m:sub>
+                        </m:sSub>
+                      </m:oMath>
+                    </a14:m>
+                    <a:endParaRPr lang="en-GB" noProof="0" dirty="0"/>
+                  </a:p>
+                  <a:p>
+                    <a:pPr marL="285750" indent="-285750">
+                      <a:buFont typeface="Arial" panose="020B0604020202020204" pitchFamily="34" charset="0"/>
+                      <a:buChar char="•"/>
+                    </a:pPr>
+                    <a:r>
+                      <a:rPr lang="en-GB" noProof="0" dirty="0"/>
+                      <a:t>Check acceptance rule</a:t>
+                    </a:r>
+                  </a:p>
+                </p:txBody>
+              </p:sp>
+            </mc:Choice>
+            <mc:Fallback>
+              <p:sp>
+                <p:nvSpPr>
+                  <p:cNvPr id="14" name="CasellaDiTesto 13">
+                    <a:extLst>
+                      <a:ext uri="{FF2B5EF4-FFF2-40B4-BE49-F238E27FC236}">
+                        <a16:creationId xmlns:a16="http://schemas.microsoft.com/office/drawing/2014/main" id="{332E1F84-7556-0134-57AA-96CD0AC96D2C}"/>
+                      </a:ext>
+                    </a:extLst>
+                  </p:cNvPr>
+                  <p:cNvSpPr txBox="1">
+                    <a:spLocks noRot="1" noChangeAspect="1" noMove="1" noResize="1" noEditPoints="1" noAdjustHandles="1" noChangeArrowheads="1" noChangeShapeType="1" noTextEdit="1"/>
+                  </p:cNvSpPr>
+                  <p:nvPr/>
+                </p:nvSpPr>
+                <p:spPr>
+                  <a:xfrm>
+                    <a:off x="1282103" y="2968316"/>
+                    <a:ext cx="3503487" cy="923330"/>
+                  </a:xfrm>
+                  <a:prstGeom prst="rect">
+                    <a:avLst/>
+                  </a:prstGeom>
+                  <a:blipFill>
+                    <a:blip r:embed="rId2"/>
+                    <a:stretch>
+                      <a:fillRect l="-1217" t="-3974" b="-9934"/>
+                    </a:stretch>
+                  </a:blipFill>
+                  <a:ln>
+                    <a:noFill/>
+                  </a:ln>
+                </p:spPr>
+                <p:txBody>
+                  <a:bodyPr/>
+                  <a:lstStyle/>
+                  <a:p>
+                    <a:r>
+                      <a:rPr lang="it-IT">
+                        <a:noFill/>
+                      </a:rPr>
+                      <a:t> </a:t>
+                    </a:r>
+                  </a:p>
+                </p:txBody>
+              </p:sp>
+            </mc:Fallback>
+          </mc:AlternateContent>
+          <p:grpSp>
+            <p:nvGrpSpPr>
+              <p:cNvPr id="3" name="Gruppo 2">
+                <a:extLst>
+                  <a:ext uri="{FF2B5EF4-FFF2-40B4-BE49-F238E27FC236}">
+                    <a16:creationId xmlns:a16="http://schemas.microsoft.com/office/drawing/2014/main" id="{3D492A90-F670-A969-2BE4-5C0D0CBC8794}"/>
+                  </a:ext>
+                </a:extLst>
+              </p:cNvPr>
+              <p:cNvGrpSpPr/>
+              <p:nvPr/>
+            </p:nvGrpSpPr>
+            <p:grpSpPr>
+              <a:xfrm>
+                <a:off x="864688" y="4088104"/>
+                <a:ext cx="4338316" cy="646331"/>
+                <a:chOff x="740543" y="4035967"/>
+                <a:chExt cx="4338316" cy="646331"/>
+              </a:xfrm>
+            </p:grpSpPr>
+            <mc:AlternateContent xmlns:mc="http://schemas.openxmlformats.org/markup-compatibility/2006">
+              <mc:Choice xmlns:a14="http://schemas.microsoft.com/office/drawing/2010/main" Requires="a14">
+                <p:sp>
+                  <p:nvSpPr>
+                    <p:cNvPr id="15" name="CasellaDiTesto 14">
+                      <a:extLst>
+                        <a:ext uri="{FF2B5EF4-FFF2-40B4-BE49-F238E27FC236}">
+                          <a16:creationId xmlns:a16="http://schemas.microsoft.com/office/drawing/2014/main" id="{528A70A0-79FE-6960-C722-D9118CB60554}"/>
+                        </a:ext>
+                      </a:extLst>
+                    </p:cNvPr>
+                    <p:cNvSpPr txBox="1"/>
+                    <p:nvPr/>
+                  </p:nvSpPr>
+                  <p:spPr>
+                    <a:xfrm>
+                      <a:off x="740543" y="4035967"/>
+                      <a:ext cx="1684962" cy="646331"/>
+                    </a:xfrm>
+                    <a:prstGeom prst="rect">
+                      <a:avLst/>
+                    </a:prstGeom>
+                    <a:noFill/>
+                    <a:ln>
+                      <a:noFill/>
+                    </a:ln>
+                  </p:spPr>
+                  <p:txBody>
+                    <a:bodyPr wrap="square" rtlCol="0">
+                      <a:spAutoFit/>
+                    </a:bodyPr>
+                    <a:lstStyle/>
+                    <a:p>
+                      <a:r>
+                        <a:rPr lang="en-GB" noProof="0" dirty="0"/>
+                        <a:t>If true move to </a:t>
+                      </a:r>
+                      <a14:m>
+                        <m:oMath xmlns:m="http://schemas.openxmlformats.org/officeDocument/2006/math">
+                          <m:sSub>
+                            <m:sSubPr>
+                              <m:ctrlPr>
+                                <a:rPr lang="en-GB" i="1" noProof="0" smtClean="0">
+                                  <a:latin typeface="Cambria Math" panose="02040503050406030204" pitchFamily="18" charset="0"/>
+                                </a:rPr>
+                              </m:ctrlPr>
+                            </m:sSubPr>
+                            <m:e>
+                              <m:r>
+                                <a:rPr lang="en-GB" i="1" noProof="0" smtClean="0">
+                                  <a:latin typeface="Cambria Math" panose="02040503050406030204" pitchFamily="18" charset="0"/>
+                                </a:rPr>
+                                <m:t>𝜃</m:t>
+                              </m:r>
+                            </m:e>
+                            <m:sub>
+                              <m:r>
+                                <a:rPr lang="en-GB" i="1" noProof="0" smtClean="0">
+                                  <a:latin typeface="Cambria Math" panose="02040503050406030204" pitchFamily="18" charset="0"/>
+                                </a:rPr>
+                                <m:t>0</m:t>
+                              </m:r>
+                            </m:sub>
+                          </m:sSub>
+                          <m:r>
+                            <a:rPr lang="en-GB" i="1" noProof="0" smtClean="0">
+                              <a:latin typeface="Cambria Math" panose="02040503050406030204" pitchFamily="18" charset="0"/>
+                            </a:rPr>
+                            <m:t>=</m:t>
+                          </m:r>
+                          <m:sSub>
+                            <m:sSubPr>
+                              <m:ctrlPr>
+                                <a:rPr lang="en-GB" i="1" noProof="0" smtClean="0">
+                                  <a:latin typeface="Cambria Math" panose="02040503050406030204" pitchFamily="18" charset="0"/>
+                                </a:rPr>
+                              </m:ctrlPr>
+                            </m:sSubPr>
+                            <m:e>
+                              <m:r>
+                                <a:rPr lang="en-GB" i="1" noProof="0" smtClean="0">
+                                  <a:latin typeface="Cambria Math" panose="02040503050406030204" pitchFamily="18" charset="0"/>
+                                </a:rPr>
+                                <m:t>𝜃</m:t>
+                              </m:r>
+                            </m:e>
+                            <m:sub>
+                              <m:r>
+                                <a:rPr lang="en-GB" i="1" noProof="0" smtClean="0">
+                                  <a:latin typeface="Cambria Math" panose="02040503050406030204" pitchFamily="18" charset="0"/>
+                                </a:rPr>
+                                <m:t>𝑡</m:t>
+                              </m:r>
+                            </m:sub>
+                          </m:sSub>
+                        </m:oMath>
+                      </a14:m>
+                      <a:endParaRPr lang="en-GB" noProof="0" dirty="0"/>
+                    </a:p>
+                  </p:txBody>
+                </p:sp>
+              </mc:Choice>
+              <mc:Fallback>
+                <p:sp>
+                  <p:nvSpPr>
+                    <p:cNvPr id="15" name="CasellaDiTesto 14">
+                      <a:extLst>
+                        <a:ext uri="{FF2B5EF4-FFF2-40B4-BE49-F238E27FC236}">
+                          <a16:creationId xmlns:a16="http://schemas.microsoft.com/office/drawing/2014/main" id="{528A70A0-79FE-6960-C722-D9118CB60554}"/>
+                        </a:ext>
+                      </a:extLst>
+                    </p:cNvPr>
+                    <p:cNvSpPr txBox="1">
+                      <a:spLocks noRot="1" noChangeAspect="1" noMove="1" noResize="1" noEditPoints="1" noAdjustHandles="1" noChangeArrowheads="1" noChangeShapeType="1" noTextEdit="1"/>
+                    </p:cNvSpPr>
+                    <p:nvPr/>
+                  </p:nvSpPr>
+                  <p:spPr>
+                    <a:xfrm>
+                      <a:off x="740543" y="4035967"/>
+                      <a:ext cx="1684962" cy="646331"/>
+                    </a:xfrm>
+                    <a:prstGeom prst="rect">
+                      <a:avLst/>
+                    </a:prstGeom>
+                    <a:blipFill>
+                      <a:blip r:embed="rId3"/>
+                      <a:stretch>
+                        <a:fillRect l="-2888" t="-4717" b="-14151"/>
+                      </a:stretch>
+                    </a:blipFill>
+                    <a:ln>
+                      <a:noFill/>
+                    </a:ln>
+                  </p:spPr>
+                  <p:txBody>
+                    <a:bodyPr/>
+                    <a:lstStyle/>
+                    <a:p>
+                      <a:r>
+                        <a:rPr lang="it-IT">
+                          <a:noFill/>
+                        </a:rPr>
+                        <a:t> </a:t>
+                      </a:r>
+                    </a:p>
+                  </p:txBody>
+                </p:sp>
+              </mc:Fallback>
+            </mc:AlternateContent>
+            <mc:AlternateContent xmlns:mc="http://schemas.openxmlformats.org/markup-compatibility/2006">
+              <mc:Choice xmlns:a14="http://schemas.microsoft.com/office/drawing/2010/main" Requires="a14">
+                <p:sp>
+                  <p:nvSpPr>
+                    <p:cNvPr id="16" name="CasellaDiTesto 15">
+                      <a:extLst>
+                        <a:ext uri="{FF2B5EF4-FFF2-40B4-BE49-F238E27FC236}">
+                          <a16:creationId xmlns:a16="http://schemas.microsoft.com/office/drawing/2014/main" id="{451A85DE-B6D0-FCEC-9C0B-E79BDDA5F698}"/>
+                        </a:ext>
+                      </a:extLst>
+                    </p:cNvPr>
+                    <p:cNvSpPr txBox="1"/>
+                    <p:nvPr/>
+                  </p:nvSpPr>
+                  <p:spPr>
+                    <a:xfrm>
+                      <a:off x="3008616" y="4174466"/>
+                      <a:ext cx="2070243" cy="369332"/>
+                    </a:xfrm>
+                    <a:prstGeom prst="rect">
+                      <a:avLst/>
+                    </a:prstGeom>
+                    <a:noFill/>
+                    <a:ln>
+                      <a:noFill/>
+                    </a:ln>
+                  </p:spPr>
+                  <p:txBody>
+                    <a:bodyPr wrap="square" rtlCol="0">
+                      <a:spAutoFit/>
+                    </a:bodyPr>
+                    <a:lstStyle/>
+                    <a:p>
+                      <a:r>
+                        <a:rPr lang="en-GB" noProof="0" dirty="0"/>
+                        <a:t>If false stay at </a:t>
+                      </a:r>
+                      <a14:m>
+                        <m:oMath xmlns:m="http://schemas.openxmlformats.org/officeDocument/2006/math">
+                          <m:sSub>
+                            <m:sSubPr>
+                              <m:ctrlPr>
+                                <a:rPr lang="en-GB" i="1" noProof="0" smtClean="0">
+                                  <a:latin typeface="Cambria Math" panose="02040503050406030204" pitchFamily="18" charset="0"/>
+                                </a:rPr>
+                              </m:ctrlPr>
+                            </m:sSubPr>
+                            <m:e>
+                              <m:r>
+                                <a:rPr lang="en-GB" i="1" noProof="0" smtClean="0">
+                                  <a:latin typeface="Cambria Math" panose="02040503050406030204" pitchFamily="18" charset="0"/>
+                                </a:rPr>
+                                <m:t>𝜃</m:t>
+                              </m:r>
+                            </m:e>
+                            <m:sub>
+                              <m:r>
+                                <a:rPr lang="en-GB" i="1" noProof="0" smtClean="0">
+                                  <a:latin typeface="Cambria Math" panose="02040503050406030204" pitchFamily="18" charset="0"/>
+                                </a:rPr>
+                                <m:t>0</m:t>
+                              </m:r>
+                            </m:sub>
+                          </m:sSub>
+                        </m:oMath>
+                      </a14:m>
+                      <a:endParaRPr lang="en-GB" noProof="0" dirty="0"/>
+                    </a:p>
+                  </p:txBody>
+                </p:sp>
+              </mc:Choice>
+              <mc:Fallback>
+                <p:sp>
+                  <p:nvSpPr>
+                    <p:cNvPr id="16" name="CasellaDiTesto 15">
+                      <a:extLst>
+                        <a:ext uri="{FF2B5EF4-FFF2-40B4-BE49-F238E27FC236}">
+                          <a16:creationId xmlns:a16="http://schemas.microsoft.com/office/drawing/2014/main" id="{451A85DE-B6D0-FCEC-9C0B-E79BDDA5F698}"/>
+                        </a:ext>
+                      </a:extLst>
+                    </p:cNvPr>
+                    <p:cNvSpPr txBox="1">
+                      <a:spLocks noRot="1" noChangeAspect="1" noMove="1" noResize="1" noEditPoints="1" noAdjustHandles="1" noChangeArrowheads="1" noChangeShapeType="1" noTextEdit="1"/>
+                    </p:cNvSpPr>
+                    <p:nvPr/>
+                  </p:nvSpPr>
+                  <p:spPr>
+                    <a:xfrm>
+                      <a:off x="3008616" y="4174466"/>
+                      <a:ext cx="2070243" cy="369332"/>
+                    </a:xfrm>
+                    <a:prstGeom prst="rect">
+                      <a:avLst/>
+                    </a:prstGeom>
+                    <a:blipFill>
+                      <a:blip r:embed="rId4"/>
+                      <a:stretch>
+                        <a:fillRect l="-2655" t="-9836" b="-24590"/>
+                      </a:stretch>
+                    </a:blipFill>
+                    <a:ln>
+                      <a:noFill/>
+                    </a:ln>
+                  </p:spPr>
+                  <p:txBody>
+                    <a:bodyPr/>
+                    <a:lstStyle/>
+                    <a:p>
+                      <a:r>
+                        <a:rPr lang="it-IT">
+                          <a:noFill/>
+                        </a:rPr>
+                        <a:t> </a:t>
+                      </a:r>
+                    </a:p>
+                  </p:txBody>
+                </p:sp>
+              </mc:Fallback>
+            </mc:AlternateContent>
+          </p:grpSp>
+          <mc:AlternateContent xmlns:mc="http://schemas.openxmlformats.org/markup-compatibility/2006">
+            <mc:Choice xmlns:a14="http://schemas.microsoft.com/office/drawing/2010/main" Requires="a14">
+              <p:sp>
+                <p:nvSpPr>
+                  <p:cNvPr id="17" name="CasellaDiTesto 16">
+                    <a:extLst>
+                      <a:ext uri="{FF2B5EF4-FFF2-40B4-BE49-F238E27FC236}">
+                        <a16:creationId xmlns:a16="http://schemas.microsoft.com/office/drawing/2014/main" id="{2A1FBE9D-19ED-813F-9839-D741F5D4D85E}"/>
+                      </a:ext>
+                    </a:extLst>
+                  </p:cNvPr>
+                  <p:cNvSpPr txBox="1"/>
+                  <p:nvPr/>
+                </p:nvSpPr>
+                <p:spPr>
+                  <a:xfrm>
+                    <a:off x="642938" y="4930893"/>
+                    <a:ext cx="4781817" cy="646331"/>
+                  </a:xfrm>
+                  <a:prstGeom prst="rect">
+                    <a:avLst/>
+                  </a:prstGeom>
+                  <a:noFill/>
+                  <a:ln>
+                    <a:noFill/>
+                  </a:ln>
+                </p:spPr>
+                <p:txBody>
+                  <a:bodyPr wrap="square" rtlCol="0">
+                    <a:spAutoFit/>
+                  </a:bodyPr>
+                  <a:lstStyle/>
+                  <a:p>
+                    <a:pPr algn="ctr"/>
+                    <a:r>
+                      <a:rPr lang="en-GB" noProof="0" dirty="0"/>
+                      <a:t>In this way we will have the </a:t>
+                    </a:r>
+                    <a14:m>
+                      <m:oMath xmlns:m="http://schemas.openxmlformats.org/officeDocument/2006/math">
+                        <m:r>
+                          <a:rPr lang="en-GB" i="1" noProof="0" smtClean="0">
+                            <a:latin typeface="Cambria Math" panose="02040503050406030204" pitchFamily="18" charset="0"/>
+                          </a:rPr>
+                          <m:t>𝜃</m:t>
+                        </m:r>
+                      </m:oMath>
+                    </a14:m>
+                    <a:r>
+                      <a:rPr lang="en-GB" noProof="0" dirty="0"/>
+                      <a:t> with higher posterior more times so more probable! </a:t>
+                    </a:r>
+                  </a:p>
+                </p:txBody>
+              </p:sp>
+            </mc:Choice>
+            <mc:Fallback>
+              <p:sp>
+                <p:nvSpPr>
+                  <p:cNvPr id="17" name="CasellaDiTesto 16">
+                    <a:extLst>
+                      <a:ext uri="{FF2B5EF4-FFF2-40B4-BE49-F238E27FC236}">
+                        <a16:creationId xmlns:a16="http://schemas.microsoft.com/office/drawing/2014/main" id="{2A1FBE9D-19ED-813F-9839-D741F5D4D85E}"/>
+                      </a:ext>
+                    </a:extLst>
+                  </p:cNvPr>
+                  <p:cNvSpPr txBox="1">
+                    <a:spLocks noRot="1" noChangeAspect="1" noMove="1" noResize="1" noEditPoints="1" noAdjustHandles="1" noChangeArrowheads="1" noChangeShapeType="1" noTextEdit="1"/>
+                  </p:cNvSpPr>
+                  <p:nvPr/>
+                </p:nvSpPr>
+                <p:spPr>
+                  <a:xfrm>
+                    <a:off x="642938" y="4930893"/>
+                    <a:ext cx="4781817" cy="646331"/>
+                  </a:xfrm>
+                  <a:prstGeom prst="rect">
+                    <a:avLst/>
+                  </a:prstGeom>
+                  <a:blipFill>
+                    <a:blip r:embed="rId5"/>
+                    <a:stretch>
+                      <a:fillRect t="-5660" r="-1148" b="-14151"/>
+                    </a:stretch>
+                  </a:blipFill>
+                  <a:ln>
+                    <a:noFill/>
+                  </a:ln>
+                </p:spPr>
+                <p:txBody>
+                  <a:bodyPr/>
+                  <a:lstStyle/>
+                  <a:p>
+                    <a:r>
+                      <a:rPr lang="it-IT">
+                        <a:noFill/>
+                      </a:rPr>
+                      <a:t> </a:t>
+                    </a:r>
+                  </a:p>
+                </p:txBody>
+              </p:sp>
+            </mc:Fallback>
+          </mc:AlternateContent>
+          <p:sp>
+            <p:nvSpPr>
+              <p:cNvPr id="2" name="CasellaDiTesto 1">
+                <a:extLst>
+                  <a:ext uri="{FF2B5EF4-FFF2-40B4-BE49-F238E27FC236}">
+                    <a16:creationId xmlns:a16="http://schemas.microsoft.com/office/drawing/2014/main" id="{AFD19476-F926-FE1A-A565-4DE83D75FA93}"/>
+                  </a:ext>
+                </a:extLst>
+              </p:cNvPr>
+              <p:cNvSpPr txBox="1"/>
+              <p:nvPr/>
+            </p:nvSpPr>
+            <p:spPr>
+              <a:xfrm>
+                <a:off x="2386575" y="2402526"/>
+                <a:ext cx="1294543" cy="369332"/>
+              </a:xfrm>
+              <a:prstGeom prst="rect">
+                <a:avLst/>
+              </a:prstGeom>
+              <a:noFill/>
+              <a:ln>
+                <a:noFill/>
+              </a:ln>
+            </p:spPr>
+            <p:txBody>
+              <a:bodyPr wrap="square" rtlCol="0">
+                <a:spAutoFit/>
+              </a:bodyPr>
+              <a:lstStyle/>
+              <a:p>
+                <a:r>
+                  <a:rPr lang="en-GB" noProof="0" dirty="0"/>
+                  <a:t>Base idea</a:t>
+                </a:r>
+              </a:p>
+            </p:txBody>
+          </p:sp>
+        </p:grpSp>
+      </p:grpSp>
+      <p:sp>
+        <p:nvSpPr>
+          <p:cNvPr id="21" name="CasellaDiTesto 20">
+            <a:extLst>
+              <a:ext uri="{FF2B5EF4-FFF2-40B4-BE49-F238E27FC236}">
+                <a16:creationId xmlns:a16="http://schemas.microsoft.com/office/drawing/2014/main" id="{9DDF31EF-17D5-348D-32A4-26E8E4B806C2}"/>
+              </a:ext>
+            </a:extLst>
+          </p:cNvPr>
+          <p:cNvSpPr txBox="1"/>
+          <p:nvPr/>
+        </p:nvSpPr>
+        <p:spPr>
+          <a:xfrm>
+            <a:off x="642938" y="2703991"/>
+            <a:ext cx="4972692" cy="369332"/>
+          </a:xfrm>
+          <a:prstGeom prst="rect">
+            <a:avLst/>
+          </a:prstGeom>
+          <a:noFill/>
+        </p:spPr>
+        <p:txBody>
+          <a:bodyPr wrap="square" rtlCol="0">
+            <a:spAutoFit/>
+          </a:bodyPr>
+          <a:lstStyle/>
+          <a:p>
+            <a:pPr algn="ctr"/>
+            <a:r>
+              <a:rPr lang="en-GB" noProof="0" dirty="0"/>
+              <a:t>Acceptance rule:</a:t>
+            </a:r>
+          </a:p>
+        </p:txBody>
+      </p:sp>
+      <mc:AlternateContent xmlns:mc="http://schemas.openxmlformats.org/markup-compatibility/2006">
+        <mc:Choice xmlns:a14="http://schemas.microsoft.com/office/drawing/2010/main" Requires="a14">
+          <p:sp>
+            <p:nvSpPr>
+              <p:cNvPr id="25" name="CasellaDiTesto 24">
+                <a:extLst>
+                  <a:ext uri="{FF2B5EF4-FFF2-40B4-BE49-F238E27FC236}">
+                    <a16:creationId xmlns:a16="http://schemas.microsoft.com/office/drawing/2014/main" id="{21BD7950-FF87-8DAB-E58D-ECF497AE047C}"/>
+                  </a:ext>
+                </a:extLst>
+              </p:cNvPr>
+              <p:cNvSpPr txBox="1"/>
+              <p:nvPr/>
+            </p:nvSpPr>
+            <p:spPr>
+              <a:xfrm>
+                <a:off x="1583023" y="3350322"/>
+                <a:ext cx="3092522" cy="871842"/>
+              </a:xfrm>
+              <a:prstGeom prst="rect">
+                <a:avLst/>
+              </a:prstGeom>
+              <a:noFill/>
+            </p:spPr>
+            <p:txBody>
+              <a:bodyPr wrap="square" rtlCol="0">
+                <a:spAutoFit/>
+              </a:bodyPr>
+              <a:lstStyle/>
+              <a:p>
+                <a:pPr/>
+                <a14:m>
+                  <m:oMathPara xmlns:m="http://schemas.openxmlformats.org/officeDocument/2006/math">
+                    <m:oMathParaPr>
+                      <m:jc m:val="centerGroup"/>
+                    </m:oMathParaPr>
+                    <m:oMath xmlns:m="http://schemas.openxmlformats.org/officeDocument/2006/math">
+                      <m:f>
+                        <m:fPr>
+                          <m:ctrlPr>
+                            <a:rPr lang="it-IT" sz="2400" i="1" dirty="0" smtClean="0">
+                              <a:latin typeface="Cambria Math" panose="02040503050406030204" pitchFamily="18" charset="0"/>
+                            </a:rPr>
+                          </m:ctrlPr>
+                        </m:fPr>
+                        <m:num>
+                          <m:r>
+                            <a:rPr lang="it-IT" sz="2400" i="1" dirty="0" smtClean="0">
+                              <a:latin typeface="Cambria Math" panose="02040503050406030204" pitchFamily="18" charset="0"/>
+                            </a:rPr>
+                            <m:t>𝑝</m:t>
+                          </m:r>
+                          <m:d>
+                            <m:dPr>
+                              <m:ctrlPr>
+                                <a:rPr lang="it-IT" sz="2400" i="1" dirty="0" smtClean="0">
+                                  <a:latin typeface="Cambria Math" panose="02040503050406030204" pitchFamily="18" charset="0"/>
+                                </a:rPr>
+                              </m:ctrlPr>
+                            </m:dPr>
+                            <m:e>
+                              <m:sSub>
+                                <m:sSubPr>
+                                  <m:ctrlPr>
+                                    <a:rPr lang="it-IT" sz="2400" i="1" dirty="0" err="1" smtClean="0">
+                                      <a:latin typeface="Cambria Math" panose="02040503050406030204" pitchFamily="18" charset="0"/>
+                                    </a:rPr>
+                                  </m:ctrlPr>
+                                </m:sSubPr>
+                                <m:e>
+                                  <m:r>
+                                    <a:rPr lang="it-IT" sz="2400" i="1" dirty="0" smtClean="0">
+                                      <a:latin typeface="Cambria Math" panose="02040503050406030204" pitchFamily="18" charset="0"/>
+                                    </a:rPr>
+                                    <m:t>𝜃</m:t>
+                                  </m:r>
+                                </m:e>
+                                <m:sub>
+                                  <m:r>
+                                    <a:rPr lang="it-IT" sz="2400" i="1" dirty="0" err="1" smtClean="0">
+                                      <a:latin typeface="Cambria Math" panose="02040503050406030204" pitchFamily="18" charset="0"/>
+                                    </a:rPr>
+                                    <m:t>𝑡</m:t>
+                                  </m:r>
+                                </m:sub>
+                              </m:sSub>
+                            </m:e>
+                          </m:d>
+                        </m:num>
+                        <m:den>
+                          <m:r>
+                            <a:rPr lang="it-IT" sz="2400" i="1" dirty="0" smtClean="0">
+                              <a:latin typeface="Cambria Math" panose="02040503050406030204" pitchFamily="18" charset="0"/>
+                            </a:rPr>
+                            <m:t>𝑝</m:t>
+                          </m:r>
+                          <m:d>
+                            <m:dPr>
+                              <m:ctrlPr>
+                                <a:rPr lang="it-IT" sz="2400" i="1" dirty="0" smtClean="0">
+                                  <a:latin typeface="Cambria Math" panose="02040503050406030204" pitchFamily="18" charset="0"/>
+                                </a:rPr>
+                              </m:ctrlPr>
+                            </m:dPr>
+                            <m:e>
+                              <m:sSub>
+                                <m:sSubPr>
+                                  <m:ctrlPr>
+                                    <a:rPr lang="it-IT" sz="2400" i="1" dirty="0" smtClean="0">
+                                      <a:latin typeface="Cambria Math" panose="02040503050406030204" pitchFamily="18" charset="0"/>
+                                    </a:rPr>
+                                  </m:ctrlPr>
+                                </m:sSubPr>
+                                <m:e>
+                                  <m:r>
+                                    <a:rPr lang="it-IT" sz="2400" i="1" dirty="0" smtClean="0">
+                                      <a:latin typeface="Cambria Math" panose="02040503050406030204" pitchFamily="18" charset="0"/>
+                                    </a:rPr>
+                                    <m:t>𝜃</m:t>
+                                  </m:r>
+                                </m:e>
+                                <m:sub>
+                                  <m:r>
+                                    <a:rPr lang="it-IT" sz="2400" i="1" dirty="0" smtClean="0">
+                                      <a:latin typeface="Cambria Math" panose="02040503050406030204" pitchFamily="18" charset="0"/>
+                                    </a:rPr>
+                                    <m:t>0</m:t>
+                                  </m:r>
+                                </m:sub>
+                              </m:sSub>
+                            </m:e>
+                          </m:d>
+                        </m:den>
+                      </m:f>
+                      <m:r>
+                        <a:rPr lang="it-IT" sz="2400" i="1" dirty="0" smtClean="0">
+                          <a:latin typeface="Cambria Math" panose="02040503050406030204" pitchFamily="18" charset="0"/>
+                        </a:rPr>
+                        <m:t>⋅</m:t>
+                      </m:r>
+                      <m:f>
+                        <m:fPr>
+                          <m:ctrlPr>
+                            <a:rPr lang="it-IT" sz="2400" i="1" dirty="0" smtClean="0">
+                              <a:latin typeface="Cambria Math" panose="02040503050406030204" pitchFamily="18" charset="0"/>
+                            </a:rPr>
+                          </m:ctrlPr>
+                        </m:fPr>
+                        <m:num>
+                          <m:r>
+                            <a:rPr lang="it-IT" sz="2400" i="1" dirty="0" smtClean="0">
+                              <a:latin typeface="Cambria Math" panose="02040503050406030204" pitchFamily="18" charset="0"/>
+                            </a:rPr>
+                            <m:t>𝑞</m:t>
+                          </m:r>
+                          <m:d>
+                            <m:dPr>
+                              <m:ctrlPr>
+                                <a:rPr lang="it-IT" sz="2400" i="1" dirty="0" smtClean="0">
+                                  <a:latin typeface="Cambria Math" panose="02040503050406030204" pitchFamily="18" charset="0"/>
+                                </a:rPr>
+                              </m:ctrlPr>
+                            </m:dPr>
+                            <m:e>
+                              <m:sSub>
+                                <m:sSubPr>
+                                  <m:ctrlPr>
+                                    <a:rPr lang="it-IT" sz="2400" i="1" dirty="0" err="1" smtClean="0">
+                                      <a:latin typeface="Cambria Math" panose="02040503050406030204" pitchFamily="18" charset="0"/>
+                                    </a:rPr>
+                                  </m:ctrlPr>
+                                </m:sSubPr>
+                                <m:e>
+                                  <m:r>
+                                    <a:rPr lang="it-IT" sz="2400" i="1" dirty="0" smtClean="0">
+                                      <a:latin typeface="Cambria Math" panose="02040503050406030204" pitchFamily="18" charset="0"/>
+                                    </a:rPr>
+                                    <m:t>𝜃</m:t>
+                                  </m:r>
+                                </m:e>
+                                <m:sub>
+                                  <m:r>
+                                    <a:rPr lang="it-IT" sz="2400" i="1" dirty="0" err="1" smtClean="0">
+                                      <a:latin typeface="Cambria Math" panose="02040503050406030204" pitchFamily="18" charset="0"/>
+                                    </a:rPr>
+                                    <m:t>𝑡</m:t>
+                                  </m:r>
+                                </m:sub>
+                              </m:sSub>
+                            </m:e>
+                            <m:e>
+                              <m:sSub>
+                                <m:sSubPr>
+                                  <m:ctrlPr>
+                                    <a:rPr lang="it-IT" sz="2400" i="1" dirty="0" smtClean="0">
+                                      <a:latin typeface="Cambria Math" panose="02040503050406030204" pitchFamily="18" charset="0"/>
+                                    </a:rPr>
+                                  </m:ctrlPr>
+                                </m:sSubPr>
+                                <m:e>
+                                  <m:r>
+                                    <a:rPr lang="it-IT" sz="2400" i="1" dirty="0" smtClean="0">
+                                      <a:latin typeface="Cambria Math" panose="02040503050406030204" pitchFamily="18" charset="0"/>
+                                    </a:rPr>
+                                    <m:t>𝜃</m:t>
+                                  </m:r>
+                                </m:e>
+                                <m:sub>
+                                  <m:r>
+                                    <a:rPr lang="it-IT" sz="2400" i="1" dirty="0" smtClean="0">
+                                      <a:latin typeface="Cambria Math" panose="02040503050406030204" pitchFamily="18" charset="0"/>
+                                    </a:rPr>
+                                    <m:t>0</m:t>
+                                  </m:r>
+                                </m:sub>
+                              </m:sSub>
+                            </m:e>
+                          </m:d>
+                        </m:num>
+                        <m:den>
+                          <m:r>
+                            <a:rPr lang="it-IT" sz="2400" i="1" dirty="0" smtClean="0">
+                              <a:latin typeface="Cambria Math" panose="02040503050406030204" pitchFamily="18" charset="0"/>
+                            </a:rPr>
+                            <m:t>𝑞</m:t>
+                          </m:r>
+                          <m:d>
+                            <m:dPr>
+                              <m:ctrlPr>
+                                <a:rPr lang="it-IT" sz="2400" i="1" dirty="0" smtClean="0">
+                                  <a:latin typeface="Cambria Math" panose="02040503050406030204" pitchFamily="18" charset="0"/>
+                                </a:rPr>
+                              </m:ctrlPr>
+                            </m:dPr>
+                            <m:e>
+                              <m:sSub>
+                                <m:sSubPr>
+                                  <m:ctrlPr>
+                                    <a:rPr lang="it-IT" sz="2400" i="1" dirty="0" smtClean="0">
+                                      <a:latin typeface="Cambria Math" panose="02040503050406030204" pitchFamily="18" charset="0"/>
+                                    </a:rPr>
+                                  </m:ctrlPr>
+                                </m:sSubPr>
+                                <m:e>
+                                  <m:r>
+                                    <a:rPr lang="it-IT" sz="2400" i="1" dirty="0" smtClean="0">
+                                      <a:latin typeface="Cambria Math" panose="02040503050406030204" pitchFamily="18" charset="0"/>
+                                    </a:rPr>
+                                    <m:t>𝜃</m:t>
+                                  </m:r>
+                                </m:e>
+                                <m:sub>
+                                  <m:r>
+                                    <a:rPr lang="it-IT" sz="2400" i="1" dirty="0" smtClean="0">
+                                      <a:latin typeface="Cambria Math" panose="02040503050406030204" pitchFamily="18" charset="0"/>
+                                    </a:rPr>
+                                    <m:t>0</m:t>
+                                  </m:r>
+                                </m:sub>
+                              </m:sSub>
+                            </m:e>
+                            <m:e>
+                              <m:sSub>
+                                <m:sSubPr>
+                                  <m:ctrlPr>
+                                    <a:rPr lang="it-IT" sz="2400" i="1" dirty="0" err="1" smtClean="0">
+                                      <a:latin typeface="Cambria Math" panose="02040503050406030204" pitchFamily="18" charset="0"/>
+                                    </a:rPr>
+                                  </m:ctrlPr>
+                                </m:sSubPr>
+                                <m:e>
+                                  <m:r>
+                                    <a:rPr lang="it-IT" sz="2400" i="1" dirty="0" smtClean="0">
+                                      <a:latin typeface="Cambria Math" panose="02040503050406030204" pitchFamily="18" charset="0"/>
+                                    </a:rPr>
+                                    <m:t>𝜃</m:t>
+                                  </m:r>
+                                </m:e>
+                                <m:sub>
+                                  <m:r>
+                                    <a:rPr lang="it-IT" sz="2400" i="1" dirty="0" err="1" smtClean="0">
+                                      <a:latin typeface="Cambria Math" panose="02040503050406030204" pitchFamily="18" charset="0"/>
+                                    </a:rPr>
+                                    <m:t>𝑡</m:t>
+                                  </m:r>
+                                </m:sub>
+                              </m:sSub>
+                            </m:e>
+                          </m:d>
+                        </m:den>
+                      </m:f>
+                      <m:r>
+                        <a:rPr lang="it-IT" sz="2400" i="1" dirty="0" smtClean="0">
+                          <a:latin typeface="Cambria Math" panose="02040503050406030204" pitchFamily="18" charset="0"/>
+                        </a:rPr>
+                        <m:t>≥</m:t>
+                      </m:r>
+                      <m:r>
+                        <a:rPr lang="it-IT" sz="2400" i="1" dirty="0" smtClean="0">
+                          <a:latin typeface="Cambria Math" panose="02040503050406030204" pitchFamily="18" charset="0"/>
+                        </a:rPr>
+                        <m:t>𝑎</m:t>
+                      </m:r>
+                    </m:oMath>
+                  </m:oMathPara>
+                </a14:m>
+                <a:endParaRPr lang="it-IT" dirty="0"/>
+              </a:p>
+            </p:txBody>
+          </p:sp>
+        </mc:Choice>
+        <mc:Fallback>
+          <p:sp>
+            <p:nvSpPr>
+              <p:cNvPr id="25" name="CasellaDiTesto 24">
+                <a:extLst>
+                  <a:ext uri="{FF2B5EF4-FFF2-40B4-BE49-F238E27FC236}">
+                    <a16:creationId xmlns:a16="http://schemas.microsoft.com/office/drawing/2014/main" id="{21BD7950-FF87-8DAB-E58D-ECF497AE047C}"/>
+                  </a:ext>
+                </a:extLst>
+              </p:cNvPr>
+              <p:cNvSpPr txBox="1">
+                <a:spLocks noRot="1" noChangeAspect="1" noMove="1" noResize="1" noEditPoints="1" noAdjustHandles="1" noChangeArrowheads="1" noChangeShapeType="1" noTextEdit="1"/>
+              </p:cNvSpPr>
+              <p:nvPr/>
+            </p:nvSpPr>
+            <p:spPr>
+              <a:xfrm>
+                <a:off x="1583023" y="3350322"/>
+                <a:ext cx="3092522" cy="871842"/>
+              </a:xfrm>
+              <a:prstGeom prst="rect">
+                <a:avLst/>
+              </a:prstGeom>
+              <a:blipFill>
+                <a:blip r:embed="rId6"/>
+                <a:stretch>
+                  <a:fillRect/>
+                </a:stretch>
+              </a:blipFill>
+            </p:spPr>
+            <p:txBody>
+              <a:bodyPr/>
+              <a:lstStyle/>
+              <a:p>
+                <a:r>
+                  <a:rPr lang="it-IT">
+                    <a:noFill/>
+                  </a:rPr>
+                  <a:t> </a:t>
+                </a:r>
+              </a:p>
+            </p:txBody>
+          </p:sp>
+        </mc:Fallback>
+      </mc:AlternateContent>
+      <p:sp>
+        <p:nvSpPr>
+          <p:cNvPr id="26" name="CasellaDiTesto 25">
+            <a:extLst>
+              <a:ext uri="{FF2B5EF4-FFF2-40B4-BE49-F238E27FC236}">
+                <a16:creationId xmlns:a16="http://schemas.microsoft.com/office/drawing/2014/main" id="{E51B748A-CB5D-93CD-2DF5-FE8D9B658B88}"/>
+              </a:ext>
+            </a:extLst>
+          </p:cNvPr>
+          <p:cNvSpPr txBox="1"/>
+          <p:nvPr/>
+        </p:nvSpPr>
+        <p:spPr>
+          <a:xfrm>
+            <a:off x="619887" y="4668938"/>
+            <a:ext cx="1984116" cy="369332"/>
+          </a:xfrm>
+          <a:prstGeom prst="rect">
+            <a:avLst/>
+          </a:prstGeom>
+          <a:noFill/>
+        </p:spPr>
+        <p:txBody>
+          <a:bodyPr wrap="square" rtlCol="0">
+            <a:spAutoFit/>
+          </a:bodyPr>
+          <a:lstStyle/>
+          <a:p>
+            <a:r>
+              <a:rPr lang="it-IT" dirty="0" err="1"/>
+              <a:t>Posterior</a:t>
+            </a:r>
+            <a:r>
+              <a:rPr lang="it-IT" dirty="0"/>
+              <a:t> </a:t>
+            </a:r>
+            <a:r>
+              <a:rPr lang="it-IT" dirty="0" err="1"/>
+              <a:t>values</a:t>
+            </a:r>
+            <a:endParaRPr lang="it-IT" dirty="0"/>
+          </a:p>
+        </p:txBody>
+      </p:sp>
+      <mc:AlternateContent xmlns:mc="http://schemas.openxmlformats.org/markup-compatibility/2006">
+        <mc:Choice xmlns:a14="http://schemas.microsoft.com/office/drawing/2010/main" Requires="a14">
+          <p:sp>
+            <p:nvSpPr>
+              <p:cNvPr id="27" name="CasellaDiTesto 26">
+                <a:extLst>
+                  <a:ext uri="{FF2B5EF4-FFF2-40B4-BE49-F238E27FC236}">
+                    <a16:creationId xmlns:a16="http://schemas.microsoft.com/office/drawing/2014/main" id="{BE5FB295-C698-4CE6-BABF-E61C3033D43C}"/>
+                  </a:ext>
+                </a:extLst>
+              </p:cNvPr>
+              <p:cNvSpPr txBox="1"/>
+              <p:nvPr/>
+            </p:nvSpPr>
+            <p:spPr>
+              <a:xfrm>
+                <a:off x="3754655" y="4528068"/>
+                <a:ext cx="1984117" cy="646331"/>
+              </a:xfrm>
+              <a:prstGeom prst="rect">
+                <a:avLst/>
+              </a:prstGeom>
+              <a:noFill/>
+            </p:spPr>
+            <p:txBody>
+              <a:bodyPr wrap="square" rtlCol="0">
+                <a:spAutoFit/>
+              </a:bodyPr>
+              <a:lstStyle/>
+              <a:p>
+                <a:r>
+                  <a:rPr lang="it-IT" dirty="0"/>
+                  <a:t>Random number from </a:t>
+                </a:r>
+                <a14:m>
+                  <m:oMath xmlns:m="http://schemas.openxmlformats.org/officeDocument/2006/math">
+                    <m:d>
+                      <m:dPr>
+                        <m:begChr m:val="["/>
+                        <m:endChr m:val="]"/>
+                        <m:ctrlPr>
+                          <a:rPr lang="it-IT" i="1" dirty="0" smtClean="0">
+                            <a:latin typeface="Cambria Math" panose="02040503050406030204" pitchFamily="18" charset="0"/>
+                          </a:rPr>
+                        </m:ctrlPr>
+                      </m:dPr>
+                      <m:e>
+                        <m:r>
+                          <a:rPr lang="it-IT" i="1" dirty="0" smtClean="0">
+                            <a:latin typeface="Cambria Math" panose="02040503050406030204" pitchFamily="18" charset="0"/>
+                          </a:rPr>
+                          <m:t>0,1</m:t>
+                        </m:r>
+                      </m:e>
+                    </m:d>
+                  </m:oMath>
+                </a14:m>
+                <a:endParaRPr lang="it-IT" dirty="0"/>
+              </a:p>
+            </p:txBody>
+          </p:sp>
+        </mc:Choice>
+        <mc:Fallback>
+          <p:sp>
+            <p:nvSpPr>
+              <p:cNvPr id="27" name="CasellaDiTesto 26">
+                <a:extLst>
+                  <a:ext uri="{FF2B5EF4-FFF2-40B4-BE49-F238E27FC236}">
+                    <a16:creationId xmlns:a16="http://schemas.microsoft.com/office/drawing/2014/main" id="{BE5FB295-C698-4CE6-BABF-E61C3033D43C}"/>
+                  </a:ext>
+                </a:extLst>
+              </p:cNvPr>
+              <p:cNvSpPr txBox="1">
+                <a:spLocks noRot="1" noChangeAspect="1" noMove="1" noResize="1" noEditPoints="1" noAdjustHandles="1" noChangeArrowheads="1" noChangeShapeType="1" noTextEdit="1"/>
+              </p:cNvSpPr>
+              <p:nvPr/>
+            </p:nvSpPr>
+            <p:spPr>
+              <a:xfrm>
+                <a:off x="3754655" y="4528068"/>
+                <a:ext cx="1984117" cy="646331"/>
+              </a:xfrm>
+              <a:prstGeom prst="rect">
+                <a:avLst/>
+              </a:prstGeom>
+              <a:blipFill>
+                <a:blip r:embed="rId7"/>
+                <a:stretch>
+                  <a:fillRect l="-2769" t="-5660" r="-4308" b="-14151"/>
+                </a:stretch>
+              </a:blipFill>
+            </p:spPr>
+            <p:txBody>
+              <a:bodyPr/>
+              <a:lstStyle/>
+              <a:p>
+                <a:r>
+                  <a:rPr lang="it-IT">
+                    <a:noFill/>
+                  </a:rPr>
+                  <a:t> </a:t>
+                </a:r>
+              </a:p>
+            </p:txBody>
+          </p:sp>
+        </mc:Fallback>
+      </mc:AlternateContent>
+      <p:cxnSp>
+        <p:nvCxnSpPr>
+          <p:cNvPr id="29" name="Connettore 2 28">
+            <a:extLst>
+              <a:ext uri="{FF2B5EF4-FFF2-40B4-BE49-F238E27FC236}">
+                <a16:creationId xmlns:a16="http://schemas.microsoft.com/office/drawing/2014/main" id="{B578CF35-57D4-8BB3-0A78-4B6148BBDEE9}"/>
+              </a:ext>
+            </a:extLst>
+          </p:cNvPr>
+          <p:cNvCxnSpPr>
+            <a:stCxn id="26" idx="0"/>
+          </p:cNvCxnSpPr>
+          <p:nvPr/>
+        </p:nvCxnSpPr>
+        <p:spPr>
+          <a:xfrm flipV="1">
+            <a:off x="1611945" y="4294596"/>
+            <a:ext cx="196307" cy="374342"/>
+          </a:xfrm>
+          <a:prstGeom prst="straightConnector1">
+            <a:avLst/>
+          </a:prstGeom>
+          <a:ln w="19050">
+            <a:tailEnd type="triangle"/>
+          </a:ln>
+        </p:spPr>
+        <p:style>
+          <a:lnRef idx="1">
+            <a:schemeClr val="accent1"/>
+          </a:lnRef>
+          <a:fillRef idx="0">
+            <a:schemeClr val="accent1"/>
+          </a:fillRef>
+          <a:effectRef idx="0">
+            <a:schemeClr val="accent1"/>
+          </a:effectRef>
+          <a:fontRef idx="minor">
+            <a:schemeClr val="tx1"/>
+          </a:fontRef>
+        </p:style>
+      </p:cxnSp>
+      <p:cxnSp>
+        <p:nvCxnSpPr>
+          <p:cNvPr id="31" name="Connettore 2 30">
+            <a:extLst>
+              <a:ext uri="{FF2B5EF4-FFF2-40B4-BE49-F238E27FC236}">
+                <a16:creationId xmlns:a16="http://schemas.microsoft.com/office/drawing/2014/main" id="{6E358688-EC38-3431-E58E-560EA606D080}"/>
+              </a:ext>
+            </a:extLst>
+          </p:cNvPr>
+          <p:cNvCxnSpPr>
+            <a:stCxn id="27" idx="0"/>
+          </p:cNvCxnSpPr>
+          <p:nvPr/>
+        </p:nvCxnSpPr>
+        <p:spPr>
+          <a:xfrm flipH="1" flipV="1">
+            <a:off x="4469258" y="4058290"/>
+            <a:ext cx="277456" cy="469778"/>
+          </a:xfrm>
+          <a:prstGeom prst="straightConnector1">
+            <a:avLst/>
+          </a:prstGeom>
+          <a:ln w="19050">
+            <a:tailEnd type="triangle"/>
+          </a:ln>
+        </p:spPr>
+        <p:style>
+          <a:lnRef idx="1">
+            <a:schemeClr val="accent1"/>
+          </a:lnRef>
+          <a:fillRef idx="0">
+            <a:schemeClr val="accent1"/>
+          </a:fillRef>
+          <a:effectRef idx="0">
+            <a:schemeClr val="accent1"/>
+          </a:effectRef>
+          <a:fontRef idx="minor">
+            <a:schemeClr val="tx1"/>
+          </a:fontRef>
+        </p:style>
+      </p:cxnSp>
+      <p:sp>
+        <p:nvSpPr>
+          <p:cNvPr id="32" name="CasellaDiTesto 31">
+            <a:extLst>
+              <a:ext uri="{FF2B5EF4-FFF2-40B4-BE49-F238E27FC236}">
+                <a16:creationId xmlns:a16="http://schemas.microsoft.com/office/drawing/2014/main" id="{A4EB6DCD-508B-8648-D5B2-57783FAC404F}"/>
+              </a:ext>
+            </a:extLst>
+          </p:cNvPr>
+          <p:cNvSpPr txBox="1"/>
+          <p:nvPr/>
+        </p:nvSpPr>
+        <p:spPr>
+          <a:xfrm>
+            <a:off x="1469203" y="5676909"/>
+            <a:ext cx="3277510" cy="646331"/>
+          </a:xfrm>
+          <a:prstGeom prst="rect">
+            <a:avLst/>
+          </a:prstGeom>
+          <a:noFill/>
+        </p:spPr>
+        <p:txBody>
+          <a:bodyPr wrap="square" rtlCol="0">
+            <a:spAutoFit/>
+          </a:bodyPr>
+          <a:lstStyle/>
+          <a:p>
+            <a:r>
+              <a:rPr lang="it-IT" dirty="0" err="1"/>
+              <a:t>Proposal</a:t>
+            </a:r>
+            <a:r>
+              <a:rPr lang="it-IT" dirty="0"/>
+              <a:t> </a:t>
+            </a:r>
+            <a:r>
+              <a:rPr lang="it-IT" dirty="0" err="1"/>
+              <a:t>probability</a:t>
+            </a:r>
+            <a:r>
+              <a:rPr lang="it-IT" dirty="0"/>
+              <a:t> ratio</a:t>
+            </a:r>
+          </a:p>
+          <a:p>
+            <a:r>
+              <a:rPr lang="it-IT" dirty="0" err="1"/>
+              <a:t>ours</a:t>
+            </a:r>
+            <a:r>
+              <a:rPr lang="it-IT" dirty="0"/>
+              <a:t> </a:t>
+            </a:r>
+            <a:r>
+              <a:rPr lang="it-IT" dirty="0" err="1"/>
+              <a:t>is</a:t>
+            </a:r>
+            <a:r>
+              <a:rPr lang="it-IT" dirty="0"/>
+              <a:t> </a:t>
+            </a:r>
+            <a:r>
+              <a:rPr lang="it-IT" dirty="0" err="1"/>
+              <a:t>symmetric</a:t>
+            </a:r>
+            <a:r>
+              <a:rPr lang="it-IT" dirty="0"/>
+              <a:t> so it’s one</a:t>
+            </a:r>
+          </a:p>
+        </p:txBody>
+      </p:sp>
+      <p:cxnSp>
+        <p:nvCxnSpPr>
+          <p:cNvPr id="34" name="Connettore 2 33">
+            <a:extLst>
+              <a:ext uri="{FF2B5EF4-FFF2-40B4-BE49-F238E27FC236}">
+                <a16:creationId xmlns:a16="http://schemas.microsoft.com/office/drawing/2014/main" id="{B21279C4-22BF-56DF-55EF-CF24DA75ACF8}"/>
+              </a:ext>
+            </a:extLst>
+          </p:cNvPr>
+          <p:cNvCxnSpPr>
+            <a:stCxn id="32" idx="0"/>
+          </p:cNvCxnSpPr>
+          <p:nvPr/>
+        </p:nvCxnSpPr>
+        <p:spPr>
+          <a:xfrm flipV="1">
+            <a:off x="3107958" y="4397338"/>
+            <a:ext cx="0" cy="1279571"/>
+          </a:xfrm>
+          <a:prstGeom prst="straightConnector1">
+            <a:avLst/>
+          </a:prstGeom>
+          <a:ln w="19050">
+            <a:tailEnd type="triangle"/>
+          </a:ln>
+        </p:spPr>
+        <p:style>
+          <a:lnRef idx="1">
+            <a:schemeClr val="accent1"/>
+          </a:lnRef>
+          <a:fillRef idx="0">
+            <a:schemeClr val="accent1"/>
+          </a:fillRef>
+          <a:effectRef idx="0">
+            <a:schemeClr val="accent1"/>
+          </a:effectRef>
+          <a:fontRef idx="minor">
+            <a:schemeClr val="tx1"/>
+          </a:fontRef>
+        </p:style>
+      </p:cxnSp>
+    </p:spTree>
+    <p:extLst>
+      <p:ext uri="{BB962C8B-B14F-4D97-AF65-F5344CB8AC3E}">
+        <p14:creationId xmlns:p14="http://schemas.microsoft.com/office/powerpoint/2010/main" val="1454102378"/>
+      </p:ext>
+    </p:extLst>
+  </p:cSld>
+  <p:clrMapOvr>
+    <a:masterClrMapping/>
+  </p:clrMapOvr>
+</p:sld>
+</file>
+
+<file path=ppt/slides/slide12.xml><?xml version="1.0" encoding="utf-8"?>
+<p:sld xmlns:a="http://schemas.openxmlformats.org/drawingml/2006/main" xmlns:r="http://schemas.openxmlformats.org/officeDocument/2006/relationships" xmlns:p="http://schemas.openxmlformats.org/presentationml/2006/main">
+  <p:cSld>
+    <p:spTree>
+      <p:nvGrpSpPr>
+        <p:cNvPr id="1" name="">
+          <a:extLst>
+            <a:ext uri="{FF2B5EF4-FFF2-40B4-BE49-F238E27FC236}">
               <a16:creationId xmlns:a16="http://schemas.microsoft.com/office/drawing/2014/main" id="{F450DA32-9781-B808-0A0C-2A51C2DAD4F1}"/>
             </a:ext>
           </a:extLst>
@@ -6047,8 +8992,8 @@
           <a:chExt cx="0" cy="0"/>
         </a:xfrm>
       </p:grpSpPr>
-      <mc:AlternateContent xmlns:mc="http://schemas.openxmlformats.org/markup-compatibility/2006" xmlns:a14="http://schemas.microsoft.com/office/drawing/2010/main">
-        <mc:Choice Requires="a14">
+      <mc:AlternateContent xmlns:mc="http://schemas.openxmlformats.org/markup-compatibility/2006">
+        <mc:Choice xmlns:a14="http://schemas.microsoft.com/office/drawing/2010/main" Requires="a14">
           <p:sp>
             <p:nvSpPr>
               <p:cNvPr id="4" name="Titolo 1">
@@ -6157,7 +9102,7 @@
             </p:txBody>
           </p:sp>
         </mc:Choice>
-        <mc:Fallback xmlns="">
+        <mc:Fallback>
           <p:sp>
             <p:nvSpPr>
               <p:cNvPr id="4" name="Titolo 1">
@@ -6230,14 +9175,9 @@
           <a:lstStyle/>
           <a:p>
             <a:r>
-              <a:rPr lang="it-IT" dirty="0"/>
-              <a:t>Plot </a:t>
+              <a:rPr lang="en-GB" noProof="0" dirty="0"/>
+              <a:t>Plot traces</a:t>
             </a:r>
-            <a:r>
-              <a:rPr lang="it-IT" dirty="0" err="1"/>
-              <a:t>traces</a:t>
-            </a:r>
-            <a:endParaRPr lang="it-IT" dirty="0"/>
           </a:p>
         </p:txBody>
       </p:sp>
@@ -6270,64 +9210,8 @@
           <a:lstStyle/>
           <a:p>
             <a:r>
-              <a:rPr lang="it-IT" dirty="0"/>
-              <a:t>We </a:t>
-            </a:r>
-            <a:r>
-              <a:rPr lang="it-IT" dirty="0" err="1"/>
-              <a:t>see</a:t>
-            </a:r>
-            <a:r>
-              <a:rPr lang="it-IT" dirty="0"/>
-              <a:t> </a:t>
-            </a:r>
-            <a:r>
-              <a:rPr lang="it-IT" dirty="0" err="1"/>
-              <a:t>that</a:t>
-            </a:r>
-            <a:r>
-              <a:rPr lang="it-IT" dirty="0"/>
-              <a:t> some steps are </a:t>
-            </a:r>
-            <a:r>
-              <a:rPr lang="it-IT" dirty="0" err="1"/>
-              <a:t>needed</a:t>
-            </a:r>
-            <a:r>
-              <a:rPr lang="it-IT" dirty="0"/>
-              <a:t> to </a:t>
-            </a:r>
-            <a:r>
-              <a:rPr lang="it-IT" dirty="0" err="1"/>
-              <a:t>find</a:t>
-            </a:r>
-            <a:r>
-              <a:rPr lang="it-IT" dirty="0"/>
-              <a:t> the </a:t>
-            </a:r>
-            <a:r>
-              <a:rPr lang="it-IT" dirty="0" err="1"/>
-              <a:t>peak</a:t>
-            </a:r>
-            <a:r>
-              <a:rPr lang="it-IT" dirty="0"/>
-              <a:t> </a:t>
-            </a:r>
-            <a:r>
-              <a:rPr lang="it-IT" dirty="0" err="1"/>
-              <a:t>around</a:t>
-            </a:r>
-            <a:r>
-              <a:rPr lang="it-IT" dirty="0"/>
-              <a:t> </a:t>
-            </a:r>
-            <a:r>
-              <a:rPr lang="it-IT" dirty="0" err="1"/>
-              <a:t>which</a:t>
-            </a:r>
-            <a:r>
-              <a:rPr lang="it-IT" dirty="0"/>
-              <a:t> we sample</a:t>
+              <a:rPr lang="en-GB" noProof="0" dirty="0"/>
+              <a:t>We see that some steps are needed to find the peak around which we sample</a:t>
             </a:r>
           </a:p>
         </p:txBody>
@@ -6361,46 +9245,9 @@
           <a:lstStyle/>
           <a:p>
             <a:r>
-              <a:rPr lang="it-IT" dirty="0"/>
-              <a:t>Burn-in: </a:t>
+              <a:rPr lang="en-GB" noProof="0" dirty="0"/>
+              <a:t>Burn-in: discard this initial points to have better samples of the peaks</a:t>
             </a:r>
-            <a:r>
-              <a:rPr lang="it-IT" dirty="0" err="1"/>
-              <a:t>discard</a:t>
-            </a:r>
-            <a:r>
-              <a:rPr lang="it-IT" dirty="0"/>
-              <a:t> </a:t>
-            </a:r>
-            <a:r>
-              <a:rPr lang="it-IT" dirty="0" err="1"/>
-              <a:t>this</a:t>
-            </a:r>
-            <a:r>
-              <a:rPr lang="it-IT" dirty="0"/>
-              <a:t> </a:t>
-            </a:r>
-            <a:r>
-              <a:rPr lang="it-IT" dirty="0" err="1"/>
-              <a:t>initial</a:t>
-            </a:r>
-            <a:r>
-              <a:rPr lang="it-IT" dirty="0"/>
-              <a:t> points to have </a:t>
-            </a:r>
-            <a:r>
-              <a:rPr lang="it-IT" dirty="0" err="1"/>
-              <a:t>better</a:t>
-            </a:r>
-            <a:r>
-              <a:rPr lang="it-IT" dirty="0"/>
-              <a:t> samples of the </a:t>
-            </a:r>
-            <a:r>
-              <a:rPr lang="it-IT" dirty="0" err="1"/>
-              <a:t>peaks</a:t>
-            </a:r>
-            <a:endParaRPr lang="it-IT" dirty="0"/>
           </a:p>
         </p:txBody>
       </p:sp>
@@ -6433,16 +9280,8 @@
           <a:lstStyle/>
           <a:p>
             <a:r>
-              <a:rPr lang="it-IT" dirty="0"/>
-              <a:t>Plot </a:t>
-            </a:r>
-            <a:r>
-              <a:rPr lang="it-IT" dirty="0" err="1"/>
-              <a:t>traces</a:t>
-            </a:r>
-            <a:r>
-              <a:rPr lang="it-IT" dirty="0"/>
-              <a:t> zoom</a:t>
+              <a:rPr lang="en-GB" noProof="0" dirty="0"/>
+              <a:t>Plot traces zoom</a:t>
             </a:r>
           </a:p>
         </p:txBody>
@@ -6460,7 +9299,7 @@
 </p:sld>
 </file>
 
-<file path=ppt/slides/slide11.xml><?xml version="1.0" encoding="utf-8"?>
+<file path=ppt/slides/slide13.xml><?xml version="1.0" encoding="utf-8"?>
 <p:sld xmlns:a="http://schemas.openxmlformats.org/drawingml/2006/main" xmlns:r="http://schemas.openxmlformats.org/officeDocument/2006/relationships" xmlns:p="http://schemas.openxmlformats.org/presentationml/2006/main">
   <p:cSld>
     <p:spTree>
@@ -6483,8 +9322,8 @@
           <a:chExt cx="0" cy="0"/>
         </a:xfrm>
       </p:grpSpPr>
-      <mc:AlternateContent xmlns:mc="http://schemas.openxmlformats.org/markup-compatibility/2006" xmlns:a14="http://schemas.microsoft.com/office/drawing/2010/main">
-        <mc:Choice Requires="a14">
+      <mc:AlternateContent xmlns:mc="http://schemas.openxmlformats.org/markup-compatibility/2006">
+        <mc:Choice xmlns:a14="http://schemas.microsoft.com/office/drawing/2010/main" Requires="a14">
           <p:sp>
             <p:nvSpPr>
               <p:cNvPr id="4" name="Titolo 1">
@@ -6593,7 +9432,7 @@
             </p:txBody>
           </p:sp>
         </mc:Choice>
-        <mc:Fallback xmlns="">
+        <mc:Fallback>
           <p:sp>
             <p:nvSpPr>
               <p:cNvPr id="4" name="Titolo 1">
@@ -6666,14 +9505,14 @@
           <a:lstStyle/>
           <a:p>
             <a:r>
-              <a:rPr lang="it-IT" dirty="0"/>
+              <a:rPr lang="en-GB" noProof="0" dirty="0"/>
               <a:t>Plot </a:t>
             </a:r>
             <a:r>
-              <a:rPr lang="it-IT" dirty="0" err="1"/>
+              <a:rPr lang="en-GB" noProof="0" dirty="0" err="1"/>
               <a:t>autocorr</a:t>
             </a:r>
-            <a:endParaRPr lang="it-IT" dirty="0"/>
+            <a:endParaRPr lang="en-GB" noProof="0" dirty="0"/>
           </a:p>
         </p:txBody>
       </p:sp>
@@ -6706,54 +9545,9 @@
           <a:lstStyle/>
           <a:p>
             <a:r>
-              <a:rPr lang="it-IT" dirty="0"/>
-              <a:t>We look </a:t>
+              <a:rPr lang="en-GB" noProof="0" dirty="0"/>
+              <a:t>We look at the autocorrelation for each parameters and we see some are correlated</a:t>
             </a:r>
-            <a:r>
-              <a:rPr lang="it-IT" dirty="0" err="1"/>
-              <a:t>at</a:t>
-            </a:r>
-            <a:r>
-              <a:rPr lang="it-IT" dirty="0"/>
-              <a:t> the </a:t>
-            </a:r>
-            <a:r>
-              <a:rPr lang="it-IT" dirty="0" err="1"/>
-              <a:t>autocorrelation</a:t>
-            </a:r>
-            <a:r>
-              <a:rPr lang="it-IT" dirty="0"/>
-              <a:t> for </a:t>
-            </a:r>
-            <a:r>
-              <a:rPr lang="it-IT" dirty="0" err="1"/>
-              <a:t>each</a:t>
-            </a:r>
-            <a:r>
-              <a:rPr lang="it-IT" dirty="0"/>
-              <a:t> </a:t>
-            </a:r>
-            <a:r>
-              <a:rPr lang="it-IT" dirty="0" err="1"/>
-              <a:t>parameters</a:t>
-            </a:r>
-            <a:r>
-              <a:rPr lang="it-IT" dirty="0"/>
-              <a:t> and we </a:t>
-            </a:r>
-            <a:r>
-              <a:rPr lang="it-IT" dirty="0" err="1"/>
-              <a:t>see</a:t>
-            </a:r>
-            <a:r>
-              <a:rPr lang="it-IT" dirty="0"/>
-              <a:t> some are </a:t>
-            </a:r>
-            <a:r>
-              <a:rPr lang="it-IT" dirty="0" err="1"/>
-              <a:t>correlated</a:t>
-            </a:r>
-            <a:endParaRPr lang="it-IT" dirty="0"/>
           </a:p>
         </p:txBody>
       </p:sp>
@@ -6786,28 +9580,8 @@
           <a:lstStyle/>
           <a:p>
             <a:r>
-              <a:rPr lang="it-IT" dirty="0" err="1"/>
-              <a:t>Thinning</a:t>
-            </a:r>
-            <a:r>
-              <a:rPr lang="it-IT" dirty="0"/>
-              <a:t>: take a point </a:t>
-            </a:r>
-            <a:r>
-              <a:rPr lang="it-IT" dirty="0" err="1"/>
-              <a:t>every</a:t>
-            </a:r>
-            <a:r>
-              <a:rPr lang="it-IT" dirty="0"/>
-              <a:t> n to have not </a:t>
-            </a:r>
-            <a:r>
-              <a:rPr lang="it-IT" dirty="0" err="1"/>
-              <a:t>correlated</a:t>
-            </a:r>
-            <a:r>
-              <a:rPr lang="it-IT" dirty="0"/>
-              <a:t> samples</a:t>
+              <a:rPr lang="en-GB" noProof="0" dirty="0"/>
+              <a:t>Thinning: take a point every n to have not correlated samples</a:t>
             </a:r>
           </a:p>
         </p:txBody>
@@ -6841,15 +9615,15 @@
           <a:lstStyle/>
           <a:p>
             <a:r>
-              <a:rPr lang="it-IT" dirty="0"/>
+              <a:rPr lang="en-GB" noProof="0" dirty="0"/>
               <a:t>Plot </a:t>
             </a:r>
             <a:r>
-              <a:rPr lang="it-IT" dirty="0" err="1"/>
+              <a:rPr lang="en-GB" noProof="0" dirty="0" err="1"/>
               <a:t>autocorr</a:t>
             </a:r>
             <a:r>
-              <a:rPr lang="it-IT" dirty="0"/>
+              <a:rPr lang="en-GB" noProof="0" dirty="0"/>
               <a:t> zoom</a:t>
             </a:r>
           </a:p>
@@ -6868,7 +9642,7 @@
 </p:sld>
 </file>
 
-<file path=ppt/slides/slide12.xml><?xml version="1.0" encoding="utf-8"?>
+<file path=ppt/slides/slide14.xml><?xml version="1.0" encoding="utf-8"?>
 <p:sld xmlns:a="http://schemas.openxmlformats.org/drawingml/2006/main" xmlns:r="http://schemas.openxmlformats.org/officeDocument/2006/relationships" xmlns:p="http://schemas.openxmlformats.org/presentationml/2006/main">
   <p:cSld>
     <p:spTree>
@@ -6891,8 +9665,8 @@
           <a:chExt cx="0" cy="0"/>
         </a:xfrm>
       </p:grpSpPr>
-      <mc:AlternateContent xmlns:mc="http://schemas.openxmlformats.org/markup-compatibility/2006" xmlns:a14="http://schemas.microsoft.com/office/drawing/2010/main">
-        <mc:Choice Requires="a14">
+      <mc:AlternateContent xmlns:mc="http://schemas.openxmlformats.org/markup-compatibility/2006">
+        <mc:Choice xmlns:a14="http://schemas.microsoft.com/office/drawing/2010/main" Requires="a14">
           <p:sp>
             <p:nvSpPr>
               <p:cNvPr id="4" name="Titolo 1">
@@ -7001,7 +9775,7 @@
             </p:txBody>
           </p:sp>
         </mc:Choice>
-        <mc:Fallback xmlns="">
+        <mc:Fallback>
           <p:sp>
             <p:nvSpPr>
               <p:cNvPr id="4" name="Titolo 1">
@@ -7074,80 +9848,16 @@
           <a:lstStyle/>
           <a:p>
             <a:r>
-              <a:rPr lang="it-IT" dirty="0"/>
-              <a:t>We make the </a:t>
+              <a:rPr lang="en-GB" noProof="0" dirty="0"/>
+              <a:t>We make the histograms for each parameter, we find the median value and the interval </a:t>
             </a:r>
             <a:r>
-              <a:rPr lang="it-IT" dirty="0" err="1"/>
-              <a:t>histograms</a:t>
-            </a:r>
-            <a:r>
-              <a:rPr lang="it-IT" dirty="0"/>
-              <a:t> for </a:t>
-            </a:r>
-            <a:r>
-              <a:rPr lang="it-IT" dirty="0" err="1"/>
-              <a:t>each</a:t>
-            </a:r>
-            <a:r>
-              <a:rPr lang="it-IT" dirty="0"/>
-              <a:t> </a:t>
-            </a:r>
-            <a:r>
-              <a:rPr lang="it-IT" dirty="0" err="1"/>
-              <a:t>parameter</a:t>
-            </a:r>
-            <a:r>
-              <a:rPr lang="it-IT" dirty="0"/>
-              <a:t>, we </a:t>
-            </a:r>
-            <a:r>
-              <a:rPr lang="it-IT" dirty="0" err="1"/>
-              <a:t>find</a:t>
-            </a:r>
-            <a:r>
-              <a:rPr lang="it-IT" dirty="0"/>
-              <a:t> the </a:t>
-            </a:r>
-            <a:r>
-              <a:rPr lang="it-IT" dirty="0" err="1"/>
-              <a:t>median</a:t>
-            </a:r>
-            <a:r>
-              <a:rPr lang="it-IT" dirty="0"/>
-              <a:t> </a:t>
-            </a:r>
-            <a:r>
-              <a:rPr lang="it-IT" dirty="0" err="1"/>
-              <a:t>value</a:t>
-            </a:r>
-            <a:r>
-              <a:rPr lang="it-IT" dirty="0"/>
-              <a:t> and the </a:t>
-            </a:r>
-            <a:r>
-              <a:rPr lang="it-IT" dirty="0" err="1"/>
-              <a:t>interval</a:t>
-            </a:r>
-            <a:r>
-              <a:rPr lang="it-IT" dirty="0"/>
-              <a:t> </a:t>
-            </a:r>
-            <a:r>
-              <a:rPr lang="it-IT" dirty="0" err="1"/>
+              <a:rPr lang="en-GB" noProof="0" dirty="0" err="1"/>
               <a:t>corrisponding</a:t>
             </a:r>
             <a:r>
-              <a:rPr lang="it-IT" dirty="0"/>
-              <a:t> to 68% </a:t>
-            </a:r>
-            <a:r>
-              <a:rPr lang="it-IT" dirty="0" err="1"/>
-              <a:t>level</a:t>
-            </a:r>
-            <a:r>
-              <a:rPr lang="it-IT" dirty="0"/>
-              <a:t> of confidence</a:t>
+              <a:rPr lang="en-GB" noProof="0" dirty="0"/>
+              <a:t> to 68% level of confidence</a:t>
             </a:r>
           </a:p>
         </p:txBody>
@@ -7181,18 +9891,14 @@
           <a:lstStyle/>
           <a:p>
             <a:r>
-              <a:rPr lang="it-IT" dirty="0" err="1"/>
-              <a:t>Hist</a:t>
+              <a:rPr lang="en-GB" noProof="0" dirty="0"/>
+              <a:t>Hist par </a:t>
             </a:r>
             <a:r>
-              <a:rPr lang="it-IT" dirty="0"/>
-              <a:t> par </a:t>
-            </a:r>
-            <a:r>
-              <a:rPr lang="it-IT" dirty="0" err="1"/>
+              <a:rPr lang="en-GB" noProof="0" dirty="0" err="1"/>
               <a:t>img</a:t>
             </a:r>
-            <a:endParaRPr lang="it-IT" dirty="0"/>
+            <a:endParaRPr lang="en-GB" noProof="0" dirty="0"/>
           </a:p>
         </p:txBody>
       </p:sp>
@@ -7209,7 +9915,7 @@
 </p:sld>
 </file>
 
-<file path=ppt/slides/slide13.xml><?xml version="1.0" encoding="utf-8"?>
+<file path=ppt/slides/slide15.xml><?xml version="1.0" encoding="utf-8"?>
 <p:sld xmlns:a="http://schemas.openxmlformats.org/drawingml/2006/main" xmlns:r="http://schemas.openxmlformats.org/officeDocument/2006/relationships" xmlns:p="http://schemas.openxmlformats.org/presentationml/2006/main">
   <p:cSld>
     <p:spTree>
@@ -7251,8 +9957,8 @@
           </a:p>
         </p:txBody>
       </p:sp>
-      <mc:AlternateContent xmlns:mc="http://schemas.openxmlformats.org/markup-compatibility/2006" xmlns:a14="http://schemas.microsoft.com/office/drawing/2010/main">
-        <mc:Choice Requires="a14">
+      <mc:AlternateContent xmlns:mc="http://schemas.openxmlformats.org/markup-compatibility/2006">
+        <mc:Choice xmlns:a14="http://schemas.microsoft.com/office/drawing/2010/main" Requires="a14">
           <p:graphicFrame>
             <p:nvGraphicFramePr>
               <p:cNvPr id="4" name="Tabella 3">
@@ -7268,7 +9974,7 @@
               <p:nvPr>
                 <p:extLst>
                   <p:ext uri="{D42A27DB-BD31-4B8C-83A1-F6EECF244321}">
-                    <p14:modId xmlns:p14="http://schemas.microsoft.com/office/powerpoint/2010/main" val="1764873088"/>
+                    <p14:modId xmlns:p14="http://schemas.microsoft.com/office/powerpoint/2010/main" val="3367083162"/>
                   </p:ext>
                 </p:extLst>
               </p:nvPr>
@@ -7889,7 +10595,7 @@
             </a:graphic>
           </p:graphicFrame>
         </mc:Choice>
-        <mc:Fallback xmlns="">
+        <mc:Fallback>
           <p:graphicFrame>
             <p:nvGraphicFramePr>
               <p:cNvPr id="4" name="Tabella 3">
@@ -7905,7 +10611,7 @@
               <p:nvPr>
                 <p:extLst>
                   <p:ext uri="{D42A27DB-BD31-4B8C-83A1-F6EECF244321}">
-                    <p14:modId xmlns:p14="http://schemas.microsoft.com/office/powerpoint/2010/main" val="1764873088"/>
+                    <p14:modId xmlns:p14="http://schemas.microsoft.com/office/powerpoint/2010/main" val="3367083162"/>
                   </p:ext>
                 </p:extLst>
               </p:nvPr>
@@ -8217,7 +10923,7 @@
 </p:sld>
 </file>
 
-<file path=ppt/slides/slide14.xml><?xml version="1.0" encoding="utf-8"?>
+<file path=ppt/slides/slide16.xml><?xml version="1.0" encoding="utf-8"?>
 <p:sld xmlns:a="http://schemas.openxmlformats.org/drawingml/2006/main" xmlns:r="http://schemas.openxmlformats.org/officeDocument/2006/relationships" xmlns:p="http://schemas.openxmlformats.org/presentationml/2006/main">
   <p:cSld>
     <p:spTree>
@@ -8240,8 +10946,8 @@
           <a:chExt cx="0" cy="0"/>
         </a:xfrm>
       </p:grpSpPr>
-      <mc:AlternateContent xmlns:mc="http://schemas.openxmlformats.org/markup-compatibility/2006" xmlns:a14="http://schemas.microsoft.com/office/drawing/2010/main">
-        <mc:Choice Requires="a14">
+      <mc:AlternateContent xmlns:mc="http://schemas.openxmlformats.org/markup-compatibility/2006">
+        <mc:Choice xmlns:a14="http://schemas.microsoft.com/office/drawing/2010/main" Requires="a14">
           <p:sp>
             <p:nvSpPr>
               <p:cNvPr id="4" name="Titolo 1">
@@ -8350,7 +11056,7 @@
             </p:txBody>
           </p:sp>
         </mc:Choice>
-        <mc:Fallback xmlns="">
+        <mc:Fallback>
           <p:sp>
             <p:nvSpPr>
               <p:cNvPr id="4" name="Titolo 1">
@@ -8423,148 +11129,24 @@
           <a:lstStyle/>
           <a:p>
             <a:r>
-              <a:rPr lang="it-IT" dirty="0" err="1"/>
-              <a:t>Finally</a:t>
+              <a:rPr lang="en-GB" noProof="0" dirty="0"/>
+              <a:t>Finally we look at the final model, computed as the median of the models computed on each sample (and not the model on the median values) and we also plot the interval </a:t>
             </a:r>
             <a:r>
-              <a:rPr lang="it-IT" dirty="0"/>
-              <a:t> we look </a:t>
-            </a:r>
-            <a:r>
-              <a:rPr lang="it-IT" dirty="0" err="1"/>
-              <a:t>at</a:t>
-            </a:r>
-            <a:r>
-              <a:rPr lang="it-IT" dirty="0"/>
-              <a:t> the </a:t>
-            </a:r>
-            <a:r>
-              <a:rPr lang="it-IT" dirty="0" err="1"/>
-              <a:t>final</a:t>
-            </a:r>
-            <a:r>
-              <a:rPr lang="it-IT" dirty="0"/>
-              <a:t> model, </a:t>
-            </a:r>
-            <a:r>
-              <a:rPr lang="it-IT" dirty="0" err="1"/>
-              <a:t>computed</a:t>
-            </a:r>
-            <a:r>
-              <a:rPr lang="it-IT" dirty="0"/>
-              <a:t> </a:t>
-            </a:r>
-            <a:r>
-              <a:rPr lang="it-IT" dirty="0" err="1"/>
-              <a:t>as</a:t>
-            </a:r>
-            <a:r>
-              <a:rPr lang="it-IT" dirty="0"/>
-              <a:t> the </a:t>
-            </a:r>
-            <a:r>
-              <a:rPr lang="it-IT" dirty="0" err="1"/>
-              <a:t>median</a:t>
-            </a:r>
-            <a:r>
-              <a:rPr lang="it-IT" dirty="0"/>
-              <a:t> of the models </a:t>
-            </a:r>
-            <a:r>
-              <a:rPr lang="it-IT" dirty="0" err="1"/>
-              <a:t>computed</a:t>
-            </a:r>
-            <a:r>
-              <a:rPr lang="it-IT" dirty="0"/>
-              <a:t> on </a:t>
-            </a:r>
-            <a:r>
-              <a:rPr lang="it-IT" dirty="0" err="1"/>
-              <a:t>each</a:t>
-            </a:r>
-            <a:r>
-              <a:rPr lang="it-IT" dirty="0"/>
-              <a:t> sample (and not the model on the </a:t>
-            </a:r>
-            <a:r>
-              <a:rPr lang="it-IT" dirty="0" err="1"/>
-              <a:t>median</a:t>
-            </a:r>
-            <a:r>
-              <a:rPr lang="it-IT" dirty="0"/>
-              <a:t> </a:t>
-            </a:r>
-            <a:r>
-              <a:rPr lang="it-IT" dirty="0" err="1"/>
-              <a:t>values</a:t>
-            </a:r>
-            <a:r>
-              <a:rPr lang="it-IT" dirty="0"/>
-              <a:t>) and we </a:t>
-            </a:r>
-            <a:r>
-              <a:rPr lang="it-IT" dirty="0" err="1"/>
-              <a:t>also</a:t>
-            </a:r>
-            <a:r>
-              <a:rPr lang="it-IT" dirty="0"/>
-              <a:t> plot the </a:t>
-            </a:r>
-            <a:r>
-              <a:rPr lang="it-IT" dirty="0" err="1"/>
-              <a:t>interval</a:t>
-            </a:r>
-            <a:r>
-              <a:rPr lang="it-IT" dirty="0"/>
-              <a:t> </a:t>
-            </a:r>
-            <a:r>
-              <a:rPr lang="it-IT" dirty="0" err="1"/>
+              <a:rPr lang="en-GB" noProof="0" dirty="0" err="1"/>
               <a:t>corrisponding</a:t>
             </a:r>
             <a:r>
-              <a:rPr lang="it-IT" dirty="0"/>
-              <a:t> to 68% </a:t>
+              <a:rPr lang="en-GB" noProof="0" dirty="0"/>
+              <a:t> to 68% level of confidence. We also show the two </a:t>
             </a:r>
             <a:r>
-              <a:rPr lang="it-IT" dirty="0" err="1"/>
-              <a:t>level</a:t>
-            </a:r>
-            <a:r>
-              <a:rPr lang="it-IT" dirty="0"/>
-              <a:t> of confidence. We </a:t>
-            </a:r>
-            <a:r>
-              <a:rPr lang="it-IT" dirty="0" err="1"/>
-              <a:t>also</a:t>
-            </a:r>
-            <a:r>
-              <a:rPr lang="it-IT" dirty="0"/>
-              <a:t> show the </a:t>
-            </a:r>
-            <a:r>
-              <a:rPr lang="it-IT" dirty="0" err="1"/>
-              <a:t>two</a:t>
-            </a:r>
-            <a:r>
-              <a:rPr lang="it-IT" dirty="0"/>
-              <a:t> </a:t>
-            </a:r>
-            <a:r>
-              <a:rPr lang="it-IT" dirty="0" err="1"/>
+              <a:rPr lang="en-GB" noProof="0" dirty="0" err="1"/>
               <a:t>separete</a:t>
             </a:r>
             <a:r>
-              <a:rPr lang="it-IT" dirty="0"/>
-              <a:t> </a:t>
-            </a:r>
-            <a:r>
-              <a:rPr lang="it-IT" dirty="0" err="1"/>
-              <a:t>components</a:t>
-            </a:r>
-            <a:r>
-              <a:rPr lang="it-IT" dirty="0"/>
-              <a:t> of the model</a:t>
+              <a:rPr lang="en-GB" noProof="0" dirty="0"/>
+              <a:t> components of the model</a:t>
             </a:r>
           </a:p>
         </p:txBody>
@@ -8598,18 +11180,14 @@
           <a:lstStyle/>
           <a:p>
             <a:r>
-              <a:rPr lang="it-IT" dirty="0" err="1"/>
-              <a:t>Final</a:t>
+              <a:rPr lang="en-GB" noProof="0" dirty="0"/>
+              <a:t>Final model </a:t>
             </a:r>
             <a:r>
-              <a:rPr lang="it-IT" dirty="0"/>
-              <a:t> model </a:t>
-            </a:r>
-            <a:r>
-              <a:rPr lang="it-IT" dirty="0" err="1"/>
+              <a:rPr lang="en-GB" noProof="0" dirty="0" err="1"/>
               <a:t>img</a:t>
             </a:r>
-            <a:endParaRPr lang="it-IT" dirty="0"/>
+            <a:endParaRPr lang="en-GB" noProof="0" dirty="0"/>
           </a:p>
         </p:txBody>
       </p:sp>
@@ -8626,7 +11204,7 @@
 </p:sld>
 </file>
 
-<file path=ppt/slides/slide15.xml><?xml version="1.0" encoding="utf-8"?>
+<file path=ppt/slides/slide17.xml><?xml version="1.0" encoding="utf-8"?>
 <p:sld xmlns:a="http://schemas.openxmlformats.org/drawingml/2006/main" xmlns:r="http://schemas.openxmlformats.org/officeDocument/2006/relationships" xmlns:p="http://schemas.openxmlformats.org/presentationml/2006/main">
   <p:cSld>
     <p:spTree>
@@ -8649,8 +11227,8 @@
           <a:chExt cx="0" cy="0"/>
         </a:xfrm>
       </p:grpSpPr>
-      <mc:AlternateContent xmlns:mc="http://schemas.openxmlformats.org/markup-compatibility/2006" xmlns:a14="http://schemas.microsoft.com/office/drawing/2010/main">
-        <mc:Choice Requires="a14">
+      <mc:AlternateContent xmlns:mc="http://schemas.openxmlformats.org/markup-compatibility/2006">
+        <mc:Choice xmlns:a14="http://schemas.microsoft.com/office/drawing/2010/main" Requires="a14">
           <p:sp>
             <p:nvSpPr>
               <p:cNvPr id="4" name="Titolo 1">
@@ -8759,7 +11337,7 @@
             </p:txBody>
           </p:sp>
         </mc:Choice>
-        <mc:Fallback xmlns="">
+        <mc:Fallback>
           <p:sp>
             <p:nvSpPr>
               <p:cNvPr id="4" name="Titolo 1">
@@ -8832,12 +11410,8 @@
           <a:lstStyle/>
           <a:p>
             <a:r>
-              <a:rPr lang="it-IT" dirty="0" err="1"/>
-              <a:t>Consider</a:t>
-            </a:r>
-            <a:r>
-              <a:rPr lang="it-IT" dirty="0"/>
-              <a:t> </a:t>
+              <a:rPr lang="en-GB" noProof="0" dirty="0"/>
+              <a:t>Consider </a:t>
             </a:r>
           </a:p>
         </p:txBody>
@@ -8855,7 +11429,7 @@
 </p:sld>
 </file>
 
-<file path=ppt/slides/slide16.xml><?xml version="1.0" encoding="utf-8"?>
+<file path=ppt/slides/slide18.xml><?xml version="1.0" encoding="utf-8"?>
 <p:sld xmlns:a="http://schemas.openxmlformats.org/drawingml/2006/main" xmlns:r="http://schemas.openxmlformats.org/officeDocument/2006/relationships" xmlns:p="http://schemas.openxmlformats.org/presentationml/2006/main">
   <p:cSld>
     <p:spTree>
@@ -8959,7 +11533,7 @@
 </p:sld>
 </file>
 
-<file path=ppt/slides/slide17.xml><?xml version="1.0" encoding="utf-8"?>
+<file path=ppt/slides/slide19.xml><?xml version="1.0" encoding="utf-8"?>
 <p:sld xmlns:a="http://schemas.openxmlformats.org/drawingml/2006/main" xmlns:r="http://schemas.openxmlformats.org/officeDocument/2006/relationships" xmlns:p="http://schemas.openxmlformats.org/presentationml/2006/main">
   <p:cSld>
     <p:spTree>
@@ -9164,77 +11738,6 @@
 </p:sld>
 </file>
 
-<file path=ppt/slides/slide18.xml><?xml version="1.0" encoding="utf-8"?>
-<p:sld xmlns:a="http://schemas.openxmlformats.org/drawingml/2006/main" xmlns:r="http://schemas.openxmlformats.org/officeDocument/2006/relationships" xmlns:p="http://schemas.openxmlformats.org/presentationml/2006/main">
-  <p:cSld>
-    <p:spTree>
-      <p:nvGrpSpPr>
-        <p:cNvPr id="1" name=""/>
-        <p:cNvGrpSpPr/>
-        <p:nvPr/>
-      </p:nvGrpSpPr>
-      <p:grpSpPr>
-        <a:xfrm>
-          <a:off x="0" y="0"/>
-          <a:ext cx="0" cy="0"/>
-          <a:chOff x="0" y="0"/>
-          <a:chExt cx="0" cy="0"/>
-        </a:xfrm>
-      </p:grpSpPr>
-      <p:sp>
-        <p:nvSpPr>
-          <p:cNvPr id="2" name="Titolo 1">
-            <a:extLst>
-              <a:ext uri="{FF2B5EF4-FFF2-40B4-BE49-F238E27FC236}">
-                <a16:creationId xmlns:a16="http://schemas.microsoft.com/office/drawing/2014/main" id="{439A5647-C4A9-AA24-0F75-5527236F72AB}"/>
-              </a:ext>
-            </a:extLst>
-          </p:cNvPr>
-          <p:cNvSpPr>
-            <a:spLocks noGrp="1"/>
-          </p:cNvSpPr>
-          <p:nvPr>
-            <p:ph type="ctrTitle"/>
-          </p:nvPr>
-        </p:nvSpPr>
-        <p:spPr>
-          <a:xfrm>
-            <a:off x="2060722" y="2164611"/>
-            <a:ext cx="8070556" cy="2528778"/>
-          </a:xfrm>
-        </p:spPr>
-        <p:txBody>
-          <a:bodyPr anchor="ctr">
-            <a:normAutofit/>
-          </a:bodyPr>
-          <a:lstStyle/>
-          <a:p>
-            <a:pPr algn="ctr"/>
-            <a:r>
-              <a:rPr lang="en-GB" sz="6000" noProof="0" dirty="0"/>
-              <a:t>Grazie per </a:t>
-            </a:r>
-            <a:r>
-              <a:rPr lang="en-GB" sz="6000" noProof="0" dirty="0" err="1"/>
-              <a:t>l’attenzione</a:t>
-            </a:r>
-            <a:endParaRPr lang="en-GB" sz="6000" noProof="0" dirty="0"/>
-          </a:p>
-        </p:txBody>
-      </p:sp>
-    </p:spTree>
-    <p:extLst>
-      <p:ext uri="{BB962C8B-B14F-4D97-AF65-F5344CB8AC3E}">
-        <p14:creationId xmlns:p14="http://schemas.microsoft.com/office/powerpoint/2010/main" val="1653933529"/>
-      </p:ext>
-    </p:extLst>
-  </p:cSld>
-  <p:clrMapOvr>
-    <a:masterClrMapping/>
-  </p:clrMapOvr>
-</p:sld>
-</file>
-
 <file path=ppt/slides/slide2.xml><?xml version="1.0" encoding="utf-8"?>
 <p:sld xmlns:a="http://schemas.openxmlformats.org/drawingml/2006/main" xmlns:r="http://schemas.openxmlformats.org/officeDocument/2006/relationships" xmlns:p="http://schemas.openxmlformats.org/presentationml/2006/main">
   <p:cSld>
@@ -9280,8 +11783,8 @@
           </a:p>
         </p:txBody>
       </p:sp>
-      <mc:AlternateContent xmlns:mc="http://schemas.openxmlformats.org/markup-compatibility/2006" xmlns:a14="http://schemas.microsoft.com/office/drawing/2010/main">
-        <mc:Choice Requires="a14">
+      <mc:AlternateContent xmlns:mc="http://schemas.openxmlformats.org/markup-compatibility/2006">
+        <mc:Choice xmlns:a14="http://schemas.microsoft.com/office/drawing/2010/main" Requires="a14">
           <p:sp>
             <p:nvSpPr>
               <p:cNvPr id="5" name="Segnaposto contenuto 4">
@@ -9567,7 +12070,7 @@
             </p:txBody>
           </p:sp>
         </mc:Choice>
-        <mc:Fallback xmlns="">
+        <mc:Fallback>
           <p:sp>
             <p:nvSpPr>
               <p:cNvPr id="5" name="Segnaposto contenuto 4">
@@ -9611,6 +12114,77 @@
     <p:extLst>
       <p:ext uri="{BB962C8B-B14F-4D97-AF65-F5344CB8AC3E}">
         <p14:creationId xmlns:p14="http://schemas.microsoft.com/office/powerpoint/2010/main" val="619311590"/>
+      </p:ext>
+    </p:extLst>
+  </p:cSld>
+  <p:clrMapOvr>
+    <a:masterClrMapping/>
+  </p:clrMapOvr>
+</p:sld>
+</file>
+
+<file path=ppt/slides/slide20.xml><?xml version="1.0" encoding="utf-8"?>
+<p:sld xmlns:a="http://schemas.openxmlformats.org/drawingml/2006/main" xmlns:r="http://schemas.openxmlformats.org/officeDocument/2006/relationships" xmlns:p="http://schemas.openxmlformats.org/presentationml/2006/main">
+  <p:cSld>
+    <p:spTree>
+      <p:nvGrpSpPr>
+        <p:cNvPr id="1" name=""/>
+        <p:cNvGrpSpPr/>
+        <p:nvPr/>
+      </p:nvGrpSpPr>
+      <p:grpSpPr>
+        <a:xfrm>
+          <a:off x="0" y="0"/>
+          <a:ext cx="0" cy="0"/>
+          <a:chOff x="0" y="0"/>
+          <a:chExt cx="0" cy="0"/>
+        </a:xfrm>
+      </p:grpSpPr>
+      <p:sp>
+        <p:nvSpPr>
+          <p:cNvPr id="2" name="Titolo 1">
+            <a:extLst>
+              <a:ext uri="{FF2B5EF4-FFF2-40B4-BE49-F238E27FC236}">
+                <a16:creationId xmlns:a16="http://schemas.microsoft.com/office/drawing/2014/main" id="{439A5647-C4A9-AA24-0F75-5527236F72AB}"/>
+              </a:ext>
+            </a:extLst>
+          </p:cNvPr>
+          <p:cNvSpPr>
+            <a:spLocks noGrp="1"/>
+          </p:cNvSpPr>
+          <p:nvPr>
+            <p:ph type="ctrTitle"/>
+          </p:nvPr>
+        </p:nvSpPr>
+        <p:spPr>
+          <a:xfrm>
+            <a:off x="2060722" y="2164611"/>
+            <a:ext cx="8070556" cy="2528778"/>
+          </a:xfrm>
+        </p:spPr>
+        <p:txBody>
+          <a:bodyPr anchor="ctr">
+            <a:normAutofit/>
+          </a:bodyPr>
+          <a:lstStyle/>
+          <a:p>
+            <a:pPr algn="ctr"/>
+            <a:r>
+              <a:rPr lang="en-GB" sz="6000" noProof="0" dirty="0"/>
+              <a:t>Grazie per </a:t>
+            </a:r>
+            <a:r>
+              <a:rPr lang="en-GB" sz="6000" noProof="0" dirty="0" err="1"/>
+              <a:t>l’attenzione</a:t>
+            </a:r>
+            <a:endParaRPr lang="en-GB" sz="6000" noProof="0" dirty="0"/>
+          </a:p>
+        </p:txBody>
+      </p:sp>
+    </p:spTree>
+    <p:extLst>
+      <p:ext uri="{BB962C8B-B14F-4D97-AF65-F5344CB8AC3E}">
+        <p14:creationId xmlns:p14="http://schemas.microsoft.com/office/powerpoint/2010/main" val="1653933529"/>
       </p:ext>
     </p:extLst>
   </p:cSld>
@@ -9679,8 +12253,8 @@
         </p:nvSpPr>
         <p:spPr>
           <a:xfrm>
-            <a:off x="1428108" y="1524000"/>
-            <a:ext cx="6010382" cy="646331"/>
+            <a:off x="642745" y="1524000"/>
+            <a:ext cx="5453255" cy="646331"/>
           </a:xfrm>
           <a:prstGeom prst="rect">
             <a:avLst/>
@@ -9695,17 +12269,168 @@
           <a:p>
             <a:r>
               <a:rPr lang="en-GB" noProof="0" dirty="0"/>
-              <a:t>They are transient events of energetic photons, with a first peak and then an afterglow  </a:t>
+              <a:t>They are transient events of high energy photons and extragalactic origin, discovered in 1973</a:t>
             </a:r>
           </a:p>
         </p:txBody>
       </p:sp>
+      <mc:AlternateContent xmlns:mc="http://schemas.openxmlformats.org/markup-compatibility/2006">
+        <mc:Choice xmlns:a14="http://schemas.microsoft.com/office/drawing/2010/main" Requires="a14">
+          <p:sp>
+            <p:nvSpPr>
+              <p:cNvPr id="5" name="CasellaDiTesto 4">
+                <a:extLst>
+                  <a:ext uri="{FF2B5EF4-FFF2-40B4-BE49-F238E27FC236}">
+                    <a16:creationId xmlns:a16="http://schemas.microsoft.com/office/drawing/2014/main" id="{BB2D5997-D077-E740-00D6-9083B5BB979E}"/>
+                  </a:ext>
+                </a:extLst>
+              </p:cNvPr>
+              <p:cNvSpPr txBox="1"/>
+              <p:nvPr/>
+            </p:nvSpPr>
+            <p:spPr>
+              <a:xfrm>
+                <a:off x="965769" y="4088602"/>
+                <a:ext cx="3955552" cy="923330"/>
+              </a:xfrm>
+              <a:prstGeom prst="rect">
+                <a:avLst/>
+              </a:prstGeom>
+              <a:noFill/>
+            </p:spPr>
+            <p:txBody>
+              <a:bodyPr wrap="square" rtlCol="0">
+                <a:spAutoFit/>
+              </a:bodyPr>
+              <a:lstStyle/>
+              <a:p>
+                <a:pPr marL="285750" indent="-285750">
+                  <a:buClr>
+                    <a:schemeClr val="accent1"/>
+                  </a:buClr>
+                  <a:buFont typeface="Arial" panose="020B0604020202020204" pitchFamily="34" charset="0"/>
+                  <a:buChar char="•"/>
+                </a:pPr>
+                <a:r>
+                  <a:rPr lang="en-GB" noProof="0" dirty="0"/>
+                  <a:t>The </a:t>
+                </a:r>
+                <a14:m>
+                  <m:oMath xmlns:m="http://schemas.openxmlformats.org/officeDocument/2006/math">
+                    <m:sSub>
+                      <m:sSubPr>
+                        <m:ctrlPr>
+                          <a:rPr lang="en-GB" i="1" noProof="0" smtClean="0">
+                            <a:latin typeface="Cambria Math" panose="02040503050406030204" pitchFamily="18" charset="0"/>
+                          </a:rPr>
+                        </m:ctrlPr>
+                      </m:sSubPr>
+                      <m:e>
+                        <m:r>
+                          <a:rPr lang="en-GB" i="1" noProof="0" smtClean="0">
+                            <a:latin typeface="Cambria Math" panose="02040503050406030204" pitchFamily="18" charset="0"/>
+                          </a:rPr>
+                          <m:t>𝑇</m:t>
+                        </m:r>
+                      </m:e>
+                      <m:sub>
+                        <m:r>
+                          <a:rPr lang="en-GB" i="1" noProof="0" smtClean="0">
+                            <a:latin typeface="Cambria Math" panose="02040503050406030204" pitchFamily="18" charset="0"/>
+                          </a:rPr>
+                          <m:t>90</m:t>
+                        </m:r>
+                      </m:sub>
+                    </m:sSub>
+                  </m:oMath>
+                </a14:m>
+                <a:r>
+                  <a:rPr lang="en-GB" noProof="0" dirty="0"/>
+                  <a:t>: the time needed to pass from </a:t>
+                </a:r>
+                <a14:m>
+                  <m:oMath xmlns:m="http://schemas.openxmlformats.org/officeDocument/2006/math">
+                    <m:r>
+                      <a:rPr lang="en-GB" i="1" noProof="0" smtClean="0">
+                        <a:latin typeface="Cambria Math" panose="02040503050406030204" pitchFamily="18" charset="0"/>
+                      </a:rPr>
+                      <m:t>5%</m:t>
+                    </m:r>
+                  </m:oMath>
+                </a14:m>
+                <a:r>
+                  <a:rPr lang="en-GB" noProof="0" dirty="0"/>
+                  <a:t> to </a:t>
+                </a:r>
+                <a14:m>
+                  <m:oMath xmlns:m="http://schemas.openxmlformats.org/officeDocument/2006/math">
+                    <m:r>
+                      <a:rPr lang="en-GB" i="1" noProof="0" smtClean="0">
+                        <a:latin typeface="Cambria Math" panose="02040503050406030204" pitchFamily="18" charset="0"/>
+                      </a:rPr>
+                      <m:t>95%</m:t>
+                    </m:r>
+                  </m:oMath>
+                </a14:m>
+                <a:r>
+                  <a:rPr lang="en-GB" noProof="0" dirty="0"/>
+                  <a:t> of the total flux of the prompt emission</a:t>
+                </a:r>
+              </a:p>
+            </p:txBody>
+          </p:sp>
+        </mc:Choice>
+        <mc:Fallback>
+          <p:sp>
+            <p:nvSpPr>
+              <p:cNvPr id="5" name="CasellaDiTesto 4">
+                <a:extLst>
+                  <a:ext uri="{FF2B5EF4-FFF2-40B4-BE49-F238E27FC236}">
+                    <a16:creationId xmlns:a16="http://schemas.microsoft.com/office/drawing/2014/main" id="{BB2D5997-D077-E740-00D6-9083B5BB979E}"/>
+                  </a:ext>
+                </a:extLst>
+              </p:cNvPr>
+              <p:cNvSpPr txBox="1">
+                <a:spLocks noRot="1" noChangeAspect="1" noMove="1" noResize="1" noEditPoints="1" noAdjustHandles="1" noChangeArrowheads="1" noChangeShapeType="1" noTextEdit="1"/>
+              </p:cNvSpPr>
+              <p:nvPr/>
+            </p:nvSpPr>
+            <p:spPr>
+              <a:xfrm>
+                <a:off x="965769" y="4088602"/>
+                <a:ext cx="3955552" cy="923330"/>
+              </a:xfrm>
+              <a:prstGeom prst="rect">
+                <a:avLst/>
+              </a:prstGeom>
+              <a:blipFill>
+                <a:blip r:embed="rId2"/>
+                <a:stretch>
+                  <a:fillRect l="-924" t="-3974" r="-924" b="-9934"/>
+                </a:stretch>
+              </a:blipFill>
+            </p:spPr>
+            <p:txBody>
+              <a:bodyPr/>
+              <a:lstStyle/>
+              <a:p>
+                <a:r>
+                  <a:rPr lang="it-IT">
+                    <a:noFill/>
+                  </a:rPr>
+                  <a:t> </a:t>
+                </a:r>
+              </a:p>
+            </p:txBody>
+          </p:sp>
+        </mc:Fallback>
+      </mc:AlternateContent>
       <p:sp>
         <p:nvSpPr>
-          <p:cNvPr id="5" name="CasellaDiTesto 4">
+          <p:cNvPr id="3" name="CasellaDiTesto 2">
             <a:extLst>
               <a:ext uri="{FF2B5EF4-FFF2-40B4-BE49-F238E27FC236}">
-                <a16:creationId xmlns:a16="http://schemas.microsoft.com/office/drawing/2014/main" id="{BB2D5997-D077-E740-00D6-9083B5BB979E}"/>
+                <a16:creationId xmlns:a16="http://schemas.microsoft.com/office/drawing/2014/main" id="{F62D1E21-4A41-BCD1-B17D-D2C980FCA663}"/>
               </a:ext>
             </a:extLst>
           </p:cNvPr>
@@ -9714,8 +12439,47 @@
         </p:nvSpPr>
         <p:spPr>
           <a:xfrm>
-            <a:off x="1613043" y="2917861"/>
-            <a:ext cx="4356242" cy="369332"/>
+            <a:off x="6725046" y="5585992"/>
+            <a:ext cx="3400746" cy="646331"/>
+          </a:xfrm>
+          <a:prstGeom prst="rect">
+            <a:avLst/>
+          </a:prstGeom>
+          <a:noFill/>
+        </p:spPr>
+        <p:txBody>
+          <a:bodyPr wrap="square" rtlCol="0">
+            <a:spAutoFit/>
+          </a:bodyPr>
+          <a:lstStyle/>
+          <a:p>
+            <a:r>
+              <a:rPr lang="en-GB" noProof="0" dirty="0" err="1"/>
+              <a:t>Tipical</a:t>
+            </a:r>
+            <a:r>
+              <a:rPr lang="en-GB" noProof="0" dirty="0"/>
+              <a:t> light curve of a GRB? Or artistic representation?</a:t>
+            </a:r>
+          </a:p>
+        </p:txBody>
+      </p:sp>
+      <p:sp>
+        <p:nvSpPr>
+          <p:cNvPr id="7" name="CasellaDiTesto 6">
+            <a:extLst>
+              <a:ext uri="{FF2B5EF4-FFF2-40B4-BE49-F238E27FC236}">
+                <a16:creationId xmlns:a16="http://schemas.microsoft.com/office/drawing/2014/main" id="{6BDDFA3F-58E9-A49B-FECA-682E57562B2A}"/>
+              </a:ext>
+            </a:extLst>
+          </p:cNvPr>
+          <p:cNvSpPr txBox="1"/>
+          <p:nvPr/>
+        </p:nvSpPr>
+        <p:spPr>
+          <a:xfrm>
+            <a:off x="642744" y="3534824"/>
+            <a:ext cx="4793387" cy="369332"/>
           </a:xfrm>
           <a:prstGeom prst="rect">
             <a:avLst/>
@@ -9730,17 +12494,129 @@
           <a:p>
             <a:r>
               <a:rPr lang="en-GB" noProof="0" dirty="0"/>
-              <a:t>The T_90</a:t>
+              <a:t>We will use two </a:t>
+            </a:r>
+            <a:r>
+              <a:rPr lang="en-GB" noProof="0" dirty="0" err="1"/>
+              <a:t>propieties</a:t>
+            </a:r>
+            <a:r>
+              <a:rPr lang="en-GB" noProof="0" dirty="0"/>
+              <a:t> to classify them:</a:t>
             </a:r>
           </a:p>
         </p:txBody>
       </p:sp>
+      <mc:AlternateContent xmlns:mc="http://schemas.openxmlformats.org/markup-compatibility/2006">
+        <mc:Choice xmlns:a14="http://schemas.microsoft.com/office/drawing/2010/main" Requires="a14">
+          <p:sp>
+            <p:nvSpPr>
+              <p:cNvPr id="8" name="CasellaDiTesto 7">
+                <a:extLst>
+                  <a:ext uri="{FF2B5EF4-FFF2-40B4-BE49-F238E27FC236}">
+                    <a16:creationId xmlns:a16="http://schemas.microsoft.com/office/drawing/2014/main" id="{B0D7A5BB-1798-EFB1-5B5A-5A00218FC24F}"/>
+                  </a:ext>
+                </a:extLst>
+              </p:cNvPr>
+              <p:cNvSpPr txBox="1"/>
+              <p:nvPr/>
+            </p:nvSpPr>
+            <p:spPr>
+              <a:xfrm>
+                <a:off x="965768" y="5473377"/>
+                <a:ext cx="3955551" cy="646331"/>
+              </a:xfrm>
+              <a:prstGeom prst="rect">
+                <a:avLst/>
+              </a:prstGeom>
+              <a:noFill/>
+            </p:spPr>
+            <p:txBody>
+              <a:bodyPr wrap="square" rtlCol="0">
+                <a:spAutoFit/>
+              </a:bodyPr>
+              <a:lstStyle/>
+              <a:p>
+                <a:pPr marL="285750" indent="-285750">
+                  <a:buClr>
+                    <a:schemeClr val="accent1"/>
+                  </a:buClr>
+                  <a:buFont typeface="Arial" panose="020B0604020202020204" pitchFamily="34" charset="0"/>
+                  <a:buChar char="•"/>
+                </a:pPr>
+                <a:r>
+                  <a:rPr lang="en-GB" noProof="0" dirty="0"/>
+                  <a:t>The </a:t>
+                </a:r>
+                <a14:m>
+                  <m:oMath xmlns:m="http://schemas.openxmlformats.org/officeDocument/2006/math">
+                    <m:r>
+                      <a:rPr lang="en-GB" b="0" i="1" noProof="0" smtClean="0">
+                        <a:latin typeface="Cambria Math" panose="02040503050406030204" pitchFamily="18" charset="0"/>
+                      </a:rPr>
+                      <m:t>𝐻𝑅</m:t>
+                    </m:r>
+                  </m:oMath>
+                </a14:m>
+                <a:r>
+                  <a:rPr lang="en-GB" noProof="0" dirty="0"/>
+                  <a:t>: the ratio between fluxes in different energy bands</a:t>
+                </a:r>
+              </a:p>
+            </p:txBody>
+          </p:sp>
+        </mc:Choice>
+        <mc:Fallback>
+          <p:sp>
+            <p:nvSpPr>
+              <p:cNvPr id="8" name="CasellaDiTesto 7">
+                <a:extLst>
+                  <a:ext uri="{FF2B5EF4-FFF2-40B4-BE49-F238E27FC236}">
+                    <a16:creationId xmlns:a16="http://schemas.microsoft.com/office/drawing/2014/main" id="{B0D7A5BB-1798-EFB1-5B5A-5A00218FC24F}"/>
+                  </a:ext>
+                </a:extLst>
+              </p:cNvPr>
+              <p:cNvSpPr txBox="1">
+                <a:spLocks noRot="1" noChangeAspect="1" noMove="1" noResize="1" noEditPoints="1" noAdjustHandles="1" noChangeArrowheads="1" noChangeShapeType="1" noTextEdit="1"/>
+              </p:cNvSpPr>
+              <p:nvPr/>
+            </p:nvSpPr>
+            <p:spPr>
+              <a:xfrm>
+                <a:off x="965768" y="5473377"/>
+                <a:ext cx="3955551" cy="646331"/>
+              </a:xfrm>
+              <a:prstGeom prst="rect">
+                <a:avLst/>
+              </a:prstGeom>
+              <a:blipFill>
+                <a:blip r:embed="rId3"/>
+                <a:stretch>
+                  <a:fillRect l="-924" t="-5660" r="-2311" b="-14151"/>
+                </a:stretch>
+              </a:blipFill>
+            </p:spPr>
+            <p:txBody>
+              <a:bodyPr/>
+              <a:lstStyle/>
+              <a:p>
+                <a:r>
+                  <a:rPr lang="it-IT">
+                    <a:noFill/>
+                  </a:rPr>
+                  <a:t> </a:t>
+                </a:r>
+              </a:p>
+            </p:txBody>
+          </p:sp>
+        </mc:Fallback>
+      </mc:AlternateContent>
       <p:sp>
         <p:nvSpPr>
-          <p:cNvPr id="6" name="CasellaDiTesto 5">
+          <p:cNvPr id="10" name="CasellaDiTesto 9">
             <a:extLst>
               <a:ext uri="{FF2B5EF4-FFF2-40B4-BE49-F238E27FC236}">
-                <a16:creationId xmlns:a16="http://schemas.microsoft.com/office/drawing/2014/main" id="{2DEF3CAB-2DE1-370D-337D-97E3B76FAD6B}"/>
+                <a16:creationId xmlns:a16="http://schemas.microsoft.com/office/drawing/2014/main" id="{F9891193-D7DB-F948-D66F-30644481FCA7}"/>
               </a:ext>
             </a:extLst>
           </p:cNvPr>
@@ -9749,8 +12625,8 @@
         </p:nvSpPr>
         <p:spPr>
           <a:xfrm>
-            <a:off x="1530849" y="4099389"/>
-            <a:ext cx="4356242" cy="369332"/>
+            <a:off x="5455346" y="2447220"/>
+            <a:ext cx="5453255" cy="646331"/>
           </a:xfrm>
           <a:prstGeom prst="rect">
             <a:avLst/>
@@ -9758,14 +12634,14 @@
           <a:noFill/>
         </p:spPr>
         <p:txBody>
-          <a:bodyPr wrap="square" rtlCol="0">
+          <a:bodyPr wrap="square">
             <a:spAutoFit/>
           </a:bodyPr>
           <a:lstStyle/>
           <a:p>
             <a:r>
               <a:rPr lang="en-GB" noProof="0" dirty="0"/>
-              <a:t>The HR</a:t>
+              <a:t>They are usually composed of a first peak (prompt emission) and then an afterglow  </a:t>
             </a:r>
           </a:p>
         </p:txBody>
@@ -9800,8 +12676,44 @@
           <a:chExt cx="0" cy="0"/>
         </a:xfrm>
       </p:grpSpPr>
-      <mc:AlternateContent xmlns:mc="http://schemas.openxmlformats.org/markup-compatibility/2006" xmlns:a14="http://schemas.microsoft.com/office/drawing/2010/main">
-        <mc:Choice Requires="a14">
+      <p:pic>
+        <p:nvPicPr>
+          <p:cNvPr id="11" name="Immagine 10">
+            <a:extLst>
+              <a:ext uri="{FF2B5EF4-FFF2-40B4-BE49-F238E27FC236}">
+                <a16:creationId xmlns:a16="http://schemas.microsoft.com/office/drawing/2014/main" id="{FFD638B5-9A04-E267-39AF-A853241D2619}"/>
+              </a:ext>
+            </a:extLst>
+          </p:cNvPr>
+          <p:cNvPicPr>
+            <a:picLocks noChangeAspect="1"/>
+          </p:cNvPicPr>
+          <p:nvPr/>
+        </p:nvPicPr>
+        <p:blipFill>
+          <a:blip r:embed="rId2">
+            <a:extLst>
+              <a:ext uri="{28A0092B-C50C-407E-A947-70E740481C1C}">
+                <a14:useLocalDpi xmlns:a14="http://schemas.microsoft.com/office/drawing/2010/main" val="0"/>
+              </a:ext>
+            </a:extLst>
+          </a:blip>
+          <a:stretch>
+            <a:fillRect/>
+          </a:stretch>
+        </p:blipFill>
+        <p:spPr>
+          <a:xfrm>
+            <a:off x="4784678" y="2258771"/>
+            <a:ext cx="6132305" cy="4599229"/>
+          </a:xfrm>
+          <a:prstGeom prst="rect">
+            <a:avLst/>
+          </a:prstGeom>
+        </p:spPr>
+      </p:pic>
+      <mc:AlternateContent xmlns:mc="http://schemas.openxmlformats.org/markup-compatibility/2006">
+        <mc:Choice xmlns:a14="http://schemas.microsoft.com/office/drawing/2010/main" Requires="a14">
           <p:sp>
             <p:nvSpPr>
               <p:cNvPr id="2" name="Titolo 1">
@@ -9903,7 +12815,7 @@
             </p:txBody>
           </p:sp>
         </mc:Choice>
-        <mc:Fallback xmlns="">
+        <mc:Fallback>
           <p:sp>
             <p:nvSpPr>
               <p:cNvPr id="2" name="Titolo 1">
@@ -9922,7 +12834,7 @@
             </p:nvSpPr>
             <p:spPr>
               <a:blipFill>
-                <a:blip r:embed="rId2"/>
+                <a:blip r:embed="rId3"/>
                 <a:stretch>
                   <a:fillRect l="-2533" t="-15842"/>
                 </a:stretch>
@@ -9943,8 +12855,8 @@
           </p:sp>
         </mc:Fallback>
       </mc:AlternateContent>
-      <mc:AlternateContent xmlns:mc="http://schemas.openxmlformats.org/markup-compatibility/2006" xmlns:a14="http://schemas.microsoft.com/office/drawing/2010/main">
-        <mc:Choice Requires="a14">
+      <mc:AlternateContent xmlns:mc="http://schemas.openxmlformats.org/markup-compatibility/2006">
+        <mc:Choice xmlns:a14="http://schemas.microsoft.com/office/drawing/2010/main" Requires="a14">
           <p:sp>
             <p:nvSpPr>
               <p:cNvPr id="4" name="CasellaDiTesto 3">
@@ -9959,8 +12871,8 @@
             </p:nvSpPr>
             <p:spPr>
               <a:xfrm>
-                <a:off x="1191802" y="1524000"/>
-                <a:ext cx="3102796" cy="1477328"/>
+                <a:off x="642744" y="1335441"/>
+                <a:ext cx="5234074" cy="646331"/>
               </a:xfrm>
               <a:prstGeom prst="rect">
                 <a:avLst/>
@@ -10086,15 +12998,12 @@
                     </m:func>
                   </m:oMath>
                 </a14:m>
-                <a:r>
-                  <a:rPr lang="en-GB" noProof="0" dirty="0"/>
-                  <a:t>. </a:t>
-                </a:r>
+                <a:endParaRPr lang="en-GB" noProof="0" dirty="0"/>
               </a:p>
             </p:txBody>
           </p:sp>
         </mc:Choice>
-        <mc:Fallback xmlns="">
+        <mc:Fallback>
           <p:sp>
             <p:nvSpPr>
               <p:cNvPr id="4" name="CasellaDiTesto 3">
@@ -10111,16 +13020,16 @@
             </p:nvSpPr>
             <p:spPr>
               <a:xfrm>
-                <a:off x="1191802" y="1524000"/>
-                <a:ext cx="3102796" cy="1477328"/>
+                <a:off x="642744" y="1335441"/>
+                <a:ext cx="5234074" cy="646331"/>
               </a:xfrm>
               <a:prstGeom prst="rect">
                 <a:avLst/>
               </a:prstGeom>
               <a:blipFill>
-                <a:blip r:embed="rId3"/>
+                <a:blip r:embed="rId4"/>
                 <a:stretch>
-                  <a:fillRect l="-1772" t="-2066" b="-5785"/>
+                  <a:fillRect l="-931" t="-4717" b="-14151"/>
                 </a:stretch>
               </a:blipFill>
             </p:spPr>
@@ -10139,8 +13048,8 @@
           </p:sp>
         </mc:Fallback>
       </mc:AlternateContent>
-      <mc:AlternateContent xmlns:mc="http://schemas.openxmlformats.org/markup-compatibility/2006" xmlns:a14="http://schemas.microsoft.com/office/drawing/2010/main">
-        <mc:Choice Requires="a14">
+      <mc:AlternateContent xmlns:mc="http://schemas.openxmlformats.org/markup-compatibility/2006">
+        <mc:Choice xmlns:a14="http://schemas.microsoft.com/office/drawing/2010/main" Requires="a14">
           <p:sp>
             <p:nvSpPr>
               <p:cNvPr id="5" name="CasellaDiTesto 4">
@@ -10155,7 +13064,7 @@
             </p:nvSpPr>
             <p:spPr>
               <a:xfrm>
-                <a:off x="1356189" y="3429000"/>
+                <a:off x="642743" y="3227598"/>
                 <a:ext cx="2938409" cy="646331"/>
               </a:xfrm>
               <a:prstGeom prst="rect">
@@ -10183,12 +13092,9 @@
                     </m:r>
                   </m:oMath>
                 </a14:m>
-                <a:endParaRPr lang="en-GB" noProof="0" dirty="0"/>
-              </a:p>
-              <a:p>
                 <a:r>
                   <a:rPr lang="en-GB" noProof="0" dirty="0"/>
-                  <a:t>Biggest value: </a:t>
+                  <a:t> Biggest value: </a:t>
                 </a:r>
                 <a14:m>
                   <m:oMath xmlns:m="http://schemas.openxmlformats.org/officeDocument/2006/math">
@@ -10208,7 +13114,7 @@
             </p:txBody>
           </p:sp>
         </mc:Choice>
-        <mc:Fallback xmlns="">
+        <mc:Fallback>
           <p:sp>
             <p:nvSpPr>
               <p:cNvPr id="5" name="CasellaDiTesto 4">
@@ -10225,16 +13131,16 @@
             </p:nvSpPr>
             <p:spPr>
               <a:xfrm>
-                <a:off x="1356189" y="3429000"/>
+                <a:off x="642743" y="3227598"/>
                 <a:ext cx="2938409" cy="646331"/>
               </a:xfrm>
               <a:prstGeom prst="rect">
                 <a:avLst/>
               </a:prstGeom>
               <a:blipFill>
-                <a:blip r:embed="rId4"/>
+                <a:blip r:embed="rId5"/>
                 <a:stretch>
-                  <a:fillRect l="-1660" t="-5660" b="-13208"/>
+                  <a:fillRect l="-1660" t="-4717" b="-14151"/>
                 </a:stretch>
               </a:blipFill>
             </p:spPr>
@@ -10253,8 +13159,8 @@
           </p:sp>
         </mc:Fallback>
       </mc:AlternateContent>
-      <mc:AlternateContent xmlns:mc="http://schemas.openxmlformats.org/markup-compatibility/2006" xmlns:a14="http://schemas.microsoft.com/office/drawing/2010/main">
-        <mc:Choice Requires="a14">
+      <mc:AlternateContent xmlns:mc="http://schemas.openxmlformats.org/markup-compatibility/2006">
+        <mc:Choice xmlns:a14="http://schemas.microsoft.com/office/drawing/2010/main" Requires="a14">
           <p:sp>
             <p:nvSpPr>
               <p:cNvPr id="6" name="CasellaDiTesto 5">
@@ -10269,8 +13175,8 @@
             </p:nvSpPr>
             <p:spPr>
               <a:xfrm>
-                <a:off x="1356189" y="4387065"/>
-                <a:ext cx="3359649" cy="369332"/>
+                <a:off x="909870" y="4357066"/>
+                <a:ext cx="2404153" cy="369332"/>
               </a:xfrm>
               <a:prstGeom prst="rect">
                 <a:avLst/>
@@ -10332,7 +13238,7 @@
             </p:txBody>
           </p:sp>
         </mc:Choice>
-        <mc:Fallback xmlns="">
+        <mc:Fallback>
           <p:sp>
             <p:nvSpPr>
               <p:cNvPr id="6" name="CasellaDiTesto 5">
@@ -10349,14 +13255,14 @@
             </p:nvSpPr>
             <p:spPr>
               <a:xfrm>
-                <a:off x="1356189" y="4387065"/>
-                <a:ext cx="3359649" cy="369332"/>
+                <a:off x="909870" y="4357066"/>
+                <a:ext cx="2404153" cy="369332"/>
               </a:xfrm>
               <a:prstGeom prst="rect">
                 <a:avLst/>
               </a:prstGeom>
               <a:blipFill>
-                <a:blip r:embed="rId5"/>
+                <a:blip r:embed="rId6"/>
                 <a:stretch>
                   <a:fillRect t="-10000" b="-26667"/>
                 </a:stretch>
@@ -10377,42 +13283,6 @@
           </p:sp>
         </mc:Fallback>
       </mc:AlternateContent>
-      <p:pic>
-        <p:nvPicPr>
-          <p:cNvPr id="10" name="Immagine 9">
-            <a:extLst>
-              <a:ext uri="{FF2B5EF4-FFF2-40B4-BE49-F238E27FC236}">
-                <a16:creationId xmlns:a16="http://schemas.microsoft.com/office/drawing/2014/main" id="{B05AFF13-2765-92A9-8188-D186DDDB7C13}"/>
-              </a:ext>
-            </a:extLst>
-          </p:cNvPr>
-          <p:cNvPicPr>
-            <a:picLocks noChangeAspect="1"/>
-          </p:cNvPicPr>
-          <p:nvPr/>
-        </p:nvPicPr>
-        <p:blipFill>
-          <a:blip r:embed="rId6">
-            <a:extLst>
-              <a:ext uri="{28A0092B-C50C-407E-A947-70E740481C1C}">
-                <a14:useLocalDpi xmlns:a14="http://schemas.microsoft.com/office/drawing/2010/main" val="0"/>
-              </a:ext>
-            </a:extLst>
-          </a:blip>
-          <a:stretch>
-            <a:fillRect/>
-          </a:stretch>
-        </p:blipFill>
-        <p:spPr>
-          <a:xfrm>
-            <a:off x="4983639" y="2262664"/>
-            <a:ext cx="5852172" cy="4389129"/>
-          </a:xfrm>
-          <a:prstGeom prst="rect">
-            <a:avLst/>
-          </a:prstGeom>
-        </p:spPr>
-      </p:pic>
       <p:sp>
         <p:nvSpPr>
           <p:cNvPr id="3" name="CasellaDiTesto 2">
@@ -10427,7 +13297,7 @@
         </p:nvSpPr>
         <p:spPr>
           <a:xfrm>
-            <a:off x="1027416" y="5578867"/>
+            <a:off x="909870" y="5322013"/>
             <a:ext cx="2938409" cy="923330"/>
           </a:xfrm>
           <a:prstGeom prst="rect">
@@ -10442,25 +13312,212 @@
           <a:lstStyle/>
           <a:p>
             <a:r>
-              <a:rPr lang="en-US" dirty="0"/>
-              <a:t>Mean error is: 1.74e-01</a:t>
+              <a:rPr lang="en-GB" noProof="0" dirty="0"/>
+              <a:t>Mean error is: 0.174</a:t>
             </a:r>
           </a:p>
           <a:p>
             <a:r>
-              <a:rPr lang="en-US" dirty="0"/>
-              <a:t>Median error is: 9.19e-02</a:t>
+              <a:rPr lang="en-GB" noProof="0" dirty="0"/>
+              <a:t>Median error is: 0.0919</a:t>
             </a:r>
           </a:p>
           <a:p>
             <a:r>
-              <a:rPr lang="en-US" dirty="0"/>
-              <a:t>A bin is large 2.24e-01</a:t>
+              <a:rPr lang="en-GB" noProof="0" dirty="0"/>
+              <a:t>A bin is large 0.224</a:t>
             </a:r>
-            <a:endParaRPr lang="it-IT" dirty="0"/>
           </a:p>
         </p:txBody>
       </p:sp>
+      <mc:AlternateContent xmlns:mc="http://schemas.openxmlformats.org/markup-compatibility/2006">
+        <mc:Choice xmlns:a14="http://schemas.microsoft.com/office/drawing/2010/main" Requires="a14">
+          <p:sp>
+            <p:nvSpPr>
+              <p:cNvPr id="12" name="CasellaDiTesto 11">
+                <a:extLst>
+                  <a:ext uri="{FF2B5EF4-FFF2-40B4-BE49-F238E27FC236}">
+                    <a16:creationId xmlns:a16="http://schemas.microsoft.com/office/drawing/2014/main" id="{3B042079-1B72-A929-0EA8-DD1E101F076D}"/>
+                  </a:ext>
+                </a:extLst>
+              </p:cNvPr>
+              <p:cNvSpPr txBox="1"/>
+              <p:nvPr/>
+            </p:nvSpPr>
+            <p:spPr>
+              <a:xfrm>
+                <a:off x="642743" y="2505331"/>
+                <a:ext cx="2938409" cy="400110"/>
+              </a:xfrm>
+              <a:prstGeom prst="rect">
+                <a:avLst/>
+              </a:prstGeom>
+              <a:noFill/>
+            </p:spPr>
+            <p:txBody>
+              <a:bodyPr wrap="square" rtlCol="0">
+                <a:spAutoFit/>
+              </a:bodyPr>
+              <a:lstStyle/>
+              <a:p>
+                <a:r>
+                  <a:rPr lang="en-GB" sz="2000" noProof="0" dirty="0"/>
+                  <a:t>Histogram on </a:t>
+                </a:r>
+                <a14:m>
+                  <m:oMath xmlns:m="http://schemas.openxmlformats.org/officeDocument/2006/math">
+                    <m:func>
+                      <m:funcPr>
+                        <m:ctrlPr>
+                          <a:rPr lang="en-GB" sz="2000" i="1" noProof="0" smtClean="0">
+                            <a:latin typeface="Cambria Math" panose="02040503050406030204" pitchFamily="18" charset="0"/>
+                          </a:rPr>
+                        </m:ctrlPr>
+                      </m:funcPr>
+                      <m:fName>
+                        <m:r>
+                          <m:rPr>
+                            <m:sty m:val="p"/>
+                          </m:rPr>
+                          <a:rPr lang="en-GB" sz="2000" i="0" noProof="0" smtClean="0">
+                            <a:latin typeface="Cambria Math" panose="02040503050406030204" pitchFamily="18" charset="0"/>
+                          </a:rPr>
+                          <m:t>log</m:t>
+                        </m:r>
+                      </m:fName>
+                      <m:e>
+                        <m:d>
+                          <m:dPr>
+                            <m:ctrlPr>
+                              <a:rPr lang="en-GB" sz="2000" i="1" noProof="0" smtClean="0">
+                                <a:latin typeface="Cambria Math" panose="02040503050406030204" pitchFamily="18" charset="0"/>
+                              </a:rPr>
+                            </m:ctrlPr>
+                          </m:dPr>
+                          <m:e>
+                            <m:sSub>
+                              <m:sSubPr>
+                                <m:ctrlPr>
+                                  <a:rPr lang="en-GB" sz="2000" i="1" noProof="0" smtClean="0">
+                                    <a:latin typeface="Cambria Math" panose="02040503050406030204" pitchFamily="18" charset="0"/>
+                                  </a:rPr>
+                                </m:ctrlPr>
+                              </m:sSubPr>
+                              <m:e>
+                                <m:r>
+                                  <a:rPr lang="en-GB" sz="2000" i="1" noProof="0" smtClean="0">
+                                    <a:latin typeface="Cambria Math" panose="02040503050406030204" pitchFamily="18" charset="0"/>
+                                  </a:rPr>
+                                  <m:t>𝑇</m:t>
+                                </m:r>
+                              </m:e>
+                              <m:sub>
+                                <m:r>
+                                  <a:rPr lang="en-GB" sz="2000" i="1" noProof="0" smtClean="0">
+                                    <a:latin typeface="Cambria Math" panose="02040503050406030204" pitchFamily="18" charset="0"/>
+                                  </a:rPr>
+                                  <m:t>90</m:t>
+                                </m:r>
+                              </m:sub>
+                            </m:sSub>
+                          </m:e>
+                        </m:d>
+                      </m:e>
+                    </m:func>
+                  </m:oMath>
+                </a14:m>
+                <a:endParaRPr lang="en-GB" sz="2000" noProof="0" dirty="0"/>
+              </a:p>
+            </p:txBody>
+          </p:sp>
+        </mc:Choice>
+        <mc:Fallback>
+          <p:sp>
+            <p:nvSpPr>
+              <p:cNvPr id="12" name="CasellaDiTesto 11">
+                <a:extLst>
+                  <a:ext uri="{FF2B5EF4-FFF2-40B4-BE49-F238E27FC236}">
+                    <a16:creationId xmlns:a16="http://schemas.microsoft.com/office/drawing/2014/main" id="{3B042079-1B72-A929-0EA8-DD1E101F076D}"/>
+                  </a:ext>
+                </a:extLst>
+              </p:cNvPr>
+              <p:cNvSpPr txBox="1">
+                <a:spLocks noRot="1" noChangeAspect="1" noMove="1" noResize="1" noEditPoints="1" noAdjustHandles="1" noChangeArrowheads="1" noChangeShapeType="1" noTextEdit="1"/>
+              </p:cNvSpPr>
+              <p:nvPr/>
+            </p:nvSpPr>
+            <p:spPr>
+              <a:xfrm>
+                <a:off x="642743" y="2505331"/>
+                <a:ext cx="2938409" cy="400110"/>
+              </a:xfrm>
+              <a:prstGeom prst="rect">
+                <a:avLst/>
+              </a:prstGeom>
+              <a:blipFill>
+                <a:blip r:embed="rId7"/>
+                <a:stretch>
+                  <a:fillRect l="-2075" t="-9091" b="-25758"/>
+                </a:stretch>
+              </a:blipFill>
+            </p:spPr>
+            <p:txBody>
+              <a:bodyPr/>
+              <a:lstStyle/>
+              <a:p>
+                <a:r>
+                  <a:rPr lang="it-IT">
+                    <a:noFill/>
+                  </a:rPr>
+                  <a:t> </a:t>
+                </a:r>
+              </a:p>
+            </p:txBody>
+          </p:sp>
+        </mc:Fallback>
+      </mc:AlternateContent>
+      <p:cxnSp>
+        <p:nvCxnSpPr>
+          <p:cNvPr id="14" name="Connettore 2 13">
+            <a:extLst>
+              <a:ext uri="{FF2B5EF4-FFF2-40B4-BE49-F238E27FC236}">
+                <a16:creationId xmlns:a16="http://schemas.microsoft.com/office/drawing/2014/main" id="{2B42DA42-449E-C8BD-986D-A8EBCCE58BE1}"/>
+              </a:ext>
+            </a:extLst>
+          </p:cNvPr>
+          <p:cNvCxnSpPr>
+            <a:stCxn id="5" idx="2"/>
+            <a:endCxn id="6" idx="0"/>
+          </p:cNvCxnSpPr>
+          <p:nvPr/>
+        </p:nvCxnSpPr>
+        <p:spPr>
+          <a:xfrm flipH="1">
+            <a:off x="2111947" y="3873929"/>
+            <a:ext cx="1" cy="483137"/>
+          </a:xfrm>
+          <a:prstGeom prst="straightConnector1">
+            <a:avLst/>
+          </a:prstGeom>
+          <a:ln w="19050">
+            <a:tailEnd type="triangle"/>
+          </a:ln>
+        </p:spPr>
+        <p:style>
+          <a:lnRef idx="1">
+            <a:schemeClr val="accent1"/>
+          </a:lnRef>
+          <a:fillRef idx="0">
+            <a:schemeClr val="accent1"/>
+          </a:fillRef>
+          <a:effectRef idx="0">
+            <a:schemeClr val="accent1"/>
+          </a:effectRef>
+          <a:fontRef idx="minor">
+            <a:schemeClr val="tx1"/>
+          </a:fontRef>
+        </p:style>
+      </p:cxnSp>
     </p:spTree>
     <p:extLst>
       <p:ext uri="{BB962C8B-B14F-4D97-AF65-F5344CB8AC3E}">
@@ -10491,8 +13548,8 @@
           <a:chExt cx="0" cy="0"/>
         </a:xfrm>
       </p:grpSpPr>
-      <mc:AlternateContent xmlns:mc="http://schemas.openxmlformats.org/markup-compatibility/2006" xmlns:a14="http://schemas.microsoft.com/office/drawing/2010/main">
-        <mc:Choice Requires="a14">
+      <mc:AlternateContent xmlns:mc="http://schemas.openxmlformats.org/markup-compatibility/2006">
+        <mc:Choice xmlns:a14="http://schemas.microsoft.com/office/drawing/2010/main" Requires="a14">
           <p:sp>
             <p:nvSpPr>
               <p:cNvPr id="4" name="Titolo 1">
@@ -10599,7 +13656,7 @@
             </p:txBody>
           </p:sp>
         </mc:Choice>
-        <mc:Fallback xmlns="">
+        <mc:Fallback>
           <p:sp>
             <p:nvSpPr>
               <p:cNvPr id="4" name="Titolo 1">
@@ -10643,8 +13700,8 @@
           </p:sp>
         </mc:Fallback>
       </mc:AlternateContent>
-      <mc:AlternateContent xmlns:mc="http://schemas.openxmlformats.org/markup-compatibility/2006" xmlns:a14="http://schemas.microsoft.com/office/drawing/2010/main">
-        <mc:Choice Requires="a14">
+      <mc:AlternateContent xmlns:mc="http://schemas.openxmlformats.org/markup-compatibility/2006">
+        <mc:Choice xmlns:a14="http://schemas.microsoft.com/office/drawing/2010/main" Requires="a14">
           <p:sp>
             <p:nvSpPr>
               <p:cNvPr id="5" name="CasellaDiTesto 4">
@@ -11070,7 +14127,7 @@
             </p:txBody>
           </p:sp>
         </mc:Choice>
-        <mc:Fallback xmlns="">
+        <mc:Fallback>
           <p:sp>
             <p:nvSpPr>
               <p:cNvPr id="5" name="CasellaDiTesto 4">
@@ -11150,8 +14207,8 @@
           </a:p>
         </p:txBody>
       </p:sp>
-      <mc:AlternateContent xmlns:mc="http://schemas.openxmlformats.org/markup-compatibility/2006" xmlns:a14="http://schemas.microsoft.com/office/drawing/2010/main">
-        <mc:Choice Requires="a14">
+      <mc:AlternateContent xmlns:mc="http://schemas.openxmlformats.org/markup-compatibility/2006">
+        <mc:Choice xmlns:a14="http://schemas.microsoft.com/office/drawing/2010/main" Requires="a14">
           <p:sp>
             <p:nvSpPr>
               <p:cNvPr id="7" name="CasellaDiTesto 6">
@@ -11182,7 +14239,7 @@
               <a:p>
                 <a:r>
                   <a:rPr lang="en-GB" noProof="0" dirty="0"/>
-                  <a:t>So we have 5 parameters to estimate, we will often call them </a:t>
+                  <a:t>So we have 5 parameters to estimate, we will call them </a:t>
                 </a:r>
                 <a14:m>
                   <m:oMath xmlns:m="http://schemas.openxmlformats.org/officeDocument/2006/math">
@@ -11384,7 +14441,7 @@
             </p:txBody>
           </p:sp>
         </mc:Choice>
-        <mc:Fallback xmlns="">
+        <mc:Fallback>
           <p:sp>
             <p:nvSpPr>
               <p:cNvPr id="7" name="CasellaDiTesto 6">
@@ -11465,8 +14522,8 @@
           <a:chExt cx="0" cy="0"/>
         </a:xfrm>
       </p:grpSpPr>
-      <mc:AlternateContent xmlns:mc="http://schemas.openxmlformats.org/markup-compatibility/2006" xmlns:a14="http://schemas.microsoft.com/office/drawing/2010/main">
-        <mc:Choice Requires="a14">
+      <mc:AlternateContent xmlns:mc="http://schemas.openxmlformats.org/markup-compatibility/2006">
+        <mc:Choice xmlns:a14="http://schemas.microsoft.com/office/drawing/2010/main" Requires="a14">
           <p:sp>
             <p:nvSpPr>
               <p:cNvPr id="4" name="Titolo 1">
@@ -11575,7 +14632,7 @@
             </p:txBody>
           </p:sp>
         </mc:Choice>
-        <mc:Fallback xmlns="">
+        <mc:Fallback>
           <p:sp>
             <p:nvSpPr>
               <p:cNvPr id="4" name="Titolo 1">
@@ -11619,8 +14676,8 @@
           </p:sp>
         </mc:Fallback>
       </mc:AlternateContent>
-      <mc:AlternateContent xmlns:mc="http://schemas.openxmlformats.org/markup-compatibility/2006" xmlns:a14="http://schemas.microsoft.com/office/drawing/2010/main">
-        <mc:Choice Requires="a14">
+      <mc:AlternateContent xmlns:mc="http://schemas.openxmlformats.org/markup-compatibility/2006">
+        <mc:Choice xmlns:a14="http://schemas.microsoft.com/office/drawing/2010/main" Requires="a14">
           <p:sp>
             <p:nvSpPr>
               <p:cNvPr id="2" name="CasellaDiTesto 1">
@@ -11635,8 +14692,8 @@
             </p:nvSpPr>
             <p:spPr>
               <a:xfrm>
-                <a:off x="750013" y="1524000"/>
-                <a:ext cx="5702158" cy="1754326"/>
+                <a:off x="4993238" y="1494942"/>
+                <a:ext cx="5702158" cy="1200329"/>
               </a:xfrm>
               <a:prstGeom prst="rect">
                 <a:avLst/>
@@ -11649,13 +14706,10 @@
               </a:bodyPr>
               <a:lstStyle/>
               <a:p>
-                <a:r>
-                  <a:rPr lang="en-GB" noProof="0" dirty="0"/>
-                  <a:t>To estimate the parameters we will use Bayes theorem, define the propositions:</a:t>
-                </a:r>
-              </a:p>
-              <a:p>
                 <a:pPr marL="285750" indent="-285750">
+                  <a:buClr>
+                    <a:schemeClr val="accent1"/>
+                  </a:buClr>
                   <a:buFont typeface="Arial" panose="020B0604020202020204" pitchFamily="34" charset="0"/>
                   <a:buChar char="•"/>
                 </a:pPr>
@@ -11696,6 +14750,9 @@
               </a:p>
               <a:p>
                 <a:pPr marL="285750" indent="-285750">
+                  <a:buClr>
+                    <a:schemeClr val="accent1"/>
+                  </a:buClr>
                   <a:buFont typeface="Arial" panose="020B0604020202020204" pitchFamily="34" charset="0"/>
                   <a:buChar char="•"/>
                 </a:pPr>
@@ -11722,6 +14779,9 @@
               </a:p>
               <a:p>
                 <a:pPr marL="285750" indent="-285750">
+                  <a:buClr>
+                    <a:schemeClr val="accent1"/>
+                  </a:buClr>
                   <a:buFont typeface="Arial" panose="020B0604020202020204" pitchFamily="34" charset="0"/>
                   <a:buChar char="•"/>
                 </a:pPr>
@@ -11742,6 +14802,9 @@
               </a:p>
               <a:p>
                 <a:pPr marL="285750" indent="-285750">
+                  <a:buClr>
+                    <a:schemeClr val="accent1"/>
+                  </a:buClr>
                   <a:buFont typeface="Arial" panose="020B0604020202020204" pitchFamily="34" charset="0"/>
                   <a:buChar char="•"/>
                 </a:pPr>
@@ -11763,7 +14826,7 @@
             </p:txBody>
           </p:sp>
         </mc:Choice>
-        <mc:Fallback xmlns="">
+        <mc:Fallback>
           <p:sp>
             <p:nvSpPr>
               <p:cNvPr id="2" name="CasellaDiTesto 1">
@@ -11780,8 +14843,8 @@
             </p:nvSpPr>
             <p:spPr>
               <a:xfrm>
-                <a:off x="750013" y="1524000"/>
-                <a:ext cx="5702158" cy="1754326"/>
+                <a:off x="4993238" y="1494942"/>
+                <a:ext cx="5702158" cy="1200329"/>
               </a:xfrm>
               <a:prstGeom prst="rect">
                 <a:avLst/>
@@ -11789,7 +14852,7 @@
               <a:blipFill>
                 <a:blip r:embed="rId3"/>
                 <a:stretch>
-                  <a:fillRect l="-856" t="-1736" b="-4514"/>
+                  <a:fillRect l="-642" t="-2538" b="-7107"/>
                 </a:stretch>
               </a:blipFill>
             </p:spPr>
@@ -11808,8 +14871,8 @@
           </p:sp>
         </mc:Fallback>
       </mc:AlternateContent>
-      <mc:AlternateContent xmlns:mc="http://schemas.openxmlformats.org/markup-compatibility/2006" xmlns:a14="http://schemas.microsoft.com/office/drawing/2010/main">
-        <mc:Choice Requires="a14">
+      <mc:AlternateContent xmlns:mc="http://schemas.openxmlformats.org/markup-compatibility/2006">
+        <mc:Choice xmlns:a14="http://schemas.microsoft.com/office/drawing/2010/main" Requires="a14">
           <p:sp>
             <p:nvSpPr>
               <p:cNvPr id="3" name="CasellaDiTesto 2">
@@ -11824,7 +14887,7 @@
             </p:nvSpPr>
             <p:spPr>
               <a:xfrm>
-                <a:off x="3626778" y="4018047"/>
+                <a:off x="3703833" y="3235717"/>
                 <a:ext cx="4448710" cy="861326"/>
               </a:xfrm>
               <a:prstGeom prst="rect">
@@ -12002,7 +15065,7 @@
             </p:txBody>
           </p:sp>
         </mc:Choice>
-        <mc:Fallback xmlns="">
+        <mc:Fallback>
           <p:sp>
             <p:nvSpPr>
               <p:cNvPr id="3" name="CasellaDiTesto 2">
@@ -12019,7 +15082,7 @@
             </p:nvSpPr>
             <p:spPr>
               <a:xfrm>
-                <a:off x="3626778" y="4018047"/>
+                <a:off x="3703833" y="3235717"/>
                 <a:ext cx="4448710" cy="861326"/>
               </a:xfrm>
               <a:prstGeom prst="rect">
@@ -12061,8 +15124,8 @@
         </p:nvSpPr>
         <p:spPr>
           <a:xfrm>
-            <a:off x="2044557" y="5712431"/>
-            <a:ext cx="5034337" cy="369332"/>
+            <a:off x="745679" y="4490025"/>
+            <a:ext cx="2151633" cy="369332"/>
           </a:xfrm>
           <a:prstGeom prst="rect">
             <a:avLst/>
@@ -12077,7 +15140,594 @@
           <a:p>
             <a:r>
               <a:rPr lang="en-GB" noProof="0" dirty="0"/>
-              <a:t>Going from the start to the log?</a:t>
+              <a:t>Or in the log form:</a:t>
+            </a:r>
+          </a:p>
+        </p:txBody>
+      </p:sp>
+      <mc:AlternateContent xmlns:mc="http://schemas.openxmlformats.org/markup-compatibility/2006">
+        <mc:Choice xmlns:a14="http://schemas.microsoft.com/office/drawing/2010/main" Requires="a14">
+          <p:sp>
+            <p:nvSpPr>
+              <p:cNvPr id="7" name="CasellaDiTesto 6">
+                <a:extLst>
+                  <a:ext uri="{FF2B5EF4-FFF2-40B4-BE49-F238E27FC236}">
+                    <a16:creationId xmlns:a16="http://schemas.microsoft.com/office/drawing/2014/main" id="{917EED9F-E36F-9A47-5A83-5AA9A3435987}"/>
+                  </a:ext>
+                </a:extLst>
+              </p:cNvPr>
+              <p:cNvSpPr txBox="1"/>
+              <p:nvPr/>
+            </p:nvSpPr>
+            <p:spPr>
+              <a:xfrm>
+                <a:off x="1702058" y="4939444"/>
+                <a:ext cx="8314361" cy="461665"/>
+              </a:xfrm>
+              <a:prstGeom prst="rect">
+                <a:avLst/>
+              </a:prstGeom>
+              <a:noFill/>
+            </p:spPr>
+            <p:txBody>
+              <a:bodyPr wrap="square">
+                <a:spAutoFit/>
+              </a:bodyPr>
+              <a:lstStyle/>
+              <a:p>
+                <a14:m>
+                  <m:oMathPara xmlns:m="http://schemas.openxmlformats.org/officeDocument/2006/math">
+                    <m:oMathParaPr>
+                      <m:jc m:val="centerGroup"/>
+                    </m:oMathParaPr>
+                    <m:oMath xmlns:m="http://schemas.openxmlformats.org/officeDocument/2006/math">
+                      <m:func>
+                        <m:funcPr>
+                          <m:ctrlPr>
+                            <a:rPr lang="en-GB" sz="2400" i="1" noProof="0" smtClean="0">
+                              <a:latin typeface="Cambria Math" panose="02040503050406030204" pitchFamily="18" charset="0"/>
+                            </a:rPr>
+                          </m:ctrlPr>
+                        </m:funcPr>
+                        <m:fName>
+                          <m:r>
+                            <m:rPr>
+                              <m:sty m:val="p"/>
+                            </m:rPr>
+                            <a:rPr lang="en-GB" sz="2400" i="0" noProof="0" smtClean="0">
+                              <a:latin typeface="Cambria Math" panose="02040503050406030204" pitchFamily="18" charset="0"/>
+                            </a:rPr>
+                            <m:t>log</m:t>
+                          </m:r>
+                        </m:fName>
+                        <m:e>
+                          <m:r>
+                            <a:rPr lang="en-GB" sz="2400" i="1" noProof="0" smtClean="0">
+                              <a:latin typeface="Cambria Math" panose="02040503050406030204" pitchFamily="18" charset="0"/>
+                            </a:rPr>
+                            <m:t>𝑃</m:t>
+                          </m:r>
+                        </m:e>
+                      </m:func>
+                      <m:d>
+                        <m:dPr>
+                          <m:ctrlPr>
+                            <a:rPr lang="en-GB" sz="2400" i="1" noProof="0" smtClean="0">
+                              <a:latin typeface="Cambria Math" panose="02040503050406030204" pitchFamily="18" charset="0"/>
+                            </a:rPr>
+                          </m:ctrlPr>
+                        </m:dPr>
+                        <m:e>
+                          <m:r>
+                            <a:rPr lang="en-GB" sz="2400" i="1" noProof="0" smtClean="0">
+                              <a:latin typeface="Cambria Math" panose="02040503050406030204" pitchFamily="18" charset="0"/>
+                            </a:rPr>
+                            <m:t>𝜃</m:t>
+                          </m:r>
+                        </m:e>
+                        <m:e>
+                          <m:r>
+                            <a:rPr lang="en-GB" sz="2400" i="1" noProof="0" smtClean="0">
+                              <a:latin typeface="Cambria Math" panose="02040503050406030204" pitchFamily="18" charset="0"/>
+                            </a:rPr>
+                            <m:t>𝐻𝐷𝐼</m:t>
+                          </m:r>
+                        </m:e>
+                      </m:d>
+                      <m:r>
+                        <a:rPr lang="en-GB" sz="2400" i="1" noProof="0" smtClean="0">
+                          <a:latin typeface="Cambria Math" panose="02040503050406030204" pitchFamily="18" charset="0"/>
+                        </a:rPr>
+                        <m:t>=</m:t>
+                      </m:r>
+                      <m:func>
+                        <m:funcPr>
+                          <m:ctrlPr>
+                            <a:rPr lang="en-GB" sz="2400" i="1" noProof="0" smtClean="0">
+                              <a:latin typeface="Cambria Math" panose="02040503050406030204" pitchFamily="18" charset="0"/>
+                            </a:rPr>
+                          </m:ctrlPr>
+                        </m:funcPr>
+                        <m:fName>
+                          <m:r>
+                            <m:rPr>
+                              <m:sty m:val="p"/>
+                            </m:rPr>
+                            <a:rPr lang="en-GB" sz="2400" i="0" noProof="0" smtClean="0">
+                              <a:latin typeface="Cambria Math" panose="02040503050406030204" pitchFamily="18" charset="0"/>
+                            </a:rPr>
+                            <m:t>log</m:t>
+                          </m:r>
+                        </m:fName>
+                        <m:e>
+                          <m:r>
+                            <a:rPr lang="en-GB" sz="2400" i="1" noProof="0" smtClean="0">
+                              <a:latin typeface="Cambria Math" panose="02040503050406030204" pitchFamily="18" charset="0"/>
+                            </a:rPr>
+                            <m:t>𝑃</m:t>
+                          </m:r>
+                        </m:e>
+                      </m:func>
+                      <m:d>
+                        <m:dPr>
+                          <m:ctrlPr>
+                            <a:rPr lang="en-GB" sz="2400" i="1" noProof="0" smtClean="0">
+                              <a:latin typeface="Cambria Math" panose="02040503050406030204" pitchFamily="18" charset="0"/>
+                            </a:rPr>
+                          </m:ctrlPr>
+                        </m:dPr>
+                        <m:e>
+                          <m:r>
+                            <a:rPr lang="en-GB" sz="2400" i="1" noProof="0" smtClean="0">
+                              <a:latin typeface="Cambria Math" panose="02040503050406030204" pitchFamily="18" charset="0"/>
+                            </a:rPr>
+                            <m:t>𝜃</m:t>
+                          </m:r>
+                        </m:e>
+                        <m:e>
+                          <m:r>
+                            <a:rPr lang="en-GB" sz="2400" i="1" noProof="0" smtClean="0">
+                              <a:latin typeface="Cambria Math" panose="02040503050406030204" pitchFamily="18" charset="0"/>
+                            </a:rPr>
+                            <m:t>𝐻𝐼</m:t>
+                          </m:r>
+                        </m:e>
+                      </m:d>
+                      <m:r>
+                        <a:rPr lang="en-GB" sz="2400" i="1" noProof="0" smtClean="0">
+                          <a:latin typeface="Cambria Math" panose="02040503050406030204" pitchFamily="18" charset="0"/>
+                        </a:rPr>
+                        <m:t>+</m:t>
+                      </m:r>
+                      <m:func>
+                        <m:funcPr>
+                          <m:ctrlPr>
+                            <a:rPr lang="en-GB" sz="2400" i="1" noProof="0" smtClean="0">
+                              <a:latin typeface="Cambria Math" panose="02040503050406030204" pitchFamily="18" charset="0"/>
+                            </a:rPr>
+                          </m:ctrlPr>
+                        </m:funcPr>
+                        <m:fName>
+                          <m:r>
+                            <m:rPr>
+                              <m:sty m:val="p"/>
+                            </m:rPr>
+                            <a:rPr lang="en-GB" sz="2400" i="0" noProof="0" smtClean="0">
+                              <a:latin typeface="Cambria Math" panose="02040503050406030204" pitchFamily="18" charset="0"/>
+                            </a:rPr>
+                            <m:t>log</m:t>
+                          </m:r>
+                        </m:fName>
+                        <m:e>
+                          <m:r>
+                            <a:rPr lang="en-GB" sz="2400" i="1" noProof="0" smtClean="0">
+                              <a:latin typeface="Cambria Math" panose="02040503050406030204" pitchFamily="18" charset="0"/>
+                            </a:rPr>
+                            <m:t>𝑃</m:t>
+                          </m:r>
+                        </m:e>
+                      </m:func>
+                      <m:d>
+                        <m:dPr>
+                          <m:ctrlPr>
+                            <a:rPr lang="en-GB" sz="2400" i="1" noProof="0" smtClean="0">
+                              <a:latin typeface="Cambria Math" panose="02040503050406030204" pitchFamily="18" charset="0"/>
+                            </a:rPr>
+                          </m:ctrlPr>
+                        </m:dPr>
+                        <m:e>
+                          <m:r>
+                            <a:rPr lang="en-GB" sz="2400" i="1" noProof="0" smtClean="0">
+                              <a:latin typeface="Cambria Math" panose="02040503050406030204" pitchFamily="18" charset="0"/>
+                            </a:rPr>
+                            <m:t>𝐷</m:t>
+                          </m:r>
+                        </m:e>
+                        <m:e>
+                          <m:r>
+                            <a:rPr lang="en-GB" sz="2400" i="1" noProof="0" smtClean="0">
+                              <a:latin typeface="Cambria Math" panose="02040503050406030204" pitchFamily="18" charset="0"/>
+                            </a:rPr>
+                            <m:t>𝜃</m:t>
+                          </m:r>
+                          <m:r>
+                            <a:rPr lang="en-GB" sz="2400" i="1" noProof="0" smtClean="0">
+                              <a:latin typeface="Cambria Math" panose="02040503050406030204" pitchFamily="18" charset="0"/>
+                            </a:rPr>
+                            <m:t>𝐻𝐼</m:t>
+                          </m:r>
+                        </m:e>
+                      </m:d>
+                      <m:r>
+                        <a:rPr lang="en-GB" sz="2400" i="1" noProof="0" smtClean="0">
+                          <a:latin typeface="Cambria Math" panose="02040503050406030204" pitchFamily="18" charset="0"/>
+                        </a:rPr>
+                        <m:t>−</m:t>
+                      </m:r>
+                      <m:func>
+                        <m:funcPr>
+                          <m:ctrlPr>
+                            <a:rPr lang="en-GB" sz="2400" i="1" noProof="0" smtClean="0">
+                              <a:latin typeface="Cambria Math" panose="02040503050406030204" pitchFamily="18" charset="0"/>
+                            </a:rPr>
+                          </m:ctrlPr>
+                        </m:funcPr>
+                        <m:fName>
+                          <m:r>
+                            <m:rPr>
+                              <m:sty m:val="p"/>
+                            </m:rPr>
+                            <a:rPr lang="en-GB" sz="2400" i="0" noProof="0" smtClean="0">
+                              <a:latin typeface="Cambria Math" panose="02040503050406030204" pitchFamily="18" charset="0"/>
+                            </a:rPr>
+                            <m:t>log</m:t>
+                          </m:r>
+                        </m:fName>
+                        <m:e>
+                          <m:r>
+                            <a:rPr lang="en-GB" sz="2400" i="1" noProof="0" smtClean="0">
+                              <a:latin typeface="Cambria Math" panose="02040503050406030204" pitchFamily="18" charset="0"/>
+                            </a:rPr>
+                            <m:t>𝑃</m:t>
+                          </m:r>
+                        </m:e>
+                      </m:func>
+                      <m:d>
+                        <m:dPr>
+                          <m:ctrlPr>
+                            <a:rPr lang="en-GB" sz="2400" i="1" noProof="0" smtClean="0">
+                              <a:latin typeface="Cambria Math" panose="02040503050406030204" pitchFamily="18" charset="0"/>
+                            </a:rPr>
+                          </m:ctrlPr>
+                        </m:dPr>
+                        <m:e>
+                          <m:r>
+                            <a:rPr lang="en-GB" sz="2400" i="1" noProof="0" smtClean="0">
+                              <a:latin typeface="Cambria Math" panose="02040503050406030204" pitchFamily="18" charset="0"/>
+                            </a:rPr>
+                            <m:t>𝐷</m:t>
+                          </m:r>
+                        </m:e>
+                        <m:e>
+                          <m:r>
+                            <a:rPr lang="en-GB" sz="2400" i="1" noProof="0" smtClean="0">
+                              <a:latin typeface="Cambria Math" panose="02040503050406030204" pitchFamily="18" charset="0"/>
+                            </a:rPr>
+                            <m:t>𝐻𝐼</m:t>
+                          </m:r>
+                        </m:e>
+                      </m:d>
+                    </m:oMath>
+                  </m:oMathPara>
+                </a14:m>
+                <a:endParaRPr lang="en-GB" sz="2400" noProof="0" dirty="0"/>
+              </a:p>
+            </p:txBody>
+          </p:sp>
+        </mc:Choice>
+        <mc:Fallback>
+          <p:sp>
+            <p:nvSpPr>
+              <p:cNvPr id="7" name="CasellaDiTesto 6">
+                <a:extLst>
+                  <a:ext uri="{FF2B5EF4-FFF2-40B4-BE49-F238E27FC236}">
+                    <a16:creationId xmlns:a16="http://schemas.microsoft.com/office/drawing/2014/main" id="{917EED9F-E36F-9A47-5A83-5AA9A3435987}"/>
+                  </a:ext>
+                </a:extLst>
+              </p:cNvPr>
+              <p:cNvSpPr txBox="1">
+                <a:spLocks noRot="1" noChangeAspect="1" noMove="1" noResize="1" noEditPoints="1" noAdjustHandles="1" noChangeArrowheads="1" noChangeShapeType="1" noTextEdit="1"/>
+              </p:cNvSpPr>
+              <p:nvPr/>
+            </p:nvSpPr>
+            <p:spPr>
+              <a:xfrm>
+                <a:off x="1702058" y="4939444"/>
+                <a:ext cx="8314361" cy="461665"/>
+              </a:xfrm>
+              <a:prstGeom prst="rect">
+                <a:avLst/>
+              </a:prstGeom>
+              <a:blipFill>
+                <a:blip r:embed="rId5"/>
+                <a:stretch>
+                  <a:fillRect b="-19737"/>
+                </a:stretch>
+              </a:blipFill>
+            </p:spPr>
+            <p:txBody>
+              <a:bodyPr/>
+              <a:lstStyle/>
+              <a:p>
+                <a:r>
+                  <a:rPr lang="it-IT">
+                    <a:noFill/>
+                  </a:rPr>
+                  <a:t> </a:t>
+                </a:r>
+              </a:p>
+            </p:txBody>
+          </p:sp>
+        </mc:Fallback>
+      </mc:AlternateContent>
+      <p:cxnSp>
+        <p:nvCxnSpPr>
+          <p:cNvPr id="9" name="Connettore 2 8">
+            <a:extLst>
+              <a:ext uri="{FF2B5EF4-FFF2-40B4-BE49-F238E27FC236}">
+                <a16:creationId xmlns:a16="http://schemas.microsoft.com/office/drawing/2014/main" id="{79091BD6-5AB1-766B-44D1-F301A4B341B0}"/>
+              </a:ext>
+            </a:extLst>
+          </p:cNvPr>
+          <p:cNvCxnSpPr/>
+          <p:nvPr/>
+        </p:nvCxnSpPr>
+        <p:spPr>
+          <a:xfrm flipV="1">
+            <a:off x="4869950" y="5474632"/>
+            <a:ext cx="0" cy="400692"/>
+          </a:xfrm>
+          <a:prstGeom prst="straightConnector1">
+            <a:avLst/>
+          </a:prstGeom>
+          <a:ln w="19050">
+            <a:tailEnd type="triangle"/>
+          </a:ln>
+        </p:spPr>
+        <p:style>
+          <a:lnRef idx="1">
+            <a:schemeClr val="accent1"/>
+          </a:lnRef>
+          <a:fillRef idx="0">
+            <a:schemeClr val="accent1"/>
+          </a:fillRef>
+          <a:effectRef idx="0">
+            <a:schemeClr val="accent1"/>
+          </a:effectRef>
+          <a:fontRef idx="minor">
+            <a:schemeClr val="tx1"/>
+          </a:fontRef>
+        </p:style>
+      </p:cxnSp>
+      <p:sp>
+        <p:nvSpPr>
+          <p:cNvPr id="10" name="CasellaDiTesto 9">
+            <a:extLst>
+              <a:ext uri="{FF2B5EF4-FFF2-40B4-BE49-F238E27FC236}">
+                <a16:creationId xmlns:a16="http://schemas.microsoft.com/office/drawing/2014/main" id="{75790A2D-B1B1-AD97-6F01-CC81F3A8699B}"/>
+              </a:ext>
+            </a:extLst>
+          </p:cNvPr>
+          <p:cNvSpPr txBox="1"/>
+          <p:nvPr/>
+        </p:nvSpPr>
+        <p:spPr>
+          <a:xfrm>
+            <a:off x="4203845" y="5875324"/>
+            <a:ext cx="1325366" cy="369332"/>
+          </a:xfrm>
+          <a:prstGeom prst="rect">
+            <a:avLst/>
+          </a:prstGeom>
+          <a:noFill/>
+        </p:spPr>
+        <p:txBody>
+          <a:bodyPr wrap="square" rtlCol="0">
+            <a:spAutoFit/>
+          </a:bodyPr>
+          <a:lstStyle/>
+          <a:p>
+            <a:r>
+              <a:rPr lang="en-GB" noProof="0" dirty="0"/>
+              <a:t>Log prior</a:t>
+            </a:r>
+          </a:p>
+        </p:txBody>
+      </p:sp>
+      <p:cxnSp>
+        <p:nvCxnSpPr>
+          <p:cNvPr id="11" name="Connettore 2 10">
+            <a:extLst>
+              <a:ext uri="{FF2B5EF4-FFF2-40B4-BE49-F238E27FC236}">
+                <a16:creationId xmlns:a16="http://schemas.microsoft.com/office/drawing/2014/main" id="{CC5B14B6-F4BA-C865-384C-6ED36B81D069}"/>
+              </a:ext>
+            </a:extLst>
+          </p:cNvPr>
+          <p:cNvCxnSpPr/>
+          <p:nvPr/>
+        </p:nvCxnSpPr>
+        <p:spPr>
+          <a:xfrm flipV="1">
+            <a:off x="6816902" y="5474632"/>
+            <a:ext cx="0" cy="400692"/>
+          </a:xfrm>
+          <a:prstGeom prst="straightConnector1">
+            <a:avLst/>
+          </a:prstGeom>
+          <a:ln w="19050">
+            <a:tailEnd type="triangle"/>
+          </a:ln>
+        </p:spPr>
+        <p:style>
+          <a:lnRef idx="1">
+            <a:schemeClr val="accent1"/>
+          </a:lnRef>
+          <a:fillRef idx="0">
+            <a:schemeClr val="accent1"/>
+          </a:fillRef>
+          <a:effectRef idx="0">
+            <a:schemeClr val="accent1"/>
+          </a:effectRef>
+          <a:fontRef idx="minor">
+            <a:schemeClr val="tx1"/>
+          </a:fontRef>
+        </p:style>
+      </p:cxnSp>
+      <p:sp>
+        <p:nvSpPr>
+          <p:cNvPr id="12" name="CasellaDiTesto 11">
+            <a:extLst>
+              <a:ext uri="{FF2B5EF4-FFF2-40B4-BE49-F238E27FC236}">
+                <a16:creationId xmlns:a16="http://schemas.microsoft.com/office/drawing/2014/main" id="{82CCA548-1F9F-E447-F435-49066B02AA3E}"/>
+              </a:ext>
+            </a:extLst>
+          </p:cNvPr>
+          <p:cNvSpPr txBox="1"/>
+          <p:nvPr/>
+        </p:nvSpPr>
+        <p:spPr>
+          <a:xfrm>
+            <a:off x="5961580" y="5875324"/>
+            <a:ext cx="1710643" cy="369332"/>
+          </a:xfrm>
+          <a:prstGeom prst="rect">
+            <a:avLst/>
+          </a:prstGeom>
+          <a:noFill/>
+        </p:spPr>
+        <p:txBody>
+          <a:bodyPr wrap="square" rtlCol="0">
+            <a:spAutoFit/>
+          </a:bodyPr>
+          <a:lstStyle/>
+          <a:p>
+            <a:r>
+              <a:rPr lang="en-GB" noProof="0" dirty="0"/>
+              <a:t>Log likelihood</a:t>
+            </a:r>
+          </a:p>
+        </p:txBody>
+      </p:sp>
+      <p:cxnSp>
+        <p:nvCxnSpPr>
+          <p:cNvPr id="13" name="Connettore 2 12">
+            <a:extLst>
+              <a:ext uri="{FF2B5EF4-FFF2-40B4-BE49-F238E27FC236}">
+                <a16:creationId xmlns:a16="http://schemas.microsoft.com/office/drawing/2014/main" id="{D2B9436A-14E3-2862-505E-86836F279DE5}"/>
+              </a:ext>
+            </a:extLst>
+          </p:cNvPr>
+          <p:cNvCxnSpPr/>
+          <p:nvPr/>
+        </p:nvCxnSpPr>
+        <p:spPr>
+          <a:xfrm flipV="1">
+            <a:off x="9005297" y="5473486"/>
+            <a:ext cx="0" cy="400692"/>
+          </a:xfrm>
+          <a:prstGeom prst="straightConnector1">
+            <a:avLst/>
+          </a:prstGeom>
+          <a:ln w="19050">
+            <a:tailEnd type="triangle"/>
+          </a:ln>
+        </p:spPr>
+        <p:style>
+          <a:lnRef idx="1">
+            <a:schemeClr val="accent1"/>
+          </a:lnRef>
+          <a:fillRef idx="0">
+            <a:schemeClr val="accent1"/>
+          </a:fillRef>
+          <a:effectRef idx="0">
+            <a:schemeClr val="accent1"/>
+          </a:effectRef>
+          <a:fontRef idx="minor">
+            <a:schemeClr val="tx1"/>
+          </a:fontRef>
+        </p:style>
+      </p:cxnSp>
+      <p:sp>
+        <p:nvSpPr>
+          <p:cNvPr id="14" name="CasellaDiTesto 13">
+            <a:extLst>
+              <a:ext uri="{FF2B5EF4-FFF2-40B4-BE49-F238E27FC236}">
+                <a16:creationId xmlns:a16="http://schemas.microsoft.com/office/drawing/2014/main" id="{320BAB1B-7E15-04D3-6065-63E0FDB41076}"/>
+              </a:ext>
+            </a:extLst>
+          </p:cNvPr>
+          <p:cNvSpPr txBox="1"/>
+          <p:nvPr/>
+        </p:nvSpPr>
+        <p:spPr>
+          <a:xfrm>
+            <a:off x="8049801" y="5874178"/>
+            <a:ext cx="2645595" cy="369332"/>
+          </a:xfrm>
+          <a:prstGeom prst="rect">
+            <a:avLst/>
+          </a:prstGeom>
+          <a:noFill/>
+        </p:spPr>
+        <p:txBody>
+          <a:bodyPr wrap="square" rtlCol="0">
+            <a:spAutoFit/>
+          </a:bodyPr>
+          <a:lstStyle/>
+          <a:p>
+            <a:r>
+              <a:rPr lang="en-GB" noProof="0" dirty="0"/>
+              <a:t>Normalization </a:t>
+            </a:r>
+            <a:r>
+              <a:rPr lang="en-GB" noProof="0" dirty="0" err="1"/>
+              <a:t>costant</a:t>
+            </a:r>
+            <a:endParaRPr lang="en-GB" noProof="0" dirty="0"/>
+          </a:p>
+        </p:txBody>
+      </p:sp>
+      <p:sp>
+        <p:nvSpPr>
+          <p:cNvPr id="16" name="CasellaDiTesto 15">
+            <a:extLst>
+              <a:ext uri="{FF2B5EF4-FFF2-40B4-BE49-F238E27FC236}">
+                <a16:creationId xmlns:a16="http://schemas.microsoft.com/office/drawing/2014/main" id="{575CCDF9-DEF5-CC96-4CA3-36935272E12C}"/>
+              </a:ext>
+            </a:extLst>
+          </p:cNvPr>
+          <p:cNvSpPr txBox="1"/>
+          <p:nvPr/>
+        </p:nvSpPr>
+        <p:spPr>
+          <a:xfrm>
+            <a:off x="745679" y="1579463"/>
+            <a:ext cx="3394806" cy="923330"/>
+          </a:xfrm>
+          <a:prstGeom prst="rect">
+            <a:avLst/>
+          </a:prstGeom>
+          <a:noFill/>
+        </p:spPr>
+        <p:txBody>
+          <a:bodyPr wrap="square">
+            <a:spAutoFit/>
+          </a:bodyPr>
+          <a:lstStyle/>
+          <a:p>
+            <a:r>
+              <a:rPr lang="en-GB" noProof="0" dirty="0"/>
+              <a:t>To estimate the parameters we will use Bayes theorem, define the propositions</a:t>
             </a:r>
           </a:p>
         </p:txBody>
@@ -12118,8 +15768,8 @@
           <a:chExt cx="0" cy="0"/>
         </a:xfrm>
       </p:grpSpPr>
-      <mc:AlternateContent xmlns:mc="http://schemas.openxmlformats.org/markup-compatibility/2006" xmlns:a14="http://schemas.microsoft.com/office/drawing/2010/main">
-        <mc:Choice Requires="a14">
+      <mc:AlternateContent xmlns:mc="http://schemas.openxmlformats.org/markup-compatibility/2006">
+        <mc:Choice xmlns:a14="http://schemas.microsoft.com/office/drawing/2010/main" Requires="a14">
           <p:sp>
             <p:nvSpPr>
               <p:cNvPr id="4" name="Titolo 1">
@@ -12228,7 +15878,7 @@
             </p:txBody>
           </p:sp>
         </mc:Choice>
-        <mc:Fallback xmlns="">
+        <mc:Fallback>
           <p:sp>
             <p:nvSpPr>
               <p:cNvPr id="4" name="Titolo 1">
@@ -12272,8 +15922,8 @@
           </p:sp>
         </mc:Fallback>
       </mc:AlternateContent>
-      <mc:AlternateContent xmlns:mc="http://schemas.openxmlformats.org/markup-compatibility/2006" xmlns:a14="http://schemas.microsoft.com/office/drawing/2010/main">
-        <mc:Choice Requires="a14">
+      <mc:AlternateContent xmlns:mc="http://schemas.openxmlformats.org/markup-compatibility/2006">
+        <mc:Choice xmlns:a14="http://schemas.microsoft.com/office/drawing/2010/main" Requires="a14">
           <p:sp>
             <p:nvSpPr>
               <p:cNvPr id="3" name="CasellaDiTesto 2">
@@ -12348,7 +15998,7 @@
             </p:txBody>
           </p:sp>
         </mc:Choice>
-        <mc:Fallback xmlns="">
+        <mc:Fallback>
           <p:sp>
             <p:nvSpPr>
               <p:cNvPr id="3" name="CasellaDiTesto 2">
@@ -12463,8 +16113,8 @@
           </a:p>
         </p:txBody>
       </p:sp>
-      <mc:AlternateContent xmlns:mc="http://schemas.openxmlformats.org/markup-compatibility/2006" xmlns:a14="http://schemas.microsoft.com/office/drawing/2010/main">
-        <mc:Choice Requires="a14">
+      <mc:AlternateContent xmlns:mc="http://schemas.openxmlformats.org/markup-compatibility/2006">
+        <mc:Choice xmlns:a14="http://schemas.microsoft.com/office/drawing/2010/main" Requires="a14">
           <p:sp>
             <p:nvSpPr>
               <p:cNvPr id="7" name="CasellaDiTesto 6">
@@ -12526,7 +16176,7 @@
             </p:txBody>
           </p:sp>
         </mc:Choice>
-        <mc:Fallback xmlns="">
+        <mc:Fallback>
           <p:sp>
             <p:nvSpPr>
               <p:cNvPr id="7" name="CasellaDiTesto 6">
@@ -12571,8 +16221,8 @@
           </p:sp>
         </mc:Fallback>
       </mc:AlternateContent>
-      <mc:AlternateContent xmlns:mc="http://schemas.openxmlformats.org/markup-compatibility/2006" xmlns:a14="http://schemas.microsoft.com/office/drawing/2010/main">
-        <mc:Choice Requires="a14">
+      <mc:AlternateContent xmlns:mc="http://schemas.openxmlformats.org/markup-compatibility/2006">
+        <mc:Choice xmlns:a14="http://schemas.microsoft.com/office/drawing/2010/main" Requires="a14">
           <p:sp>
             <p:nvSpPr>
               <p:cNvPr id="8" name="CasellaDiTesto 7">
@@ -12653,7 +16303,7 @@
             </p:txBody>
           </p:sp>
         </mc:Choice>
-        <mc:Fallback xmlns="">
+        <mc:Fallback>
           <p:sp>
             <p:nvSpPr>
               <p:cNvPr id="8" name="CasellaDiTesto 7">
@@ -12741,8 +16391,8 @@
           </a:p>
         </p:txBody>
       </p:sp>
-      <mc:AlternateContent xmlns:mc="http://schemas.openxmlformats.org/markup-compatibility/2006" xmlns:a14="http://schemas.microsoft.com/office/drawing/2010/main">
-        <mc:Choice Requires="a14">
+      <mc:AlternateContent xmlns:mc="http://schemas.openxmlformats.org/markup-compatibility/2006">
+        <mc:Choice xmlns:a14="http://schemas.microsoft.com/office/drawing/2010/main" Requires="a14">
           <p:sp>
             <p:nvSpPr>
               <p:cNvPr id="10" name="CasellaDiTesto 9">
@@ -12798,7 +16448,7 @@
             </p:txBody>
           </p:sp>
         </mc:Choice>
-        <mc:Fallback xmlns="">
+        <mc:Fallback>
           <p:sp>
             <p:nvSpPr>
               <p:cNvPr id="10" name="CasellaDiTesto 9">
@@ -12843,8 +16493,8 @@
           </p:sp>
         </mc:Fallback>
       </mc:AlternateContent>
-      <mc:AlternateContent xmlns:mc="http://schemas.openxmlformats.org/markup-compatibility/2006" xmlns:a14="http://schemas.microsoft.com/office/drawing/2010/main">
-        <mc:Choice Requires="a14">
+      <mc:AlternateContent xmlns:mc="http://schemas.openxmlformats.org/markup-compatibility/2006">
+        <mc:Choice xmlns:a14="http://schemas.microsoft.com/office/drawing/2010/main" Requires="a14">
           <p:sp>
             <p:nvSpPr>
               <p:cNvPr id="11" name="CasellaDiTesto 10">
@@ -12925,7 +16575,7 @@
             </p:txBody>
           </p:sp>
         </mc:Choice>
-        <mc:Fallback xmlns="">
+        <mc:Fallback>
           <p:sp>
             <p:nvSpPr>
               <p:cNvPr id="11" name="CasellaDiTesto 10">
@@ -12970,8 +16620,8 @@
           </p:sp>
         </mc:Fallback>
       </mc:AlternateContent>
-      <mc:AlternateContent xmlns:mc="http://schemas.openxmlformats.org/markup-compatibility/2006" xmlns:a14="http://schemas.microsoft.com/office/drawing/2010/main">
-        <mc:Choice Requires="a14">
+      <mc:AlternateContent xmlns:mc="http://schemas.openxmlformats.org/markup-compatibility/2006">
+        <mc:Choice xmlns:a14="http://schemas.microsoft.com/office/drawing/2010/main" Requires="a14">
           <p:sp>
             <p:nvSpPr>
               <p:cNvPr id="12" name="CasellaDiTesto 11">
@@ -13042,7 +16692,7 @@
             </p:txBody>
           </p:sp>
         </mc:Choice>
-        <mc:Fallback xmlns="">
+        <mc:Fallback>
           <p:sp>
             <p:nvSpPr>
               <p:cNvPr id="12" name="CasellaDiTesto 11">
@@ -13123,8 +16773,8 @@
           <a:chExt cx="0" cy="0"/>
         </a:xfrm>
       </p:grpSpPr>
-      <mc:AlternateContent xmlns:mc="http://schemas.openxmlformats.org/markup-compatibility/2006" xmlns:a14="http://schemas.microsoft.com/office/drawing/2010/main">
-        <mc:Choice Requires="a14">
+      <mc:AlternateContent xmlns:mc="http://schemas.openxmlformats.org/markup-compatibility/2006">
+        <mc:Choice xmlns:a14="http://schemas.microsoft.com/office/drawing/2010/main" Requires="a14">
           <p:sp>
             <p:nvSpPr>
               <p:cNvPr id="4" name="Titolo 1">
@@ -13233,7 +16883,7 @@
             </p:txBody>
           </p:sp>
         </mc:Choice>
-        <mc:Fallback xmlns="">
+        <mc:Fallback>
           <p:sp>
             <p:nvSpPr>
               <p:cNvPr id="4" name="Titolo 1">
@@ -13312,8 +16962,8 @@
           </a:p>
         </p:txBody>
       </p:sp>
-      <mc:AlternateContent xmlns:mc="http://schemas.openxmlformats.org/markup-compatibility/2006" xmlns:a14="http://schemas.microsoft.com/office/drawing/2010/main">
-        <mc:Choice Requires="a14">
+      <mc:AlternateContent xmlns:mc="http://schemas.openxmlformats.org/markup-compatibility/2006">
+        <mc:Choice xmlns:a14="http://schemas.microsoft.com/office/drawing/2010/main" Requires="a14">
           <p:sp>
             <p:nvSpPr>
               <p:cNvPr id="2" name="CasellaDiTesto 1">
@@ -13394,7 +17044,7 @@
             </p:txBody>
           </p:sp>
         </mc:Choice>
-        <mc:Fallback xmlns="">
+        <mc:Fallback>
           <p:sp>
             <p:nvSpPr>
               <p:cNvPr id="2" name="CasellaDiTesto 1">
@@ -13474,8 +17124,8 @@
           </a:p>
         </p:txBody>
       </p:sp>
-      <mc:AlternateContent xmlns:mc="http://schemas.openxmlformats.org/markup-compatibility/2006" xmlns:a14="http://schemas.microsoft.com/office/drawing/2010/main">
-        <mc:Choice Requires="a14">
+      <mc:AlternateContent xmlns:mc="http://schemas.openxmlformats.org/markup-compatibility/2006">
+        <mc:Choice xmlns:a14="http://schemas.microsoft.com/office/drawing/2010/main" Requires="a14">
           <p:sp>
             <p:nvSpPr>
               <p:cNvPr id="6" name="CasellaDiTesto 5">
@@ -13668,7 +17318,7 @@
             </p:txBody>
           </p:sp>
         </mc:Choice>
-        <mc:Fallback xmlns="">
+        <mc:Fallback>
           <p:sp>
             <p:nvSpPr>
               <p:cNvPr id="6" name="CasellaDiTesto 5">
@@ -13713,8 +17363,8 @@
           </p:sp>
         </mc:Fallback>
       </mc:AlternateContent>
-      <mc:AlternateContent xmlns:mc="http://schemas.openxmlformats.org/markup-compatibility/2006" xmlns:a14="http://schemas.microsoft.com/office/drawing/2010/main">
-        <mc:Choice Requires="a14">
+      <mc:AlternateContent xmlns:mc="http://schemas.openxmlformats.org/markup-compatibility/2006">
+        <mc:Choice xmlns:a14="http://schemas.microsoft.com/office/drawing/2010/main" Requires="a14">
           <p:sp>
             <p:nvSpPr>
               <p:cNvPr id="7" name="CasellaDiTesto 6">
@@ -13817,7 +17467,7 @@
             </p:txBody>
           </p:sp>
         </mc:Choice>
-        <mc:Fallback xmlns="">
+        <mc:Fallback>
           <p:sp>
             <p:nvSpPr>
               <p:cNvPr id="7" name="CasellaDiTesto 6">
@@ -13862,8 +17512,8 @@
           </p:sp>
         </mc:Fallback>
       </mc:AlternateContent>
-      <mc:AlternateContent xmlns:mc="http://schemas.openxmlformats.org/markup-compatibility/2006" xmlns:a14="http://schemas.microsoft.com/office/drawing/2010/main">
-        <mc:Choice Requires="a14">
+      <mc:AlternateContent xmlns:mc="http://schemas.openxmlformats.org/markup-compatibility/2006">
+        <mc:Choice xmlns:a14="http://schemas.microsoft.com/office/drawing/2010/main" Requires="a14">
           <p:sp>
             <p:nvSpPr>
               <p:cNvPr id="8" name="CasellaDiTesto 7">
@@ -14134,7 +17784,7 @@
             </p:txBody>
           </p:sp>
         </mc:Choice>
-        <mc:Fallback xmlns="">
+        <mc:Fallback>
           <p:sp>
             <p:nvSpPr>
               <p:cNvPr id="8" name="CasellaDiTesto 7">
@@ -14214,8 +17864,8 @@
           </a:p>
         </p:txBody>
       </p:sp>
-      <mc:AlternateContent xmlns:mc="http://schemas.openxmlformats.org/markup-compatibility/2006" xmlns:a14="http://schemas.microsoft.com/office/drawing/2010/main">
-        <mc:Choice Requires="a14">
+      <mc:AlternateContent xmlns:mc="http://schemas.openxmlformats.org/markup-compatibility/2006">
+        <mc:Choice xmlns:a14="http://schemas.microsoft.com/office/drawing/2010/main" Requires="a14">
           <p:sp>
             <p:nvSpPr>
               <p:cNvPr id="10" name="CasellaDiTesto 9">
@@ -14377,7 +18027,7 @@
             </p:txBody>
           </p:sp>
         </mc:Choice>
-        <mc:Fallback xmlns="">
+        <mc:Fallback>
           <p:sp>
             <p:nvSpPr>
               <p:cNvPr id="10" name="CasellaDiTesto 9">
@@ -14592,26 +18242,129 @@
           <a:lstStyle/>
           <a:p>
             <a:r>
-              <a:rPr lang="it-IT" dirty="0"/>
-              <a:t>Metropolis-Hasting </a:t>
-            </a:r>
-            <a:r>
-              <a:rPr lang="it-IT" dirty="0" err="1"/>
-              <a:t>algorithm</a:t>
-            </a:r>
-            <a:r>
-              <a:rPr lang="it-IT" dirty="0"/>
-              <a:t>!</a:t>
+              <a:rPr lang="en-GB" noProof="0" dirty="0"/>
+              <a:t>Metropolis-Hasting algorithm!</a:t>
             </a:r>
           </a:p>
         </p:txBody>
       </p:sp>
+      <mc:AlternateContent xmlns:mc="http://schemas.openxmlformats.org/markup-compatibility/2006">
+        <mc:Choice xmlns:a14="http://schemas.microsoft.com/office/drawing/2010/main" Requires="a14">
+          <p:sp>
+            <p:nvSpPr>
+              <p:cNvPr id="8" name="CasellaDiTesto 7">
+                <a:extLst>
+                  <a:ext uri="{FF2B5EF4-FFF2-40B4-BE49-F238E27FC236}">
+                    <a16:creationId xmlns:a16="http://schemas.microsoft.com/office/drawing/2014/main" id="{61CCC5EB-30E8-0FFC-3F1C-39CAC283583D}"/>
+                  </a:ext>
+                </a:extLst>
+              </p:cNvPr>
+              <p:cNvSpPr txBox="1"/>
+              <p:nvPr/>
+            </p:nvSpPr>
+            <p:spPr>
+              <a:xfrm>
+                <a:off x="642938" y="2590977"/>
+                <a:ext cx="4972692" cy="646331"/>
+              </a:xfrm>
+              <a:prstGeom prst="rect">
+                <a:avLst/>
+              </a:prstGeom>
+              <a:noFill/>
+            </p:spPr>
+            <p:txBody>
+              <a:bodyPr wrap="square" rtlCol="0">
+                <a:spAutoFit/>
+              </a:bodyPr>
+              <a:lstStyle/>
+              <a:p>
+                <a:pPr algn="ctr"/>
+                <a14:m>
+                  <m:oMath xmlns:m="http://schemas.openxmlformats.org/officeDocument/2006/math">
+                    <m:r>
+                      <a:rPr lang="en-GB" i="1" noProof="0" smtClean="0">
+                        <a:latin typeface="Cambria Math" panose="02040503050406030204" pitchFamily="18" charset="0"/>
+                      </a:rPr>
+                      <m:t>𝑞</m:t>
+                    </m:r>
+                    <m:d>
+                      <m:dPr>
+                        <m:ctrlPr>
+                          <a:rPr lang="en-GB" i="1" noProof="0" smtClean="0">
+                            <a:latin typeface="Cambria Math" panose="02040503050406030204" pitchFamily="18" charset="0"/>
+                          </a:rPr>
+                        </m:ctrlPr>
+                      </m:dPr>
+                      <m:e>
+                        <m:r>
+                          <a:rPr lang="en-GB" i="1" noProof="0" smtClean="0">
+                            <a:latin typeface="Cambria Math" panose="02040503050406030204" pitchFamily="18" charset="0"/>
+                          </a:rPr>
+                          <m:t>𝜃</m:t>
+                        </m:r>
+                      </m:e>
+                    </m:d>
+                  </m:oMath>
+                </a14:m>
+                <a:r>
+                  <a:rPr lang="en-GB" noProof="0" dirty="0"/>
+                  <a:t> is the proposal distribution, describes the form of the peak in the parameters space</a:t>
+                </a:r>
+              </a:p>
+            </p:txBody>
+          </p:sp>
+        </mc:Choice>
+        <mc:Fallback>
+          <p:sp>
+            <p:nvSpPr>
+              <p:cNvPr id="8" name="CasellaDiTesto 7">
+                <a:extLst>
+                  <a:ext uri="{FF2B5EF4-FFF2-40B4-BE49-F238E27FC236}">
+                    <a16:creationId xmlns:a16="http://schemas.microsoft.com/office/drawing/2014/main" id="{61CCC5EB-30E8-0FFC-3F1C-39CAC283583D}"/>
+                  </a:ext>
+                </a:extLst>
+              </p:cNvPr>
+              <p:cNvSpPr txBox="1">
+                <a:spLocks noRot="1" noChangeAspect="1" noMove="1" noResize="1" noEditPoints="1" noAdjustHandles="1" noChangeArrowheads="1" noChangeShapeType="1" noTextEdit="1"/>
+              </p:cNvSpPr>
+              <p:nvPr/>
+            </p:nvSpPr>
+            <p:spPr>
+              <a:xfrm>
+                <a:off x="642938" y="2590977"/>
+                <a:ext cx="4972692" cy="646331"/>
+              </a:xfrm>
+              <a:prstGeom prst="rect">
+                <a:avLst/>
+              </a:prstGeom>
+              <a:blipFill>
+                <a:blip r:embed="rId2"/>
+                <a:stretch>
+                  <a:fillRect l="-613" t="-4717" r="-613" b="-14151"/>
+                </a:stretch>
+              </a:blipFill>
+            </p:spPr>
+            <p:txBody>
+              <a:bodyPr/>
+              <a:lstStyle/>
+              <a:p>
+                <a:r>
+                  <a:rPr lang="it-IT">
+                    <a:noFill/>
+                  </a:rPr>
+                  <a:t> </a:t>
+                </a:r>
+              </a:p>
+            </p:txBody>
+          </p:sp>
+        </mc:Fallback>
+      </mc:AlternateContent>
       <p:grpSp>
         <p:nvGrpSpPr>
-          <p:cNvPr id="7" name="Gruppo 6">
+          <p:cNvPr id="21" name="Gruppo 20">
             <a:extLst>
               <a:ext uri="{FF2B5EF4-FFF2-40B4-BE49-F238E27FC236}">
-                <a16:creationId xmlns:a16="http://schemas.microsoft.com/office/drawing/2014/main" id="{946C42DD-B232-038E-21BD-8D5EEE795BA1}"/>
+                <a16:creationId xmlns:a16="http://schemas.microsoft.com/office/drawing/2014/main" id="{3203D1F8-0616-FB67-6A38-14946A7A62B5}"/>
               </a:ext>
             </a:extLst>
           </p:cNvPr>
@@ -14620,7 +18373,7 @@
         </p:nvGrpSpPr>
         <p:grpSpPr>
           <a:xfrm>
-            <a:off x="561427" y="2800792"/>
+            <a:off x="5897366" y="2970441"/>
             <a:ext cx="4972692" cy="3339101"/>
             <a:chOff x="561427" y="2800792"/>
             <a:chExt cx="4972692" cy="3339101"/>
@@ -14628,10 +18381,10 @@
         </p:grpSpPr>
         <p:sp>
           <p:nvSpPr>
-            <p:cNvPr id="6" name="Rettangolo con angoli arrotondati 5">
+            <p:cNvPr id="22" name="Rettangolo con angoli arrotondati 21">
               <a:extLst>
                 <a:ext uri="{FF2B5EF4-FFF2-40B4-BE49-F238E27FC236}">
-                  <a16:creationId xmlns:a16="http://schemas.microsoft.com/office/drawing/2014/main" id="{E1A0B8FE-DF38-0332-111E-C639C0E0DEB7}"/>
+                  <a16:creationId xmlns:a16="http://schemas.microsoft.com/office/drawing/2014/main" id="{F3450E2B-1C29-08C5-B90E-0A95A7FB378E}"/>
                 </a:ext>
               </a:extLst>
             </p:cNvPr>
@@ -14679,16 +18432,16 @@
             <a:lstStyle/>
             <a:p>
               <a:pPr algn="ctr"/>
-              <a:endParaRPr lang="it-IT"/>
+              <a:endParaRPr lang="en-GB" noProof="0" dirty="0"/>
             </a:p>
           </p:txBody>
         </p:sp>
         <p:grpSp>
           <p:nvGrpSpPr>
-            <p:cNvPr id="5" name="Gruppo 4">
+            <p:cNvPr id="23" name="Gruppo 22">
               <a:extLst>
                 <a:ext uri="{FF2B5EF4-FFF2-40B4-BE49-F238E27FC236}">
-                  <a16:creationId xmlns:a16="http://schemas.microsoft.com/office/drawing/2014/main" id="{C9398639-BF95-06D2-C975-337D3707176F}"/>
+                  <a16:creationId xmlns:a16="http://schemas.microsoft.com/office/drawing/2014/main" id="{4E3A0C47-45E6-C191-0B44-02C0E482EBA3}"/>
                 </a:ext>
               </a:extLst>
             </p:cNvPr>
@@ -14697,20 +18450,20 @@
           </p:nvGrpSpPr>
           <p:grpSpPr>
             <a:xfrm>
-              <a:off x="656865" y="2882993"/>
-              <a:ext cx="4781817" cy="3174698"/>
-              <a:chOff x="642938" y="2402526"/>
-              <a:chExt cx="4781817" cy="3174698"/>
+              <a:off x="1296030" y="2882993"/>
+              <a:ext cx="3503487" cy="935122"/>
+              <a:chOff x="1282103" y="2402526"/>
+              <a:chExt cx="3503487" cy="935122"/>
             </a:xfrm>
           </p:grpSpPr>
-          <mc:AlternateContent xmlns:mc="http://schemas.openxmlformats.org/markup-compatibility/2006" xmlns:a14="http://schemas.microsoft.com/office/drawing/2010/main">
-            <mc:Choice Requires="a14">
+          <mc:AlternateContent xmlns:mc="http://schemas.openxmlformats.org/markup-compatibility/2006">
+            <mc:Choice xmlns:a14="http://schemas.microsoft.com/office/drawing/2010/main" Requires="a14">
               <p:sp>
                 <p:nvSpPr>
-                  <p:cNvPr id="14" name="CasellaDiTesto 13">
+                  <p:cNvPr id="24" name="CasellaDiTesto 23">
                     <a:extLst>
                       <a:ext uri="{FF2B5EF4-FFF2-40B4-BE49-F238E27FC236}">
-                        <a16:creationId xmlns:a16="http://schemas.microsoft.com/office/drawing/2014/main" id="{BC4AC2BC-522C-CF7C-A8BC-2F88B1C1C828}"/>
+                        <a16:creationId xmlns:a16="http://schemas.microsoft.com/office/drawing/2014/main" id="{84ABDCAF-854A-3074-A9FB-6184F271BEE6}"/>
                       </a:ext>
                     </a:extLst>
                   </p:cNvPr>
@@ -14720,7 +18473,7 @@
                 <p:spPr>
                   <a:xfrm>
                     <a:off x="1282103" y="2968316"/>
-                    <a:ext cx="3503487" cy="923330"/>
+                    <a:ext cx="3503487" cy="369332"/>
                   </a:xfrm>
                   <a:prstGeom prst="rect">
                     <a:avLst/>
@@ -14741,7 +18494,7 @@
                       <a:buChar char="•"/>
                     </a:pPr>
                     <a:r>
-                      <a:rPr lang="it-IT" dirty="0"/>
+                      <a:rPr lang="en-GB" noProof="0" dirty="0"/>
                       <a:t>Sample a </a:t>
                     </a:r>
                     <a14:m>
@@ -14749,14 +18502,14 @@
                         <m:sSub>
                           <m:sSubPr>
                             <m:ctrlPr>
-                              <a:rPr lang="it-IT" i="1" dirty="0" smtClean="0">
+                              <a:rPr lang="en-GB" i="1" noProof="0" smtClean="0">
                                 <a:latin typeface="Cambria Math" panose="02040503050406030204" pitchFamily="18" charset="0"/>
                               </a:rPr>
                             </m:ctrlPr>
                           </m:sSubPr>
                           <m:e>
                             <m:r>
-                              <a:rPr lang="it-IT" i="1" dirty="0" smtClean="0">
+                              <a:rPr lang="en-GB" i="1" noProof="0" smtClean="0">
                                 <a:latin typeface="Cambria Math" panose="02040503050406030204" pitchFamily="18" charset="0"/>
                               </a:rPr>
                               <m:t>𝜃</m:t>
@@ -14764,7 +18517,7 @@
                           </m:e>
                           <m:sub>
                             <m:r>
-                              <a:rPr lang="it-IT" i="1" dirty="0" err="1">
+                              <a:rPr lang="en-GB" i="1" noProof="0" smtClean="0">
                                 <a:latin typeface="Cambria Math" panose="02040503050406030204" pitchFamily="18" charset="0"/>
                               </a:rPr>
                               <m:t>𝑡</m:t>
@@ -14774,13 +18527,13 @@
                       </m:oMath>
                     </a14:m>
                     <a:r>
-                      <a:rPr lang="it-IT" dirty="0"/>
+                      <a:rPr lang="en-GB" noProof="0" dirty="0"/>
                       <a:t> from </a:t>
                     </a:r>
                     <a14:m>
                       <m:oMath xmlns:m="http://schemas.openxmlformats.org/officeDocument/2006/math">
                         <m:r>
-                          <a:rPr lang="it-IT" i="1" dirty="0" smtClean="0">
+                          <a:rPr lang="en-GB" i="1" noProof="0" smtClean="0">
                             <a:latin typeface="Cambria Math" panose="02040503050406030204" pitchFamily="18" charset="0"/>
                           </a:rPr>
                           <m:t>𝑞</m:t>
@@ -14788,7 +18541,7 @@
                         <m:d>
                           <m:dPr>
                             <m:ctrlPr>
-                              <a:rPr lang="it-IT" i="1" dirty="0" smtClean="0">
+                              <a:rPr lang="en-GB" i="1" noProof="0" smtClean="0">
                                 <a:latin typeface="Cambria Math" panose="02040503050406030204" pitchFamily="18" charset="0"/>
                               </a:rPr>
                             </m:ctrlPr>
@@ -14797,14 +18550,14 @@
                             <m:sSub>
                               <m:sSubPr>
                                 <m:ctrlPr>
-                                  <a:rPr lang="it-IT" i="1" dirty="0" smtClean="0">
+                                  <a:rPr lang="en-GB" i="1" noProof="0" smtClean="0">
                                     <a:latin typeface="Cambria Math" panose="02040503050406030204" pitchFamily="18" charset="0"/>
                                   </a:rPr>
                                 </m:ctrlPr>
                               </m:sSubPr>
                               <m:e>
                                 <m:r>
-                                  <a:rPr lang="it-IT" i="1" dirty="0" smtClean="0">
+                                  <a:rPr lang="en-GB" i="1" noProof="0" smtClean="0">
                                     <a:latin typeface="Cambria Math" panose="02040503050406030204" pitchFamily="18" charset="0"/>
                                   </a:rPr>
                                   <m:t>𝜃</m:t>
@@ -14812,7 +18565,7 @@
                               </m:e>
                               <m:sub>
                                 <m:r>
-                                  <a:rPr lang="it-IT" i="1" dirty="0" smtClean="0">
+                                  <a:rPr lang="en-GB" i="1" noProof="0" smtClean="0">
                                     <a:latin typeface="Cambria Math" panose="02040503050406030204" pitchFamily="18" charset="0"/>
                                   </a:rPr>
                                   <m:t>0</m:t>
@@ -14823,84 +18576,18 @@
                         </m:d>
                       </m:oMath>
                     </a14:m>
-                    <a:endParaRPr lang="it-IT" dirty="0"/>
-                  </a:p>
-                  <a:p>
-                    <a:pPr marL="285750" indent="-285750">
-                      <a:buFont typeface="Arial" panose="020B0604020202020204" pitchFamily="34" charset="0"/>
-                      <a:buChar char="•"/>
-                    </a:pPr>
-                    <a:r>
-                      <a:rPr lang="it-IT" dirty="0"/>
-                      <a:t>Compute the </a:t>
-                    </a:r>
-                    <a:r>
-                      <a:rPr lang="it-IT" dirty="0" err="1"/>
-                      <a:t>posterior</a:t>
-                    </a:r>
-                    <a:r>
-                      <a:rPr lang="it-IT" dirty="0"/>
-                      <a:t> on </a:t>
-                    </a:r>
-                    <a14:m>
-                      <m:oMath xmlns:m="http://schemas.openxmlformats.org/officeDocument/2006/math">
-                        <m:sSub>
-                          <m:sSubPr>
-                            <m:ctrlPr>
-                              <a:rPr lang="it-IT" i="1" dirty="0" smtClean="0">
-                                <a:latin typeface="Cambria Math" panose="02040503050406030204" pitchFamily="18" charset="0"/>
-                              </a:rPr>
-                            </m:ctrlPr>
-                          </m:sSubPr>
-                          <m:e>
-                            <m:r>
-                              <a:rPr lang="it-IT" i="1" dirty="0" smtClean="0">
-                                <a:latin typeface="Cambria Math" panose="02040503050406030204" pitchFamily="18" charset="0"/>
-                              </a:rPr>
-                              <m:t>𝜃</m:t>
-                            </m:r>
-                          </m:e>
-                          <m:sub>
-                            <m:r>
-                              <a:rPr lang="it-IT" i="1" dirty="0" err="1">
-                                <a:latin typeface="Cambria Math" panose="02040503050406030204" pitchFamily="18" charset="0"/>
-                              </a:rPr>
-                              <m:t>𝑡</m:t>
-                            </m:r>
-                          </m:sub>
-                        </m:sSub>
-                      </m:oMath>
-                    </a14:m>
-                    <a:endParaRPr lang="it-IT" dirty="0"/>
-                  </a:p>
-                  <a:p>
-                    <a:pPr marL="285750" indent="-285750">
-                      <a:buFont typeface="Arial" panose="020B0604020202020204" pitchFamily="34" charset="0"/>
-                      <a:buChar char="•"/>
-                    </a:pPr>
-                    <a:r>
-                      <a:rPr lang="it-IT" dirty="0"/>
-                      <a:t>Check </a:t>
-                    </a:r>
-                    <a:r>
-                      <a:rPr lang="it-IT" dirty="0" err="1"/>
-                      <a:t>acceptance</a:t>
-                    </a:r>
-                    <a:r>
-                      <a:rPr lang="it-IT" dirty="0"/>
-                      <a:t> rule</a:t>
-                    </a:r>
+                    <a:endParaRPr lang="en-GB" noProof="0" dirty="0"/>
                   </a:p>
                 </p:txBody>
               </p:sp>
             </mc:Choice>
-            <mc:Fallback xmlns="">
+            <mc:Fallback>
               <p:sp>
                 <p:nvSpPr>
-                  <p:cNvPr id="14" name="CasellaDiTesto 13">
+                  <p:cNvPr id="24" name="CasellaDiTesto 23">
                     <a:extLst>
                       <a:ext uri="{FF2B5EF4-FFF2-40B4-BE49-F238E27FC236}">
-                        <a16:creationId xmlns:a16="http://schemas.microsoft.com/office/drawing/2014/main" id="{BC4AC2BC-522C-CF7C-A8BC-2F88B1C1C828}"/>
+                        <a16:creationId xmlns:a16="http://schemas.microsoft.com/office/drawing/2014/main" id="{84ABDCAF-854A-3074-A9FB-6184F271BEE6}"/>
                       </a:ext>
                     </a:extLst>
                   </p:cNvPr>
@@ -14912,480 +18599,15 @@
                 <p:spPr>
                   <a:xfrm>
                     <a:off x="1282103" y="2968316"/>
-                    <a:ext cx="3503487" cy="923330"/>
+                    <a:ext cx="3503487" cy="369332"/>
                   </a:xfrm>
                   <a:prstGeom prst="rect">
                     <a:avLst/>
                   </a:prstGeom>
                   <a:blipFill>
-                    <a:blip r:embed="rId2"/>
+                    <a:blip r:embed="rId3"/>
                     <a:stretch>
-                      <a:fillRect l="-1220" t="-3974" b="-9934"/>
-                    </a:stretch>
-                  </a:blipFill>
-                  <a:ln>
-                    <a:noFill/>
-                  </a:ln>
-                </p:spPr>
-                <p:txBody>
-                  <a:bodyPr/>
-                  <a:lstStyle/>
-                  <a:p>
-                    <a:r>
-                      <a:rPr lang="it-IT">
-                        <a:noFill/>
-                      </a:rPr>
-                      <a:t> </a:t>
-                    </a:r>
-                  </a:p>
-                </p:txBody>
-              </p:sp>
-            </mc:Fallback>
-          </mc:AlternateContent>
-          <p:grpSp>
-            <p:nvGrpSpPr>
-              <p:cNvPr id="3" name="Gruppo 2">
-                <a:extLst>
-                  <a:ext uri="{FF2B5EF4-FFF2-40B4-BE49-F238E27FC236}">
-                    <a16:creationId xmlns:a16="http://schemas.microsoft.com/office/drawing/2014/main" id="{68E45162-7B70-551D-EEDD-0C813345039A}"/>
-                  </a:ext>
-                </a:extLst>
-              </p:cNvPr>
-              <p:cNvGrpSpPr/>
-              <p:nvPr/>
-            </p:nvGrpSpPr>
-            <p:grpSpPr>
-              <a:xfrm>
-                <a:off x="864688" y="4088104"/>
-                <a:ext cx="4338316" cy="646331"/>
-                <a:chOff x="740543" y="4035967"/>
-                <a:chExt cx="4338316" cy="646331"/>
-              </a:xfrm>
-            </p:grpSpPr>
-            <mc:AlternateContent xmlns:mc="http://schemas.openxmlformats.org/markup-compatibility/2006" xmlns:a14="http://schemas.microsoft.com/office/drawing/2010/main">
-              <mc:Choice Requires="a14">
-                <p:sp>
-                  <p:nvSpPr>
-                    <p:cNvPr id="15" name="CasellaDiTesto 14">
-                      <a:extLst>
-                        <a:ext uri="{FF2B5EF4-FFF2-40B4-BE49-F238E27FC236}">
-                          <a16:creationId xmlns:a16="http://schemas.microsoft.com/office/drawing/2014/main" id="{A8346508-EC61-0A86-CF73-51AB617DF50E}"/>
-                        </a:ext>
-                      </a:extLst>
-                    </p:cNvPr>
-                    <p:cNvSpPr txBox="1"/>
-                    <p:nvPr/>
-                  </p:nvSpPr>
-                  <p:spPr>
-                    <a:xfrm>
-                      <a:off x="740543" y="4035967"/>
-                      <a:ext cx="1684962" cy="646331"/>
-                    </a:xfrm>
-                    <a:prstGeom prst="rect">
-                      <a:avLst/>
-                    </a:prstGeom>
-                    <a:noFill/>
-                    <a:ln>
-                      <a:noFill/>
-                    </a:ln>
-                  </p:spPr>
-                  <p:txBody>
-                    <a:bodyPr wrap="square" rtlCol="0">
-                      <a:spAutoFit/>
-                    </a:bodyPr>
-                    <a:lstStyle/>
-                    <a:p>
-                      <a:r>
-                        <a:rPr lang="it-IT" dirty="0" err="1"/>
-                        <a:t>If</a:t>
-                      </a:r>
-                      <a:r>
-                        <a:rPr lang="it-IT" dirty="0"/>
-                        <a:t> </a:t>
-                      </a:r>
-                      <a:r>
-                        <a:rPr lang="it-IT" dirty="0" err="1"/>
-                        <a:t>true</a:t>
-                      </a:r>
-                      <a:r>
-                        <a:rPr lang="it-IT" dirty="0"/>
-                        <a:t> </a:t>
-                      </a:r>
-                      <a:r>
-                        <a:rPr lang="it-IT" dirty="0" err="1"/>
-                        <a:t>move</a:t>
-                      </a:r>
-                      <a:r>
-                        <a:rPr lang="it-IT" dirty="0"/>
-                        <a:t> to </a:t>
-                      </a:r>
-                      <a14:m>
-                        <m:oMath xmlns:m="http://schemas.openxmlformats.org/officeDocument/2006/math">
-                          <m:sSub>
-                            <m:sSubPr>
-                              <m:ctrlPr>
-                                <a:rPr lang="it-IT" i="1" dirty="0" smtClean="0">
-                                  <a:latin typeface="Cambria Math" panose="02040503050406030204" pitchFamily="18" charset="0"/>
-                                </a:rPr>
-                              </m:ctrlPr>
-                            </m:sSubPr>
-                            <m:e>
-                              <m:r>
-                                <a:rPr lang="it-IT" i="1" dirty="0" smtClean="0">
-                                  <a:latin typeface="Cambria Math" panose="02040503050406030204" pitchFamily="18" charset="0"/>
-                                </a:rPr>
-                                <m:t>𝜃</m:t>
-                              </m:r>
-                            </m:e>
-                            <m:sub>
-                              <m:r>
-                                <a:rPr lang="it-IT" i="1" dirty="0" smtClean="0">
-                                  <a:latin typeface="Cambria Math" panose="02040503050406030204" pitchFamily="18" charset="0"/>
-                                </a:rPr>
-                                <m:t>0</m:t>
-                              </m:r>
-                            </m:sub>
-                          </m:sSub>
-                          <m:r>
-                            <a:rPr lang="it-IT" i="1" dirty="0" smtClean="0">
-                              <a:latin typeface="Cambria Math" panose="02040503050406030204" pitchFamily="18" charset="0"/>
-                            </a:rPr>
-                            <m:t>=</m:t>
-                          </m:r>
-                          <m:sSub>
-                            <m:sSubPr>
-                              <m:ctrlPr>
-                                <a:rPr lang="it-IT" i="1" dirty="0" err="1" smtClean="0">
-                                  <a:latin typeface="Cambria Math" panose="02040503050406030204" pitchFamily="18" charset="0"/>
-                                </a:rPr>
-                              </m:ctrlPr>
-                            </m:sSubPr>
-                            <m:e>
-                              <m:r>
-                                <a:rPr lang="it-IT" i="1" dirty="0" smtClean="0">
-                                  <a:latin typeface="Cambria Math" panose="02040503050406030204" pitchFamily="18" charset="0"/>
-                                </a:rPr>
-                                <m:t>𝜃</m:t>
-                              </m:r>
-                            </m:e>
-                            <m:sub>
-                              <m:r>
-                                <a:rPr lang="it-IT" i="1" dirty="0" err="1" smtClean="0">
-                                  <a:latin typeface="Cambria Math" panose="02040503050406030204" pitchFamily="18" charset="0"/>
-                                </a:rPr>
-                                <m:t>𝑡</m:t>
-                              </m:r>
-                            </m:sub>
-                          </m:sSub>
-                        </m:oMath>
-                      </a14:m>
-                      <a:endParaRPr lang="it-IT" dirty="0"/>
-                    </a:p>
-                  </p:txBody>
-                </p:sp>
-              </mc:Choice>
-              <mc:Fallback xmlns="">
-                <p:sp>
-                  <p:nvSpPr>
-                    <p:cNvPr id="15" name="CasellaDiTesto 14">
-                      <a:extLst>
-                        <a:ext uri="{FF2B5EF4-FFF2-40B4-BE49-F238E27FC236}">
-                          <a16:creationId xmlns:a16="http://schemas.microsoft.com/office/drawing/2014/main" id="{A8346508-EC61-0A86-CF73-51AB617DF50E}"/>
-                        </a:ext>
-                      </a:extLst>
-                    </p:cNvPr>
-                    <p:cNvSpPr txBox="1">
-                      <a:spLocks noRot="1" noChangeAspect="1" noMove="1" noResize="1" noEditPoints="1" noAdjustHandles="1" noChangeArrowheads="1" noChangeShapeType="1" noTextEdit="1"/>
-                    </p:cNvSpPr>
-                    <p:nvPr/>
-                  </p:nvSpPr>
-                  <p:spPr>
-                    <a:xfrm>
-                      <a:off x="740543" y="4035967"/>
-                      <a:ext cx="1684962" cy="646331"/>
-                    </a:xfrm>
-                    <a:prstGeom prst="rect">
-                      <a:avLst/>
-                    </a:prstGeom>
-                    <a:blipFill>
-                      <a:blip r:embed="rId3"/>
-                      <a:stretch>
-                        <a:fillRect l="-2888" t="-4717" b="-14151"/>
-                      </a:stretch>
-                    </a:blipFill>
-                    <a:ln>
-                      <a:noFill/>
-                    </a:ln>
-                  </p:spPr>
-                  <p:txBody>
-                    <a:bodyPr/>
-                    <a:lstStyle/>
-                    <a:p>
-                      <a:r>
-                        <a:rPr lang="it-IT">
-                          <a:noFill/>
-                        </a:rPr>
-                        <a:t> </a:t>
-                      </a:r>
-                    </a:p>
-                  </p:txBody>
-                </p:sp>
-              </mc:Fallback>
-            </mc:AlternateContent>
-            <mc:AlternateContent xmlns:mc="http://schemas.openxmlformats.org/markup-compatibility/2006" xmlns:a14="http://schemas.microsoft.com/office/drawing/2010/main">
-              <mc:Choice Requires="a14">
-                <p:sp>
-                  <p:nvSpPr>
-                    <p:cNvPr id="16" name="CasellaDiTesto 15">
-                      <a:extLst>
-                        <a:ext uri="{FF2B5EF4-FFF2-40B4-BE49-F238E27FC236}">
-                          <a16:creationId xmlns:a16="http://schemas.microsoft.com/office/drawing/2014/main" id="{1A45A8E9-92A5-F272-C0D9-0FF6E89C39A8}"/>
-                        </a:ext>
-                      </a:extLst>
-                    </p:cNvPr>
-                    <p:cNvSpPr txBox="1"/>
-                    <p:nvPr/>
-                  </p:nvSpPr>
-                  <p:spPr>
-                    <a:xfrm>
-                      <a:off x="3008616" y="4174466"/>
-                      <a:ext cx="2070243" cy="369332"/>
-                    </a:xfrm>
-                    <a:prstGeom prst="rect">
-                      <a:avLst/>
-                    </a:prstGeom>
-                    <a:noFill/>
-                    <a:ln>
-                      <a:noFill/>
-                    </a:ln>
-                  </p:spPr>
-                  <p:txBody>
-                    <a:bodyPr wrap="square" rtlCol="0">
-                      <a:spAutoFit/>
-                    </a:bodyPr>
-                    <a:lstStyle/>
-                    <a:p>
-                      <a:r>
-                        <a:rPr lang="it-IT" dirty="0" err="1"/>
-                        <a:t>If</a:t>
-                      </a:r>
-                      <a:r>
-                        <a:rPr lang="it-IT" dirty="0"/>
-                        <a:t> false stay </a:t>
-                      </a:r>
-                      <a:r>
-                        <a:rPr lang="it-IT" dirty="0" err="1"/>
-                        <a:t>at</a:t>
-                      </a:r>
-                      <a:r>
-                        <a:rPr lang="it-IT" dirty="0"/>
-                        <a:t> </a:t>
-                      </a:r>
-                      <a14:m>
-                        <m:oMath xmlns:m="http://schemas.openxmlformats.org/officeDocument/2006/math">
-                          <m:sSub>
-                            <m:sSubPr>
-                              <m:ctrlPr>
-                                <a:rPr lang="it-IT" i="1" dirty="0" smtClean="0">
-                                  <a:latin typeface="Cambria Math" panose="02040503050406030204" pitchFamily="18" charset="0"/>
-                                </a:rPr>
-                              </m:ctrlPr>
-                            </m:sSubPr>
-                            <m:e>
-                              <m:r>
-                                <a:rPr lang="it-IT" i="1" dirty="0" smtClean="0">
-                                  <a:latin typeface="Cambria Math" panose="02040503050406030204" pitchFamily="18" charset="0"/>
-                                </a:rPr>
-                                <m:t>𝜃</m:t>
-                              </m:r>
-                            </m:e>
-                            <m:sub>
-                              <m:r>
-                                <a:rPr lang="it-IT" i="1" dirty="0" smtClean="0">
-                                  <a:latin typeface="Cambria Math" panose="02040503050406030204" pitchFamily="18" charset="0"/>
-                                </a:rPr>
-                                <m:t>0</m:t>
-                              </m:r>
-                            </m:sub>
-                          </m:sSub>
-                        </m:oMath>
-                      </a14:m>
-                      <a:endParaRPr lang="it-IT" dirty="0"/>
-                    </a:p>
-                  </p:txBody>
-                </p:sp>
-              </mc:Choice>
-              <mc:Fallback xmlns="">
-                <p:sp>
-                  <p:nvSpPr>
-                    <p:cNvPr id="16" name="CasellaDiTesto 15">
-                      <a:extLst>
-                        <a:ext uri="{FF2B5EF4-FFF2-40B4-BE49-F238E27FC236}">
-                          <a16:creationId xmlns:a16="http://schemas.microsoft.com/office/drawing/2014/main" id="{1A45A8E9-92A5-F272-C0D9-0FF6E89C39A8}"/>
-                        </a:ext>
-                      </a:extLst>
-                    </p:cNvPr>
-                    <p:cNvSpPr txBox="1">
-                      <a:spLocks noRot="1" noChangeAspect="1" noMove="1" noResize="1" noEditPoints="1" noAdjustHandles="1" noChangeArrowheads="1" noChangeShapeType="1" noTextEdit="1"/>
-                    </p:cNvSpPr>
-                    <p:nvPr/>
-                  </p:nvSpPr>
-                  <p:spPr>
-                    <a:xfrm>
-                      <a:off x="3008616" y="4174466"/>
-                      <a:ext cx="2070243" cy="369332"/>
-                    </a:xfrm>
-                    <a:prstGeom prst="rect">
-                      <a:avLst/>
-                    </a:prstGeom>
-                    <a:blipFill>
-                      <a:blip r:embed="rId4"/>
-                      <a:stretch>
-                        <a:fillRect l="-2353" t="-8197" b="-24590"/>
-                      </a:stretch>
-                    </a:blipFill>
-                    <a:ln>
-                      <a:noFill/>
-                    </a:ln>
-                  </p:spPr>
-                  <p:txBody>
-                    <a:bodyPr/>
-                    <a:lstStyle/>
-                    <a:p>
-                      <a:r>
-                        <a:rPr lang="it-IT">
-                          <a:noFill/>
-                        </a:rPr>
-                        <a:t> </a:t>
-                      </a:r>
-                    </a:p>
-                  </p:txBody>
-                </p:sp>
-              </mc:Fallback>
-            </mc:AlternateContent>
-          </p:grpSp>
-          <mc:AlternateContent xmlns:mc="http://schemas.openxmlformats.org/markup-compatibility/2006" xmlns:a14="http://schemas.microsoft.com/office/drawing/2010/main">
-            <mc:Choice Requires="a14">
-              <p:sp>
-                <p:nvSpPr>
-                  <p:cNvPr id="17" name="CasellaDiTesto 16">
-                    <a:extLst>
-                      <a:ext uri="{FF2B5EF4-FFF2-40B4-BE49-F238E27FC236}">
-                        <a16:creationId xmlns:a16="http://schemas.microsoft.com/office/drawing/2014/main" id="{7F281147-055D-0C36-6BC8-FBB7FEF09A80}"/>
-                      </a:ext>
-                    </a:extLst>
-                  </p:cNvPr>
-                  <p:cNvSpPr txBox="1"/>
-                  <p:nvPr/>
-                </p:nvSpPr>
-                <p:spPr>
-                  <a:xfrm>
-                    <a:off x="642938" y="4930893"/>
-                    <a:ext cx="4781817" cy="646331"/>
-                  </a:xfrm>
-                  <a:prstGeom prst="rect">
-                    <a:avLst/>
-                  </a:prstGeom>
-                  <a:noFill/>
-                  <a:ln>
-                    <a:noFill/>
-                  </a:ln>
-                </p:spPr>
-                <p:txBody>
-                  <a:bodyPr wrap="square" rtlCol="0">
-                    <a:spAutoFit/>
-                  </a:bodyPr>
-                  <a:lstStyle/>
-                  <a:p>
-                    <a:r>
-                      <a:rPr lang="it-IT" dirty="0"/>
-                      <a:t>In </a:t>
-                    </a:r>
-                    <a:r>
-                      <a:rPr lang="it-IT" dirty="0" err="1"/>
-                      <a:t>this</a:t>
-                    </a:r>
-                    <a:r>
-                      <a:rPr lang="it-IT" dirty="0"/>
-                      <a:t> way we </a:t>
-                    </a:r>
-                    <a:r>
-                      <a:rPr lang="it-IT" dirty="0" err="1"/>
-                      <a:t>will</a:t>
-                    </a:r>
-                    <a:r>
-                      <a:rPr lang="it-IT" dirty="0"/>
-                      <a:t> have the </a:t>
-                    </a:r>
-                    <a14:m>
-                      <m:oMath xmlns:m="http://schemas.openxmlformats.org/officeDocument/2006/math">
-                        <m:r>
-                          <a:rPr lang="it-IT" i="1" dirty="0" smtClean="0">
-                            <a:latin typeface="Cambria Math" panose="02040503050406030204" pitchFamily="18" charset="0"/>
-                          </a:rPr>
-                          <m:t>𝜃</m:t>
-                        </m:r>
-                      </m:oMath>
-                    </a14:m>
-                    <a:r>
-                      <a:rPr lang="it-IT" dirty="0"/>
-                      <a:t> with </a:t>
-                    </a:r>
-                    <a:r>
-                      <a:rPr lang="it-IT" dirty="0" err="1"/>
-                      <a:t>higher</a:t>
-                    </a:r>
-                    <a:r>
-                      <a:rPr lang="it-IT" dirty="0"/>
-                      <a:t> </a:t>
-                    </a:r>
-                    <a:r>
-                      <a:rPr lang="it-IT" dirty="0" err="1"/>
-                      <a:t>posterior</a:t>
-                    </a:r>
-                    <a:r>
-                      <a:rPr lang="it-IT" dirty="0"/>
-                      <a:t> more times so more </a:t>
-                    </a:r>
-                    <a:r>
-                      <a:rPr lang="it-IT" dirty="0" err="1"/>
-                      <a:t>probable</a:t>
-                    </a:r>
-                    <a:r>
-                      <a:rPr lang="it-IT" dirty="0"/>
-                      <a:t>! </a:t>
-                    </a:r>
-                  </a:p>
-                </p:txBody>
-              </p:sp>
-            </mc:Choice>
-            <mc:Fallback xmlns="">
-              <p:sp>
-                <p:nvSpPr>
-                  <p:cNvPr id="17" name="CasellaDiTesto 16">
-                    <a:extLst>
-                      <a:ext uri="{FF2B5EF4-FFF2-40B4-BE49-F238E27FC236}">
-                        <a16:creationId xmlns:a16="http://schemas.microsoft.com/office/drawing/2014/main" id="{7F281147-055D-0C36-6BC8-FBB7FEF09A80}"/>
-                      </a:ext>
-                    </a:extLst>
-                  </p:cNvPr>
-                  <p:cNvSpPr txBox="1">
-                    <a:spLocks noRot="1" noChangeAspect="1" noMove="1" noResize="1" noEditPoints="1" noAdjustHandles="1" noChangeArrowheads="1" noChangeShapeType="1" noTextEdit="1"/>
-                  </p:cNvSpPr>
-                  <p:nvPr/>
-                </p:nvSpPr>
-                <p:spPr>
-                  <a:xfrm>
-                    <a:off x="642938" y="4930893"/>
-                    <a:ext cx="4781817" cy="646331"/>
-                  </a:xfrm>
-                  <a:prstGeom prst="rect">
-                    <a:avLst/>
-                  </a:prstGeom>
-                  <a:blipFill>
-                    <a:blip r:embed="rId5"/>
-                    <a:stretch>
-                      <a:fillRect l="-1148" t="-5660" b="-14151"/>
+                      <a:fillRect l="-1217" t="-10000" b="-26667"/>
                     </a:stretch>
                   </a:blipFill>
                   <a:ln>
@@ -15409,10 +18631,10 @@
           </mc:AlternateContent>
           <p:sp>
             <p:nvSpPr>
-              <p:cNvPr id="2" name="CasellaDiTesto 1">
+              <p:cNvPr id="27" name="CasellaDiTesto 26">
                 <a:extLst>
                   <a:ext uri="{FF2B5EF4-FFF2-40B4-BE49-F238E27FC236}">
-                    <a16:creationId xmlns:a16="http://schemas.microsoft.com/office/drawing/2014/main" id="{75813D49-40A6-C2C2-4605-7CEE31A305CD}"/>
+                    <a16:creationId xmlns:a16="http://schemas.microsoft.com/office/drawing/2014/main" id="{CB37B752-2C24-EDF4-1527-04E814287CC0}"/>
                   </a:ext>
                 </a:extLst>
               </p:cNvPr>
@@ -15439,7 +18661,7 @@
               <a:lstStyle/>
               <a:p>
                 <a:r>
-                  <a:rPr lang="it-IT" dirty="0"/>
+                  <a:rPr lang="en-GB" noProof="0" dirty="0"/>
                   <a:t>Base idea</a:t>
                 </a:r>
               </a:p>
@@ -15449,10 +18671,10 @@
       </p:grpSp>
       <p:sp>
         <p:nvSpPr>
-          <p:cNvPr id="8" name="CasellaDiTesto 7">
+          <p:cNvPr id="30" name="CasellaDiTesto 29">
             <a:extLst>
               <a:ext uri="{FF2B5EF4-FFF2-40B4-BE49-F238E27FC236}">
-                <a16:creationId xmlns:a16="http://schemas.microsoft.com/office/drawing/2014/main" id="{61CCC5EB-30E8-0FFC-3F1C-39CAC283583D}"/>
+                <a16:creationId xmlns:a16="http://schemas.microsoft.com/office/drawing/2014/main" id="{93769E74-24C9-5AD9-739D-F83198FD498B}"/>
               </a:ext>
             </a:extLst>
           </p:cNvPr>
@@ -15461,8 +18683,8 @@
         </p:nvSpPr>
         <p:spPr>
           <a:xfrm>
-            <a:off x="6421348" y="2882993"/>
-            <a:ext cx="3287731" cy="646331"/>
+            <a:off x="869371" y="3615484"/>
+            <a:ext cx="4519826" cy="646331"/>
           </a:xfrm>
           <a:prstGeom prst="rect">
             <a:avLst/>
@@ -15476,71 +18698,20 @@
           <a:lstStyle/>
           <a:p>
             <a:r>
-              <a:rPr lang="it-IT" dirty="0" err="1"/>
-              <a:t>Proposal</a:t>
-            </a:r>
-            <a:r>
-              <a:rPr lang="it-IT" dirty="0"/>
-              <a:t>: multivariate </a:t>
-            </a:r>
-            <a:r>
-              <a:rPr lang="it-IT" dirty="0" err="1"/>
-              <a:t>normal</a:t>
-            </a:r>
-            <a:r>
-              <a:rPr lang="it-IT" dirty="0"/>
-              <a:t>, blind or not</a:t>
+              <a:rPr lang="en-GB" noProof="0" dirty="0"/>
+              <a:t>We chose a 5D multivariate gaussian but how we chose his covariance matrix?</a:t>
             </a:r>
           </a:p>
         </p:txBody>
       </p:sp>
-      <p:sp>
-        <p:nvSpPr>
-          <p:cNvPr id="9" name="CasellaDiTesto 8">
-            <a:extLst>
-              <a:ext uri="{FF2B5EF4-FFF2-40B4-BE49-F238E27FC236}">
-                <a16:creationId xmlns:a16="http://schemas.microsoft.com/office/drawing/2014/main" id="{12A952C8-5E1B-56F5-C6C0-6C3EA1C18B0E}"/>
-              </a:ext>
-            </a:extLst>
-          </p:cNvPr>
-          <p:cNvSpPr txBox="1"/>
-          <p:nvPr/>
-        </p:nvSpPr>
-        <p:spPr>
-          <a:xfrm>
-            <a:off x="6789051" y="4372113"/>
-            <a:ext cx="2211111" cy="369332"/>
-          </a:xfrm>
-          <a:prstGeom prst="rect">
-            <a:avLst/>
-          </a:prstGeom>
-          <a:noFill/>
-        </p:spPr>
-        <p:txBody>
-          <a:bodyPr wrap="square" rtlCol="0">
-            <a:spAutoFit/>
-          </a:bodyPr>
-          <a:lstStyle/>
-          <a:p>
-            <a:r>
-              <a:rPr lang="it-IT" dirty="0" err="1"/>
-              <a:t>Acceptance</a:t>
-            </a:r>
-            <a:r>
-              <a:rPr lang="it-IT" dirty="0"/>
-              <a:t> rule</a:t>
-            </a:r>
-          </a:p>
-        </p:txBody>
-      </p:sp>
-      <mc:AlternateContent xmlns:mc="http://schemas.openxmlformats.org/markup-compatibility/2006" xmlns:a14="http://schemas.microsoft.com/office/drawing/2010/main">
-        <mc:Choice Requires="a14">
+      <mc:AlternateContent xmlns:mc="http://schemas.openxmlformats.org/markup-compatibility/2006">
+        <mc:Choice xmlns:a14="http://schemas.microsoft.com/office/drawing/2010/main" Requires="a14">
           <p:sp>
             <p:nvSpPr>
-              <p:cNvPr id="10" name="CasellaDiTesto 9">
+              <p:cNvPr id="31" name="CasellaDiTesto 30">
                 <a:extLst>
                   <a:ext uri="{FF2B5EF4-FFF2-40B4-BE49-F238E27FC236}">
-                    <a16:creationId xmlns:a16="http://schemas.microsoft.com/office/drawing/2014/main" id="{9374EB6B-02FF-46C4-5965-0A5BE147449F}"/>
+                    <a16:creationId xmlns:a16="http://schemas.microsoft.com/office/drawing/2014/main" id="{8C55ED58-9C74-3E90-CF58-634AE817E837}"/>
                   </a:ext>
                 </a:extLst>
               </p:cNvPr>
@@ -15549,8 +18720,8 @@
             </p:nvSpPr>
             <p:spPr>
               <a:xfrm>
-                <a:off x="6789051" y="4916711"/>
-                <a:ext cx="1834968" cy="596382"/>
+                <a:off x="1110412" y="4498461"/>
+                <a:ext cx="4037744" cy="923330"/>
               </a:xfrm>
               <a:prstGeom prst="rect">
                 <a:avLst/>
@@ -15563,270 +18734,83 @@
               </a:bodyPr>
               <a:lstStyle/>
               <a:p>
+                <a:pPr marL="285750" indent="-285750">
+                  <a:buClr>
+                    <a:schemeClr val="accent1"/>
+                  </a:buClr>
+                  <a:buFont typeface="Arial" panose="020B0604020202020204" pitchFamily="34" charset="0"/>
+                  <a:buChar char="•"/>
+                </a:pPr>
+                <a:r>
+                  <a:rPr lang="it-IT" dirty="0"/>
+                  <a:t>«Blind» </a:t>
+                </a:r>
+                <a:r>
+                  <a:rPr lang="it-IT" dirty="0" err="1"/>
+                  <a:t>run</a:t>
+                </a:r>
+                <a:r>
+                  <a:rPr lang="it-IT" dirty="0"/>
+                  <a:t>: we use a </a:t>
+                </a:r>
+                <a:r>
+                  <a:rPr lang="it-IT" dirty="0" err="1"/>
+                  <a:t>diagonal</a:t>
+                </a:r>
+                <a:r>
+                  <a:rPr lang="it-IT" dirty="0"/>
+                  <a:t> </a:t>
+                </a:r>
+                <a:r>
+                  <a:rPr lang="it-IT" dirty="0" err="1"/>
+                  <a:t>covariance</a:t>
+                </a:r>
+                <a:r>
+                  <a:rPr lang="it-IT" dirty="0"/>
+                  <a:t> </a:t>
+                </a:r>
+                <a:r>
+                  <a:rPr lang="it-IT" dirty="0" err="1"/>
+                  <a:t>matrix</a:t>
+                </a:r>
+                <a:r>
+                  <a:rPr lang="it-IT" dirty="0"/>
+                  <a:t> with </a:t>
+                </a:r>
+                <a:r>
+                  <a:rPr lang="it-IT" dirty="0" err="1"/>
+                  <a:t>elements</a:t>
+                </a:r>
+                <a:r>
+                  <a:rPr lang="it-IT" dirty="0"/>
+                  <a:t> </a:t>
+                </a:r>
+                <a:r>
+                  <a:rPr lang="it-IT" dirty="0" err="1"/>
+                  <a:t>equals</a:t>
+                </a:r>
+                <a:r>
+                  <a:rPr lang="it-IT" dirty="0"/>
+                  <a:t> to </a:t>
+                </a:r>
                 <a14:m>
                   <m:oMath xmlns:m="http://schemas.openxmlformats.org/officeDocument/2006/math">
-                    <m:f>
-                      <m:fPr>
-                        <m:ctrlPr>
-                          <a:rPr lang="it-IT" i="1" dirty="0" smtClean="0">
-                            <a:latin typeface="Cambria Math" panose="02040503050406030204" pitchFamily="18" charset="0"/>
-                          </a:rPr>
-                        </m:ctrlPr>
-                      </m:fPr>
-                      <m:num>
-                        <m:r>
-                          <a:rPr lang="it-IT" i="1" dirty="0" smtClean="0">
-                            <a:latin typeface="Cambria Math" panose="02040503050406030204" pitchFamily="18" charset="0"/>
-                          </a:rPr>
-                          <m:t>𝑝</m:t>
-                        </m:r>
-                        <m:d>
-                          <m:dPr>
-                            <m:ctrlPr>
-                              <a:rPr lang="it-IT" i="1" dirty="0" smtClean="0">
-                                <a:latin typeface="Cambria Math" panose="02040503050406030204" pitchFamily="18" charset="0"/>
-                              </a:rPr>
-                            </m:ctrlPr>
-                          </m:dPr>
-                          <m:e>
-                            <m:sSub>
-                              <m:sSubPr>
-                                <m:ctrlPr>
-                                  <a:rPr lang="it-IT" i="1" dirty="0" err="1" smtClean="0">
-                                    <a:latin typeface="Cambria Math" panose="02040503050406030204" pitchFamily="18" charset="0"/>
-                                  </a:rPr>
-                                </m:ctrlPr>
-                              </m:sSubPr>
-                              <m:e>
-                                <m:r>
-                                  <a:rPr lang="it-IT" i="1" dirty="0" smtClean="0">
-                                    <a:latin typeface="Cambria Math" panose="02040503050406030204" pitchFamily="18" charset="0"/>
-                                  </a:rPr>
-                                  <m:t>𝜃</m:t>
-                                </m:r>
-                              </m:e>
-                              <m:sub>
-                                <m:r>
-                                  <a:rPr lang="it-IT" i="1" dirty="0" err="1" smtClean="0">
-                                    <a:latin typeface="Cambria Math" panose="02040503050406030204" pitchFamily="18" charset="0"/>
-                                  </a:rPr>
-                                  <m:t>𝑡</m:t>
-                                </m:r>
-                              </m:sub>
-                            </m:sSub>
-                          </m:e>
-                        </m:d>
-                      </m:num>
-                      <m:den>
-                        <m:r>
-                          <a:rPr lang="it-IT" i="1" dirty="0" smtClean="0">
-                            <a:latin typeface="Cambria Math" panose="02040503050406030204" pitchFamily="18" charset="0"/>
-                          </a:rPr>
-                          <m:t>𝑝</m:t>
-                        </m:r>
-                        <m:d>
-                          <m:dPr>
-                            <m:ctrlPr>
-                              <a:rPr lang="it-IT" i="1" dirty="0" smtClean="0">
-                                <a:latin typeface="Cambria Math" panose="02040503050406030204" pitchFamily="18" charset="0"/>
-                              </a:rPr>
-                            </m:ctrlPr>
-                          </m:dPr>
-                          <m:e>
-                            <m:sSub>
-                              <m:sSubPr>
-                                <m:ctrlPr>
-                                  <a:rPr lang="it-IT" i="1" dirty="0" smtClean="0">
-                                    <a:latin typeface="Cambria Math" panose="02040503050406030204" pitchFamily="18" charset="0"/>
-                                  </a:rPr>
-                                </m:ctrlPr>
-                              </m:sSubPr>
-                              <m:e>
-                                <m:r>
-                                  <a:rPr lang="it-IT" i="1" dirty="0" smtClean="0">
-                                    <a:latin typeface="Cambria Math" panose="02040503050406030204" pitchFamily="18" charset="0"/>
-                                  </a:rPr>
-                                  <m:t>𝜃</m:t>
-                                </m:r>
-                              </m:e>
-                              <m:sub>
-                                <m:r>
-                                  <a:rPr lang="it-IT" i="1" dirty="0" smtClean="0">
-                                    <a:latin typeface="Cambria Math" panose="02040503050406030204" pitchFamily="18" charset="0"/>
-                                  </a:rPr>
-                                  <m:t>0</m:t>
-                                </m:r>
-                              </m:sub>
-                            </m:sSub>
-                          </m:e>
-                        </m:d>
-                      </m:den>
-                    </m:f>
-                    <m:f>
-                      <m:fPr>
-                        <m:ctrlPr>
-                          <a:rPr lang="it-IT" i="1" dirty="0" smtClean="0">
-                            <a:latin typeface="Cambria Math" panose="02040503050406030204" pitchFamily="18" charset="0"/>
-                          </a:rPr>
-                        </m:ctrlPr>
-                      </m:fPr>
-                      <m:num>
-                        <m:r>
-                          <a:rPr lang="it-IT" i="1" dirty="0" smtClean="0">
-                            <a:latin typeface="Cambria Math" panose="02040503050406030204" pitchFamily="18" charset="0"/>
-                          </a:rPr>
-                          <m:t>𝑞</m:t>
-                        </m:r>
-                        <m:d>
-                          <m:dPr>
-                            <m:ctrlPr>
-                              <a:rPr lang="it-IT" i="1" dirty="0" smtClean="0">
-                                <a:latin typeface="Cambria Math" panose="02040503050406030204" pitchFamily="18" charset="0"/>
-                              </a:rPr>
-                            </m:ctrlPr>
-                          </m:dPr>
-                          <m:e>
-                            <m:sSub>
-                              <m:sSubPr>
-                                <m:ctrlPr>
-                                  <a:rPr lang="it-IT" i="1" dirty="0" err="1" smtClean="0">
-                                    <a:latin typeface="Cambria Math" panose="02040503050406030204" pitchFamily="18" charset="0"/>
-                                  </a:rPr>
-                                </m:ctrlPr>
-                              </m:sSubPr>
-                              <m:e>
-                                <m:r>
-                                  <a:rPr lang="it-IT" i="1" dirty="0" smtClean="0">
-                                    <a:latin typeface="Cambria Math" panose="02040503050406030204" pitchFamily="18" charset="0"/>
-                                  </a:rPr>
-                                  <m:t>𝜃</m:t>
-                                </m:r>
-                              </m:e>
-                              <m:sub>
-                                <m:r>
-                                  <a:rPr lang="it-IT" i="1" dirty="0" err="1" smtClean="0">
-                                    <a:latin typeface="Cambria Math" panose="02040503050406030204" pitchFamily="18" charset="0"/>
-                                  </a:rPr>
-                                  <m:t>𝑡</m:t>
-                                </m:r>
-                              </m:sub>
-                            </m:sSub>
-                          </m:e>
-                          <m:e>
-                            <m:sSub>
-                              <m:sSubPr>
-                                <m:ctrlPr>
-                                  <a:rPr lang="it-IT" i="1" dirty="0" smtClean="0">
-                                    <a:latin typeface="Cambria Math" panose="02040503050406030204" pitchFamily="18" charset="0"/>
-                                  </a:rPr>
-                                </m:ctrlPr>
-                              </m:sSubPr>
-                              <m:e>
-                                <m:r>
-                                  <a:rPr lang="it-IT" i="1" dirty="0" smtClean="0">
-                                    <a:latin typeface="Cambria Math" panose="02040503050406030204" pitchFamily="18" charset="0"/>
-                                  </a:rPr>
-                                  <m:t>𝜃</m:t>
-                                </m:r>
-                              </m:e>
-                              <m:sub>
-                                <m:r>
-                                  <a:rPr lang="it-IT" i="1" dirty="0" smtClean="0">
-                                    <a:latin typeface="Cambria Math" panose="02040503050406030204" pitchFamily="18" charset="0"/>
-                                  </a:rPr>
-                                  <m:t>0</m:t>
-                                </m:r>
-                              </m:sub>
-                            </m:sSub>
-                          </m:e>
-                        </m:d>
-                      </m:num>
-                      <m:den>
-                        <m:r>
-                          <a:rPr lang="it-IT" i="1" dirty="0" smtClean="0">
-                            <a:latin typeface="Cambria Math" panose="02040503050406030204" pitchFamily="18" charset="0"/>
-                          </a:rPr>
-                          <m:t>𝑞</m:t>
-                        </m:r>
-                        <m:d>
-                          <m:dPr>
-                            <m:ctrlPr>
-                              <a:rPr lang="it-IT" i="1" dirty="0" smtClean="0">
-                                <a:latin typeface="Cambria Math" panose="02040503050406030204" pitchFamily="18" charset="0"/>
-                              </a:rPr>
-                            </m:ctrlPr>
-                          </m:dPr>
-                          <m:e>
-                            <m:sSub>
-                              <m:sSubPr>
-                                <m:ctrlPr>
-                                  <a:rPr lang="it-IT" i="1" dirty="0" smtClean="0">
-                                    <a:latin typeface="Cambria Math" panose="02040503050406030204" pitchFamily="18" charset="0"/>
-                                  </a:rPr>
-                                </m:ctrlPr>
-                              </m:sSubPr>
-                              <m:e>
-                                <m:r>
-                                  <a:rPr lang="it-IT" i="1" dirty="0" smtClean="0">
-                                    <a:latin typeface="Cambria Math" panose="02040503050406030204" pitchFamily="18" charset="0"/>
-                                  </a:rPr>
-                                  <m:t>𝜃</m:t>
-                                </m:r>
-                              </m:e>
-                              <m:sub>
-                                <m:r>
-                                  <a:rPr lang="it-IT" i="1" dirty="0" smtClean="0">
-                                    <a:latin typeface="Cambria Math" panose="02040503050406030204" pitchFamily="18" charset="0"/>
-                                  </a:rPr>
-                                  <m:t>0</m:t>
-                                </m:r>
-                              </m:sub>
-                            </m:sSub>
-                          </m:e>
-                          <m:e>
-                            <m:sSub>
-                              <m:sSubPr>
-                                <m:ctrlPr>
-                                  <a:rPr lang="it-IT" i="1" dirty="0" err="1" smtClean="0">
-                                    <a:latin typeface="Cambria Math" panose="02040503050406030204" pitchFamily="18" charset="0"/>
-                                  </a:rPr>
-                                </m:ctrlPr>
-                              </m:sSubPr>
-                              <m:e>
-                                <m:r>
-                                  <a:rPr lang="it-IT" i="1" dirty="0" smtClean="0">
-                                    <a:latin typeface="Cambria Math" panose="02040503050406030204" pitchFamily="18" charset="0"/>
-                                  </a:rPr>
-                                  <m:t>𝜃</m:t>
-                                </m:r>
-                              </m:e>
-                              <m:sub>
-                                <m:r>
-                                  <a:rPr lang="it-IT" i="1" dirty="0" err="1" smtClean="0">
-                                    <a:latin typeface="Cambria Math" panose="02040503050406030204" pitchFamily="18" charset="0"/>
-                                  </a:rPr>
-                                  <m:t>𝑡</m:t>
-                                </m:r>
-                              </m:sub>
-                            </m:sSub>
-                          </m:e>
-                        </m:d>
-                      </m:den>
-                    </m:f>
                     <m:r>
                       <a:rPr lang="it-IT" i="1" dirty="0" smtClean="0">
                         <a:latin typeface="Cambria Math" panose="02040503050406030204" pitchFamily="18" charset="0"/>
                       </a:rPr>
-                      <m:t>≥</m:t>
-                    </m:r>
-                    <m:r>
-                      <a:rPr lang="it-IT" i="1" dirty="0" smtClean="0">
-                        <a:latin typeface="Cambria Math" panose="02040503050406030204" pitchFamily="18" charset="0"/>
-                      </a:rPr>
-                      <m:t>𝑎</m:t>
+                      <m:t>5%</m:t>
                     </m:r>
                   </m:oMath>
                 </a14:m>
+                <a:r>
+                  <a:rPr lang="it-IT" dirty="0"/>
+                  <a:t> of the </a:t>
+                </a:r>
+                <a:r>
+                  <a:rPr lang="it-IT" dirty="0" err="1"/>
+                  <a:t>bound</a:t>
+                </a:r>
                 <a:r>
                   <a:rPr lang="it-IT" dirty="0"/>
                   <a:t> </a:t>
@@ -15835,13 +18819,13 @@
             </p:txBody>
           </p:sp>
         </mc:Choice>
-        <mc:Fallback xmlns="">
+        <mc:Fallback>
           <p:sp>
             <p:nvSpPr>
-              <p:cNvPr id="10" name="CasellaDiTesto 9">
+              <p:cNvPr id="31" name="CasellaDiTesto 30">
                 <a:extLst>
                   <a:ext uri="{FF2B5EF4-FFF2-40B4-BE49-F238E27FC236}">
-                    <a16:creationId xmlns:a16="http://schemas.microsoft.com/office/drawing/2014/main" id="{9374EB6B-02FF-46C4-5965-0A5BE147449F}"/>
+                    <a16:creationId xmlns:a16="http://schemas.microsoft.com/office/drawing/2014/main" id="{8C55ED58-9C74-3E90-CF58-634AE817E837}"/>
                   </a:ext>
                 </a:extLst>
               </p:cNvPr>
@@ -15852,16 +18836,16 @@
             </p:nvSpPr>
             <p:spPr>
               <a:xfrm>
-                <a:off x="6789051" y="4916711"/>
-                <a:ext cx="1834968" cy="596382"/>
+                <a:off x="1110412" y="4498461"/>
+                <a:ext cx="4037744" cy="923330"/>
               </a:xfrm>
               <a:prstGeom prst="rect">
                 <a:avLst/>
               </a:prstGeom>
               <a:blipFill>
-                <a:blip r:embed="rId6"/>
+                <a:blip r:embed="rId4"/>
                 <a:stretch>
-                  <a:fillRect/>
+                  <a:fillRect l="-905" t="-3974" b="-9934"/>
                 </a:stretch>
               </a:blipFill>
             </p:spPr>
@@ -15882,10 +18866,10 @@
       </mc:AlternateContent>
       <p:sp>
         <p:nvSpPr>
-          <p:cNvPr id="18" name="CasellaDiTesto 17">
+          <p:cNvPr id="32" name="CasellaDiTesto 31">
             <a:extLst>
               <a:ext uri="{FF2B5EF4-FFF2-40B4-BE49-F238E27FC236}">
-                <a16:creationId xmlns:a16="http://schemas.microsoft.com/office/drawing/2014/main" id="{2205BEA0-5222-B972-F404-5C0B82B16295}"/>
+                <a16:creationId xmlns:a16="http://schemas.microsoft.com/office/drawing/2014/main" id="{4CF42FDA-A88A-F99C-3CD1-A1B804126EE9}"/>
               </a:ext>
             </a:extLst>
           </p:cNvPr>
@@ -15894,8 +18878,8 @@
         </p:nvSpPr>
         <p:spPr>
           <a:xfrm>
-            <a:off x="8624019" y="5493562"/>
-            <a:ext cx="1834968" cy="646331"/>
+            <a:off x="1110412" y="5658437"/>
+            <a:ext cx="4037744" cy="923330"/>
           </a:xfrm>
           <a:prstGeom prst="rect">
             <a:avLst/>
@@ -15908,52 +18892,28 @@
           </a:bodyPr>
           <a:lstStyle/>
           <a:p>
+            <a:pPr marL="285750" indent="-285750">
+              <a:buClr>
+                <a:schemeClr val="accent1"/>
+              </a:buClr>
+              <a:buFont typeface="Arial" panose="020B0604020202020204" pitchFamily="34" charset="0"/>
+              <a:buChar char="•"/>
+            </a:pPr>
             <a:r>
               <a:rPr lang="it-IT" dirty="0"/>
-              <a:t>Random </a:t>
+              <a:t>«Not Blind» </a:t>
             </a:r>
             <a:r>
               <a:rPr lang="it-IT" dirty="0" err="1"/>
-              <a:t>extract</a:t>
+              <a:t>run</a:t>
             </a:r>
             <a:r>
               <a:rPr lang="it-IT" dirty="0"/>
-              <a:t> in [0,1]</a:t>
+              <a:t>: we use a </a:t>
             </a:r>
-          </a:p>
-        </p:txBody>
-      </p:sp>
-      <p:sp>
-        <p:nvSpPr>
-          <p:cNvPr id="19" name="CasellaDiTesto 18">
-            <a:extLst>
-              <a:ext uri="{FF2B5EF4-FFF2-40B4-BE49-F238E27FC236}">
-                <a16:creationId xmlns:a16="http://schemas.microsoft.com/office/drawing/2014/main" id="{F678EB67-B3A0-CC30-336A-E035658E77C5}"/>
-              </a:ext>
-            </a:extLst>
-          </p:cNvPr>
-          <p:cNvSpPr txBox="1"/>
-          <p:nvPr/>
-        </p:nvSpPr>
-        <p:spPr>
-          <a:xfrm>
-            <a:off x="5711602" y="5315244"/>
-            <a:ext cx="1307788" cy="646331"/>
-          </a:xfrm>
-          <a:prstGeom prst="rect">
-            <a:avLst/>
-          </a:prstGeom>
-          <a:noFill/>
-        </p:spPr>
-        <p:txBody>
-          <a:bodyPr wrap="square" rtlCol="0">
-            <a:spAutoFit/>
-          </a:bodyPr>
-          <a:lstStyle/>
-          <a:p>
             <a:r>
               <a:rPr lang="it-IT" dirty="0" err="1"/>
-              <a:t>Posterior</a:t>
+              <a:t>covariance</a:t>
             </a:r>
             <a:r>
               <a:rPr lang="it-IT" dirty="0"/>
@@ -15961,43 +18921,7 @@
             </a:r>
             <a:r>
               <a:rPr lang="it-IT" dirty="0" err="1"/>
-              <a:t>values</a:t>
-            </a:r>
-            <a:endParaRPr lang="it-IT" dirty="0"/>
-          </a:p>
-        </p:txBody>
-      </p:sp>
-      <p:sp>
-        <p:nvSpPr>
-          <p:cNvPr id="20" name="CasellaDiTesto 19">
-            <a:extLst>
-              <a:ext uri="{FF2B5EF4-FFF2-40B4-BE49-F238E27FC236}">
-                <a16:creationId xmlns:a16="http://schemas.microsoft.com/office/drawing/2014/main" id="{7A5DA5CB-C065-8229-9097-51D9A9BAEAF2}"/>
-              </a:ext>
-            </a:extLst>
-          </p:cNvPr>
-          <p:cNvSpPr txBox="1"/>
-          <p:nvPr/>
-        </p:nvSpPr>
-        <p:spPr>
-          <a:xfrm>
-            <a:off x="5845995" y="6086892"/>
-            <a:ext cx="3154167" cy="646331"/>
-          </a:xfrm>
-          <a:prstGeom prst="rect">
-            <a:avLst/>
-          </a:prstGeom>
-          <a:noFill/>
-        </p:spPr>
-        <p:txBody>
-          <a:bodyPr wrap="square" rtlCol="0">
-            <a:spAutoFit/>
-          </a:bodyPr>
-          <a:lstStyle/>
-          <a:p>
-            <a:r>
-              <a:rPr lang="it-IT" dirty="0" err="1"/>
-              <a:t>Proposal</a:t>
+              <a:t>matrix</a:t>
             </a:r>
             <a:r>
               <a:rPr lang="it-IT" dirty="0"/>
@@ -16005,15 +18929,15 @@
             </a:r>
             <a:r>
               <a:rPr lang="it-IT" dirty="0" err="1"/>
-              <a:t>values</a:t>
+              <a:t>extimated</a:t>
             </a:r>
             <a:r>
               <a:rPr lang="it-IT" dirty="0"/>
-              <a:t>, </a:t>
+              <a:t> after a </a:t>
             </a:r>
             <a:r>
               <a:rPr lang="it-IT" dirty="0" err="1"/>
-              <a:t>ours</a:t>
+              <a:t>previous</a:t>
             </a:r>
             <a:r>
               <a:rPr lang="it-IT" dirty="0"/>
@@ -16021,20 +18945,9 @@
             </a:r>
             <a:r>
               <a:rPr lang="it-IT" dirty="0" err="1"/>
-              <a:t>is</a:t>
+              <a:t>run</a:t>
             </a:r>
-            <a:r>
-              <a:rPr lang="it-IT" dirty="0"/>
-              <a:t> </a:t>
-            </a:r>
-            <a:r>
-              <a:rPr lang="it-IT" dirty="0" err="1"/>
-              <a:t>symmetric</a:t>
-            </a:r>
-            <a:r>
-              <a:rPr lang="it-IT" dirty="0"/>
-              <a:t> so it’s 1</a:t>
-            </a:r>
+            <a:endParaRPr lang="it-IT" dirty="0"/>
           </a:p>
         </p:txBody>
       </p:sp>

--- a/Seminar.pptx
+++ b/Seminar.pptx
@@ -5,7 +5,7 @@
     <p:sldMasterId id="2147483684" r:id="rId1"/>
   </p:sldMasterIdLst>
   <p:notesMasterIdLst>
-    <p:notesMasterId r:id="rId24"/>
+    <p:notesMasterId r:id="rId23"/>
   </p:notesMasterIdLst>
   <p:sldIdLst>
     <p:sldId id="276" r:id="rId2"/>
@@ -24,12 +24,11 @@
     <p:sldId id="337" r:id="rId15"/>
     <p:sldId id="344" r:id="rId16"/>
     <p:sldId id="338" r:id="rId17"/>
-    <p:sldId id="328" r:id="rId18"/>
-    <p:sldId id="339" r:id="rId19"/>
-    <p:sldId id="340" r:id="rId20"/>
-    <p:sldId id="327" r:id="rId21"/>
-    <p:sldId id="289" r:id="rId22"/>
-    <p:sldId id="290" r:id="rId23"/>
+    <p:sldId id="339" r:id="rId18"/>
+    <p:sldId id="340" r:id="rId19"/>
+    <p:sldId id="327" r:id="rId20"/>
+    <p:sldId id="289" r:id="rId21"/>
+    <p:sldId id="290" r:id="rId22"/>
   </p:sldIdLst>
   <p:sldSz cx="12192000" cy="6858000"/>
   <p:notesSz cx="6858000" cy="9144000"/>
@@ -2136,7 +2135,7 @@
           <a:p>
             <a:fld id="{FAF9D2FB-70D2-43E7-9793-86D8D2F82197}" type="datetimeFigureOut">
               <a:rPr lang="it-IT" smtClean="0"/>
-              <a:t>03/04/2026</a:t>
+              <a:t>04/04/2026</a:t>
             </a:fld>
             <a:endParaRPr lang="it-IT"/>
           </a:p>
@@ -2571,7 +2570,7 @@
           <a:p>
             <a:fld id="{12B2C755-0381-446C-8FF6-9D93CC4F5EBA}" type="datetimeFigureOut">
               <a:rPr lang="it-IT" smtClean="0"/>
-              <a:t>03/04/2026</a:t>
+              <a:t>04/04/2026</a:t>
             </a:fld>
             <a:endParaRPr lang="it-IT"/>
           </a:p>
@@ -2842,7 +2841,7 @@
           <a:p>
             <a:fld id="{12B2C755-0381-446C-8FF6-9D93CC4F5EBA}" type="datetimeFigureOut">
               <a:rPr lang="it-IT" smtClean="0"/>
-              <a:t>03/04/2026</a:t>
+              <a:t>04/04/2026</a:t>
             </a:fld>
             <a:endParaRPr lang="it-IT"/>
           </a:p>
@@ -3022,7 +3021,7 @@
           <a:p>
             <a:fld id="{12B2C755-0381-446C-8FF6-9D93CC4F5EBA}" type="datetimeFigureOut">
               <a:rPr lang="it-IT" smtClean="0"/>
-              <a:t>03/04/2026</a:t>
+              <a:t>04/04/2026</a:t>
             </a:fld>
             <a:endParaRPr lang="it-IT"/>
           </a:p>
@@ -3207,7 +3206,7 @@
           <a:p>
             <a:fld id="{12B2C755-0381-446C-8FF6-9D93CC4F5EBA}" type="datetimeFigureOut">
               <a:rPr lang="it-IT" smtClean="0"/>
-              <a:t>03/04/2026</a:t>
+              <a:t>04/04/2026</a:t>
             </a:fld>
             <a:endParaRPr lang="it-IT"/>
           </a:p>
@@ -3466,7 +3465,7 @@
           <a:p>
             <a:fld id="{12B2C755-0381-446C-8FF6-9D93CC4F5EBA}" type="datetimeFigureOut">
               <a:rPr lang="it-IT" smtClean="0"/>
-              <a:t>03/04/2026</a:t>
+              <a:t>04/04/2026</a:t>
             </a:fld>
             <a:endParaRPr lang="it-IT"/>
           </a:p>
@@ -3799,7 +3798,7 @@
           <a:p>
             <a:fld id="{12B2C755-0381-446C-8FF6-9D93CC4F5EBA}" type="datetimeFigureOut">
               <a:rPr lang="it-IT" smtClean="0"/>
-              <a:t>03/04/2026</a:t>
+              <a:t>04/04/2026</a:t>
             </a:fld>
             <a:endParaRPr lang="it-IT"/>
           </a:p>
@@ -4250,7 +4249,7 @@
           <a:p>
             <a:fld id="{12B2C755-0381-446C-8FF6-9D93CC4F5EBA}" type="datetimeFigureOut">
               <a:rPr lang="it-IT" smtClean="0"/>
-              <a:t>03/04/2026</a:t>
+              <a:t>04/04/2026</a:t>
             </a:fld>
             <a:endParaRPr lang="it-IT"/>
           </a:p>
@@ -4368,7 +4367,7 @@
           <a:p>
             <a:fld id="{12B2C755-0381-446C-8FF6-9D93CC4F5EBA}" type="datetimeFigureOut">
               <a:rPr lang="it-IT" smtClean="0"/>
-              <a:t>03/04/2026</a:t>
+              <a:t>04/04/2026</a:t>
             </a:fld>
             <a:endParaRPr lang="it-IT"/>
           </a:p>
@@ -4463,7 +4462,7 @@
           <a:p>
             <a:fld id="{12B2C755-0381-446C-8FF6-9D93CC4F5EBA}" type="datetimeFigureOut">
               <a:rPr lang="it-IT" smtClean="0"/>
-              <a:t>03/04/2026</a:t>
+              <a:t>04/04/2026</a:t>
             </a:fld>
             <a:endParaRPr lang="it-IT"/>
           </a:p>
@@ -4750,7 +4749,7 @@
           <a:p>
             <a:fld id="{12B2C755-0381-446C-8FF6-9D93CC4F5EBA}" type="datetimeFigureOut">
               <a:rPr lang="it-IT" smtClean="0"/>
-              <a:t>03/04/2026</a:t>
+              <a:t>04/04/2026</a:t>
             </a:fld>
             <a:endParaRPr lang="it-IT"/>
           </a:p>
@@ -5079,7 +5078,7 @@
           <a:p>
             <a:fld id="{12B2C755-0381-446C-8FF6-9D93CC4F5EBA}" type="datetimeFigureOut">
               <a:rPr lang="it-IT" smtClean="0"/>
-              <a:t>03/04/2026</a:t>
+              <a:t>04/04/2026</a:t>
             </a:fld>
             <a:endParaRPr lang="it-IT"/>
           </a:p>
@@ -5340,7 +5339,7 @@
           <a:p>
             <a:fld id="{12B2C755-0381-446C-8FF6-9D93CC4F5EBA}" type="datetimeFigureOut">
               <a:rPr lang="it-IT" smtClean="0"/>
-              <a:t>03/04/2026</a:t>
+              <a:t>04/04/2026</a:t>
             </a:fld>
             <a:endParaRPr lang="it-IT" dirty="0"/>
           </a:p>
@@ -6288,8 +6287,8 @@
               <a:chExt cx="3503487" cy="1489120"/>
             </a:xfrm>
           </p:grpSpPr>
-          <mc:AlternateContent xmlns:mc="http://schemas.openxmlformats.org/markup-compatibility/2006">
-            <mc:Choice xmlns:a14="http://schemas.microsoft.com/office/drawing/2010/main" Requires="a14">
+          <mc:AlternateContent xmlns:mc="http://schemas.openxmlformats.org/markup-compatibility/2006" xmlns:a14="http://schemas.microsoft.com/office/drawing/2010/main">
+            <mc:Choice Requires="a14">
               <p:sp>
                 <p:nvSpPr>
                   <p:cNvPr id="14" name="CasellaDiTesto 13">
@@ -6463,7 +6462,7 @@
                 </p:txBody>
               </p:sp>
             </mc:Choice>
-            <mc:Fallback>
+            <mc:Fallback xmlns="">
               <p:sp>
                 <p:nvSpPr>
                   <p:cNvPr id="14" name="CasellaDiTesto 13">
@@ -6587,8 +6586,8 @@
           </a:p>
         </p:txBody>
       </p:sp>
-      <mc:AlternateContent xmlns:mc="http://schemas.openxmlformats.org/markup-compatibility/2006">
-        <mc:Choice xmlns:a14="http://schemas.microsoft.com/office/drawing/2010/main" Requires="a14">
+      <mc:AlternateContent xmlns:mc="http://schemas.openxmlformats.org/markup-compatibility/2006" xmlns:a14="http://schemas.microsoft.com/office/drawing/2010/main">
+        <mc:Choice Requires="a14">
           <p:sp>
             <p:nvSpPr>
               <p:cNvPr id="25" name="CasellaDiTesto 24">
@@ -6898,7 +6897,7 @@
             </p:txBody>
           </p:sp>
         </mc:Choice>
-        <mc:Fallback>
+        <mc:Fallback xmlns="">
           <p:sp>
             <p:nvSpPr>
               <p:cNvPr id="25" name="CasellaDiTesto 24">
@@ -6978,8 +6977,8 @@
           </a:p>
         </p:txBody>
       </p:sp>
-      <mc:AlternateContent xmlns:mc="http://schemas.openxmlformats.org/markup-compatibility/2006">
-        <mc:Choice xmlns:a14="http://schemas.microsoft.com/office/drawing/2010/main" Requires="a14">
+      <mc:AlternateContent xmlns:mc="http://schemas.openxmlformats.org/markup-compatibility/2006" xmlns:a14="http://schemas.microsoft.com/office/drawing/2010/main">
+        <mc:Choice Requires="a14">
           <p:sp>
             <p:nvSpPr>
               <p:cNvPr id="27" name="CasellaDiTesto 26">
@@ -7040,7 +7039,7 @@
             </p:txBody>
           </p:sp>
         </mc:Choice>
-        <mc:Fallback>
+        <mc:Fallback xmlns="">
           <p:sp>
             <p:nvSpPr>
               <p:cNvPr id="27" name="CasellaDiTesto 26">
@@ -7563,8 +7562,8 @@
               <a:chExt cx="4781817" cy="3174698"/>
             </a:xfrm>
           </p:grpSpPr>
-          <mc:AlternateContent xmlns:mc="http://schemas.openxmlformats.org/markup-compatibility/2006">
-            <mc:Choice xmlns:a14="http://schemas.microsoft.com/office/drawing/2010/main" Requires="a14">
+          <mc:AlternateContent xmlns:mc="http://schemas.openxmlformats.org/markup-compatibility/2006" xmlns:a14="http://schemas.microsoft.com/office/drawing/2010/main">
+            <mc:Choice Requires="a14">
               <p:sp>
                 <p:nvSpPr>
                   <p:cNvPr id="14" name="CasellaDiTesto 13">
@@ -7738,7 +7737,7 @@
                 </p:txBody>
               </p:sp>
             </mc:Choice>
-            <mc:Fallback>
+            <mc:Fallback xmlns="">
               <p:sp>
                 <p:nvSpPr>
                   <p:cNvPr id="14" name="CasellaDiTesto 13">
@@ -7806,8 +7805,8 @@
                 <a:chExt cx="4338316" cy="646331"/>
               </a:xfrm>
             </p:grpSpPr>
-            <mc:AlternateContent xmlns:mc="http://schemas.openxmlformats.org/markup-compatibility/2006">
-              <mc:Choice xmlns:a14="http://schemas.microsoft.com/office/drawing/2010/main" Requires="a14">
+            <mc:AlternateContent xmlns:mc="http://schemas.openxmlformats.org/markup-compatibility/2006" xmlns:a14="http://schemas.microsoft.com/office/drawing/2010/main">
+              <mc:Choice Requires="a14">
                 <p:sp>
                   <p:nvSpPr>
                     <p:cNvPr id="15" name="CasellaDiTesto 14">
@@ -7908,7 +7907,7 @@
                   </p:txBody>
                 </p:sp>
               </mc:Choice>
-              <mc:Fallback>
+              <mc:Fallback xmlns="">
                 <p:sp>
                   <p:nvSpPr>
                     <p:cNvPr id="15" name="CasellaDiTesto 14">
@@ -7956,8 +7955,8 @@
                 </p:sp>
               </mc:Fallback>
             </mc:AlternateContent>
-            <mc:AlternateContent xmlns:mc="http://schemas.openxmlformats.org/markup-compatibility/2006">
-              <mc:Choice xmlns:a14="http://schemas.microsoft.com/office/drawing/2010/main" Requires="a14">
+            <mc:AlternateContent xmlns:mc="http://schemas.openxmlformats.org/markup-compatibility/2006" xmlns:a14="http://schemas.microsoft.com/office/drawing/2010/main">
+              <mc:Choice Requires="a14">
                 <p:sp>
                   <p:nvSpPr>
                     <p:cNvPr id="16" name="CasellaDiTesto 15">
@@ -8027,7 +8026,7 @@
                   </p:txBody>
                 </p:sp>
               </mc:Choice>
-              <mc:Fallback>
+              <mc:Fallback xmlns="">
                 <p:sp>
                   <p:nvSpPr>
                     <p:cNvPr id="16" name="CasellaDiTesto 15">
@@ -8076,8 +8075,8 @@
               </mc:Fallback>
             </mc:AlternateContent>
           </p:grpSp>
-          <mc:AlternateContent xmlns:mc="http://schemas.openxmlformats.org/markup-compatibility/2006">
-            <mc:Choice xmlns:a14="http://schemas.microsoft.com/office/drawing/2010/main" Requires="a14">
+          <mc:AlternateContent xmlns:mc="http://schemas.openxmlformats.org/markup-compatibility/2006" xmlns:a14="http://schemas.microsoft.com/office/drawing/2010/main">
+            <mc:Choice Requires="a14">
               <p:sp>
                 <p:nvSpPr>
                   <p:cNvPr id="17" name="CasellaDiTesto 16">
@@ -8132,7 +8131,7 @@
                 </p:txBody>
               </p:sp>
             </mc:Choice>
-            <mc:Fallback>
+            <mc:Fallback xmlns="">
               <p:sp>
                 <p:nvSpPr>
                   <p:cNvPr id="17" name="CasellaDiTesto 16">
@@ -8371,8 +8370,8 @@
           <a:chExt cx="0" cy="0"/>
         </a:xfrm>
       </p:grpSpPr>
-      <mc:AlternateContent xmlns:mc="http://schemas.openxmlformats.org/markup-compatibility/2006">
-        <mc:Choice xmlns:a14="http://schemas.microsoft.com/office/drawing/2010/main" Requires="a14">
+      <mc:AlternateContent xmlns:mc="http://schemas.openxmlformats.org/markup-compatibility/2006" xmlns:a14="http://schemas.microsoft.com/office/drawing/2010/main">
+        <mc:Choice Requires="a14">
           <p:sp>
             <p:nvSpPr>
               <p:cNvPr id="4" name="Titolo 1">
@@ -8475,7 +8474,7 @@
             </p:txBody>
           </p:sp>
         </mc:Choice>
-        <mc:Fallback>
+        <mc:Fallback xmlns="">
           <p:sp>
             <p:nvSpPr>
               <p:cNvPr id="4" name="Titolo 1">
@@ -8626,8 +8625,8 @@
           </a:p>
         </p:txBody>
       </p:sp>
-      <mc:AlternateContent xmlns:mc="http://schemas.openxmlformats.org/markup-compatibility/2006">
-        <mc:Choice xmlns:a14="http://schemas.microsoft.com/office/drawing/2010/main" Requires="a14">
+      <mc:AlternateContent xmlns:mc="http://schemas.openxmlformats.org/markup-compatibility/2006" xmlns:a14="http://schemas.microsoft.com/office/drawing/2010/main">
+        <mc:Choice Requires="a14">
           <p:sp>
             <p:nvSpPr>
               <p:cNvPr id="16" name="CasellaDiTesto 15">
@@ -8678,7 +8677,7 @@
             </p:txBody>
           </p:sp>
         </mc:Choice>
-        <mc:Fallback>
+        <mc:Fallback xmlns="">
           <p:sp>
             <p:nvSpPr>
               <p:cNvPr id="16" name="CasellaDiTesto 15">
@@ -8802,8 +8801,8 @@
           <a:chExt cx="0" cy="0"/>
         </a:xfrm>
       </p:grpSpPr>
-      <mc:AlternateContent xmlns:mc="http://schemas.openxmlformats.org/markup-compatibility/2006">
-        <mc:Choice xmlns:a14="http://schemas.microsoft.com/office/drawing/2010/main" Requires="a14">
+      <mc:AlternateContent xmlns:mc="http://schemas.openxmlformats.org/markup-compatibility/2006" xmlns:a14="http://schemas.microsoft.com/office/drawing/2010/main">
+        <mc:Choice Requires="a14">
           <p:sp>
             <p:nvSpPr>
               <p:cNvPr id="4" name="Titolo 1">
@@ -8906,7 +8905,7 @@
             </p:txBody>
           </p:sp>
         </mc:Choice>
-        <mc:Fallback>
+        <mc:Fallback xmlns="">
           <p:sp>
             <p:nvSpPr>
               <p:cNvPr id="4" name="Titolo 1">
@@ -9021,8 +9020,8 @@
           </a:p>
         </p:txBody>
       </p:sp>
-      <mc:AlternateContent xmlns:mc="http://schemas.openxmlformats.org/markup-compatibility/2006">
-        <mc:Choice xmlns:a14="http://schemas.microsoft.com/office/drawing/2010/main" Requires="a14">
+      <mc:AlternateContent xmlns:mc="http://schemas.openxmlformats.org/markup-compatibility/2006" xmlns:a14="http://schemas.microsoft.com/office/drawing/2010/main">
+        <mc:Choice Requires="a14">
           <p:sp>
             <p:nvSpPr>
               <p:cNvPr id="13" name="CasellaDiTesto 12">
@@ -9073,7 +9072,7 @@
             </p:txBody>
           </p:sp>
         </mc:Choice>
-        <mc:Fallback>
+        <mc:Fallback xmlns="">
           <p:sp>
             <p:nvSpPr>
               <p:cNvPr id="13" name="CasellaDiTesto 12">
@@ -9154,8 +9153,8 @@
           </a:prstGeom>
         </p:spPr>
       </p:pic>
-      <mc:AlternateContent xmlns:mc="http://schemas.openxmlformats.org/markup-compatibility/2006">
-        <mc:Choice xmlns:a14="http://schemas.microsoft.com/office/drawing/2010/main" Requires="a14">
+      <mc:AlternateContent xmlns:mc="http://schemas.openxmlformats.org/markup-compatibility/2006" xmlns:a14="http://schemas.microsoft.com/office/drawing/2010/main">
+        <mc:Choice Requires="a14">
           <p:sp>
             <p:nvSpPr>
               <p:cNvPr id="7" name="CasellaDiTesto 6">
@@ -9210,7 +9209,7 @@
             </p:txBody>
           </p:sp>
         </mc:Choice>
-        <mc:Fallback>
+        <mc:Fallback xmlns="">
           <p:sp>
             <p:nvSpPr>
               <p:cNvPr id="7" name="CasellaDiTesto 6">
@@ -9339,8 +9338,8 @@
           <a:chExt cx="0" cy="0"/>
         </a:xfrm>
       </p:grpSpPr>
-      <mc:AlternateContent xmlns:mc="http://schemas.openxmlformats.org/markup-compatibility/2006">
-        <mc:Choice xmlns:a14="http://schemas.microsoft.com/office/drawing/2010/main" Requires="a14">
+      <mc:AlternateContent xmlns:mc="http://schemas.openxmlformats.org/markup-compatibility/2006" xmlns:a14="http://schemas.microsoft.com/office/drawing/2010/main">
+        <mc:Choice Requires="a14">
           <p:sp>
             <p:nvSpPr>
               <p:cNvPr id="4" name="Titolo 1">
@@ -9443,7 +9442,7 @@
             </p:txBody>
           </p:sp>
         </mc:Choice>
-        <mc:Fallback>
+        <mc:Fallback xmlns="">
           <p:sp>
             <p:nvSpPr>
               <p:cNvPr id="4" name="Titolo 1">
@@ -9522,8 +9521,8 @@
           </a:p>
         </p:txBody>
       </p:sp>
-      <mc:AlternateContent xmlns:mc="http://schemas.openxmlformats.org/markup-compatibility/2006">
-        <mc:Choice xmlns:a14="http://schemas.microsoft.com/office/drawing/2010/main" Requires="a14">
+      <mc:AlternateContent xmlns:mc="http://schemas.openxmlformats.org/markup-compatibility/2006" xmlns:a14="http://schemas.microsoft.com/office/drawing/2010/main">
+        <mc:Choice Requires="a14">
           <p:sp>
             <p:nvSpPr>
               <p:cNvPr id="13" name="CasellaDiTesto 12">
@@ -9574,7 +9573,7 @@
             </p:txBody>
           </p:sp>
         </mc:Choice>
-        <mc:Fallback>
+        <mc:Fallback xmlns="">
           <p:sp>
             <p:nvSpPr>
               <p:cNvPr id="13" name="CasellaDiTesto 12">
@@ -9733,8 +9732,8 @@
           <a:chExt cx="0" cy="0"/>
         </a:xfrm>
       </p:grpSpPr>
-      <mc:AlternateContent xmlns:mc="http://schemas.openxmlformats.org/markup-compatibility/2006">
-        <mc:Choice xmlns:a14="http://schemas.microsoft.com/office/drawing/2010/main" Requires="a14">
+      <mc:AlternateContent xmlns:mc="http://schemas.openxmlformats.org/markup-compatibility/2006" xmlns:a14="http://schemas.microsoft.com/office/drawing/2010/main">
+        <mc:Choice Requires="a14">
           <p:sp>
             <p:nvSpPr>
               <p:cNvPr id="4" name="Titolo 1">
@@ -9837,7 +9836,7 @@
             </p:txBody>
           </p:sp>
         </mc:Choice>
-        <mc:Fallback>
+        <mc:Fallback xmlns="">
           <p:sp>
             <p:nvSpPr>
               <p:cNvPr id="4" name="Titolo 1">
@@ -9917,8 +9916,8 @@
           </a:prstGeom>
         </p:spPr>
       </p:pic>
-      <mc:AlternateContent xmlns:mc="http://schemas.openxmlformats.org/markup-compatibility/2006">
-        <mc:Choice xmlns:a14="http://schemas.microsoft.com/office/drawing/2010/main" Requires="a14">
+      <mc:AlternateContent xmlns:mc="http://schemas.openxmlformats.org/markup-compatibility/2006" xmlns:a14="http://schemas.microsoft.com/office/drawing/2010/main">
+        <mc:Choice Requires="a14">
           <p:sp>
             <p:nvSpPr>
               <p:cNvPr id="5" name="CasellaDiTesto 4">
@@ -9977,7 +9976,7 @@
             </p:txBody>
           </p:sp>
         </mc:Choice>
-        <mc:Fallback>
+        <mc:Fallback xmlns="">
           <p:sp>
             <p:nvSpPr>
               <p:cNvPr id="5" name="CasellaDiTesto 4">
@@ -10062,8 +10061,8 @@
           </a:p>
         </p:txBody>
       </p:sp>
-      <mc:AlternateContent xmlns:mc="http://schemas.openxmlformats.org/markup-compatibility/2006">
-        <mc:Choice xmlns:a14="http://schemas.microsoft.com/office/drawing/2010/main" Requires="a14">
+      <mc:AlternateContent xmlns:mc="http://schemas.openxmlformats.org/markup-compatibility/2006" xmlns:a14="http://schemas.microsoft.com/office/drawing/2010/main">
+        <mc:Choice Requires="a14">
           <p:sp>
             <p:nvSpPr>
               <p:cNvPr id="8" name="CasellaDiTesto 7">
@@ -10114,7 +10113,7 @@
             </p:txBody>
           </p:sp>
         </mc:Choice>
-        <mc:Fallback>
+        <mc:Fallback xmlns="">
           <p:sp>
             <p:nvSpPr>
               <p:cNvPr id="8" name="CasellaDiTesto 7">
@@ -10237,8 +10236,8 @@
           <a:chExt cx="0" cy="0"/>
         </a:xfrm>
       </p:grpSpPr>
-      <mc:AlternateContent xmlns:mc="http://schemas.openxmlformats.org/markup-compatibility/2006">
-        <mc:Choice xmlns:a14="http://schemas.microsoft.com/office/drawing/2010/main" Requires="a14">
+      <mc:AlternateContent xmlns:mc="http://schemas.openxmlformats.org/markup-compatibility/2006" xmlns:a14="http://schemas.microsoft.com/office/drawing/2010/main">
+        <mc:Choice Requires="a14">
           <p:sp>
             <p:nvSpPr>
               <p:cNvPr id="4" name="Titolo 1">
@@ -10341,7 +10340,7 @@
             </p:txBody>
           </p:sp>
         </mc:Choice>
-        <mc:Fallback>
+        <mc:Fallback xmlns="">
           <p:sp>
             <p:nvSpPr>
               <p:cNvPr id="4" name="Titolo 1">
@@ -10456,8 +10455,8 @@
           </a:prstGeom>
         </p:spPr>
       </p:pic>
-      <mc:AlternateContent xmlns:mc="http://schemas.openxmlformats.org/markup-compatibility/2006">
-        <mc:Choice xmlns:a14="http://schemas.microsoft.com/office/drawing/2010/main" Requires="a14">
+      <mc:AlternateContent xmlns:mc="http://schemas.openxmlformats.org/markup-compatibility/2006" xmlns:a14="http://schemas.microsoft.com/office/drawing/2010/main">
+        <mc:Choice Requires="a14">
           <p:graphicFrame>
             <p:nvGraphicFramePr>
               <p:cNvPr id="6" name="Tabella 5">
@@ -10510,6 +10509,7 @@
                         <a:bodyPr/>
                         <a:lstStyle/>
                         <a:p>
+                          <a:pPr/>
                           <a14:m>
                             <m:oMathPara xmlns:m="http://schemas.openxmlformats.org/officeDocument/2006/math">
                               <m:oMathParaPr>
@@ -10554,6 +10554,7 @@
                         <a:bodyPr/>
                         <a:lstStyle/>
                         <a:p>
+                          <a:pPr/>
                           <a14:m>
                             <m:oMathPara xmlns:m="http://schemas.openxmlformats.org/officeDocument/2006/math">
                               <m:oMathParaPr>
@@ -10605,6 +10606,7 @@
                         <a:bodyPr/>
                         <a:lstStyle/>
                         <a:p>
+                          <a:pPr/>
                           <a14:m>
                             <m:oMathPara xmlns:m="http://schemas.openxmlformats.org/officeDocument/2006/math">
                               <m:oMathParaPr>
@@ -10663,6 +10665,7 @@
                         <a:bodyPr/>
                         <a:lstStyle/>
                         <a:p>
+                          <a:pPr/>
                           <a14:m>
                             <m:oMathPara xmlns:m="http://schemas.openxmlformats.org/officeDocument/2006/math">
                               <m:oMathParaPr>
@@ -10721,7 +10724,7 @@
             </a:graphic>
           </p:graphicFrame>
         </mc:Choice>
-        <mc:Fallback>
+        <mc:Fallback xmlns="">
           <p:graphicFrame>
             <p:nvGraphicFramePr>
               <p:cNvPr id="6" name="Tabella 5">
@@ -10856,8 +10859,8 @@
           </p:graphicFrame>
         </mc:Fallback>
       </mc:AlternateContent>
-      <mc:AlternateContent xmlns:mc="http://schemas.openxmlformats.org/markup-compatibility/2006">
-        <mc:Choice xmlns:a14="http://schemas.microsoft.com/office/drawing/2010/main" Requires="a14">
+      <mc:AlternateContent xmlns:mc="http://schemas.openxmlformats.org/markup-compatibility/2006" xmlns:a14="http://schemas.microsoft.com/office/drawing/2010/main">
+        <mc:Choice Requires="a14">
           <p:graphicFrame>
             <p:nvGraphicFramePr>
               <p:cNvPr id="7" name="Tabella 6">
@@ -10995,7 +10998,7 @@
             </a:graphic>
           </p:graphicFrame>
         </mc:Choice>
-        <mc:Fallback>
+        <mc:Fallback xmlns="">
           <p:graphicFrame>
             <p:nvGraphicFramePr>
               <p:cNvPr id="7" name="Tabella 6">
@@ -11089,8 +11092,8 @@
           </p:graphicFrame>
         </mc:Fallback>
       </mc:AlternateContent>
-      <mc:AlternateContent xmlns:mc="http://schemas.openxmlformats.org/markup-compatibility/2006">
-        <mc:Choice xmlns:a14="http://schemas.microsoft.com/office/drawing/2010/main" Requires="a14">
+      <mc:AlternateContent xmlns:mc="http://schemas.openxmlformats.org/markup-compatibility/2006" xmlns:a14="http://schemas.microsoft.com/office/drawing/2010/main">
+        <mc:Choice Requires="a14">
           <p:graphicFrame>
             <p:nvGraphicFramePr>
               <p:cNvPr id="8" name="Tabella 7">
@@ -11352,7 +11355,7 @@
             </a:graphic>
           </p:graphicFrame>
         </mc:Choice>
-        <mc:Fallback>
+        <mc:Fallback xmlns="">
           <p:graphicFrame>
             <p:nvGraphicFramePr>
               <p:cNvPr id="8" name="Tabella 7">
@@ -11505,1014 +11508,6 @@
   <p:cSld>
     <p:spTree>
       <p:nvGrpSpPr>
-        <p:cNvPr id="1" name=""/>
-        <p:cNvGrpSpPr/>
-        <p:nvPr/>
-      </p:nvGrpSpPr>
-      <p:grpSpPr>
-        <a:xfrm>
-          <a:off x="0" y="0"/>
-          <a:ext cx="0" cy="0"/>
-          <a:chOff x="0" y="0"/>
-          <a:chExt cx="0" cy="0"/>
-        </a:xfrm>
-      </p:grpSpPr>
-      <p:sp>
-        <p:nvSpPr>
-          <p:cNvPr id="2" name="Titolo 1">
-            <a:extLst>
-              <a:ext uri="{FF2B5EF4-FFF2-40B4-BE49-F238E27FC236}">
-                <a16:creationId xmlns:a16="http://schemas.microsoft.com/office/drawing/2014/main" id="{32DF931F-0CE4-A645-A0BF-7F3424E181B3}"/>
-              </a:ext>
-            </a:extLst>
-          </p:cNvPr>
-          <p:cNvSpPr>
-            <a:spLocks noGrp="1"/>
-          </p:cNvSpPr>
-          <p:nvPr>
-            <p:ph type="title"/>
-          </p:nvPr>
-        </p:nvSpPr>
-        <p:spPr/>
-        <p:txBody>
-          <a:bodyPr/>
-          <a:lstStyle/>
-          <a:p>
-            <a:endParaRPr lang="en-US" noProof="0" dirty="0"/>
-          </a:p>
-        </p:txBody>
-      </p:sp>
-      <mc:AlternateContent xmlns:mc="http://schemas.openxmlformats.org/markup-compatibility/2006">
-        <mc:Choice xmlns:a14="http://schemas.microsoft.com/office/drawing/2010/main" Requires="a14">
-          <p:graphicFrame>
-            <p:nvGraphicFramePr>
-              <p:cNvPr id="4" name="Tabella 3">
-                <a:extLst>
-                  <a:ext uri="{FF2B5EF4-FFF2-40B4-BE49-F238E27FC236}">
-                    <a16:creationId xmlns:a16="http://schemas.microsoft.com/office/drawing/2014/main" id="{AE0AB884-D705-0F16-784C-E77C80F014EF}"/>
-                  </a:ext>
-                </a:extLst>
-              </p:cNvPr>
-              <p:cNvGraphicFramePr>
-                <a:graphicFrameLocks noGrp="1"/>
-              </p:cNvGraphicFramePr>
-              <p:nvPr>
-                <p:extLst>
-                  <p:ext uri="{D42A27DB-BD31-4B8C-83A1-F6EECF244321}">
-                    <p14:modId xmlns:p14="http://schemas.microsoft.com/office/powerpoint/2010/main" val="97632566"/>
-                  </p:ext>
-                </p:extLst>
-              </p:nvPr>
-            </p:nvGraphicFramePr>
-            <p:xfrm>
-              <a:off x="1918984" y="2687320"/>
-              <a:ext cx="8128000" cy="1118553"/>
-            </p:xfrm>
-            <a:graphic>
-              <a:graphicData uri="http://schemas.openxmlformats.org/drawingml/2006/table">
-                <a:tbl>
-                  <a:tblPr firstRow="1" bandRow="1">
-                    <a:tableStyleId>{5C22544A-7EE6-4342-B048-85BDC9FD1C3A}</a:tableStyleId>
-                  </a:tblPr>
-                  <a:tblGrid>
-                    <a:gridCol w="1625600">
-                      <a:extLst>
-                        <a:ext uri="{9D8B030D-6E8A-4147-A177-3AD203B41FA5}">
-                          <a16:colId xmlns:a16="http://schemas.microsoft.com/office/drawing/2014/main" val="500066530"/>
-                        </a:ext>
-                      </a:extLst>
-                    </a:gridCol>
-                    <a:gridCol w="1625600">
-                      <a:extLst>
-                        <a:ext uri="{9D8B030D-6E8A-4147-A177-3AD203B41FA5}">
-                          <a16:colId xmlns:a16="http://schemas.microsoft.com/office/drawing/2014/main" val="1819855302"/>
-                        </a:ext>
-                      </a:extLst>
-                    </a:gridCol>
-                    <a:gridCol w="1625600">
-                      <a:extLst>
-                        <a:ext uri="{9D8B030D-6E8A-4147-A177-3AD203B41FA5}">
-                          <a16:colId xmlns:a16="http://schemas.microsoft.com/office/drawing/2014/main" val="4011376178"/>
-                        </a:ext>
-                      </a:extLst>
-                    </a:gridCol>
-                    <a:gridCol w="1625600">
-                      <a:extLst>
-                        <a:ext uri="{9D8B030D-6E8A-4147-A177-3AD203B41FA5}">
-                          <a16:colId xmlns:a16="http://schemas.microsoft.com/office/drawing/2014/main" val="1305298267"/>
-                        </a:ext>
-                      </a:extLst>
-                    </a:gridCol>
-                    <a:gridCol w="1625600">
-                      <a:extLst>
-                        <a:ext uri="{9D8B030D-6E8A-4147-A177-3AD203B41FA5}">
-                          <a16:colId xmlns:a16="http://schemas.microsoft.com/office/drawing/2014/main" val="4118232767"/>
-                        </a:ext>
-                      </a:extLst>
-                    </a:gridCol>
-                  </a:tblGrid>
-                  <a:tr h="370840">
-                    <a:tc>
-                      <a:txBody>
-                        <a:bodyPr/>
-                        <a:lstStyle/>
-                        <a:p>
-                          <a:pPr/>
-                          <a14:m>
-                            <m:oMathPara xmlns:m="http://schemas.openxmlformats.org/officeDocument/2006/math">
-                              <m:oMathParaPr>
-                                <m:jc m:val="centerGroup"/>
-                              </m:oMathParaPr>
-                              <m:oMath xmlns:m="http://schemas.openxmlformats.org/officeDocument/2006/math">
-                                <m:r>
-                                  <a:rPr lang="en-US" b="1" i="1" noProof="0" smtClean="0">
-                                    <a:latin typeface="Cambria Math" panose="02040503050406030204" pitchFamily="18" charset="0"/>
-                                  </a:rPr>
-                                  <m:t>𝒘</m:t>
-                                </m:r>
-                              </m:oMath>
-                            </m:oMathPara>
-                          </a14:m>
-                          <a:endParaRPr lang="en-US" b="1" noProof="0" dirty="0"/>
-                        </a:p>
-                      </a:txBody>
-                      <a:tcPr/>
-                    </a:tc>
-                    <a:tc>
-                      <a:txBody>
-                        <a:bodyPr/>
-                        <a:lstStyle/>
-                        <a:p>
-                          <a:pPr/>
-                          <a14:m>
-                            <m:oMathPara xmlns:m="http://schemas.openxmlformats.org/officeDocument/2006/math">
-                              <m:oMathParaPr>
-                                <m:jc m:val="centerGroup"/>
-                              </m:oMathParaPr>
-                              <m:oMath xmlns:m="http://schemas.openxmlformats.org/officeDocument/2006/math">
-                                <m:sSub>
-                                  <m:sSubPr>
-                                    <m:ctrlPr>
-                                      <a:rPr lang="en-US" b="1" i="1" noProof="0" smtClean="0">
-                                        <a:latin typeface="Cambria Math" panose="02040503050406030204" pitchFamily="18" charset="0"/>
-                                      </a:rPr>
-                                    </m:ctrlPr>
-                                  </m:sSubPr>
-                                  <m:e>
-                                    <m:r>
-                                      <a:rPr lang="en-US" b="1" i="1" noProof="0" smtClean="0">
-                                        <a:latin typeface="Cambria Math" panose="02040503050406030204" pitchFamily="18" charset="0"/>
-                                      </a:rPr>
-                                      <m:t>𝝁</m:t>
-                                    </m:r>
-                                  </m:e>
-                                  <m:sub>
-                                    <m:r>
-                                      <a:rPr lang="en-US" b="1" i="1" noProof="0" smtClean="0">
-                                        <a:latin typeface="Cambria Math" panose="02040503050406030204" pitchFamily="18" charset="0"/>
-                                      </a:rPr>
-                                      <m:t>𝟏</m:t>
-                                    </m:r>
-                                  </m:sub>
-                                </m:sSub>
-                              </m:oMath>
-                            </m:oMathPara>
-                          </a14:m>
-                          <a:endParaRPr lang="en-US" b="1" noProof="0" dirty="0"/>
-                        </a:p>
-                      </a:txBody>
-                      <a:tcPr/>
-                    </a:tc>
-                    <a:tc>
-                      <a:txBody>
-                        <a:bodyPr/>
-                        <a:lstStyle/>
-                        <a:p>
-                          <a:pPr marL="0" marR="0" lvl="0" indent="0" algn="l" defTabSz="914400" rtl="0" eaLnBrk="1" fontAlgn="auto" latinLnBrk="0" hangingPunct="1">
-                            <a:lnSpc>
-                              <a:spcPct val="100000"/>
-                            </a:lnSpc>
-                            <a:spcBef>
-                              <a:spcPts val="0"/>
-                            </a:spcBef>
-                            <a:spcAft>
-                              <a:spcPts val="0"/>
-                            </a:spcAft>
-                            <a:buClrTx/>
-                            <a:buSzTx/>
-                            <a:buFontTx/>
-                            <a:buNone/>
-                            <a:tabLst/>
-                            <a:defRPr/>
-                          </a:pPr>
-                          <a14:m>
-                            <m:oMathPara xmlns:m="http://schemas.openxmlformats.org/officeDocument/2006/math">
-                              <m:oMathParaPr>
-                                <m:jc m:val="centerGroup"/>
-                              </m:oMathParaPr>
-                              <m:oMath xmlns:m="http://schemas.openxmlformats.org/officeDocument/2006/math">
-                                <m:sSub>
-                                  <m:sSubPr>
-                                    <m:ctrlPr>
-                                      <a:rPr lang="en-US" b="1" i="1" noProof="0" smtClean="0">
-                                        <a:latin typeface="Cambria Math" panose="02040503050406030204" pitchFamily="18" charset="0"/>
-                                      </a:rPr>
-                                    </m:ctrlPr>
-                                  </m:sSubPr>
-                                  <m:e>
-                                    <m:r>
-                                      <a:rPr lang="en-US" b="1" i="1" noProof="0" smtClean="0">
-                                        <a:latin typeface="Cambria Math" panose="02040503050406030204" pitchFamily="18" charset="0"/>
-                                      </a:rPr>
-                                      <m:t>𝝈</m:t>
-                                    </m:r>
-                                  </m:e>
-                                  <m:sub>
-                                    <m:r>
-                                      <a:rPr lang="en-US" b="1" i="1" noProof="0" smtClean="0">
-                                        <a:latin typeface="Cambria Math" panose="02040503050406030204" pitchFamily="18" charset="0"/>
-                                      </a:rPr>
-                                      <m:t>𝟏</m:t>
-                                    </m:r>
-                                  </m:sub>
-                                </m:sSub>
-                              </m:oMath>
-                            </m:oMathPara>
-                          </a14:m>
-                          <a:endParaRPr lang="en-US" b="1" noProof="0" dirty="0"/>
-                        </a:p>
-                      </a:txBody>
-                      <a:tcPr/>
-                    </a:tc>
-                    <a:tc>
-                      <a:txBody>
-                        <a:bodyPr/>
-                        <a:lstStyle/>
-                        <a:p>
-                          <a:pPr/>
-                          <a14:m>
-                            <m:oMathPara xmlns:m="http://schemas.openxmlformats.org/officeDocument/2006/math">
-                              <m:oMathParaPr>
-                                <m:jc m:val="centerGroup"/>
-                              </m:oMathParaPr>
-                              <m:oMath xmlns:m="http://schemas.openxmlformats.org/officeDocument/2006/math">
-                                <m:sSub>
-                                  <m:sSubPr>
-                                    <m:ctrlPr>
-                                      <a:rPr lang="en-US" b="1" i="1" noProof="0" smtClean="0">
-                                        <a:latin typeface="Cambria Math" panose="02040503050406030204" pitchFamily="18" charset="0"/>
-                                      </a:rPr>
-                                    </m:ctrlPr>
-                                  </m:sSubPr>
-                                  <m:e>
-                                    <m:r>
-                                      <a:rPr lang="en-US" b="1" i="1" noProof="0" smtClean="0">
-                                        <a:latin typeface="Cambria Math" panose="02040503050406030204" pitchFamily="18" charset="0"/>
-                                      </a:rPr>
-                                      <m:t>𝝁</m:t>
-                                    </m:r>
-                                  </m:e>
-                                  <m:sub>
-                                    <m:r>
-                                      <a:rPr lang="en-US" b="1" i="1" noProof="0" smtClean="0">
-                                        <a:latin typeface="Cambria Math" panose="02040503050406030204" pitchFamily="18" charset="0"/>
-                                      </a:rPr>
-                                      <m:t>𝟐</m:t>
-                                    </m:r>
-                                  </m:sub>
-                                </m:sSub>
-                              </m:oMath>
-                            </m:oMathPara>
-                          </a14:m>
-                          <a:endParaRPr lang="en-US" b="1" noProof="0" dirty="0"/>
-                        </a:p>
-                      </a:txBody>
-                      <a:tcPr/>
-                    </a:tc>
-                    <a:tc>
-                      <a:txBody>
-                        <a:bodyPr/>
-                        <a:lstStyle/>
-                        <a:p>
-                          <a:pPr/>
-                          <a14:m>
-                            <m:oMathPara xmlns:m="http://schemas.openxmlformats.org/officeDocument/2006/math">
-                              <m:oMathParaPr>
-                                <m:jc m:val="centerGroup"/>
-                              </m:oMathParaPr>
-                              <m:oMath xmlns:m="http://schemas.openxmlformats.org/officeDocument/2006/math">
-                                <m:sSub>
-                                  <m:sSubPr>
-                                    <m:ctrlPr>
-                                      <a:rPr lang="en-US" b="1" i="1" noProof="0" smtClean="0">
-                                        <a:latin typeface="Cambria Math" panose="02040503050406030204" pitchFamily="18" charset="0"/>
-                                      </a:rPr>
-                                    </m:ctrlPr>
-                                  </m:sSubPr>
-                                  <m:e>
-                                    <m:r>
-                                      <a:rPr lang="en-US" b="1" i="1" noProof="0" smtClean="0">
-                                        <a:latin typeface="Cambria Math" panose="02040503050406030204" pitchFamily="18" charset="0"/>
-                                      </a:rPr>
-                                      <m:t>𝝈</m:t>
-                                    </m:r>
-                                  </m:e>
-                                  <m:sub>
-                                    <m:r>
-                                      <a:rPr lang="en-US" b="1" i="1" noProof="0" smtClean="0">
-                                        <a:latin typeface="Cambria Math" panose="02040503050406030204" pitchFamily="18" charset="0"/>
-                                      </a:rPr>
-                                      <m:t>𝟐</m:t>
-                                    </m:r>
-                                  </m:sub>
-                                </m:sSub>
-                              </m:oMath>
-                            </m:oMathPara>
-                          </a14:m>
-                          <a:endParaRPr lang="en-US" b="1" noProof="0" dirty="0"/>
-                        </a:p>
-                      </a:txBody>
-                      <a:tcPr/>
-                    </a:tc>
-                    <a:extLst>
-                      <a:ext uri="{0D108BD9-81ED-4DB2-BD59-A6C34878D82A}">
-                        <a16:rowId xmlns:a16="http://schemas.microsoft.com/office/drawing/2014/main" val="235488845"/>
-                      </a:ext>
-                    </a:extLst>
-                  </a:tr>
-                  <a:tr h="370840">
-                    <a:tc>
-                      <a:txBody>
-                        <a:bodyPr/>
-                        <a:lstStyle/>
-                        <a:p>
-                          <a:pPr/>
-                          <a14:m>
-                            <m:oMathPara xmlns:m="http://schemas.openxmlformats.org/officeDocument/2006/math">
-                              <m:oMathParaPr>
-                                <m:jc m:val="centerGroup"/>
-                              </m:oMathParaPr>
-                              <m:oMath xmlns:m="http://schemas.openxmlformats.org/officeDocument/2006/math">
-                                <m:sSubSup>
-                                  <m:sSubSupPr>
-                                    <m:ctrlPr>
-                                      <a:rPr lang="en-US" i="1" noProof="0" smtClean="0">
-                                        <a:latin typeface="Cambria Math" panose="02040503050406030204" pitchFamily="18" charset="0"/>
-                                      </a:rPr>
-                                    </m:ctrlPr>
-                                  </m:sSubSupPr>
-                                  <m:e>
-                                    <m:r>
-                                      <a:rPr lang="en-US" i="1" noProof="0" smtClean="0">
-                                        <a:latin typeface="Cambria Math" panose="02040503050406030204" pitchFamily="18" charset="0"/>
-                                      </a:rPr>
-                                      <m:t>0.326</m:t>
-                                    </m:r>
-                                  </m:e>
-                                  <m:sub>
-                                    <m:r>
-                                      <a:rPr lang="en-US" i="1" noProof="0" smtClean="0">
-                                        <a:latin typeface="Cambria Math" panose="02040503050406030204" pitchFamily="18" charset="0"/>
-                                      </a:rPr>
-                                      <m:t>−0.020</m:t>
-                                    </m:r>
-                                  </m:sub>
-                                  <m:sup>
-                                    <m:r>
-                                      <a:rPr lang="en-US" i="1" noProof="0" smtClean="0">
-                                        <a:latin typeface="Cambria Math" panose="02040503050406030204" pitchFamily="18" charset="0"/>
-                                      </a:rPr>
-                                      <m:t>+0.024</m:t>
-                                    </m:r>
-                                  </m:sup>
-                                </m:sSubSup>
-                              </m:oMath>
-                            </m:oMathPara>
-                          </a14:m>
-                          <a:endParaRPr lang="en-US" noProof="0" dirty="0"/>
-                        </a:p>
-                      </a:txBody>
-                      <a:tcPr/>
-                    </a:tc>
-                    <a:tc>
-                      <a:txBody>
-                        <a:bodyPr/>
-                        <a:lstStyle/>
-                        <a:p>
-                          <a:pPr/>
-                          <a14:m>
-                            <m:oMathPara xmlns:m="http://schemas.openxmlformats.org/officeDocument/2006/math">
-                              <m:oMathParaPr>
-                                <m:jc m:val="centerGroup"/>
-                              </m:oMathParaPr>
-                              <m:oMath xmlns:m="http://schemas.openxmlformats.org/officeDocument/2006/math">
-                                <m:r>
-                                  <a:rPr lang="en-US" i="1" noProof="0" smtClean="0">
-                                    <a:latin typeface="Cambria Math" panose="02040503050406030204" pitchFamily="18" charset="0"/>
-                                  </a:rPr>
-                                  <m:t>−</m:t>
-                                </m:r>
-                                <m:sSubSup>
-                                  <m:sSubSupPr>
-                                    <m:ctrlPr>
-                                      <a:rPr lang="en-US" i="1" noProof="0" smtClean="0">
-                                        <a:latin typeface="Cambria Math" panose="02040503050406030204" pitchFamily="18" charset="0"/>
-                                      </a:rPr>
-                                    </m:ctrlPr>
-                                  </m:sSubSupPr>
-                                  <m:e>
-                                    <m:r>
-                                      <a:rPr lang="en-US" i="1" noProof="0" smtClean="0">
-                                        <a:latin typeface="Cambria Math" panose="02040503050406030204" pitchFamily="18" charset="0"/>
-                                      </a:rPr>
-                                      <m:t>0.18</m:t>
-                                    </m:r>
-                                  </m:e>
-                                  <m:sub>
-                                    <m:r>
-                                      <a:rPr lang="en-US" i="1" noProof="0" smtClean="0">
-                                        <a:latin typeface="Cambria Math" panose="02040503050406030204" pitchFamily="18" charset="0"/>
-                                      </a:rPr>
-                                      <m:t>−0.14</m:t>
-                                    </m:r>
-                                  </m:sub>
-                                  <m:sup>
-                                    <m:r>
-                                      <a:rPr lang="en-US" i="1" noProof="0" smtClean="0">
-                                        <a:latin typeface="Cambria Math" panose="02040503050406030204" pitchFamily="18" charset="0"/>
-                                      </a:rPr>
-                                      <m:t>+0.15</m:t>
-                                    </m:r>
-                                  </m:sup>
-                                </m:sSubSup>
-                              </m:oMath>
-                            </m:oMathPara>
-                          </a14:m>
-                          <a:endParaRPr lang="en-US" noProof="0" dirty="0"/>
-                        </a:p>
-                      </a:txBody>
-                      <a:tcPr/>
-                    </a:tc>
-                    <a:tc>
-                      <a:txBody>
-                        <a:bodyPr/>
-                        <a:lstStyle/>
-                        <a:p>
-                          <a:pPr/>
-                          <a14:m>
-                            <m:oMathPara xmlns:m="http://schemas.openxmlformats.org/officeDocument/2006/math">
-                              <m:oMathParaPr>
-                                <m:jc m:val="centerGroup"/>
-                              </m:oMathParaPr>
-                              <m:oMath xmlns:m="http://schemas.openxmlformats.org/officeDocument/2006/math">
-                                <m:sSubSup>
-                                  <m:sSubSupPr>
-                                    <m:ctrlPr>
-                                      <a:rPr lang="en-US" i="1" noProof="0" smtClean="0">
-                                        <a:latin typeface="Cambria Math" panose="02040503050406030204" pitchFamily="18" charset="0"/>
-                                      </a:rPr>
-                                    </m:ctrlPr>
-                                  </m:sSubSupPr>
-                                  <m:e>
-                                    <m:r>
-                                      <a:rPr lang="en-US" i="1" noProof="0" smtClean="0">
-                                        <a:latin typeface="Cambria Math" panose="02040503050406030204" pitchFamily="18" charset="0"/>
-                                      </a:rPr>
-                                      <m:t>1.48</m:t>
-                                    </m:r>
-                                  </m:e>
-                                  <m:sub>
-                                    <m:r>
-                                      <a:rPr lang="en-US" i="1" noProof="0" smtClean="0">
-                                        <a:latin typeface="Cambria Math" panose="02040503050406030204" pitchFamily="18" charset="0"/>
-                                      </a:rPr>
-                                      <m:t>−0.10</m:t>
-                                    </m:r>
-                                  </m:sub>
-                                  <m:sup>
-                                    <m:r>
-                                      <a:rPr lang="en-US" i="1" noProof="0" smtClean="0">
-                                        <a:latin typeface="Cambria Math" panose="02040503050406030204" pitchFamily="18" charset="0"/>
-                                      </a:rPr>
-                                      <m:t>+0.12</m:t>
-                                    </m:r>
-                                  </m:sup>
-                                </m:sSubSup>
-                              </m:oMath>
-                            </m:oMathPara>
-                          </a14:m>
-                          <a:endParaRPr lang="en-US" noProof="0" dirty="0"/>
-                        </a:p>
-                      </a:txBody>
-                      <a:tcPr/>
-                    </a:tc>
-                    <a:tc>
-                      <a:txBody>
-                        <a:bodyPr/>
-                        <a:lstStyle/>
-                        <a:p>
-                          <a:pPr/>
-                          <a14:m>
-                            <m:oMathPara xmlns:m="http://schemas.openxmlformats.org/officeDocument/2006/math">
-                              <m:oMathParaPr>
-                                <m:jc m:val="centerGroup"/>
-                              </m:oMathParaPr>
-                              <m:oMath xmlns:m="http://schemas.openxmlformats.org/officeDocument/2006/math">
-                                <m:sSubSup>
-                                  <m:sSubSupPr>
-                                    <m:ctrlPr>
-                                      <a:rPr lang="en-US" i="1" noProof="0" smtClean="0">
-                                        <a:latin typeface="Cambria Math" panose="02040503050406030204" pitchFamily="18" charset="0"/>
-                                      </a:rPr>
-                                    </m:ctrlPr>
-                                  </m:sSubSupPr>
-                                  <m:e>
-                                    <m:r>
-                                      <a:rPr lang="en-US" i="1" noProof="0" smtClean="0">
-                                        <a:latin typeface="Cambria Math" panose="02040503050406030204" pitchFamily="18" charset="0"/>
-                                      </a:rPr>
-                                      <m:t>3.56</m:t>
-                                    </m:r>
-                                  </m:e>
-                                  <m:sub>
-                                    <m:r>
-                                      <a:rPr lang="en-US" i="1" noProof="0" smtClean="0">
-                                        <a:latin typeface="Cambria Math" panose="02040503050406030204" pitchFamily="18" charset="0"/>
-                                      </a:rPr>
-                                      <m:t>−0.050</m:t>
-                                    </m:r>
-                                  </m:sub>
-                                  <m:sup>
-                                    <m:r>
-                                      <a:rPr lang="en-US" i="1" noProof="0" smtClean="0">
-                                        <a:latin typeface="Cambria Math" panose="02040503050406030204" pitchFamily="18" charset="0"/>
-                                      </a:rPr>
-                                      <m:t>+0.048</m:t>
-                                    </m:r>
-                                  </m:sup>
-                                </m:sSubSup>
-                              </m:oMath>
-                            </m:oMathPara>
-                          </a14:m>
-                          <a:endParaRPr lang="en-US" noProof="0" dirty="0"/>
-                        </a:p>
-                      </a:txBody>
-                      <a:tcPr/>
-                    </a:tc>
-                    <a:tc>
-                      <a:txBody>
-                        <a:bodyPr/>
-                        <a:lstStyle/>
-                        <a:p>
-                          <a:pPr/>
-                          <a14:m>
-                            <m:oMathPara xmlns:m="http://schemas.openxmlformats.org/officeDocument/2006/math">
-                              <m:oMathParaPr>
-                                <m:jc m:val="centerGroup"/>
-                              </m:oMathParaPr>
-                              <m:oMath xmlns:m="http://schemas.openxmlformats.org/officeDocument/2006/math">
-                                <m:sSubSup>
-                                  <m:sSubSupPr>
-                                    <m:ctrlPr>
-                                      <a:rPr lang="en-US" i="1" noProof="0" smtClean="0">
-                                        <a:latin typeface="Cambria Math" panose="02040503050406030204" pitchFamily="18" charset="0"/>
-                                      </a:rPr>
-                                    </m:ctrlPr>
-                                  </m:sSubSupPr>
-                                  <m:e>
-                                    <m:r>
-                                      <a:rPr lang="en-US" i="1" noProof="0" smtClean="0">
-                                        <a:latin typeface="Cambria Math" panose="02040503050406030204" pitchFamily="18" charset="0"/>
-                                      </a:rPr>
-                                      <m:t>0.982</m:t>
-                                    </m:r>
-                                  </m:e>
-                                  <m:sub>
-                                    <m:r>
-                                      <a:rPr lang="en-US" i="1" noProof="0" smtClean="0">
-                                        <a:latin typeface="Cambria Math" panose="02040503050406030204" pitchFamily="18" charset="0"/>
-                                      </a:rPr>
-                                      <m:t>−0.033</m:t>
-                                    </m:r>
-                                  </m:sub>
-                                  <m:sup>
-                                    <m:r>
-                                      <a:rPr lang="en-US" i="1" noProof="0" smtClean="0">
-                                        <a:latin typeface="Cambria Math" panose="02040503050406030204" pitchFamily="18" charset="0"/>
-                                      </a:rPr>
-                                      <m:t>+0.035</m:t>
-                                    </m:r>
-                                  </m:sup>
-                                </m:sSubSup>
-                              </m:oMath>
-                            </m:oMathPara>
-                          </a14:m>
-                          <a:endParaRPr lang="en-US" noProof="0" dirty="0"/>
-                        </a:p>
-                      </a:txBody>
-                      <a:tcPr/>
-                    </a:tc>
-                    <a:extLst>
-                      <a:ext uri="{0D108BD9-81ED-4DB2-BD59-A6C34878D82A}">
-                        <a16:rowId xmlns:a16="http://schemas.microsoft.com/office/drawing/2014/main" val="3320676961"/>
-                      </a:ext>
-                    </a:extLst>
-                  </a:tr>
-                  <a:tr h="370840">
-                    <a:tc>
-                      <a:txBody>
-                        <a:bodyPr/>
-                        <a:lstStyle/>
-                        <a:p>
-                          <a:endParaRPr lang="en-US" noProof="0" dirty="0"/>
-                        </a:p>
-                      </a:txBody>
-                      <a:tcPr/>
-                    </a:tc>
-                    <a:tc>
-                      <a:txBody>
-                        <a:bodyPr/>
-                        <a:lstStyle/>
-                        <a:p>
-                          <a:endParaRPr lang="en-US" noProof="0" dirty="0"/>
-                        </a:p>
-                      </a:txBody>
-                      <a:tcPr/>
-                    </a:tc>
-                    <a:tc>
-                      <a:txBody>
-                        <a:bodyPr/>
-                        <a:lstStyle/>
-                        <a:p>
-                          <a:endParaRPr lang="en-US" noProof="0" dirty="0"/>
-                        </a:p>
-                      </a:txBody>
-                      <a:tcPr/>
-                    </a:tc>
-                    <a:tc>
-                      <a:txBody>
-                        <a:bodyPr/>
-                        <a:lstStyle/>
-                        <a:p>
-                          <a:endParaRPr lang="en-US" noProof="0" dirty="0"/>
-                        </a:p>
-                      </a:txBody>
-                      <a:tcPr/>
-                    </a:tc>
-                    <a:tc>
-                      <a:txBody>
-                        <a:bodyPr/>
-                        <a:lstStyle/>
-                        <a:p>
-                          <a:endParaRPr lang="en-US" noProof="0" dirty="0"/>
-                        </a:p>
-                      </a:txBody>
-                      <a:tcPr/>
-                    </a:tc>
-                    <a:extLst>
-                      <a:ext uri="{0D108BD9-81ED-4DB2-BD59-A6C34878D82A}">
-                        <a16:rowId xmlns:a16="http://schemas.microsoft.com/office/drawing/2014/main" val="3412315347"/>
-                      </a:ext>
-                    </a:extLst>
-                  </a:tr>
-                </a:tbl>
-              </a:graphicData>
-            </a:graphic>
-          </p:graphicFrame>
-        </mc:Choice>
-        <mc:Fallback>
-          <p:graphicFrame>
-            <p:nvGraphicFramePr>
-              <p:cNvPr id="4" name="Tabella 3">
-                <a:extLst>
-                  <a:ext uri="{FF2B5EF4-FFF2-40B4-BE49-F238E27FC236}">
-                    <a16:creationId xmlns:a16="http://schemas.microsoft.com/office/drawing/2014/main" id="{AE0AB884-D705-0F16-784C-E77C80F014EF}"/>
-                  </a:ext>
-                </a:extLst>
-              </p:cNvPr>
-              <p:cNvGraphicFramePr>
-                <a:graphicFrameLocks noGrp="1"/>
-              </p:cNvGraphicFramePr>
-              <p:nvPr>
-                <p:extLst>
-                  <p:ext uri="{D42A27DB-BD31-4B8C-83A1-F6EECF244321}">
-                    <p14:modId xmlns:p14="http://schemas.microsoft.com/office/powerpoint/2010/main" val="97632566"/>
-                  </p:ext>
-                </p:extLst>
-              </p:nvPr>
-            </p:nvGraphicFramePr>
-            <p:xfrm>
-              <a:off x="1918984" y="2687320"/>
-              <a:ext cx="8128000" cy="1118553"/>
-            </p:xfrm>
-            <a:graphic>
-              <a:graphicData uri="http://schemas.openxmlformats.org/drawingml/2006/table">
-                <a:tbl>
-                  <a:tblPr firstRow="1" bandRow="1">
-                    <a:tableStyleId>{5C22544A-7EE6-4342-B048-85BDC9FD1C3A}</a:tableStyleId>
-                  </a:tblPr>
-                  <a:tblGrid>
-                    <a:gridCol w="1625600">
-                      <a:extLst>
-                        <a:ext uri="{9D8B030D-6E8A-4147-A177-3AD203B41FA5}">
-                          <a16:colId xmlns:a16="http://schemas.microsoft.com/office/drawing/2014/main" val="500066530"/>
-                        </a:ext>
-                      </a:extLst>
-                    </a:gridCol>
-                    <a:gridCol w="1625600">
-                      <a:extLst>
-                        <a:ext uri="{9D8B030D-6E8A-4147-A177-3AD203B41FA5}">
-                          <a16:colId xmlns:a16="http://schemas.microsoft.com/office/drawing/2014/main" val="1819855302"/>
-                        </a:ext>
-                      </a:extLst>
-                    </a:gridCol>
-                    <a:gridCol w="1625600">
-                      <a:extLst>
-                        <a:ext uri="{9D8B030D-6E8A-4147-A177-3AD203B41FA5}">
-                          <a16:colId xmlns:a16="http://schemas.microsoft.com/office/drawing/2014/main" val="4011376178"/>
-                        </a:ext>
-                      </a:extLst>
-                    </a:gridCol>
-                    <a:gridCol w="1625600">
-                      <a:extLst>
-                        <a:ext uri="{9D8B030D-6E8A-4147-A177-3AD203B41FA5}">
-                          <a16:colId xmlns:a16="http://schemas.microsoft.com/office/drawing/2014/main" val="1305298267"/>
-                        </a:ext>
-                      </a:extLst>
-                    </a:gridCol>
-                    <a:gridCol w="1625600">
-                      <a:extLst>
-                        <a:ext uri="{9D8B030D-6E8A-4147-A177-3AD203B41FA5}">
-                          <a16:colId xmlns:a16="http://schemas.microsoft.com/office/drawing/2014/main" val="4118232767"/>
-                        </a:ext>
-                      </a:extLst>
-                    </a:gridCol>
-                  </a:tblGrid>
-                  <a:tr h="370840">
-                    <a:tc>
-                      <a:txBody>
-                        <a:bodyPr/>
-                        <a:lstStyle/>
-                        <a:p>
-                          <a:endParaRPr lang="it-IT"/>
-                        </a:p>
-                      </a:txBody>
-                      <a:tcPr>
-                        <a:blipFill>
-                          <a:blip r:embed="rId2"/>
-                          <a:stretch>
-                            <a:fillRect l="-375" t="-1639" r="-401498" b="-206557"/>
-                          </a:stretch>
-                        </a:blipFill>
-                      </a:tcPr>
-                    </a:tc>
-                    <a:tc>
-                      <a:txBody>
-                        <a:bodyPr/>
-                        <a:lstStyle/>
-                        <a:p>
-                          <a:endParaRPr lang="it-IT"/>
-                        </a:p>
-                      </a:txBody>
-                      <a:tcPr>
-                        <a:blipFill>
-                          <a:blip r:embed="rId2"/>
-                          <a:stretch>
-                            <a:fillRect l="-100375" t="-1639" r="-301498" b="-206557"/>
-                          </a:stretch>
-                        </a:blipFill>
-                      </a:tcPr>
-                    </a:tc>
-                    <a:tc>
-                      <a:txBody>
-                        <a:bodyPr/>
-                        <a:lstStyle/>
-                        <a:p>
-                          <a:endParaRPr lang="it-IT"/>
-                        </a:p>
-                      </a:txBody>
-                      <a:tcPr>
-                        <a:blipFill>
-                          <a:blip r:embed="rId2"/>
-                          <a:stretch>
-                            <a:fillRect l="-200375" t="-1639" r="-201498" b="-206557"/>
-                          </a:stretch>
-                        </a:blipFill>
-                      </a:tcPr>
-                    </a:tc>
-                    <a:tc>
-                      <a:txBody>
-                        <a:bodyPr/>
-                        <a:lstStyle/>
-                        <a:p>
-                          <a:endParaRPr lang="it-IT"/>
-                        </a:p>
-                      </a:txBody>
-                      <a:tcPr>
-                        <a:blipFill>
-                          <a:blip r:embed="rId2"/>
-                          <a:stretch>
-                            <a:fillRect l="-300375" t="-1639" r="-101498" b="-206557"/>
-                          </a:stretch>
-                        </a:blipFill>
-                      </a:tcPr>
-                    </a:tc>
-                    <a:tc>
-                      <a:txBody>
-                        <a:bodyPr/>
-                        <a:lstStyle/>
-                        <a:p>
-                          <a:endParaRPr lang="it-IT"/>
-                        </a:p>
-                      </a:txBody>
-                      <a:tcPr>
-                        <a:blipFill>
-                          <a:blip r:embed="rId2"/>
-                          <a:stretch>
-                            <a:fillRect l="-400375" t="-1639" r="-1498" b="-206557"/>
-                          </a:stretch>
-                        </a:blipFill>
-                      </a:tcPr>
-                    </a:tc>
-                    <a:extLst>
-                      <a:ext uri="{0D108BD9-81ED-4DB2-BD59-A6C34878D82A}">
-                        <a16:rowId xmlns:a16="http://schemas.microsoft.com/office/drawing/2014/main" val="235488845"/>
-                      </a:ext>
-                    </a:extLst>
-                  </a:tr>
-                  <a:tr h="376873">
-                    <a:tc>
-                      <a:txBody>
-                        <a:bodyPr/>
-                        <a:lstStyle/>
-                        <a:p>
-                          <a:endParaRPr lang="it-IT"/>
-                        </a:p>
-                      </a:txBody>
-                      <a:tcPr>
-                        <a:blipFill>
-                          <a:blip r:embed="rId2"/>
-                          <a:stretch>
-                            <a:fillRect l="-375" t="-98413" r="-401498" b="-100000"/>
-                          </a:stretch>
-                        </a:blipFill>
-                      </a:tcPr>
-                    </a:tc>
-                    <a:tc>
-                      <a:txBody>
-                        <a:bodyPr/>
-                        <a:lstStyle/>
-                        <a:p>
-                          <a:endParaRPr lang="it-IT"/>
-                        </a:p>
-                      </a:txBody>
-                      <a:tcPr>
-                        <a:blipFill>
-                          <a:blip r:embed="rId2"/>
-                          <a:stretch>
-                            <a:fillRect l="-100375" t="-98413" r="-301498" b="-100000"/>
-                          </a:stretch>
-                        </a:blipFill>
-                      </a:tcPr>
-                    </a:tc>
-                    <a:tc>
-                      <a:txBody>
-                        <a:bodyPr/>
-                        <a:lstStyle/>
-                        <a:p>
-                          <a:endParaRPr lang="it-IT"/>
-                        </a:p>
-                      </a:txBody>
-                      <a:tcPr>
-                        <a:blipFill>
-                          <a:blip r:embed="rId2"/>
-                          <a:stretch>
-                            <a:fillRect l="-200375" t="-98413" r="-201498" b="-100000"/>
-                          </a:stretch>
-                        </a:blipFill>
-                      </a:tcPr>
-                    </a:tc>
-                    <a:tc>
-                      <a:txBody>
-                        <a:bodyPr/>
-                        <a:lstStyle/>
-                        <a:p>
-                          <a:endParaRPr lang="it-IT"/>
-                        </a:p>
-                      </a:txBody>
-                      <a:tcPr>
-                        <a:blipFill>
-                          <a:blip r:embed="rId2"/>
-                          <a:stretch>
-                            <a:fillRect l="-300375" t="-98413" r="-101498" b="-100000"/>
-                          </a:stretch>
-                        </a:blipFill>
-                      </a:tcPr>
-                    </a:tc>
-                    <a:tc>
-                      <a:txBody>
-                        <a:bodyPr/>
-                        <a:lstStyle/>
-                        <a:p>
-                          <a:endParaRPr lang="it-IT"/>
-                        </a:p>
-                      </a:txBody>
-                      <a:tcPr>
-                        <a:blipFill>
-                          <a:blip r:embed="rId2"/>
-                          <a:stretch>
-                            <a:fillRect l="-400375" t="-98413" r="-1498" b="-100000"/>
-                          </a:stretch>
-                        </a:blipFill>
-                      </a:tcPr>
-                    </a:tc>
-                    <a:extLst>
-                      <a:ext uri="{0D108BD9-81ED-4DB2-BD59-A6C34878D82A}">
-                        <a16:rowId xmlns:a16="http://schemas.microsoft.com/office/drawing/2014/main" val="3320676961"/>
-                      </a:ext>
-                    </a:extLst>
-                  </a:tr>
-                  <a:tr h="370840">
-                    <a:tc>
-                      <a:txBody>
-                        <a:bodyPr/>
-                        <a:lstStyle/>
-                        <a:p>
-                          <a:endParaRPr lang="en-US" noProof="0" dirty="0"/>
-                        </a:p>
-                      </a:txBody>
-                      <a:tcPr/>
-                    </a:tc>
-                    <a:tc>
-                      <a:txBody>
-                        <a:bodyPr/>
-                        <a:lstStyle/>
-                        <a:p>
-                          <a:endParaRPr lang="en-US" noProof="0" dirty="0"/>
-                        </a:p>
-                      </a:txBody>
-                      <a:tcPr/>
-                    </a:tc>
-                    <a:tc>
-                      <a:txBody>
-                        <a:bodyPr/>
-                        <a:lstStyle/>
-                        <a:p>
-                          <a:endParaRPr lang="en-US" noProof="0" dirty="0"/>
-                        </a:p>
-                      </a:txBody>
-                      <a:tcPr/>
-                    </a:tc>
-                    <a:tc>
-                      <a:txBody>
-                        <a:bodyPr/>
-                        <a:lstStyle/>
-                        <a:p>
-                          <a:endParaRPr lang="en-US" noProof="0" dirty="0"/>
-                        </a:p>
-                      </a:txBody>
-                      <a:tcPr/>
-                    </a:tc>
-                    <a:tc>
-                      <a:txBody>
-                        <a:bodyPr/>
-                        <a:lstStyle/>
-                        <a:p>
-                          <a:endParaRPr lang="en-US" noProof="0" dirty="0"/>
-                        </a:p>
-                      </a:txBody>
-                      <a:tcPr/>
-                    </a:tc>
-                    <a:extLst>
-                      <a:ext uri="{0D108BD9-81ED-4DB2-BD59-A6C34878D82A}">
-                        <a16:rowId xmlns:a16="http://schemas.microsoft.com/office/drawing/2014/main" val="3412315347"/>
-                      </a:ext>
-                    </a:extLst>
-                  </a:tr>
-                </a:tbl>
-              </a:graphicData>
-            </a:graphic>
-          </p:graphicFrame>
-        </mc:Fallback>
-      </mc:AlternateContent>
-    </p:spTree>
-    <p:extLst>
-      <p:ext uri="{BB962C8B-B14F-4D97-AF65-F5344CB8AC3E}">
-        <p14:creationId xmlns:p14="http://schemas.microsoft.com/office/powerpoint/2010/main" val="2246216297"/>
-      </p:ext>
-    </p:extLst>
-  </p:cSld>
-  <p:clrMapOvr>
-    <a:masterClrMapping/>
-  </p:clrMapOvr>
-</p:sld>
-</file>
-
-<file path=ppt/slides/slide18.xml><?xml version="1.0" encoding="utf-8"?>
-<p:sld xmlns:a="http://schemas.openxmlformats.org/drawingml/2006/main" xmlns:r="http://schemas.openxmlformats.org/officeDocument/2006/relationships" xmlns:p="http://schemas.openxmlformats.org/presentationml/2006/main">
-  <p:cSld>
-    <p:spTree>
-      <p:nvGrpSpPr>
         <p:cNvPr id="1" name="">
           <a:extLst>
             <a:ext uri="{FF2B5EF4-FFF2-40B4-BE49-F238E27FC236}">
@@ -12531,8 +11526,44 @@
           <a:chExt cx="0" cy="0"/>
         </a:xfrm>
       </p:grpSpPr>
-      <mc:AlternateContent xmlns:mc="http://schemas.openxmlformats.org/markup-compatibility/2006">
-        <mc:Choice xmlns:a14="http://schemas.microsoft.com/office/drawing/2010/main" Requires="a14">
+      <p:pic>
+        <p:nvPicPr>
+          <p:cNvPr id="5" name="Immagine 4">
+            <a:extLst>
+              <a:ext uri="{FF2B5EF4-FFF2-40B4-BE49-F238E27FC236}">
+                <a16:creationId xmlns:a16="http://schemas.microsoft.com/office/drawing/2014/main" id="{9D5EDB21-2A82-6CF9-F1F6-EA5143FC1CF8}"/>
+              </a:ext>
+            </a:extLst>
+          </p:cNvPr>
+          <p:cNvPicPr>
+            <a:picLocks noChangeAspect="1"/>
+          </p:cNvPicPr>
+          <p:nvPr/>
+        </p:nvPicPr>
+        <p:blipFill>
+          <a:blip r:embed="rId2">
+            <a:extLst>
+              <a:ext uri="{28A0092B-C50C-407E-A947-70E740481C1C}">
+                <a14:useLocalDpi xmlns:a14="http://schemas.microsoft.com/office/drawing/2010/main" val="0"/>
+              </a:ext>
+            </a:extLst>
+          </a:blip>
+          <a:stretch>
+            <a:fillRect/>
+          </a:stretch>
+        </p:blipFill>
+        <p:spPr>
+          <a:xfrm>
+            <a:off x="2969231" y="932379"/>
+            <a:ext cx="7900827" cy="5925621"/>
+          </a:xfrm>
+          <a:prstGeom prst="rect">
+            <a:avLst/>
+          </a:prstGeom>
+        </p:spPr>
+      </p:pic>
+      <mc:AlternateContent xmlns:mc="http://schemas.openxmlformats.org/markup-compatibility/2006" xmlns:a14="http://schemas.microsoft.com/office/drawing/2010/main">
+        <mc:Choice Requires="a14">
           <p:sp>
             <p:nvSpPr>
               <p:cNvPr id="4" name="Titolo 1">
@@ -12635,7 +11666,7 @@
             </p:txBody>
           </p:sp>
         </mc:Choice>
-        <mc:Fallback>
+        <mc:Fallback xmlns="">
           <p:sp>
             <p:nvSpPr>
               <p:cNvPr id="4" name="Titolo 1">
@@ -12658,7 +11689,7 @@
                 <a:ext cx="10227120" cy="1235075"/>
               </a:xfrm>
               <a:blipFill>
-                <a:blip r:embed="rId2"/>
+                <a:blip r:embed="rId3"/>
                 <a:stretch>
                   <a:fillRect l="-2384" t="-15271"/>
                 </a:stretch>
@@ -12693,8 +11724,8 @@
         </p:nvSpPr>
         <p:spPr>
           <a:xfrm>
-            <a:off x="642938" y="1517151"/>
-            <a:ext cx="3387047" cy="3139321"/>
+            <a:off x="642938" y="2228671"/>
+            <a:ext cx="2233826" cy="1200329"/>
           </a:xfrm>
           <a:prstGeom prst="rect">
             <a:avLst/>
@@ -12709,64 +11740,8 @@
           <a:p>
             <a:r>
               <a:rPr lang="en-US" noProof="0" dirty="0"/>
-              <a:t>Finally we look at the final model, computed as the median of the models computed on each sample (and not the model on the median values) and we also plot the interval </a:t>
+              <a:t>The final model, so the median of the models computed on each sample</a:t>
             </a:r>
-            <a:r>
-              <a:rPr lang="en-US" noProof="0" dirty="0" err="1"/>
-              <a:t>corrisponding</a:t>
-            </a:r>
-            <a:r>
-              <a:rPr lang="en-US" noProof="0" dirty="0"/>
-              <a:t> to 68% level of confidence. We also show the two </a:t>
-            </a:r>
-            <a:r>
-              <a:rPr lang="en-US" noProof="0" dirty="0" err="1"/>
-              <a:t>separete</a:t>
-            </a:r>
-            <a:r>
-              <a:rPr lang="en-US" noProof="0" dirty="0"/>
-              <a:t> components of the model</a:t>
-            </a:r>
-          </a:p>
-        </p:txBody>
-      </p:sp>
-      <p:sp>
-        <p:nvSpPr>
-          <p:cNvPr id="2" name="CasellaDiTesto 1">
-            <a:extLst>
-              <a:ext uri="{FF2B5EF4-FFF2-40B4-BE49-F238E27FC236}">
-                <a16:creationId xmlns:a16="http://schemas.microsoft.com/office/drawing/2014/main" id="{A813098C-0858-D030-C73E-CCE714DEEA2F}"/>
-              </a:ext>
-            </a:extLst>
-          </p:cNvPr>
-          <p:cNvSpPr txBox="1"/>
-          <p:nvPr/>
-        </p:nvSpPr>
-        <p:spPr>
-          <a:xfrm>
-            <a:off x="6688476" y="2178121"/>
-            <a:ext cx="2630185" cy="369332"/>
-          </a:xfrm>
-          <a:prstGeom prst="rect">
-            <a:avLst/>
-          </a:prstGeom>
-          <a:noFill/>
-        </p:spPr>
-        <p:txBody>
-          <a:bodyPr wrap="square" rtlCol="0">
-            <a:spAutoFit/>
-          </a:bodyPr>
-          <a:lstStyle/>
-          <a:p>
-            <a:r>
-              <a:rPr lang="en-US" noProof="0" dirty="0"/>
-              <a:t>Final model </a:t>
-            </a:r>
-            <a:r>
-              <a:rPr lang="en-US" noProof="0" dirty="0" err="1"/>
-              <a:t>img</a:t>
-            </a:r>
-            <a:endParaRPr lang="en-US" noProof="0" dirty="0"/>
           </a:p>
         </p:txBody>
       </p:sp>
@@ -12783,7 +11758,7 @@
 </p:sld>
 </file>
 
-<file path=ppt/slides/slide19.xml><?xml version="1.0" encoding="utf-8"?>
+<file path=ppt/slides/slide18.xml><?xml version="1.0" encoding="utf-8"?>
 <p:sld xmlns:a="http://schemas.openxmlformats.org/drawingml/2006/main" xmlns:r="http://schemas.openxmlformats.org/officeDocument/2006/relationships" xmlns:p="http://schemas.openxmlformats.org/presentationml/2006/main">
   <p:cSld>
     <p:spTree>
@@ -12806,8 +11781,8 @@
           <a:chExt cx="0" cy="0"/>
         </a:xfrm>
       </p:grpSpPr>
-      <mc:AlternateContent xmlns:mc="http://schemas.openxmlformats.org/markup-compatibility/2006">
-        <mc:Choice xmlns:a14="http://schemas.microsoft.com/office/drawing/2010/main" Requires="a14">
+      <mc:AlternateContent xmlns:mc="http://schemas.openxmlformats.org/markup-compatibility/2006" xmlns:a14="http://schemas.microsoft.com/office/drawing/2010/main">
+        <mc:Choice Requires="a14">
           <p:sp>
             <p:nvSpPr>
               <p:cNvPr id="4" name="Titolo 1">
@@ -12910,7 +11885,7 @@
             </p:txBody>
           </p:sp>
         </mc:Choice>
-        <mc:Fallback>
+        <mc:Fallback xmlns="">
           <p:sp>
             <p:nvSpPr>
               <p:cNvPr id="4" name="Titolo 1">
@@ -12968,8 +11943,8 @@
         </p:nvSpPr>
         <p:spPr>
           <a:xfrm>
-            <a:off x="642938" y="1517151"/>
-            <a:ext cx="3387047" cy="369332"/>
+            <a:off x="642938" y="1339334"/>
+            <a:ext cx="3387047" cy="923330"/>
           </a:xfrm>
           <a:prstGeom prst="rect">
             <a:avLst/>
@@ -12983,8 +11958,16 @@
           <a:lstStyle/>
           <a:p>
             <a:r>
+              <a:rPr lang="en-US" dirty="0"/>
+              <a:t>Now c</a:t>
+            </a:r>
+            <a:r>
+              <a:rPr lang="en-US" noProof="0" dirty="0" err="1"/>
+              <a:t>onsider</a:t>
+            </a:r>
+            <a:r>
               <a:rPr lang="en-US" noProof="0" dirty="0"/>
-              <a:t>Consider </a:t>
+              <a:t> the errors as gaussian errors on each measure</a:t>
             </a:r>
           </a:p>
         </p:txBody>
@@ -12993,6 +11976,110 @@
     <p:extLst>
       <p:ext uri="{BB962C8B-B14F-4D97-AF65-F5344CB8AC3E}">
         <p14:creationId xmlns:p14="http://schemas.microsoft.com/office/powerpoint/2010/main" val="2651039601"/>
+      </p:ext>
+    </p:extLst>
+  </p:cSld>
+  <p:clrMapOvr>
+    <a:masterClrMapping/>
+  </p:clrMapOvr>
+</p:sld>
+</file>
+
+<file path=ppt/slides/slide19.xml><?xml version="1.0" encoding="utf-8"?>
+<p:sld xmlns:a="http://schemas.openxmlformats.org/drawingml/2006/main" xmlns:r="http://schemas.openxmlformats.org/officeDocument/2006/relationships" xmlns:p="http://schemas.openxmlformats.org/presentationml/2006/main">
+  <p:cSld>
+    <p:spTree>
+      <p:nvGrpSpPr>
+        <p:cNvPr id="1" name="">
+          <a:extLst>
+            <a:ext uri="{FF2B5EF4-FFF2-40B4-BE49-F238E27FC236}">
+              <a16:creationId xmlns:a16="http://schemas.microsoft.com/office/drawing/2014/main" id="{94B4B57A-6293-2976-B48B-555FE2F44DE3}"/>
+            </a:ext>
+          </a:extLst>
+        </p:cNvPr>
+        <p:cNvGrpSpPr/>
+        <p:nvPr/>
+      </p:nvGrpSpPr>
+      <p:grpSpPr>
+        <a:xfrm>
+          <a:off x="0" y="0"/>
+          <a:ext cx="0" cy="0"/>
+          <a:chOff x="0" y="0"/>
+          <a:chExt cx="0" cy="0"/>
+        </a:xfrm>
+      </p:grpSpPr>
+      <p:sp>
+        <p:nvSpPr>
+          <p:cNvPr id="2" name="Titolo 1">
+            <a:extLst>
+              <a:ext uri="{FF2B5EF4-FFF2-40B4-BE49-F238E27FC236}">
+                <a16:creationId xmlns:a16="http://schemas.microsoft.com/office/drawing/2014/main" id="{43B18B03-F308-DD92-1281-8B17984DC3E6}"/>
+              </a:ext>
+            </a:extLst>
+          </p:cNvPr>
+          <p:cNvSpPr>
+            <a:spLocks noGrp="1"/>
+          </p:cNvSpPr>
+          <p:nvPr>
+            <p:ph type="title"/>
+          </p:nvPr>
+        </p:nvSpPr>
+        <p:spPr/>
+        <p:txBody>
+          <a:bodyPr/>
+          <a:lstStyle/>
+          <a:p>
+            <a:r>
+              <a:rPr lang="en-US" noProof="0" dirty="0"/>
+              <a:t>Conclusions</a:t>
+            </a:r>
+          </a:p>
+        </p:txBody>
+      </p:sp>
+      <p:sp>
+        <p:nvSpPr>
+          <p:cNvPr id="4" name="Segnaposto contenuto 4">
+            <a:extLst>
+              <a:ext uri="{FF2B5EF4-FFF2-40B4-BE49-F238E27FC236}">
+                <a16:creationId xmlns:a16="http://schemas.microsoft.com/office/drawing/2014/main" id="{F9B62D35-990E-4023-5A62-EB1014B42B8B}"/>
+              </a:ext>
+            </a:extLst>
+          </p:cNvPr>
+          <p:cNvSpPr>
+            <a:spLocks noGrp="1"/>
+          </p:cNvSpPr>
+          <p:nvPr>
+            <p:ph idx="1"/>
+          </p:nvPr>
+        </p:nvSpPr>
+        <p:spPr>
+          <a:xfrm>
+            <a:off x="642746" y="1714500"/>
+            <a:ext cx="9625203" cy="4502149"/>
+          </a:xfrm>
+        </p:spPr>
+        <p:txBody>
+          <a:bodyPr>
+            <a:normAutofit/>
+          </a:bodyPr>
+          <a:lstStyle/>
+          <a:p>
+            <a:pPr>
+              <a:buSzPct val="90000"/>
+              <a:buFont typeface="Wingdings" panose="05000000000000000000" pitchFamily="2" charset="2"/>
+              <a:buChar char="Ø"/>
+            </a:pPr>
+            <a:r>
+              <a:rPr lang="en-US" sz="2400" noProof="0" dirty="0"/>
+              <a:t> </a:t>
+            </a:r>
+          </a:p>
+        </p:txBody>
+      </p:sp>
+    </p:spTree>
+    <p:extLst>
+      <p:ext uri="{BB962C8B-B14F-4D97-AF65-F5344CB8AC3E}">
+        <p14:creationId xmlns:p14="http://schemas.microsoft.com/office/powerpoint/2010/main" val="976120280"/>
       </p:ext>
     </p:extLst>
   </p:cSld>
@@ -13047,8 +12134,8 @@
           </a:p>
         </p:txBody>
       </p:sp>
-      <mc:AlternateContent xmlns:mc="http://schemas.openxmlformats.org/markup-compatibility/2006">
-        <mc:Choice xmlns:a14="http://schemas.microsoft.com/office/drawing/2010/main" Requires="a14">
+      <mc:AlternateContent xmlns:mc="http://schemas.openxmlformats.org/markup-compatibility/2006" xmlns:a14="http://schemas.microsoft.com/office/drawing/2010/main">
+        <mc:Choice Requires="a14">
           <p:sp>
             <p:nvSpPr>
               <p:cNvPr id="5" name="Segnaposto contenuto 4">
@@ -13334,7 +12421,7 @@
             </p:txBody>
           </p:sp>
         </mc:Choice>
-        <mc:Fallback>
+        <mc:Fallback xmlns="">
           <p:sp>
             <p:nvSpPr>
               <p:cNvPr id="5" name="Segnaposto contenuto 4">
@@ -13388,110 +12475,6 @@
 </file>
 
 <file path=ppt/slides/slide20.xml><?xml version="1.0" encoding="utf-8"?>
-<p:sld xmlns:a="http://schemas.openxmlformats.org/drawingml/2006/main" xmlns:r="http://schemas.openxmlformats.org/officeDocument/2006/relationships" xmlns:p="http://schemas.openxmlformats.org/presentationml/2006/main">
-  <p:cSld>
-    <p:spTree>
-      <p:nvGrpSpPr>
-        <p:cNvPr id="1" name="">
-          <a:extLst>
-            <a:ext uri="{FF2B5EF4-FFF2-40B4-BE49-F238E27FC236}">
-              <a16:creationId xmlns:a16="http://schemas.microsoft.com/office/drawing/2014/main" id="{94B4B57A-6293-2976-B48B-555FE2F44DE3}"/>
-            </a:ext>
-          </a:extLst>
-        </p:cNvPr>
-        <p:cNvGrpSpPr/>
-        <p:nvPr/>
-      </p:nvGrpSpPr>
-      <p:grpSpPr>
-        <a:xfrm>
-          <a:off x="0" y="0"/>
-          <a:ext cx="0" cy="0"/>
-          <a:chOff x="0" y="0"/>
-          <a:chExt cx="0" cy="0"/>
-        </a:xfrm>
-      </p:grpSpPr>
-      <p:sp>
-        <p:nvSpPr>
-          <p:cNvPr id="2" name="Titolo 1">
-            <a:extLst>
-              <a:ext uri="{FF2B5EF4-FFF2-40B4-BE49-F238E27FC236}">
-                <a16:creationId xmlns:a16="http://schemas.microsoft.com/office/drawing/2014/main" id="{43B18B03-F308-DD92-1281-8B17984DC3E6}"/>
-              </a:ext>
-            </a:extLst>
-          </p:cNvPr>
-          <p:cNvSpPr>
-            <a:spLocks noGrp="1"/>
-          </p:cNvSpPr>
-          <p:nvPr>
-            <p:ph type="title"/>
-          </p:nvPr>
-        </p:nvSpPr>
-        <p:spPr/>
-        <p:txBody>
-          <a:bodyPr/>
-          <a:lstStyle/>
-          <a:p>
-            <a:r>
-              <a:rPr lang="en-US" noProof="0" dirty="0"/>
-              <a:t>Conclusions</a:t>
-            </a:r>
-          </a:p>
-        </p:txBody>
-      </p:sp>
-      <p:sp>
-        <p:nvSpPr>
-          <p:cNvPr id="4" name="Segnaposto contenuto 4">
-            <a:extLst>
-              <a:ext uri="{FF2B5EF4-FFF2-40B4-BE49-F238E27FC236}">
-                <a16:creationId xmlns:a16="http://schemas.microsoft.com/office/drawing/2014/main" id="{F9B62D35-990E-4023-5A62-EB1014B42B8B}"/>
-              </a:ext>
-            </a:extLst>
-          </p:cNvPr>
-          <p:cNvSpPr>
-            <a:spLocks noGrp="1"/>
-          </p:cNvSpPr>
-          <p:nvPr>
-            <p:ph idx="1"/>
-          </p:nvPr>
-        </p:nvSpPr>
-        <p:spPr>
-          <a:xfrm>
-            <a:off x="642746" y="1714500"/>
-            <a:ext cx="9625203" cy="4502149"/>
-          </a:xfrm>
-        </p:spPr>
-        <p:txBody>
-          <a:bodyPr>
-            <a:normAutofit/>
-          </a:bodyPr>
-          <a:lstStyle/>
-          <a:p>
-            <a:pPr>
-              <a:buSzPct val="90000"/>
-              <a:buFont typeface="Wingdings" panose="05000000000000000000" pitchFamily="2" charset="2"/>
-              <a:buChar char="Ø"/>
-            </a:pPr>
-            <a:r>
-              <a:rPr lang="en-US" sz="2400" noProof="0" dirty="0"/>
-              <a:t> </a:t>
-            </a:r>
-          </a:p>
-        </p:txBody>
-      </p:sp>
-    </p:spTree>
-    <p:extLst>
-      <p:ext uri="{BB962C8B-B14F-4D97-AF65-F5344CB8AC3E}">
-        <p14:creationId xmlns:p14="http://schemas.microsoft.com/office/powerpoint/2010/main" val="976120280"/>
-      </p:ext>
-    </p:extLst>
-  </p:cSld>
-  <p:clrMapOvr>
-    <a:masterClrMapping/>
-  </p:clrMapOvr>
-</p:sld>
-</file>
-
-<file path=ppt/slides/slide21.xml><?xml version="1.0" encoding="utf-8"?>
 <p:sld xmlns:a="http://schemas.openxmlformats.org/drawingml/2006/main" xmlns:r="http://schemas.openxmlformats.org/officeDocument/2006/relationships" xmlns:p="http://schemas.openxmlformats.org/presentationml/2006/main">
   <p:cSld>
     <p:spTree>
@@ -13696,7 +12679,7 @@
 </p:sld>
 </file>
 
-<file path=ppt/slides/slide22.xml><?xml version="1.0" encoding="utf-8"?>
+<file path=ppt/slides/slide21.xml><?xml version="1.0" encoding="utf-8"?>
 <p:sld xmlns:a="http://schemas.openxmlformats.org/drawingml/2006/main" xmlns:r="http://schemas.openxmlformats.org/officeDocument/2006/relationships" xmlns:p="http://schemas.openxmlformats.org/presentationml/2006/main">
   <p:cSld>
     <p:spTree>
@@ -13847,8 +12830,8 @@
           </a:p>
         </p:txBody>
       </p:sp>
-      <mc:AlternateContent xmlns:mc="http://schemas.openxmlformats.org/markup-compatibility/2006">
-        <mc:Choice xmlns:a14="http://schemas.microsoft.com/office/drawing/2010/main" Requires="a14">
+      <mc:AlternateContent xmlns:mc="http://schemas.openxmlformats.org/markup-compatibility/2006" xmlns:a14="http://schemas.microsoft.com/office/drawing/2010/main">
+        <mc:Choice Requires="a14">
           <p:sp>
             <p:nvSpPr>
               <p:cNvPr id="5" name="CasellaDiTesto 4">
@@ -13953,7 +12936,7 @@
             </p:txBody>
           </p:sp>
         </mc:Choice>
-        <mc:Fallback>
+        <mc:Fallback xmlns="">
           <p:sp>
             <p:nvSpPr>
               <p:cNvPr id="5" name="CasellaDiTesto 4">
@@ -14072,8 +13055,8 @@
           </a:p>
         </p:txBody>
       </p:sp>
-      <mc:AlternateContent xmlns:mc="http://schemas.openxmlformats.org/markup-compatibility/2006">
-        <mc:Choice xmlns:a14="http://schemas.microsoft.com/office/drawing/2010/main" Requires="a14">
+      <mc:AlternateContent xmlns:mc="http://schemas.openxmlformats.org/markup-compatibility/2006" xmlns:a14="http://schemas.microsoft.com/office/drawing/2010/main">
+        <mc:Choice Requires="a14">
           <p:sp>
             <p:nvSpPr>
               <p:cNvPr id="8" name="CasellaDiTesto 7">
@@ -14131,7 +13114,7 @@
             </p:txBody>
           </p:sp>
         </mc:Choice>
-        <mc:Fallback>
+        <mc:Fallback xmlns="">
           <p:sp>
             <p:nvSpPr>
               <p:cNvPr id="8" name="CasellaDiTesto 7">
@@ -14277,8 +13260,8 @@
           </a:prstGeom>
         </p:spPr>
       </p:pic>
-      <mc:AlternateContent xmlns:mc="http://schemas.openxmlformats.org/markup-compatibility/2006">
-        <mc:Choice xmlns:a14="http://schemas.microsoft.com/office/drawing/2010/main" Requires="a14">
+      <mc:AlternateContent xmlns:mc="http://schemas.openxmlformats.org/markup-compatibility/2006" xmlns:a14="http://schemas.microsoft.com/office/drawing/2010/main">
+        <mc:Choice Requires="a14">
           <p:sp>
             <p:nvSpPr>
               <p:cNvPr id="2" name="Titolo 1">
@@ -14374,7 +13357,7 @@
             </p:txBody>
           </p:sp>
         </mc:Choice>
-        <mc:Fallback>
+        <mc:Fallback xmlns="">
           <p:sp>
             <p:nvSpPr>
               <p:cNvPr id="2" name="Titolo 1">
@@ -14414,8 +13397,8 @@
           </p:sp>
         </mc:Fallback>
       </mc:AlternateContent>
-      <mc:AlternateContent xmlns:mc="http://schemas.openxmlformats.org/markup-compatibility/2006">
-        <mc:Choice xmlns:a14="http://schemas.microsoft.com/office/drawing/2010/main" Requires="a14">
+      <mc:AlternateContent xmlns:mc="http://schemas.openxmlformats.org/markup-compatibility/2006" xmlns:a14="http://schemas.microsoft.com/office/drawing/2010/main">
+        <mc:Choice Requires="a14">
           <p:sp>
             <p:nvSpPr>
               <p:cNvPr id="4" name="CasellaDiTesto 3">
@@ -14562,7 +13545,7 @@
             </p:txBody>
           </p:sp>
         </mc:Choice>
-        <mc:Fallback>
+        <mc:Fallback xmlns="">
           <p:sp>
             <p:nvSpPr>
               <p:cNvPr id="4" name="CasellaDiTesto 3">
@@ -14607,8 +13590,8 @@
           </p:sp>
         </mc:Fallback>
       </mc:AlternateContent>
-      <mc:AlternateContent xmlns:mc="http://schemas.openxmlformats.org/markup-compatibility/2006">
-        <mc:Choice xmlns:a14="http://schemas.microsoft.com/office/drawing/2010/main" Requires="a14">
+      <mc:AlternateContent xmlns:mc="http://schemas.openxmlformats.org/markup-compatibility/2006" xmlns:a14="http://schemas.microsoft.com/office/drawing/2010/main">
+        <mc:Choice Requires="a14">
           <p:sp>
             <p:nvSpPr>
               <p:cNvPr id="5" name="CasellaDiTesto 4">
@@ -14673,7 +13656,7 @@
             </p:txBody>
           </p:sp>
         </mc:Choice>
-        <mc:Fallback>
+        <mc:Fallback xmlns="">
           <p:sp>
             <p:nvSpPr>
               <p:cNvPr id="5" name="CasellaDiTesto 4">
@@ -14718,8 +13701,8 @@
           </p:sp>
         </mc:Fallback>
       </mc:AlternateContent>
-      <mc:AlternateContent xmlns:mc="http://schemas.openxmlformats.org/markup-compatibility/2006">
-        <mc:Choice xmlns:a14="http://schemas.microsoft.com/office/drawing/2010/main" Requires="a14">
+      <mc:AlternateContent xmlns:mc="http://schemas.openxmlformats.org/markup-compatibility/2006" xmlns:a14="http://schemas.microsoft.com/office/drawing/2010/main">
+        <mc:Choice Requires="a14">
           <p:sp>
             <p:nvSpPr>
               <p:cNvPr id="6" name="CasellaDiTesto 5">
@@ -14797,7 +13780,7 @@
             </p:txBody>
           </p:sp>
         </mc:Choice>
-        <mc:Fallback>
+        <mc:Fallback xmlns="">
           <p:sp>
             <p:nvSpPr>
               <p:cNvPr id="6" name="CasellaDiTesto 5">
@@ -14889,8 +13872,8 @@
           </a:p>
         </p:txBody>
       </p:sp>
-      <mc:AlternateContent xmlns:mc="http://schemas.openxmlformats.org/markup-compatibility/2006">
-        <mc:Choice xmlns:a14="http://schemas.microsoft.com/office/drawing/2010/main" Requires="a14">
+      <mc:AlternateContent xmlns:mc="http://schemas.openxmlformats.org/markup-compatibility/2006" xmlns:a14="http://schemas.microsoft.com/office/drawing/2010/main">
+        <mc:Choice Requires="a14">
           <p:sp>
             <p:nvSpPr>
               <p:cNvPr id="12" name="CasellaDiTesto 11">
@@ -14990,7 +13973,7 @@
             </p:txBody>
           </p:sp>
         </mc:Choice>
-        <mc:Fallback>
+        <mc:Fallback xmlns="">
           <p:sp>
             <p:nvSpPr>
               <p:cNvPr id="12" name="CasellaDiTesto 11">
@@ -15107,8 +14090,8 @@
           <a:chExt cx="0" cy="0"/>
         </a:xfrm>
       </p:grpSpPr>
-      <mc:AlternateContent xmlns:mc="http://schemas.openxmlformats.org/markup-compatibility/2006">
-        <mc:Choice xmlns:a14="http://schemas.microsoft.com/office/drawing/2010/main" Requires="a14">
+      <mc:AlternateContent xmlns:mc="http://schemas.openxmlformats.org/markup-compatibility/2006" xmlns:a14="http://schemas.microsoft.com/office/drawing/2010/main">
+        <mc:Choice Requires="a14">
           <p:sp>
             <p:nvSpPr>
               <p:cNvPr id="4" name="Titolo 1">
@@ -15209,7 +14192,7 @@
             </p:txBody>
           </p:sp>
         </mc:Choice>
-        <mc:Fallback>
+        <mc:Fallback xmlns="">
           <p:sp>
             <p:nvSpPr>
               <p:cNvPr id="4" name="Titolo 1">
@@ -15253,8 +14236,8 @@
           </p:sp>
         </mc:Fallback>
       </mc:AlternateContent>
-      <mc:AlternateContent xmlns:mc="http://schemas.openxmlformats.org/markup-compatibility/2006">
-        <mc:Choice xmlns:a14="http://schemas.microsoft.com/office/drawing/2010/main" Requires="a14">
+      <mc:AlternateContent xmlns:mc="http://schemas.openxmlformats.org/markup-compatibility/2006" xmlns:a14="http://schemas.microsoft.com/office/drawing/2010/main">
+        <mc:Choice Requires="a14">
           <p:sp>
             <p:nvSpPr>
               <p:cNvPr id="5" name="CasellaDiTesto 4">
@@ -15680,7 +14663,7 @@
             </p:txBody>
           </p:sp>
         </mc:Choice>
-        <mc:Fallback>
+        <mc:Fallback xmlns="">
           <p:sp>
             <p:nvSpPr>
               <p:cNvPr id="5" name="CasellaDiTesto 4">
@@ -15760,8 +14743,8 @@
           </a:p>
         </p:txBody>
       </p:sp>
-      <mc:AlternateContent xmlns:mc="http://schemas.openxmlformats.org/markup-compatibility/2006">
-        <mc:Choice xmlns:a14="http://schemas.microsoft.com/office/drawing/2010/main" Requires="a14">
+      <mc:AlternateContent xmlns:mc="http://schemas.openxmlformats.org/markup-compatibility/2006" xmlns:a14="http://schemas.microsoft.com/office/drawing/2010/main">
+        <mc:Choice Requires="a14">
           <p:sp>
             <p:nvSpPr>
               <p:cNvPr id="7" name="CasellaDiTesto 6">
@@ -15994,7 +14977,7 @@
             </p:txBody>
           </p:sp>
         </mc:Choice>
-        <mc:Fallback>
+        <mc:Fallback xmlns="">
           <p:sp>
             <p:nvSpPr>
               <p:cNvPr id="7" name="CasellaDiTesto 6">
@@ -16075,8 +15058,8 @@
           <a:chExt cx="0" cy="0"/>
         </a:xfrm>
       </p:grpSpPr>
-      <mc:AlternateContent xmlns:mc="http://schemas.openxmlformats.org/markup-compatibility/2006">
-        <mc:Choice xmlns:a14="http://schemas.microsoft.com/office/drawing/2010/main" Requires="a14">
+      <mc:AlternateContent xmlns:mc="http://schemas.openxmlformats.org/markup-compatibility/2006" xmlns:a14="http://schemas.microsoft.com/office/drawing/2010/main">
+        <mc:Choice Requires="a14">
           <p:sp>
             <p:nvSpPr>
               <p:cNvPr id="4" name="Titolo 1">
@@ -16179,7 +15162,7 @@
             </p:txBody>
           </p:sp>
         </mc:Choice>
-        <mc:Fallback>
+        <mc:Fallback xmlns="">
           <p:sp>
             <p:nvSpPr>
               <p:cNvPr id="4" name="Titolo 1">
@@ -16223,8 +15206,8 @@
           </p:sp>
         </mc:Fallback>
       </mc:AlternateContent>
-      <mc:AlternateContent xmlns:mc="http://schemas.openxmlformats.org/markup-compatibility/2006">
-        <mc:Choice xmlns:a14="http://schemas.microsoft.com/office/drawing/2010/main" Requires="a14">
+      <mc:AlternateContent xmlns:mc="http://schemas.openxmlformats.org/markup-compatibility/2006" xmlns:a14="http://schemas.microsoft.com/office/drawing/2010/main">
+        <mc:Choice Requires="a14">
           <p:sp>
             <p:nvSpPr>
               <p:cNvPr id="2" name="CasellaDiTesto 1">
@@ -16381,7 +15364,7 @@
             </p:txBody>
           </p:sp>
         </mc:Choice>
-        <mc:Fallback>
+        <mc:Fallback xmlns="">
           <p:sp>
             <p:nvSpPr>
               <p:cNvPr id="2" name="CasellaDiTesto 1">
@@ -16426,8 +15409,8 @@
           </p:sp>
         </mc:Fallback>
       </mc:AlternateContent>
-      <mc:AlternateContent xmlns:mc="http://schemas.openxmlformats.org/markup-compatibility/2006">
-        <mc:Choice xmlns:a14="http://schemas.microsoft.com/office/drawing/2010/main" Requires="a14">
+      <mc:AlternateContent xmlns:mc="http://schemas.openxmlformats.org/markup-compatibility/2006" xmlns:a14="http://schemas.microsoft.com/office/drawing/2010/main">
+        <mc:Choice Requires="a14">
           <p:sp>
             <p:nvSpPr>
               <p:cNvPr id="3" name="CasellaDiTesto 2">
@@ -16620,7 +15603,7 @@
             </p:txBody>
           </p:sp>
         </mc:Choice>
-        <mc:Fallback>
+        <mc:Fallback xmlns="">
           <p:sp>
             <p:nvSpPr>
               <p:cNvPr id="3" name="CasellaDiTesto 2">
@@ -16700,8 +15683,8 @@
           </a:p>
         </p:txBody>
       </p:sp>
-      <mc:AlternateContent xmlns:mc="http://schemas.openxmlformats.org/markup-compatibility/2006">
-        <mc:Choice xmlns:a14="http://schemas.microsoft.com/office/drawing/2010/main" Requires="a14">
+      <mc:AlternateContent xmlns:mc="http://schemas.openxmlformats.org/markup-compatibility/2006" xmlns:a14="http://schemas.microsoft.com/office/drawing/2010/main">
+        <mc:Choice Requires="a14">
           <p:sp>
             <p:nvSpPr>
               <p:cNvPr id="7" name="CasellaDiTesto 6">
@@ -16981,7 +15964,7 @@
             </p:txBody>
           </p:sp>
         </mc:Choice>
-        <mc:Fallback>
+        <mc:Fallback xmlns="">
           <p:sp>
             <p:nvSpPr>
               <p:cNvPr id="7" name="CasellaDiTesto 6">
@@ -17324,8 +16307,8 @@
           <a:chExt cx="0" cy="0"/>
         </a:xfrm>
       </p:grpSpPr>
-      <mc:AlternateContent xmlns:mc="http://schemas.openxmlformats.org/markup-compatibility/2006">
-        <mc:Choice xmlns:a14="http://schemas.microsoft.com/office/drawing/2010/main" Requires="a14">
+      <mc:AlternateContent xmlns:mc="http://schemas.openxmlformats.org/markup-compatibility/2006" xmlns:a14="http://schemas.microsoft.com/office/drawing/2010/main">
+        <mc:Choice Requires="a14">
           <p:sp>
             <p:nvSpPr>
               <p:cNvPr id="4" name="Titolo 1">
@@ -17428,7 +16411,7 @@
             </p:txBody>
           </p:sp>
         </mc:Choice>
-        <mc:Fallback>
+        <mc:Fallback xmlns="">
           <p:sp>
             <p:nvSpPr>
               <p:cNvPr id="4" name="Titolo 1">
@@ -17472,8 +16455,8 @@
           </p:sp>
         </mc:Fallback>
       </mc:AlternateContent>
-      <mc:AlternateContent xmlns:mc="http://schemas.openxmlformats.org/markup-compatibility/2006">
-        <mc:Choice xmlns:a14="http://schemas.microsoft.com/office/drawing/2010/main" Requires="a14">
+      <mc:AlternateContent xmlns:mc="http://schemas.openxmlformats.org/markup-compatibility/2006" xmlns:a14="http://schemas.microsoft.com/office/drawing/2010/main">
+        <mc:Choice Requires="a14">
           <p:sp>
             <p:nvSpPr>
               <p:cNvPr id="3" name="CasellaDiTesto 2">
@@ -17548,7 +16531,7 @@
             </p:txBody>
           </p:sp>
         </mc:Choice>
-        <mc:Fallback>
+        <mc:Fallback xmlns="">
           <p:sp>
             <p:nvSpPr>
               <p:cNvPr id="3" name="CasellaDiTesto 2">
@@ -17663,8 +16646,8 @@
           </a:p>
         </p:txBody>
       </p:sp>
-      <mc:AlternateContent xmlns:mc="http://schemas.openxmlformats.org/markup-compatibility/2006">
-        <mc:Choice xmlns:a14="http://schemas.microsoft.com/office/drawing/2010/main" Requires="a14">
+      <mc:AlternateContent xmlns:mc="http://schemas.openxmlformats.org/markup-compatibility/2006" xmlns:a14="http://schemas.microsoft.com/office/drawing/2010/main">
+        <mc:Choice Requires="a14">
           <p:sp>
             <p:nvSpPr>
               <p:cNvPr id="7" name="CasellaDiTesto 6">
@@ -17726,7 +16709,7 @@
             </p:txBody>
           </p:sp>
         </mc:Choice>
-        <mc:Fallback>
+        <mc:Fallback xmlns="">
           <p:sp>
             <p:nvSpPr>
               <p:cNvPr id="7" name="CasellaDiTesto 6">
@@ -17771,8 +16754,8 @@
           </p:sp>
         </mc:Fallback>
       </mc:AlternateContent>
-      <mc:AlternateContent xmlns:mc="http://schemas.openxmlformats.org/markup-compatibility/2006">
-        <mc:Choice xmlns:a14="http://schemas.microsoft.com/office/drawing/2010/main" Requires="a14">
+      <mc:AlternateContent xmlns:mc="http://schemas.openxmlformats.org/markup-compatibility/2006" xmlns:a14="http://schemas.microsoft.com/office/drawing/2010/main">
+        <mc:Choice Requires="a14">
           <p:sp>
             <p:nvSpPr>
               <p:cNvPr id="8" name="CasellaDiTesto 7">
@@ -17853,7 +16836,7 @@
             </p:txBody>
           </p:sp>
         </mc:Choice>
-        <mc:Fallback>
+        <mc:Fallback xmlns="">
           <p:sp>
             <p:nvSpPr>
               <p:cNvPr id="8" name="CasellaDiTesto 7">
@@ -17941,8 +16924,8 @@
           </a:p>
         </p:txBody>
       </p:sp>
-      <mc:AlternateContent xmlns:mc="http://schemas.openxmlformats.org/markup-compatibility/2006">
-        <mc:Choice xmlns:a14="http://schemas.microsoft.com/office/drawing/2010/main" Requires="a14">
+      <mc:AlternateContent xmlns:mc="http://schemas.openxmlformats.org/markup-compatibility/2006" xmlns:a14="http://schemas.microsoft.com/office/drawing/2010/main">
+        <mc:Choice Requires="a14">
           <p:sp>
             <p:nvSpPr>
               <p:cNvPr id="10" name="CasellaDiTesto 9">
@@ -17998,7 +16981,7 @@
             </p:txBody>
           </p:sp>
         </mc:Choice>
-        <mc:Fallback>
+        <mc:Fallback xmlns="">
           <p:sp>
             <p:nvSpPr>
               <p:cNvPr id="10" name="CasellaDiTesto 9">
@@ -18043,8 +17026,8 @@
           </p:sp>
         </mc:Fallback>
       </mc:AlternateContent>
-      <mc:AlternateContent xmlns:mc="http://schemas.openxmlformats.org/markup-compatibility/2006">
-        <mc:Choice xmlns:a14="http://schemas.microsoft.com/office/drawing/2010/main" Requires="a14">
+      <mc:AlternateContent xmlns:mc="http://schemas.openxmlformats.org/markup-compatibility/2006" xmlns:a14="http://schemas.microsoft.com/office/drawing/2010/main">
+        <mc:Choice Requires="a14">
           <p:sp>
             <p:nvSpPr>
               <p:cNvPr id="11" name="CasellaDiTesto 10">
@@ -18125,7 +17108,7 @@
             </p:txBody>
           </p:sp>
         </mc:Choice>
-        <mc:Fallback>
+        <mc:Fallback xmlns="">
           <p:sp>
             <p:nvSpPr>
               <p:cNvPr id="11" name="CasellaDiTesto 10">
@@ -18170,8 +17153,8 @@
           </p:sp>
         </mc:Fallback>
       </mc:AlternateContent>
-      <mc:AlternateContent xmlns:mc="http://schemas.openxmlformats.org/markup-compatibility/2006">
-        <mc:Choice xmlns:a14="http://schemas.microsoft.com/office/drawing/2010/main" Requires="a14">
+      <mc:AlternateContent xmlns:mc="http://schemas.openxmlformats.org/markup-compatibility/2006" xmlns:a14="http://schemas.microsoft.com/office/drawing/2010/main">
+        <mc:Choice Requires="a14">
           <p:sp>
             <p:nvSpPr>
               <p:cNvPr id="12" name="CasellaDiTesto 11">
@@ -18242,7 +17225,7 @@
             </p:txBody>
           </p:sp>
         </mc:Choice>
-        <mc:Fallback>
+        <mc:Fallback xmlns="">
           <p:sp>
             <p:nvSpPr>
               <p:cNvPr id="12" name="CasellaDiTesto 11">
@@ -18323,8 +17306,8 @@
           <a:chExt cx="0" cy="0"/>
         </a:xfrm>
       </p:grpSpPr>
-      <mc:AlternateContent xmlns:mc="http://schemas.openxmlformats.org/markup-compatibility/2006">
-        <mc:Choice xmlns:a14="http://schemas.microsoft.com/office/drawing/2010/main" Requires="a14">
+      <mc:AlternateContent xmlns:mc="http://schemas.openxmlformats.org/markup-compatibility/2006" xmlns:a14="http://schemas.microsoft.com/office/drawing/2010/main">
+        <mc:Choice Requires="a14">
           <p:sp>
             <p:nvSpPr>
               <p:cNvPr id="4" name="Titolo 1">
@@ -18427,7 +17410,7 @@
             </p:txBody>
           </p:sp>
         </mc:Choice>
-        <mc:Fallback>
+        <mc:Fallback xmlns="">
           <p:sp>
             <p:nvSpPr>
               <p:cNvPr id="4" name="Titolo 1">
@@ -18506,8 +17489,8 @@
           </a:p>
         </p:txBody>
       </p:sp>
-      <mc:AlternateContent xmlns:mc="http://schemas.openxmlformats.org/markup-compatibility/2006">
-        <mc:Choice xmlns:a14="http://schemas.microsoft.com/office/drawing/2010/main" Requires="a14">
+      <mc:AlternateContent xmlns:mc="http://schemas.openxmlformats.org/markup-compatibility/2006" xmlns:a14="http://schemas.microsoft.com/office/drawing/2010/main">
+        <mc:Choice Requires="a14">
           <p:sp>
             <p:nvSpPr>
               <p:cNvPr id="2" name="CasellaDiTesto 1">
@@ -18588,7 +17571,7 @@
             </p:txBody>
           </p:sp>
         </mc:Choice>
-        <mc:Fallback>
+        <mc:Fallback xmlns="">
           <p:sp>
             <p:nvSpPr>
               <p:cNvPr id="2" name="CasellaDiTesto 1">
@@ -18668,8 +17651,8 @@
           </a:p>
         </p:txBody>
       </p:sp>
-      <mc:AlternateContent xmlns:mc="http://schemas.openxmlformats.org/markup-compatibility/2006">
-        <mc:Choice xmlns:a14="http://schemas.microsoft.com/office/drawing/2010/main" Requires="a14">
+      <mc:AlternateContent xmlns:mc="http://schemas.openxmlformats.org/markup-compatibility/2006" xmlns:a14="http://schemas.microsoft.com/office/drawing/2010/main">
+        <mc:Choice Requires="a14">
           <p:sp>
             <p:nvSpPr>
               <p:cNvPr id="6" name="CasellaDiTesto 5">
@@ -18862,7 +17845,7 @@
             </p:txBody>
           </p:sp>
         </mc:Choice>
-        <mc:Fallback>
+        <mc:Fallback xmlns="">
           <p:sp>
             <p:nvSpPr>
               <p:cNvPr id="6" name="CasellaDiTesto 5">
@@ -18907,8 +17890,8 @@
           </p:sp>
         </mc:Fallback>
       </mc:AlternateContent>
-      <mc:AlternateContent xmlns:mc="http://schemas.openxmlformats.org/markup-compatibility/2006">
-        <mc:Choice xmlns:a14="http://schemas.microsoft.com/office/drawing/2010/main" Requires="a14">
+      <mc:AlternateContent xmlns:mc="http://schemas.openxmlformats.org/markup-compatibility/2006" xmlns:a14="http://schemas.microsoft.com/office/drawing/2010/main">
+        <mc:Choice Requires="a14">
           <p:sp>
             <p:nvSpPr>
               <p:cNvPr id="7" name="CasellaDiTesto 6">
@@ -19011,7 +17994,7 @@
             </p:txBody>
           </p:sp>
         </mc:Choice>
-        <mc:Fallback>
+        <mc:Fallback xmlns="">
           <p:sp>
             <p:nvSpPr>
               <p:cNvPr id="7" name="CasellaDiTesto 6">
@@ -19056,8 +18039,8 @@
           </p:sp>
         </mc:Fallback>
       </mc:AlternateContent>
-      <mc:AlternateContent xmlns:mc="http://schemas.openxmlformats.org/markup-compatibility/2006">
-        <mc:Choice xmlns:a14="http://schemas.microsoft.com/office/drawing/2010/main" Requires="a14">
+      <mc:AlternateContent xmlns:mc="http://schemas.openxmlformats.org/markup-compatibility/2006" xmlns:a14="http://schemas.microsoft.com/office/drawing/2010/main">
+        <mc:Choice Requires="a14">
           <p:sp>
             <p:nvSpPr>
               <p:cNvPr id="8" name="CasellaDiTesto 7">
@@ -19328,7 +18311,7 @@
             </p:txBody>
           </p:sp>
         </mc:Choice>
-        <mc:Fallback>
+        <mc:Fallback xmlns="">
           <p:sp>
             <p:nvSpPr>
               <p:cNvPr id="8" name="CasellaDiTesto 7">
@@ -19408,8 +18391,8 @@
           </a:p>
         </p:txBody>
       </p:sp>
-      <mc:AlternateContent xmlns:mc="http://schemas.openxmlformats.org/markup-compatibility/2006">
-        <mc:Choice xmlns:a14="http://schemas.microsoft.com/office/drawing/2010/main" Requires="a14">
+      <mc:AlternateContent xmlns:mc="http://schemas.openxmlformats.org/markup-compatibility/2006" xmlns:a14="http://schemas.microsoft.com/office/drawing/2010/main">
+        <mc:Choice Requires="a14">
           <p:sp>
             <p:nvSpPr>
               <p:cNvPr id="10" name="CasellaDiTesto 9">
@@ -19571,7 +18554,7 @@
             </p:txBody>
           </p:sp>
         </mc:Choice>
-        <mc:Fallback>
+        <mc:Fallback xmlns="">
           <p:sp>
             <p:nvSpPr>
               <p:cNvPr id="10" name="CasellaDiTesto 9">
@@ -19792,8 +18775,8 @@
           </a:p>
         </p:txBody>
       </p:sp>
-      <mc:AlternateContent xmlns:mc="http://schemas.openxmlformats.org/markup-compatibility/2006">
-        <mc:Choice xmlns:a14="http://schemas.microsoft.com/office/drawing/2010/main" Requires="a14">
+      <mc:AlternateContent xmlns:mc="http://schemas.openxmlformats.org/markup-compatibility/2006" xmlns:a14="http://schemas.microsoft.com/office/drawing/2010/main">
+        <mc:Choice Requires="a14">
           <p:sp>
             <p:nvSpPr>
               <p:cNvPr id="8" name="CasellaDiTesto 7">
@@ -19858,7 +18841,7 @@
             </p:txBody>
           </p:sp>
         </mc:Choice>
-        <mc:Fallback>
+        <mc:Fallback xmlns="">
           <p:sp>
             <p:nvSpPr>
               <p:cNvPr id="8" name="CasellaDiTesto 7">
@@ -20000,8 +18983,8 @@
               <a:chExt cx="3503487" cy="935122"/>
             </a:xfrm>
           </p:grpSpPr>
-          <mc:AlternateContent xmlns:mc="http://schemas.openxmlformats.org/markup-compatibility/2006">
-            <mc:Choice xmlns:a14="http://schemas.microsoft.com/office/drawing/2010/main" Requires="a14">
+          <mc:AlternateContent xmlns:mc="http://schemas.openxmlformats.org/markup-compatibility/2006" xmlns:a14="http://schemas.microsoft.com/office/drawing/2010/main">
+            <mc:Choice Requires="a14">
               <p:sp>
                 <p:nvSpPr>
                   <p:cNvPr id="24" name="CasellaDiTesto 23">
@@ -20125,7 +19108,7 @@
                 </p:txBody>
               </p:sp>
             </mc:Choice>
-            <mc:Fallback>
+            <mc:Fallback xmlns="">
               <p:sp>
                 <p:nvSpPr>
                   <p:cNvPr id="24" name="CasellaDiTesto 23">
@@ -20248,8 +19231,8 @@
           </a:p>
         </p:txBody>
       </p:sp>
-      <mc:AlternateContent xmlns:mc="http://schemas.openxmlformats.org/markup-compatibility/2006">
-        <mc:Choice xmlns:a14="http://schemas.microsoft.com/office/drawing/2010/main" Requires="a14">
+      <mc:AlternateContent xmlns:mc="http://schemas.openxmlformats.org/markup-compatibility/2006" xmlns:a14="http://schemas.microsoft.com/office/drawing/2010/main">
+        <mc:Choice Requires="a14">
           <p:sp>
             <p:nvSpPr>
               <p:cNvPr id="31" name="CasellaDiTesto 30">
@@ -20307,7 +19290,7 @@
             </p:txBody>
           </p:sp>
         </mc:Choice>
-        <mc:Fallback>
+        <mc:Fallback xmlns="">
           <p:sp>
             <p:nvSpPr>
               <p:cNvPr id="31" name="CasellaDiTesto 30">
